--- a/docs/RECAP_STEAM_RLToken.pptx
+++ b/docs/RECAP_STEAM_RLToken.pptx
@@ -5420,14 +5420,6 @@
 <file path=ppt/slides/slide1.xml><?xml version="1.0" encoding="utf-8"?>
 <p:sld xmlns:a="http://schemas.openxmlformats.org/drawingml/2006/main" xmlns:p="http://schemas.openxmlformats.org/presentationml/2006/main" xmlns:r="http://schemas.openxmlformats.org/officeDocument/2006/relationships">
   <p:cSld>
-    <p:bg>
-      <p:bgPr>
-        <a:solidFill>
-          <a:srgbClr val="14243B"/>
-        </a:solidFill>
-        <a:effectLst/>
-      </p:bgPr>
-    </p:bg>
     <p:spTree>
       <p:nvGrpSpPr>
         <p:cNvPr id="1" name=""/>
@@ -5435,16 +5427,83 @@
         <p:nvPr/>
       </p:nvGrpSpPr>
       <p:grpSpPr/>
-      <p:sp>
-        <p:nvSpPr>
-          <p:cNvPr id="2" name="title"/>
+      <p:pic>
+        <p:nvPicPr>
+          <p:cNvPr id="2" name="background (blue mesh)" descr="title_bg_blue_mesh.jpg"/>
+          <p:cNvPicPr>
+            <a:picLocks noChangeAspect="1"/>
+          </p:cNvPicPr>
+          <p:nvPr/>
+        </p:nvPicPr>
+        <p:blipFill>
+          <a:blip r:embed="rId2"/>
+          <a:stretch>
+            <a:fillRect/>
+          </a:stretch>
+        </p:blipFill>
+        <p:spPr>
+          <a:xfrm>
+            <a:off x="0" y="0"/>
+            <a:ext cx="12191695" cy="6858000"/>
+          </a:xfrm>
+          <a:prstGeom prst="rect">
+            <a:avLst/>
+          </a:prstGeom>
+        </p:spPr>
+      </p:pic>
+      <p:sp>
+        <p:nvSpPr>
+          <p:cNvPr id="3" name="title band"/>
+          <p:cNvSpPr/>
+          <p:nvPr/>
+        </p:nvSpPr>
+        <p:spPr>
+          <a:xfrm>
+            <a:off x="0" y="0"/>
+            <a:ext cx="12191695" cy="2185416"/>
+          </a:xfrm>
+          <a:prstGeom prst="rect">
+            <a:avLst/>
+          </a:prstGeom>
+          <a:solidFill>
+            <a:srgbClr val="333333"/>
+          </a:solidFill>
+          <a:ln>
+            <a:noFill/>
+          </a:ln>
+        </p:spPr>
+        <p:style>
+          <a:lnRef idx="1">
+            <a:schemeClr val="accent1"/>
+          </a:lnRef>
+          <a:fillRef idx="3">
+            <a:schemeClr val="accent1"/>
+          </a:fillRef>
+          <a:effectRef idx="2">
+            <a:schemeClr val="accent1"/>
+          </a:effectRef>
+          <a:fontRef idx="minor">
+            <a:schemeClr val="lt1"/>
+          </a:fontRef>
+        </p:style>
+        <p:txBody>
+          <a:bodyPr rtlCol="0" anchor="ctr"/>
+          <a:lstStyle/>
+          <a:p>
+            <a:pPr algn="ctr"/>
+          </a:p>
+        </p:txBody>
+      </p:sp>
+      <p:sp>
+        <p:nvSpPr>
+          <p:cNvPr id="4" name="series logo"/>
           <p:cNvSpPr txBox="1"/>
           <p:nvPr/>
         </p:nvSpPr>
         <p:spPr>
           <a:xfrm>
-            <a:off x="822960" y="1417320"/>
-            <a:ext cx="10515600" cy="1737360"/>
+            <a:off x="182880" y="502920"/>
+            <a:ext cx="2761488" cy="950976"/>
           </a:xfrm>
           <a:prstGeom prst="rect">
             <a:avLst/>
@@ -5452,58 +5511,94 @@
           <a:noFill/>
         </p:spPr>
         <p:txBody>
-          <a:bodyPr wrap="square" anchor="t" lIns="45720" rIns="45720" tIns="27432" bIns="27432">
+          <a:bodyPr wrap="none" anchor="ctr">
             <a:spAutoFit/>
           </a:bodyPr>
           <a:lstStyle/>
           <a:p>
-            <a:pPr algn="l">
-              <a:spcAft>
-                <a:spcPts val="200"/>
-              </a:spcAft>
-            </a:pPr>
-            <a:r>
-              <a:rPr sz="4000" b="1" i="0">
+            <a:pPr algn="ctr"/>
+            <a:r>
+              <a:rPr sz="2800" b="0">
+                <a:solidFill>
+                  <a:srgbClr val="E94C3F"/>
+                </a:solidFill>
+                <a:latin typeface="Impact"/>
+                <a:ea typeface="Impact"/>
+                <a:cs typeface="Impact"/>
+              </a:rPr>
+              <a:t>D</a:t>
+            </a:r>
+            <a:r>
+              <a:rPr sz="2800" b="0">
                 <a:solidFill>
                   <a:srgbClr val="FFFFFF"/>
                 </a:solidFill>
-                <a:latin typeface="Yu Gothic"/>
-                <a:ea typeface="Yu Gothic"/>
-                <a:cs typeface="Yu Gothic"/>
-              </a:rPr>
-              <a:t>VLA のための強化学習:</a:t>
-            </a:r>
-          </a:p>
-          <a:p>
-            <a:pPr algn="l">
-              <a:spcAft>
-                <a:spcPts val="200"/>
-              </a:spcAft>
-            </a:pPr>
-            <a:r>
-              <a:rPr sz="4400" b="1" i="0">
+                <a:latin typeface="Impact"/>
+                <a:ea typeface="Impact"/>
+                <a:cs typeface="Impact"/>
+              </a:rPr>
+              <a:t>EEP </a:t>
+            </a:r>
+            <a:r>
+              <a:rPr sz="2800" b="0">
+                <a:solidFill>
+                  <a:srgbClr val="C8CC41"/>
+                </a:solidFill>
+                <a:latin typeface="Impact"/>
+                <a:ea typeface="Impact"/>
+                <a:cs typeface="Impact"/>
+              </a:rPr>
+              <a:t>L</a:t>
+            </a:r>
+            <a:r>
+              <a:rPr sz="2800" b="0">
                 <a:solidFill>
                   <a:srgbClr val="FFFFFF"/>
                 </a:solidFill>
-                <a:latin typeface="Yu Gothic"/>
-                <a:ea typeface="Yu Gothic"/>
-                <a:cs typeface="Yu Gothic"/>
-              </a:rPr>
-              <a:t>RECAP・STEAM・RL Token</a:t>
-            </a:r>
-          </a:p>
-        </p:txBody>
-      </p:sp>
-      <p:sp>
-        <p:nvSpPr>
-          <p:cNvPr id="3" name="subtitle"/>
+                <a:latin typeface="Impact"/>
+                <a:ea typeface="Impact"/>
+                <a:cs typeface="Impact"/>
+              </a:rPr>
+              <a:t>EARNING </a:t>
+            </a:r>
+            <a:r>
+              <a:rPr sz="2800" b="0">
+                <a:solidFill>
+                  <a:srgbClr val="4897F6"/>
+                </a:solidFill>
+                <a:latin typeface="Impact"/>
+                <a:ea typeface="Impact"/>
+                <a:cs typeface="Impact"/>
+              </a:rPr>
+              <a:t>JP</a:t>
+            </a:r>
+          </a:p>
+          <a:p>
+            <a:pPr algn="ctr"/>
+            <a:r>
+              <a:rPr sz="2800" b="0">
+                <a:solidFill>
+                  <a:srgbClr val="FFFFFF"/>
+                </a:solidFill>
+                <a:latin typeface="Impact"/>
+                <a:ea typeface="Impact"/>
+                <a:cs typeface="Impact"/>
+              </a:rPr>
+              <a:t>[DL Papers]</a:t>
+            </a:r>
+          </a:p>
+        </p:txBody>
+      </p:sp>
+      <p:sp>
+        <p:nvSpPr>
+          <p:cNvPr id="5" name="title"/>
           <p:cNvSpPr txBox="1"/>
           <p:nvPr/>
         </p:nvSpPr>
         <p:spPr>
           <a:xfrm>
-            <a:off x="822960" y="3291840"/>
-            <a:ext cx="10515600" cy="822960"/>
+            <a:off x="2944368" y="155448"/>
+            <a:ext cx="9144000" cy="914400"/>
           </a:xfrm>
           <a:prstGeom prst="rect">
             <a:avLst/>
@@ -5511,256 +5606,50 @@
           <a:noFill/>
         </p:spPr>
         <p:txBody>
-          <a:bodyPr wrap="square" anchor="t" lIns="45720" rIns="45720" tIns="27432" bIns="27432">
+          <a:bodyPr wrap="square">
             <a:spAutoFit/>
           </a:bodyPr>
           <a:lstStyle/>
           <a:p>
-            <a:pPr algn="l">
-              <a:spcAft>
-                <a:spcPts val="600"/>
-              </a:spcAft>
-            </a:pPr>
-            <a:r>
-              <a:rPr sz="2200" b="0" i="0">
-                <a:solidFill>
-                  <a:srgbClr val="CADCFC"/>
-                </a:solidFill>
-                <a:latin typeface="Yu Gothic"/>
-                <a:ea typeface="Yu Gothic"/>
-                <a:cs typeface="Yu Gothic"/>
-              </a:rPr>
-              <a:t>smolVLA と LIBERO-10 Task 0 で、3 つの手法を実装して比べる</a:t>
-            </a:r>
-          </a:p>
-        </p:txBody>
-      </p:sp>
-      <p:sp>
-        <p:nvSpPr>
-          <p:cNvPr id="4" name="chip RECAP"/>
-          <p:cNvSpPr/>
+            <a:pPr algn="ctr"/>
+            <a:r>
+              <a:rPr sz="2600" b="0">
+                <a:solidFill>
+                  <a:srgbClr val="FFFFFF"/>
+                </a:solidFill>
+                <a:latin typeface="Arial"/>
+                <a:ea typeface="Arial"/>
+                <a:cs typeface="Arial"/>
+              </a:rPr>
+              <a:t>RECAP, STEAM, and RL Token:</a:t>
+            </a:r>
+          </a:p>
+          <a:p>
+            <a:pPr algn="ctr"/>
+            <a:r>
+              <a:rPr sz="2600" b="0">
+                <a:solidFill>
+                  <a:srgbClr val="FFFFFF"/>
+                </a:solidFill>
+                <a:latin typeface="Arial"/>
+                <a:ea typeface="Arial"/>
+                <a:cs typeface="Arial"/>
+              </a:rPr>
+              <a:t>Reinforcement Learning for Vision-Language-Action Models</a:t>
+            </a:r>
+          </a:p>
+        </p:txBody>
+      </p:sp>
+      <p:sp>
+        <p:nvSpPr>
+          <p:cNvPr id="6" name="presenter block"/>
+          <p:cNvSpPr txBox="1"/>
           <p:nvPr/>
         </p:nvSpPr>
         <p:spPr>
           <a:xfrm>
-            <a:off x="822960" y="4343400"/>
-            <a:ext cx="3429000" cy="1097280"/>
-          </a:xfrm>
-          <a:prstGeom prst="roundRect">
-            <a:avLst>
-              <a:gd name="adj" fmla="val 12000"/>
-            </a:avLst>
-          </a:prstGeom>
-          <a:solidFill>
-            <a:srgbClr val="1E3556"/>
-          </a:solidFill>
-          <a:ln w="12700">
-            <a:solidFill>
-              <a:srgbClr val="5B9BE6"/>
-            </a:solidFill>
-          </a:ln>
-        </p:spPr>
-        <p:style>
-          <a:lnRef idx="1">
-            <a:schemeClr val="accent1"/>
-          </a:lnRef>
-          <a:fillRef idx="3">
-            <a:schemeClr val="accent1"/>
-          </a:fillRef>
-          <a:effectRef idx="2">
-            <a:schemeClr val="accent1"/>
-          </a:effectRef>
-          <a:fontRef idx="minor">
-            <a:schemeClr val="lt1"/>
-          </a:fontRef>
-        </p:style>
-        <p:txBody>
-          <a:bodyPr rtlCol="0" anchor="ctr" wrap="square" lIns="73152" rIns="73152" tIns="36576" bIns="36576"/>
-          <a:lstStyle/>
-          <a:p>
-            <a:pPr algn="ctr"/>
-            <a:r>
-              <a:rPr sz="2000" b="1" i="0">
-                <a:solidFill>
-                  <a:srgbClr val="FFFFFF"/>
-                </a:solidFill>
-                <a:latin typeface="Yu Gothic"/>
-                <a:ea typeface="Yu Gothic"/>
-                <a:cs typeface="Yu Gothic"/>
-              </a:rPr>
-              <a:t>RECAP</a:t>
-            </a:r>
-          </a:p>
-          <a:p>
-            <a:pPr algn="ctr"/>
-            <a:r>
-              <a:rPr sz="1400" b="0" i="0">
-                <a:solidFill>
-                  <a:srgbClr val="CADCFC"/>
-                </a:solidFill>
-                <a:latin typeface="Yu Gothic"/>
-                <a:ea typeface="Yu Gothic"/>
-                <a:cs typeface="Yu Gothic"/>
-              </a:rPr>
-              <a:t>価値関数で advantage を作り、方策に条件付ける</a:t>
-            </a:r>
-          </a:p>
-        </p:txBody>
-      </p:sp>
-      <p:sp>
-        <p:nvSpPr>
-          <p:cNvPr id="5" name="chip STEAM"/>
-          <p:cNvSpPr/>
-          <p:nvPr/>
-        </p:nvSpPr>
-        <p:spPr>
-          <a:xfrm>
-            <a:off x="4480560" y="4343400"/>
-            <a:ext cx="3429000" cy="1097280"/>
-          </a:xfrm>
-          <a:prstGeom prst="roundRect">
-            <a:avLst>
-              <a:gd name="adj" fmla="val 12000"/>
-            </a:avLst>
-          </a:prstGeom>
-          <a:solidFill>
-            <a:srgbClr val="1E3556"/>
-          </a:solidFill>
-          <a:ln w="12700">
-            <a:solidFill>
-              <a:srgbClr val="5B9BE6"/>
-            </a:solidFill>
-          </a:ln>
-        </p:spPr>
-        <p:style>
-          <a:lnRef idx="1">
-            <a:schemeClr val="accent1"/>
-          </a:lnRef>
-          <a:fillRef idx="3">
-            <a:schemeClr val="accent1"/>
-          </a:fillRef>
-          <a:effectRef idx="2">
-            <a:schemeClr val="accent1"/>
-          </a:effectRef>
-          <a:fontRef idx="minor">
-            <a:schemeClr val="lt1"/>
-          </a:fontRef>
-        </p:style>
-        <p:txBody>
-          <a:bodyPr rtlCol="0" anchor="ctr" wrap="square" lIns="73152" rIns="73152" tIns="36576" bIns="36576"/>
-          <a:lstStyle/>
-          <a:p>
-            <a:pPr algn="ctr"/>
-            <a:r>
-              <a:rPr sz="2000" b="1" i="0">
-                <a:solidFill>
-                  <a:srgbClr val="FFFFFF"/>
-                </a:solidFill>
-                <a:latin typeface="Yu Gothic"/>
-                <a:ea typeface="Yu Gothic"/>
-                <a:cs typeface="Yu Gothic"/>
-              </a:rPr>
-              <a:t>STEAM</a:t>
-            </a:r>
-          </a:p>
-          <a:p>
-            <a:pPr algn="ctr"/>
-            <a:r>
-              <a:rPr sz="1400" b="0" i="0">
-                <a:solidFill>
-                  <a:srgbClr val="CADCFC"/>
-                </a:solidFill>
-                <a:latin typeface="Yu Gothic"/>
-                <a:ea typeface="Yu Gothic"/>
-                <a:cs typeface="Yu Gothic"/>
-              </a:rPr>
-              <a:t>時間オフセットの自己教師ありアンサンブル</a:t>
-            </a:r>
-          </a:p>
-        </p:txBody>
-      </p:sp>
-      <p:sp>
-        <p:nvSpPr>
-          <p:cNvPr id="6" name="chip RL Token"/>
-          <p:cNvSpPr/>
-          <p:nvPr/>
-        </p:nvSpPr>
-        <p:spPr>
-          <a:xfrm>
-            <a:off x="8138160" y="4343400"/>
-            <a:ext cx="3429000" cy="1097280"/>
-          </a:xfrm>
-          <a:prstGeom prst="roundRect">
-            <a:avLst>
-              <a:gd name="adj" fmla="val 12000"/>
-            </a:avLst>
-          </a:prstGeom>
-          <a:solidFill>
-            <a:srgbClr val="1E3556"/>
-          </a:solidFill>
-          <a:ln w="12700">
-            <a:solidFill>
-              <a:srgbClr val="5B9BE6"/>
-            </a:solidFill>
-          </a:ln>
-        </p:spPr>
-        <p:style>
-          <a:lnRef idx="1">
-            <a:schemeClr val="accent1"/>
-          </a:lnRef>
-          <a:fillRef idx="3">
-            <a:schemeClr val="accent1"/>
-          </a:fillRef>
-          <a:effectRef idx="2">
-            <a:schemeClr val="accent1"/>
-          </a:effectRef>
-          <a:fontRef idx="minor">
-            <a:schemeClr val="lt1"/>
-          </a:fontRef>
-        </p:style>
-        <p:txBody>
-          <a:bodyPr rtlCol="0" anchor="ctr" wrap="square" lIns="73152" rIns="73152" tIns="36576" bIns="36576"/>
-          <a:lstStyle/>
-          <a:p>
-            <a:pPr algn="ctr"/>
-            <a:r>
-              <a:rPr sz="2000" b="1" i="0">
-                <a:solidFill>
-                  <a:srgbClr val="FFFFFF"/>
-                </a:solidFill>
-                <a:latin typeface="Yu Gothic"/>
-                <a:ea typeface="Yu Gothic"/>
-                <a:cs typeface="Yu Gothic"/>
-              </a:rPr>
-              <a:t>RL Token</a:t>
-            </a:r>
-          </a:p>
-          <a:p>
-            <a:pPr algn="ctr"/>
-            <a:r>
-              <a:rPr sz="1400" b="0" i="0">
-                <a:solidFill>
-                  <a:srgbClr val="CADCFC"/>
-                </a:solidFill>
-                <a:latin typeface="Yu Gothic"/>
-                <a:ea typeface="Yu Gothic"/>
-                <a:cs typeface="Yu Gothic"/>
-              </a:rPr>
-              <a:t>凍結 VLA の上で、軽い actor-critic を学習</a:t>
-            </a:r>
-          </a:p>
-        </p:txBody>
-      </p:sp>
-      <p:sp>
-        <p:nvSpPr>
-          <p:cNvPr id="7" name="date"/>
-          <p:cNvSpPr txBox="1"/>
-          <p:nvPr/>
-        </p:nvSpPr>
-        <p:spPr>
-          <a:xfrm>
-            <a:off x="822960" y="5943600"/>
-            <a:ext cx="10515600" cy="457200"/>
+            <a:off x="3904487" y="1051560"/>
+            <a:ext cx="7863840" cy="1005840"/>
           </a:xfrm>
           <a:prstGeom prst="rect">
             <a:avLst/>
@@ -5768,26 +5657,87 @@
           <a:noFill/>
         </p:spPr>
         <p:txBody>
-          <a:bodyPr wrap="square" anchor="t" lIns="45720" rIns="45720" tIns="27432" bIns="27432">
+          <a:bodyPr wrap="square">
             <a:spAutoFit/>
           </a:bodyPr>
           <a:lstStyle/>
           <a:p>
-            <a:pPr algn="l">
-              <a:spcAft>
-                <a:spcPts val="600"/>
-              </a:spcAft>
-            </a:pPr>
-            <a:r>
-              <a:rPr sz="1600" b="0" i="0">
-                <a:solidFill>
-                  <a:srgbClr val="CADCFC"/>
-                </a:solidFill>
-                <a:latin typeface="Yu Gothic"/>
-                <a:ea typeface="Yu Gothic"/>
-                <a:cs typeface="Yu Gothic"/>
-              </a:rPr>
-              <a:t>libero_RL プロジェクト  |  2026/10/04</a:t>
+            <a:pPr algn="l"/>
+            <a:r>
+              <a:rPr sz="2000" b="0">
+                <a:solidFill>
+                  <a:srgbClr val="FFFFFF"/>
+                </a:solidFill>
+                <a:latin typeface="Yu Gothic"/>
+                <a:ea typeface="Yu Gothic"/>
+                <a:cs typeface="Yu Gothic"/>
+              </a:rPr>
+              <a:t>smolVLA × LIBERO-10 Task 0 での実験</a:t>
+            </a:r>
+          </a:p>
+          <a:p>
+            <a:pPr algn="l"/>
+            <a:r>
+              <a:rPr sz="2000" b="0">
+                <a:solidFill>
+                  <a:srgbClr val="FFFFFF"/>
+                </a:solidFill>
+                <a:latin typeface="Yu Gothic"/>
+                <a:ea typeface="Yu Gothic"/>
+                <a:cs typeface="Yu Gothic"/>
+              </a:rPr>
+              <a:t>RLinf / libero_RL プロジェクト</a:t>
+            </a:r>
+          </a:p>
+          <a:p>
+            <a:pPr algn="l"/>
+            <a:r>
+              <a:rPr sz="2000" b="0">
+                <a:solidFill>
+                  <a:srgbClr val="FFFFFF"/>
+                </a:solidFill>
+                <a:latin typeface="Yu Gothic"/>
+                <a:ea typeface="Yu Gothic"/>
+                <a:cs typeface="Yu Gothic"/>
+              </a:rPr>
+              <a:t>2026/10/04</a:t>
+            </a:r>
+          </a:p>
+        </p:txBody>
+      </p:sp>
+      <p:sp>
+        <p:nvSpPr>
+          <p:cNvPr id="7" name="url"/>
+          <p:cNvSpPr txBox="1"/>
+          <p:nvPr/>
+        </p:nvSpPr>
+        <p:spPr>
+          <a:xfrm>
+            <a:off x="9537192" y="6053328"/>
+            <a:ext cx="2660904" cy="365760"/>
+          </a:xfrm>
+          <a:prstGeom prst="rect">
+            <a:avLst/>
+          </a:prstGeom>
+          <a:noFill/>
+        </p:spPr>
+        <p:txBody>
+          <a:bodyPr wrap="none">
+            <a:spAutoFit/>
+          </a:bodyPr>
+          <a:lstStyle/>
+          <a:p>
+            <a:pPr algn="l"/>
+            <a:r>
+              <a:rPr sz="1600" b="0">
+                <a:solidFill>
+                  <a:srgbClr val="FFFFFF"/>
+                </a:solidFill>
+                <a:latin typeface="Yu Gothic"/>
+                <a:ea typeface="Yu Gothic"/>
+                <a:cs typeface="Yu Gothic"/>
+              </a:rPr>
+              <a:t>http://deeplearning.jp/</a:t>
             </a:r>
           </a:p>
         </p:txBody>

--- a/docs/RECAP_STEAM_RLToken.pptx
+++ b/docs/RECAP_STEAM_RLToken.pptx
@@ -13152,10 +13152,11 @@
                 <a:tableStyleId>{5C22544A-7EE6-4342-B048-85BDC9FD1C3A}</a:tableStyleId>
               </a:tblPr>
               <a:tblGrid>
-                <a:gridCol w="1463040"/>
-                <a:gridCol w="4572000"/>
-                <a:gridCol w="3566160"/>
-                <a:gridCol w="1463040"/>
+                <a:gridCol w="1188720"/>
+                <a:gridCol w="3474720"/>
+                <a:gridCol w="2194560"/>
+                <a:gridCol w="2651760"/>
+                <a:gridCol w="1554480"/>
               </a:tblGrid>
               <a:tr h="457200">
                 <a:tc>
@@ -13220,7 +13221,31 @@
                           <a:ea typeface="Yu Gothic"/>
                           <a:cs typeface="Yu Gothic"/>
                         </a:rPr>
-                        <a:t>著者・所属</a:t>
+                        <a:t>所属</a:t>
+                      </a:r>
+                    </a:p>
+                  </a:txBody>
+                  <a:tcPr anchor="ctr" marL="73152" marR="73152" marT="27432" marB="27432">
+                    <a:solidFill>
+                      <a:srgbClr val="0B66C3"/>
+                    </a:solidFill>
+                  </a:tcPr>
+                </a:tc>
+                <a:tc>
+                  <a:txBody>
+                    <a:bodyPr wrap="square"/>
+                    <a:lstStyle/>
+                    <a:p>
+                      <a:r>
+                        <a:rPr sz="1400" b="1" i="0">
+                          <a:solidFill>
+                            <a:srgbClr val="FFFFFF"/>
+                          </a:solidFill>
+                          <a:latin typeface="Yu Gothic"/>
+                          <a:ea typeface="Yu Gothic"/>
+                          <a:cs typeface="Yu Gothic"/>
+                        </a:rPr>
+                        <a:t>主な著者</a:t>
                       </a:r>
                     </a:p>
                   </a:txBody>
@@ -13342,6 +13367,30 @@
                           <a:ea typeface="Yu Gothic"/>
                           <a:cs typeface="Yu Gothic"/>
                         </a:rPr>
+                        <a:t>Ali Amin, Sergey Levine ほか</a:t>
+                      </a:r>
+                    </a:p>
+                  </a:txBody>
+                  <a:tcPr anchor="ctr" marL="73152" marR="73152" marT="27432" marB="27432">
+                    <a:solidFill>
+                      <a:srgbClr val="FFFFFF"/>
+                    </a:solidFill>
+                  </a:tcPr>
+                </a:tc>
+                <a:tc>
+                  <a:txBody>
+                    <a:bodyPr wrap="square"/>
+                    <a:lstStyle/>
+                    <a:p>
+                      <a:r>
+                        <a:rPr sz="1400" b="0" i="0">
+                          <a:solidFill>
+                            <a:srgbClr val="1A1A1A"/>
+                          </a:solidFill>
+                          <a:latin typeface="Yu Gothic"/>
+                          <a:ea typeface="Yu Gothic"/>
+                          <a:cs typeface="Yu Gothic"/>
+                        </a:rPr>
                         <a:t>2511.14759
 （2025/11）</a:t>
                       </a:r>
@@ -13417,7 +13466,31 @@
                           <a:ea typeface="Yu Gothic"/>
                           <a:cs typeface="Yu Gothic"/>
                         </a:rPr>
-                        <a:t>Zhihao Liu, Qiuyi Gu ほか（中国科学院自動化研究所、清華大学 ほか）</a:t>
+                        <a:t>中国科学院自動化研究所、清華大学 ほか</a:t>
+                      </a:r>
+                    </a:p>
+                  </a:txBody>
+                  <a:tcPr anchor="ctr" marL="73152" marR="73152" marT="27432" marB="27432">
+                    <a:solidFill>
+                      <a:srgbClr val="F3F7FC"/>
+                    </a:solidFill>
+                  </a:tcPr>
+                </a:tc>
+                <a:tc>
+                  <a:txBody>
+                    <a:bodyPr wrap="square"/>
+                    <a:lstStyle/>
+                    <a:p>
+                      <a:r>
+                        <a:rPr sz="1400" b="0" i="0">
+                          <a:solidFill>
+                            <a:srgbClr val="1A1A1A"/>
+                          </a:solidFill>
+                          <a:latin typeface="Yu Gothic"/>
+                          <a:ea typeface="Yu Gothic"/>
+                          <a:cs typeface="Yu Gothic"/>
+                        </a:rPr>
+                        <a:t>Zhihao Liu, Qiuyi Gu ほか</a:t>
                       </a:r>
                     </a:p>
                   </a:txBody>
@@ -13515,7 +13588,31 @@
                           <a:ea typeface="Yu Gothic"/>
                           <a:cs typeface="Yu Gothic"/>
                         </a:rPr>
-                        <a:t>Charles Xu, Jost Tobias Springenberg, Sergey Levine, Liyiming Ke ほか（Physical Intelligence）</a:t>
+                        <a:t>Physical Intelligence</a:t>
+                      </a:r>
+                    </a:p>
+                  </a:txBody>
+                  <a:tcPr anchor="ctr" marL="73152" marR="73152" marT="27432" marB="27432">
+                    <a:solidFill>
+                      <a:srgbClr val="FFFFFF"/>
+                    </a:solidFill>
+                  </a:tcPr>
+                </a:tc>
+                <a:tc>
+                  <a:txBody>
+                    <a:bodyPr wrap="square"/>
+                    <a:lstStyle/>
+                    <a:p>
+                      <a:r>
+                        <a:rPr sz="1400" b="0" i="0">
+                          <a:solidFill>
+                            <a:srgbClr val="1A1A1A"/>
+                          </a:solidFill>
+                          <a:latin typeface="Yu Gothic"/>
+                          <a:ea typeface="Yu Gothic"/>
+                          <a:cs typeface="Yu Gothic"/>
+                        </a:rPr>
+                        <a:t>Charles Xu, Jost Tobias Springenberg, Sergey Levine, Liyiming Ke ほか</a:t>
                       </a:r>
                     </a:p>
                   </a:txBody>

--- a/docs/RECAP_STEAM_RLToken.pptx
+++ b/docs/RECAP_STEAM_RLToken.pptx
@@ -1260,7 +1260,7 @@
                   <c:v>50.0</c:v>
                 </c:pt>
                 <c:pt idx="4">
-                  <c:v>48.0</c:v>
+                  <c:v>52.0</c:v>
                 </c:pt>
                 <c:pt idx="5">
                   <c:v>68.0</c:v>
@@ -17821,6 +17821,36 @@
               <a:t>（eval 64 本、step 600）: accuracy 0.106、隣接 0.189。失敗エピソードを含むため、学習時より低い</a:t>
             </a:r>
           </a:p>
+          <a:p>
+            <a:pPr algn="l" marL="274320" indent="-256032">
+              <a:spcAft>
+                <a:spcPts val="600"/>
+              </a:spcAft>
+              <a:buChar char="•"/>
+            </a:pPr>
+            <a:r>
+              <a:rPr sz="1600" b="1" i="0">
+                <a:solidFill>
+                  <a:srgbClr val="1A1A1A"/>
+                </a:solidFill>
+                <a:latin typeface="Yu Gothic"/>
+                <a:ea typeface="Yu Gothic"/>
+                <a:cs typeface="Yu Gothic"/>
+              </a:rPr>
+              <a:t>Step4 の結果</a:t>
+            </a:r>
+            <a:r>
+              <a:rPr sz="1600" b="0" i="0">
+                <a:solidFill>
+                  <a:srgbClr val="1A1A1A"/>
+                </a:solidFill>
+                <a:latin typeface="Yu Gothic"/>
+                <a:ea typeface="Yu Gothic"/>
+                <a:cs typeface="Yu Gothic"/>
+              </a:rPr>
+              <a:t>: 0.52（正例のみで学習、step 1,450、プロンプトなし）。プロンプトありは 0.42、両側タグは 0.36</a:t>
+            </a:r>
+          </a:p>
         </p:txBody>
       </p:sp>
       <p:graphicFrame>
@@ -18569,7 +18599,7 @@
                 <a:ea typeface="Yu Gothic"/>
                 <a:cs typeface="Yu Gothic"/>
               </a:rPr>
-              <a:t>、RECAP が 0.50、STEAM が 0.48（いずれも最良値）。RECAP と STEAM は学習の途中段階で、差は評価の標準誤差（±0.07）の範囲内</a:t>
+              <a:t>、RECAP が 0.50、STEAM が 0.52（いずれも最良値）。RECAP と STEAM は学習の途中段階で、ベースとの差は、50 エピソードの評価では有意とは言えない</a:t>
             </a:r>
           </a:p>
         </p:txBody>
@@ -24456,7 +24486,7 @@
                           <a:ea typeface="Yu Gothic"/>
                           <a:cs typeface="Yu Gothic"/>
                         </a:rPr>
-                        <a:t>48.0%</a:t>
+                        <a:t>52.0%</a:t>
                       </a:r>
                     </a:p>
                   </a:txBody>
@@ -24481,7 +24511,7 @@
                           <a:ea typeface="Yu Gothic"/>
                           <a:cs typeface="Yu Gothic"/>
                         </a:rPr>
-                        <a:t>+8.0 pt</a:t>
+                        <a:t>+12.0 pt</a:t>
                       </a:r>
                     </a:p>
                   </a:txBody>
@@ -24651,7 +24681,7 @@
                 <a:ea typeface="Yu Gothic"/>
                 <a:cs typeface="Yu Gothic"/>
               </a:rPr>
-              <a:t>smolVLA: 各 50 エピソード（標準誤差 ±0.07）。RECAP・STEAM は、Step4 の途中の checkpoint（step 2,000 前後）の最良値（advantage プロンプトなしの評価を含む。プロンプトありは、RECAP 0.48、STEAM 0.42）</a:t>
+              <a:t>smolVLA: 各 50 エピソード（標準誤差 ±0.07）。RECAP・STEAM は、Step4 の途中の checkpoint の最良値。どちらも advantage プロンプトなしの評価（STEAM は、正例のみで学習した step 1,450）。プロンプトありは、RECAP 0.48、STEAM 0.42</a:t>
             </a:r>
           </a:p>
           <a:p>
@@ -24728,7 +24758,7 @@
                 <a:ea typeface="Yu Gothic"/>
                 <a:cs typeface="Yu Gothic"/>
               </a:rPr>
-              <a:t>→ smolVLA では RL Token が最良（40% → 68%）。RECAP・STEAM は誤差の範囲内で、途中段階</a:t>
+              <a:t>→ smolVLA では RL Token が最良（40% → 68%）。RECAP・STEAM は途中段階で、差は有意とは言えない</a:t>
             </a:r>
           </a:p>
         </p:txBody>
@@ -25675,7 +25705,7 @@
                 <a:ea typeface="Yu Gothic"/>
                 <a:cs typeface="Yu Gothic"/>
               </a:rPr>
-              <a:t>RECAP・STEAM は、Step4 の途中段階の最良値で 0.48〜0.50。差は誤差の範囲内</a:t>
+              <a:t>RECAP・STEAM は、Step4 の途中段階の最良値で 0.50〜0.52。ベースとの差は、有意とは言えない</a:t>
             </a:r>
           </a:p>
           <a:p>
@@ -25926,7 +25956,7 @@
       </p:sp>
       <p:sp>
         <p:nvSpPr>
-          <p:cNvPr id="9" name="result STEAM"/>
+          <p:cNvPr id="9" name="result RECAP"/>
           <p:cNvSpPr/>
           <p:nvPr/>
         </p:nvSpPr>
@@ -25975,7 +26005,7 @@
                 <a:ea typeface="Yu Gothic"/>
                 <a:cs typeface="Yu Gothic"/>
               </a:rPr>
-              <a:t>0.48</a:t>
+              <a:t>0.50</a:t>
             </a:r>
           </a:p>
           <a:p>
@@ -25989,14 +26019,14 @@
                 <a:ea typeface="Yu Gothic"/>
                 <a:cs typeface="Yu Gothic"/>
               </a:rPr>
-              <a:t>STEAM</a:t>
-            </a:r>
-          </a:p>
-        </p:txBody>
-      </p:sp>
-      <p:sp>
-        <p:nvSpPr>
-          <p:cNvPr id="10" name="result RECAP"/>
+              <a:t>RECAP</a:t>
+            </a:r>
+          </a:p>
+        </p:txBody>
+      </p:sp>
+      <p:sp>
+        <p:nvSpPr>
+          <p:cNvPr id="10" name="result STEAM"/>
           <p:cNvSpPr/>
           <p:nvPr/>
         </p:nvSpPr>
@@ -26045,7 +26075,7 @@
                 <a:ea typeface="Yu Gothic"/>
                 <a:cs typeface="Yu Gothic"/>
               </a:rPr>
-              <a:t>0.50</a:t>
+              <a:t>0.52</a:t>
             </a:r>
           </a:p>
           <a:p>
@@ -26059,7 +26089,7 @@
                 <a:ea typeface="Yu Gothic"/>
                 <a:cs typeface="Yu Gothic"/>
               </a:rPr>
-              <a:t>RECAP</a:t>
+              <a:t>STEAM</a:t>
             </a:r>
           </a:p>
         </p:txBody>
@@ -29911,7 +29941,7 @@
                 <a:ea typeface="Yu Gothic"/>
                 <a:cs typeface="Yu Gothic"/>
               </a:rPr>
-              <a:t>→ 評価は 50 エピソード。標準誤差は約 ±0.07 なので、0.05 程度の差は有意とは言えない</a:t>
+              <a:t>→ 評価は 50 エピソード。2 つの評価の差の誤差は約 ±0.1 なので、0.1 程度の差は有意とは言えない</a:t>
             </a:r>
           </a:p>
         </p:txBody>

--- a/docs/RECAP_STEAM_RLToken.pptx
+++ b/docs/RECAP_STEAM_RLToken.pptx
@@ -32,6 +32,7 @@
     <p:sldId id="280" r:id="rId32"/>
     <p:sldId id="281" r:id="rId33"/>
     <p:sldId id="282" r:id="rId34"/>
+    <p:sldId id="283" r:id="rId35"/>
   </p:sldIdLst>
   <p:sldSz cx="12191695" cy="6858000" type="screen4x3"/>
   <p:notesSz cx="6858000" cy="9144000"/>
@@ -3031,7 +3032,7 @@
           <a:lstStyle/>
           <a:p>
             <a:r>
-              <a:t>表は定性的な比較。smolVLA での経験に基づく。</a:t>
+              <a:t>実測値（TensorBoard と実行ログ）。GPU は、RECAP の価値モデルが RTX 6000 Ada（48GB）、STEAM の critic と RL Token の追加実験が RTX A5000（24GB）。</a:t>
             </a:r>
           </a:p>
         </p:txBody>
@@ -3057,6 +3058,76 @@
 </file>
 
 <file path=ppt/notesSlides/notesSlide27.xml><?xml version="1.0" encoding="utf-8"?>
+<p:notes xmlns:a="http://schemas.openxmlformats.org/drawingml/2006/main" xmlns:p="http://schemas.openxmlformats.org/presentationml/2006/main" xmlns:r="http://schemas.openxmlformats.org/officeDocument/2006/relationships">
+  <p:cSld>
+    <p:spTree>
+      <p:nvGrpSpPr>
+        <p:cNvPr id="1" name=""/>
+        <p:cNvGrpSpPr/>
+        <p:nvPr/>
+      </p:nvGrpSpPr>
+      <p:grpSpPr>
+        <a:xfrm>
+          <a:off x="0" y="0"/>
+          <a:ext cx="0" cy="0"/>
+          <a:chOff x="0" y="0"/>
+          <a:chExt cx="0" cy="0"/>
+        </a:xfrm>
+      </p:grpSpPr>
+      <p:sp>
+        <p:nvSpPr>
+          <p:cNvPr id="2" name="Slide Image Placeholder 1"/>
+          <p:cNvSpPr>
+            <a:spLocks noGrp="1"/>
+          </p:cNvSpPr>
+          <p:nvPr>
+            <p:ph type="sldImg" idx="2"/>
+          </p:nvPr>
+        </p:nvSpPr>
+        <p:spPr/>
+      </p:sp>
+      <p:sp>
+        <p:nvSpPr>
+          <p:cNvPr id="3" name="Notes Placeholder 2"/>
+          <p:cNvSpPr>
+            <a:spLocks noGrp="1"/>
+          </p:cNvSpPr>
+          <p:nvPr>
+            <p:ph type="body" idx="3" sz="quarter"/>
+          </p:nvPr>
+        </p:nvSpPr>
+        <p:spPr/>
+        <p:txBody>
+          <a:bodyPr/>
+          <a:lstStyle/>
+          <a:p>
+            <a:r>
+              <a:t>表は定性的な比較。smolVLA での経験に基づく。</a:t>
+            </a:r>
+          </a:p>
+        </p:txBody>
+      </p:sp>
+      <p:sp>
+        <p:nvSpPr>
+          <p:cNvPr id="4" name="Slide Number Placeholder 3"/>
+          <p:cNvSpPr>
+            <a:spLocks noGrp="1"/>
+          </p:cNvSpPr>
+          <p:nvPr>
+            <p:ph type="sldNum" idx="5" sz="quarter"/>
+          </p:nvPr>
+        </p:nvSpPr>
+        <p:spPr/>
+      </p:sp>
+    </p:spTree>
+  </p:cSld>
+  <p:clrMapOvr>
+    <a:masterClrMapping/>
+  </p:clrMapOvr>
+</p:notes>
+</file>
+
+<file path=ppt/notesSlides/notesSlide28.xml><?xml version="1.0" encoding="utf-8"?>
 <p:notes xmlns:a="http://schemas.openxmlformats.org/drawingml/2006/main" xmlns:p="http://schemas.openxmlformats.org/presentationml/2006/main" xmlns:r="http://schemas.openxmlformats.org/officeDocument/2006/relationships">
   <p:cSld>
     <p:spTree>
@@ -12900,7 +12971,29 @@
                 <a:ea typeface="Yu Gothic"/>
                 <a:cs typeface="Yu Gothic"/>
               </a:rPr>
-              <a:t>で学習</a:t>
+              <a:t>で学習（</a:t>
+            </a:r>
+            <a:r>
+              <a:rPr sz="1700" b="1" i="0">
+                <a:solidFill>
+                  <a:srgbClr val="1A1A1A"/>
+                </a:solidFill>
+                <a:latin typeface="Yu Gothic"/>
+                <a:ea typeface="Yu Gothic"/>
+                <a:cs typeface="Yu Gothic"/>
+              </a:rPr>
+              <a:t>4,000 step、20.6 時間</a:t>
+            </a:r>
+            <a:r>
+              <a:rPr sz="1700" b="0" i="0">
+                <a:solidFill>
+                  <a:srgbClr val="1A1A1A"/>
+                </a:solidFill>
+                <a:latin typeface="Yu Gothic"/>
+                <a:ea typeface="Yu Gothic"/>
+                <a:cs typeface="Yu Gothic"/>
+              </a:rPr>
+              <a:t>）</a:t>
             </a:r>
           </a:p>
           <a:p>
@@ -12949,7 +13042,29 @@
                 <a:ea typeface="Yu Gothic"/>
                 <a:cs typeface="Yu Gothic"/>
               </a:rPr>
-              <a:t>: A = r_{t:t+10} + V(o_{t+10}) − V(o_t)。上位 30% を positive（人のデモは全て positive）。閾値は全データセットを結合して 1 つに決める</a:t>
+              <a:t>: A = r_{t:t+10} + V(o_{t+10}) − V(o_t)。上位 30% を positive（人のデモは全て positive）。閾値は全データセットを結合して 1 つに決める（</a:t>
+            </a:r>
+            <a:r>
+              <a:rPr sz="1700" b="1" i="0">
+                <a:solidFill>
+                  <a:srgbClr val="1A1A1A"/>
+                </a:solidFill>
+                <a:latin typeface="Yu Gothic"/>
+                <a:ea typeface="Yu Gothic"/>
+                <a:cs typeface="Yu Gothic"/>
+              </a:rPr>
+              <a:t>62.3 万サンプル、4.2 時間</a:t>
+            </a:r>
+            <a:r>
+              <a:rPr sz="1700" b="0" i="0">
+                <a:solidFill>
+                  <a:srgbClr val="1A1A1A"/>
+                </a:solidFill>
+                <a:latin typeface="Yu Gothic"/>
+                <a:ea typeface="Yu Gothic"/>
+                <a:cs typeface="Yu Gothic"/>
+              </a:rPr>
+              <a:t>）</a:t>
             </a:r>
           </a:p>
           <a:p>
@@ -12979,7 +13094,29 @@
                 <a:ea typeface="Yu Gothic"/>
                 <a:cs typeface="Yu Gothic"/>
               </a:rPr>
-              <a:t>: プロンプトに "Advantage: positive" を付けて SFT（ドロップアウト 0.1）。評価も positive プロンプトで行う</a:t>
+              <a:t>: プロンプトに "Advantage: positive" を付けて SFT（ドロップアウト 0.1）。評価も positive プロンプトで行う（</a:t>
+            </a:r>
+            <a:r>
+              <a:rPr sz="1700" b="1" i="0">
+                <a:solidFill>
+                  <a:srgbClr val="1A1A1A"/>
+                </a:solidFill>
+                <a:latin typeface="Yu Gothic"/>
+                <a:ea typeface="Yu Gothic"/>
+                <a:cs typeface="Yu Gothic"/>
+              </a:rPr>
+              <a:t>2,000 step、20.3 時間</a:t>
+            </a:r>
+            <a:r>
+              <a:rPr sz="1700" b="0" i="0">
+                <a:solidFill>
+                  <a:srgbClr val="1A1A1A"/>
+                </a:solidFill>
+                <a:latin typeface="Yu Gothic"/>
+                <a:ea typeface="Yu Gothic"/>
+                <a:cs typeface="Yu Gothic"/>
+              </a:rPr>
+              <a:t>）</a:t>
             </a:r>
           </a:p>
           <a:p>
@@ -17636,12 +17773,12 @@
           <a:p>
             <a:pPr algn="l" marL="274320" indent="-256032">
               <a:spcAft>
-                <a:spcPts val="600"/>
+                <a:spcPts val="400"/>
               </a:spcAft>
               <a:buChar char="•"/>
             </a:pPr>
             <a:r>
-              <a:rPr sz="1600" b="1" i="0">
+              <a:rPr sz="1500" b="1" i="0">
                 <a:solidFill>
                   <a:srgbClr val="1A1A1A"/>
                 </a:solidFill>
@@ -17652,7 +17789,7 @@
               <a:t>critic</a:t>
             </a:r>
             <a:r>
-              <a:rPr sz="1600" b="0" i="0">
+              <a:rPr sz="1500" b="0" i="0">
                 <a:solidFill>
                   <a:srgbClr val="1A1A1A"/>
                 </a:solidFill>
@@ -17666,12 +17803,12 @@
           <a:p>
             <a:pPr algn="l" marL="274320" indent="-256032">
               <a:spcAft>
-                <a:spcPts val="600"/>
+                <a:spcPts val="400"/>
               </a:spcAft>
               <a:buChar char="•"/>
             </a:pPr>
             <a:r>
-              <a:rPr sz="1600" b="1" i="0">
+              <a:rPr sz="1500" b="1" i="0">
                 <a:solidFill>
                   <a:srgbClr val="1A1A1A"/>
                 </a:solidFill>
@@ -17682,7 +17819,7 @@
               <a:t>学習</a:t>
             </a:r>
             <a:r>
-              <a:rPr sz="1600" b="0" i="0">
+              <a:rPr sz="1500" b="0" i="0">
                 <a:solidFill>
                   <a:srgbClr val="1A1A1A"/>
                 </a:solidFill>
@@ -17696,12 +17833,12 @@
           <a:p>
             <a:pPr algn="l" marL="274320" indent="-256032">
               <a:spcAft>
-                <a:spcPts val="600"/>
+                <a:spcPts val="400"/>
               </a:spcAft>
               <a:buChar char="•"/>
             </a:pPr>
             <a:r>
-              <a:rPr sz="1600" b="1" i="0">
+              <a:rPr sz="1500" b="1" i="0">
                 <a:solidFill>
                   <a:srgbClr val="1A1A1A"/>
                 </a:solidFill>
@@ -17712,7 +17849,7 @@
               <a:t>advantage</a:t>
             </a:r>
             <a:r>
-              <a:rPr sz="1600" b="0" i="0">
+              <a:rPr sz="1500" b="0" i="0">
                 <a:solidFill>
                   <a:srgbClr val="1A1A1A"/>
                 </a:solidFill>
@@ -17726,12 +17863,12 @@
           <a:p>
             <a:pPr algn="l" marL="274320" indent="-256032">
               <a:spcAft>
-                <a:spcPts val="600"/>
+                <a:spcPts val="400"/>
               </a:spcAft>
               <a:buChar char="•"/>
             </a:pPr>
             <a:r>
-              <a:rPr sz="1600" b="1" i="0">
+              <a:rPr sz="1500" b="1" i="0">
                 <a:solidFill>
                   <a:srgbClr val="1A1A1A"/>
                 </a:solidFill>
@@ -17742,7 +17879,7 @@
               <a:t>学習データ上の精度</a:t>
             </a:r>
             <a:r>
-              <a:rPr sz="1600" b="0" i="0">
+              <a:rPr sz="1500" b="0" i="0">
                 <a:solidFill>
                   <a:srgbClr val="1A1A1A"/>
                 </a:solidFill>
@@ -17756,12 +17893,12 @@
           <a:p>
             <a:pPr algn="l" marL="585216" indent="-256032">
               <a:spcAft>
-                <a:spcPts val="600"/>
+                <a:spcPts val="400"/>
               </a:spcAft>
               <a:buChar char="–"/>
             </a:pPr>
             <a:r>
-              <a:rPr sz="1400" b="0" i="0">
+              <a:rPr sz="1300" b="0" i="0">
                 <a:solidFill>
                   <a:srgbClr val="1A1A1A"/>
                 </a:solidFill>
@@ -17775,12 +17912,12 @@
           <a:p>
             <a:pPr algn="l" marL="585216" indent="-256032">
               <a:spcAft>
-                <a:spcPts val="600"/>
+                <a:spcPts val="400"/>
               </a:spcAft>
               <a:buChar char="–"/>
             </a:pPr>
             <a:r>
-              <a:rPr sz="1400" b="0" i="0">
+              <a:rPr sz="1300" b="0" i="0">
                 <a:solidFill>
                   <a:srgbClr val="1A1A1A"/>
                 </a:solidFill>
@@ -17794,12 +17931,12 @@
           <a:p>
             <a:pPr algn="l" marL="274320" indent="-256032">
               <a:spcAft>
-                <a:spcPts val="600"/>
+                <a:spcPts val="400"/>
               </a:spcAft>
               <a:buChar char="•"/>
             </a:pPr>
             <a:r>
-              <a:rPr sz="1600" b="1" i="0">
+              <a:rPr sz="1500" b="1" i="0">
                 <a:solidFill>
                   <a:srgbClr val="1A1A1A"/>
                 </a:solidFill>
@@ -17810,7 +17947,7 @@
               <a:t>未知のロールアウト</a:t>
             </a:r>
             <a:r>
-              <a:rPr sz="1600" b="0" i="0">
+              <a:rPr sz="1500" b="0" i="0">
                 <a:solidFill>
                   <a:srgbClr val="1A1A1A"/>
                 </a:solidFill>
@@ -17824,12 +17961,12 @@
           <a:p>
             <a:pPr algn="l" marL="274320" indent="-256032">
               <a:spcAft>
-                <a:spcPts val="600"/>
+                <a:spcPts val="400"/>
               </a:spcAft>
               <a:buChar char="•"/>
             </a:pPr>
             <a:r>
-              <a:rPr sz="1600" b="1" i="0">
+              <a:rPr sz="1500" b="1" i="0">
                 <a:solidFill>
                   <a:srgbClr val="1A1A1A"/>
                 </a:solidFill>
@@ -17840,7 +17977,7 @@
               <a:t>Step4 の結果</a:t>
             </a:r>
             <a:r>
-              <a:rPr sz="1600" b="0" i="0">
+              <a:rPr sz="1500" b="0" i="0">
                 <a:solidFill>
                   <a:srgbClr val="1A1A1A"/>
                 </a:solidFill>
@@ -17849,6 +17986,69 @@
                 <a:cs typeface="Yu Gothic"/>
               </a:rPr>
               <a:t>: 0.52（正例のみで学習、step 1,450、プロンプトなし）。プロンプトありは 0.42、両側タグは 0.36</a:t>
+            </a:r>
+          </a:p>
+          <a:p>
+            <a:pPr algn="l" marL="274320" indent="-256032">
+              <a:spcAft>
+                <a:spcPts val="400"/>
+              </a:spcAft>
+              <a:buChar char="•"/>
+            </a:pPr>
+            <a:r>
+              <a:rPr sz="1500" b="1" i="0">
+                <a:solidFill>
+                  <a:srgbClr val="1A1A1A"/>
+                </a:solidFill>
+                <a:latin typeface="Yu Gothic"/>
+                <a:ea typeface="Yu Gothic"/>
+                <a:cs typeface="Yu Gothic"/>
+              </a:rPr>
+              <a:t>学習コスト</a:t>
+            </a:r>
+            <a:r>
+              <a:rPr sz="1500" b="0" i="0">
+                <a:solidFill>
+                  <a:srgbClr val="1A1A1A"/>
+                </a:solidFill>
+                <a:latin typeface="Yu Gothic"/>
+                <a:ea typeface="Yu Gothic"/>
+                <a:cs typeface="Yu Gothic"/>
+              </a:rPr>
+              <a:t>: critic </a:t>
+            </a:r>
+            <a:r>
+              <a:rPr sz="1500" b="1" i="0">
+                <a:solidFill>
+                  <a:srgbClr val="1A1A1A"/>
+                </a:solidFill>
+                <a:latin typeface="Yu Gothic"/>
+                <a:ea typeface="Yu Gothic"/>
+                <a:cs typeface="Yu Gothic"/>
+              </a:rPr>
+              <a:t>2,000 step（バッチ 64）、8.3 時間</a:t>
+            </a:r>
+            <a:r>
+              <a:rPr sz="1500" b="0" i="0">
+                <a:solidFill>
+                  <a:srgbClr val="1A1A1A"/>
+                </a:solidFill>
+                <a:latin typeface="Yu Gothic"/>
+                <a:ea typeface="Yu Gothic"/>
+                <a:cs typeface="Yu Gothic"/>
+              </a:rPr>
+              <a:t>。Step4 は </a:t>
+            </a:r>
+            <a:r>
+              <a:rPr sz="1500" b="1" i="0">
+                <a:solidFill>
+                  <a:srgbClr val="1A1A1A"/>
+                </a:solidFill>
+                <a:latin typeface="Yu Gothic"/>
+                <a:ea typeface="Yu Gothic"/>
+                <a:cs typeface="Yu Gothic"/>
+              </a:rPr>
+              <a:t>1,450 step、16.5 時間</a:t>
             </a:r>
           </a:p>
         </p:txBody>
@@ -23625,7 +23825,40 @@
                 <a:ea typeface="Yu Gothic"/>
                 <a:cs typeface="Yu Gothic"/>
               </a:rPr>
-              <a:t>: 3 環境で、更新/データ比 5、探索ノイズ σ = 0.05。約 5 時間（400 エポック）</a:t>
+              <a:t>: 3 環境で、更新/データ比 5、探索ノイズ σ = 0.05。1・2 つ目の把持の actor は </a:t>
+            </a:r>
+            <a:r>
+              <a:rPr sz="1600" b="1" i="0">
+                <a:solidFill>
+                  <a:srgbClr val="1A1A1A"/>
+                </a:solidFill>
+                <a:latin typeface="Yu Gothic"/>
+                <a:ea typeface="Yu Gothic"/>
+                <a:cs typeface="Yu Gothic"/>
+              </a:rPr>
+              <a:t>750 エポック（約 8 時間）</a:t>
+            </a:r>
+            <a:r>
+              <a:rPr sz="1600" b="0" i="0">
+                <a:solidFill>
+                  <a:srgbClr val="1A1A1A"/>
+                </a:solidFill>
+                <a:latin typeface="Yu Gothic"/>
+                <a:ea typeface="Yu Gothic"/>
+                <a:cs typeface="Yu Gothic"/>
+              </a:rPr>
+              <a:t>、2 つ目専用は </a:t>
+            </a:r>
+            <a:r>
+              <a:rPr sz="1600" b="1" i="0">
+                <a:solidFill>
+                  <a:srgbClr val="1A1A1A"/>
+                </a:solidFill>
+                <a:latin typeface="Yu Gothic"/>
+                <a:ea typeface="Yu Gothic"/>
+                <a:cs typeface="Yu Gothic"/>
+              </a:rPr>
+              <a:t>400 エポック（5.4 時間）</a:t>
             </a:r>
           </a:p>
           <a:p>
@@ -23693,6 +23926,28 @@
                 <a:ea typeface="Yu Gothic"/>
                 <a:cs typeface="Yu Gothic"/>
               </a:rPr>
+              <a:t>RL token</a:t>
+            </a:r>
+            <a:r>
+              <a:rPr sz="1600" b="0" i="0">
+                <a:solidFill>
+                  <a:srgbClr val="1A1A1A"/>
+                </a:solidFill>
+                <a:latin typeface="Yu Gothic"/>
+                <a:ea typeface="Yu Gothic"/>
+                <a:cs typeface="Yu Gothic"/>
+              </a:rPr>
+              <a:t>: 6,000 step、約 25 分。</a:t>
+            </a:r>
+            <a:r>
+              <a:rPr sz="1600" b="1" i="0">
+                <a:solidFill>
+                  <a:srgbClr val="1A1A1A"/>
+                </a:solidFill>
+                <a:latin typeface="Yu Gothic"/>
+                <a:ea typeface="Yu Gothic"/>
+                <a:cs typeface="Yu Gothic"/>
+              </a:rPr>
               <a:t>actor の重み</a:t>
             </a:r>
             <a:r>
@@ -23704,7 +23959,7 @@
                 <a:ea typeface="Yu Gothic"/>
                 <a:cs typeface="Yu Gothic"/>
               </a:rPr>
-              <a:t>: 約 5 MB と、軽量</a:t>
+              <a:t>は、約 5 MB と軽量</a:t>
             </a:r>
           </a:p>
         </p:txBody>
@@ -24830,7 +25085,7 @@
                 <a:ea typeface="Yu Gothic"/>
                 <a:cs typeface="Yu Gothic"/>
               </a:rPr>
-              <a:t>考察: 3 手法の比較</a:t>
+              <a:t>学習コストの比較（学習ステップ数・時間）</a:t>
             </a:r>
           </a:p>
         </p:txBody>
@@ -24872,6 +25127,1477 @@
                 <a:cs typeface="Yu Gothic"/>
               </a:rPr>
               <a:t>26</a:t>
+            </a:r>
+          </a:p>
+        </p:txBody>
+      </p:sp>
+      <p:graphicFrame>
+        <p:nvGraphicFramePr>
+          <p:cNvPr id="4" name="Table 3"/>
+          <p:cNvGraphicFramePr>
+            <a:graphicFrameLocks noGrp="1"/>
+          </p:cNvGraphicFramePr>
+          <p:nvPr/>
+        </p:nvGraphicFramePr>
+        <p:xfrm>
+          <a:off x="548640" y="1005840"/>
+          <a:ext cx="11064240" cy="4169664"/>
+        </p:xfrm>
+        <a:graphic>
+          <a:graphicData uri="http://schemas.openxmlformats.org/drawingml/2006/table">
+            <a:tbl>
+              <a:tblPr firstRow="0" bandRow="0">
+                <a:tableStyleId>{5C22544A-7EE6-4342-B048-85BDC9FD1C3A}</a:tableStyleId>
+              </a:tblPr>
+              <a:tblGrid>
+                <a:gridCol w="1097280"/>
+                <a:gridCol w="3200400"/>
+                <a:gridCol w="2743200"/>
+                <a:gridCol w="731520"/>
+                <a:gridCol w="3291840"/>
+              </a:tblGrid>
+              <a:tr h="384048">
+                <a:tc>
+                  <a:txBody>
+                    <a:bodyPr wrap="square"/>
+                    <a:lstStyle/>
+                    <a:p>
+                      <a:r>
+                        <a:rPr sz="1300" b="1" i="0">
+                          <a:solidFill>
+                            <a:srgbClr val="FFFFFF"/>
+                          </a:solidFill>
+                          <a:latin typeface="Yu Gothic"/>
+                          <a:ea typeface="Yu Gothic"/>
+                          <a:cs typeface="Yu Gothic"/>
+                        </a:rPr>
+                        <a:t>手法</a:t>
+                      </a:r>
+                    </a:p>
+                  </a:txBody>
+                  <a:tcPr anchor="ctr" marL="73152" marR="73152" marT="27432" marB="27432">
+                    <a:solidFill>
+                      <a:srgbClr val="0B66C3"/>
+                    </a:solidFill>
+                  </a:tcPr>
+                </a:tc>
+                <a:tc>
+                  <a:txBody>
+                    <a:bodyPr wrap="square"/>
+                    <a:lstStyle/>
+                    <a:p>
+                      <a:r>
+                        <a:rPr sz="1300" b="1" i="0">
+                          <a:solidFill>
+                            <a:srgbClr val="FFFFFF"/>
+                          </a:solidFill>
+                          <a:latin typeface="Yu Gothic"/>
+                          <a:ea typeface="Yu Gothic"/>
+                          <a:cs typeface="Yu Gothic"/>
+                        </a:rPr>
+                        <a:t>段階</a:t>
+                      </a:r>
+                    </a:p>
+                  </a:txBody>
+                  <a:tcPr anchor="ctr" marL="73152" marR="73152" marT="27432" marB="27432">
+                    <a:solidFill>
+                      <a:srgbClr val="0B66C3"/>
+                    </a:solidFill>
+                  </a:tcPr>
+                </a:tc>
+                <a:tc>
+                  <a:txBody>
+                    <a:bodyPr wrap="square"/>
+                    <a:lstStyle/>
+                    <a:p>
+                      <a:r>
+                        <a:rPr sz="1300" b="1" i="0">
+                          <a:solidFill>
+                            <a:srgbClr val="FFFFFF"/>
+                          </a:solidFill>
+                          <a:latin typeface="Yu Gothic"/>
+                          <a:ea typeface="Yu Gothic"/>
+                          <a:cs typeface="Yu Gothic"/>
+                        </a:rPr>
+                        <a:t>学習ステップ数</a:t>
+                      </a:r>
+                    </a:p>
+                  </a:txBody>
+                  <a:tcPr anchor="ctr" marL="73152" marR="73152" marT="27432" marB="27432">
+                    <a:solidFill>
+                      <a:srgbClr val="0B66C3"/>
+                    </a:solidFill>
+                  </a:tcPr>
+                </a:tc>
+                <a:tc>
+                  <a:txBody>
+                    <a:bodyPr wrap="square"/>
+                    <a:lstStyle/>
+                    <a:p>
+                      <a:pPr algn="ctr"/>
+                      <a:r>
+                        <a:rPr sz="1300" b="1" i="0">
+                          <a:solidFill>
+                            <a:srgbClr val="FFFFFF"/>
+                          </a:solidFill>
+                          <a:latin typeface="Yu Gothic"/>
+                          <a:ea typeface="Yu Gothic"/>
+                          <a:cs typeface="Yu Gothic"/>
+                        </a:rPr>
+                        <a:t>バッチ</a:t>
+                      </a:r>
+                    </a:p>
+                  </a:txBody>
+                  <a:tcPr anchor="ctr" marL="73152" marR="73152" marT="27432" marB="27432">
+                    <a:solidFill>
+                      <a:srgbClr val="0B66C3"/>
+                    </a:solidFill>
+                  </a:tcPr>
+                </a:tc>
+                <a:tc>
+                  <a:txBody>
+                    <a:bodyPr wrap="square"/>
+                    <a:lstStyle/>
+                    <a:p>
+                      <a:r>
+                        <a:rPr sz="1300" b="1" i="0">
+                          <a:solidFill>
+                            <a:srgbClr val="FFFFFF"/>
+                          </a:solidFill>
+                          <a:latin typeface="Yu Gothic"/>
+                          <a:ea typeface="Yu Gothic"/>
+                          <a:cs typeface="Yu Gothic"/>
+                        </a:rPr>
+                        <a:t>所要時間</a:t>
+                      </a:r>
+                    </a:p>
+                  </a:txBody>
+                  <a:tcPr anchor="ctr" marL="73152" marR="73152" marT="27432" marB="27432">
+                    <a:solidFill>
+                      <a:srgbClr val="0B66C3"/>
+                    </a:solidFill>
+                  </a:tcPr>
+                </a:tc>
+              </a:tr>
+              <a:tr h="420624">
+                <a:tc>
+                  <a:txBody>
+                    <a:bodyPr wrap="square"/>
+                    <a:lstStyle/>
+                    <a:p>
+                      <a:r>
+                        <a:rPr sz="1300" b="0" i="0">
+                          <a:solidFill>
+                            <a:srgbClr val="1A1A1A"/>
+                          </a:solidFill>
+                          <a:latin typeface="Yu Gothic"/>
+                          <a:ea typeface="Yu Gothic"/>
+                          <a:cs typeface="Yu Gothic"/>
+                        </a:rPr>
+                        <a:t>RECAP</a:t>
+                      </a:r>
+                    </a:p>
+                  </a:txBody>
+                  <a:tcPr anchor="ctr" marL="73152" marR="73152" marT="27432" marB="27432">
+                    <a:solidFill>
+                      <a:srgbClr val="E8F1FB"/>
+                    </a:solidFill>
+                  </a:tcPr>
+                </a:tc>
+                <a:tc>
+                  <a:txBody>
+                    <a:bodyPr wrap="square"/>
+                    <a:lstStyle/>
+                    <a:p>
+                      <a:r>
+                        <a:rPr sz="1300" b="0" i="0">
+                          <a:solidFill>
+                            <a:srgbClr val="1A1A1A"/>
+                          </a:solidFill>
+                          <a:latin typeface="Yu Gothic"/>
+                          <a:ea typeface="Yu Gothic"/>
+                          <a:cs typeface="Yu Gothic"/>
+                        </a:rPr>
+                        <a:t>Step2: 価値モデル</a:t>
+                      </a:r>
+                    </a:p>
+                  </a:txBody>
+                  <a:tcPr anchor="ctr" marL="73152" marR="73152" marT="27432" marB="27432">
+                    <a:solidFill>
+                      <a:srgbClr val="E8F1FB"/>
+                    </a:solidFill>
+                  </a:tcPr>
+                </a:tc>
+                <a:tc>
+                  <a:txBody>
+                    <a:bodyPr wrap="square"/>
+                    <a:lstStyle/>
+                    <a:p>
+                      <a:r>
+                        <a:rPr sz="1300" b="0" i="0">
+                          <a:solidFill>
+                            <a:srgbClr val="1A1A1A"/>
+                          </a:solidFill>
+                          <a:latin typeface="Yu Gothic"/>
+                          <a:ea typeface="Yu Gothic"/>
+                          <a:cs typeface="Yu Gothic"/>
+                        </a:rPr>
+                        <a:t>4,000 step</a:t>
+                      </a:r>
+                    </a:p>
+                  </a:txBody>
+                  <a:tcPr anchor="ctr" marL="73152" marR="73152" marT="27432" marB="27432">
+                    <a:solidFill>
+                      <a:srgbClr val="E8F1FB"/>
+                    </a:solidFill>
+                  </a:tcPr>
+                </a:tc>
+                <a:tc>
+                  <a:txBody>
+                    <a:bodyPr wrap="square"/>
+                    <a:lstStyle/>
+                    <a:p>
+                      <a:pPr algn="ctr"/>
+                      <a:r>
+                        <a:rPr sz="1300" b="0" i="0">
+                          <a:solidFill>
+                            <a:srgbClr val="1A1A1A"/>
+                          </a:solidFill>
+                          <a:latin typeface="Yu Gothic"/>
+                          <a:ea typeface="Yu Gothic"/>
+                          <a:cs typeface="Yu Gothic"/>
+                        </a:rPr>
+                        <a:t>256</a:t>
+                      </a:r>
+                    </a:p>
+                  </a:txBody>
+                  <a:tcPr anchor="ctr" marL="73152" marR="73152" marT="27432" marB="27432">
+                    <a:solidFill>
+                      <a:srgbClr val="E8F1FB"/>
+                    </a:solidFill>
+                  </a:tcPr>
+                </a:tc>
+                <a:tc>
+                  <a:txBody>
+                    <a:bodyPr wrap="square"/>
+                    <a:lstStyle/>
+                    <a:p>
+                      <a:r>
+                        <a:rPr sz="1300" b="0" i="0">
+                          <a:solidFill>
+                            <a:srgbClr val="1A1A1A"/>
+                          </a:solidFill>
+                          <a:latin typeface="Yu Gothic"/>
+                          <a:ea typeface="Yu Gothic"/>
+                          <a:cs typeface="Yu Gothic"/>
+                        </a:rPr>
+                        <a:t>20.6 時間（18.6 秒/step）</a:t>
+                      </a:r>
+                    </a:p>
+                  </a:txBody>
+                  <a:tcPr anchor="ctr" marL="73152" marR="73152" marT="27432" marB="27432">
+                    <a:solidFill>
+                      <a:srgbClr val="E8F1FB"/>
+                    </a:solidFill>
+                  </a:tcPr>
+                </a:tc>
+              </a:tr>
+              <a:tr h="420624">
+                <a:tc>
+                  <a:txBody>
+                    <a:bodyPr wrap="square"/>
+                    <a:lstStyle/>
+                    <a:p>
+                      <a:r>
+                        <a:rPr sz="1300" b="0" i="0">
+                          <a:solidFill>
+                            <a:srgbClr val="1A1A1A"/>
+                          </a:solidFill>
+                          <a:latin typeface="Yu Gothic"/>
+                          <a:ea typeface="Yu Gothic"/>
+                          <a:cs typeface="Yu Gothic"/>
+                        </a:rPr>
+                        <a:t>RECAP</a:t>
+                      </a:r>
+                    </a:p>
+                  </a:txBody>
+                  <a:tcPr anchor="ctr" marL="73152" marR="73152" marT="27432" marB="27432">
+                    <a:solidFill>
+                      <a:srgbClr val="E8F1FB"/>
+                    </a:solidFill>
+                  </a:tcPr>
+                </a:tc>
+                <a:tc>
+                  <a:txBody>
+                    <a:bodyPr wrap="square"/>
+                    <a:lstStyle/>
+                    <a:p>
+                      <a:r>
+                        <a:rPr sz="1300" b="0" i="0">
+                          <a:solidFill>
+                            <a:srgbClr val="1A1A1A"/>
+                          </a:solidFill>
+                          <a:latin typeface="Yu Gothic"/>
+                          <a:ea typeface="Yu Gothic"/>
+                          <a:cs typeface="Yu Gothic"/>
+                        </a:rPr>
+                        <a:t>Step3: advantage 計算</a:t>
+                      </a:r>
+                    </a:p>
+                  </a:txBody>
+                  <a:tcPr anchor="ctr" marL="73152" marR="73152" marT="27432" marB="27432">
+                    <a:solidFill>
+                      <a:srgbClr val="E8F1FB"/>
+                    </a:solidFill>
+                  </a:tcPr>
+                </a:tc>
+                <a:tc>
+                  <a:txBody>
+                    <a:bodyPr wrap="square"/>
+                    <a:lstStyle/>
+                    <a:p>
+                      <a:r>
+                        <a:rPr sz="1300" b="0" i="0">
+                          <a:solidFill>
+                            <a:srgbClr val="1A1A1A"/>
+                          </a:solidFill>
+                          <a:latin typeface="Yu Gothic"/>
+                          <a:ea typeface="Yu Gothic"/>
+                          <a:cs typeface="Yu Gothic"/>
+                        </a:rPr>
+                        <a:t>62.3 万サンプル（推論のみ）</a:t>
+                      </a:r>
+                    </a:p>
+                  </a:txBody>
+                  <a:tcPr anchor="ctr" marL="73152" marR="73152" marT="27432" marB="27432">
+                    <a:solidFill>
+                      <a:srgbClr val="E8F1FB"/>
+                    </a:solidFill>
+                  </a:tcPr>
+                </a:tc>
+                <a:tc>
+                  <a:txBody>
+                    <a:bodyPr wrap="square"/>
+                    <a:lstStyle/>
+                    <a:p>
+                      <a:pPr algn="ctr"/>
+                      <a:r>
+                        <a:rPr sz="1300" b="0" i="0">
+                          <a:solidFill>
+                            <a:srgbClr val="1A1A1A"/>
+                          </a:solidFill>
+                          <a:latin typeface="Yu Gothic"/>
+                          <a:ea typeface="Yu Gothic"/>
+                          <a:cs typeface="Yu Gothic"/>
+                        </a:rPr>
+                        <a:t>—</a:t>
+                      </a:r>
+                    </a:p>
+                  </a:txBody>
+                  <a:tcPr anchor="ctr" marL="73152" marR="73152" marT="27432" marB="27432">
+                    <a:solidFill>
+                      <a:srgbClr val="E8F1FB"/>
+                    </a:solidFill>
+                  </a:tcPr>
+                </a:tc>
+                <a:tc>
+                  <a:txBody>
+                    <a:bodyPr wrap="square"/>
+                    <a:lstStyle/>
+                    <a:p>
+                      <a:r>
+                        <a:rPr sz="1300" b="0" i="0">
+                          <a:solidFill>
+                            <a:srgbClr val="1A1A1A"/>
+                          </a:solidFill>
+                          <a:latin typeface="Yu Gothic"/>
+                          <a:ea typeface="Yu Gothic"/>
+                          <a:cs typeface="Yu Gothic"/>
+                        </a:rPr>
+                        <a:t>4.2 時間（41 サンプル/秒）</a:t>
+                      </a:r>
+                    </a:p>
+                  </a:txBody>
+                  <a:tcPr anchor="ctr" marL="73152" marR="73152" marT="27432" marB="27432">
+                    <a:solidFill>
+                      <a:srgbClr val="E8F1FB"/>
+                    </a:solidFill>
+                  </a:tcPr>
+                </a:tc>
+              </a:tr>
+              <a:tr h="420624">
+                <a:tc>
+                  <a:txBody>
+                    <a:bodyPr wrap="square"/>
+                    <a:lstStyle/>
+                    <a:p>
+                      <a:r>
+                        <a:rPr sz="1300" b="0" i="0">
+                          <a:solidFill>
+                            <a:srgbClr val="1A1A1A"/>
+                          </a:solidFill>
+                          <a:latin typeface="Yu Gothic"/>
+                          <a:ea typeface="Yu Gothic"/>
+                          <a:cs typeface="Yu Gothic"/>
+                        </a:rPr>
+                        <a:t>RECAP</a:t>
+                      </a:r>
+                    </a:p>
+                  </a:txBody>
+                  <a:tcPr anchor="ctr" marL="73152" marR="73152" marT="27432" marB="27432">
+                    <a:solidFill>
+                      <a:srgbClr val="E8F1FB"/>
+                    </a:solidFill>
+                  </a:tcPr>
+                </a:tc>
+                <a:tc>
+                  <a:txBody>
+                    <a:bodyPr wrap="square"/>
+                    <a:lstStyle/>
+                    <a:p>
+                      <a:r>
+                        <a:rPr sz="1300" b="0" i="0">
+                          <a:solidFill>
+                            <a:srgbClr val="1A1A1A"/>
+                          </a:solidFill>
+                          <a:latin typeface="Yu Gothic"/>
+                          <a:ea typeface="Yu Gothic"/>
+                          <a:cs typeface="Yu Gothic"/>
+                        </a:rPr>
+                        <a:t>Step4: 方策（SFT）</a:t>
+                      </a:r>
+                    </a:p>
+                  </a:txBody>
+                  <a:tcPr anchor="ctr" marL="73152" marR="73152" marT="27432" marB="27432">
+                    <a:solidFill>
+                      <a:srgbClr val="E8F1FB"/>
+                    </a:solidFill>
+                  </a:tcPr>
+                </a:tc>
+                <a:tc>
+                  <a:txBody>
+                    <a:bodyPr wrap="square"/>
+                    <a:lstStyle/>
+                    <a:p>
+                      <a:r>
+                        <a:rPr sz="1300" b="0" i="0">
+                          <a:solidFill>
+                            <a:srgbClr val="1A1A1A"/>
+                          </a:solidFill>
+                          <a:latin typeface="Yu Gothic"/>
+                          <a:ea typeface="Yu Gothic"/>
+                          <a:cs typeface="Yu Gothic"/>
+                        </a:rPr>
+                        <a:t>2,000 step</a:t>
+                      </a:r>
+                    </a:p>
+                  </a:txBody>
+                  <a:tcPr anchor="ctr" marL="73152" marR="73152" marT="27432" marB="27432">
+                    <a:solidFill>
+                      <a:srgbClr val="E8F1FB"/>
+                    </a:solidFill>
+                  </a:tcPr>
+                </a:tc>
+                <a:tc>
+                  <a:txBody>
+                    <a:bodyPr wrap="square"/>
+                    <a:lstStyle/>
+                    <a:p>
+                      <a:pPr algn="ctr"/>
+                      <a:r>
+                        <a:rPr sz="1300" b="0" i="0">
+                          <a:solidFill>
+                            <a:srgbClr val="1A1A1A"/>
+                          </a:solidFill>
+                          <a:latin typeface="Yu Gothic"/>
+                          <a:ea typeface="Yu Gothic"/>
+                          <a:cs typeface="Yu Gothic"/>
+                        </a:rPr>
+                        <a:t>256</a:t>
+                      </a:r>
+                    </a:p>
+                  </a:txBody>
+                  <a:tcPr anchor="ctr" marL="73152" marR="73152" marT="27432" marB="27432">
+                    <a:solidFill>
+                      <a:srgbClr val="E8F1FB"/>
+                    </a:solidFill>
+                  </a:tcPr>
+                </a:tc>
+                <a:tc>
+                  <a:txBody>
+                    <a:bodyPr wrap="square"/>
+                    <a:lstStyle/>
+                    <a:p>
+                      <a:r>
+                        <a:rPr sz="1300" b="0" i="0">
+                          <a:solidFill>
+                            <a:srgbClr val="1A1A1A"/>
+                          </a:solidFill>
+                          <a:latin typeface="Yu Gothic"/>
+                          <a:ea typeface="Yu Gothic"/>
+                          <a:cs typeface="Yu Gothic"/>
+                        </a:rPr>
+                        <a:t>20.3 時間（約 36 秒/step）</a:t>
+                      </a:r>
+                    </a:p>
+                  </a:txBody>
+                  <a:tcPr anchor="ctr" marL="73152" marR="73152" marT="27432" marB="27432">
+                    <a:solidFill>
+                      <a:srgbClr val="E8F1FB"/>
+                    </a:solidFill>
+                  </a:tcPr>
+                </a:tc>
+              </a:tr>
+              <a:tr h="420624">
+                <a:tc>
+                  <a:txBody>
+                    <a:bodyPr wrap="square"/>
+                    <a:lstStyle/>
+                    <a:p>
+                      <a:r>
+                        <a:rPr sz="1300" b="0" i="0">
+                          <a:solidFill>
+                            <a:srgbClr val="1A1A1A"/>
+                          </a:solidFill>
+                          <a:latin typeface="Yu Gothic"/>
+                          <a:ea typeface="Yu Gothic"/>
+                          <a:cs typeface="Yu Gothic"/>
+                        </a:rPr>
+                        <a:t>STEAM</a:t>
+                      </a:r>
+                    </a:p>
+                  </a:txBody>
+                  <a:tcPr anchor="ctr" marL="73152" marR="73152" marT="27432" marB="27432">
+                    <a:solidFill>
+                      <a:srgbClr val="F3F7FC"/>
+                    </a:solidFill>
+                  </a:tcPr>
+                </a:tc>
+                <a:tc>
+                  <a:txBody>
+                    <a:bodyPr wrap="square"/>
+                    <a:lstStyle/>
+                    <a:p>
+                      <a:r>
+                        <a:rPr sz="1300" b="0" i="0">
+                          <a:solidFill>
+                            <a:srgbClr val="1A1A1A"/>
+                          </a:solidFill>
+                          <a:latin typeface="Yu Gothic"/>
+                          <a:ea typeface="Yu Gothic"/>
+                          <a:cs typeface="Yu Gothic"/>
+                        </a:rPr>
+                        <a:t>critic の学習</a:t>
+                      </a:r>
+                    </a:p>
+                  </a:txBody>
+                  <a:tcPr anchor="ctr" marL="73152" marR="73152" marT="27432" marB="27432">
+                    <a:solidFill>
+                      <a:srgbClr val="F3F7FC"/>
+                    </a:solidFill>
+                  </a:tcPr>
+                </a:tc>
+                <a:tc>
+                  <a:txBody>
+                    <a:bodyPr wrap="square"/>
+                    <a:lstStyle/>
+                    <a:p>
+                      <a:r>
+                        <a:rPr sz="1300" b="0" i="0">
+                          <a:solidFill>
+                            <a:srgbClr val="1A1A1A"/>
+                          </a:solidFill>
+                          <a:latin typeface="Yu Gothic"/>
+                          <a:ea typeface="Yu Gothic"/>
+                          <a:cs typeface="Yu Gothic"/>
+                        </a:rPr>
+                        <a:t>2,000 step</a:t>
+                      </a:r>
+                    </a:p>
+                  </a:txBody>
+                  <a:tcPr anchor="ctr" marL="73152" marR="73152" marT="27432" marB="27432">
+                    <a:solidFill>
+                      <a:srgbClr val="F3F7FC"/>
+                    </a:solidFill>
+                  </a:tcPr>
+                </a:tc>
+                <a:tc>
+                  <a:txBody>
+                    <a:bodyPr wrap="square"/>
+                    <a:lstStyle/>
+                    <a:p>
+                      <a:pPr algn="ctr"/>
+                      <a:r>
+                        <a:rPr sz="1300" b="0" i="0">
+                          <a:solidFill>
+                            <a:srgbClr val="1A1A1A"/>
+                          </a:solidFill>
+                          <a:latin typeface="Yu Gothic"/>
+                          <a:ea typeface="Yu Gothic"/>
+                          <a:cs typeface="Yu Gothic"/>
+                        </a:rPr>
+                        <a:t>64</a:t>
+                      </a:r>
+                    </a:p>
+                  </a:txBody>
+                  <a:tcPr anchor="ctr" marL="73152" marR="73152" marT="27432" marB="27432">
+                    <a:solidFill>
+                      <a:srgbClr val="F3F7FC"/>
+                    </a:solidFill>
+                  </a:tcPr>
+                </a:tc>
+                <a:tc>
+                  <a:txBody>
+                    <a:bodyPr wrap="square"/>
+                    <a:lstStyle/>
+                    <a:p>
+                      <a:r>
+                        <a:rPr sz="1300" b="0" i="0">
+                          <a:solidFill>
+                            <a:srgbClr val="1A1A1A"/>
+                          </a:solidFill>
+                          <a:latin typeface="Yu Gothic"/>
+                          <a:ea typeface="Yu Gothic"/>
+                          <a:cs typeface="Yu Gothic"/>
+                        </a:rPr>
+                        <a:t>8.3 時間（14.9 秒/step）</a:t>
+                      </a:r>
+                    </a:p>
+                  </a:txBody>
+                  <a:tcPr anchor="ctr" marL="73152" marR="73152" marT="27432" marB="27432">
+                    <a:solidFill>
+                      <a:srgbClr val="F3F7FC"/>
+                    </a:solidFill>
+                  </a:tcPr>
+                </a:tc>
+              </a:tr>
+              <a:tr h="420624">
+                <a:tc>
+                  <a:txBody>
+                    <a:bodyPr wrap="square"/>
+                    <a:lstStyle/>
+                    <a:p>
+                      <a:r>
+                        <a:rPr sz="1300" b="0" i="0">
+                          <a:solidFill>
+                            <a:srgbClr val="1A1A1A"/>
+                          </a:solidFill>
+                          <a:latin typeface="Yu Gothic"/>
+                          <a:ea typeface="Yu Gothic"/>
+                          <a:cs typeface="Yu Gothic"/>
+                        </a:rPr>
+                        <a:t>STEAM</a:t>
+                      </a:r>
+                    </a:p>
+                  </a:txBody>
+                  <a:tcPr anchor="ctr" marL="73152" marR="73152" marT="27432" marB="27432">
+                    <a:solidFill>
+                      <a:srgbClr val="FFFFFF"/>
+                    </a:solidFill>
+                  </a:tcPr>
+                </a:tc>
+                <a:tc>
+                  <a:txBody>
+                    <a:bodyPr wrap="square"/>
+                    <a:lstStyle/>
+                    <a:p>
+                      <a:r>
+                        <a:rPr sz="1300" b="0" i="0">
+                          <a:solidFill>
+                            <a:srgbClr val="1A1A1A"/>
+                          </a:solidFill>
+                          <a:latin typeface="Yu Gothic"/>
+                          <a:ea typeface="Yu Gothic"/>
+                          <a:cs typeface="Yu Gothic"/>
+                        </a:rPr>
+                        <a:t>advantage 計算</a:t>
+                      </a:r>
+                    </a:p>
+                  </a:txBody>
+                  <a:tcPr anchor="ctr" marL="73152" marR="73152" marT="27432" marB="27432">
+                    <a:solidFill>
+                      <a:srgbClr val="FFFFFF"/>
+                    </a:solidFill>
+                  </a:tcPr>
+                </a:tc>
+                <a:tc>
+                  <a:txBody>
+                    <a:bodyPr wrap="square"/>
+                    <a:lstStyle/>
+                    <a:p>
+                      <a:r>
+                        <a:rPr sz="1300" b="0" i="0">
+                          <a:solidFill>
+                            <a:srgbClr val="1A1A1A"/>
+                          </a:solidFill>
+                          <a:latin typeface="Yu Gothic"/>
+                          <a:ea typeface="Yu Gothic"/>
+                          <a:cs typeface="Yu Gothic"/>
+                        </a:rPr>
+                        <a:t>15.5 万フレーム/データセット</a:t>
+                      </a:r>
+                    </a:p>
+                  </a:txBody>
+                  <a:tcPr anchor="ctr" marL="73152" marR="73152" marT="27432" marB="27432">
+                    <a:solidFill>
+                      <a:srgbClr val="FFFFFF"/>
+                    </a:solidFill>
+                  </a:tcPr>
+                </a:tc>
+                <a:tc>
+                  <a:txBody>
+                    <a:bodyPr wrap="square"/>
+                    <a:lstStyle/>
+                    <a:p>
+                      <a:pPr algn="ctr"/>
+                      <a:r>
+                        <a:rPr sz="1300" b="0" i="0">
+                          <a:solidFill>
+                            <a:srgbClr val="1A1A1A"/>
+                          </a:solidFill>
+                          <a:latin typeface="Yu Gothic"/>
+                          <a:ea typeface="Yu Gothic"/>
+                          <a:cs typeface="Yu Gothic"/>
+                        </a:rPr>
+                        <a:t>—</a:t>
+                      </a:r>
+                    </a:p>
+                  </a:txBody>
+                  <a:tcPr anchor="ctr" marL="73152" marR="73152" marT="27432" marB="27432">
+                    <a:solidFill>
+                      <a:srgbClr val="FFFFFF"/>
+                    </a:solidFill>
+                  </a:tcPr>
+                </a:tc>
+                <a:tc>
+                  <a:txBody>
+                    <a:bodyPr wrap="square"/>
+                    <a:lstStyle/>
+                    <a:p>
+                      <a:r>
+                        <a:rPr sz="1300" b="0" i="0">
+                          <a:solidFill>
+                            <a:srgbClr val="1A1A1A"/>
+                          </a:solidFill>
+                          <a:latin typeface="Yu Gothic"/>
+                          <a:ea typeface="Yu Gothic"/>
+                          <a:cs typeface="Yu Gothic"/>
+                        </a:rPr>
+                        <a:t>約 2.4 時間/データセット</a:t>
+                      </a:r>
+                    </a:p>
+                  </a:txBody>
+                  <a:tcPr anchor="ctr" marL="73152" marR="73152" marT="27432" marB="27432">
+                    <a:solidFill>
+                      <a:srgbClr val="FFFFFF"/>
+                    </a:solidFill>
+                  </a:tcPr>
+                </a:tc>
+              </a:tr>
+              <a:tr h="420624">
+                <a:tc>
+                  <a:txBody>
+                    <a:bodyPr wrap="square"/>
+                    <a:lstStyle/>
+                    <a:p>
+                      <a:r>
+                        <a:rPr sz="1300" b="0" i="0">
+                          <a:solidFill>
+                            <a:srgbClr val="1A1A1A"/>
+                          </a:solidFill>
+                          <a:latin typeface="Yu Gothic"/>
+                          <a:ea typeface="Yu Gothic"/>
+                          <a:cs typeface="Yu Gothic"/>
+                        </a:rPr>
+                        <a:t>STEAM</a:t>
+                      </a:r>
+                    </a:p>
+                  </a:txBody>
+                  <a:tcPr anchor="ctr" marL="73152" marR="73152" marT="27432" marB="27432">
+                    <a:solidFill>
+                      <a:srgbClr val="F3F7FC"/>
+                    </a:solidFill>
+                  </a:tcPr>
+                </a:tc>
+                <a:tc>
+                  <a:txBody>
+                    <a:bodyPr wrap="square"/>
+                    <a:lstStyle/>
+                    <a:p>
+                      <a:r>
+                        <a:rPr sz="1300" b="0" i="0">
+                          <a:solidFill>
+                            <a:srgbClr val="1A1A1A"/>
+                          </a:solidFill>
+                          <a:latin typeface="Yu Gothic"/>
+                          <a:ea typeface="Yu Gothic"/>
+                          <a:cs typeface="Yu Gothic"/>
+                        </a:rPr>
+                        <a:t>Step4: 方策（SFT）</a:t>
+                      </a:r>
+                    </a:p>
+                  </a:txBody>
+                  <a:tcPr anchor="ctr" marL="73152" marR="73152" marT="27432" marB="27432">
+                    <a:solidFill>
+                      <a:srgbClr val="F3F7FC"/>
+                    </a:solidFill>
+                  </a:tcPr>
+                </a:tc>
+                <a:tc>
+                  <a:txBody>
+                    <a:bodyPr wrap="square"/>
+                    <a:lstStyle/>
+                    <a:p>
+                      <a:r>
+                        <a:rPr sz="1300" b="0" i="0">
+                          <a:solidFill>
+                            <a:srgbClr val="1A1A1A"/>
+                          </a:solidFill>
+                          <a:latin typeface="Yu Gothic"/>
+                          <a:ea typeface="Yu Gothic"/>
+                          <a:cs typeface="Yu Gothic"/>
+                        </a:rPr>
+                        <a:t>1,450 step</a:t>
+                      </a:r>
+                    </a:p>
+                  </a:txBody>
+                  <a:tcPr anchor="ctr" marL="73152" marR="73152" marT="27432" marB="27432">
+                    <a:solidFill>
+                      <a:srgbClr val="F3F7FC"/>
+                    </a:solidFill>
+                  </a:tcPr>
+                </a:tc>
+                <a:tc>
+                  <a:txBody>
+                    <a:bodyPr wrap="square"/>
+                    <a:lstStyle/>
+                    <a:p>
+                      <a:pPr algn="ctr"/>
+                      <a:r>
+                        <a:rPr sz="1300" b="0" i="0">
+                          <a:solidFill>
+                            <a:srgbClr val="1A1A1A"/>
+                          </a:solidFill>
+                          <a:latin typeface="Yu Gothic"/>
+                          <a:ea typeface="Yu Gothic"/>
+                          <a:cs typeface="Yu Gothic"/>
+                        </a:rPr>
+                        <a:t>256</a:t>
+                      </a:r>
+                    </a:p>
+                  </a:txBody>
+                  <a:tcPr anchor="ctr" marL="73152" marR="73152" marT="27432" marB="27432">
+                    <a:solidFill>
+                      <a:srgbClr val="F3F7FC"/>
+                    </a:solidFill>
+                  </a:tcPr>
+                </a:tc>
+                <a:tc>
+                  <a:txBody>
+                    <a:bodyPr wrap="square"/>
+                    <a:lstStyle/>
+                    <a:p>
+                      <a:r>
+                        <a:rPr sz="1300" b="0" i="0">
+                          <a:solidFill>
+                            <a:srgbClr val="1A1A1A"/>
+                          </a:solidFill>
+                          <a:latin typeface="Yu Gothic"/>
+                          <a:ea typeface="Yu Gothic"/>
+                          <a:cs typeface="Yu Gothic"/>
+                        </a:rPr>
+                        <a:t>16.5 時間（約 41 秒/step）</a:t>
+                      </a:r>
+                    </a:p>
+                  </a:txBody>
+                  <a:tcPr anchor="ctr" marL="73152" marR="73152" marT="27432" marB="27432">
+                    <a:solidFill>
+                      <a:srgbClr val="F3F7FC"/>
+                    </a:solidFill>
+                  </a:tcPr>
+                </a:tc>
+              </a:tr>
+              <a:tr h="420624">
+                <a:tc>
+                  <a:txBody>
+                    <a:bodyPr wrap="square"/>
+                    <a:lstStyle/>
+                    <a:p>
+                      <a:r>
+                        <a:rPr sz="1300" b="0" i="0">
+                          <a:solidFill>
+                            <a:srgbClr val="1A1A1A"/>
+                          </a:solidFill>
+                          <a:latin typeface="Yu Gothic"/>
+                          <a:ea typeface="Yu Gothic"/>
+                          <a:cs typeface="Yu Gothic"/>
+                        </a:rPr>
+                        <a:t>RL Token</a:t>
+                      </a:r>
+                    </a:p>
+                  </a:txBody>
+                  <a:tcPr anchor="ctr" marL="73152" marR="73152" marT="27432" marB="27432">
+                    <a:solidFill>
+                      <a:srgbClr val="E8F1FB"/>
+                    </a:solidFill>
+                  </a:tcPr>
+                </a:tc>
+                <a:tc>
+                  <a:txBody>
+                    <a:bodyPr wrap="square"/>
+                    <a:lstStyle/>
+                    <a:p>
+                      <a:r>
+                        <a:rPr sz="1300" b="0" i="0">
+                          <a:solidFill>
+                            <a:srgbClr val="1A1A1A"/>
+                          </a:solidFill>
+                          <a:latin typeface="Yu Gothic"/>
+                          <a:ea typeface="Yu Gothic"/>
+                          <a:cs typeface="Yu Gothic"/>
+                        </a:rPr>
+                        <a:t>Stage 1: RL token</a:t>
+                      </a:r>
+                    </a:p>
+                  </a:txBody>
+                  <a:tcPr anchor="ctr" marL="73152" marR="73152" marT="27432" marB="27432">
+                    <a:solidFill>
+                      <a:srgbClr val="E8F1FB"/>
+                    </a:solidFill>
+                  </a:tcPr>
+                </a:tc>
+                <a:tc>
+                  <a:txBody>
+                    <a:bodyPr wrap="square"/>
+                    <a:lstStyle/>
+                    <a:p>
+                      <a:r>
+                        <a:rPr sz="1300" b="0" i="0">
+                          <a:solidFill>
+                            <a:srgbClr val="1A1A1A"/>
+                          </a:solidFill>
+                          <a:latin typeface="Yu Gothic"/>
+                          <a:ea typeface="Yu Gothic"/>
+                          <a:cs typeface="Yu Gothic"/>
+                        </a:rPr>
+                        <a:t>6,000 step</a:t>
+                      </a:r>
+                    </a:p>
+                  </a:txBody>
+                  <a:tcPr anchor="ctr" marL="73152" marR="73152" marT="27432" marB="27432">
+                    <a:solidFill>
+                      <a:srgbClr val="E8F1FB"/>
+                    </a:solidFill>
+                  </a:tcPr>
+                </a:tc>
+                <a:tc>
+                  <a:txBody>
+                    <a:bodyPr wrap="square"/>
+                    <a:lstStyle/>
+                    <a:p>
+                      <a:pPr algn="ctr"/>
+                      <a:r>
+                        <a:rPr sz="1300" b="0" i="0">
+                          <a:solidFill>
+                            <a:srgbClr val="1A1A1A"/>
+                          </a:solidFill>
+                          <a:latin typeface="Yu Gothic"/>
+                          <a:ea typeface="Yu Gothic"/>
+                          <a:cs typeface="Yu Gothic"/>
+                        </a:rPr>
+                        <a:t>—</a:t>
+                      </a:r>
+                    </a:p>
+                  </a:txBody>
+                  <a:tcPr anchor="ctr" marL="73152" marR="73152" marT="27432" marB="27432">
+                    <a:solidFill>
+                      <a:srgbClr val="E8F1FB"/>
+                    </a:solidFill>
+                  </a:tcPr>
+                </a:tc>
+                <a:tc>
+                  <a:txBody>
+                    <a:bodyPr wrap="square"/>
+                    <a:lstStyle/>
+                    <a:p>
+                      <a:r>
+                        <a:rPr sz="1300" b="0" i="0">
+                          <a:solidFill>
+                            <a:srgbClr val="1A1A1A"/>
+                          </a:solidFill>
+                          <a:latin typeface="Yu Gothic"/>
+                          <a:ea typeface="Yu Gothic"/>
+                          <a:cs typeface="Yu Gothic"/>
+                        </a:rPr>
+                        <a:t>約 25 分</a:t>
+                      </a:r>
+                    </a:p>
+                  </a:txBody>
+                  <a:tcPr anchor="ctr" marL="73152" marR="73152" marT="27432" marB="27432">
+                    <a:solidFill>
+                      <a:srgbClr val="E8F1FB"/>
+                    </a:solidFill>
+                  </a:tcPr>
+                </a:tc>
+              </a:tr>
+              <a:tr h="420624">
+                <a:tc>
+                  <a:txBody>
+                    <a:bodyPr wrap="square"/>
+                    <a:lstStyle/>
+                    <a:p>
+                      <a:r>
+                        <a:rPr sz="1300" b="0" i="0">
+                          <a:solidFill>
+                            <a:srgbClr val="1A1A1A"/>
+                          </a:solidFill>
+                          <a:latin typeface="Yu Gothic"/>
+                          <a:ea typeface="Yu Gothic"/>
+                          <a:cs typeface="Yu Gothic"/>
+                        </a:rPr>
+                        <a:t>RL Token</a:t>
+                      </a:r>
+                    </a:p>
+                  </a:txBody>
+                  <a:tcPr anchor="ctr" marL="73152" marR="73152" marT="27432" marB="27432">
+                    <a:solidFill>
+                      <a:srgbClr val="E8F1FB"/>
+                    </a:solidFill>
+                  </a:tcPr>
+                </a:tc>
+                <a:tc>
+                  <a:txBody>
+                    <a:bodyPr wrap="square"/>
+                    <a:lstStyle/>
+                    <a:p>
+                      <a:r>
+                        <a:rPr sz="1300" b="0" i="0">
+                          <a:solidFill>
+                            <a:srgbClr val="1A1A1A"/>
+                          </a:solidFill>
+                          <a:latin typeface="Yu Gothic"/>
+                          <a:ea typeface="Yu Gothic"/>
+                          <a:cs typeface="Yu Gothic"/>
+                        </a:rPr>
+                        <a:t>Stage 2: 1・2 つ目の把持の actor</a:t>
+                      </a:r>
+                    </a:p>
+                  </a:txBody>
+                  <a:tcPr anchor="ctr" marL="73152" marR="73152" marT="27432" marB="27432">
+                    <a:solidFill>
+                      <a:srgbClr val="E8F1FB"/>
+                    </a:solidFill>
+                  </a:tcPr>
+                </a:tc>
+                <a:tc>
+                  <a:txBody>
+                    <a:bodyPr wrap="square"/>
+                    <a:lstStyle/>
+                    <a:p>
+                      <a:r>
+                        <a:rPr sz="1300" b="0" i="0">
+                          <a:solidFill>
+                            <a:srgbClr val="1A1A1A"/>
+                          </a:solidFill>
+                          <a:latin typeface="Yu Gothic"/>
+                          <a:ea typeface="Yu Gothic"/>
+                          <a:cs typeface="Yu Gothic"/>
+                        </a:rPr>
+                        <a:t>750 エポック</a:t>
+                      </a:r>
+                    </a:p>
+                  </a:txBody>
+                  <a:tcPr anchor="ctr" marL="73152" marR="73152" marT="27432" marB="27432">
+                    <a:solidFill>
+                      <a:srgbClr val="E8F1FB"/>
+                    </a:solidFill>
+                  </a:tcPr>
+                </a:tc>
+                <a:tc>
+                  <a:txBody>
+                    <a:bodyPr wrap="square"/>
+                    <a:lstStyle/>
+                    <a:p>
+                      <a:pPr algn="ctr"/>
+                      <a:r>
+                        <a:rPr sz="1300" b="0" i="0">
+                          <a:solidFill>
+                            <a:srgbClr val="1A1A1A"/>
+                          </a:solidFill>
+                          <a:latin typeface="Yu Gothic"/>
+                          <a:ea typeface="Yu Gothic"/>
+                          <a:cs typeface="Yu Gothic"/>
+                        </a:rPr>
+                        <a:t>—</a:t>
+                      </a:r>
+                    </a:p>
+                  </a:txBody>
+                  <a:tcPr anchor="ctr" marL="73152" marR="73152" marT="27432" marB="27432">
+                    <a:solidFill>
+                      <a:srgbClr val="E8F1FB"/>
+                    </a:solidFill>
+                  </a:tcPr>
+                </a:tc>
+                <a:tc>
+                  <a:txBody>
+                    <a:bodyPr wrap="square"/>
+                    <a:lstStyle/>
+                    <a:p>
+                      <a:r>
+                        <a:rPr sz="1300" b="0" i="0">
+                          <a:solidFill>
+                            <a:srgbClr val="1A1A1A"/>
+                          </a:solidFill>
+                          <a:latin typeface="Yu Gothic"/>
+                          <a:ea typeface="Yu Gothic"/>
+                          <a:cs typeface="Yu Gothic"/>
+                        </a:rPr>
+                        <a:t>約 8.2 時間</a:t>
+                      </a:r>
+                    </a:p>
+                  </a:txBody>
+                  <a:tcPr anchor="ctr" marL="73152" marR="73152" marT="27432" marB="27432">
+                    <a:solidFill>
+                      <a:srgbClr val="E8F1FB"/>
+                    </a:solidFill>
+                  </a:tcPr>
+                </a:tc>
+              </a:tr>
+              <a:tr h="420624">
+                <a:tc>
+                  <a:txBody>
+                    <a:bodyPr wrap="square"/>
+                    <a:lstStyle/>
+                    <a:p>
+                      <a:r>
+                        <a:rPr sz="1300" b="0" i="0">
+                          <a:solidFill>
+                            <a:srgbClr val="1A1A1A"/>
+                          </a:solidFill>
+                          <a:latin typeface="Yu Gothic"/>
+                          <a:ea typeface="Yu Gothic"/>
+                          <a:cs typeface="Yu Gothic"/>
+                        </a:rPr>
+                        <a:t>RL Token</a:t>
+                      </a:r>
+                    </a:p>
+                  </a:txBody>
+                  <a:tcPr anchor="ctr" marL="73152" marR="73152" marT="27432" marB="27432">
+                    <a:solidFill>
+                      <a:srgbClr val="E8F1FB"/>
+                    </a:solidFill>
+                  </a:tcPr>
+                </a:tc>
+                <a:tc>
+                  <a:txBody>
+                    <a:bodyPr wrap="square"/>
+                    <a:lstStyle/>
+                    <a:p>
+                      <a:r>
+                        <a:rPr sz="1300" b="0" i="0">
+                          <a:solidFill>
+                            <a:srgbClr val="1A1A1A"/>
+                          </a:solidFill>
+                          <a:latin typeface="Yu Gothic"/>
+                          <a:ea typeface="Yu Gothic"/>
+                          <a:cs typeface="Yu Gothic"/>
+                        </a:rPr>
+                        <a:t>2 つ目専用の actor</a:t>
+                      </a:r>
+                    </a:p>
+                  </a:txBody>
+                  <a:tcPr anchor="ctr" marL="73152" marR="73152" marT="27432" marB="27432">
+                    <a:solidFill>
+                      <a:srgbClr val="E8F1FB"/>
+                    </a:solidFill>
+                  </a:tcPr>
+                </a:tc>
+                <a:tc>
+                  <a:txBody>
+                    <a:bodyPr wrap="square"/>
+                    <a:lstStyle/>
+                    <a:p>
+                      <a:r>
+                        <a:rPr sz="1300" b="0" i="0">
+                          <a:solidFill>
+                            <a:srgbClr val="1A1A1A"/>
+                          </a:solidFill>
+                          <a:latin typeface="Yu Gothic"/>
+                          <a:ea typeface="Yu Gothic"/>
+                          <a:cs typeface="Yu Gothic"/>
+                        </a:rPr>
+                        <a:t>400 エポック（更新 約 7.2 万回）</a:t>
+                      </a:r>
+                    </a:p>
+                  </a:txBody>
+                  <a:tcPr anchor="ctr" marL="73152" marR="73152" marT="27432" marB="27432">
+                    <a:solidFill>
+                      <a:srgbClr val="E8F1FB"/>
+                    </a:solidFill>
+                  </a:tcPr>
+                </a:tc>
+                <a:tc>
+                  <a:txBody>
+                    <a:bodyPr wrap="square"/>
+                    <a:lstStyle/>
+                    <a:p>
+                      <a:pPr algn="ctr"/>
+                      <a:r>
+                        <a:rPr sz="1300" b="0" i="0">
+                          <a:solidFill>
+                            <a:srgbClr val="1A1A1A"/>
+                          </a:solidFill>
+                          <a:latin typeface="Yu Gothic"/>
+                          <a:ea typeface="Yu Gothic"/>
+                          <a:cs typeface="Yu Gothic"/>
+                        </a:rPr>
+                        <a:t>—</a:t>
+                      </a:r>
+                    </a:p>
+                  </a:txBody>
+                  <a:tcPr anchor="ctr" marL="73152" marR="73152" marT="27432" marB="27432">
+                    <a:solidFill>
+                      <a:srgbClr val="E8F1FB"/>
+                    </a:solidFill>
+                  </a:tcPr>
+                </a:tc>
+                <a:tc>
+                  <a:txBody>
+                    <a:bodyPr wrap="square"/>
+                    <a:lstStyle/>
+                    <a:p>
+                      <a:r>
+                        <a:rPr sz="1300" b="0" i="0">
+                          <a:solidFill>
+                            <a:srgbClr val="1A1A1A"/>
+                          </a:solidFill>
+                          <a:latin typeface="Yu Gothic"/>
+                          <a:ea typeface="Yu Gothic"/>
+                          <a:cs typeface="Yu Gothic"/>
+                        </a:rPr>
+                        <a:t>5.4 時間（約 49 秒/エポック）</a:t>
+                      </a:r>
+                    </a:p>
+                  </a:txBody>
+                  <a:tcPr anchor="ctr" marL="73152" marR="73152" marT="27432" marB="27432">
+                    <a:solidFill>
+                      <a:srgbClr val="E8F1FB"/>
+                    </a:solidFill>
+                  </a:tcPr>
+                </a:tc>
+              </a:tr>
+            </a:tbl>
+          </a:graphicData>
+        </a:graphic>
+      </p:graphicFrame>
+      <p:sp>
+        <p:nvSpPr>
+          <p:cNvPr id="5" name="TextBox 4"/>
+          <p:cNvSpPr txBox="1"/>
+          <p:nvPr/>
+        </p:nvSpPr>
+        <p:spPr>
+          <a:xfrm>
+            <a:off x="548640" y="5349240"/>
+            <a:ext cx="11064240" cy="365760"/>
+          </a:xfrm>
+          <a:prstGeom prst="rect">
+            <a:avLst/>
+          </a:prstGeom>
+          <a:noFill/>
+        </p:spPr>
+        <p:txBody>
+          <a:bodyPr wrap="square" anchor="t" lIns="45720" rIns="45720" tIns="27432" bIns="27432">
+            <a:spAutoFit/>
+          </a:bodyPr>
+          <a:lstStyle/>
+          <a:p>
+            <a:pPr algn="l">
+              <a:spcAft>
+                <a:spcPts val="600"/>
+              </a:spcAft>
+            </a:pPr>
+            <a:r>
+              <a:rPr sz="1100" b="0" i="0">
+                <a:solidFill>
+                  <a:srgbClr val="595959"/>
+                </a:solidFill>
+                <a:latin typeface="Yu Gothic"/>
+                <a:ea typeface="Yu Gothic"/>
+                <a:cs typeface="Yu Gothic"/>
+              </a:rPr>
+              <a:t>バッチは global batch。RL Token の 1 エポック = 3 環境のロールアウトと更新。RECAP の advantage は、merged（175.8 万フレーム）のうち 62.3 万サンプル分</a:t>
+            </a:r>
+          </a:p>
+        </p:txBody>
+      </p:sp>
+      <p:sp>
+        <p:nvSpPr>
+          <p:cNvPr id="6" name="key point"/>
+          <p:cNvSpPr/>
+          <p:nvPr/>
+        </p:nvSpPr>
+        <p:spPr>
+          <a:xfrm>
+            <a:off x="548640" y="5760720"/>
+            <a:ext cx="11064240" cy="594360"/>
+          </a:xfrm>
+          <a:prstGeom prst="roundRect">
+            <a:avLst>
+              <a:gd name="adj" fmla="val 18000"/>
+            </a:avLst>
+          </a:prstGeom>
+          <a:solidFill>
+            <a:srgbClr val="E8F1FB"/>
+          </a:solidFill>
+          <a:ln w="15875">
+            <a:solidFill>
+              <a:srgbClr val="0B66C3"/>
+            </a:solidFill>
+          </a:ln>
+        </p:spPr>
+        <p:style>
+          <a:lnRef idx="1">
+            <a:schemeClr val="accent1"/>
+          </a:lnRef>
+          <a:fillRef idx="3">
+            <a:schemeClr val="accent1"/>
+          </a:fillRef>
+          <a:effectRef idx="2">
+            <a:schemeClr val="accent1"/>
+          </a:effectRef>
+          <a:fontRef idx="minor">
+            <a:schemeClr val="lt1"/>
+          </a:fontRef>
+        </p:style>
+        <p:txBody>
+          <a:bodyPr rtlCol="0" anchor="ctr" wrap="square" lIns="228600" rIns="228600"/>
+          <a:lstStyle/>
+          <a:p>
+            <a:pPr algn="l"/>
+            <a:r>
+              <a:rPr sz="1600" b="1" i="0">
+                <a:solidFill>
+                  <a:srgbClr val="0B66C3"/>
+                </a:solidFill>
+                <a:latin typeface="Yu Gothic"/>
+                <a:ea typeface="Yu Gothic"/>
+                <a:cs typeface="Yu Gothic"/>
+              </a:rPr>
+              <a:t>→ 合計: RECAP 約 45 時間、STEAM 約 25 時間（advantage 計算を除く）、RL Token 約 14 時間</a:t>
+            </a:r>
+          </a:p>
+        </p:txBody>
+      </p:sp>
+    </p:spTree>
+  </p:cSld>
+  <p:clrMapOvr>
+    <a:masterClrMapping/>
+  </p:clrMapOvr>
+</p:sld>
+</file>
+
+<file path=ppt/slides/slide27.xml><?xml version="1.0" encoding="utf-8"?>
+<p:sld xmlns:a="http://schemas.openxmlformats.org/drawingml/2006/main" xmlns:p="http://schemas.openxmlformats.org/presentationml/2006/main" xmlns:r="http://schemas.openxmlformats.org/officeDocument/2006/relationships">
+  <p:cSld>
+    <p:spTree>
+      <p:nvGrpSpPr>
+        <p:cNvPr id="1" name=""/>
+        <p:cNvGrpSpPr/>
+        <p:nvPr/>
+      </p:nvGrpSpPr>
+      <p:grpSpPr/>
+      <p:sp>
+        <p:nvSpPr>
+          <p:cNvPr id="2" name="title band"/>
+          <p:cNvSpPr/>
+          <p:nvPr/>
+        </p:nvSpPr>
+        <p:spPr>
+          <a:xfrm>
+            <a:off x="0" y="0"/>
+            <a:ext cx="12191695" cy="777240"/>
+          </a:xfrm>
+          <a:prstGeom prst="rect">
+            <a:avLst/>
+          </a:prstGeom>
+          <a:solidFill>
+            <a:srgbClr val="0B66C3"/>
+          </a:solidFill>
+          <a:ln>
+            <a:noFill/>
+          </a:ln>
+        </p:spPr>
+        <p:style>
+          <a:lnRef idx="1">
+            <a:schemeClr val="accent1"/>
+          </a:lnRef>
+          <a:fillRef idx="3">
+            <a:schemeClr val="accent1"/>
+          </a:fillRef>
+          <a:effectRef idx="2">
+            <a:schemeClr val="accent1"/>
+          </a:effectRef>
+          <a:fontRef idx="minor">
+            <a:schemeClr val="lt1"/>
+          </a:fontRef>
+        </p:style>
+        <p:txBody>
+          <a:bodyPr rtlCol="0" anchor="ctr"/>
+          <a:lstStyle/>
+          <a:p>
+            <a:pPr algn="ctr"/>
+            <a:r>
+              <a:rPr sz="2800" b="1" i="0">
+                <a:solidFill>
+                  <a:srgbClr val="FFFFFF"/>
+                </a:solidFill>
+                <a:latin typeface="Yu Gothic"/>
+                <a:ea typeface="Yu Gothic"/>
+                <a:cs typeface="Yu Gothic"/>
+              </a:rPr>
+              <a:t>考察: 3 手法の比較</a:t>
+            </a:r>
+          </a:p>
+        </p:txBody>
+      </p:sp>
+      <p:sp>
+        <p:nvSpPr>
+          <p:cNvPr id="3" name="page number"/>
+          <p:cNvSpPr txBox="1"/>
+          <p:nvPr/>
+        </p:nvSpPr>
+        <p:spPr>
+          <a:xfrm>
+            <a:off x="11155680" y="6446520"/>
+            <a:ext cx="822960" cy="320040"/>
+          </a:xfrm>
+          <a:prstGeom prst="rect">
+            <a:avLst/>
+          </a:prstGeom>
+          <a:noFill/>
+        </p:spPr>
+        <p:txBody>
+          <a:bodyPr wrap="square" anchor="t" lIns="45720" rIns="45720" tIns="27432" bIns="27432">
+            <a:spAutoFit/>
+          </a:bodyPr>
+          <a:lstStyle/>
+          <a:p>
+            <a:pPr algn="r">
+              <a:spcAft>
+                <a:spcPts val="600"/>
+              </a:spcAft>
+            </a:pPr>
+            <a:r>
+              <a:rPr sz="1200" b="0" i="0">
+                <a:solidFill>
+                  <a:srgbClr val="595959"/>
+                </a:solidFill>
+                <a:latin typeface="Yu Gothic"/>
+                <a:ea typeface="Yu Gothic"/>
+                <a:cs typeface="Yu Gothic"/>
+              </a:rPr>
+              <a:t>27</a:t>
             </a:r>
           </a:p>
         </p:txBody>
@@ -25447,7 +27173,7 @@
 </p:sld>
 </file>
 
-<file path=ppt/slides/slide27.xml><?xml version="1.0" encoding="utf-8"?>
+<file path=ppt/slides/slide28.xml><?xml version="1.0" encoding="utf-8"?>
 <p:sld xmlns:a="http://schemas.openxmlformats.org/drawingml/2006/main" xmlns:p="http://schemas.openxmlformats.org/presentationml/2006/main" xmlns:r="http://schemas.openxmlformats.org/officeDocument/2006/relationships">
   <p:cSld>
     <p:spTree>
@@ -25547,7 +27273,7 @@
                 <a:ea typeface="Yu Gothic"/>
                 <a:cs typeface="Yu Gothic"/>
               </a:rPr>
-              <a:t>27</a:t>
+              <a:t>28</a:t>
             </a:r>
           </a:p>
         </p:txBody>

--- a/docs/RECAP_STEAM_RLToken.pptx
+++ b/docs/RECAP_STEAM_RLToken.pptx
@@ -3032,7 +3032,7 @@
           <a:lstStyle/>
           <a:p>
             <a:r>
-              <a:t>実測値（TensorBoard と実行ログ）。GPU は、RECAP の価値モデルが RTX 6000 Ada（48GB）、STEAM の critic と RL Token の追加実験が RTX A5000（24GB）。</a:t>
+              <a:t>実測値（TensorBoard と実行ログ）。GPU は、ログに名前が残っているものだけを記載。</a:t>
             </a:r>
           </a:p>
         </p:txBody>
@@ -12993,7 +12993,7 @@
                 <a:ea typeface="Yu Gothic"/>
                 <a:cs typeface="Yu Gothic"/>
               </a:rPr>
-              <a:t>）</a:t>
+              <a:t>、RTX 6000 Ada 48GB）</a:t>
             </a:r>
           </a:p>
           <a:p>
@@ -13116,7 +13116,7 @@
                 <a:ea typeface="Yu Gothic"/>
                 <a:cs typeface="Yu Gothic"/>
               </a:rPr>
-              <a:t>）</a:t>
+              <a:t>、RTX 6000 Ada 48GB）</a:t>
             </a:r>
           </a:p>
           <a:p>
@@ -18015,7 +18015,7 @@
                 <a:ea typeface="Yu Gothic"/>
                 <a:cs typeface="Yu Gothic"/>
               </a:rPr>
-              <a:t>: critic </a:t>
+              <a:t>（RTX A5000 24GB）: critic </a:t>
             </a:r>
             <a:r>
               <a:rPr sz="1500" b="1" i="0">
@@ -23859,6 +23859,28 @@
                 <a:cs typeface="Yu Gothic"/>
               </a:rPr>
               <a:t>400 エポック（5.4 時間）</a:t>
+            </a:r>
+            <a:r>
+              <a:rPr sz="1600" b="0" i="0">
+                <a:solidFill>
+                  <a:srgbClr val="1A1A1A"/>
+                </a:solidFill>
+                <a:latin typeface="Yu Gothic"/>
+                <a:ea typeface="Yu Gothic"/>
+                <a:cs typeface="Yu Gothic"/>
+              </a:rPr>
+              <a:t>。GPU は </a:t>
+            </a:r>
+            <a:r>
+              <a:rPr sz="1600" b="1" i="0">
+                <a:solidFill>
+                  <a:srgbClr val="1A1A1A"/>
+                </a:solidFill>
+                <a:latin typeface="Yu Gothic"/>
+                <a:ea typeface="Yu Gothic"/>
+                <a:cs typeface="Yu Gothic"/>
+              </a:rPr>
+              <a:t>RTX A5000（24GB）</a:t>
             </a:r>
           </a:p>
           <a:p>
@@ -25085,7 +25107,7 @@
                 <a:ea typeface="Yu Gothic"/>
                 <a:cs typeface="Yu Gothic"/>
               </a:rPr>
-              <a:t>学習コストの比較（学習ステップ数・時間）</a:t>
+              <a:t>学習コストの比較（学習ステップ数・時間・GPU）</a:t>
             </a:r>
           </a:p>
         </p:txBody>
@@ -25150,11 +25172,12 @@
                 <a:tableStyleId>{5C22544A-7EE6-4342-B048-85BDC9FD1C3A}</a:tableStyleId>
               </a:tblPr>
               <a:tblGrid>
-                <a:gridCol w="1097280"/>
-                <a:gridCol w="3200400"/>
-                <a:gridCol w="2743200"/>
+                <a:gridCol w="914400"/>
+                <a:gridCol w="2148840"/>
+                <a:gridCol w="2606040"/>
                 <a:gridCol w="731520"/>
-                <a:gridCol w="3291840"/>
+                <a:gridCol w="2468880"/>
+                <a:gridCol w="2194560"/>
               </a:tblGrid>
               <a:tr h="384048">
                 <a:tc>
@@ -25163,7 +25186,7 @@
                     <a:lstStyle/>
                     <a:p>
                       <a:r>
-                        <a:rPr sz="1300" b="1" i="0">
+                        <a:rPr sz="1200" b="1" i="0">
                           <a:solidFill>
                             <a:srgbClr val="FFFFFF"/>
                           </a:solidFill>
@@ -25187,7 +25210,7 @@
                     <a:lstStyle/>
                     <a:p>
                       <a:r>
-                        <a:rPr sz="1300" b="1" i="0">
+                        <a:rPr sz="1200" b="1" i="0">
                           <a:solidFill>
                             <a:srgbClr val="FFFFFF"/>
                           </a:solidFill>
@@ -25211,7 +25234,7 @@
                     <a:lstStyle/>
                     <a:p>
                       <a:r>
-                        <a:rPr sz="1300" b="1" i="0">
+                        <a:rPr sz="1200" b="1" i="0">
                           <a:solidFill>
                             <a:srgbClr val="FFFFFF"/>
                           </a:solidFill>
@@ -25236,7 +25259,7 @@
                     <a:p>
                       <a:pPr algn="ctr"/>
                       <a:r>
-                        <a:rPr sz="1300" b="1" i="0">
+                        <a:rPr sz="1200" b="1" i="0">
                           <a:solidFill>
                             <a:srgbClr val="FFFFFF"/>
                           </a:solidFill>
@@ -25260,7 +25283,7 @@
                     <a:lstStyle/>
                     <a:p>
                       <a:r>
-                        <a:rPr sz="1300" b="1" i="0">
+                        <a:rPr sz="1200" b="1" i="0">
                           <a:solidFill>
                             <a:srgbClr val="FFFFFF"/>
                           </a:solidFill>
@@ -25278,6 +25301,30 @@
                     </a:solidFill>
                   </a:tcPr>
                 </a:tc>
+                <a:tc>
+                  <a:txBody>
+                    <a:bodyPr wrap="square"/>
+                    <a:lstStyle/>
+                    <a:p>
+                      <a:r>
+                        <a:rPr sz="1200" b="1" i="0">
+                          <a:solidFill>
+                            <a:srgbClr val="FFFFFF"/>
+                          </a:solidFill>
+                          <a:latin typeface="Yu Gothic"/>
+                          <a:ea typeface="Yu Gothic"/>
+                          <a:cs typeface="Yu Gothic"/>
+                        </a:rPr>
+                        <a:t>GPU</a:t>
+                      </a:r>
+                    </a:p>
+                  </a:txBody>
+                  <a:tcPr anchor="ctr" marL="73152" marR="73152" marT="27432" marB="27432">
+                    <a:solidFill>
+                      <a:srgbClr val="0B66C3"/>
+                    </a:solidFill>
+                  </a:tcPr>
+                </a:tc>
               </a:tr>
               <a:tr h="420624">
                 <a:tc>
@@ -25286,7 +25333,7 @@
                     <a:lstStyle/>
                     <a:p>
                       <a:r>
-                        <a:rPr sz="1300" b="0" i="0">
+                        <a:rPr sz="1200" b="0" i="0">
                           <a:solidFill>
                             <a:srgbClr val="1A1A1A"/>
                           </a:solidFill>
@@ -25295,6 +25342,447 @@
                           <a:cs typeface="Yu Gothic"/>
                         </a:rPr>
                         <a:t>RECAP</a:t>
+                      </a:r>
+                    </a:p>
+                  </a:txBody>
+                  <a:tcPr anchor="ctr" marL="73152" marR="73152" marT="27432" marB="27432">
+                    <a:solidFill>
+                      <a:srgbClr val="FFFFFF"/>
+                    </a:solidFill>
+                  </a:tcPr>
+                </a:tc>
+                <a:tc>
+                  <a:txBody>
+                    <a:bodyPr wrap="square"/>
+                    <a:lstStyle/>
+                    <a:p>
+                      <a:r>
+                        <a:rPr sz="1200" b="0" i="0">
+                          <a:solidFill>
+                            <a:srgbClr val="1A1A1A"/>
+                          </a:solidFill>
+                          <a:latin typeface="Yu Gothic"/>
+                          <a:ea typeface="Yu Gothic"/>
+                          <a:cs typeface="Yu Gothic"/>
+                        </a:rPr>
+                        <a:t>Step2: 価値モデル</a:t>
+                      </a:r>
+                    </a:p>
+                  </a:txBody>
+                  <a:tcPr anchor="ctr" marL="73152" marR="73152" marT="27432" marB="27432">
+                    <a:solidFill>
+                      <a:srgbClr val="FFFFFF"/>
+                    </a:solidFill>
+                  </a:tcPr>
+                </a:tc>
+                <a:tc>
+                  <a:txBody>
+                    <a:bodyPr wrap="square"/>
+                    <a:lstStyle/>
+                    <a:p>
+                      <a:r>
+                        <a:rPr sz="1200" b="0" i="0">
+                          <a:solidFill>
+                            <a:srgbClr val="1A1A1A"/>
+                          </a:solidFill>
+                          <a:latin typeface="Yu Gothic"/>
+                          <a:ea typeface="Yu Gothic"/>
+                          <a:cs typeface="Yu Gothic"/>
+                        </a:rPr>
+                        <a:t>4,000 step</a:t>
+                      </a:r>
+                    </a:p>
+                  </a:txBody>
+                  <a:tcPr anchor="ctr" marL="73152" marR="73152" marT="27432" marB="27432">
+                    <a:solidFill>
+                      <a:srgbClr val="FFFFFF"/>
+                    </a:solidFill>
+                  </a:tcPr>
+                </a:tc>
+                <a:tc>
+                  <a:txBody>
+                    <a:bodyPr wrap="square"/>
+                    <a:lstStyle/>
+                    <a:p>
+                      <a:pPr algn="ctr"/>
+                      <a:r>
+                        <a:rPr sz="1200" b="0" i="0">
+                          <a:solidFill>
+                            <a:srgbClr val="1A1A1A"/>
+                          </a:solidFill>
+                          <a:latin typeface="Yu Gothic"/>
+                          <a:ea typeface="Yu Gothic"/>
+                          <a:cs typeface="Yu Gothic"/>
+                        </a:rPr>
+                        <a:t>256</a:t>
+                      </a:r>
+                    </a:p>
+                  </a:txBody>
+                  <a:tcPr anchor="ctr" marL="73152" marR="73152" marT="27432" marB="27432">
+                    <a:solidFill>
+                      <a:srgbClr val="FFFFFF"/>
+                    </a:solidFill>
+                  </a:tcPr>
+                </a:tc>
+                <a:tc>
+                  <a:txBody>
+                    <a:bodyPr wrap="square"/>
+                    <a:lstStyle/>
+                    <a:p>
+                      <a:r>
+                        <a:rPr sz="1200" b="0" i="0">
+                          <a:solidFill>
+                            <a:srgbClr val="1A1A1A"/>
+                          </a:solidFill>
+                          <a:latin typeface="Yu Gothic"/>
+                          <a:ea typeface="Yu Gothic"/>
+                          <a:cs typeface="Yu Gothic"/>
+                        </a:rPr>
+                        <a:t>20.6 時間（18.6 秒/step）</a:t>
+                      </a:r>
+                    </a:p>
+                  </a:txBody>
+                  <a:tcPr anchor="ctr" marL="73152" marR="73152" marT="27432" marB="27432">
+                    <a:solidFill>
+                      <a:srgbClr val="FFFFFF"/>
+                    </a:solidFill>
+                  </a:tcPr>
+                </a:tc>
+                <a:tc>
+                  <a:txBody>
+                    <a:bodyPr wrap="square"/>
+                    <a:lstStyle/>
+                    <a:p>
+                      <a:r>
+                        <a:rPr sz="1200" b="0" i="0">
+                          <a:solidFill>
+                            <a:srgbClr val="1A1A1A"/>
+                          </a:solidFill>
+                          <a:latin typeface="Yu Gothic"/>
+                          <a:ea typeface="Yu Gothic"/>
+                          <a:cs typeface="Yu Gothic"/>
+                        </a:rPr>
+                        <a:t>RTX 6000 Ada（48GB）</a:t>
+                      </a:r>
+                    </a:p>
+                  </a:txBody>
+                  <a:tcPr anchor="ctr" marL="73152" marR="73152" marT="27432" marB="27432">
+                    <a:solidFill>
+                      <a:srgbClr val="FFFFFF"/>
+                    </a:solidFill>
+                  </a:tcPr>
+                </a:tc>
+              </a:tr>
+              <a:tr h="420624">
+                <a:tc>
+                  <a:txBody>
+                    <a:bodyPr wrap="square"/>
+                    <a:lstStyle/>
+                    <a:p>
+                      <a:r>
+                        <a:rPr sz="1200" b="0" i="0">
+                          <a:solidFill>
+                            <a:srgbClr val="1A1A1A"/>
+                          </a:solidFill>
+                          <a:latin typeface="Yu Gothic"/>
+                          <a:ea typeface="Yu Gothic"/>
+                          <a:cs typeface="Yu Gothic"/>
+                        </a:rPr>
+                        <a:t>RECAP</a:t>
+                      </a:r>
+                    </a:p>
+                  </a:txBody>
+                  <a:tcPr anchor="ctr" marL="73152" marR="73152" marT="27432" marB="27432">
+                    <a:solidFill>
+                      <a:srgbClr val="F3F7FC"/>
+                    </a:solidFill>
+                  </a:tcPr>
+                </a:tc>
+                <a:tc>
+                  <a:txBody>
+                    <a:bodyPr wrap="square"/>
+                    <a:lstStyle/>
+                    <a:p>
+                      <a:r>
+                        <a:rPr sz="1200" b="0" i="0">
+                          <a:solidFill>
+                            <a:srgbClr val="1A1A1A"/>
+                          </a:solidFill>
+                          <a:latin typeface="Yu Gothic"/>
+                          <a:ea typeface="Yu Gothic"/>
+                          <a:cs typeface="Yu Gothic"/>
+                        </a:rPr>
+                        <a:t>Step3: advantage 計算</a:t>
+                      </a:r>
+                    </a:p>
+                  </a:txBody>
+                  <a:tcPr anchor="ctr" marL="73152" marR="73152" marT="27432" marB="27432">
+                    <a:solidFill>
+                      <a:srgbClr val="F3F7FC"/>
+                    </a:solidFill>
+                  </a:tcPr>
+                </a:tc>
+                <a:tc>
+                  <a:txBody>
+                    <a:bodyPr wrap="square"/>
+                    <a:lstStyle/>
+                    <a:p>
+                      <a:r>
+                        <a:rPr sz="1200" b="0" i="0">
+                          <a:solidFill>
+                            <a:srgbClr val="1A1A1A"/>
+                          </a:solidFill>
+                          <a:latin typeface="Yu Gothic"/>
+                          <a:ea typeface="Yu Gothic"/>
+                          <a:cs typeface="Yu Gothic"/>
+                        </a:rPr>
+                        <a:t>62.3 万サンプル（推論）</a:t>
+                      </a:r>
+                    </a:p>
+                  </a:txBody>
+                  <a:tcPr anchor="ctr" marL="73152" marR="73152" marT="27432" marB="27432">
+                    <a:solidFill>
+                      <a:srgbClr val="F3F7FC"/>
+                    </a:solidFill>
+                  </a:tcPr>
+                </a:tc>
+                <a:tc>
+                  <a:txBody>
+                    <a:bodyPr wrap="square"/>
+                    <a:lstStyle/>
+                    <a:p>
+                      <a:pPr algn="ctr"/>
+                      <a:r>
+                        <a:rPr sz="1200" b="0" i="0">
+                          <a:solidFill>
+                            <a:srgbClr val="1A1A1A"/>
+                          </a:solidFill>
+                          <a:latin typeface="Yu Gothic"/>
+                          <a:ea typeface="Yu Gothic"/>
+                          <a:cs typeface="Yu Gothic"/>
+                        </a:rPr>
+                        <a:t>—</a:t>
+                      </a:r>
+                    </a:p>
+                  </a:txBody>
+                  <a:tcPr anchor="ctr" marL="73152" marR="73152" marT="27432" marB="27432">
+                    <a:solidFill>
+                      <a:srgbClr val="F3F7FC"/>
+                    </a:solidFill>
+                  </a:tcPr>
+                </a:tc>
+                <a:tc>
+                  <a:txBody>
+                    <a:bodyPr wrap="square"/>
+                    <a:lstStyle/>
+                    <a:p>
+                      <a:r>
+                        <a:rPr sz="1200" b="0" i="0">
+                          <a:solidFill>
+                            <a:srgbClr val="1A1A1A"/>
+                          </a:solidFill>
+                          <a:latin typeface="Yu Gothic"/>
+                          <a:ea typeface="Yu Gothic"/>
+                          <a:cs typeface="Yu Gothic"/>
+                        </a:rPr>
+                        <a:t>4.2 時間（41 サンプル/秒）</a:t>
+                      </a:r>
+                    </a:p>
+                  </a:txBody>
+                  <a:tcPr anchor="ctr" marL="73152" marR="73152" marT="27432" marB="27432">
+                    <a:solidFill>
+                      <a:srgbClr val="F3F7FC"/>
+                    </a:solidFill>
+                  </a:tcPr>
+                </a:tc>
+                <a:tc>
+                  <a:txBody>
+                    <a:bodyPr wrap="square"/>
+                    <a:lstStyle/>
+                    <a:p>
+                      <a:r>
+                        <a:rPr sz="1200" b="0" i="0">
+                          <a:solidFill>
+                            <a:srgbClr val="1A1A1A"/>
+                          </a:solidFill>
+                          <a:latin typeface="Yu Gothic"/>
+                          <a:ea typeface="Yu Gothic"/>
+                          <a:cs typeface="Yu Gothic"/>
+                        </a:rPr>
+                        <a:t>記録なし</a:t>
+                      </a:r>
+                    </a:p>
+                  </a:txBody>
+                  <a:tcPr anchor="ctr" marL="73152" marR="73152" marT="27432" marB="27432">
+                    <a:solidFill>
+                      <a:srgbClr val="F3F7FC"/>
+                    </a:solidFill>
+                  </a:tcPr>
+                </a:tc>
+              </a:tr>
+              <a:tr h="420624">
+                <a:tc>
+                  <a:txBody>
+                    <a:bodyPr wrap="square"/>
+                    <a:lstStyle/>
+                    <a:p>
+                      <a:r>
+                        <a:rPr sz="1200" b="0" i="0">
+                          <a:solidFill>
+                            <a:srgbClr val="1A1A1A"/>
+                          </a:solidFill>
+                          <a:latin typeface="Yu Gothic"/>
+                          <a:ea typeface="Yu Gothic"/>
+                          <a:cs typeface="Yu Gothic"/>
+                        </a:rPr>
+                        <a:t>RECAP</a:t>
+                      </a:r>
+                    </a:p>
+                  </a:txBody>
+                  <a:tcPr anchor="ctr" marL="73152" marR="73152" marT="27432" marB="27432">
+                    <a:solidFill>
+                      <a:srgbClr val="FFFFFF"/>
+                    </a:solidFill>
+                  </a:tcPr>
+                </a:tc>
+                <a:tc>
+                  <a:txBody>
+                    <a:bodyPr wrap="square"/>
+                    <a:lstStyle/>
+                    <a:p>
+                      <a:r>
+                        <a:rPr sz="1200" b="0" i="0">
+                          <a:solidFill>
+                            <a:srgbClr val="1A1A1A"/>
+                          </a:solidFill>
+                          <a:latin typeface="Yu Gothic"/>
+                          <a:ea typeface="Yu Gothic"/>
+                          <a:cs typeface="Yu Gothic"/>
+                        </a:rPr>
+                        <a:t>Step4: 方策（SFT）</a:t>
+                      </a:r>
+                    </a:p>
+                  </a:txBody>
+                  <a:tcPr anchor="ctr" marL="73152" marR="73152" marT="27432" marB="27432">
+                    <a:solidFill>
+                      <a:srgbClr val="FFFFFF"/>
+                    </a:solidFill>
+                  </a:tcPr>
+                </a:tc>
+                <a:tc>
+                  <a:txBody>
+                    <a:bodyPr wrap="square"/>
+                    <a:lstStyle/>
+                    <a:p>
+                      <a:r>
+                        <a:rPr sz="1200" b="0" i="0">
+                          <a:solidFill>
+                            <a:srgbClr val="1A1A1A"/>
+                          </a:solidFill>
+                          <a:latin typeface="Yu Gothic"/>
+                          <a:ea typeface="Yu Gothic"/>
+                          <a:cs typeface="Yu Gothic"/>
+                        </a:rPr>
+                        <a:t>2,000 step</a:t>
+                      </a:r>
+                    </a:p>
+                  </a:txBody>
+                  <a:tcPr anchor="ctr" marL="73152" marR="73152" marT="27432" marB="27432">
+                    <a:solidFill>
+                      <a:srgbClr val="FFFFFF"/>
+                    </a:solidFill>
+                  </a:tcPr>
+                </a:tc>
+                <a:tc>
+                  <a:txBody>
+                    <a:bodyPr wrap="square"/>
+                    <a:lstStyle/>
+                    <a:p>
+                      <a:pPr algn="ctr"/>
+                      <a:r>
+                        <a:rPr sz="1200" b="0" i="0">
+                          <a:solidFill>
+                            <a:srgbClr val="1A1A1A"/>
+                          </a:solidFill>
+                          <a:latin typeface="Yu Gothic"/>
+                          <a:ea typeface="Yu Gothic"/>
+                          <a:cs typeface="Yu Gothic"/>
+                        </a:rPr>
+                        <a:t>256</a:t>
+                      </a:r>
+                    </a:p>
+                  </a:txBody>
+                  <a:tcPr anchor="ctr" marL="73152" marR="73152" marT="27432" marB="27432">
+                    <a:solidFill>
+                      <a:srgbClr val="FFFFFF"/>
+                    </a:solidFill>
+                  </a:tcPr>
+                </a:tc>
+                <a:tc>
+                  <a:txBody>
+                    <a:bodyPr wrap="square"/>
+                    <a:lstStyle/>
+                    <a:p>
+                      <a:r>
+                        <a:rPr sz="1200" b="0" i="0">
+                          <a:solidFill>
+                            <a:srgbClr val="1A1A1A"/>
+                          </a:solidFill>
+                          <a:latin typeface="Yu Gothic"/>
+                          <a:ea typeface="Yu Gothic"/>
+                          <a:cs typeface="Yu Gothic"/>
+                        </a:rPr>
+                        <a:t>20.3 時間（約 36 秒/step）</a:t>
+                      </a:r>
+                    </a:p>
+                  </a:txBody>
+                  <a:tcPr anchor="ctr" marL="73152" marR="73152" marT="27432" marB="27432">
+                    <a:solidFill>
+                      <a:srgbClr val="FFFFFF"/>
+                    </a:solidFill>
+                  </a:tcPr>
+                </a:tc>
+                <a:tc>
+                  <a:txBody>
+                    <a:bodyPr wrap="square"/>
+                    <a:lstStyle/>
+                    <a:p>
+                      <a:r>
+                        <a:rPr sz="1200" b="0" i="0">
+                          <a:solidFill>
+                            <a:srgbClr val="1A1A1A"/>
+                          </a:solidFill>
+                          <a:latin typeface="Yu Gothic"/>
+                          <a:ea typeface="Yu Gothic"/>
+                          <a:cs typeface="Yu Gothic"/>
+                        </a:rPr>
+                        <a:t>RTX 6000 Ada（48GB）</a:t>
+                      </a:r>
+                    </a:p>
+                  </a:txBody>
+                  <a:tcPr anchor="ctr" marL="73152" marR="73152" marT="27432" marB="27432">
+                    <a:solidFill>
+                      <a:srgbClr val="FFFFFF"/>
+                    </a:solidFill>
+                  </a:tcPr>
+                </a:tc>
+              </a:tr>
+              <a:tr h="420624">
+                <a:tc>
+                  <a:txBody>
+                    <a:bodyPr wrap="square"/>
+                    <a:lstStyle/>
+                    <a:p>
+                      <a:r>
+                        <a:rPr sz="1200" b="0" i="0">
+                          <a:solidFill>
+                            <a:srgbClr val="1A1A1A"/>
+                          </a:solidFill>
+                          <a:latin typeface="Yu Gothic"/>
+                          <a:ea typeface="Yu Gothic"/>
+                          <a:cs typeface="Yu Gothic"/>
+                        </a:rPr>
+                        <a:t>STEAM</a:t>
                       </a:r>
                     </a:p>
                   </a:txBody>
@@ -25310,7 +25798,7 @@
                     <a:lstStyle/>
                     <a:p>
                       <a:r>
-                        <a:rPr sz="1300" b="0" i="0">
+                        <a:rPr sz="1200" b="0" i="0">
                           <a:solidFill>
                             <a:srgbClr val="1A1A1A"/>
                           </a:solidFill>
@@ -25318,7 +25806,7 @@
                           <a:ea typeface="Yu Gothic"/>
                           <a:cs typeface="Yu Gothic"/>
                         </a:rPr>
-                        <a:t>Step2: 価値モデル</a:t>
+                        <a:t>critic の学習</a:t>
                       </a:r>
                     </a:p>
                   </a:txBody>
@@ -25334,253 +25822,7 @@
                     <a:lstStyle/>
                     <a:p>
                       <a:r>
-                        <a:rPr sz="1300" b="0" i="0">
-                          <a:solidFill>
-                            <a:srgbClr val="1A1A1A"/>
-                          </a:solidFill>
-                          <a:latin typeface="Yu Gothic"/>
-                          <a:ea typeface="Yu Gothic"/>
-                          <a:cs typeface="Yu Gothic"/>
-                        </a:rPr>
-                        <a:t>4,000 step</a:t>
-                      </a:r>
-                    </a:p>
-                  </a:txBody>
-                  <a:tcPr anchor="ctr" marL="73152" marR="73152" marT="27432" marB="27432">
-                    <a:solidFill>
-                      <a:srgbClr val="E8F1FB"/>
-                    </a:solidFill>
-                  </a:tcPr>
-                </a:tc>
-                <a:tc>
-                  <a:txBody>
-                    <a:bodyPr wrap="square"/>
-                    <a:lstStyle/>
-                    <a:p>
-                      <a:pPr algn="ctr"/>
-                      <a:r>
-                        <a:rPr sz="1300" b="0" i="0">
-                          <a:solidFill>
-                            <a:srgbClr val="1A1A1A"/>
-                          </a:solidFill>
-                          <a:latin typeface="Yu Gothic"/>
-                          <a:ea typeface="Yu Gothic"/>
-                          <a:cs typeface="Yu Gothic"/>
-                        </a:rPr>
-                        <a:t>256</a:t>
-                      </a:r>
-                    </a:p>
-                  </a:txBody>
-                  <a:tcPr anchor="ctr" marL="73152" marR="73152" marT="27432" marB="27432">
-                    <a:solidFill>
-                      <a:srgbClr val="E8F1FB"/>
-                    </a:solidFill>
-                  </a:tcPr>
-                </a:tc>
-                <a:tc>
-                  <a:txBody>
-                    <a:bodyPr wrap="square"/>
-                    <a:lstStyle/>
-                    <a:p>
-                      <a:r>
-                        <a:rPr sz="1300" b="0" i="0">
-                          <a:solidFill>
-                            <a:srgbClr val="1A1A1A"/>
-                          </a:solidFill>
-                          <a:latin typeface="Yu Gothic"/>
-                          <a:ea typeface="Yu Gothic"/>
-                          <a:cs typeface="Yu Gothic"/>
-                        </a:rPr>
-                        <a:t>20.6 時間（18.6 秒/step）</a:t>
-                      </a:r>
-                    </a:p>
-                  </a:txBody>
-                  <a:tcPr anchor="ctr" marL="73152" marR="73152" marT="27432" marB="27432">
-                    <a:solidFill>
-                      <a:srgbClr val="E8F1FB"/>
-                    </a:solidFill>
-                  </a:tcPr>
-                </a:tc>
-              </a:tr>
-              <a:tr h="420624">
-                <a:tc>
-                  <a:txBody>
-                    <a:bodyPr wrap="square"/>
-                    <a:lstStyle/>
-                    <a:p>
-                      <a:r>
-                        <a:rPr sz="1300" b="0" i="0">
-                          <a:solidFill>
-                            <a:srgbClr val="1A1A1A"/>
-                          </a:solidFill>
-                          <a:latin typeface="Yu Gothic"/>
-                          <a:ea typeface="Yu Gothic"/>
-                          <a:cs typeface="Yu Gothic"/>
-                        </a:rPr>
-                        <a:t>RECAP</a:t>
-                      </a:r>
-                    </a:p>
-                  </a:txBody>
-                  <a:tcPr anchor="ctr" marL="73152" marR="73152" marT="27432" marB="27432">
-                    <a:solidFill>
-                      <a:srgbClr val="E8F1FB"/>
-                    </a:solidFill>
-                  </a:tcPr>
-                </a:tc>
-                <a:tc>
-                  <a:txBody>
-                    <a:bodyPr wrap="square"/>
-                    <a:lstStyle/>
-                    <a:p>
-                      <a:r>
-                        <a:rPr sz="1300" b="0" i="0">
-                          <a:solidFill>
-                            <a:srgbClr val="1A1A1A"/>
-                          </a:solidFill>
-                          <a:latin typeface="Yu Gothic"/>
-                          <a:ea typeface="Yu Gothic"/>
-                          <a:cs typeface="Yu Gothic"/>
-                        </a:rPr>
-                        <a:t>Step3: advantage 計算</a:t>
-                      </a:r>
-                    </a:p>
-                  </a:txBody>
-                  <a:tcPr anchor="ctr" marL="73152" marR="73152" marT="27432" marB="27432">
-                    <a:solidFill>
-                      <a:srgbClr val="E8F1FB"/>
-                    </a:solidFill>
-                  </a:tcPr>
-                </a:tc>
-                <a:tc>
-                  <a:txBody>
-                    <a:bodyPr wrap="square"/>
-                    <a:lstStyle/>
-                    <a:p>
-                      <a:r>
-                        <a:rPr sz="1300" b="0" i="0">
-                          <a:solidFill>
-                            <a:srgbClr val="1A1A1A"/>
-                          </a:solidFill>
-                          <a:latin typeface="Yu Gothic"/>
-                          <a:ea typeface="Yu Gothic"/>
-                          <a:cs typeface="Yu Gothic"/>
-                        </a:rPr>
-                        <a:t>62.3 万サンプル（推論のみ）</a:t>
-                      </a:r>
-                    </a:p>
-                  </a:txBody>
-                  <a:tcPr anchor="ctr" marL="73152" marR="73152" marT="27432" marB="27432">
-                    <a:solidFill>
-                      <a:srgbClr val="E8F1FB"/>
-                    </a:solidFill>
-                  </a:tcPr>
-                </a:tc>
-                <a:tc>
-                  <a:txBody>
-                    <a:bodyPr wrap="square"/>
-                    <a:lstStyle/>
-                    <a:p>
-                      <a:pPr algn="ctr"/>
-                      <a:r>
-                        <a:rPr sz="1300" b="0" i="0">
-                          <a:solidFill>
-                            <a:srgbClr val="1A1A1A"/>
-                          </a:solidFill>
-                          <a:latin typeface="Yu Gothic"/>
-                          <a:ea typeface="Yu Gothic"/>
-                          <a:cs typeface="Yu Gothic"/>
-                        </a:rPr>
-                        <a:t>—</a:t>
-                      </a:r>
-                    </a:p>
-                  </a:txBody>
-                  <a:tcPr anchor="ctr" marL="73152" marR="73152" marT="27432" marB="27432">
-                    <a:solidFill>
-                      <a:srgbClr val="E8F1FB"/>
-                    </a:solidFill>
-                  </a:tcPr>
-                </a:tc>
-                <a:tc>
-                  <a:txBody>
-                    <a:bodyPr wrap="square"/>
-                    <a:lstStyle/>
-                    <a:p>
-                      <a:r>
-                        <a:rPr sz="1300" b="0" i="0">
-                          <a:solidFill>
-                            <a:srgbClr val="1A1A1A"/>
-                          </a:solidFill>
-                          <a:latin typeface="Yu Gothic"/>
-                          <a:ea typeface="Yu Gothic"/>
-                          <a:cs typeface="Yu Gothic"/>
-                        </a:rPr>
-                        <a:t>4.2 時間（41 サンプル/秒）</a:t>
-                      </a:r>
-                    </a:p>
-                  </a:txBody>
-                  <a:tcPr anchor="ctr" marL="73152" marR="73152" marT="27432" marB="27432">
-                    <a:solidFill>
-                      <a:srgbClr val="E8F1FB"/>
-                    </a:solidFill>
-                  </a:tcPr>
-                </a:tc>
-              </a:tr>
-              <a:tr h="420624">
-                <a:tc>
-                  <a:txBody>
-                    <a:bodyPr wrap="square"/>
-                    <a:lstStyle/>
-                    <a:p>
-                      <a:r>
-                        <a:rPr sz="1300" b="0" i="0">
-                          <a:solidFill>
-                            <a:srgbClr val="1A1A1A"/>
-                          </a:solidFill>
-                          <a:latin typeface="Yu Gothic"/>
-                          <a:ea typeface="Yu Gothic"/>
-                          <a:cs typeface="Yu Gothic"/>
-                        </a:rPr>
-                        <a:t>RECAP</a:t>
-                      </a:r>
-                    </a:p>
-                  </a:txBody>
-                  <a:tcPr anchor="ctr" marL="73152" marR="73152" marT="27432" marB="27432">
-                    <a:solidFill>
-                      <a:srgbClr val="E8F1FB"/>
-                    </a:solidFill>
-                  </a:tcPr>
-                </a:tc>
-                <a:tc>
-                  <a:txBody>
-                    <a:bodyPr wrap="square"/>
-                    <a:lstStyle/>
-                    <a:p>
-                      <a:r>
-                        <a:rPr sz="1300" b="0" i="0">
-                          <a:solidFill>
-                            <a:srgbClr val="1A1A1A"/>
-                          </a:solidFill>
-                          <a:latin typeface="Yu Gothic"/>
-                          <a:ea typeface="Yu Gothic"/>
-                          <a:cs typeface="Yu Gothic"/>
-                        </a:rPr>
-                        <a:t>Step4: 方策（SFT）</a:t>
-                      </a:r>
-                    </a:p>
-                  </a:txBody>
-                  <a:tcPr anchor="ctr" marL="73152" marR="73152" marT="27432" marB="27432">
-                    <a:solidFill>
-                      <a:srgbClr val="E8F1FB"/>
-                    </a:solidFill>
-                  </a:tcPr>
-                </a:tc>
-                <a:tc>
-                  <a:txBody>
-                    <a:bodyPr wrap="square"/>
-                    <a:lstStyle/>
-                    <a:p>
-                      <a:r>
-                        <a:rPr sz="1300" b="0" i="0">
+                        <a:rPr sz="1200" b="0" i="0">
                           <a:solidFill>
                             <a:srgbClr val="1A1A1A"/>
                           </a:solidFill>
@@ -25605,7 +25847,301 @@
                     <a:p>
                       <a:pPr algn="ctr"/>
                       <a:r>
-                        <a:rPr sz="1300" b="0" i="0">
+                        <a:rPr sz="1200" b="0" i="0">
+                          <a:solidFill>
+                            <a:srgbClr val="1A1A1A"/>
+                          </a:solidFill>
+                          <a:latin typeface="Yu Gothic"/>
+                          <a:ea typeface="Yu Gothic"/>
+                          <a:cs typeface="Yu Gothic"/>
+                        </a:rPr>
+                        <a:t>64</a:t>
+                      </a:r>
+                    </a:p>
+                  </a:txBody>
+                  <a:tcPr anchor="ctr" marL="73152" marR="73152" marT="27432" marB="27432">
+                    <a:solidFill>
+                      <a:srgbClr val="E8F1FB"/>
+                    </a:solidFill>
+                  </a:tcPr>
+                </a:tc>
+                <a:tc>
+                  <a:txBody>
+                    <a:bodyPr wrap="square"/>
+                    <a:lstStyle/>
+                    <a:p>
+                      <a:r>
+                        <a:rPr sz="1200" b="0" i="0">
+                          <a:solidFill>
+                            <a:srgbClr val="1A1A1A"/>
+                          </a:solidFill>
+                          <a:latin typeface="Yu Gothic"/>
+                          <a:ea typeface="Yu Gothic"/>
+                          <a:cs typeface="Yu Gothic"/>
+                        </a:rPr>
+                        <a:t>8.3 時間（14.9 秒/step）</a:t>
+                      </a:r>
+                    </a:p>
+                  </a:txBody>
+                  <a:tcPr anchor="ctr" marL="73152" marR="73152" marT="27432" marB="27432">
+                    <a:solidFill>
+                      <a:srgbClr val="E8F1FB"/>
+                    </a:solidFill>
+                  </a:tcPr>
+                </a:tc>
+                <a:tc>
+                  <a:txBody>
+                    <a:bodyPr wrap="square"/>
+                    <a:lstStyle/>
+                    <a:p>
+                      <a:r>
+                        <a:rPr sz="1200" b="0" i="0">
+                          <a:solidFill>
+                            <a:srgbClr val="1A1A1A"/>
+                          </a:solidFill>
+                          <a:latin typeface="Yu Gothic"/>
+                          <a:ea typeface="Yu Gothic"/>
+                          <a:cs typeface="Yu Gothic"/>
+                        </a:rPr>
+                        <a:t>RTX A5000（24GB）</a:t>
+                      </a:r>
+                    </a:p>
+                  </a:txBody>
+                  <a:tcPr anchor="ctr" marL="73152" marR="73152" marT="27432" marB="27432">
+                    <a:solidFill>
+                      <a:srgbClr val="E8F1FB"/>
+                    </a:solidFill>
+                  </a:tcPr>
+                </a:tc>
+              </a:tr>
+              <a:tr h="420624">
+                <a:tc>
+                  <a:txBody>
+                    <a:bodyPr wrap="square"/>
+                    <a:lstStyle/>
+                    <a:p>
+                      <a:r>
+                        <a:rPr sz="1200" b="0" i="0">
+                          <a:solidFill>
+                            <a:srgbClr val="1A1A1A"/>
+                          </a:solidFill>
+                          <a:latin typeface="Yu Gothic"/>
+                          <a:ea typeface="Yu Gothic"/>
+                          <a:cs typeface="Yu Gothic"/>
+                        </a:rPr>
+                        <a:t>STEAM</a:t>
+                      </a:r>
+                    </a:p>
+                  </a:txBody>
+                  <a:tcPr anchor="ctr" marL="73152" marR="73152" marT="27432" marB="27432">
+                    <a:solidFill>
+                      <a:srgbClr val="E8F1FB"/>
+                    </a:solidFill>
+                  </a:tcPr>
+                </a:tc>
+                <a:tc>
+                  <a:txBody>
+                    <a:bodyPr wrap="square"/>
+                    <a:lstStyle/>
+                    <a:p>
+                      <a:r>
+                        <a:rPr sz="1200" b="0" i="0">
+                          <a:solidFill>
+                            <a:srgbClr val="1A1A1A"/>
+                          </a:solidFill>
+                          <a:latin typeface="Yu Gothic"/>
+                          <a:ea typeface="Yu Gothic"/>
+                          <a:cs typeface="Yu Gothic"/>
+                        </a:rPr>
+                        <a:t>advantage 計算</a:t>
+                      </a:r>
+                    </a:p>
+                  </a:txBody>
+                  <a:tcPr anchor="ctr" marL="73152" marR="73152" marT="27432" marB="27432">
+                    <a:solidFill>
+                      <a:srgbClr val="E8F1FB"/>
+                    </a:solidFill>
+                  </a:tcPr>
+                </a:tc>
+                <a:tc>
+                  <a:txBody>
+                    <a:bodyPr wrap="square"/>
+                    <a:lstStyle/>
+                    <a:p>
+                      <a:r>
+                        <a:rPr sz="1200" b="0" i="0">
+                          <a:solidFill>
+                            <a:srgbClr val="1A1A1A"/>
+                          </a:solidFill>
+                          <a:latin typeface="Yu Gothic"/>
+                          <a:ea typeface="Yu Gothic"/>
+                          <a:cs typeface="Yu Gothic"/>
+                        </a:rPr>
+                        <a:t>15.5 万フレーム/データセット</a:t>
+                      </a:r>
+                    </a:p>
+                  </a:txBody>
+                  <a:tcPr anchor="ctr" marL="73152" marR="73152" marT="27432" marB="27432">
+                    <a:solidFill>
+                      <a:srgbClr val="E8F1FB"/>
+                    </a:solidFill>
+                  </a:tcPr>
+                </a:tc>
+                <a:tc>
+                  <a:txBody>
+                    <a:bodyPr wrap="square"/>
+                    <a:lstStyle/>
+                    <a:p>
+                      <a:pPr algn="ctr"/>
+                      <a:r>
+                        <a:rPr sz="1200" b="0" i="0">
+                          <a:solidFill>
+                            <a:srgbClr val="1A1A1A"/>
+                          </a:solidFill>
+                          <a:latin typeface="Yu Gothic"/>
+                          <a:ea typeface="Yu Gothic"/>
+                          <a:cs typeface="Yu Gothic"/>
+                        </a:rPr>
+                        <a:t>—</a:t>
+                      </a:r>
+                    </a:p>
+                  </a:txBody>
+                  <a:tcPr anchor="ctr" marL="73152" marR="73152" marT="27432" marB="27432">
+                    <a:solidFill>
+                      <a:srgbClr val="E8F1FB"/>
+                    </a:solidFill>
+                  </a:tcPr>
+                </a:tc>
+                <a:tc>
+                  <a:txBody>
+                    <a:bodyPr wrap="square"/>
+                    <a:lstStyle/>
+                    <a:p>
+                      <a:r>
+                        <a:rPr sz="1200" b="0" i="0">
+                          <a:solidFill>
+                            <a:srgbClr val="1A1A1A"/>
+                          </a:solidFill>
+                          <a:latin typeface="Yu Gothic"/>
+                          <a:ea typeface="Yu Gothic"/>
+                          <a:cs typeface="Yu Gothic"/>
+                        </a:rPr>
+                        <a:t>約 2.4 時間/データセット</a:t>
+                      </a:r>
+                    </a:p>
+                  </a:txBody>
+                  <a:tcPr anchor="ctr" marL="73152" marR="73152" marT="27432" marB="27432">
+                    <a:solidFill>
+                      <a:srgbClr val="E8F1FB"/>
+                    </a:solidFill>
+                  </a:tcPr>
+                </a:tc>
+                <a:tc>
+                  <a:txBody>
+                    <a:bodyPr wrap="square"/>
+                    <a:lstStyle/>
+                    <a:p>
+                      <a:r>
+                        <a:rPr sz="1200" b="0" i="0">
+                          <a:solidFill>
+                            <a:srgbClr val="1A1A1A"/>
+                          </a:solidFill>
+                          <a:latin typeface="Yu Gothic"/>
+                          <a:ea typeface="Yu Gothic"/>
+                          <a:cs typeface="Yu Gothic"/>
+                        </a:rPr>
+                        <a:t>RTX A5000（24GB）</a:t>
+                      </a:r>
+                    </a:p>
+                  </a:txBody>
+                  <a:tcPr anchor="ctr" marL="73152" marR="73152" marT="27432" marB="27432">
+                    <a:solidFill>
+                      <a:srgbClr val="E8F1FB"/>
+                    </a:solidFill>
+                  </a:tcPr>
+                </a:tc>
+              </a:tr>
+              <a:tr h="420624">
+                <a:tc>
+                  <a:txBody>
+                    <a:bodyPr wrap="square"/>
+                    <a:lstStyle/>
+                    <a:p>
+                      <a:r>
+                        <a:rPr sz="1200" b="0" i="0">
+                          <a:solidFill>
+                            <a:srgbClr val="1A1A1A"/>
+                          </a:solidFill>
+                          <a:latin typeface="Yu Gothic"/>
+                          <a:ea typeface="Yu Gothic"/>
+                          <a:cs typeface="Yu Gothic"/>
+                        </a:rPr>
+                        <a:t>STEAM</a:t>
+                      </a:r>
+                    </a:p>
+                  </a:txBody>
+                  <a:tcPr anchor="ctr" marL="73152" marR="73152" marT="27432" marB="27432">
+                    <a:solidFill>
+                      <a:srgbClr val="E8F1FB"/>
+                    </a:solidFill>
+                  </a:tcPr>
+                </a:tc>
+                <a:tc>
+                  <a:txBody>
+                    <a:bodyPr wrap="square"/>
+                    <a:lstStyle/>
+                    <a:p>
+                      <a:r>
+                        <a:rPr sz="1200" b="0" i="0">
+                          <a:solidFill>
+                            <a:srgbClr val="1A1A1A"/>
+                          </a:solidFill>
+                          <a:latin typeface="Yu Gothic"/>
+                          <a:ea typeface="Yu Gothic"/>
+                          <a:cs typeface="Yu Gothic"/>
+                        </a:rPr>
+                        <a:t>Step4: 方策（SFT）</a:t>
+                      </a:r>
+                    </a:p>
+                  </a:txBody>
+                  <a:tcPr anchor="ctr" marL="73152" marR="73152" marT="27432" marB="27432">
+                    <a:solidFill>
+                      <a:srgbClr val="E8F1FB"/>
+                    </a:solidFill>
+                  </a:tcPr>
+                </a:tc>
+                <a:tc>
+                  <a:txBody>
+                    <a:bodyPr wrap="square"/>
+                    <a:lstStyle/>
+                    <a:p>
+                      <a:r>
+                        <a:rPr sz="1200" b="0" i="0">
+                          <a:solidFill>
+                            <a:srgbClr val="1A1A1A"/>
+                          </a:solidFill>
+                          <a:latin typeface="Yu Gothic"/>
+                          <a:ea typeface="Yu Gothic"/>
+                          <a:cs typeface="Yu Gothic"/>
+                        </a:rPr>
+                        <a:t>1,450 step</a:t>
+                      </a:r>
+                    </a:p>
+                  </a:txBody>
+                  <a:tcPr anchor="ctr" marL="73152" marR="73152" marT="27432" marB="27432">
+                    <a:solidFill>
+                      <a:srgbClr val="E8F1FB"/>
+                    </a:solidFill>
+                  </a:tcPr>
+                </a:tc>
+                <a:tc>
+                  <a:txBody>
+                    <a:bodyPr wrap="square"/>
+                    <a:lstStyle/>
+                    <a:p>
+                      <a:pPr algn="ctr"/>
+                      <a:r>
+                        <a:rPr sz="1200" b="0" i="0">
                           <a:solidFill>
                             <a:srgbClr val="1A1A1A"/>
                           </a:solidFill>
@@ -25629,7 +26165,7 @@
                     <a:lstStyle/>
                     <a:p>
                       <a:r>
-                        <a:rPr sz="1300" b="0" i="0">
+                        <a:rPr sz="1200" b="0" i="0">
                           <a:solidFill>
                             <a:srgbClr val="1A1A1A"/>
                           </a:solidFill>
@@ -25637,7 +26173,31 @@
                           <a:ea typeface="Yu Gothic"/>
                           <a:cs typeface="Yu Gothic"/>
                         </a:rPr>
-                        <a:t>20.3 時間（約 36 秒/step）</a:t>
+                        <a:t>16.5 時間（約 41 秒/step）</a:t>
+                      </a:r>
+                    </a:p>
+                  </a:txBody>
+                  <a:tcPr anchor="ctr" marL="73152" marR="73152" marT="27432" marB="27432">
+                    <a:solidFill>
+                      <a:srgbClr val="E8F1FB"/>
+                    </a:solidFill>
+                  </a:tcPr>
+                </a:tc>
+                <a:tc>
+                  <a:txBody>
+                    <a:bodyPr wrap="square"/>
+                    <a:lstStyle/>
+                    <a:p>
+                      <a:r>
+                        <a:rPr sz="1200" b="0" i="0">
+                          <a:solidFill>
+                            <a:srgbClr val="1A1A1A"/>
+                          </a:solidFill>
+                          <a:latin typeface="Yu Gothic"/>
+                          <a:ea typeface="Yu Gothic"/>
+                          <a:cs typeface="Yu Gothic"/>
+                        </a:rPr>
+                        <a:t>RTX A5000（24GB）</a:t>
                       </a:r>
                     </a:p>
                   </a:txBody>
@@ -25655,7 +26215,7 @@
                     <a:lstStyle/>
                     <a:p>
                       <a:r>
-                        <a:rPr sz="1300" b="0" i="0">
+                        <a:rPr sz="1200" b="0" i="0">
                           <a:solidFill>
                             <a:srgbClr val="1A1A1A"/>
                           </a:solidFill>
@@ -25663,130 +26223,7 @@
                           <a:ea typeface="Yu Gothic"/>
                           <a:cs typeface="Yu Gothic"/>
                         </a:rPr>
-                        <a:t>STEAM</a:t>
-                      </a:r>
-                    </a:p>
-                  </a:txBody>
-                  <a:tcPr anchor="ctr" marL="73152" marR="73152" marT="27432" marB="27432">
-                    <a:solidFill>
-                      <a:srgbClr val="F3F7FC"/>
-                    </a:solidFill>
-                  </a:tcPr>
-                </a:tc>
-                <a:tc>
-                  <a:txBody>
-                    <a:bodyPr wrap="square"/>
-                    <a:lstStyle/>
-                    <a:p>
-                      <a:r>
-                        <a:rPr sz="1300" b="0" i="0">
-                          <a:solidFill>
-                            <a:srgbClr val="1A1A1A"/>
-                          </a:solidFill>
-                          <a:latin typeface="Yu Gothic"/>
-                          <a:ea typeface="Yu Gothic"/>
-                          <a:cs typeface="Yu Gothic"/>
-                        </a:rPr>
-                        <a:t>critic の学習</a:t>
-                      </a:r>
-                    </a:p>
-                  </a:txBody>
-                  <a:tcPr anchor="ctr" marL="73152" marR="73152" marT="27432" marB="27432">
-                    <a:solidFill>
-                      <a:srgbClr val="F3F7FC"/>
-                    </a:solidFill>
-                  </a:tcPr>
-                </a:tc>
-                <a:tc>
-                  <a:txBody>
-                    <a:bodyPr wrap="square"/>
-                    <a:lstStyle/>
-                    <a:p>
-                      <a:r>
-                        <a:rPr sz="1300" b="0" i="0">
-                          <a:solidFill>
-                            <a:srgbClr val="1A1A1A"/>
-                          </a:solidFill>
-                          <a:latin typeface="Yu Gothic"/>
-                          <a:ea typeface="Yu Gothic"/>
-                          <a:cs typeface="Yu Gothic"/>
-                        </a:rPr>
-                        <a:t>2,000 step</a:t>
-                      </a:r>
-                    </a:p>
-                  </a:txBody>
-                  <a:tcPr anchor="ctr" marL="73152" marR="73152" marT="27432" marB="27432">
-                    <a:solidFill>
-                      <a:srgbClr val="F3F7FC"/>
-                    </a:solidFill>
-                  </a:tcPr>
-                </a:tc>
-                <a:tc>
-                  <a:txBody>
-                    <a:bodyPr wrap="square"/>
-                    <a:lstStyle/>
-                    <a:p>
-                      <a:pPr algn="ctr"/>
-                      <a:r>
-                        <a:rPr sz="1300" b="0" i="0">
-                          <a:solidFill>
-                            <a:srgbClr val="1A1A1A"/>
-                          </a:solidFill>
-                          <a:latin typeface="Yu Gothic"/>
-                          <a:ea typeface="Yu Gothic"/>
-                          <a:cs typeface="Yu Gothic"/>
-                        </a:rPr>
-                        <a:t>64</a:t>
-                      </a:r>
-                    </a:p>
-                  </a:txBody>
-                  <a:tcPr anchor="ctr" marL="73152" marR="73152" marT="27432" marB="27432">
-                    <a:solidFill>
-                      <a:srgbClr val="F3F7FC"/>
-                    </a:solidFill>
-                  </a:tcPr>
-                </a:tc>
-                <a:tc>
-                  <a:txBody>
-                    <a:bodyPr wrap="square"/>
-                    <a:lstStyle/>
-                    <a:p>
-                      <a:r>
-                        <a:rPr sz="1300" b="0" i="0">
-                          <a:solidFill>
-                            <a:srgbClr val="1A1A1A"/>
-                          </a:solidFill>
-                          <a:latin typeface="Yu Gothic"/>
-                          <a:ea typeface="Yu Gothic"/>
-                          <a:cs typeface="Yu Gothic"/>
-                        </a:rPr>
-                        <a:t>8.3 時間（14.9 秒/step）</a:t>
-                      </a:r>
-                    </a:p>
-                  </a:txBody>
-                  <a:tcPr anchor="ctr" marL="73152" marR="73152" marT="27432" marB="27432">
-                    <a:solidFill>
-                      <a:srgbClr val="F3F7FC"/>
-                    </a:solidFill>
-                  </a:tcPr>
-                </a:tc>
-              </a:tr>
-              <a:tr h="420624">
-                <a:tc>
-                  <a:txBody>
-                    <a:bodyPr wrap="square"/>
-                    <a:lstStyle/>
-                    <a:p>
-                      <a:r>
-                        <a:rPr sz="1300" b="0" i="0">
-                          <a:solidFill>
-                            <a:srgbClr val="1A1A1A"/>
-                          </a:solidFill>
-                          <a:latin typeface="Yu Gothic"/>
-                          <a:ea typeface="Yu Gothic"/>
-                          <a:cs typeface="Yu Gothic"/>
-                        </a:rPr>
-                        <a:t>STEAM</a:t>
+                        <a:t>RL Token</a:t>
                       </a:r>
                     </a:p>
                   </a:txBody>
@@ -25802,7 +26239,7 @@
                     <a:lstStyle/>
                     <a:p>
                       <a:r>
-                        <a:rPr sz="1300" b="0" i="0">
+                        <a:rPr sz="1200" b="0" i="0">
                           <a:solidFill>
                             <a:srgbClr val="1A1A1A"/>
                           </a:solidFill>
@@ -25810,7 +26247,7 @@
                           <a:ea typeface="Yu Gothic"/>
                           <a:cs typeface="Yu Gothic"/>
                         </a:rPr>
-                        <a:t>advantage 計算</a:t>
+                        <a:t>Stage 1: RL token</a:t>
                       </a:r>
                     </a:p>
                   </a:txBody>
@@ -25826,7 +26263,7 @@
                     <a:lstStyle/>
                     <a:p>
                       <a:r>
-                        <a:rPr sz="1300" b="0" i="0">
+                        <a:rPr sz="1200" b="0" i="0">
                           <a:solidFill>
                             <a:srgbClr val="1A1A1A"/>
                           </a:solidFill>
@@ -25834,7 +26271,7 @@
                           <a:ea typeface="Yu Gothic"/>
                           <a:cs typeface="Yu Gothic"/>
                         </a:rPr>
-                        <a:t>15.5 万フレーム/データセット</a:t>
+                        <a:t>6,000 step</a:t>
                       </a:r>
                     </a:p>
                   </a:txBody>
@@ -25851,7 +26288,7 @@
                     <a:p>
                       <a:pPr algn="ctr"/>
                       <a:r>
-                        <a:rPr sz="1300" b="0" i="0">
+                        <a:rPr sz="1200" b="0" i="0">
                           <a:solidFill>
                             <a:srgbClr val="1A1A1A"/>
                           </a:solidFill>
@@ -25875,7 +26312,7 @@
                     <a:lstStyle/>
                     <a:p>
                       <a:r>
-                        <a:rPr sz="1300" b="0" i="0">
+                        <a:rPr sz="1200" b="0" i="0">
                           <a:solidFill>
                             <a:srgbClr val="1A1A1A"/>
                           </a:solidFill>
@@ -25883,7 +26320,31 @@
                           <a:ea typeface="Yu Gothic"/>
                           <a:cs typeface="Yu Gothic"/>
                         </a:rPr>
-                        <a:t>約 2.4 時間/データセット</a:t>
+                        <a:t>約 25 分</a:t>
+                      </a:r>
+                    </a:p>
+                  </a:txBody>
+                  <a:tcPr anchor="ctr" marL="73152" marR="73152" marT="27432" marB="27432">
+                    <a:solidFill>
+                      <a:srgbClr val="FFFFFF"/>
+                    </a:solidFill>
+                  </a:tcPr>
+                </a:tc>
+                <a:tc>
+                  <a:txBody>
+                    <a:bodyPr wrap="square"/>
+                    <a:lstStyle/>
+                    <a:p>
+                      <a:r>
+                        <a:rPr sz="1200" b="0" i="0">
+                          <a:solidFill>
+                            <a:srgbClr val="1A1A1A"/>
+                          </a:solidFill>
+                          <a:latin typeface="Yu Gothic"/>
+                          <a:ea typeface="Yu Gothic"/>
+                          <a:cs typeface="Yu Gothic"/>
+                        </a:rPr>
+                        <a:t>記録なし</a:t>
                       </a:r>
                     </a:p>
                   </a:txBody>
@@ -25901,130 +26362,7 @@
                     <a:lstStyle/>
                     <a:p>
                       <a:r>
-                        <a:rPr sz="1300" b="0" i="0">
-                          <a:solidFill>
-                            <a:srgbClr val="1A1A1A"/>
-                          </a:solidFill>
-                          <a:latin typeface="Yu Gothic"/>
-                          <a:ea typeface="Yu Gothic"/>
-                          <a:cs typeface="Yu Gothic"/>
-                        </a:rPr>
-                        <a:t>STEAM</a:t>
-                      </a:r>
-                    </a:p>
-                  </a:txBody>
-                  <a:tcPr anchor="ctr" marL="73152" marR="73152" marT="27432" marB="27432">
-                    <a:solidFill>
-                      <a:srgbClr val="F3F7FC"/>
-                    </a:solidFill>
-                  </a:tcPr>
-                </a:tc>
-                <a:tc>
-                  <a:txBody>
-                    <a:bodyPr wrap="square"/>
-                    <a:lstStyle/>
-                    <a:p>
-                      <a:r>
-                        <a:rPr sz="1300" b="0" i="0">
-                          <a:solidFill>
-                            <a:srgbClr val="1A1A1A"/>
-                          </a:solidFill>
-                          <a:latin typeface="Yu Gothic"/>
-                          <a:ea typeface="Yu Gothic"/>
-                          <a:cs typeface="Yu Gothic"/>
-                        </a:rPr>
-                        <a:t>Step4: 方策（SFT）</a:t>
-                      </a:r>
-                    </a:p>
-                  </a:txBody>
-                  <a:tcPr anchor="ctr" marL="73152" marR="73152" marT="27432" marB="27432">
-                    <a:solidFill>
-                      <a:srgbClr val="F3F7FC"/>
-                    </a:solidFill>
-                  </a:tcPr>
-                </a:tc>
-                <a:tc>
-                  <a:txBody>
-                    <a:bodyPr wrap="square"/>
-                    <a:lstStyle/>
-                    <a:p>
-                      <a:r>
-                        <a:rPr sz="1300" b="0" i="0">
-                          <a:solidFill>
-                            <a:srgbClr val="1A1A1A"/>
-                          </a:solidFill>
-                          <a:latin typeface="Yu Gothic"/>
-                          <a:ea typeface="Yu Gothic"/>
-                          <a:cs typeface="Yu Gothic"/>
-                        </a:rPr>
-                        <a:t>1,450 step</a:t>
-                      </a:r>
-                    </a:p>
-                  </a:txBody>
-                  <a:tcPr anchor="ctr" marL="73152" marR="73152" marT="27432" marB="27432">
-                    <a:solidFill>
-                      <a:srgbClr val="F3F7FC"/>
-                    </a:solidFill>
-                  </a:tcPr>
-                </a:tc>
-                <a:tc>
-                  <a:txBody>
-                    <a:bodyPr wrap="square"/>
-                    <a:lstStyle/>
-                    <a:p>
-                      <a:pPr algn="ctr"/>
-                      <a:r>
-                        <a:rPr sz="1300" b="0" i="0">
-                          <a:solidFill>
-                            <a:srgbClr val="1A1A1A"/>
-                          </a:solidFill>
-                          <a:latin typeface="Yu Gothic"/>
-                          <a:ea typeface="Yu Gothic"/>
-                          <a:cs typeface="Yu Gothic"/>
-                        </a:rPr>
-                        <a:t>256</a:t>
-                      </a:r>
-                    </a:p>
-                  </a:txBody>
-                  <a:tcPr anchor="ctr" marL="73152" marR="73152" marT="27432" marB="27432">
-                    <a:solidFill>
-                      <a:srgbClr val="F3F7FC"/>
-                    </a:solidFill>
-                  </a:tcPr>
-                </a:tc>
-                <a:tc>
-                  <a:txBody>
-                    <a:bodyPr wrap="square"/>
-                    <a:lstStyle/>
-                    <a:p>
-                      <a:r>
-                        <a:rPr sz="1300" b="0" i="0">
-                          <a:solidFill>
-                            <a:srgbClr val="1A1A1A"/>
-                          </a:solidFill>
-                          <a:latin typeface="Yu Gothic"/>
-                          <a:ea typeface="Yu Gothic"/>
-                          <a:cs typeface="Yu Gothic"/>
-                        </a:rPr>
-                        <a:t>16.5 時間（約 41 秒/step）</a:t>
-                      </a:r>
-                    </a:p>
-                  </a:txBody>
-                  <a:tcPr anchor="ctr" marL="73152" marR="73152" marT="27432" marB="27432">
-                    <a:solidFill>
-                      <a:srgbClr val="F3F7FC"/>
-                    </a:solidFill>
-                  </a:tcPr>
-                </a:tc>
-              </a:tr>
-              <a:tr h="420624">
-                <a:tc>
-                  <a:txBody>
-                    <a:bodyPr wrap="square"/>
-                    <a:lstStyle/>
-                    <a:p>
-                      <a:r>
-                        <a:rPr sz="1300" b="0" i="0">
+                        <a:rPr sz="1200" b="0" i="0">
                           <a:solidFill>
                             <a:srgbClr val="1A1A1A"/>
                           </a:solidFill>
@@ -26048,7 +26386,7 @@
                     <a:lstStyle/>
                     <a:p>
                       <a:r>
-                        <a:rPr sz="1300" b="0" i="0">
+                        <a:rPr sz="1200" b="0" i="0">
                           <a:solidFill>
                             <a:srgbClr val="1A1A1A"/>
                           </a:solidFill>
@@ -26056,7 +26394,7 @@
                           <a:ea typeface="Yu Gothic"/>
                           <a:cs typeface="Yu Gothic"/>
                         </a:rPr>
-                        <a:t>Stage 1: RL token</a:t>
+                        <a:t>Stage 2: 1・2 つ目の把持</a:t>
                       </a:r>
                     </a:p>
                   </a:txBody>
@@ -26072,130 +26410,7 @@
                     <a:lstStyle/>
                     <a:p>
                       <a:r>
-                        <a:rPr sz="1300" b="0" i="0">
-                          <a:solidFill>
-                            <a:srgbClr val="1A1A1A"/>
-                          </a:solidFill>
-                          <a:latin typeface="Yu Gothic"/>
-                          <a:ea typeface="Yu Gothic"/>
-                          <a:cs typeface="Yu Gothic"/>
-                        </a:rPr>
-                        <a:t>6,000 step</a:t>
-                      </a:r>
-                    </a:p>
-                  </a:txBody>
-                  <a:tcPr anchor="ctr" marL="73152" marR="73152" marT="27432" marB="27432">
-                    <a:solidFill>
-                      <a:srgbClr val="E8F1FB"/>
-                    </a:solidFill>
-                  </a:tcPr>
-                </a:tc>
-                <a:tc>
-                  <a:txBody>
-                    <a:bodyPr wrap="square"/>
-                    <a:lstStyle/>
-                    <a:p>
-                      <a:pPr algn="ctr"/>
-                      <a:r>
-                        <a:rPr sz="1300" b="0" i="0">
-                          <a:solidFill>
-                            <a:srgbClr val="1A1A1A"/>
-                          </a:solidFill>
-                          <a:latin typeface="Yu Gothic"/>
-                          <a:ea typeface="Yu Gothic"/>
-                          <a:cs typeface="Yu Gothic"/>
-                        </a:rPr>
-                        <a:t>—</a:t>
-                      </a:r>
-                    </a:p>
-                  </a:txBody>
-                  <a:tcPr anchor="ctr" marL="73152" marR="73152" marT="27432" marB="27432">
-                    <a:solidFill>
-                      <a:srgbClr val="E8F1FB"/>
-                    </a:solidFill>
-                  </a:tcPr>
-                </a:tc>
-                <a:tc>
-                  <a:txBody>
-                    <a:bodyPr wrap="square"/>
-                    <a:lstStyle/>
-                    <a:p>
-                      <a:r>
-                        <a:rPr sz="1300" b="0" i="0">
-                          <a:solidFill>
-                            <a:srgbClr val="1A1A1A"/>
-                          </a:solidFill>
-                          <a:latin typeface="Yu Gothic"/>
-                          <a:ea typeface="Yu Gothic"/>
-                          <a:cs typeface="Yu Gothic"/>
-                        </a:rPr>
-                        <a:t>約 25 分</a:t>
-                      </a:r>
-                    </a:p>
-                  </a:txBody>
-                  <a:tcPr anchor="ctr" marL="73152" marR="73152" marT="27432" marB="27432">
-                    <a:solidFill>
-                      <a:srgbClr val="E8F1FB"/>
-                    </a:solidFill>
-                  </a:tcPr>
-                </a:tc>
-              </a:tr>
-              <a:tr h="420624">
-                <a:tc>
-                  <a:txBody>
-                    <a:bodyPr wrap="square"/>
-                    <a:lstStyle/>
-                    <a:p>
-                      <a:r>
-                        <a:rPr sz="1300" b="0" i="0">
-                          <a:solidFill>
-                            <a:srgbClr val="1A1A1A"/>
-                          </a:solidFill>
-                          <a:latin typeface="Yu Gothic"/>
-                          <a:ea typeface="Yu Gothic"/>
-                          <a:cs typeface="Yu Gothic"/>
-                        </a:rPr>
-                        <a:t>RL Token</a:t>
-                      </a:r>
-                    </a:p>
-                  </a:txBody>
-                  <a:tcPr anchor="ctr" marL="73152" marR="73152" marT="27432" marB="27432">
-                    <a:solidFill>
-                      <a:srgbClr val="E8F1FB"/>
-                    </a:solidFill>
-                  </a:tcPr>
-                </a:tc>
-                <a:tc>
-                  <a:txBody>
-                    <a:bodyPr wrap="square"/>
-                    <a:lstStyle/>
-                    <a:p>
-                      <a:r>
-                        <a:rPr sz="1300" b="0" i="0">
-                          <a:solidFill>
-                            <a:srgbClr val="1A1A1A"/>
-                          </a:solidFill>
-                          <a:latin typeface="Yu Gothic"/>
-                          <a:ea typeface="Yu Gothic"/>
-                          <a:cs typeface="Yu Gothic"/>
-                        </a:rPr>
-                        <a:t>Stage 2: 1・2 つ目の把持の actor</a:t>
-                      </a:r>
-                    </a:p>
-                  </a:txBody>
-                  <a:tcPr anchor="ctr" marL="73152" marR="73152" marT="27432" marB="27432">
-                    <a:solidFill>
-                      <a:srgbClr val="E8F1FB"/>
-                    </a:solidFill>
-                  </a:tcPr>
-                </a:tc>
-                <a:tc>
-                  <a:txBody>
-                    <a:bodyPr wrap="square"/>
-                    <a:lstStyle/>
-                    <a:p>
-                      <a:r>
-                        <a:rPr sz="1300" b="0" i="0">
+                        <a:rPr sz="1200" b="0" i="0">
                           <a:solidFill>
                             <a:srgbClr val="1A1A1A"/>
                           </a:solidFill>
@@ -26220,7 +26435,7 @@
                     <a:p>
                       <a:pPr algn="ctr"/>
                       <a:r>
-                        <a:rPr sz="1300" b="0" i="0">
+                        <a:rPr sz="1200" b="0" i="0">
                           <a:solidFill>
                             <a:srgbClr val="1A1A1A"/>
                           </a:solidFill>
@@ -26244,7 +26459,7 @@
                     <a:lstStyle/>
                     <a:p>
                       <a:r>
-                        <a:rPr sz="1300" b="0" i="0">
+                        <a:rPr sz="1200" b="0" i="0">
                           <a:solidFill>
                             <a:srgbClr val="1A1A1A"/>
                           </a:solidFill>
@@ -26262,6 +26477,30 @@
                     </a:solidFill>
                   </a:tcPr>
                 </a:tc>
+                <a:tc>
+                  <a:txBody>
+                    <a:bodyPr wrap="square"/>
+                    <a:lstStyle/>
+                    <a:p>
+                      <a:r>
+                        <a:rPr sz="1200" b="0" i="0">
+                          <a:solidFill>
+                            <a:srgbClr val="1A1A1A"/>
+                          </a:solidFill>
+                          <a:latin typeface="Yu Gothic"/>
+                          <a:ea typeface="Yu Gothic"/>
+                          <a:cs typeface="Yu Gothic"/>
+                        </a:rPr>
+                        <a:t>RTX A5000（24GB）</a:t>
+                      </a:r>
+                    </a:p>
+                  </a:txBody>
+                  <a:tcPr anchor="ctr" marL="73152" marR="73152" marT="27432" marB="27432">
+                    <a:solidFill>
+                      <a:srgbClr val="E8F1FB"/>
+                    </a:solidFill>
+                  </a:tcPr>
+                </a:tc>
               </a:tr>
               <a:tr h="420624">
                 <a:tc>
@@ -26270,7 +26509,7 @@
                     <a:lstStyle/>
                     <a:p>
                       <a:r>
-                        <a:rPr sz="1300" b="0" i="0">
+                        <a:rPr sz="1200" b="0" i="0">
                           <a:solidFill>
                             <a:srgbClr val="1A1A1A"/>
                           </a:solidFill>
@@ -26294,7 +26533,7 @@
                     <a:lstStyle/>
                     <a:p>
                       <a:r>
-                        <a:rPr sz="1300" b="0" i="0">
+                        <a:rPr sz="1200" b="0" i="0">
                           <a:solidFill>
                             <a:srgbClr val="1A1A1A"/>
                           </a:solidFill>
@@ -26318,7 +26557,7 @@
                     <a:lstStyle/>
                     <a:p>
                       <a:r>
-                        <a:rPr sz="1300" b="0" i="0">
+                        <a:rPr sz="1200" b="0" i="0">
                           <a:solidFill>
                             <a:srgbClr val="1A1A1A"/>
                           </a:solidFill>
@@ -26343,7 +26582,7 @@
                     <a:p>
                       <a:pPr algn="ctr"/>
                       <a:r>
-                        <a:rPr sz="1300" b="0" i="0">
+                        <a:rPr sz="1200" b="0" i="0">
                           <a:solidFill>
                             <a:srgbClr val="1A1A1A"/>
                           </a:solidFill>
@@ -26367,7 +26606,7 @@
                     <a:lstStyle/>
                     <a:p>
                       <a:r>
-                        <a:rPr sz="1300" b="0" i="0">
+                        <a:rPr sz="1200" b="0" i="0">
                           <a:solidFill>
                             <a:srgbClr val="1A1A1A"/>
                           </a:solidFill>
@@ -26385,6 +26624,30 @@
                     </a:solidFill>
                   </a:tcPr>
                 </a:tc>
+                <a:tc>
+                  <a:txBody>
+                    <a:bodyPr wrap="square"/>
+                    <a:lstStyle/>
+                    <a:p>
+                      <a:r>
+                        <a:rPr sz="1200" b="0" i="0">
+                          <a:solidFill>
+                            <a:srgbClr val="1A1A1A"/>
+                          </a:solidFill>
+                          <a:latin typeface="Yu Gothic"/>
+                          <a:ea typeface="Yu Gothic"/>
+                          <a:cs typeface="Yu Gothic"/>
+                        </a:rPr>
+                        <a:t>RTX A5000（24GB）</a:t>
+                      </a:r>
+                    </a:p>
+                  </a:txBody>
+                  <a:tcPr anchor="ctr" marL="73152" marR="73152" marT="27432" marB="27432">
+                    <a:solidFill>
+                      <a:srgbClr val="E8F1FB"/>
+                    </a:solidFill>
+                  </a:tcPr>
+                </a:tc>
               </a:tr>
             </a:tbl>
           </a:graphicData>
@@ -26398,8 +26661,8 @@
         </p:nvSpPr>
         <p:spPr>
           <a:xfrm>
-            <a:off x="548640" y="5349240"/>
-            <a:ext cx="11064240" cy="365760"/>
+            <a:off x="548640" y="5230368"/>
+            <a:ext cx="11064240" cy="502920"/>
           </a:xfrm>
           <a:prstGeom prst="rect">
             <a:avLst/>
@@ -26426,7 +26689,7 @@
                 <a:ea typeface="Yu Gothic"/>
                 <a:cs typeface="Yu Gothic"/>
               </a:rPr>
-              <a:t>バッチは global batch。RL Token の 1 エポック = 3 環境のロールアウトと更新。RECAP の advantage は、merged（175.8 万フレーム）のうち 62.3 万サンプル分</a:t>
+              <a:t>バッチは global batch。RL Token の 1 エポック = 3 環境のロールアウトと更新。RECAP の advantage は、merged（175.8 万フレーム）のうち 62.3 万サンプル分。「記録なし」は、ログに GPU 名がない</a:t>
             </a:r>
           </a:p>
         </p:txBody>
@@ -26439,8 +26702,8 @@
         </p:nvSpPr>
         <p:spPr>
           <a:xfrm>
-            <a:off x="548640" y="5760720"/>
-            <a:ext cx="11064240" cy="594360"/>
+            <a:off x="548640" y="5806440"/>
+            <a:ext cx="11064240" cy="548640"/>
           </a:xfrm>
           <a:prstGeom prst="roundRect">
             <a:avLst>
@@ -31400,6 +31663,58 @@
                 <a:cs typeface="Yu Gothic"/>
               </a:rPr>
               <a:t>: RLinf（RECAP / STEAM のパイプライン、RL Token の actor-critic）</a:t>
+            </a:r>
+          </a:p>
+          <a:p>
+            <a:pPr algn="l" marL="274320" indent="-256032">
+              <a:spcAft>
+                <a:spcPts val="600"/>
+              </a:spcAft>
+              <a:buChar char="•"/>
+            </a:pPr>
+            <a:r>
+              <a:rPr sz="1700" b="1" i="0">
+                <a:solidFill>
+                  <a:srgbClr val="1A1A1A"/>
+                </a:solidFill>
+                <a:latin typeface="Yu Gothic"/>
+                <a:ea typeface="Yu Gothic"/>
+                <a:cs typeface="Yu Gothic"/>
+              </a:rPr>
+              <a:t>GPU</a:t>
+            </a:r>
+            <a:r>
+              <a:rPr sz="1700" b="0" i="0">
+                <a:solidFill>
+                  <a:srgbClr val="1A1A1A"/>
+                </a:solidFill>
+                <a:latin typeface="Yu Gothic"/>
+                <a:ea typeface="Yu Gothic"/>
+                <a:cs typeface="Yu Gothic"/>
+              </a:rPr>
+              <a:t>: 主に </a:t>
+            </a:r>
+            <a:r>
+              <a:rPr sz="1700" b="1" i="0">
+                <a:solidFill>
+                  <a:srgbClr val="1A1A1A"/>
+                </a:solidFill>
+                <a:latin typeface="Yu Gothic"/>
+                <a:ea typeface="Yu Gothic"/>
+                <a:cs typeface="Yu Gothic"/>
+              </a:rPr>
+              <a:t>RTX A5000（24GB）</a:t>
+            </a:r>
+            <a:r>
+              <a:rPr sz="1700" b="0" i="0">
+                <a:solidFill>
+                  <a:srgbClr val="1A1A1A"/>
+                </a:solidFill>
+                <a:latin typeface="Yu Gothic"/>
+                <a:ea typeface="Yu Gothic"/>
+                <a:cs typeface="Yu Gothic"/>
+              </a:rPr>
+              <a:t>。RECAP の価値モデルと Step4 は RTX 6000 Ada（48GB）</a:t>
             </a:r>
           </a:p>
         </p:txBody>

--- a/docs/RECAP_STEAM_RLToken.pptx
+++ b/docs/RECAP_STEAM_RLToken.pptx
@@ -3312,7 +3312,7 @@
           <a:lstStyle/>
           <a:p>
             <a:r>
-              <a:t>3 手法は『RL をどこに入れるか』が違う、という整理が主題。</a:t>
+              <a:t>RECAP と STEAM は同じ型（advantage 条件付き学習）で、評価者が違う。RL Token は別の型、という整理が主題。</a:t>
             </a:r>
           </a:p>
         </p:txBody>
@@ -18896,7 +18896,7 @@
                 <a:ea typeface="Yu Gothic"/>
                 <a:cs typeface="Yu Gothic"/>
               </a:rPr>
-              <a:t>3 手法は、RL が作用する場所が違う（方策の学習目標 / advantage の推定器 / 行動の洗練）。成功で打ち切る収集設計が、価値の信号に重要だった</a:t>
+              <a:t>RECAP と STEAM は、評価者（advantage の作り方）だけが違う同じ型。RL Token は、オンライン RL で行動を洗練する別の型。成功で打ち切る収集設計が、価値の信号に重要だった</a:t>
             </a:r>
           </a:p>
         </p:txBody>
@@ -26884,11 +26884,11 @@
                 <a:tableStyleId>{5C22544A-7EE6-4342-B048-85BDC9FD1C3A}</a:tableStyleId>
               </a:tblPr>
               <a:tblGrid>
-                <a:gridCol w="1188720"/>
+                <a:gridCol w="1097280"/>
                 <a:gridCol w="2377440"/>
-                <a:gridCol w="2011680"/>
-                <a:gridCol w="2743200"/>
-                <a:gridCol w="2743200"/>
+                <a:gridCol w="2468880"/>
+                <a:gridCol w="2560320"/>
+                <a:gridCol w="2560320"/>
               </a:tblGrid>
               <a:tr h="502920">
                 <a:tc>
@@ -26941,7 +26941,7 @@
                           <a:ea typeface="Yu Gothic"/>
                           <a:cs typeface="Yu Gothic"/>
                         </a:rPr>
-                        <a:t>必要なもの</a:t>
+                        <a:t>評価者 / 必要なもの</a:t>
                       </a:r>
                     </a:p>
                   </a:txBody>
@@ -27063,7 +27063,7 @@
                           <a:ea typeface="Yu Gothic"/>
                           <a:cs typeface="Yu Gothic"/>
                         </a:rPr>
-                        <a:t>価値関数、ロールアウト</a:t>
+                        <a:t>評価者: 価値関数（return を予測）。ロールアウト</a:t>
                       </a:r>
                     </a:p>
                   </a:txBody>
@@ -27161,7 +27161,7 @@
                           <a:ea typeface="Yu Gothic"/>
                           <a:cs typeface="Yu Gothic"/>
                         </a:rPr>
-                        <a:t>advantage の推定器（critic）</a:t>
+                        <a:t>方策の学習目標（RECAP と同じ条件付き SFT）</a:t>
                       </a:r>
                     </a:p>
                   </a:txBody>
@@ -27185,7 +27185,7 @@
                           <a:ea typeface="Yu Gothic"/>
                           <a:cs typeface="Yu Gothic"/>
                         </a:rPr>
-                        <a:t>デモ（自己教師あり）、critic のアンサンブル</a:t>
+                        <a:t>評価者: 時間オフセットの critic のアンサンブル。デモ（自己教師あり）</a:t>
                       </a:r>
                     </a:p>
                   </a:txBody>
@@ -27307,7 +27307,7 @@
                           <a:ea typeface="Yu Gothic"/>
                           <a:cs typeface="Yu Gothic"/>
                         </a:rPr>
-                        <a:t>オンラインの環境と報酬</a:t>
+                        <a:t>オンラインの環境と報酬。小さな actor-critic</a:t>
                       </a:r>
                     </a:p>
                   </a:txBody>
@@ -27423,7 +27423,7 @@
                 <a:ea typeface="Yu Gothic"/>
                 <a:cs typeface="Yu Gothic"/>
               </a:rPr>
-              <a:t>→ RECAP・STEAM は「良い行動」を学び、RL Token は「行動の直し方」を学ぶ。目的は補完的</a:t>
+              <a:t>→ RECAP と STEAM は評価者だけが違う同じ型。RL Token は行動を直す別の型で、目的は補完的</a:t>
             </a:r>
           </a:p>
         </p:txBody>
@@ -27626,15 +27626,15 @@
               <a:buChar char="•"/>
             </a:pPr>
             <a:r>
-              <a:rPr sz="1700" b="0" i="0">
-                <a:solidFill>
-                  <a:srgbClr val="1A1A1A"/>
-                </a:solidFill>
-                <a:latin typeface="Yu Gothic"/>
-                <a:ea typeface="Yu Gothic"/>
-                <a:cs typeface="Yu Gothic"/>
-              </a:rPr>
-              <a:t>3 手法は、VLA の経験からの改善を、異なる場所で実現する</a:t>
+              <a:rPr sz="1600" b="0" i="0">
+                <a:solidFill>
+                  <a:srgbClr val="1A1A1A"/>
+                </a:solidFill>
+                <a:latin typeface="Yu Gothic"/>
+                <a:ea typeface="Yu Gothic"/>
+                <a:cs typeface="Yu Gothic"/>
+              </a:rPr>
+              <a:t>RECAP と STEAM は評価者が違う同じ型（advantage 条件付き学習）。RL Token は、オンライン RL で行動を洗練する</a:t>
             </a:r>
           </a:p>
           <a:p>
@@ -27645,7 +27645,7 @@
               <a:buChar char="•"/>
             </a:pPr>
             <a:r>
-              <a:rPr sz="1700" b="0" i="0">
+              <a:rPr sz="1600" b="0" i="0">
                 <a:solidFill>
                   <a:srgbClr val="1A1A1A"/>
                 </a:solidFill>
@@ -27656,7 +27656,7 @@
               <a:t>smolVLA では </a:t>
             </a:r>
             <a:r>
-              <a:rPr sz="1700" b="1" i="0">
+              <a:rPr sz="1600" b="1" i="0">
                 <a:solidFill>
                   <a:srgbClr val="1A1A1A"/>
                 </a:solidFill>
@@ -27667,7 +27667,7 @@
               <a:t>RL Token が最良</a:t>
             </a:r>
             <a:r>
-              <a:rPr sz="1700" b="0" i="0">
+              <a:rPr sz="1600" b="0" i="0">
                 <a:solidFill>
                   <a:srgbClr val="1A1A1A"/>
                 </a:solidFill>
@@ -27686,7 +27686,7 @@
               <a:buChar char="•"/>
             </a:pPr>
             <a:r>
-              <a:rPr sz="1700" b="0" i="0">
+              <a:rPr sz="1600" b="0" i="0">
                 <a:solidFill>
                   <a:srgbClr val="1A1A1A"/>
                 </a:solidFill>
@@ -27705,7 +27705,7 @@
               <a:buChar char="•"/>
             </a:pPr>
             <a:r>
-              <a:rPr sz="1700" b="0" i="0">
+              <a:rPr sz="1600" b="0" i="0">
                 <a:solidFill>
                   <a:srgbClr val="1A1A1A"/>
                 </a:solidFill>
@@ -27803,7 +27803,7 @@
               <a:buChar char="•"/>
             </a:pPr>
             <a:r>
-              <a:rPr sz="1700" b="0" i="0">
+              <a:rPr sz="1600" b="0" i="0">
                 <a:solidFill>
                   <a:srgbClr val="1A1A1A"/>
                 </a:solidFill>
@@ -27822,7 +27822,7 @@
               <a:buChar char="•"/>
             </a:pPr>
             <a:r>
-              <a:rPr sz="1700" b="0" i="0">
+              <a:rPr sz="1600" b="0" i="0">
                 <a:solidFill>
                   <a:srgbClr val="1A1A1A"/>
                 </a:solidFill>
@@ -27841,7 +27841,7 @@
               <a:buChar char="•"/>
             </a:pPr>
             <a:r>
-              <a:rPr sz="1700" b="0" i="0">
+              <a:rPr sz="1600" b="0" i="0">
                 <a:solidFill>
                   <a:srgbClr val="1A1A1A"/>
                 </a:solidFill>
@@ -27860,7 +27860,7 @@
               <a:buChar char="•"/>
             </a:pPr>
             <a:r>
-              <a:rPr sz="1700" b="0" i="0">
+              <a:rPr sz="1600" b="0" i="0">
                 <a:solidFill>
                   <a:srgbClr val="1A1A1A"/>
                 </a:solidFill>
@@ -29148,7 +29148,7 @@
               <a:buChar char="•"/>
             </a:pPr>
             <a:r>
-              <a:rPr sz="1900" b="1" i="0">
+              <a:rPr sz="1700" b="1" i="0">
                 <a:solidFill>
                   <a:srgbClr val="1A1A1A"/>
                 </a:solidFill>
@@ -29167,7 +29167,7 @@
               <a:buChar char="–"/>
             </a:pPr>
             <a:r>
-              <a:rPr sz="1700" b="0" i="0">
+              <a:rPr sz="1500" b="0" i="0">
                 <a:solidFill>
                   <a:srgbClr val="1A1A1A"/>
                 </a:solidFill>
@@ -29186,7 +29186,7 @@
               <a:buChar char="•"/>
             </a:pPr>
             <a:r>
-              <a:rPr sz="1900" b="1" i="0">
+              <a:rPr sz="1700" b="1" i="0">
                 <a:solidFill>
                   <a:srgbClr val="1A1A1A"/>
                 </a:solidFill>
@@ -29205,7 +29205,7 @@
               <a:buChar char="–"/>
             </a:pPr>
             <a:r>
-              <a:rPr sz="1700" b="0" i="0">
+              <a:rPr sz="1500" b="0" i="0">
                 <a:solidFill>
                   <a:srgbClr val="1A1A1A"/>
                 </a:solidFill>
@@ -29224,7 +29224,7 @@
               <a:buChar char="–"/>
             </a:pPr>
             <a:r>
-              <a:rPr sz="1700" b="0" i="0">
+              <a:rPr sz="1500" b="0" i="0">
                 <a:solidFill>
                   <a:srgbClr val="1A1A1A"/>
                 </a:solidFill>
@@ -29243,15 +29243,26 @@
               <a:buChar char="•"/>
             </a:pPr>
             <a:r>
-              <a:rPr sz="1900" b="1" i="0">
-                <a:solidFill>
-                  <a:srgbClr val="1A1A1A"/>
-                </a:solidFill>
-                <a:latin typeface="Yu Gothic"/>
-                <a:ea typeface="Yu Gothic"/>
-                <a:cs typeface="Yu Gothic"/>
-              </a:rPr>
-              <a:t>3 手法は、RL を入れる場所が違う</a:t>
+              <a:rPr sz="1700" b="1" i="0">
+                <a:solidFill>
+                  <a:srgbClr val="1A1A1A"/>
+                </a:solidFill>
+                <a:latin typeface="Yu Gothic"/>
+                <a:ea typeface="Yu Gothic"/>
+                <a:cs typeface="Yu Gothic"/>
+              </a:rPr>
+              <a:t>3 手法の位置づけ</a:t>
+            </a:r>
+            <a:r>
+              <a:rPr sz="1700" b="0" i="0">
+                <a:solidFill>
+                  <a:srgbClr val="1A1A1A"/>
+                </a:solidFill>
+                <a:latin typeface="Yu Gothic"/>
+                <a:ea typeface="Yu Gothic"/>
+                <a:cs typeface="Yu Gothic"/>
+              </a:rPr>
+              <a:t>: RECAP と STEAM は同じ型（評価者だけが違う）。RL Token は別の型</a:t>
             </a:r>
           </a:p>
         </p:txBody>
@@ -29367,7 +29378,7 @@
                 <a:ea typeface="Yu Gothic"/>
                 <a:cs typeface="Yu Gothic"/>
               </a:rPr>
-              <a:t>RL が作用する場所: 方策の学習目標</a:t>
+              <a:t>同じ型: 方策の学習目標</a:t>
             </a:r>
           </a:p>
           <a:p>
@@ -29381,7 +29392,7 @@
                 <a:ea typeface="Yu Gothic"/>
                 <a:cs typeface="Yu Gothic"/>
               </a:rPr>
-              <a:t>価値関数から advantage を作り、「良い行動」の指標を方策に入力して学習する（advantage 条件付き SFT）</a:t>
+              <a:t>評価者は価値関数。成功への近さ V から advantage を作り、「良い」の札を付けて方策を学習する</a:t>
             </a:r>
           </a:p>
         </p:txBody>
@@ -29497,7 +29508,7 @@
                 <a:ea typeface="Yu Gothic"/>
                 <a:cs typeface="Yu Gothic"/>
               </a:rPr>
-              <a:t>RL が作用する場所: advantage の推定器</a:t>
+              <a:t>同じ型: 方策の学習目標</a:t>
             </a:r>
           </a:p>
           <a:p>
@@ -29511,7 +29522,7 @@
                 <a:ea typeface="Yu Gothic"/>
                 <a:cs typeface="Yu Gothic"/>
               </a:rPr>
-              <a:t>時間オフセットを自己教師ありで学習した critic のアンサンブルで、フレームごとの advantage を作る</a:t>
+              <a:t>評価者は、時間オフセットを当てる critic のアンサンブル。advantage を作り、同じ札付きの学習で方策を学習する</a:t>
             </a:r>
           </a:p>
         </p:txBody>
@@ -29627,7 +29638,7 @@
                 <a:ea typeface="Yu Gothic"/>
                 <a:cs typeface="Yu Gothic"/>
               </a:rPr>
-              <a:t>RL が作用する場所: 行動の洗練</a:t>
+              <a:t>別の型: 行動の洗練</a:t>
             </a:r>
           </a:p>
           <a:p>
@@ -29641,7 +29652,7 @@
                 <a:ea typeface="Yu Gothic"/>
                 <a:cs typeface="Yu Gothic"/>
               </a:rPr>
-              <a:t>VLA は凍結。読み出しトークンの上の小さな actor-critic が、VLA の行動チャンクを改善する</a:t>
+              <a:t>VLA は凍結。読み出しトークンの上の小さな actor-critic が、オンライン RL で VLA の行動を改善する</a:t>
             </a:r>
           </a:p>
         </p:txBody>
@@ -29699,7 +29710,7 @@
                 <a:ea typeface="Yu Gothic"/>
                 <a:cs typeface="Yu Gothic"/>
               </a:rPr>
-              <a:t>→ RECAP は「方策の学習目標」、STEAM は「評価者」、RL Token は「行動の洗練」に RL を入れる</a:t>
+              <a:t>→ RECAP と STEAM は同じ型（評価者だけが違う）。RL Token は、オンラインで行動を洗練する別の型</a:t>
             </a:r>
           </a:p>
         </p:txBody>

--- a/docs/RECAP_STEAM_RLToken.pptx
+++ b/docs/RECAP_STEAM_RLToken.pptx
@@ -33,6 +33,8 @@
     <p:sldId id="281" r:id="rId33"/>
     <p:sldId id="282" r:id="rId34"/>
     <p:sldId id="283" r:id="rId35"/>
+    <p:sldId id="284" r:id="rId36"/>
+    <p:sldId id="285" r:id="rId37"/>
   </p:sldIdLst>
   <p:sldSz cx="12191695" cy="6858000" type="screen4x3"/>
   <p:notesSz cx="6858000" cy="9144000"/>
@@ -135,234 +137,6 @@
 </file>
 
 <file path=ppt/charts/chart1.xml><?xml version="1.0" encoding="utf-8"?>
-<c:chartSpace xmlns:c="http://schemas.openxmlformats.org/drawingml/2006/chart" xmlns:a="http://schemas.openxmlformats.org/drawingml/2006/main" xmlns:r="http://schemas.openxmlformats.org/officeDocument/2006/relationships">
-  <c:date1904 val="0"/>
-  <c:chart>
-    <c:title>
-      <c:tx>
-        <c:rich>
-          <a:bodyPr/>
-          <a:lstStyle/>
-          <a:p>
-            <a:r>
-              <a:rPr sz="1300" b="1"/>
-              <a:t>1 回の成功エピソードでの、価値 V の変化（イメージ）</a:t>
-            </a:r>
-          </a:p>
-        </c:rich>
-      </c:tx>
-      <c:layout/>
-      <c:overlay val="0"/>
-    </c:title>
-    <c:autoTitleDeleted val="0"/>
-    <c:plotArea>
-      <c:lineChart>
-        <c:grouping val="standard"/>
-        <c:varyColors val="0"/>
-        <c:ser>
-          <c:idx val="0"/>
-          <c:order val="0"/>
-          <c:tx>
-            <c:strRef>
-              <c:f>Sheet1!$B$1</c:f>
-              <c:strCache>
-                <c:ptCount val="1"/>
-                <c:pt idx="0">
-                  <c:v>価値 V（成功に近いほど 0）</c:v>
-                </c:pt>
-              </c:strCache>
-            </c:strRef>
-          </c:tx>
-          <c:spPr>
-            <a:ln w="38100">
-              <a:solidFill>
-                <a:srgbClr val="0B66C3"/>
-              </a:solidFill>
-            </a:ln>
-          </c:spPr>
-          <c:marker>
-            <c:spPr>
-              <a:solidFill>
-                <a:srgbClr val="0B66C3"/>
-              </a:solidFill>
-            </c:spPr>
-          </c:marker>
-          <c:cat>
-            <c:strRef>
-              <c:f>Sheet1!$A$2:$A$12</c:f>
-              <c:strCache>
-                <c:ptCount val="11"/>
-                <c:pt idx="0">
-                  <c:v>0</c:v>
-                </c:pt>
-                <c:pt idx="1">
-                  <c:v>1</c:v>
-                </c:pt>
-                <c:pt idx="2">
-                  <c:v>2</c:v>
-                </c:pt>
-                <c:pt idx="3">
-                  <c:v>3</c:v>
-                </c:pt>
-                <c:pt idx="4">
-                  <c:v>4</c:v>
-                </c:pt>
-                <c:pt idx="5">
-                  <c:v>5</c:v>
-                </c:pt>
-                <c:pt idx="6">
-                  <c:v>6</c:v>
-                </c:pt>
-                <c:pt idx="7">
-                  <c:v>7</c:v>
-                </c:pt>
-                <c:pt idx="8">
-                  <c:v>8</c:v>
-                </c:pt>
-                <c:pt idx="9">
-                  <c:v>9</c:v>
-                </c:pt>
-                <c:pt idx="10">
-                  <c:v>10</c:v>
-                </c:pt>
-              </c:strCache>
-            </c:strRef>
-          </c:cat>
-          <c:val>
-            <c:numRef>
-              <c:f>Sheet1!$B$2:$B$12</c:f>
-              <c:numCache>
-                <c:formatCode>General</c:formatCode>
-                <c:ptCount val="11"/>
-                <c:pt idx="0">
-                  <c:v>-0.9</c:v>
-                </c:pt>
-                <c:pt idx="1">
-                  <c:v>-0.8</c:v>
-                </c:pt>
-                <c:pt idx="2">
-                  <c:v>-0.7</c:v>
-                </c:pt>
-                <c:pt idx="3">
-                  <c:v>-0.6</c:v>
-                </c:pt>
-                <c:pt idx="4">
-                  <c:v>-0.65</c:v>
-                </c:pt>
-                <c:pt idx="5">
-                  <c:v>-0.75</c:v>
-                </c:pt>
-                <c:pt idx="6">
-                  <c:v>-0.6</c:v>
-                </c:pt>
-                <c:pt idx="7">
-                  <c:v>-0.4</c:v>
-                </c:pt>
-                <c:pt idx="8">
-                  <c:v>-0.2</c:v>
-                </c:pt>
-                <c:pt idx="9">
-                  <c:v>-0.1</c:v>
-                </c:pt>
-                <c:pt idx="10">
-                  <c:v>0.0</c:v>
-                </c:pt>
-              </c:numCache>
-            </c:numRef>
-          </c:val>
-          <c:smooth val="0"/>
-        </c:ser>
-        <c:marker val="1"/>
-        <c:smooth val="0"/>
-        <c:axId val="2118791784"/>
-        <c:axId val="2140495176"/>
-      </c:lineChart>
-      <c:catAx>
-        <c:axId val="2118791784"/>
-        <c:scaling>
-          <c:orientation val="minMax"/>
-        </c:scaling>
-        <c:delete val="0"/>
-        <c:axPos val="b"/>
-        <c:majorTickMark val="out"/>
-        <c:minorTickMark val="none"/>
-        <c:tickLblPos val="low"/>
-        <c:txPr>
-          <a:bodyPr/>
-          <a:lstStyle/>
-          <a:p>
-            <a:pPr>
-              <a:defRPr sz="1200"/>
-            </a:pPr>
-          </a:p>
-        </c:txPr>
-        <c:crossAx val="2140495176"/>
-        <c:crosses val="autoZero"/>
-        <c:auto val="1"/>
-        <c:lblAlgn val="ctr"/>
-        <c:lblOffset val="100"/>
-        <c:noMultiLvlLbl val="0"/>
-      </c:catAx>
-      <c:valAx>
-        <c:axId val="2140495176"/>
-        <c:scaling>
-          <c:max val="0.0"/>
-          <c:min val="-1.0"/>
-        </c:scaling>
-        <c:delete val="0"/>
-        <c:axPos val="l"/>
-        <c:majorGridlines>
-          <c:spPr>
-            <a:ln>
-              <a:solidFill>
-                <a:srgbClr val="D9D9D9"/>
-              </a:solidFill>
-            </a:ln>
-          </c:spPr>
-        </c:majorGridlines>
-        <c:majorTickMark val="out"/>
-        <c:minorTickMark val="none"/>
-        <c:tickLblPos val="nextTo"/>
-        <c:txPr>
-          <a:bodyPr/>
-          <a:lstStyle/>
-          <a:p>
-            <a:pPr>
-              <a:defRPr sz="1200"/>
-            </a:pPr>
-          </a:p>
-        </c:txPr>
-        <c:crossAx val="2118791784"/>
-        <c:crosses val="autoZero"/>
-        <c:majorUnit val="0.25"/>
-      </c:valAx>
-    </c:plotArea>
-    <c:plotVisOnly val="1"/>
-    <c:dispBlanksAs val="gap"/>
-    <c:showDLblsOverMax val="0"/>
-  </c:chart>
-  <c:txPr>
-    <a:bodyPr/>
-    <a:lstStyle/>
-    <a:p>
-      <a:pPr>
-        <a:defRPr sz="1200">
-          <a:solidFill>
-            <a:srgbClr val="1A1A1A"/>
-          </a:solidFill>
-          <a:latin typeface="Yu Gothic"/>
-        </a:defRPr>
-      </a:pPr>
-      <a:endParaRPr lang="en-US"/>
-    </a:p>
-  </c:txPr>
-  <c:externalData r:id="rId1">
-    <c:autoUpdate val="0"/>
-  </c:externalData>
-</c:chartSpace>
-</file>
-
-<file path=ppt/charts/chart2.xml><?xml version="1.0" encoding="utf-8"?>
 <c:chartSpace xmlns:c="http://schemas.openxmlformats.org/drawingml/2006/chart" xmlns:a="http://schemas.openxmlformats.org/drawingml/2006/main" xmlns:r="http://schemas.openxmlformats.org/officeDocument/2006/relationships">
   <c:chart>
     <c:title>
@@ -594,7 +368,7 @@
 </c:chartSpace>
 </file>
 
-<file path=ppt/charts/chart3.xml><?xml version="1.0" encoding="utf-8"?>
+<file path=ppt/charts/chart2.xml><?xml version="1.0" encoding="utf-8"?>
 <c:chartSpace xmlns:c="http://schemas.openxmlformats.org/drawingml/2006/chart" xmlns:a="http://schemas.openxmlformats.org/drawingml/2006/main" xmlns:r="http://schemas.openxmlformats.org/officeDocument/2006/relationships">
   <c:date1904 val="0"/>
   <c:chart>
@@ -916,7 +690,7 @@
 </c:chartSpace>
 </file>
 
-<file path=ppt/charts/chart4.xml><?xml version="1.0" encoding="utf-8"?>
+<file path=ppt/charts/chart3.xml><?xml version="1.0" encoding="utf-8"?>
 <c:chartSpace xmlns:c="http://schemas.openxmlformats.org/drawingml/2006/chart" xmlns:a="http://schemas.openxmlformats.org/drawingml/2006/main" xmlns:r="http://schemas.openxmlformats.org/officeDocument/2006/relationships">
   <c:date1904 val="0"/>
   <c:chart>
@@ -1139,7 +913,7 @@
 </c:chartSpace>
 </file>
 
-<file path=ppt/charts/chart5.xml><?xml version="1.0" encoding="utf-8"?>
+<file path=ppt/charts/chart4.xml><?xml version="1.0" encoding="utf-8"?>
 <c:chartSpace xmlns:c="http://schemas.openxmlformats.org/drawingml/2006/chart" xmlns:a="http://schemas.openxmlformats.org/drawingml/2006/main" xmlns:r="http://schemas.openxmlformats.org/officeDocument/2006/relationships">
   <c:date1904 val="0"/>
   <c:chart>
@@ -2262,7 +2036,7 @@
           <a:lstStyle/>
           <a:p>
             <a:r>
-              <a:t>デモだけで学習する。報酬は使わない。</a:t>
+              <a:t>論文 STEAM の図 1 より。左から、ラベル付け、予測器の学習、方策の改善。</a:t>
             </a:r>
           </a:p>
         </p:txBody>
@@ -2332,7 +2106,7 @@
           <a:lstStyle/>
           <a:p>
             <a:r>
-              <a:t>モデルの更新はなく、データに札を付ける処理。smolVLA の実験では、critic は 1 個（M = 1）。</a:t>
+              <a:t>デモだけで学習する。報酬は使わない。</a:t>
             </a:r>
           </a:p>
         </p:txBody>
@@ -2402,7 +2176,7 @@
           <a:lstStyle/>
           <a:p>
             <a:r>
-              <a:t>表は論文 Table 1 の成功率（Succ.）のみ。RECAP は同じ CFGRL の骨格で 1 反復。</a:t>
+              <a:t>モデルの更新はなく、データに札を付ける処理。smolVLA の実験では、critic は 1 個（M = 1）。</a:t>
             </a:r>
           </a:p>
         </p:txBody>
@@ -2472,7 +2246,7 @@
           <a:lstStyle/>
           <a:p>
             <a:r>
-              <a:t>グラフは学習中の指標（学習データ上）。検証データの値は左の箇条書き。</a:t>
+              <a:t>表は論文 Table 1 の成功率（Succ.）のみ。RECAP は同じ CFGRL の骨格で 1 反復。</a:t>
             </a:r>
           </a:p>
         </p:txBody>
@@ -2612,7 +2386,7 @@
           <a:lstStyle/>
           <a:p>
             <a:r>
-              <a:t>VLA を凍結して、RL token という小さな状態表現の上で RL をする。</a:t>
+              <a:t>グラフは学習中の指標（学習データ上）。検証データの値は左の箇条書き。</a:t>
             </a:r>
           </a:p>
         </p:txBody>
@@ -2682,7 +2456,7 @@
           <a:lstStyle/>
           <a:p>
             <a:r>
-              <a:t>実行時と学習データの収集で、同じ流れ。灰色は凍結、オレンジは更新する部品。</a:t>
+              <a:t>VLA を凍結して、RL token という小さな状態表現の上で RL をする。</a:t>
             </a:r>
           </a:p>
         </p:txBody>
@@ -2752,7 +2526,7 @@
           <a:lstStyle/>
           <a:p>
             <a:r>
-              <a:t>更新されるのは、小さな actor と critic だけ（actor の重みは約 5 MB）。</a:t>
+              <a:t>論文 RL Token の図 2 より。VLA の内部の埋め込みを、1 本の RL token に圧縮する。</a:t>
             </a:r>
           </a:p>
         </p:txBody>
@@ -2822,7 +2596,7 @@
           <a:lstStyle/>
           <a:p>
             <a:r>
-              <a:t>式の番号は論文のもの。式の意味は、直前の 2 枚の図と対応。</a:t>
+              <a:t>実行時と学習データの収集で、同じ流れ。灰色は凍結、オレンジは更新する部品。</a:t>
             </a:r>
           </a:p>
         </p:txBody>
@@ -2892,7 +2666,7 @@
           <a:lstStyle/>
           <a:p>
             <a:r>
-              <a:t>グラフの 0.46 は、この RL プロトコルでの VLA のみの評価（50 エピソード）。</a:t>
+              <a:t>更新されるのは、小さな actor と critic だけ（actor の重みは約 5 MB）。</a:t>
             </a:r>
           </a:p>
         </p:txBody>
@@ -2962,7 +2736,7 @@
           <a:lstStyle/>
           <a:p>
             <a:r>
-              <a:t>π₀.₅ は RLinf のチュートリアルの値。smolVLA は私たちの実験（各 50 エピソード）。</a:t>
+              <a:t>式の番号は論文のもの。式の意味は、直前の 2 枚の図と対応。</a:t>
             </a:r>
           </a:p>
         </p:txBody>
@@ -3032,7 +2806,7 @@
           <a:lstStyle/>
           <a:p>
             <a:r>
-              <a:t>実測値（TensorBoard と実行ログ）。GPU は、ログに名前が残っているものだけを記載。</a:t>
+              <a:t>グラフの 0.46 は、この RL プロトコルでの VLA のみの評価（50 エピソード）。</a:t>
             </a:r>
           </a:p>
         </p:txBody>
@@ -3102,7 +2876,7 @@
           <a:lstStyle/>
           <a:p>
             <a:r>
-              <a:t>表は定性的な比較。smolVLA での経験に基づく。</a:t>
+              <a:t>π₀.₅ は RLinf のチュートリアルの値。smolVLA は私たちの実験（各 50 エピソード）。</a:t>
             </a:r>
           </a:p>
         </p:txBody>
@@ -3172,7 +2946,77 @@
           <a:lstStyle/>
           <a:p>
             <a:r>
-              <a:t>次の作業: Step4 の本学習、critic の精度、評価の統計的な信頼性。</a:t>
+              <a:t>実測値（TensorBoard と実行ログ）。GPU は、ログに名前が残っているものだけを記載。</a:t>
+            </a:r>
+          </a:p>
+        </p:txBody>
+      </p:sp>
+      <p:sp>
+        <p:nvSpPr>
+          <p:cNvPr id="4" name="Slide Number Placeholder 3"/>
+          <p:cNvSpPr>
+            <a:spLocks noGrp="1"/>
+          </p:cNvSpPr>
+          <p:nvPr>
+            <p:ph type="sldNum" idx="5" sz="quarter"/>
+          </p:nvPr>
+        </p:nvSpPr>
+        <p:spPr/>
+      </p:sp>
+    </p:spTree>
+  </p:cSld>
+  <p:clrMapOvr>
+    <a:masterClrMapping/>
+  </p:clrMapOvr>
+</p:notes>
+</file>
+
+<file path=ppt/notesSlides/notesSlide29.xml><?xml version="1.0" encoding="utf-8"?>
+<p:notes xmlns:a="http://schemas.openxmlformats.org/drawingml/2006/main" xmlns:p="http://schemas.openxmlformats.org/presentationml/2006/main" xmlns:r="http://schemas.openxmlformats.org/officeDocument/2006/relationships">
+  <p:cSld>
+    <p:spTree>
+      <p:nvGrpSpPr>
+        <p:cNvPr id="1" name=""/>
+        <p:cNvGrpSpPr/>
+        <p:nvPr/>
+      </p:nvGrpSpPr>
+      <p:grpSpPr>
+        <a:xfrm>
+          <a:off x="0" y="0"/>
+          <a:ext cx="0" cy="0"/>
+          <a:chOff x="0" y="0"/>
+          <a:chExt cx="0" cy="0"/>
+        </a:xfrm>
+      </p:grpSpPr>
+      <p:sp>
+        <p:nvSpPr>
+          <p:cNvPr id="2" name="Slide Image Placeholder 1"/>
+          <p:cNvSpPr>
+            <a:spLocks noGrp="1"/>
+          </p:cNvSpPr>
+          <p:nvPr>
+            <p:ph type="sldImg" idx="2"/>
+          </p:nvPr>
+        </p:nvSpPr>
+        <p:spPr/>
+      </p:sp>
+      <p:sp>
+        <p:nvSpPr>
+          <p:cNvPr id="3" name="Notes Placeholder 2"/>
+          <p:cNvSpPr>
+            <a:spLocks noGrp="1"/>
+          </p:cNvSpPr>
+          <p:nvPr>
+            <p:ph type="body" idx="3" sz="quarter"/>
+          </p:nvPr>
+        </p:nvSpPr>
+        <p:spPr/>
+        <p:txBody>
+          <a:bodyPr/>
+          <a:lstStyle/>
+          <a:p>
+            <a:r>
+              <a:t>表は定性的な比較。smolVLA での経験に基づく。</a:t>
             </a:r>
           </a:p>
         </p:txBody>
@@ -3267,6 +3111,76 @@
 </p:notes>
 </file>
 
+<file path=ppt/notesSlides/notesSlide30.xml><?xml version="1.0" encoding="utf-8"?>
+<p:notes xmlns:a="http://schemas.openxmlformats.org/drawingml/2006/main" xmlns:p="http://schemas.openxmlformats.org/presentationml/2006/main" xmlns:r="http://schemas.openxmlformats.org/officeDocument/2006/relationships">
+  <p:cSld>
+    <p:spTree>
+      <p:nvGrpSpPr>
+        <p:cNvPr id="1" name=""/>
+        <p:cNvGrpSpPr/>
+        <p:nvPr/>
+      </p:nvGrpSpPr>
+      <p:grpSpPr>
+        <a:xfrm>
+          <a:off x="0" y="0"/>
+          <a:ext cx="0" cy="0"/>
+          <a:chOff x="0" y="0"/>
+          <a:chExt cx="0" cy="0"/>
+        </a:xfrm>
+      </p:grpSpPr>
+      <p:sp>
+        <p:nvSpPr>
+          <p:cNvPr id="2" name="Slide Image Placeholder 1"/>
+          <p:cNvSpPr>
+            <a:spLocks noGrp="1"/>
+          </p:cNvSpPr>
+          <p:nvPr>
+            <p:ph type="sldImg" idx="2"/>
+          </p:nvPr>
+        </p:nvSpPr>
+        <p:spPr/>
+      </p:sp>
+      <p:sp>
+        <p:nvSpPr>
+          <p:cNvPr id="3" name="Notes Placeholder 2"/>
+          <p:cNvSpPr>
+            <a:spLocks noGrp="1"/>
+          </p:cNvSpPr>
+          <p:nvPr>
+            <p:ph type="body" idx="3" sz="quarter"/>
+          </p:nvPr>
+        </p:nvSpPr>
+        <p:spPr/>
+        <p:txBody>
+          <a:bodyPr/>
+          <a:lstStyle/>
+          <a:p>
+            <a:r>
+              <a:t>次の作業: Step4 の本学習、critic の精度、評価の統計的な信頼性。</a:t>
+            </a:r>
+          </a:p>
+        </p:txBody>
+      </p:sp>
+      <p:sp>
+        <p:nvSpPr>
+          <p:cNvPr id="4" name="Slide Number Placeholder 3"/>
+          <p:cNvSpPr>
+            <a:spLocks noGrp="1"/>
+          </p:cNvSpPr>
+          <p:nvPr>
+            <p:ph type="sldNum" idx="5" sz="quarter"/>
+          </p:nvPr>
+        </p:nvSpPr>
+        <p:spPr/>
+      </p:sp>
+    </p:spTree>
+  </p:cSld>
+  <p:clrMapOvr>
+    <a:masterClrMapping/>
+  </p:clrMapOvr>
+</p:notes>
+</file>
+
 <file path=ppt/notesSlides/notesSlide4.xml><?xml version="1.0" encoding="utf-8"?>
 <p:notes xmlns:a="http://schemas.openxmlformats.org/drawingml/2006/main" xmlns:p="http://schemas.openxmlformats.org/presentationml/2006/main" xmlns:r="http://schemas.openxmlformats.org/officeDocument/2006/relationships">
   <p:cSld>
@@ -3312,7 +3226,7 @@
           <a:lstStyle/>
           <a:p>
             <a:r>
-              <a:t>RECAP と STEAM は同じ型（advantage 条件付き学習）で、評価者が違う。RL Token は別の型、という整理が主題。</a:t>
+              <a:t>RECAP と STEAM は評価者（advantage の作り方）だけが違う。RL Token は、オンラインで行動を洗練する、という整理が主題。</a:t>
             </a:r>
           </a:p>
         </p:txBody>
@@ -3452,7 +3366,7 @@
           <a:lstStyle/>
           <a:p>
             <a:r>
-              <a:t>数値は説明用の模式図で、実験の値ではない。</a:t>
+              <a:t>評価は 50 エピソード。標準誤差が大きいことを最初に断っておく。</a:t>
             </a:r>
           </a:p>
         </p:txBody>
@@ -3522,7 +3436,7 @@
           <a:lstStyle/>
           <a:p>
             <a:r>
-              <a:t>評価は 50 エピソード。標準誤差が大きいことを最初に断っておく。</a:t>
+              <a:t>RECAP は、価値関数の出力を『良い/悪い』の札として方策に条件付けるのが核心。</a:t>
             </a:r>
           </a:p>
         </p:txBody>
@@ -3592,7 +3506,7 @@
           <a:lstStyle/>
           <a:p>
             <a:r>
-              <a:t>RECAP は、価値関数の出力を『良い/悪い』の札として方策に条件付けるのが核心。</a:t>
+              <a:t>論文 π*0.6 の図 3 より。下が価値関数、上が VLA。</a:t>
             </a:r>
           </a:p>
         </p:txBody>
@@ -14275,7 +14189,7 @@
                 <a:ea typeface="Yu Gothic"/>
                 <a:cs typeface="Yu Gothic"/>
               </a:rPr>
-              <a:t>STEAM ①: critic の学習（入力・出力・更新）</a:t>
+              <a:t>STEAM: アーキテクチャ（論文の図）</a:t>
             </a:r>
           </a:p>
         </p:txBody>
@@ -14317,6 +14231,458 @@
                 <a:cs typeface="Yu Gothic"/>
               </a:rPr>
               <a:t>16</a:t>
+            </a:r>
+          </a:p>
+        </p:txBody>
+      </p:sp>
+      <p:pic>
+        <p:nvPicPr>
+          <p:cNvPr id="4" name="fig_steam.png" descr="fig_steam.png"/>
+          <p:cNvPicPr>
+            <a:picLocks noChangeAspect="1"/>
+          </p:cNvPicPr>
+          <p:nvPr/>
+        </p:nvPicPr>
+        <p:blipFill>
+          <a:blip r:embed="rId3"/>
+          <a:stretch>
+            <a:fillRect/>
+          </a:stretch>
+        </p:blipFill>
+        <p:spPr>
+          <a:xfrm>
+            <a:off x="548640" y="1005840"/>
+            <a:ext cx="11064240" cy="2267825"/>
+          </a:xfrm>
+          <a:prstGeom prst="rect">
+            <a:avLst/>
+          </a:prstGeom>
+        </p:spPr>
+      </p:pic>
+      <p:sp>
+        <p:nvSpPr>
+          <p:cNvPr id="5" name="TextBox 4"/>
+          <p:cNvSpPr txBox="1"/>
+          <p:nvPr/>
+        </p:nvSpPr>
+        <p:spPr>
+          <a:xfrm>
+            <a:off x="548640" y="3301097"/>
+            <a:ext cx="11064240" cy="274320"/>
+          </a:xfrm>
+          <a:prstGeom prst="rect">
+            <a:avLst/>
+          </a:prstGeom>
+          <a:noFill/>
+        </p:spPr>
+        <p:txBody>
+          <a:bodyPr wrap="square" anchor="t" lIns="45720" rIns="45720" tIns="27432" bIns="27432">
+            <a:spAutoFit/>
+          </a:bodyPr>
+          <a:lstStyle/>
+          <a:p>
+            <a:pPr algn="ctr">
+              <a:spcAft>
+                <a:spcPts val="600"/>
+              </a:spcAft>
+            </a:pPr>
+            <a:r>
+              <a:rPr sz="1100" b="0" i="0">
+                <a:solidFill>
+                  <a:srgbClr val="595959"/>
+                </a:solidFill>
+                <a:latin typeface="Yu Gothic"/>
+                <a:ea typeface="Yu Gothic"/>
+                <a:cs typeface="Yu Gothic"/>
+              </a:rPr>
+              <a:t>図: STEAM 論文図 1 より</a:t>
+            </a:r>
+          </a:p>
+        </p:txBody>
+      </p:sp>
+      <p:sp>
+        <p:nvSpPr>
+          <p:cNvPr id="6" name="panel 1"/>
+          <p:cNvSpPr/>
+          <p:nvPr/>
+        </p:nvSpPr>
+        <p:spPr>
+          <a:xfrm>
+            <a:off x="548640" y="3794760"/>
+            <a:ext cx="3566160" cy="1737360"/>
+          </a:xfrm>
+          <a:prstGeom prst="roundRect">
+            <a:avLst>
+              <a:gd name="adj" fmla="val 12000"/>
+            </a:avLst>
+          </a:prstGeom>
+          <a:solidFill>
+            <a:srgbClr val="F3F7FC"/>
+          </a:solidFill>
+          <a:ln w="12700">
+            <a:solidFill>
+              <a:srgbClr val="BFBFBF"/>
+            </a:solidFill>
+          </a:ln>
+        </p:spPr>
+        <p:style>
+          <a:lnRef idx="1">
+            <a:schemeClr val="accent1"/>
+          </a:lnRef>
+          <a:fillRef idx="3">
+            <a:schemeClr val="accent1"/>
+          </a:fillRef>
+          <a:effectRef idx="2">
+            <a:schemeClr val="accent1"/>
+          </a:effectRef>
+          <a:fontRef idx="minor">
+            <a:schemeClr val="lt1"/>
+          </a:fontRef>
+        </p:style>
+        <p:txBody>
+          <a:bodyPr rtlCol="0" anchor="t" wrap="square" lIns="73152" rIns="73152" tIns="36576" bIns="36576"/>
+          <a:lstStyle/>
+          <a:p>
+            <a:pPr algn="l"/>
+            <a:r>
+              <a:rPr sz="1600" b="1" i="0">
+                <a:solidFill>
+                  <a:srgbClr val="0B66C3"/>
+                </a:solidFill>
+                <a:latin typeface="Yu Gothic"/>
+                <a:ea typeface="Yu Gothic"/>
+                <a:cs typeface="Yu Gothic"/>
+              </a:rPr>
+              <a:t>① フレームペアのラベル付け</a:t>
+            </a:r>
+          </a:p>
+          <a:p>
+            <a:pPr algn="l"/>
+            <a:r>
+              <a:rPr sz="1400" b="0" i="0">
+                <a:solidFill>
+                  <a:srgbClr val="1A1A1A"/>
+                </a:solidFill>
+                <a:latin typeface="Yu Gothic"/>
+                <a:ea typeface="Yu Gothic"/>
+                <a:cs typeface="Yu Gothic"/>
+              </a:rPr>
+              <a:t>専門家デモの 2 つのフレーム（前進 forward / 後退 backward）の時間差を、エピソード長で正規化して、正解にする</a:t>
+            </a:r>
+          </a:p>
+        </p:txBody>
+      </p:sp>
+      <p:sp>
+        <p:nvSpPr>
+          <p:cNvPr id="7" name="panel 2"/>
+          <p:cNvSpPr/>
+          <p:nvPr/>
+        </p:nvSpPr>
+        <p:spPr>
+          <a:xfrm>
+            <a:off x="4297679" y="3794760"/>
+            <a:ext cx="3566160" cy="1737360"/>
+          </a:xfrm>
+          <a:prstGeom prst="roundRect">
+            <a:avLst>
+              <a:gd name="adj" fmla="val 12000"/>
+            </a:avLst>
+          </a:prstGeom>
+          <a:solidFill>
+            <a:srgbClr val="F3F7FC"/>
+          </a:solidFill>
+          <a:ln w="12700">
+            <a:solidFill>
+              <a:srgbClr val="BFBFBF"/>
+            </a:solidFill>
+          </a:ln>
+        </p:spPr>
+        <p:style>
+          <a:lnRef idx="1">
+            <a:schemeClr val="accent1"/>
+          </a:lnRef>
+          <a:fillRef idx="3">
+            <a:schemeClr val="accent1"/>
+          </a:fillRef>
+          <a:effectRef idx="2">
+            <a:schemeClr val="accent1"/>
+          </a:effectRef>
+          <a:fontRef idx="minor">
+            <a:schemeClr val="lt1"/>
+          </a:fontRef>
+        </p:style>
+        <p:txBody>
+          <a:bodyPr rtlCol="0" anchor="t" wrap="square" lIns="73152" rIns="73152" tIns="36576" bIns="36576"/>
+          <a:lstStyle/>
+          <a:p>
+            <a:pPr algn="l"/>
+            <a:r>
+              <a:rPr sz="1600" b="1" i="0">
+                <a:solidFill>
+                  <a:srgbClr val="0B66C3"/>
+                </a:solidFill>
+                <a:latin typeface="Yu Gothic"/>
+                <a:ea typeface="Yu Gothic"/>
+                <a:cs typeface="Yu Gothic"/>
+              </a:rPr>
+              <a:t>② 時間オフセット予測器の学習</a:t>
+            </a:r>
+          </a:p>
+          <a:p>
+            <a:pPr algn="l"/>
+            <a:r>
+              <a:rPr sz="1400" b="0" i="0">
+                <a:solidFill>
+                  <a:srgbClr val="1A1A1A"/>
+                </a:solidFill>
+                <a:latin typeface="Yu Gothic"/>
+                <a:ea typeface="Yu Gothic"/>
+                <a:cs typeface="Yu Gothic"/>
+              </a:rPr>
+              <a:t>2 つのフレームと指示文から、時間差の分布を出す。M 個の予測器を学習して、アンサンブルにする</a:t>
+            </a:r>
+          </a:p>
+        </p:txBody>
+      </p:sp>
+      <p:sp>
+        <p:nvSpPr>
+          <p:cNvPr id="8" name="panel 3"/>
+          <p:cNvSpPr/>
+          <p:nvPr/>
+        </p:nvSpPr>
+        <p:spPr>
+          <a:xfrm>
+            <a:off x="8046719" y="3794760"/>
+            <a:ext cx="3566160" cy="1737360"/>
+          </a:xfrm>
+          <a:prstGeom prst="roundRect">
+            <a:avLst>
+              <a:gd name="adj" fmla="val 12000"/>
+            </a:avLst>
+          </a:prstGeom>
+          <a:solidFill>
+            <a:srgbClr val="F3F7FC"/>
+          </a:solidFill>
+          <a:ln w="12700">
+            <a:solidFill>
+              <a:srgbClr val="BFBFBF"/>
+            </a:solidFill>
+          </a:ln>
+        </p:spPr>
+        <p:style>
+          <a:lnRef idx="1">
+            <a:schemeClr val="accent1"/>
+          </a:lnRef>
+          <a:fillRef idx="3">
+            <a:schemeClr val="accent1"/>
+          </a:fillRef>
+          <a:effectRef idx="2">
+            <a:schemeClr val="accent1"/>
+          </a:effectRef>
+          <a:fontRef idx="minor">
+            <a:schemeClr val="lt1"/>
+          </a:fontRef>
+        </p:style>
+        <p:txBody>
+          <a:bodyPr rtlCol="0" anchor="t" wrap="square" lIns="73152" rIns="73152" tIns="36576" bIns="36576"/>
+          <a:lstStyle/>
+          <a:p>
+            <a:pPr algn="l"/>
+            <a:r>
+              <a:rPr sz="1600" b="1" i="0">
+                <a:solidFill>
+                  <a:srgbClr val="0B66C3"/>
+                </a:solidFill>
+                <a:latin typeface="Yu Gothic"/>
+                <a:ea typeface="Yu Gothic"/>
+                <a:cs typeface="Yu Gothic"/>
+              </a:rPr>
+              <a:t>③ 方策の改善</a:t>
+            </a:r>
+          </a:p>
+          <a:p>
+            <a:pPr algn="l"/>
+            <a:r>
+              <a:rPr sz="1400" b="0" i="0">
+                <a:solidFill>
+                  <a:srgbClr val="1A1A1A"/>
+                </a:solidFill>
+                <a:latin typeface="Yu Gothic"/>
+                <a:ea typeface="Yu Gothic"/>
+                <a:cs typeface="Yu Gothic"/>
+              </a:rPr>
+              <a:t>専門家・ロールアウト・人の修正のデータに、アンサンブルで A_STEAM を付け、CFGRL（札付き学習）で VLA を学習する</a:t>
+            </a:r>
+          </a:p>
+        </p:txBody>
+      </p:sp>
+      <p:sp>
+        <p:nvSpPr>
+          <p:cNvPr id="9" name="key point"/>
+          <p:cNvSpPr/>
+          <p:nvPr/>
+        </p:nvSpPr>
+        <p:spPr>
+          <a:xfrm>
+            <a:off x="548640" y="5715000"/>
+            <a:ext cx="11064240" cy="640080"/>
+          </a:xfrm>
+          <a:prstGeom prst="roundRect">
+            <a:avLst>
+              <a:gd name="adj" fmla="val 18000"/>
+            </a:avLst>
+          </a:prstGeom>
+          <a:solidFill>
+            <a:srgbClr val="E8F1FB"/>
+          </a:solidFill>
+          <a:ln w="15875">
+            <a:solidFill>
+              <a:srgbClr val="0B66C3"/>
+            </a:solidFill>
+          </a:ln>
+        </p:spPr>
+        <p:style>
+          <a:lnRef idx="1">
+            <a:schemeClr val="accent1"/>
+          </a:lnRef>
+          <a:fillRef idx="3">
+            <a:schemeClr val="accent1"/>
+          </a:fillRef>
+          <a:effectRef idx="2">
+            <a:schemeClr val="accent1"/>
+          </a:effectRef>
+          <a:fontRef idx="minor">
+            <a:schemeClr val="lt1"/>
+          </a:fontRef>
+        </p:style>
+        <p:txBody>
+          <a:bodyPr rtlCol="0" anchor="ctr" wrap="square" lIns="228600" rIns="228600"/>
+          <a:lstStyle/>
+          <a:p>
+            <a:pPr algn="l"/>
+            <a:r>
+              <a:rPr sz="1600" b="1" i="0">
+                <a:solidFill>
+                  <a:srgbClr val="0B66C3"/>
+                </a:solidFill>
+                <a:latin typeface="Yu Gothic"/>
+                <a:ea typeface="Yu Gothic"/>
+                <a:cs typeface="Yu Gothic"/>
+              </a:rPr>
+              <a:t>→ 報酬を使わず、デモの時間構造から advantage を作り、VLA を学習する</a:t>
+            </a:r>
+          </a:p>
+        </p:txBody>
+      </p:sp>
+    </p:spTree>
+  </p:cSld>
+  <p:clrMapOvr>
+    <a:masterClrMapping/>
+  </p:clrMapOvr>
+</p:sld>
+</file>
+
+<file path=ppt/slides/slide17.xml><?xml version="1.0" encoding="utf-8"?>
+<p:sld xmlns:a="http://schemas.openxmlformats.org/drawingml/2006/main" xmlns:p="http://schemas.openxmlformats.org/presentationml/2006/main" xmlns:r="http://schemas.openxmlformats.org/officeDocument/2006/relationships">
+  <p:cSld>
+    <p:spTree>
+      <p:nvGrpSpPr>
+        <p:cNvPr id="1" name=""/>
+        <p:cNvGrpSpPr/>
+        <p:nvPr/>
+      </p:nvGrpSpPr>
+      <p:grpSpPr/>
+      <p:sp>
+        <p:nvSpPr>
+          <p:cNvPr id="2" name="title band"/>
+          <p:cNvSpPr/>
+          <p:nvPr/>
+        </p:nvSpPr>
+        <p:spPr>
+          <a:xfrm>
+            <a:off x="0" y="0"/>
+            <a:ext cx="12191695" cy="777240"/>
+          </a:xfrm>
+          <a:prstGeom prst="rect">
+            <a:avLst/>
+          </a:prstGeom>
+          <a:solidFill>
+            <a:srgbClr val="0B66C3"/>
+          </a:solidFill>
+          <a:ln>
+            <a:noFill/>
+          </a:ln>
+        </p:spPr>
+        <p:style>
+          <a:lnRef idx="1">
+            <a:schemeClr val="accent1"/>
+          </a:lnRef>
+          <a:fillRef idx="3">
+            <a:schemeClr val="accent1"/>
+          </a:fillRef>
+          <a:effectRef idx="2">
+            <a:schemeClr val="accent1"/>
+          </a:effectRef>
+          <a:fontRef idx="minor">
+            <a:schemeClr val="lt1"/>
+          </a:fontRef>
+        </p:style>
+        <p:txBody>
+          <a:bodyPr rtlCol="0" anchor="ctr"/>
+          <a:lstStyle/>
+          <a:p>
+            <a:pPr algn="ctr"/>
+            <a:r>
+              <a:rPr sz="2800" b="1" i="0">
+                <a:solidFill>
+                  <a:srgbClr val="FFFFFF"/>
+                </a:solidFill>
+                <a:latin typeface="Yu Gothic"/>
+                <a:ea typeface="Yu Gothic"/>
+                <a:cs typeface="Yu Gothic"/>
+              </a:rPr>
+              <a:t>STEAM ①: critic の学習（入力・出力・更新）</a:t>
+            </a:r>
+          </a:p>
+        </p:txBody>
+      </p:sp>
+      <p:sp>
+        <p:nvSpPr>
+          <p:cNvPr id="3" name="page number"/>
+          <p:cNvSpPr txBox="1"/>
+          <p:nvPr/>
+        </p:nvSpPr>
+        <p:spPr>
+          <a:xfrm>
+            <a:off x="11155680" y="6446520"/>
+            <a:ext cx="822960" cy="320040"/>
+          </a:xfrm>
+          <a:prstGeom prst="rect">
+            <a:avLst/>
+          </a:prstGeom>
+          <a:noFill/>
+        </p:spPr>
+        <p:txBody>
+          <a:bodyPr wrap="square" anchor="t" lIns="45720" rIns="45720" tIns="27432" bIns="27432">
+            <a:spAutoFit/>
+          </a:bodyPr>
+          <a:lstStyle/>
+          <a:p>
+            <a:pPr algn="r">
+              <a:spcAft>
+                <a:spcPts val="600"/>
+              </a:spcAft>
+            </a:pPr>
+            <a:r>
+              <a:rPr sz="1200" b="0" i="0">
+                <a:solidFill>
+                  <a:srgbClr val="595959"/>
+                </a:solidFill>
+                <a:latin typeface="Yu Gothic"/>
+                <a:ea typeface="Yu Gothic"/>
+                <a:cs typeface="Yu Gothic"/>
+              </a:rPr>
+              <a:t>17</a:t>
             </a:r>
           </a:p>
         </p:txBody>
@@ -15684,7 +16050,7 @@
 </p:sld>
 </file>
 
-<file path=ppt/slides/slide17.xml><?xml version="1.0" encoding="utf-8"?>
+<file path=ppt/slides/slide18.xml><?xml version="1.0" encoding="utf-8"?>
 <p:sld xmlns:a="http://schemas.openxmlformats.org/drawingml/2006/main" xmlns:p="http://schemas.openxmlformats.org/presentationml/2006/main" xmlns:r="http://schemas.openxmlformats.org/officeDocument/2006/relationships">
   <p:cSld>
     <p:spTree>
@@ -15784,7 +16150,7 @@
                 <a:ea typeface="Yu Gothic"/>
                 <a:cs typeface="Yu Gothic"/>
               </a:rPr>
-              <a:t>17</a:t>
+              <a:t>18</a:t>
             </a:r>
           </a:p>
         </p:txBody>
@@ -16709,7 +17075,7 @@
 </p:sld>
 </file>
 
-<file path=ppt/slides/slide18.xml><?xml version="1.0" encoding="utf-8"?>
+<file path=ppt/slides/slide19.xml><?xml version="1.0" encoding="utf-8"?>
 <p:sld xmlns:a="http://schemas.openxmlformats.org/drawingml/2006/main" xmlns:p="http://schemas.openxmlformats.org/presentationml/2006/main" xmlns:r="http://schemas.openxmlformats.org/officeDocument/2006/relationships">
   <p:cSld>
     <p:spTree>
@@ -16809,7 +17175,7 @@
                 <a:ea typeface="Yu Gothic"/>
                 <a:cs typeface="Yu Gothic"/>
               </a:rPr>
-              <a:t>18</a:t>
+              <a:t>19</a:t>
             </a:r>
           </a:p>
         </p:txBody>
@@ -17644,499 +18010,6 @@
 </p:sld>
 </file>
 
-<file path=ppt/slides/slide19.xml><?xml version="1.0" encoding="utf-8"?>
-<p:sld xmlns:a="http://schemas.openxmlformats.org/drawingml/2006/main" xmlns:p="http://schemas.openxmlformats.org/presentationml/2006/main" xmlns:r="http://schemas.openxmlformats.org/officeDocument/2006/relationships">
-  <p:cSld>
-    <p:spTree>
-      <p:nvGrpSpPr>
-        <p:cNvPr id="1" name=""/>
-        <p:cNvGrpSpPr/>
-        <p:nvPr/>
-      </p:nvGrpSpPr>
-      <p:grpSpPr/>
-      <p:sp>
-        <p:nvSpPr>
-          <p:cNvPr id="2" name="title band"/>
-          <p:cNvSpPr/>
-          <p:nvPr/>
-        </p:nvSpPr>
-        <p:spPr>
-          <a:xfrm>
-            <a:off x="0" y="0"/>
-            <a:ext cx="12191695" cy="777240"/>
-          </a:xfrm>
-          <a:prstGeom prst="rect">
-            <a:avLst/>
-          </a:prstGeom>
-          <a:solidFill>
-            <a:srgbClr val="0B66C3"/>
-          </a:solidFill>
-          <a:ln>
-            <a:noFill/>
-          </a:ln>
-        </p:spPr>
-        <p:style>
-          <a:lnRef idx="1">
-            <a:schemeClr val="accent1"/>
-          </a:lnRef>
-          <a:fillRef idx="3">
-            <a:schemeClr val="accent1"/>
-          </a:fillRef>
-          <a:effectRef idx="2">
-            <a:schemeClr val="accent1"/>
-          </a:effectRef>
-          <a:fontRef idx="minor">
-            <a:schemeClr val="lt1"/>
-          </a:fontRef>
-        </p:style>
-        <p:txBody>
-          <a:bodyPr rtlCol="0" anchor="ctr"/>
-          <a:lstStyle/>
-          <a:p>
-            <a:pPr algn="ctr"/>
-            <a:r>
-              <a:rPr sz="2800" b="1" i="0">
-                <a:solidFill>
-                  <a:srgbClr val="FFFFFF"/>
-                </a:solidFill>
-                <a:latin typeface="Yu Gothic"/>
-                <a:ea typeface="Yu Gothic"/>
-                <a:cs typeface="Yu Gothic"/>
-              </a:rPr>
-              <a:t>STEAM: smolVLA での実装（私たちの実験）</a:t>
-            </a:r>
-          </a:p>
-        </p:txBody>
-      </p:sp>
-      <p:sp>
-        <p:nvSpPr>
-          <p:cNvPr id="3" name="page number"/>
-          <p:cNvSpPr txBox="1"/>
-          <p:nvPr/>
-        </p:nvSpPr>
-        <p:spPr>
-          <a:xfrm>
-            <a:off x="11155680" y="6446520"/>
-            <a:ext cx="822960" cy="320040"/>
-          </a:xfrm>
-          <a:prstGeom prst="rect">
-            <a:avLst/>
-          </a:prstGeom>
-          <a:noFill/>
-        </p:spPr>
-        <p:txBody>
-          <a:bodyPr wrap="square" anchor="t" lIns="45720" rIns="45720" tIns="27432" bIns="27432">
-            <a:spAutoFit/>
-          </a:bodyPr>
-          <a:lstStyle/>
-          <a:p>
-            <a:pPr algn="r">
-              <a:spcAft>
-                <a:spcPts val="600"/>
-              </a:spcAft>
-            </a:pPr>
-            <a:r>
-              <a:rPr sz="1200" b="0" i="0">
-                <a:solidFill>
-                  <a:srgbClr val="595959"/>
-                </a:solidFill>
-                <a:latin typeface="Yu Gothic"/>
-                <a:ea typeface="Yu Gothic"/>
-                <a:cs typeface="Yu Gothic"/>
-              </a:rPr>
-              <a:t>19</a:t>
-            </a:r>
-          </a:p>
-        </p:txBody>
-      </p:sp>
-      <p:sp>
-        <p:nvSpPr>
-          <p:cNvPr id="4" name="TextBox 3"/>
-          <p:cNvSpPr txBox="1"/>
-          <p:nvPr/>
-        </p:nvSpPr>
-        <p:spPr>
-          <a:xfrm>
-            <a:off x="548640" y="1005840"/>
-            <a:ext cx="5486400" cy="4572000"/>
-          </a:xfrm>
-          <a:prstGeom prst="rect">
-            <a:avLst/>
-          </a:prstGeom>
-          <a:noFill/>
-        </p:spPr>
-        <p:txBody>
-          <a:bodyPr wrap="square" anchor="t" lIns="45720" rIns="45720" tIns="27432" bIns="27432">
-            <a:spAutoFit/>
-          </a:bodyPr>
-          <a:lstStyle/>
-          <a:p>
-            <a:pPr algn="l" marL="274320" indent="-256032">
-              <a:spcAft>
-                <a:spcPts val="400"/>
-              </a:spcAft>
-              <a:buChar char="•"/>
-            </a:pPr>
-            <a:r>
-              <a:rPr sz="1500" b="1" i="0">
-                <a:solidFill>
-                  <a:srgbClr val="1A1A1A"/>
-                </a:solidFill>
-                <a:latin typeface="Yu Gothic"/>
-                <a:ea typeface="Yu Gothic"/>
-                <a:cs typeface="Yu Gothic"/>
-              </a:rPr>
-              <a:t>critic</a:t>
-            </a:r>
-            <a:r>
-              <a:rPr sz="1500" b="0" i="0">
-                <a:solidFill>
-                  <a:srgbClr val="1A1A1A"/>
-                </a:solidFill>
-                <a:latin typeface="Yu Gothic"/>
-                <a:ea typeface="Yu Gothic"/>
-                <a:cs typeface="Yu Gothic"/>
-              </a:rPr>
-              <a:t>: SigLIP so400m + Gemma3-270M。k = 32 ステップ先との時間オフセットを、32 ビンの分布で予測</a:t>
-            </a:r>
-          </a:p>
-          <a:p>
-            <a:pPr algn="l" marL="274320" indent="-256032">
-              <a:spcAft>
-                <a:spcPts val="400"/>
-              </a:spcAft>
-              <a:buChar char="•"/>
-            </a:pPr>
-            <a:r>
-              <a:rPr sz="1500" b="1" i="0">
-                <a:solidFill>
-                  <a:srgbClr val="1A1A1A"/>
-                </a:solidFill>
-                <a:latin typeface="Yu Gothic"/>
-                <a:ea typeface="Yu Gothic"/>
-                <a:cs typeface="Yu Gothic"/>
-              </a:rPr>
-              <a:t>学習</a:t>
-            </a:r>
-            <a:r>
-              <a:rPr sz="1500" b="0" i="0">
-                <a:solidFill>
-                  <a:srgbClr val="1A1A1A"/>
-                </a:solidFill>
-                <a:latin typeface="Yu Gothic"/>
-                <a:ea typeface="Yu Gothic"/>
-                <a:cs typeface="Yu Gothic"/>
-              </a:rPr>
-              <a:t>: 人のデモ 3 本（重み 4）と、成功ロールアウト。2,000 step</a:t>
-            </a:r>
-          </a:p>
-          <a:p>
-            <a:pPr algn="l" marL="274320" indent="-256032">
-              <a:spcAft>
-                <a:spcPts val="400"/>
-              </a:spcAft>
-              <a:buChar char="•"/>
-            </a:pPr>
-            <a:r>
-              <a:rPr sz="1500" b="1" i="0">
-                <a:solidFill>
-                  <a:srgbClr val="1A1A1A"/>
-                </a:solidFill>
-                <a:latin typeface="Yu Gothic"/>
-                <a:ea typeface="Yu Gothic"/>
-                <a:cs typeface="Yu Gothic"/>
-              </a:rPr>
-              <a:t>advantage</a:t>
-            </a:r>
-            <a:r>
-              <a:rPr sz="1500" b="0" i="0">
-                <a:solidFill>
-                  <a:srgbClr val="1A1A1A"/>
-                </a:solidFill>
-                <a:latin typeface="Yu Gothic"/>
-                <a:ea typeface="Yu Gothic"/>
-                <a:cs typeface="Yu Gothic"/>
-              </a:rPr>
-              <a:t>: ロールアウトは上位 30%、デモは上位 80% を positive（アンサンブルのメンバー数は 1）</a:t>
-            </a:r>
-          </a:p>
-          <a:p>
-            <a:pPr algn="l" marL="274320" indent="-256032">
-              <a:spcAft>
-                <a:spcPts val="400"/>
-              </a:spcAft>
-              <a:buChar char="•"/>
-            </a:pPr>
-            <a:r>
-              <a:rPr sz="1500" b="1" i="0">
-                <a:solidFill>
-                  <a:srgbClr val="1A1A1A"/>
-                </a:solidFill>
-                <a:latin typeface="Yu Gothic"/>
-                <a:ea typeface="Yu Gothic"/>
-                <a:cs typeface="Yu Gothic"/>
-              </a:rPr>
-              <a:t>学習データ上の精度</a:t>
-            </a:r>
-            <a:r>
-              <a:rPr sz="1500" b="0" i="0">
-                <a:solidFill>
-                  <a:srgbClr val="1A1A1A"/>
-                </a:solidFill>
-                <a:latin typeface="Yu Gothic"/>
-                <a:ea typeface="Yu Gothic"/>
-                <a:cs typeface="Yu Gothic"/>
-              </a:rPr>
-              <a:t>（step 500 → 2,000）</a:t>
-            </a:r>
-          </a:p>
-          <a:p>
-            <a:pPr algn="l" marL="585216" indent="-256032">
-              <a:spcAft>
-                <a:spcPts val="400"/>
-              </a:spcAft>
-              <a:buChar char="–"/>
-            </a:pPr>
-            <a:r>
-              <a:rPr sz="1300" b="0" i="0">
-                <a:solidFill>
-                  <a:srgbClr val="1A1A1A"/>
-                </a:solidFill>
-                <a:latin typeface="Yu Gothic"/>
-                <a:ea typeface="Yu Gothic"/>
-                <a:cs typeface="Yu Gothic"/>
-              </a:rPr>
-              <a:t>accuracy 0.277 → 0.353</a:t>
-            </a:r>
-          </a:p>
-          <a:p>
-            <a:pPr algn="l" marL="585216" indent="-256032">
-              <a:spcAft>
-                <a:spcPts val="400"/>
-              </a:spcAft>
-              <a:buChar char="–"/>
-            </a:pPr>
-            <a:r>
-              <a:rPr sz="1300" b="0" i="0">
-                <a:solidFill>
-                  <a:srgbClr val="1A1A1A"/>
-                </a:solidFill>
-                <a:latin typeface="Yu Gothic"/>
-                <a:ea typeface="Yu Gothic"/>
-                <a:cs typeface="Yu Gothic"/>
-              </a:rPr>
-              <a:t>隣接ビンを含む accuracy 0.375 → 0.569</a:t>
-            </a:r>
-          </a:p>
-          <a:p>
-            <a:pPr algn="l" marL="274320" indent="-256032">
-              <a:spcAft>
-                <a:spcPts val="400"/>
-              </a:spcAft>
-              <a:buChar char="•"/>
-            </a:pPr>
-            <a:r>
-              <a:rPr sz="1500" b="1" i="0">
-                <a:solidFill>
-                  <a:srgbClr val="1A1A1A"/>
-                </a:solidFill>
-                <a:latin typeface="Yu Gothic"/>
-                <a:ea typeface="Yu Gothic"/>
-                <a:cs typeface="Yu Gothic"/>
-              </a:rPr>
-              <a:t>未知のロールアウト</a:t>
-            </a:r>
-            <a:r>
-              <a:rPr sz="1500" b="0" i="0">
-                <a:solidFill>
-                  <a:srgbClr val="1A1A1A"/>
-                </a:solidFill>
-                <a:latin typeface="Yu Gothic"/>
-                <a:ea typeface="Yu Gothic"/>
-                <a:cs typeface="Yu Gothic"/>
-              </a:rPr>
-              <a:t>（eval 64 本、step 600）: accuracy 0.106、隣接 0.189。失敗エピソードを含むため、学習時より低い</a:t>
-            </a:r>
-          </a:p>
-          <a:p>
-            <a:pPr algn="l" marL="274320" indent="-256032">
-              <a:spcAft>
-                <a:spcPts val="400"/>
-              </a:spcAft>
-              <a:buChar char="•"/>
-            </a:pPr>
-            <a:r>
-              <a:rPr sz="1500" b="1" i="0">
-                <a:solidFill>
-                  <a:srgbClr val="1A1A1A"/>
-                </a:solidFill>
-                <a:latin typeface="Yu Gothic"/>
-                <a:ea typeface="Yu Gothic"/>
-                <a:cs typeface="Yu Gothic"/>
-              </a:rPr>
-              <a:t>Step4 の結果</a:t>
-            </a:r>
-            <a:r>
-              <a:rPr sz="1500" b="0" i="0">
-                <a:solidFill>
-                  <a:srgbClr val="1A1A1A"/>
-                </a:solidFill>
-                <a:latin typeface="Yu Gothic"/>
-                <a:ea typeface="Yu Gothic"/>
-                <a:cs typeface="Yu Gothic"/>
-              </a:rPr>
-              <a:t>: 0.52（正例のみで学習、step 1,450、プロンプトなし）。プロンプトありは 0.42、両側タグは 0.36</a:t>
-            </a:r>
-          </a:p>
-          <a:p>
-            <a:pPr algn="l" marL="274320" indent="-256032">
-              <a:spcAft>
-                <a:spcPts val="400"/>
-              </a:spcAft>
-              <a:buChar char="•"/>
-            </a:pPr>
-            <a:r>
-              <a:rPr sz="1500" b="1" i="0">
-                <a:solidFill>
-                  <a:srgbClr val="1A1A1A"/>
-                </a:solidFill>
-                <a:latin typeface="Yu Gothic"/>
-                <a:ea typeface="Yu Gothic"/>
-                <a:cs typeface="Yu Gothic"/>
-              </a:rPr>
-              <a:t>学習コスト</a:t>
-            </a:r>
-            <a:r>
-              <a:rPr sz="1500" b="0" i="0">
-                <a:solidFill>
-                  <a:srgbClr val="1A1A1A"/>
-                </a:solidFill>
-                <a:latin typeface="Yu Gothic"/>
-                <a:ea typeface="Yu Gothic"/>
-                <a:cs typeface="Yu Gothic"/>
-              </a:rPr>
-              <a:t>（RTX A5000 24GB）: critic </a:t>
-            </a:r>
-            <a:r>
-              <a:rPr sz="1500" b="1" i="0">
-                <a:solidFill>
-                  <a:srgbClr val="1A1A1A"/>
-                </a:solidFill>
-                <a:latin typeface="Yu Gothic"/>
-                <a:ea typeface="Yu Gothic"/>
-                <a:cs typeface="Yu Gothic"/>
-              </a:rPr>
-              <a:t>2,000 step（バッチ 64）、8.3 時間</a:t>
-            </a:r>
-            <a:r>
-              <a:rPr sz="1500" b="0" i="0">
-                <a:solidFill>
-                  <a:srgbClr val="1A1A1A"/>
-                </a:solidFill>
-                <a:latin typeface="Yu Gothic"/>
-                <a:ea typeface="Yu Gothic"/>
-                <a:cs typeface="Yu Gothic"/>
-              </a:rPr>
-              <a:t>。Step4 は </a:t>
-            </a:r>
-            <a:r>
-              <a:rPr sz="1500" b="1" i="0">
-                <a:solidFill>
-                  <a:srgbClr val="1A1A1A"/>
-                </a:solidFill>
-                <a:latin typeface="Yu Gothic"/>
-                <a:ea typeface="Yu Gothic"/>
-                <a:cs typeface="Yu Gothic"/>
-              </a:rPr>
-              <a:t>1,450 step、16.5 時間</a:t>
-            </a:r>
-          </a:p>
-        </p:txBody>
-      </p:sp>
-      <p:graphicFrame>
-        <p:nvGraphicFramePr>
-          <p:cNvPr id="5" name="Chart 4"/>
-          <p:cNvGraphicFramePr>
-            <a:graphicFrameLocks noGrp="1"/>
-          </p:cNvGraphicFramePr>
-          <p:nvPr/>
-        </p:nvGraphicFramePr>
-        <p:xfrm>
-          <a:off x="6217920" y="1005840"/>
-          <a:ext cx="5486400" cy="4480560"/>
-        </p:xfrm>
-        <a:graphic>
-          <a:graphicData uri="http://schemas.openxmlformats.org/drawingml/2006/chart">
-            <c:chart xmlns:c="http://schemas.openxmlformats.org/drawingml/2006/chart" r:id="rId3"/>
-          </a:graphicData>
-        </a:graphic>
-      </p:graphicFrame>
-      <p:sp>
-        <p:nvSpPr>
-          <p:cNvPr id="6" name="key point"/>
-          <p:cNvSpPr/>
-          <p:nvPr/>
-        </p:nvSpPr>
-        <p:spPr>
-          <a:xfrm>
-            <a:off x="548640" y="5715000"/>
-            <a:ext cx="11064240" cy="640080"/>
-          </a:xfrm>
-          <a:prstGeom prst="roundRect">
-            <a:avLst>
-              <a:gd name="adj" fmla="val 18000"/>
-            </a:avLst>
-          </a:prstGeom>
-          <a:solidFill>
-            <a:srgbClr val="E8F1FB"/>
-          </a:solidFill>
-          <a:ln w="15875">
-            <a:solidFill>
-              <a:srgbClr val="0B66C3"/>
-            </a:solidFill>
-          </a:ln>
-        </p:spPr>
-        <p:style>
-          <a:lnRef idx="1">
-            <a:schemeClr val="accent1"/>
-          </a:lnRef>
-          <a:fillRef idx="3">
-            <a:schemeClr val="accent1"/>
-          </a:fillRef>
-          <a:effectRef idx="2">
-            <a:schemeClr val="accent1"/>
-          </a:effectRef>
-          <a:fontRef idx="minor">
-            <a:schemeClr val="lt1"/>
-          </a:fontRef>
-        </p:style>
-        <p:txBody>
-          <a:bodyPr rtlCol="0" anchor="ctr" wrap="square" lIns="228600" rIns="228600"/>
-          <a:lstStyle/>
-          <a:p>
-            <a:pPr algn="l"/>
-            <a:r>
-              <a:rPr sz="1600" b="1" i="0">
-                <a:solidFill>
-                  <a:srgbClr val="0B66C3"/>
-                </a:solidFill>
-                <a:latin typeface="Yu Gothic"/>
-                <a:ea typeface="Yu Gothic"/>
-                <a:cs typeface="Yu Gothic"/>
-              </a:rPr>
-              <a:t>→ critic は学習データ上では改善したが、未知のロールアウトでの精度は低い（今後の課題）</a:t>
-            </a:r>
-          </a:p>
-        </p:txBody>
-      </p:sp>
-    </p:spTree>
-  </p:cSld>
-  <p:clrMapOvr>
-    <a:masterClrMapping/>
-  </p:clrMapOvr>
-</p:sld>
-</file>
-
 <file path=ppt/slides/slide2.xml><?xml version="1.0" encoding="utf-8"?>
 <p:sld xmlns:a="http://schemas.openxmlformats.org/drawingml/2006/main" xmlns:p="http://schemas.openxmlformats.org/presentationml/2006/main" xmlns:r="http://schemas.openxmlformats.org/officeDocument/2006/relationships">
   <p:cSld>
@@ -18896,7 +18769,7 @@
                 <a:ea typeface="Yu Gothic"/>
                 <a:cs typeface="Yu Gothic"/>
               </a:rPr>
-              <a:t>RECAP と STEAM は、評価者（advantage の作り方）だけが違う同じ型。RL Token は、オンライン RL で行動を洗練する別の型。成功で打ち切る収集設計が、価値の信号に重要だった</a:t>
+              <a:t>RECAP と STEAM は、どちらも advantage から「良い」の札を作って方策を学習し、評価者（advantage の作り方）だけが違う。RL Token は、オンライン RL で行動を洗練する。成功で打ち切る収集設計が、価値の信号に重要だった</a:t>
             </a:r>
           </a:p>
         </p:txBody>
@@ -18968,7 +18841,7 @@
                 <a:ea typeface="Yu Gothic"/>
                 <a:cs typeface="Yu Gothic"/>
               </a:rPr>
-              <a:t>RL Token: 提案（論文）</a:t>
+              <a:t>STEAM: smolVLA での実装（私たちの実験）</a:t>
             </a:r>
           </a:p>
         </p:txBody>
@@ -19023,7 +18896,7 @@
         <p:spPr>
           <a:xfrm>
             <a:off x="548640" y="1005840"/>
-            <a:ext cx="6035040" cy="4572000"/>
+            <a:ext cx="5486400" cy="4572000"/>
           </a:xfrm>
           <a:prstGeom prst="rect">
             <a:avLst/>
@@ -19038,7 +18911,7 @@
           <a:p>
             <a:pPr algn="l" marL="274320" indent="-256032">
               <a:spcAft>
-                <a:spcPts val="600"/>
+                <a:spcPts val="400"/>
               </a:spcAft>
               <a:buChar char="•"/>
             </a:pPr>
@@ -19051,7 +18924,7 @@
                 <a:ea typeface="Yu Gothic"/>
                 <a:cs typeface="Yu Gothic"/>
               </a:rPr>
-              <a:t>課題</a:t>
+              <a:t>critic</a:t>
             </a:r>
             <a:r>
               <a:rPr sz="1500" b="0" i="0">
@@ -19062,13 +18935,13 @@
                 <a:ea typeface="Yu Gothic"/>
                 <a:cs typeface="Yu Gothic"/>
               </a:rPr>
-              <a:t>: 巨大な VLA 全体を、オンラインで RL するのは、重くて、データも多く要る</a:t>
+              <a:t>: SigLIP so400m + Gemma3-270M。k = 32 ステップ先との時間オフセットを、32 ビンの分布で予測</a:t>
             </a:r>
           </a:p>
           <a:p>
             <a:pPr algn="l" marL="274320" indent="-256032">
               <a:spcAft>
-                <a:spcPts val="600"/>
+                <a:spcPts val="400"/>
               </a:spcAft>
               <a:buChar char="•"/>
             </a:pPr>
@@ -19081,7 +18954,7 @@
                 <a:ea typeface="Yu Gothic"/>
                 <a:cs typeface="Yu Gothic"/>
               </a:rPr>
-              <a:t>発想</a:t>
+              <a:t>学習</a:t>
             </a:r>
             <a:r>
               <a:rPr sz="1500" b="0" i="0">
@@ -19092,13 +18965,13 @@
                 <a:ea typeface="Yu Gothic"/>
                 <a:cs typeface="Yu Gothic"/>
               </a:rPr>
-              <a:t>: VLA は凍結して「行動の提案役」にし、小さな追加ネットワークが、提案を微調整する</a:t>
+              <a:t>: 人のデモ 3 本（重み 4）と、成功ロールアウト。2,000 step</a:t>
             </a:r>
           </a:p>
           <a:p>
             <a:pPr algn="l" marL="274320" indent="-256032">
               <a:spcAft>
-                <a:spcPts val="600"/>
+                <a:spcPts val="400"/>
               </a:spcAft>
               <a:buChar char="•"/>
             </a:pPr>
@@ -19111,7 +18984,7 @@
                 <a:ea typeface="Yu Gothic"/>
                 <a:cs typeface="Yu Gothic"/>
               </a:rPr>
-              <a:t>RL token</a:t>
+              <a:t>advantage</a:t>
             </a:r>
             <a:r>
               <a:rPr sz="1500" b="0" i="0">
@@ -19122,13 +18995,13 @@
                 <a:ea typeface="Yu Gothic"/>
                 <a:cs typeface="Yu Gothic"/>
               </a:rPr>
-              <a:t>: VLA の内部情報を、1 本の短いベクトルに圧縮したもの。RL にとっての「状態」になる</a:t>
+              <a:t>: ロールアウトは上位 30%、デモは上位 80% を positive（アンサンブルのメンバー数は 1）</a:t>
             </a:r>
           </a:p>
           <a:p>
             <a:pPr algn="l" marL="274320" indent="-256032">
               <a:spcAft>
-                <a:spcPts val="600"/>
+                <a:spcPts val="400"/>
               </a:spcAft>
               <a:buChar char="•"/>
             </a:pPr>
@@ -19141,7 +19014,7 @@
                 <a:ea typeface="Yu Gothic"/>
                 <a:cs typeface="Yu Gothic"/>
               </a:rPr>
-              <a:t>学習するもの</a:t>
+              <a:t>学習データ上の精度</a:t>
             </a:r>
             <a:r>
               <a:rPr sz="1500" b="0" i="0">
@@ -19152,13 +19025,51 @@
                 <a:ea typeface="Yu Gothic"/>
                 <a:cs typeface="Yu Gothic"/>
               </a:rPr>
-              <a:t>: 小さな actor（行動を出す）と critic（行動の良さを予想する）だけ</a:t>
+              <a:t>（step 500 → 2,000）</a:t>
+            </a:r>
+          </a:p>
+          <a:p>
+            <a:pPr algn="l" marL="585216" indent="-256032">
+              <a:spcAft>
+                <a:spcPts val="400"/>
+              </a:spcAft>
+              <a:buChar char="–"/>
+            </a:pPr>
+            <a:r>
+              <a:rPr sz="1300" b="0" i="0">
+                <a:solidFill>
+                  <a:srgbClr val="1A1A1A"/>
+                </a:solidFill>
+                <a:latin typeface="Yu Gothic"/>
+                <a:ea typeface="Yu Gothic"/>
+                <a:cs typeface="Yu Gothic"/>
+              </a:rPr>
+              <a:t>accuracy 0.277 → 0.353</a:t>
+            </a:r>
+          </a:p>
+          <a:p>
+            <a:pPr algn="l" marL="585216" indent="-256032">
+              <a:spcAft>
+                <a:spcPts val="400"/>
+              </a:spcAft>
+              <a:buChar char="–"/>
+            </a:pPr>
+            <a:r>
+              <a:rPr sz="1300" b="0" i="0">
+                <a:solidFill>
+                  <a:srgbClr val="1A1A1A"/>
+                </a:solidFill>
+                <a:latin typeface="Yu Gothic"/>
+                <a:ea typeface="Yu Gothic"/>
+                <a:cs typeface="Yu Gothic"/>
+              </a:rPr>
+              <a:t>隣接ビンを含む accuracy 0.375 → 0.569</a:t>
             </a:r>
           </a:p>
           <a:p>
             <a:pPr algn="l" marL="274320" indent="-256032">
               <a:spcAft>
-                <a:spcPts val="600"/>
+                <a:spcPts val="400"/>
               </a:spcAft>
               <a:buChar char="•"/>
             </a:pPr>
@@ -19171,7 +19082,7 @@
                 <a:ea typeface="Yu Gothic"/>
                 <a:cs typeface="Yu Gothic"/>
               </a:rPr>
-              <a:t>論文の結果</a:t>
+              <a:t>未知のロールアウト</a:t>
             </a:r>
             <a:r>
               <a:rPr sz="1500" b="0" i="0">
@@ -19182,325 +19093,125 @@
                 <a:ea typeface="Yu Gothic"/>
                 <a:cs typeface="Yu Gothic"/>
               </a:rPr>
-              <a:t>: 実機で数時間の練習で、重要な局面の成功率と速度が向上。HIL-SERL、PLD などの他のオンライン RL より速く学習</a:t>
-            </a:r>
-          </a:p>
-        </p:txBody>
-      </p:sp>
-      <p:sp>
-        <p:nvSpPr>
-          <p:cNvPr id="5" name="teacher"/>
-          <p:cNvSpPr/>
-          <p:nvPr/>
-        </p:nvSpPr>
-        <p:spPr>
-          <a:xfrm>
-            <a:off x="6949440" y="1097280"/>
-            <a:ext cx="4572000" cy="1188720"/>
-          </a:xfrm>
-          <a:prstGeom prst="roundRect">
-            <a:avLst>
-              <a:gd name="adj" fmla="val 12000"/>
-            </a:avLst>
-          </a:prstGeom>
-          <a:solidFill>
-            <a:srgbClr val="E4E4E4"/>
-          </a:solidFill>
-          <a:ln w="12700">
-            <a:solidFill>
-              <a:srgbClr val="BFBFBF"/>
-            </a:solidFill>
-          </a:ln>
-        </p:spPr>
-        <p:style>
-          <a:lnRef idx="1">
-            <a:schemeClr val="accent1"/>
-          </a:lnRef>
-          <a:fillRef idx="3">
-            <a:schemeClr val="accent1"/>
-          </a:fillRef>
-          <a:effectRef idx="2">
-            <a:schemeClr val="accent1"/>
-          </a:effectRef>
-          <a:fontRef idx="minor">
-            <a:schemeClr val="lt1"/>
-          </a:fontRef>
-        </p:style>
-        <p:txBody>
-          <a:bodyPr rtlCol="0" anchor="ctr" wrap="square" lIns="73152" rIns="73152" tIns="36576" bIns="36576"/>
-          <a:lstStyle/>
-          <a:p>
-            <a:pPr algn="ctr"/>
+              <a:t>（eval 64 本、step 600）: accuracy 0.106、隣接 0.189。失敗エピソードを含むため、学習時より低い</a:t>
+            </a:r>
+          </a:p>
+          <a:p>
+            <a:pPr algn="l" marL="274320" indent="-256032">
+              <a:spcAft>
+                <a:spcPts val="400"/>
+              </a:spcAft>
+              <a:buChar char="•"/>
+            </a:pPr>
             <a:r>
               <a:rPr sz="1500" b="1" i="0">
                 <a:solidFill>
-                  <a:srgbClr val="595959"/>
-                </a:solidFill>
-                <a:latin typeface="Yu Gothic"/>
-                <a:ea typeface="Yu Gothic"/>
-                <a:cs typeface="Yu Gothic"/>
-              </a:rPr>
-              <a:t>先生: VLA（凍結）</a:t>
-            </a:r>
-          </a:p>
-          <a:p>
-            <a:pPr algn="ctr"/>
-            <a:r>
-              <a:rPr sz="1300" b="0" i="0">
-                <a:solidFill>
-                  <a:srgbClr val="595959"/>
-                </a:solidFill>
-                <a:latin typeface="Yu Gothic"/>
-                <a:ea typeface="Yu Gothic"/>
-                <a:cs typeface="Yu Gothic"/>
-              </a:rPr>
-              <a:t>状況を見て、行動の「下書き」を提案する</a:t>
-            </a:r>
-          </a:p>
-        </p:txBody>
-      </p:sp>
-      <p:sp>
-        <p:nvSpPr>
-          <p:cNvPr id="6" name="student"/>
-          <p:cNvSpPr/>
-          <p:nvPr/>
-        </p:nvSpPr>
-        <p:spPr>
-          <a:xfrm>
-            <a:off x="6949440" y="2834640"/>
-            <a:ext cx="4572000" cy="1188720"/>
-          </a:xfrm>
-          <a:prstGeom prst="roundRect">
-            <a:avLst>
-              <a:gd name="adj" fmla="val 12000"/>
-            </a:avLst>
-          </a:prstGeom>
-          <a:solidFill>
-            <a:srgbClr val="D96B2B"/>
-          </a:solidFill>
-          <a:ln>
-            <a:noFill/>
-          </a:ln>
-        </p:spPr>
-        <p:style>
-          <a:lnRef idx="1">
-            <a:schemeClr val="accent1"/>
-          </a:lnRef>
-          <a:fillRef idx="3">
-            <a:schemeClr val="accent1"/>
-          </a:fillRef>
-          <a:effectRef idx="2">
-            <a:schemeClr val="accent1"/>
-          </a:effectRef>
-          <a:fontRef idx="minor">
-            <a:schemeClr val="lt1"/>
-          </a:fontRef>
-        </p:style>
-        <p:txBody>
-          <a:bodyPr rtlCol="0" anchor="ctr" wrap="square" lIns="73152" rIns="73152" tIns="36576" bIns="36576"/>
-          <a:lstStyle/>
-          <a:p>
-            <a:pPr algn="ctr"/>
+                  <a:srgbClr val="1A1A1A"/>
+                </a:solidFill>
+                <a:latin typeface="Yu Gothic"/>
+                <a:ea typeface="Yu Gothic"/>
+                <a:cs typeface="Yu Gothic"/>
+              </a:rPr>
+              <a:t>Step4 の結果</a:t>
+            </a:r>
+            <a:r>
+              <a:rPr sz="1500" b="0" i="0">
+                <a:solidFill>
+                  <a:srgbClr val="1A1A1A"/>
+                </a:solidFill>
+                <a:latin typeface="Yu Gothic"/>
+                <a:ea typeface="Yu Gothic"/>
+                <a:cs typeface="Yu Gothic"/>
+              </a:rPr>
+              <a:t>: 0.52（正例のみで学習、step 1,450、プロンプトなし）。プロンプトありは 0.42、両側タグは 0.36</a:t>
+            </a:r>
+          </a:p>
+          <a:p>
+            <a:pPr algn="l" marL="274320" indent="-256032">
+              <a:spcAft>
+                <a:spcPts val="400"/>
+              </a:spcAft>
+              <a:buChar char="•"/>
+            </a:pPr>
             <a:r>
               <a:rPr sz="1500" b="1" i="0">
                 <a:solidFill>
-                  <a:srgbClr val="FFFFFF"/>
-                </a:solidFill>
-                <a:latin typeface="Yu Gothic"/>
-                <a:ea typeface="Yu Gothic"/>
-                <a:cs typeface="Yu Gothic"/>
-              </a:rPr>
-              <a:t>生徒: 小さな actor（更新）</a:t>
-            </a:r>
-          </a:p>
-          <a:p>
-            <a:pPr algn="ctr"/>
-            <a:r>
-              <a:rPr sz="1300" b="0" i="0">
-                <a:solidFill>
-                  <a:srgbClr val="FFFFFF"/>
-                </a:solidFill>
-                <a:latin typeface="Yu Gothic"/>
-                <a:ea typeface="Yu Gothic"/>
-                <a:cs typeface="Yu Gothic"/>
-              </a:rPr>
-              <a:t>下書きを見て、「清書」（最終の行動）を出す</a:t>
-            </a:r>
-          </a:p>
-        </p:txBody>
-      </p:sp>
-      <p:sp>
-        <p:nvSpPr>
-          <p:cNvPr id="7" name="final"/>
-          <p:cNvSpPr/>
-          <p:nvPr/>
-        </p:nvSpPr>
-        <p:spPr>
-          <a:xfrm>
-            <a:off x="6949440" y="4572000"/>
-            <a:ext cx="4572000" cy="731520"/>
-          </a:xfrm>
-          <a:prstGeom prst="roundRect">
-            <a:avLst>
-              <a:gd name="adj" fmla="val 12000"/>
-            </a:avLst>
-          </a:prstGeom>
-          <a:solidFill>
-            <a:srgbClr val="2E8B57"/>
-          </a:solidFill>
-          <a:ln>
-            <a:noFill/>
-          </a:ln>
-        </p:spPr>
-        <p:style>
-          <a:lnRef idx="1">
-            <a:schemeClr val="accent1"/>
-          </a:lnRef>
-          <a:fillRef idx="3">
-            <a:schemeClr val="accent1"/>
-          </a:fillRef>
-          <a:effectRef idx="2">
-            <a:schemeClr val="accent1"/>
-          </a:effectRef>
-          <a:fontRef idx="minor">
-            <a:schemeClr val="lt1"/>
-          </a:fontRef>
-        </p:style>
-        <p:txBody>
-          <a:bodyPr rtlCol="0" anchor="ctr" wrap="square" lIns="73152" rIns="73152" tIns="36576" bIns="36576"/>
-          <a:lstStyle/>
-          <a:p>
-            <a:pPr algn="ctr"/>
+                  <a:srgbClr val="1A1A1A"/>
+                </a:solidFill>
+                <a:latin typeface="Yu Gothic"/>
+                <a:ea typeface="Yu Gothic"/>
+                <a:cs typeface="Yu Gothic"/>
+              </a:rPr>
+              <a:t>学習コスト</a:t>
+            </a:r>
+            <a:r>
+              <a:rPr sz="1500" b="0" i="0">
+                <a:solidFill>
+                  <a:srgbClr val="1A1A1A"/>
+                </a:solidFill>
+                <a:latin typeface="Yu Gothic"/>
+                <a:ea typeface="Yu Gothic"/>
+                <a:cs typeface="Yu Gothic"/>
+              </a:rPr>
+              <a:t>（RTX A5000 24GB）: critic </a:t>
+            </a:r>
             <a:r>
               <a:rPr sz="1500" b="1" i="0">
                 <a:solidFill>
-                  <a:srgbClr val="FFFFFF"/>
-                </a:solidFill>
-                <a:latin typeface="Yu Gothic"/>
-                <a:ea typeface="Yu Gothic"/>
-                <a:cs typeface="Yu Gothic"/>
-              </a:rPr>
-              <a:t>最終の行動</a:t>
-            </a:r>
-          </a:p>
-        </p:txBody>
-      </p:sp>
-      <p:cxnSp>
-        <p:nvCxnSpPr>
-          <p:cNvPr id="8" name="Connector 7"/>
-          <p:cNvCxnSpPr/>
-          <p:nvPr/>
-        </p:nvCxnSpPr>
-        <p:spPr>
-          <a:xfrm>
-            <a:off x="9235440" y="2286000"/>
-            <a:ext cx="0" cy="548640"/>
-          </a:xfrm>
-          <a:prstGeom prst="line">
-            <a:avLst/>
-          </a:prstGeom>
-          <a:ln w="25400">
-            <a:solidFill>
-              <a:srgbClr val="0B66C3"/>
-            </a:solidFill>
-            <a:tailEnd type="triangle" w="med" len="med"/>
-          </a:ln>
-        </p:spPr>
-        <p:style>
-          <a:lnRef idx="2">
-            <a:schemeClr val="accent1"/>
-          </a:lnRef>
-          <a:fillRef idx="0">
-            <a:schemeClr val="accent1"/>
-          </a:fillRef>
-          <a:effectRef idx="1">
-            <a:schemeClr val="accent1"/>
-          </a:effectRef>
-          <a:fontRef idx="minor">
-            <a:schemeClr val="tx1"/>
-          </a:fontRef>
-        </p:style>
-      </p:cxnSp>
-      <p:cxnSp>
-        <p:nvCxnSpPr>
-          <p:cNvPr id="9" name="Connector 8"/>
-          <p:cNvCxnSpPr/>
-          <p:nvPr/>
-        </p:nvCxnSpPr>
-        <p:spPr>
-          <a:xfrm>
-            <a:off x="9235440" y="4023360"/>
-            <a:ext cx="0" cy="548640"/>
-          </a:xfrm>
-          <a:prstGeom prst="line">
-            <a:avLst/>
-          </a:prstGeom>
-          <a:ln w="25400">
-            <a:solidFill>
-              <a:srgbClr val="0B66C3"/>
-            </a:solidFill>
-            <a:tailEnd type="triangle" w="med" len="med"/>
-          </a:ln>
-        </p:spPr>
-        <p:style>
-          <a:lnRef idx="2">
-            <a:schemeClr val="accent1"/>
-          </a:lnRef>
-          <a:fillRef idx="0">
-            <a:schemeClr val="accent1"/>
-          </a:fillRef>
-          <a:effectRef idx="1">
-            <a:schemeClr val="accent1"/>
-          </a:effectRef>
-          <a:fontRef idx="minor">
-            <a:schemeClr val="tx1"/>
-          </a:fontRef>
-        </p:style>
-      </p:cxnSp>
-      <p:sp>
-        <p:nvSpPr>
-          <p:cNvPr id="10" name="TextBox 9"/>
-          <p:cNvSpPr txBox="1"/>
-          <p:nvPr/>
-        </p:nvSpPr>
-        <p:spPr>
-          <a:xfrm>
-            <a:off x="9372600" y="2331720"/>
-            <a:ext cx="2194560" cy="457200"/>
-          </a:xfrm>
-          <a:prstGeom prst="rect">
-            <a:avLst/>
-          </a:prstGeom>
-          <a:noFill/>
-        </p:spPr>
-        <p:txBody>
-          <a:bodyPr wrap="square" anchor="t" lIns="45720" rIns="45720" tIns="27432" bIns="27432">
-            <a:spAutoFit/>
-          </a:bodyPr>
-          <a:lstStyle/>
-          <a:p>
-            <a:pPr algn="l">
-              <a:spcAft>
-                <a:spcPts val="600"/>
-              </a:spcAft>
-            </a:pPr>
-            <a:r>
-              <a:rPr sz="1200" b="0" i="0">
-                <a:solidFill>
-                  <a:srgbClr val="595959"/>
-                </a:solidFill>
-                <a:latin typeface="Yu Gothic"/>
-                <a:ea typeface="Yu Gothic"/>
-                <a:cs typeface="Yu Gothic"/>
-              </a:rPr>
-              <a:t>下書き ã</a:t>
-            </a:r>
-          </a:p>
-        </p:txBody>
-      </p:sp>
-      <p:sp>
-        <p:nvSpPr>
-          <p:cNvPr id="11" name="key point"/>
+                  <a:srgbClr val="1A1A1A"/>
+                </a:solidFill>
+                <a:latin typeface="Yu Gothic"/>
+                <a:ea typeface="Yu Gothic"/>
+                <a:cs typeface="Yu Gothic"/>
+              </a:rPr>
+              <a:t>2,000 step（バッチ 64）、8.3 時間</a:t>
+            </a:r>
+            <a:r>
+              <a:rPr sz="1500" b="0" i="0">
+                <a:solidFill>
+                  <a:srgbClr val="1A1A1A"/>
+                </a:solidFill>
+                <a:latin typeface="Yu Gothic"/>
+                <a:ea typeface="Yu Gothic"/>
+                <a:cs typeface="Yu Gothic"/>
+              </a:rPr>
+              <a:t>。Step4 は </a:t>
+            </a:r>
+            <a:r>
+              <a:rPr sz="1500" b="1" i="0">
+                <a:solidFill>
+                  <a:srgbClr val="1A1A1A"/>
+                </a:solidFill>
+                <a:latin typeface="Yu Gothic"/>
+                <a:ea typeface="Yu Gothic"/>
+                <a:cs typeface="Yu Gothic"/>
+              </a:rPr>
+              <a:t>1,450 step、16.5 時間</a:t>
+            </a:r>
+          </a:p>
+        </p:txBody>
+      </p:sp>
+      <p:graphicFrame>
+        <p:nvGraphicFramePr>
+          <p:cNvPr id="5" name="Chart 4"/>
+          <p:cNvGraphicFramePr>
+            <a:graphicFrameLocks noGrp="1"/>
+          </p:cNvGraphicFramePr>
+          <p:nvPr/>
+        </p:nvGraphicFramePr>
+        <p:xfrm>
+          <a:off x="6217920" y="1005840"/>
+          <a:ext cx="5486400" cy="4480560"/>
+        </p:xfrm>
+        <a:graphic>
+          <a:graphicData uri="http://schemas.openxmlformats.org/drawingml/2006/chart">
+            <c:chart xmlns:c="http://schemas.openxmlformats.org/drawingml/2006/chart" r:id="rId3"/>
+          </a:graphicData>
+        </a:graphic>
+      </p:graphicFrame>
+      <p:sp>
+        <p:nvSpPr>
+          <p:cNvPr id="6" name="key point"/>
           <p:cNvSpPr/>
           <p:nvPr/>
         </p:nvSpPr>
@@ -19551,7 +19262,7 @@
                 <a:ea typeface="Yu Gothic"/>
                 <a:cs typeface="Yu Gothic"/>
               </a:rPr>
-              <a:t>→ RL は小さな actor-critic だけが担当し、VLA の知識を壊さずに、数時間で行動を洗練できる</a:t>
+              <a:t>→ critic は学習データ上では改善したが、未知のロールアウトでの精度は低い（今後の課題）</a:t>
             </a:r>
           </a:p>
         </p:txBody>
@@ -19623,7 +19334,7 @@
                 <a:ea typeface="Yu Gothic"/>
                 <a:cs typeface="Yu Gothic"/>
               </a:rPr>
-              <a:t>RL Token ①: 1 ステップの流れ（入力 → 出力）</a:t>
+              <a:t>RL Token: 提案（論文）</a:t>
             </a:r>
           </a:p>
         </p:txBody>
@@ -19665,6 +19376,1537 @@
                 <a:cs typeface="Yu Gothic"/>
               </a:rPr>
               <a:t>21</a:t>
+            </a:r>
+          </a:p>
+        </p:txBody>
+      </p:sp>
+      <p:sp>
+        <p:nvSpPr>
+          <p:cNvPr id="4" name="TextBox 3"/>
+          <p:cNvSpPr txBox="1"/>
+          <p:nvPr/>
+        </p:nvSpPr>
+        <p:spPr>
+          <a:xfrm>
+            <a:off x="548640" y="1005840"/>
+            <a:ext cx="6035040" cy="4572000"/>
+          </a:xfrm>
+          <a:prstGeom prst="rect">
+            <a:avLst/>
+          </a:prstGeom>
+          <a:noFill/>
+        </p:spPr>
+        <p:txBody>
+          <a:bodyPr wrap="square" anchor="t" lIns="45720" rIns="45720" tIns="27432" bIns="27432">
+            <a:spAutoFit/>
+          </a:bodyPr>
+          <a:lstStyle/>
+          <a:p>
+            <a:pPr algn="l" marL="274320" indent="-256032">
+              <a:spcAft>
+                <a:spcPts val="600"/>
+              </a:spcAft>
+              <a:buChar char="•"/>
+            </a:pPr>
+            <a:r>
+              <a:rPr sz="1500" b="1" i="0">
+                <a:solidFill>
+                  <a:srgbClr val="1A1A1A"/>
+                </a:solidFill>
+                <a:latin typeface="Yu Gothic"/>
+                <a:ea typeface="Yu Gothic"/>
+                <a:cs typeface="Yu Gothic"/>
+              </a:rPr>
+              <a:t>課題</a:t>
+            </a:r>
+            <a:r>
+              <a:rPr sz="1500" b="0" i="0">
+                <a:solidFill>
+                  <a:srgbClr val="1A1A1A"/>
+                </a:solidFill>
+                <a:latin typeface="Yu Gothic"/>
+                <a:ea typeface="Yu Gothic"/>
+                <a:cs typeface="Yu Gothic"/>
+              </a:rPr>
+              <a:t>: 巨大な VLA 全体を、オンラインで RL するのは、重くて、データも多く要る</a:t>
+            </a:r>
+          </a:p>
+          <a:p>
+            <a:pPr algn="l" marL="274320" indent="-256032">
+              <a:spcAft>
+                <a:spcPts val="600"/>
+              </a:spcAft>
+              <a:buChar char="•"/>
+            </a:pPr>
+            <a:r>
+              <a:rPr sz="1500" b="1" i="0">
+                <a:solidFill>
+                  <a:srgbClr val="1A1A1A"/>
+                </a:solidFill>
+                <a:latin typeface="Yu Gothic"/>
+                <a:ea typeface="Yu Gothic"/>
+                <a:cs typeface="Yu Gothic"/>
+              </a:rPr>
+              <a:t>発想</a:t>
+            </a:r>
+            <a:r>
+              <a:rPr sz="1500" b="0" i="0">
+                <a:solidFill>
+                  <a:srgbClr val="1A1A1A"/>
+                </a:solidFill>
+                <a:latin typeface="Yu Gothic"/>
+                <a:ea typeface="Yu Gothic"/>
+                <a:cs typeface="Yu Gothic"/>
+              </a:rPr>
+              <a:t>: VLA は凍結して「行動の提案役」にし、小さな追加ネットワークが、提案を微調整する</a:t>
+            </a:r>
+          </a:p>
+          <a:p>
+            <a:pPr algn="l" marL="274320" indent="-256032">
+              <a:spcAft>
+                <a:spcPts val="600"/>
+              </a:spcAft>
+              <a:buChar char="•"/>
+            </a:pPr>
+            <a:r>
+              <a:rPr sz="1500" b="1" i="0">
+                <a:solidFill>
+                  <a:srgbClr val="1A1A1A"/>
+                </a:solidFill>
+                <a:latin typeface="Yu Gothic"/>
+                <a:ea typeface="Yu Gothic"/>
+                <a:cs typeface="Yu Gothic"/>
+              </a:rPr>
+              <a:t>RL token</a:t>
+            </a:r>
+            <a:r>
+              <a:rPr sz="1500" b="0" i="0">
+                <a:solidFill>
+                  <a:srgbClr val="1A1A1A"/>
+                </a:solidFill>
+                <a:latin typeface="Yu Gothic"/>
+                <a:ea typeface="Yu Gothic"/>
+                <a:cs typeface="Yu Gothic"/>
+              </a:rPr>
+              <a:t>: VLA の内部情報を、1 本の短いベクトルに圧縮したもの。RL にとっての「状態」になる</a:t>
+            </a:r>
+          </a:p>
+          <a:p>
+            <a:pPr algn="l" marL="274320" indent="-256032">
+              <a:spcAft>
+                <a:spcPts val="600"/>
+              </a:spcAft>
+              <a:buChar char="•"/>
+            </a:pPr>
+            <a:r>
+              <a:rPr sz="1500" b="1" i="0">
+                <a:solidFill>
+                  <a:srgbClr val="1A1A1A"/>
+                </a:solidFill>
+                <a:latin typeface="Yu Gothic"/>
+                <a:ea typeface="Yu Gothic"/>
+                <a:cs typeface="Yu Gothic"/>
+              </a:rPr>
+              <a:t>学習するもの</a:t>
+            </a:r>
+            <a:r>
+              <a:rPr sz="1500" b="0" i="0">
+                <a:solidFill>
+                  <a:srgbClr val="1A1A1A"/>
+                </a:solidFill>
+                <a:latin typeface="Yu Gothic"/>
+                <a:ea typeface="Yu Gothic"/>
+                <a:cs typeface="Yu Gothic"/>
+              </a:rPr>
+              <a:t>: 小さな actor（行動を出す）と critic（行動の良さを予想する）だけ</a:t>
+            </a:r>
+          </a:p>
+          <a:p>
+            <a:pPr algn="l" marL="274320" indent="-256032">
+              <a:spcAft>
+                <a:spcPts val="600"/>
+              </a:spcAft>
+              <a:buChar char="•"/>
+            </a:pPr>
+            <a:r>
+              <a:rPr sz="1500" b="1" i="0">
+                <a:solidFill>
+                  <a:srgbClr val="1A1A1A"/>
+                </a:solidFill>
+                <a:latin typeface="Yu Gothic"/>
+                <a:ea typeface="Yu Gothic"/>
+                <a:cs typeface="Yu Gothic"/>
+              </a:rPr>
+              <a:t>論文の結果</a:t>
+            </a:r>
+            <a:r>
+              <a:rPr sz="1500" b="0" i="0">
+                <a:solidFill>
+                  <a:srgbClr val="1A1A1A"/>
+                </a:solidFill>
+                <a:latin typeface="Yu Gothic"/>
+                <a:ea typeface="Yu Gothic"/>
+                <a:cs typeface="Yu Gothic"/>
+              </a:rPr>
+              <a:t>: 実機で数時間の練習で、重要な局面の成功率と速度が向上。HIL-SERL、PLD などの他のオンライン RL より速く学習</a:t>
+            </a:r>
+          </a:p>
+        </p:txBody>
+      </p:sp>
+      <p:sp>
+        <p:nvSpPr>
+          <p:cNvPr id="5" name="teacher"/>
+          <p:cNvSpPr/>
+          <p:nvPr/>
+        </p:nvSpPr>
+        <p:spPr>
+          <a:xfrm>
+            <a:off x="6949440" y="1097280"/>
+            <a:ext cx="4572000" cy="1188720"/>
+          </a:xfrm>
+          <a:prstGeom prst="roundRect">
+            <a:avLst>
+              <a:gd name="adj" fmla="val 12000"/>
+            </a:avLst>
+          </a:prstGeom>
+          <a:solidFill>
+            <a:srgbClr val="E4E4E4"/>
+          </a:solidFill>
+          <a:ln w="12700">
+            <a:solidFill>
+              <a:srgbClr val="BFBFBF"/>
+            </a:solidFill>
+          </a:ln>
+        </p:spPr>
+        <p:style>
+          <a:lnRef idx="1">
+            <a:schemeClr val="accent1"/>
+          </a:lnRef>
+          <a:fillRef idx="3">
+            <a:schemeClr val="accent1"/>
+          </a:fillRef>
+          <a:effectRef idx="2">
+            <a:schemeClr val="accent1"/>
+          </a:effectRef>
+          <a:fontRef idx="minor">
+            <a:schemeClr val="lt1"/>
+          </a:fontRef>
+        </p:style>
+        <p:txBody>
+          <a:bodyPr rtlCol="0" anchor="ctr" wrap="square" lIns="73152" rIns="73152" tIns="36576" bIns="36576"/>
+          <a:lstStyle/>
+          <a:p>
+            <a:pPr algn="ctr"/>
+            <a:r>
+              <a:rPr sz="1500" b="1" i="0">
+                <a:solidFill>
+                  <a:srgbClr val="595959"/>
+                </a:solidFill>
+                <a:latin typeface="Yu Gothic"/>
+                <a:ea typeface="Yu Gothic"/>
+                <a:cs typeface="Yu Gothic"/>
+              </a:rPr>
+              <a:t>先生: VLA（凍結）</a:t>
+            </a:r>
+          </a:p>
+          <a:p>
+            <a:pPr algn="ctr"/>
+            <a:r>
+              <a:rPr sz="1300" b="0" i="0">
+                <a:solidFill>
+                  <a:srgbClr val="595959"/>
+                </a:solidFill>
+                <a:latin typeface="Yu Gothic"/>
+                <a:ea typeface="Yu Gothic"/>
+                <a:cs typeface="Yu Gothic"/>
+              </a:rPr>
+              <a:t>状況を見て、行動の「下書き」を提案する</a:t>
+            </a:r>
+          </a:p>
+        </p:txBody>
+      </p:sp>
+      <p:sp>
+        <p:nvSpPr>
+          <p:cNvPr id="6" name="student"/>
+          <p:cNvSpPr/>
+          <p:nvPr/>
+        </p:nvSpPr>
+        <p:spPr>
+          <a:xfrm>
+            <a:off x="6949440" y="2834640"/>
+            <a:ext cx="4572000" cy="1188720"/>
+          </a:xfrm>
+          <a:prstGeom prst="roundRect">
+            <a:avLst>
+              <a:gd name="adj" fmla="val 12000"/>
+            </a:avLst>
+          </a:prstGeom>
+          <a:solidFill>
+            <a:srgbClr val="D96B2B"/>
+          </a:solidFill>
+          <a:ln>
+            <a:noFill/>
+          </a:ln>
+        </p:spPr>
+        <p:style>
+          <a:lnRef idx="1">
+            <a:schemeClr val="accent1"/>
+          </a:lnRef>
+          <a:fillRef idx="3">
+            <a:schemeClr val="accent1"/>
+          </a:fillRef>
+          <a:effectRef idx="2">
+            <a:schemeClr val="accent1"/>
+          </a:effectRef>
+          <a:fontRef idx="minor">
+            <a:schemeClr val="lt1"/>
+          </a:fontRef>
+        </p:style>
+        <p:txBody>
+          <a:bodyPr rtlCol="0" anchor="ctr" wrap="square" lIns="73152" rIns="73152" tIns="36576" bIns="36576"/>
+          <a:lstStyle/>
+          <a:p>
+            <a:pPr algn="ctr"/>
+            <a:r>
+              <a:rPr sz="1500" b="1" i="0">
+                <a:solidFill>
+                  <a:srgbClr val="FFFFFF"/>
+                </a:solidFill>
+                <a:latin typeface="Yu Gothic"/>
+                <a:ea typeface="Yu Gothic"/>
+                <a:cs typeface="Yu Gothic"/>
+              </a:rPr>
+              <a:t>生徒: 小さな actor（更新）</a:t>
+            </a:r>
+          </a:p>
+          <a:p>
+            <a:pPr algn="ctr"/>
+            <a:r>
+              <a:rPr sz="1300" b="0" i="0">
+                <a:solidFill>
+                  <a:srgbClr val="FFFFFF"/>
+                </a:solidFill>
+                <a:latin typeface="Yu Gothic"/>
+                <a:ea typeface="Yu Gothic"/>
+                <a:cs typeface="Yu Gothic"/>
+              </a:rPr>
+              <a:t>下書きを見て、「清書」（最終の行動）を出す</a:t>
+            </a:r>
+          </a:p>
+        </p:txBody>
+      </p:sp>
+      <p:sp>
+        <p:nvSpPr>
+          <p:cNvPr id="7" name="final"/>
+          <p:cNvSpPr/>
+          <p:nvPr/>
+        </p:nvSpPr>
+        <p:spPr>
+          <a:xfrm>
+            <a:off x="6949440" y="4572000"/>
+            <a:ext cx="4572000" cy="731520"/>
+          </a:xfrm>
+          <a:prstGeom prst="roundRect">
+            <a:avLst>
+              <a:gd name="adj" fmla="val 12000"/>
+            </a:avLst>
+          </a:prstGeom>
+          <a:solidFill>
+            <a:srgbClr val="2E8B57"/>
+          </a:solidFill>
+          <a:ln>
+            <a:noFill/>
+          </a:ln>
+        </p:spPr>
+        <p:style>
+          <a:lnRef idx="1">
+            <a:schemeClr val="accent1"/>
+          </a:lnRef>
+          <a:fillRef idx="3">
+            <a:schemeClr val="accent1"/>
+          </a:fillRef>
+          <a:effectRef idx="2">
+            <a:schemeClr val="accent1"/>
+          </a:effectRef>
+          <a:fontRef idx="minor">
+            <a:schemeClr val="lt1"/>
+          </a:fontRef>
+        </p:style>
+        <p:txBody>
+          <a:bodyPr rtlCol="0" anchor="ctr" wrap="square" lIns="73152" rIns="73152" tIns="36576" bIns="36576"/>
+          <a:lstStyle/>
+          <a:p>
+            <a:pPr algn="ctr"/>
+            <a:r>
+              <a:rPr sz="1500" b="1" i="0">
+                <a:solidFill>
+                  <a:srgbClr val="FFFFFF"/>
+                </a:solidFill>
+                <a:latin typeface="Yu Gothic"/>
+                <a:ea typeface="Yu Gothic"/>
+                <a:cs typeface="Yu Gothic"/>
+              </a:rPr>
+              <a:t>最終の行動</a:t>
+            </a:r>
+          </a:p>
+        </p:txBody>
+      </p:sp>
+      <p:cxnSp>
+        <p:nvCxnSpPr>
+          <p:cNvPr id="8" name="Connector 7"/>
+          <p:cNvCxnSpPr/>
+          <p:nvPr/>
+        </p:nvCxnSpPr>
+        <p:spPr>
+          <a:xfrm>
+            <a:off x="9235440" y="2286000"/>
+            <a:ext cx="0" cy="548640"/>
+          </a:xfrm>
+          <a:prstGeom prst="line">
+            <a:avLst/>
+          </a:prstGeom>
+          <a:ln w="25400">
+            <a:solidFill>
+              <a:srgbClr val="0B66C3"/>
+            </a:solidFill>
+            <a:tailEnd type="triangle" w="med" len="med"/>
+          </a:ln>
+        </p:spPr>
+        <p:style>
+          <a:lnRef idx="2">
+            <a:schemeClr val="accent1"/>
+          </a:lnRef>
+          <a:fillRef idx="0">
+            <a:schemeClr val="accent1"/>
+          </a:fillRef>
+          <a:effectRef idx="1">
+            <a:schemeClr val="accent1"/>
+          </a:effectRef>
+          <a:fontRef idx="minor">
+            <a:schemeClr val="tx1"/>
+          </a:fontRef>
+        </p:style>
+      </p:cxnSp>
+      <p:cxnSp>
+        <p:nvCxnSpPr>
+          <p:cNvPr id="9" name="Connector 8"/>
+          <p:cNvCxnSpPr/>
+          <p:nvPr/>
+        </p:nvCxnSpPr>
+        <p:spPr>
+          <a:xfrm>
+            <a:off x="9235440" y="4023360"/>
+            <a:ext cx="0" cy="548640"/>
+          </a:xfrm>
+          <a:prstGeom prst="line">
+            <a:avLst/>
+          </a:prstGeom>
+          <a:ln w="25400">
+            <a:solidFill>
+              <a:srgbClr val="0B66C3"/>
+            </a:solidFill>
+            <a:tailEnd type="triangle" w="med" len="med"/>
+          </a:ln>
+        </p:spPr>
+        <p:style>
+          <a:lnRef idx="2">
+            <a:schemeClr val="accent1"/>
+          </a:lnRef>
+          <a:fillRef idx="0">
+            <a:schemeClr val="accent1"/>
+          </a:fillRef>
+          <a:effectRef idx="1">
+            <a:schemeClr val="accent1"/>
+          </a:effectRef>
+          <a:fontRef idx="minor">
+            <a:schemeClr val="tx1"/>
+          </a:fontRef>
+        </p:style>
+      </p:cxnSp>
+      <p:sp>
+        <p:nvSpPr>
+          <p:cNvPr id="10" name="TextBox 9"/>
+          <p:cNvSpPr txBox="1"/>
+          <p:nvPr/>
+        </p:nvSpPr>
+        <p:spPr>
+          <a:xfrm>
+            <a:off x="9372600" y="2331720"/>
+            <a:ext cx="2194560" cy="457200"/>
+          </a:xfrm>
+          <a:prstGeom prst="rect">
+            <a:avLst/>
+          </a:prstGeom>
+          <a:noFill/>
+        </p:spPr>
+        <p:txBody>
+          <a:bodyPr wrap="square" anchor="t" lIns="45720" rIns="45720" tIns="27432" bIns="27432">
+            <a:spAutoFit/>
+          </a:bodyPr>
+          <a:lstStyle/>
+          <a:p>
+            <a:pPr algn="l">
+              <a:spcAft>
+                <a:spcPts val="600"/>
+              </a:spcAft>
+            </a:pPr>
+            <a:r>
+              <a:rPr sz="1200" b="0" i="0">
+                <a:solidFill>
+                  <a:srgbClr val="595959"/>
+                </a:solidFill>
+                <a:latin typeface="Yu Gothic"/>
+                <a:ea typeface="Yu Gothic"/>
+                <a:cs typeface="Yu Gothic"/>
+              </a:rPr>
+              <a:t>下書き ã</a:t>
+            </a:r>
+          </a:p>
+        </p:txBody>
+      </p:sp>
+      <p:sp>
+        <p:nvSpPr>
+          <p:cNvPr id="11" name="key point"/>
+          <p:cNvSpPr/>
+          <p:nvPr/>
+        </p:nvSpPr>
+        <p:spPr>
+          <a:xfrm>
+            <a:off x="548640" y="5715000"/>
+            <a:ext cx="11064240" cy="640080"/>
+          </a:xfrm>
+          <a:prstGeom prst="roundRect">
+            <a:avLst>
+              <a:gd name="adj" fmla="val 18000"/>
+            </a:avLst>
+          </a:prstGeom>
+          <a:solidFill>
+            <a:srgbClr val="E8F1FB"/>
+          </a:solidFill>
+          <a:ln w="15875">
+            <a:solidFill>
+              <a:srgbClr val="0B66C3"/>
+            </a:solidFill>
+          </a:ln>
+        </p:spPr>
+        <p:style>
+          <a:lnRef idx="1">
+            <a:schemeClr val="accent1"/>
+          </a:lnRef>
+          <a:fillRef idx="3">
+            <a:schemeClr val="accent1"/>
+          </a:fillRef>
+          <a:effectRef idx="2">
+            <a:schemeClr val="accent1"/>
+          </a:effectRef>
+          <a:fontRef idx="minor">
+            <a:schemeClr val="lt1"/>
+          </a:fontRef>
+        </p:style>
+        <p:txBody>
+          <a:bodyPr rtlCol="0" anchor="ctr" wrap="square" lIns="228600" rIns="228600"/>
+          <a:lstStyle/>
+          <a:p>
+            <a:pPr algn="l"/>
+            <a:r>
+              <a:rPr sz="1600" b="1" i="0">
+                <a:solidFill>
+                  <a:srgbClr val="0B66C3"/>
+                </a:solidFill>
+                <a:latin typeface="Yu Gothic"/>
+                <a:ea typeface="Yu Gothic"/>
+                <a:cs typeface="Yu Gothic"/>
+              </a:rPr>
+              <a:t>→ RL は小さな actor-critic だけが担当し、VLA の知識を壊さずに、数時間で行動を洗練できる</a:t>
+            </a:r>
+          </a:p>
+        </p:txBody>
+      </p:sp>
+    </p:spTree>
+  </p:cSld>
+  <p:clrMapOvr>
+    <a:masterClrMapping/>
+  </p:clrMapOvr>
+</p:sld>
+</file>
+
+<file path=ppt/slides/slide22.xml><?xml version="1.0" encoding="utf-8"?>
+<p:sld xmlns:a="http://schemas.openxmlformats.org/drawingml/2006/main" xmlns:p="http://schemas.openxmlformats.org/presentationml/2006/main" xmlns:r="http://schemas.openxmlformats.org/officeDocument/2006/relationships">
+  <p:cSld>
+    <p:spTree>
+      <p:nvGrpSpPr>
+        <p:cNvPr id="1" name=""/>
+        <p:cNvGrpSpPr/>
+        <p:nvPr/>
+      </p:nvGrpSpPr>
+      <p:grpSpPr/>
+      <p:sp>
+        <p:nvSpPr>
+          <p:cNvPr id="2" name="title band"/>
+          <p:cNvSpPr/>
+          <p:nvPr/>
+        </p:nvSpPr>
+        <p:spPr>
+          <a:xfrm>
+            <a:off x="0" y="0"/>
+            <a:ext cx="12191695" cy="777240"/>
+          </a:xfrm>
+          <a:prstGeom prst="rect">
+            <a:avLst/>
+          </a:prstGeom>
+          <a:solidFill>
+            <a:srgbClr val="0B66C3"/>
+          </a:solidFill>
+          <a:ln>
+            <a:noFill/>
+          </a:ln>
+        </p:spPr>
+        <p:style>
+          <a:lnRef idx="1">
+            <a:schemeClr val="accent1"/>
+          </a:lnRef>
+          <a:fillRef idx="3">
+            <a:schemeClr val="accent1"/>
+          </a:fillRef>
+          <a:effectRef idx="2">
+            <a:schemeClr val="accent1"/>
+          </a:effectRef>
+          <a:fontRef idx="minor">
+            <a:schemeClr val="lt1"/>
+          </a:fontRef>
+        </p:style>
+        <p:txBody>
+          <a:bodyPr rtlCol="0" anchor="ctr"/>
+          <a:lstStyle/>
+          <a:p>
+            <a:pPr algn="ctr"/>
+            <a:r>
+              <a:rPr sz="2800" b="1" i="0">
+                <a:solidFill>
+                  <a:srgbClr val="FFFFFF"/>
+                </a:solidFill>
+                <a:latin typeface="Yu Gothic"/>
+                <a:ea typeface="Yu Gothic"/>
+                <a:cs typeface="Yu Gothic"/>
+              </a:rPr>
+              <a:t>RL Token: アーキテクチャ（論文の図）</a:t>
+            </a:r>
+          </a:p>
+        </p:txBody>
+      </p:sp>
+      <p:sp>
+        <p:nvSpPr>
+          <p:cNvPr id="3" name="page number"/>
+          <p:cNvSpPr txBox="1"/>
+          <p:nvPr/>
+        </p:nvSpPr>
+        <p:spPr>
+          <a:xfrm>
+            <a:off x="11155680" y="6446520"/>
+            <a:ext cx="822960" cy="320040"/>
+          </a:xfrm>
+          <a:prstGeom prst="rect">
+            <a:avLst/>
+          </a:prstGeom>
+          <a:noFill/>
+        </p:spPr>
+        <p:txBody>
+          <a:bodyPr wrap="square" anchor="t" lIns="45720" rIns="45720" tIns="27432" bIns="27432">
+            <a:spAutoFit/>
+          </a:bodyPr>
+          <a:lstStyle/>
+          <a:p>
+            <a:pPr algn="r">
+              <a:spcAft>
+                <a:spcPts val="600"/>
+              </a:spcAft>
+            </a:pPr>
+            <a:r>
+              <a:rPr sz="1200" b="0" i="0">
+                <a:solidFill>
+                  <a:srgbClr val="595959"/>
+                </a:solidFill>
+                <a:latin typeface="Yu Gothic"/>
+                <a:ea typeface="Yu Gothic"/>
+                <a:cs typeface="Yu Gothic"/>
+              </a:rPr>
+              <a:t>22</a:t>
+            </a:r>
+          </a:p>
+        </p:txBody>
+      </p:sp>
+      <p:pic>
+        <p:nvPicPr>
+          <p:cNvPr id="4" name="fig_rl_token.png" descr="fig_rl_token.png"/>
+          <p:cNvPicPr>
+            <a:picLocks noChangeAspect="1"/>
+          </p:cNvPicPr>
+          <p:nvPr/>
+        </p:nvPicPr>
+        <p:blipFill>
+          <a:blip r:embed="rId3"/>
+          <a:stretch>
+            <a:fillRect/>
+          </a:stretch>
+        </p:blipFill>
+        <p:spPr>
+          <a:xfrm>
+            <a:off x="649766" y="960120"/>
+            <a:ext cx="4735507" cy="4434840"/>
+          </a:xfrm>
+          <a:prstGeom prst="rect">
+            <a:avLst/>
+          </a:prstGeom>
+        </p:spPr>
+      </p:pic>
+      <p:sp>
+        <p:nvSpPr>
+          <p:cNvPr id="5" name="TextBox 4"/>
+          <p:cNvSpPr txBox="1"/>
+          <p:nvPr/>
+        </p:nvSpPr>
+        <p:spPr>
+          <a:xfrm>
+            <a:off x="548640" y="5422392"/>
+            <a:ext cx="4937760" cy="274320"/>
+          </a:xfrm>
+          <a:prstGeom prst="rect">
+            <a:avLst/>
+          </a:prstGeom>
+          <a:noFill/>
+        </p:spPr>
+        <p:txBody>
+          <a:bodyPr wrap="square" anchor="t" lIns="45720" rIns="45720" tIns="27432" bIns="27432">
+            <a:spAutoFit/>
+          </a:bodyPr>
+          <a:lstStyle/>
+          <a:p>
+            <a:pPr algn="ctr">
+              <a:spcAft>
+                <a:spcPts val="600"/>
+              </a:spcAft>
+            </a:pPr>
+            <a:r>
+              <a:rPr sz="1100" b="0" i="0">
+                <a:solidFill>
+                  <a:srgbClr val="595959"/>
+                </a:solidFill>
+                <a:latin typeface="Yu Gothic"/>
+                <a:ea typeface="Yu Gothic"/>
+                <a:cs typeface="Yu Gothic"/>
+              </a:rPr>
+              <a:t>図: RL Token 論文（Physical Intelligence）図 2 より</a:t>
+            </a:r>
+          </a:p>
+        </p:txBody>
+      </p:sp>
+      <p:sp>
+        <p:nvSpPr>
+          <p:cNvPr id="6" name="no 1"/>
+          <p:cNvSpPr/>
+          <p:nvPr/>
+        </p:nvSpPr>
+        <p:spPr>
+          <a:xfrm>
+            <a:off x="5760720" y="1005840"/>
+            <a:ext cx="457200" cy="841248"/>
+          </a:xfrm>
+          <a:prstGeom prst="roundRect">
+            <a:avLst>
+              <a:gd name="adj" fmla="val 12000"/>
+            </a:avLst>
+          </a:prstGeom>
+          <a:solidFill>
+            <a:srgbClr val="0B66C3"/>
+          </a:solidFill>
+          <a:ln>
+            <a:noFill/>
+          </a:ln>
+        </p:spPr>
+        <p:style>
+          <a:lnRef idx="1">
+            <a:schemeClr val="accent1"/>
+          </a:lnRef>
+          <a:fillRef idx="3">
+            <a:schemeClr val="accent1"/>
+          </a:fillRef>
+          <a:effectRef idx="2">
+            <a:schemeClr val="accent1"/>
+          </a:effectRef>
+          <a:fontRef idx="minor">
+            <a:schemeClr val="lt1"/>
+          </a:fontRef>
+        </p:style>
+        <p:txBody>
+          <a:bodyPr rtlCol="0" anchor="ctr" wrap="square" lIns="73152" rIns="73152" tIns="36576" bIns="36576"/>
+          <a:lstStyle/>
+          <a:p>
+            <a:pPr algn="ctr"/>
+            <a:r>
+              <a:rPr sz="1600" b="1" i="0">
+                <a:solidFill>
+                  <a:srgbClr val="FFFFFF"/>
+                </a:solidFill>
+                <a:latin typeface="Yu Gothic"/>
+                <a:ea typeface="Yu Gothic"/>
+                <a:cs typeface="Yu Gothic"/>
+              </a:rPr>
+              <a:t>1</a:t>
+            </a:r>
+          </a:p>
+        </p:txBody>
+      </p:sp>
+      <p:sp>
+        <p:nvSpPr>
+          <p:cNvPr id="7" name="note 1"/>
+          <p:cNvSpPr/>
+          <p:nvPr/>
+        </p:nvSpPr>
+        <p:spPr>
+          <a:xfrm>
+            <a:off x="6263640" y="1005840"/>
+            <a:ext cx="5349240" cy="841248"/>
+          </a:xfrm>
+          <a:prstGeom prst="roundRect">
+            <a:avLst>
+              <a:gd name="adj" fmla="val 12000"/>
+            </a:avLst>
+          </a:prstGeom>
+          <a:solidFill>
+            <a:srgbClr val="F3F7FC"/>
+          </a:solidFill>
+          <a:ln w="12700">
+            <a:solidFill>
+              <a:srgbClr val="BFBFBF"/>
+            </a:solidFill>
+          </a:ln>
+        </p:spPr>
+        <p:style>
+          <a:lnRef idx="1">
+            <a:schemeClr val="accent1"/>
+          </a:lnRef>
+          <a:fillRef idx="3">
+            <a:schemeClr val="accent1"/>
+          </a:fillRef>
+          <a:effectRef idx="2">
+            <a:schemeClr val="accent1"/>
+          </a:effectRef>
+          <a:fontRef idx="minor">
+            <a:schemeClr val="lt1"/>
+          </a:fontRef>
+        </p:style>
+        <p:txBody>
+          <a:bodyPr rtlCol="0" anchor="ctr" wrap="square" lIns="73152" rIns="73152" tIns="36576" bIns="36576"/>
+          <a:lstStyle/>
+          <a:p>
+            <a:pPr algn="l"/>
+            <a:r>
+              <a:rPr sz="1300" b="1" i="0">
+                <a:solidFill>
+                  <a:srgbClr val="1A1A1A"/>
+                </a:solidFill>
+                <a:latin typeface="Yu Gothic"/>
+                <a:ea typeface="Yu Gothic"/>
+                <a:cs typeface="Yu Gothic"/>
+              </a:rPr>
+              <a:t>入力（図の下）</a:t>
+            </a:r>
+          </a:p>
+          <a:p>
+            <a:pPr algn="l"/>
+            <a:r>
+              <a:rPr sz="1200" b="0" i="0">
+                <a:solidFill>
+                  <a:srgbClr val="1A1A1A"/>
+                </a:solidFill>
+                <a:latin typeface="Yu Gothic"/>
+                <a:ea typeface="Yu Gothic"/>
+                <a:cs typeface="Yu Gothic"/>
+              </a:rPr>
+              <a:t>3 台のカメラ画像と指示文を、VLA（SigLIP + Gemma）に入れる</a:t>
+            </a:r>
+          </a:p>
+        </p:txBody>
+      </p:sp>
+      <p:sp>
+        <p:nvSpPr>
+          <p:cNvPr id="8" name="no 2"/>
+          <p:cNvSpPr/>
+          <p:nvPr/>
+        </p:nvSpPr>
+        <p:spPr>
+          <a:xfrm>
+            <a:off x="5760720" y="1920240"/>
+            <a:ext cx="457200" cy="841248"/>
+          </a:xfrm>
+          <a:prstGeom prst="roundRect">
+            <a:avLst>
+              <a:gd name="adj" fmla="val 12000"/>
+            </a:avLst>
+          </a:prstGeom>
+          <a:solidFill>
+            <a:srgbClr val="0B66C3"/>
+          </a:solidFill>
+          <a:ln>
+            <a:noFill/>
+          </a:ln>
+        </p:spPr>
+        <p:style>
+          <a:lnRef idx="1">
+            <a:schemeClr val="accent1"/>
+          </a:lnRef>
+          <a:fillRef idx="3">
+            <a:schemeClr val="accent1"/>
+          </a:fillRef>
+          <a:effectRef idx="2">
+            <a:schemeClr val="accent1"/>
+          </a:effectRef>
+          <a:fontRef idx="minor">
+            <a:schemeClr val="lt1"/>
+          </a:fontRef>
+        </p:style>
+        <p:txBody>
+          <a:bodyPr rtlCol="0" anchor="ctr" wrap="square" lIns="73152" rIns="73152" tIns="36576" bIns="36576"/>
+          <a:lstStyle/>
+          <a:p>
+            <a:pPr algn="ctr"/>
+            <a:r>
+              <a:rPr sz="1600" b="1" i="0">
+                <a:solidFill>
+                  <a:srgbClr val="FFFFFF"/>
+                </a:solidFill>
+                <a:latin typeface="Yu Gothic"/>
+                <a:ea typeface="Yu Gothic"/>
+                <a:cs typeface="Yu Gothic"/>
+              </a:rPr>
+              <a:t>2</a:t>
+            </a:r>
+          </a:p>
+        </p:txBody>
+      </p:sp>
+      <p:sp>
+        <p:nvSpPr>
+          <p:cNvPr id="9" name="note 2"/>
+          <p:cNvSpPr/>
+          <p:nvPr/>
+        </p:nvSpPr>
+        <p:spPr>
+          <a:xfrm>
+            <a:off x="6263640" y="1920240"/>
+            <a:ext cx="5349240" cy="841248"/>
+          </a:xfrm>
+          <a:prstGeom prst="roundRect">
+            <a:avLst>
+              <a:gd name="adj" fmla="val 12000"/>
+            </a:avLst>
+          </a:prstGeom>
+          <a:solidFill>
+            <a:srgbClr val="F3F7FC"/>
+          </a:solidFill>
+          <a:ln w="12700">
+            <a:solidFill>
+              <a:srgbClr val="BFBFBF"/>
+            </a:solidFill>
+          </a:ln>
+        </p:spPr>
+        <p:style>
+          <a:lnRef idx="1">
+            <a:schemeClr val="accent1"/>
+          </a:lnRef>
+          <a:fillRef idx="3">
+            <a:schemeClr val="accent1"/>
+          </a:fillRef>
+          <a:effectRef idx="2">
+            <a:schemeClr val="accent1"/>
+          </a:effectRef>
+          <a:fontRef idx="minor">
+            <a:schemeClr val="lt1"/>
+          </a:fontRef>
+        </p:style>
+        <p:txBody>
+          <a:bodyPr rtlCol="0" anchor="ctr" wrap="square" lIns="73152" rIns="73152" tIns="36576" bIns="36576"/>
+          <a:lstStyle/>
+          <a:p>
+            <a:pPr algn="l"/>
+            <a:r>
+              <a:rPr sz="1300" b="1" i="0">
+                <a:solidFill>
+                  <a:srgbClr val="1A1A1A"/>
+                </a:solidFill>
+                <a:latin typeface="Yu Gothic"/>
+                <a:ea typeface="Yu Gothic"/>
+                <a:cs typeface="Yu Gothic"/>
+              </a:rPr>
+              <a:t>画像の埋め込み</a:t>
+            </a:r>
+          </a:p>
+          <a:p>
+            <a:pPr algn="l"/>
+            <a:r>
+              <a:rPr sz="1200" b="0" i="0">
+                <a:solidFill>
+                  <a:srgbClr val="1A1A1A"/>
+                </a:solidFill>
+                <a:latin typeface="Yu Gothic"/>
+                <a:ea typeface="Yu Gothic"/>
+                <a:cs typeface="Yu Gothic"/>
+              </a:rPr>
+              <a:t>VLA の内部で作られる、画像の埋め込み（N × 2048）</a:t>
+            </a:r>
+          </a:p>
+        </p:txBody>
+      </p:sp>
+      <p:sp>
+        <p:nvSpPr>
+          <p:cNvPr id="10" name="no 3"/>
+          <p:cNvSpPr/>
+          <p:nvPr/>
+        </p:nvSpPr>
+        <p:spPr>
+          <a:xfrm>
+            <a:off x="5760720" y="2834640"/>
+            <a:ext cx="457200" cy="841248"/>
+          </a:xfrm>
+          <a:prstGeom prst="roundRect">
+            <a:avLst>
+              <a:gd name="adj" fmla="val 12000"/>
+            </a:avLst>
+          </a:prstGeom>
+          <a:solidFill>
+            <a:srgbClr val="0B66C3"/>
+          </a:solidFill>
+          <a:ln>
+            <a:noFill/>
+          </a:ln>
+        </p:spPr>
+        <p:style>
+          <a:lnRef idx="1">
+            <a:schemeClr val="accent1"/>
+          </a:lnRef>
+          <a:fillRef idx="3">
+            <a:schemeClr val="accent1"/>
+          </a:fillRef>
+          <a:effectRef idx="2">
+            <a:schemeClr val="accent1"/>
+          </a:effectRef>
+          <a:fontRef idx="minor">
+            <a:schemeClr val="lt1"/>
+          </a:fontRef>
+        </p:style>
+        <p:txBody>
+          <a:bodyPr rtlCol="0" anchor="ctr" wrap="square" lIns="73152" rIns="73152" tIns="36576" bIns="36576"/>
+          <a:lstStyle/>
+          <a:p>
+            <a:pPr algn="ctr"/>
+            <a:r>
+              <a:rPr sz="1600" b="1" i="0">
+                <a:solidFill>
+                  <a:srgbClr val="FFFFFF"/>
+                </a:solidFill>
+                <a:latin typeface="Yu Gothic"/>
+                <a:ea typeface="Yu Gothic"/>
+                <a:cs typeface="Yu Gothic"/>
+              </a:rPr>
+              <a:t>3</a:t>
+            </a:r>
+          </a:p>
+        </p:txBody>
+      </p:sp>
+      <p:sp>
+        <p:nvSpPr>
+          <p:cNvPr id="11" name="note 3"/>
+          <p:cNvSpPr/>
+          <p:nvPr/>
+        </p:nvSpPr>
+        <p:spPr>
+          <a:xfrm>
+            <a:off x="6263640" y="2834640"/>
+            <a:ext cx="5349240" cy="841248"/>
+          </a:xfrm>
+          <a:prstGeom prst="roundRect">
+            <a:avLst>
+              <a:gd name="adj" fmla="val 12000"/>
+            </a:avLst>
+          </a:prstGeom>
+          <a:solidFill>
+            <a:srgbClr val="F3F7FC"/>
+          </a:solidFill>
+          <a:ln w="12700">
+            <a:solidFill>
+              <a:srgbClr val="BFBFBF"/>
+            </a:solidFill>
+          </a:ln>
+        </p:spPr>
+        <p:style>
+          <a:lnRef idx="1">
+            <a:schemeClr val="accent1"/>
+          </a:lnRef>
+          <a:fillRef idx="3">
+            <a:schemeClr val="accent1"/>
+          </a:fillRef>
+          <a:effectRef idx="2">
+            <a:schemeClr val="accent1"/>
+          </a:effectRef>
+          <a:fontRef idx="minor">
+            <a:schemeClr val="lt1"/>
+          </a:fontRef>
+        </p:style>
+        <p:txBody>
+          <a:bodyPr rtlCol="0" anchor="ctr" wrap="square" lIns="73152" rIns="73152" tIns="36576" bIns="36576"/>
+          <a:lstStyle/>
+          <a:p>
+            <a:pPr algn="l"/>
+            <a:r>
+              <a:rPr sz="1300" b="1" i="0">
+                <a:solidFill>
+                  <a:srgbClr val="1A1A1A"/>
+                </a:solidFill>
+                <a:latin typeface="Yu Gothic"/>
+                <a:ea typeface="Yu Gothic"/>
+                <a:cs typeface="Yu Gothic"/>
+              </a:rPr>
+              <a:t>encoder → RL token</a:t>
+            </a:r>
+          </a:p>
+          <a:p>
+            <a:pPr algn="l"/>
+            <a:r>
+              <a:rPr sz="1200" b="0" i="0">
+                <a:solidFill>
+                  <a:srgbClr val="1A1A1A"/>
+                </a:solidFill>
+                <a:latin typeface="Yu Gothic"/>
+                <a:ea typeface="Yu Gothic"/>
+                <a:cs typeface="Yu Gothic"/>
+              </a:rPr>
+              <a:t>埋め込みと、学習可能なトークン e_rl から、1 本の RL token（1 × 2048）に圧縮する</a:t>
+            </a:r>
+          </a:p>
+        </p:txBody>
+      </p:sp>
+      <p:sp>
+        <p:nvSpPr>
+          <p:cNvPr id="12" name="no 4"/>
+          <p:cNvSpPr/>
+          <p:nvPr/>
+        </p:nvSpPr>
+        <p:spPr>
+          <a:xfrm>
+            <a:off x="5760720" y="3749039"/>
+            <a:ext cx="457200" cy="841248"/>
+          </a:xfrm>
+          <a:prstGeom prst="roundRect">
+            <a:avLst>
+              <a:gd name="adj" fmla="val 12000"/>
+            </a:avLst>
+          </a:prstGeom>
+          <a:solidFill>
+            <a:srgbClr val="0B66C3"/>
+          </a:solidFill>
+          <a:ln>
+            <a:noFill/>
+          </a:ln>
+        </p:spPr>
+        <p:style>
+          <a:lnRef idx="1">
+            <a:schemeClr val="accent1"/>
+          </a:lnRef>
+          <a:fillRef idx="3">
+            <a:schemeClr val="accent1"/>
+          </a:fillRef>
+          <a:effectRef idx="2">
+            <a:schemeClr val="accent1"/>
+          </a:effectRef>
+          <a:fontRef idx="minor">
+            <a:schemeClr val="lt1"/>
+          </a:fontRef>
+        </p:style>
+        <p:txBody>
+          <a:bodyPr rtlCol="0" anchor="ctr" wrap="square" lIns="73152" rIns="73152" tIns="36576" bIns="36576"/>
+          <a:lstStyle/>
+          <a:p>
+            <a:pPr algn="ctr"/>
+            <a:r>
+              <a:rPr sz="1600" b="1" i="0">
+                <a:solidFill>
+                  <a:srgbClr val="FFFFFF"/>
+                </a:solidFill>
+                <a:latin typeface="Yu Gothic"/>
+                <a:ea typeface="Yu Gothic"/>
+                <a:cs typeface="Yu Gothic"/>
+              </a:rPr>
+              <a:t>4</a:t>
+            </a:r>
+          </a:p>
+        </p:txBody>
+      </p:sp>
+      <p:sp>
+        <p:nvSpPr>
+          <p:cNvPr id="13" name="note 4"/>
+          <p:cNvSpPr/>
+          <p:nvPr/>
+        </p:nvSpPr>
+        <p:spPr>
+          <a:xfrm>
+            <a:off x="6263640" y="3749039"/>
+            <a:ext cx="5349240" cy="841248"/>
+          </a:xfrm>
+          <a:prstGeom prst="roundRect">
+            <a:avLst>
+              <a:gd name="adj" fmla="val 12000"/>
+            </a:avLst>
+          </a:prstGeom>
+          <a:solidFill>
+            <a:srgbClr val="F3F7FC"/>
+          </a:solidFill>
+          <a:ln w="12700">
+            <a:solidFill>
+              <a:srgbClr val="BFBFBF"/>
+            </a:solidFill>
+          </a:ln>
+        </p:spPr>
+        <p:style>
+          <a:lnRef idx="1">
+            <a:schemeClr val="accent1"/>
+          </a:lnRef>
+          <a:fillRef idx="3">
+            <a:schemeClr val="accent1"/>
+          </a:fillRef>
+          <a:effectRef idx="2">
+            <a:schemeClr val="accent1"/>
+          </a:effectRef>
+          <a:fontRef idx="minor">
+            <a:schemeClr val="lt1"/>
+          </a:fontRef>
+        </p:style>
+        <p:txBody>
+          <a:bodyPr rtlCol="0" anchor="ctr" wrap="square" lIns="73152" rIns="73152" tIns="36576" bIns="36576"/>
+          <a:lstStyle/>
+          <a:p>
+            <a:pPr algn="l"/>
+            <a:r>
+              <a:rPr sz="1300" b="1" i="0">
+                <a:solidFill>
+                  <a:srgbClr val="1A1A1A"/>
+                </a:solidFill>
+                <a:latin typeface="Yu Gothic"/>
+                <a:ea typeface="Yu Gothic"/>
+                <a:cs typeface="Yu Gothic"/>
+              </a:rPr>
+              <a:t>decoder</a:t>
+            </a:r>
+          </a:p>
+          <a:p>
+            <a:pPr algn="l"/>
+            <a:r>
+              <a:rPr sz="1200" b="0" i="0">
+                <a:solidFill>
+                  <a:srgbClr val="1A1A1A"/>
+                </a:solidFill>
+                <a:latin typeface="Yu Gothic"/>
+                <a:ea typeface="Yu Gothic"/>
+                <a:cs typeface="Yu Gothic"/>
+              </a:rPr>
+              <a:t>RL token から、元の埋め込みを再構成する。これを損失にして、RL token に情報を詰める</a:t>
+            </a:r>
+          </a:p>
+        </p:txBody>
+      </p:sp>
+      <p:sp>
+        <p:nvSpPr>
+          <p:cNvPr id="14" name="no 5"/>
+          <p:cNvSpPr/>
+          <p:nvPr/>
+        </p:nvSpPr>
+        <p:spPr>
+          <a:xfrm>
+            <a:off x="5760720" y="4663440"/>
+            <a:ext cx="457200" cy="841248"/>
+          </a:xfrm>
+          <a:prstGeom prst="roundRect">
+            <a:avLst>
+              <a:gd name="adj" fmla="val 12000"/>
+            </a:avLst>
+          </a:prstGeom>
+          <a:solidFill>
+            <a:srgbClr val="0B66C3"/>
+          </a:solidFill>
+          <a:ln>
+            <a:noFill/>
+          </a:ln>
+        </p:spPr>
+        <p:style>
+          <a:lnRef idx="1">
+            <a:schemeClr val="accent1"/>
+          </a:lnRef>
+          <a:fillRef idx="3">
+            <a:schemeClr val="accent1"/>
+          </a:fillRef>
+          <a:effectRef idx="2">
+            <a:schemeClr val="accent1"/>
+          </a:effectRef>
+          <a:fontRef idx="minor">
+            <a:schemeClr val="lt1"/>
+          </a:fontRef>
+        </p:style>
+        <p:txBody>
+          <a:bodyPr rtlCol="0" anchor="ctr" wrap="square" lIns="73152" rIns="73152" tIns="36576" bIns="36576"/>
+          <a:lstStyle/>
+          <a:p>
+            <a:pPr algn="ctr"/>
+            <a:r>
+              <a:rPr sz="1600" b="1" i="0">
+                <a:solidFill>
+                  <a:srgbClr val="FFFFFF"/>
+                </a:solidFill>
+                <a:latin typeface="Yu Gothic"/>
+                <a:ea typeface="Yu Gothic"/>
+                <a:cs typeface="Yu Gothic"/>
+              </a:rPr>
+              <a:t>5</a:t>
+            </a:r>
+          </a:p>
+        </p:txBody>
+      </p:sp>
+      <p:sp>
+        <p:nvSpPr>
+          <p:cNvPr id="15" name="note 5"/>
+          <p:cNvSpPr/>
+          <p:nvPr/>
+        </p:nvSpPr>
+        <p:spPr>
+          <a:xfrm>
+            <a:off x="6263640" y="4663440"/>
+            <a:ext cx="5349240" cy="841248"/>
+          </a:xfrm>
+          <a:prstGeom prst="roundRect">
+            <a:avLst>
+              <a:gd name="adj" fmla="val 12000"/>
+            </a:avLst>
+          </a:prstGeom>
+          <a:solidFill>
+            <a:srgbClr val="F3F7FC"/>
+          </a:solidFill>
+          <a:ln w="12700">
+            <a:solidFill>
+              <a:srgbClr val="BFBFBF"/>
+            </a:solidFill>
+          </a:ln>
+        </p:spPr>
+        <p:style>
+          <a:lnRef idx="1">
+            <a:schemeClr val="accent1"/>
+          </a:lnRef>
+          <a:fillRef idx="3">
+            <a:schemeClr val="accent1"/>
+          </a:fillRef>
+          <a:effectRef idx="2">
+            <a:schemeClr val="accent1"/>
+          </a:effectRef>
+          <a:fontRef idx="minor">
+            <a:schemeClr val="lt1"/>
+          </a:fontRef>
+        </p:style>
+        <p:txBody>
+          <a:bodyPr rtlCol="0" anchor="ctr" wrap="square" lIns="73152" rIns="73152" tIns="36576" bIns="36576"/>
+          <a:lstStyle/>
+          <a:p>
+            <a:pPr algn="l"/>
+            <a:r>
+              <a:rPr sz="1300" b="1" i="0">
+                <a:solidFill>
+                  <a:srgbClr val="1A1A1A"/>
+                </a:solidFill>
+                <a:latin typeface="Yu Gothic"/>
+                <a:ea typeface="Yu Gothic"/>
+                <a:cs typeface="Yu Gothic"/>
+              </a:rPr>
+              <a:t>行動チャンク（図の右）</a:t>
+            </a:r>
+          </a:p>
+          <a:p>
+            <a:pPr algn="l"/>
+            <a:r>
+              <a:rPr sz="1200" b="0" i="0">
+                <a:solidFill>
+                  <a:srgbClr val="1A1A1A"/>
+                </a:solidFill>
+                <a:latin typeface="Yu Gothic"/>
+                <a:ea typeface="Yu Gothic"/>
+                <a:cs typeface="Yu Gothic"/>
+              </a:rPr>
+              <a:t>VLA の action expert が、ノイズから行動チャンクを出す。RL では、これを「参照行動」として使う</a:t>
+            </a:r>
+          </a:p>
+        </p:txBody>
+      </p:sp>
+      <p:sp>
+        <p:nvSpPr>
+          <p:cNvPr id="16" name="key point"/>
+          <p:cNvSpPr/>
+          <p:nvPr/>
+        </p:nvSpPr>
+        <p:spPr>
+          <a:xfrm>
+            <a:off x="548640" y="5715000"/>
+            <a:ext cx="11064240" cy="640080"/>
+          </a:xfrm>
+          <a:prstGeom prst="roundRect">
+            <a:avLst>
+              <a:gd name="adj" fmla="val 18000"/>
+            </a:avLst>
+          </a:prstGeom>
+          <a:solidFill>
+            <a:srgbClr val="E8F1FB"/>
+          </a:solidFill>
+          <a:ln w="15875">
+            <a:solidFill>
+              <a:srgbClr val="0B66C3"/>
+            </a:solidFill>
+          </a:ln>
+        </p:spPr>
+        <p:style>
+          <a:lnRef idx="1">
+            <a:schemeClr val="accent1"/>
+          </a:lnRef>
+          <a:fillRef idx="3">
+            <a:schemeClr val="accent1"/>
+          </a:fillRef>
+          <a:effectRef idx="2">
+            <a:schemeClr val="accent1"/>
+          </a:effectRef>
+          <a:fontRef idx="minor">
+            <a:schemeClr val="lt1"/>
+          </a:fontRef>
+        </p:style>
+        <p:txBody>
+          <a:bodyPr rtlCol="0" anchor="ctr" wrap="square" lIns="228600" rIns="228600"/>
+          <a:lstStyle/>
+          <a:p>
+            <a:pPr algn="l"/>
+            <a:r>
+              <a:rPr sz="1600" b="1" i="0">
+                <a:solidFill>
+                  <a:srgbClr val="0B66C3"/>
+                </a:solidFill>
+                <a:latin typeface="Yu Gothic"/>
+                <a:ea typeface="Yu Gothic"/>
+                <a:cs typeface="Yu Gothic"/>
+              </a:rPr>
+              <a:t>→ VLA は凍結したまま、RL token が、RL にとっての小さな状態表現になる</a:t>
+            </a:r>
+          </a:p>
+        </p:txBody>
+      </p:sp>
+    </p:spTree>
+  </p:cSld>
+  <p:clrMapOvr>
+    <a:masterClrMapping/>
+  </p:clrMapOvr>
+</p:sld>
+</file>
+
+<file path=ppt/slides/slide23.xml><?xml version="1.0" encoding="utf-8"?>
+<p:sld xmlns:a="http://schemas.openxmlformats.org/drawingml/2006/main" xmlns:p="http://schemas.openxmlformats.org/presentationml/2006/main" xmlns:r="http://schemas.openxmlformats.org/officeDocument/2006/relationships">
+  <p:cSld>
+    <p:spTree>
+      <p:nvGrpSpPr>
+        <p:cNvPr id="1" name=""/>
+        <p:cNvGrpSpPr/>
+        <p:nvPr/>
+      </p:nvGrpSpPr>
+      <p:grpSpPr/>
+      <p:sp>
+        <p:nvSpPr>
+          <p:cNvPr id="2" name="title band"/>
+          <p:cNvSpPr/>
+          <p:nvPr/>
+        </p:nvSpPr>
+        <p:spPr>
+          <a:xfrm>
+            <a:off x="0" y="0"/>
+            <a:ext cx="12191695" cy="777240"/>
+          </a:xfrm>
+          <a:prstGeom prst="rect">
+            <a:avLst/>
+          </a:prstGeom>
+          <a:solidFill>
+            <a:srgbClr val="0B66C3"/>
+          </a:solidFill>
+          <a:ln>
+            <a:noFill/>
+          </a:ln>
+        </p:spPr>
+        <p:style>
+          <a:lnRef idx="1">
+            <a:schemeClr val="accent1"/>
+          </a:lnRef>
+          <a:fillRef idx="3">
+            <a:schemeClr val="accent1"/>
+          </a:fillRef>
+          <a:effectRef idx="2">
+            <a:schemeClr val="accent1"/>
+          </a:effectRef>
+          <a:fontRef idx="minor">
+            <a:schemeClr val="lt1"/>
+          </a:fontRef>
+        </p:style>
+        <p:txBody>
+          <a:bodyPr rtlCol="0" anchor="ctr"/>
+          <a:lstStyle/>
+          <a:p>
+            <a:pPr algn="ctr"/>
+            <a:r>
+              <a:rPr sz="2800" b="1" i="0">
+                <a:solidFill>
+                  <a:srgbClr val="FFFFFF"/>
+                </a:solidFill>
+                <a:latin typeface="Yu Gothic"/>
+                <a:ea typeface="Yu Gothic"/>
+                <a:cs typeface="Yu Gothic"/>
+              </a:rPr>
+              <a:t>RL Token ①: 1 ステップの流れ（入力 → 出力）</a:t>
+            </a:r>
+          </a:p>
+        </p:txBody>
+      </p:sp>
+      <p:sp>
+        <p:nvSpPr>
+          <p:cNvPr id="3" name="page number"/>
+          <p:cNvSpPr txBox="1"/>
+          <p:nvPr/>
+        </p:nvSpPr>
+        <p:spPr>
+          <a:xfrm>
+            <a:off x="11155680" y="6446520"/>
+            <a:ext cx="822960" cy="320040"/>
+          </a:xfrm>
+          <a:prstGeom prst="rect">
+            <a:avLst/>
+          </a:prstGeom>
+          <a:noFill/>
+        </p:spPr>
+        <p:txBody>
+          <a:bodyPr wrap="square" anchor="t" lIns="45720" rIns="45720" tIns="27432" bIns="27432">
+            <a:spAutoFit/>
+          </a:bodyPr>
+          <a:lstStyle/>
+          <a:p>
+            <a:pPr algn="r">
+              <a:spcAft>
+                <a:spcPts val="600"/>
+              </a:spcAft>
+            </a:pPr>
+            <a:r>
+              <a:rPr sz="1200" b="0" i="0">
+                <a:solidFill>
+                  <a:srgbClr val="595959"/>
+                </a:solidFill>
+                <a:latin typeface="Yu Gothic"/>
+                <a:ea typeface="Yu Gothic"/>
+                <a:cs typeface="Yu Gothic"/>
+              </a:rPr>
+              <a:t>23</a:t>
             </a:r>
           </a:p>
         </p:txBody>
@@ -20993,7 +22235,7 @@
 </p:sld>
 </file>
 
-<file path=ppt/slides/slide22.xml><?xml version="1.0" encoding="utf-8"?>
+<file path=ppt/slides/slide24.xml><?xml version="1.0" encoding="utf-8"?>
 <p:sld xmlns:a="http://schemas.openxmlformats.org/drawingml/2006/main" xmlns:p="http://schemas.openxmlformats.org/presentationml/2006/main" xmlns:r="http://schemas.openxmlformats.org/officeDocument/2006/relationships">
   <p:cSld>
     <p:spTree>
@@ -21093,7 +22335,7 @@
                 <a:ea typeface="Yu Gothic"/>
                 <a:cs typeface="Yu Gothic"/>
               </a:rPr>
-              <a:t>22</a:t>
+              <a:t>24</a:t>
             </a:r>
           </a:p>
         </p:txBody>
@@ -22158,7 +23400,7 @@
 </p:sld>
 </file>
 
-<file path=ppt/slides/slide23.xml><?xml version="1.0" encoding="utf-8"?>
+<file path=ppt/slides/slide25.xml><?xml version="1.0" encoding="utf-8"?>
 <p:sld xmlns:a="http://schemas.openxmlformats.org/drawingml/2006/main" xmlns:p="http://schemas.openxmlformats.org/presentationml/2006/main" xmlns:r="http://schemas.openxmlformats.org/officeDocument/2006/relationships">
   <p:cSld>
     <p:spTree>
@@ -22258,7 +23500,7 @@
                 <a:ea typeface="Yu Gothic"/>
                 <a:cs typeface="Yu Gothic"/>
               </a:rPr>
-              <a:t>23</a:t>
+              <a:t>25</a:t>
             </a:r>
           </a:p>
         </p:txBody>
@@ -23612,7 +24854,7 @@
 </p:sld>
 </file>
 
-<file path=ppt/slides/slide24.xml><?xml version="1.0" encoding="utf-8"?>
+<file path=ppt/slides/slide26.xml><?xml version="1.0" encoding="utf-8"?>
 <p:sld xmlns:a="http://schemas.openxmlformats.org/drawingml/2006/main" xmlns:p="http://schemas.openxmlformats.org/presentationml/2006/main" xmlns:r="http://schemas.openxmlformats.org/officeDocument/2006/relationships">
   <p:cSld>
     <p:spTree>
@@ -23712,7 +24954,7 @@
                 <a:ea typeface="Yu Gothic"/>
                 <a:cs typeface="Yu Gothic"/>
               </a:rPr>
-              <a:t>24</a:t>
+              <a:t>26</a:t>
             </a:r>
           </a:p>
         </p:txBody>
@@ -24070,7 +25312,7 @@
 </p:sld>
 </file>
 
-<file path=ppt/slides/slide25.xml><?xml version="1.0" encoding="utf-8"?>
+<file path=ppt/slides/slide27.xml><?xml version="1.0" encoding="utf-8"?>
 <p:sld xmlns:a="http://schemas.openxmlformats.org/drawingml/2006/main" xmlns:p="http://schemas.openxmlformats.org/presentationml/2006/main" xmlns:r="http://schemas.openxmlformats.org/officeDocument/2006/relationships">
   <p:cSld>
     <p:spTree>
@@ -24170,7 +25412,7 @@
                 <a:ea typeface="Yu Gothic"/>
                 <a:cs typeface="Yu Gothic"/>
               </a:rPr>
-              <a:t>25</a:t>
+              <a:t>27</a:t>
             </a:r>
           </a:p>
         </p:txBody>
@@ -25048,7 +26290,7 @@
 </p:sld>
 </file>
 
-<file path=ppt/slides/slide26.xml><?xml version="1.0" encoding="utf-8"?>
+<file path=ppt/slides/slide28.xml><?xml version="1.0" encoding="utf-8"?>
 <p:sld xmlns:a="http://schemas.openxmlformats.org/drawingml/2006/main" xmlns:p="http://schemas.openxmlformats.org/presentationml/2006/main" xmlns:r="http://schemas.openxmlformats.org/officeDocument/2006/relationships">
   <p:cSld>
     <p:spTree>
@@ -25148,7 +26390,7 @@
                 <a:ea typeface="Yu Gothic"/>
                 <a:cs typeface="Yu Gothic"/>
               </a:rPr>
-              <a:t>26</a:t>
+              <a:t>28</a:t>
             </a:r>
           </a:p>
         </p:txBody>
@@ -26760,7 +28002,7 @@
 </p:sld>
 </file>
 
-<file path=ppt/slides/slide27.xml><?xml version="1.0" encoding="utf-8"?>
+<file path=ppt/slides/slide29.xml><?xml version="1.0" encoding="utf-8"?>
 <p:sld xmlns:a="http://schemas.openxmlformats.org/drawingml/2006/main" xmlns:p="http://schemas.openxmlformats.org/presentationml/2006/main" xmlns:r="http://schemas.openxmlformats.org/officeDocument/2006/relationships">
   <p:cSld>
     <p:spTree>
@@ -26860,7 +28102,7 @@
                 <a:ea typeface="Yu Gothic"/>
                 <a:cs typeface="Yu Gothic"/>
               </a:rPr>
-              <a:t>27</a:t>
+              <a:t>29</a:t>
             </a:r>
           </a:p>
         </p:txBody>
@@ -27423,790 +28665,7 @@
                 <a:ea typeface="Yu Gothic"/>
                 <a:cs typeface="Yu Gothic"/>
               </a:rPr>
-              <a:t>→ RECAP と STEAM は評価者だけが違う同じ型。RL Token は行動を直す別の型で、目的は補完的</a:t>
-            </a:r>
-          </a:p>
-        </p:txBody>
-      </p:sp>
-    </p:spTree>
-  </p:cSld>
-  <p:clrMapOvr>
-    <a:masterClrMapping/>
-  </p:clrMapOvr>
-</p:sld>
-</file>
-
-<file path=ppt/slides/slide28.xml><?xml version="1.0" encoding="utf-8"?>
-<p:sld xmlns:a="http://schemas.openxmlformats.org/drawingml/2006/main" xmlns:p="http://schemas.openxmlformats.org/presentationml/2006/main" xmlns:r="http://schemas.openxmlformats.org/officeDocument/2006/relationships">
-  <p:cSld>
-    <p:spTree>
-      <p:nvGrpSpPr>
-        <p:cNvPr id="1" name=""/>
-        <p:cNvGrpSpPr/>
-        <p:nvPr/>
-      </p:nvGrpSpPr>
-      <p:grpSpPr/>
-      <p:sp>
-        <p:nvSpPr>
-          <p:cNvPr id="2" name="title band"/>
-          <p:cNvSpPr/>
-          <p:nvPr/>
-        </p:nvSpPr>
-        <p:spPr>
-          <a:xfrm>
-            <a:off x="0" y="0"/>
-            <a:ext cx="12191695" cy="777240"/>
-          </a:xfrm>
-          <a:prstGeom prst="rect">
-            <a:avLst/>
-          </a:prstGeom>
-          <a:solidFill>
-            <a:srgbClr val="0B66C3"/>
-          </a:solidFill>
-          <a:ln>
-            <a:noFill/>
-          </a:ln>
-        </p:spPr>
-        <p:style>
-          <a:lnRef idx="1">
-            <a:schemeClr val="accent1"/>
-          </a:lnRef>
-          <a:fillRef idx="3">
-            <a:schemeClr val="accent1"/>
-          </a:fillRef>
-          <a:effectRef idx="2">
-            <a:schemeClr val="accent1"/>
-          </a:effectRef>
-          <a:fontRef idx="minor">
-            <a:schemeClr val="lt1"/>
-          </a:fontRef>
-        </p:style>
-        <p:txBody>
-          <a:bodyPr rtlCol="0" anchor="ctr"/>
-          <a:lstStyle/>
-          <a:p>
-            <a:pPr algn="ctr"/>
-            <a:r>
-              <a:rPr sz="2800" b="1" i="0">
-                <a:solidFill>
-                  <a:srgbClr val="FFFFFF"/>
-                </a:solidFill>
-                <a:latin typeface="Yu Gothic"/>
-                <a:ea typeface="Yu Gothic"/>
-                <a:cs typeface="Yu Gothic"/>
-              </a:rPr>
-              <a:t>まとめと今後</a:t>
-            </a:r>
-          </a:p>
-        </p:txBody>
-      </p:sp>
-      <p:sp>
-        <p:nvSpPr>
-          <p:cNvPr id="3" name="page number"/>
-          <p:cNvSpPr txBox="1"/>
-          <p:nvPr/>
-        </p:nvSpPr>
-        <p:spPr>
-          <a:xfrm>
-            <a:off x="11155680" y="6446520"/>
-            <a:ext cx="822960" cy="320040"/>
-          </a:xfrm>
-          <a:prstGeom prst="rect">
-            <a:avLst/>
-          </a:prstGeom>
-          <a:noFill/>
-        </p:spPr>
-        <p:txBody>
-          <a:bodyPr wrap="square" anchor="t" lIns="45720" rIns="45720" tIns="27432" bIns="27432">
-            <a:spAutoFit/>
-          </a:bodyPr>
-          <a:lstStyle/>
-          <a:p>
-            <a:pPr algn="r">
-              <a:spcAft>
-                <a:spcPts val="600"/>
-              </a:spcAft>
-            </a:pPr>
-            <a:r>
-              <a:rPr sz="1200" b="0" i="0">
-                <a:solidFill>
-                  <a:srgbClr val="595959"/>
-                </a:solidFill>
-                <a:latin typeface="Yu Gothic"/>
-                <a:ea typeface="Yu Gothic"/>
-                <a:cs typeface="Yu Gothic"/>
-              </a:rPr>
-              <a:t>28</a:t>
-            </a:r>
-          </a:p>
-        </p:txBody>
-      </p:sp>
-      <p:sp>
-        <p:nvSpPr>
-          <p:cNvPr id="4" name="summary head"/>
-          <p:cNvSpPr/>
-          <p:nvPr/>
-        </p:nvSpPr>
-        <p:spPr>
-          <a:xfrm>
-            <a:off x="548640" y="1005840"/>
-            <a:ext cx="5394960" cy="548640"/>
-          </a:xfrm>
-          <a:prstGeom prst="roundRect">
-            <a:avLst>
-              <a:gd name="adj" fmla="val 12000"/>
-            </a:avLst>
-          </a:prstGeom>
-          <a:solidFill>
-            <a:srgbClr val="0B66C3"/>
-          </a:solidFill>
-          <a:ln>
-            <a:noFill/>
-          </a:ln>
-        </p:spPr>
-        <p:style>
-          <a:lnRef idx="1">
-            <a:schemeClr val="accent1"/>
-          </a:lnRef>
-          <a:fillRef idx="3">
-            <a:schemeClr val="accent1"/>
-          </a:fillRef>
-          <a:effectRef idx="2">
-            <a:schemeClr val="accent1"/>
-          </a:effectRef>
-          <a:fontRef idx="minor">
-            <a:schemeClr val="lt1"/>
-          </a:fontRef>
-        </p:style>
-        <p:txBody>
-          <a:bodyPr rtlCol="0" anchor="ctr" wrap="square" lIns="73152" rIns="73152" tIns="36576" bIns="36576"/>
-          <a:lstStyle/>
-          <a:p>
-            <a:pPr algn="ctr"/>
-            <a:r>
-              <a:rPr sz="2000" b="1" i="0">
-                <a:solidFill>
-                  <a:srgbClr val="FFFFFF"/>
-                </a:solidFill>
-                <a:latin typeface="Yu Gothic"/>
-                <a:ea typeface="Yu Gothic"/>
-                <a:cs typeface="Yu Gothic"/>
-              </a:rPr>
-              <a:t>まとめ</a:t>
-            </a:r>
-          </a:p>
-        </p:txBody>
-      </p:sp>
-      <p:sp>
-        <p:nvSpPr>
-          <p:cNvPr id="5" name="TextBox 4"/>
-          <p:cNvSpPr txBox="1"/>
-          <p:nvPr/>
-        </p:nvSpPr>
-        <p:spPr>
-          <a:xfrm>
-            <a:off x="548640" y="1691640"/>
-            <a:ext cx="5394960" cy="2743200"/>
-          </a:xfrm>
-          <a:prstGeom prst="rect">
-            <a:avLst/>
-          </a:prstGeom>
-          <a:noFill/>
-        </p:spPr>
-        <p:txBody>
-          <a:bodyPr wrap="square" anchor="t" lIns="45720" rIns="45720" tIns="27432" bIns="27432">
-            <a:spAutoFit/>
-          </a:bodyPr>
-          <a:lstStyle/>
-          <a:p>
-            <a:pPr algn="l" marL="274320" indent="-256032">
-              <a:spcAft>
-                <a:spcPts val="600"/>
-              </a:spcAft>
-              <a:buChar char="•"/>
-            </a:pPr>
-            <a:r>
-              <a:rPr sz="1600" b="0" i="0">
-                <a:solidFill>
-                  <a:srgbClr val="1A1A1A"/>
-                </a:solidFill>
-                <a:latin typeface="Yu Gothic"/>
-                <a:ea typeface="Yu Gothic"/>
-                <a:cs typeface="Yu Gothic"/>
-              </a:rPr>
-              <a:t>RECAP と STEAM は評価者が違う同じ型（advantage 条件付き学習）。RL Token は、オンライン RL で行動を洗練する</a:t>
-            </a:r>
-          </a:p>
-          <a:p>
-            <a:pPr algn="l" marL="274320" indent="-256032">
-              <a:spcAft>
-                <a:spcPts val="600"/>
-              </a:spcAft>
-              <a:buChar char="•"/>
-            </a:pPr>
-            <a:r>
-              <a:rPr sz="1600" b="0" i="0">
-                <a:solidFill>
-                  <a:srgbClr val="1A1A1A"/>
-                </a:solidFill>
-                <a:latin typeface="Yu Gothic"/>
-                <a:ea typeface="Yu Gothic"/>
-                <a:cs typeface="Yu Gothic"/>
-              </a:rPr>
-              <a:t>smolVLA では </a:t>
-            </a:r>
-            <a:r>
-              <a:rPr sz="1600" b="1" i="0">
-                <a:solidFill>
-                  <a:srgbClr val="1A1A1A"/>
-                </a:solidFill>
-                <a:latin typeface="Yu Gothic"/>
-                <a:ea typeface="Yu Gothic"/>
-                <a:cs typeface="Yu Gothic"/>
-              </a:rPr>
-              <a:t>RL Token が最良</a:t>
-            </a:r>
-            <a:r>
-              <a:rPr sz="1600" b="0" i="0">
-                <a:solidFill>
-                  <a:srgbClr val="1A1A1A"/>
-                </a:solidFill>
-                <a:latin typeface="Yu Gothic"/>
-                <a:ea typeface="Yu Gothic"/>
-                <a:cs typeface="Yu Gothic"/>
-              </a:rPr>
-              <a:t>（0.40 → 0.68）</a:t>
-            </a:r>
-          </a:p>
-          <a:p>
-            <a:pPr algn="l" marL="274320" indent="-256032">
-              <a:spcAft>
-                <a:spcPts val="600"/>
-              </a:spcAft>
-              <a:buChar char="•"/>
-            </a:pPr>
-            <a:r>
-              <a:rPr sz="1600" b="0" i="0">
-                <a:solidFill>
-                  <a:srgbClr val="1A1A1A"/>
-                </a:solidFill>
-                <a:latin typeface="Yu Gothic"/>
-                <a:ea typeface="Yu Gothic"/>
-                <a:cs typeface="Yu Gothic"/>
-              </a:rPr>
-              <a:t>RECAP・STEAM は、Step4 の途中段階の最良値で 0.50〜0.52。ベースとの差は、有意とは言えない</a:t>
-            </a:r>
-          </a:p>
-          <a:p>
-            <a:pPr algn="l" marL="274320" indent="-256032">
-              <a:spcAft>
-                <a:spcPts val="600"/>
-              </a:spcAft>
-              <a:buChar char="•"/>
-            </a:pPr>
-            <a:r>
-              <a:rPr sz="1600" b="0" i="0">
-                <a:solidFill>
-                  <a:srgbClr val="1A1A1A"/>
-                </a:solidFill>
-                <a:latin typeface="Yu Gothic"/>
-                <a:ea typeface="Yu Gothic"/>
-                <a:cs typeface="Yu Gothic"/>
-              </a:rPr>
-              <a:t>成功で打ち切る収集設計が、価値・critic の信号に重要</a:t>
-            </a:r>
-          </a:p>
-        </p:txBody>
-      </p:sp>
-      <p:sp>
-        <p:nvSpPr>
-          <p:cNvPr id="6" name="future head"/>
-          <p:cNvSpPr/>
-          <p:nvPr/>
-        </p:nvSpPr>
-        <p:spPr>
-          <a:xfrm>
-            <a:off x="6217920" y="1005840"/>
-            <a:ext cx="5394960" cy="548640"/>
-          </a:xfrm>
-          <a:prstGeom prst="roundRect">
-            <a:avLst>
-              <a:gd name="adj" fmla="val 12000"/>
-            </a:avLst>
-          </a:prstGeom>
-          <a:solidFill>
-            <a:srgbClr val="2E8B57"/>
-          </a:solidFill>
-          <a:ln>
-            <a:noFill/>
-          </a:ln>
-        </p:spPr>
-        <p:style>
-          <a:lnRef idx="1">
-            <a:schemeClr val="accent1"/>
-          </a:lnRef>
-          <a:fillRef idx="3">
-            <a:schemeClr val="accent1"/>
-          </a:fillRef>
-          <a:effectRef idx="2">
-            <a:schemeClr val="accent1"/>
-          </a:effectRef>
-          <a:fontRef idx="minor">
-            <a:schemeClr val="lt1"/>
-          </a:fontRef>
-        </p:style>
-        <p:txBody>
-          <a:bodyPr rtlCol="0" anchor="ctr" wrap="square" lIns="73152" rIns="73152" tIns="36576" bIns="36576"/>
-          <a:lstStyle/>
-          <a:p>
-            <a:pPr algn="ctr"/>
-            <a:r>
-              <a:rPr sz="2000" b="1" i="0">
-                <a:solidFill>
-                  <a:srgbClr val="FFFFFF"/>
-                </a:solidFill>
-                <a:latin typeface="Yu Gothic"/>
-                <a:ea typeface="Yu Gothic"/>
-                <a:cs typeface="Yu Gothic"/>
-              </a:rPr>
-              <a:t>今後</a:t>
-            </a:r>
-          </a:p>
-        </p:txBody>
-      </p:sp>
-      <p:sp>
-        <p:nvSpPr>
-          <p:cNvPr id="7" name="TextBox 6"/>
-          <p:cNvSpPr txBox="1"/>
-          <p:nvPr/>
-        </p:nvSpPr>
-        <p:spPr>
-          <a:xfrm>
-            <a:off x="6217920" y="1691640"/>
-            <a:ext cx="5394960" cy="2743200"/>
-          </a:xfrm>
-          <a:prstGeom prst="rect">
-            <a:avLst/>
-          </a:prstGeom>
-          <a:noFill/>
-        </p:spPr>
-        <p:txBody>
-          <a:bodyPr wrap="square" anchor="t" lIns="45720" rIns="45720" tIns="27432" bIns="27432">
-            <a:spAutoFit/>
-          </a:bodyPr>
-          <a:lstStyle/>
-          <a:p>
-            <a:pPr algn="l" marL="274320" indent="-256032">
-              <a:spcAft>
-                <a:spcPts val="600"/>
-              </a:spcAft>
-              <a:buChar char="•"/>
-            </a:pPr>
-            <a:r>
-              <a:rPr sz="1600" b="0" i="0">
-                <a:solidFill>
-                  <a:srgbClr val="1A1A1A"/>
-                </a:solidFill>
-                <a:latin typeface="Yu Gothic"/>
-                <a:ea typeface="Yu Gothic"/>
-                <a:cs typeface="Yu Gothic"/>
-              </a:rPr>
-              <a:t>RECAP・STEAM の Step4 を、本学習（30,000 step）まで進める</a:t>
-            </a:r>
-          </a:p>
-          <a:p>
-            <a:pPr algn="l" marL="274320" indent="-256032">
-              <a:spcAft>
-                <a:spcPts val="600"/>
-              </a:spcAft>
-              <a:buChar char="•"/>
-            </a:pPr>
-            <a:r>
-              <a:rPr sz="1600" b="0" i="0">
-                <a:solidFill>
-                  <a:srgbClr val="1A1A1A"/>
-                </a:solidFill>
-                <a:latin typeface="Yu Gothic"/>
-                <a:ea typeface="Yu Gothic"/>
-                <a:cs typeface="Yu Gothic"/>
-              </a:rPr>
-              <a:t>STEAM の critic のアンサンブルを増やし、未知データでの精度を上げる</a:t>
-            </a:r>
-          </a:p>
-          <a:p>
-            <a:pPr algn="l" marL="274320" indent="-256032">
-              <a:spcAft>
-                <a:spcPts val="600"/>
-              </a:spcAft>
-              <a:buChar char="•"/>
-            </a:pPr>
-            <a:r>
-              <a:rPr sz="1600" b="0" i="0">
-                <a:solidFill>
-                  <a:srgbClr val="1A1A1A"/>
-                </a:solidFill>
-                <a:latin typeface="Yu Gothic"/>
-                <a:ea typeface="Yu Gothic"/>
-                <a:cs typeface="Yu Gothic"/>
-              </a:rPr>
-              <a:t>評価を 100 エピソード以上にして、標準誤差を縮める</a:t>
-            </a:r>
-          </a:p>
-          <a:p>
-            <a:pPr algn="l" marL="274320" indent="-256032">
-              <a:spcAft>
-                <a:spcPts val="600"/>
-              </a:spcAft>
-              <a:buChar char="•"/>
-            </a:pPr>
-            <a:r>
-              <a:rPr sz="1600" b="0" i="0">
-                <a:solidFill>
-                  <a:srgbClr val="1A1A1A"/>
-                </a:solidFill>
-                <a:latin typeface="Yu Gothic"/>
-                <a:ea typeface="Yu Gothic"/>
-                <a:cs typeface="Yu Gothic"/>
-              </a:rPr>
-              <a:t>RL Token を、LIBERO-10 の他のタスクに広げる</a:t>
-            </a:r>
-          </a:p>
-        </p:txBody>
-      </p:sp>
-      <p:sp>
-        <p:nvSpPr>
-          <p:cNvPr id="8" name="result ベース"/>
-          <p:cNvSpPr/>
-          <p:nvPr/>
-        </p:nvSpPr>
-        <p:spPr>
-          <a:xfrm>
-            <a:off x="548640" y="4434840"/>
-            <a:ext cx="2606040" cy="1097280"/>
-          </a:xfrm>
-          <a:prstGeom prst="roundRect">
-            <a:avLst>
-              <a:gd name="adj" fmla="val 12000"/>
-            </a:avLst>
-          </a:prstGeom>
-          <a:solidFill>
-            <a:srgbClr val="BFBFBF"/>
-          </a:solidFill>
-          <a:ln>
-            <a:noFill/>
-          </a:ln>
-        </p:spPr>
-        <p:style>
-          <a:lnRef idx="1">
-            <a:schemeClr val="accent1"/>
-          </a:lnRef>
-          <a:fillRef idx="3">
-            <a:schemeClr val="accent1"/>
-          </a:fillRef>
-          <a:effectRef idx="2">
-            <a:schemeClr val="accent1"/>
-          </a:effectRef>
-          <a:fontRef idx="minor">
-            <a:schemeClr val="lt1"/>
-          </a:fontRef>
-        </p:style>
-        <p:txBody>
-          <a:bodyPr rtlCol="0" anchor="ctr" wrap="square" lIns="73152" rIns="73152" tIns="36576" bIns="36576"/>
-          <a:lstStyle/>
-          <a:p>
-            <a:pPr algn="ctr"/>
-            <a:r>
-              <a:rPr sz="3200" b="1" i="0">
-                <a:solidFill>
-                  <a:srgbClr val="1A1A1A"/>
-                </a:solidFill>
-                <a:latin typeface="Yu Gothic"/>
-                <a:ea typeface="Yu Gothic"/>
-                <a:cs typeface="Yu Gothic"/>
-              </a:rPr>
-              <a:t>0.40</a:t>
-            </a:r>
-          </a:p>
-          <a:p>
-            <a:pPr algn="ctr"/>
-            <a:r>
-              <a:rPr sz="1500" b="0" i="0">
-                <a:solidFill>
-                  <a:srgbClr val="1A1A1A"/>
-                </a:solidFill>
-                <a:latin typeface="Yu Gothic"/>
-                <a:ea typeface="Yu Gothic"/>
-                <a:cs typeface="Yu Gothic"/>
-              </a:rPr>
-              <a:t>ベース</a:t>
-            </a:r>
-          </a:p>
-        </p:txBody>
-      </p:sp>
-      <p:sp>
-        <p:nvSpPr>
-          <p:cNvPr id="9" name="result RECAP"/>
-          <p:cNvSpPr/>
-          <p:nvPr/>
-        </p:nvSpPr>
-        <p:spPr>
-          <a:xfrm>
-            <a:off x="3337560" y="4434840"/>
-            <a:ext cx="2606040" cy="1097280"/>
-          </a:xfrm>
-          <a:prstGeom prst="roundRect">
-            <a:avLst>
-              <a:gd name="adj" fmla="val 12000"/>
-            </a:avLst>
-          </a:prstGeom>
-          <a:solidFill>
-            <a:srgbClr val="6B8BB3"/>
-          </a:solidFill>
-          <a:ln>
-            <a:noFill/>
-          </a:ln>
-        </p:spPr>
-        <p:style>
-          <a:lnRef idx="1">
-            <a:schemeClr val="accent1"/>
-          </a:lnRef>
-          <a:fillRef idx="3">
-            <a:schemeClr val="accent1"/>
-          </a:fillRef>
-          <a:effectRef idx="2">
-            <a:schemeClr val="accent1"/>
-          </a:effectRef>
-          <a:fontRef idx="minor">
-            <a:schemeClr val="lt1"/>
-          </a:fontRef>
-        </p:style>
-        <p:txBody>
-          <a:bodyPr rtlCol="0" anchor="ctr" wrap="square" lIns="73152" rIns="73152" tIns="36576" bIns="36576"/>
-          <a:lstStyle/>
-          <a:p>
-            <a:pPr algn="ctr"/>
-            <a:r>
-              <a:rPr sz="3200" b="1" i="0">
-                <a:solidFill>
-                  <a:srgbClr val="FFFFFF"/>
-                </a:solidFill>
-                <a:latin typeface="Yu Gothic"/>
-                <a:ea typeface="Yu Gothic"/>
-                <a:cs typeface="Yu Gothic"/>
-              </a:rPr>
-              <a:t>0.50</a:t>
-            </a:r>
-          </a:p>
-          <a:p>
-            <a:pPr algn="ctr"/>
-            <a:r>
-              <a:rPr sz="1500" b="0" i="0">
-                <a:solidFill>
-                  <a:srgbClr val="FFFFFF"/>
-                </a:solidFill>
-                <a:latin typeface="Yu Gothic"/>
-                <a:ea typeface="Yu Gothic"/>
-                <a:cs typeface="Yu Gothic"/>
-              </a:rPr>
-              <a:t>RECAP</a:t>
-            </a:r>
-          </a:p>
-        </p:txBody>
-      </p:sp>
-      <p:sp>
-        <p:nvSpPr>
-          <p:cNvPr id="10" name="result STEAM"/>
-          <p:cNvSpPr/>
-          <p:nvPr/>
-        </p:nvSpPr>
-        <p:spPr>
-          <a:xfrm>
-            <a:off x="6126479" y="4434840"/>
-            <a:ext cx="2606040" cy="1097280"/>
-          </a:xfrm>
-          <a:prstGeom prst="roundRect">
-            <a:avLst>
-              <a:gd name="adj" fmla="val 12000"/>
-            </a:avLst>
-          </a:prstGeom>
-          <a:solidFill>
-            <a:srgbClr val="6B8BB3"/>
-          </a:solidFill>
-          <a:ln>
-            <a:noFill/>
-          </a:ln>
-        </p:spPr>
-        <p:style>
-          <a:lnRef idx="1">
-            <a:schemeClr val="accent1"/>
-          </a:lnRef>
-          <a:fillRef idx="3">
-            <a:schemeClr val="accent1"/>
-          </a:fillRef>
-          <a:effectRef idx="2">
-            <a:schemeClr val="accent1"/>
-          </a:effectRef>
-          <a:fontRef idx="minor">
-            <a:schemeClr val="lt1"/>
-          </a:fontRef>
-        </p:style>
-        <p:txBody>
-          <a:bodyPr rtlCol="0" anchor="ctr" wrap="square" lIns="73152" rIns="73152" tIns="36576" bIns="36576"/>
-          <a:lstStyle/>
-          <a:p>
-            <a:pPr algn="ctr"/>
-            <a:r>
-              <a:rPr sz="3200" b="1" i="0">
-                <a:solidFill>
-                  <a:srgbClr val="FFFFFF"/>
-                </a:solidFill>
-                <a:latin typeface="Yu Gothic"/>
-                <a:ea typeface="Yu Gothic"/>
-                <a:cs typeface="Yu Gothic"/>
-              </a:rPr>
-              <a:t>0.52</a:t>
-            </a:r>
-          </a:p>
-          <a:p>
-            <a:pPr algn="ctr"/>
-            <a:r>
-              <a:rPr sz="1500" b="0" i="0">
-                <a:solidFill>
-                  <a:srgbClr val="FFFFFF"/>
-                </a:solidFill>
-                <a:latin typeface="Yu Gothic"/>
-                <a:ea typeface="Yu Gothic"/>
-                <a:cs typeface="Yu Gothic"/>
-              </a:rPr>
-              <a:t>STEAM</a:t>
-            </a:r>
-          </a:p>
-        </p:txBody>
-      </p:sp>
-      <p:sp>
-        <p:nvSpPr>
-          <p:cNvPr id="11" name="result RL Token"/>
-          <p:cNvSpPr/>
-          <p:nvPr/>
-        </p:nvSpPr>
-        <p:spPr>
-          <a:xfrm>
-            <a:off x="8915399" y="4434840"/>
-            <a:ext cx="2606040" cy="1097280"/>
-          </a:xfrm>
-          <a:prstGeom prst="roundRect">
-            <a:avLst>
-              <a:gd name="adj" fmla="val 12000"/>
-            </a:avLst>
-          </a:prstGeom>
-          <a:solidFill>
-            <a:srgbClr val="2E8B57"/>
-          </a:solidFill>
-          <a:ln>
-            <a:noFill/>
-          </a:ln>
-        </p:spPr>
-        <p:style>
-          <a:lnRef idx="1">
-            <a:schemeClr val="accent1"/>
-          </a:lnRef>
-          <a:fillRef idx="3">
-            <a:schemeClr val="accent1"/>
-          </a:fillRef>
-          <a:effectRef idx="2">
-            <a:schemeClr val="accent1"/>
-          </a:effectRef>
-          <a:fontRef idx="minor">
-            <a:schemeClr val="lt1"/>
-          </a:fontRef>
-        </p:style>
-        <p:txBody>
-          <a:bodyPr rtlCol="0" anchor="ctr" wrap="square" lIns="73152" rIns="73152" tIns="36576" bIns="36576"/>
-          <a:lstStyle/>
-          <a:p>
-            <a:pPr algn="ctr"/>
-            <a:r>
-              <a:rPr sz="3200" b="1" i="0">
-                <a:solidFill>
-                  <a:srgbClr val="FFFFFF"/>
-                </a:solidFill>
-                <a:latin typeface="Yu Gothic"/>
-                <a:ea typeface="Yu Gothic"/>
-                <a:cs typeface="Yu Gothic"/>
-              </a:rPr>
-              <a:t>0.68</a:t>
-            </a:r>
-          </a:p>
-          <a:p>
-            <a:pPr algn="ctr"/>
-            <a:r>
-              <a:rPr sz="1500" b="0" i="0">
-                <a:solidFill>
-                  <a:srgbClr val="FFFFFF"/>
-                </a:solidFill>
-                <a:latin typeface="Yu Gothic"/>
-                <a:ea typeface="Yu Gothic"/>
-                <a:cs typeface="Yu Gothic"/>
-              </a:rPr>
-              <a:t>RL Token</a:t>
-            </a:r>
-          </a:p>
-        </p:txBody>
-      </p:sp>
-      <p:sp>
-        <p:nvSpPr>
-          <p:cNvPr id="12" name="key point"/>
-          <p:cNvSpPr/>
-          <p:nvPr/>
-        </p:nvSpPr>
-        <p:spPr>
-          <a:xfrm>
-            <a:off x="548640" y="5715000"/>
-            <a:ext cx="11064240" cy="640080"/>
-          </a:xfrm>
-          <a:prstGeom prst="roundRect">
-            <a:avLst>
-              <a:gd name="adj" fmla="val 18000"/>
-            </a:avLst>
-          </a:prstGeom>
-          <a:solidFill>
-            <a:srgbClr val="E8F1FB"/>
-          </a:solidFill>
-          <a:ln w="15875">
-            <a:solidFill>
-              <a:srgbClr val="0B66C3"/>
-            </a:solidFill>
-          </a:ln>
-        </p:spPr>
-        <p:style>
-          <a:lnRef idx="1">
-            <a:schemeClr val="accent1"/>
-          </a:lnRef>
-          <a:fillRef idx="3">
-            <a:schemeClr val="accent1"/>
-          </a:fillRef>
-          <a:effectRef idx="2">
-            <a:schemeClr val="accent1"/>
-          </a:effectRef>
-          <a:fontRef idx="minor">
-            <a:schemeClr val="lt1"/>
-          </a:fontRef>
-        </p:style>
-        <p:txBody>
-          <a:bodyPr rtlCol="0" anchor="ctr" wrap="square" lIns="228600" rIns="228600"/>
-          <a:lstStyle/>
-          <a:p>
-            <a:pPr algn="l"/>
-            <a:r>
-              <a:rPr sz="1600" b="1" i="0">
-                <a:solidFill>
-                  <a:srgbClr val="0B66C3"/>
-                </a:solidFill>
-                <a:latin typeface="Yu Gothic"/>
-                <a:ea typeface="Yu Gothic"/>
-                <a:cs typeface="Yu Gothic"/>
-              </a:rPr>
-              <a:t>→ 最良は RL Token（0.68）。RECAP・STEAM は、学習を進めて、同じ条件で再評価する</a:t>
+              <a:t>→ RECAP と STEAM は評価者だけが違い、RL Token は行動を直す。目的は補完的</a:t>
             </a:r>
           </a:p>
         </p:txBody>
@@ -29014,6 +29473,789 @@
 </p:sld>
 </file>
 
+<file path=ppt/slides/slide30.xml><?xml version="1.0" encoding="utf-8"?>
+<p:sld xmlns:a="http://schemas.openxmlformats.org/drawingml/2006/main" xmlns:p="http://schemas.openxmlformats.org/presentationml/2006/main" xmlns:r="http://schemas.openxmlformats.org/officeDocument/2006/relationships">
+  <p:cSld>
+    <p:spTree>
+      <p:nvGrpSpPr>
+        <p:cNvPr id="1" name=""/>
+        <p:cNvGrpSpPr/>
+        <p:nvPr/>
+      </p:nvGrpSpPr>
+      <p:grpSpPr/>
+      <p:sp>
+        <p:nvSpPr>
+          <p:cNvPr id="2" name="title band"/>
+          <p:cNvSpPr/>
+          <p:nvPr/>
+        </p:nvSpPr>
+        <p:spPr>
+          <a:xfrm>
+            <a:off x="0" y="0"/>
+            <a:ext cx="12191695" cy="777240"/>
+          </a:xfrm>
+          <a:prstGeom prst="rect">
+            <a:avLst/>
+          </a:prstGeom>
+          <a:solidFill>
+            <a:srgbClr val="0B66C3"/>
+          </a:solidFill>
+          <a:ln>
+            <a:noFill/>
+          </a:ln>
+        </p:spPr>
+        <p:style>
+          <a:lnRef idx="1">
+            <a:schemeClr val="accent1"/>
+          </a:lnRef>
+          <a:fillRef idx="3">
+            <a:schemeClr val="accent1"/>
+          </a:fillRef>
+          <a:effectRef idx="2">
+            <a:schemeClr val="accent1"/>
+          </a:effectRef>
+          <a:fontRef idx="minor">
+            <a:schemeClr val="lt1"/>
+          </a:fontRef>
+        </p:style>
+        <p:txBody>
+          <a:bodyPr rtlCol="0" anchor="ctr"/>
+          <a:lstStyle/>
+          <a:p>
+            <a:pPr algn="ctr"/>
+            <a:r>
+              <a:rPr sz="2800" b="1" i="0">
+                <a:solidFill>
+                  <a:srgbClr val="FFFFFF"/>
+                </a:solidFill>
+                <a:latin typeface="Yu Gothic"/>
+                <a:ea typeface="Yu Gothic"/>
+                <a:cs typeface="Yu Gothic"/>
+              </a:rPr>
+              <a:t>まとめと今後</a:t>
+            </a:r>
+          </a:p>
+        </p:txBody>
+      </p:sp>
+      <p:sp>
+        <p:nvSpPr>
+          <p:cNvPr id="3" name="page number"/>
+          <p:cNvSpPr txBox="1"/>
+          <p:nvPr/>
+        </p:nvSpPr>
+        <p:spPr>
+          <a:xfrm>
+            <a:off x="11155680" y="6446520"/>
+            <a:ext cx="822960" cy="320040"/>
+          </a:xfrm>
+          <a:prstGeom prst="rect">
+            <a:avLst/>
+          </a:prstGeom>
+          <a:noFill/>
+        </p:spPr>
+        <p:txBody>
+          <a:bodyPr wrap="square" anchor="t" lIns="45720" rIns="45720" tIns="27432" bIns="27432">
+            <a:spAutoFit/>
+          </a:bodyPr>
+          <a:lstStyle/>
+          <a:p>
+            <a:pPr algn="r">
+              <a:spcAft>
+                <a:spcPts val="600"/>
+              </a:spcAft>
+            </a:pPr>
+            <a:r>
+              <a:rPr sz="1200" b="0" i="0">
+                <a:solidFill>
+                  <a:srgbClr val="595959"/>
+                </a:solidFill>
+                <a:latin typeface="Yu Gothic"/>
+                <a:ea typeface="Yu Gothic"/>
+                <a:cs typeface="Yu Gothic"/>
+              </a:rPr>
+              <a:t>30</a:t>
+            </a:r>
+          </a:p>
+        </p:txBody>
+      </p:sp>
+      <p:sp>
+        <p:nvSpPr>
+          <p:cNvPr id="4" name="summary head"/>
+          <p:cNvSpPr/>
+          <p:nvPr/>
+        </p:nvSpPr>
+        <p:spPr>
+          <a:xfrm>
+            <a:off x="548640" y="1005840"/>
+            <a:ext cx="5394960" cy="548640"/>
+          </a:xfrm>
+          <a:prstGeom prst="roundRect">
+            <a:avLst>
+              <a:gd name="adj" fmla="val 12000"/>
+            </a:avLst>
+          </a:prstGeom>
+          <a:solidFill>
+            <a:srgbClr val="0B66C3"/>
+          </a:solidFill>
+          <a:ln>
+            <a:noFill/>
+          </a:ln>
+        </p:spPr>
+        <p:style>
+          <a:lnRef idx="1">
+            <a:schemeClr val="accent1"/>
+          </a:lnRef>
+          <a:fillRef idx="3">
+            <a:schemeClr val="accent1"/>
+          </a:fillRef>
+          <a:effectRef idx="2">
+            <a:schemeClr val="accent1"/>
+          </a:effectRef>
+          <a:fontRef idx="minor">
+            <a:schemeClr val="lt1"/>
+          </a:fontRef>
+        </p:style>
+        <p:txBody>
+          <a:bodyPr rtlCol="0" anchor="ctr" wrap="square" lIns="73152" rIns="73152" tIns="36576" bIns="36576"/>
+          <a:lstStyle/>
+          <a:p>
+            <a:pPr algn="ctr"/>
+            <a:r>
+              <a:rPr sz="2000" b="1" i="0">
+                <a:solidFill>
+                  <a:srgbClr val="FFFFFF"/>
+                </a:solidFill>
+                <a:latin typeface="Yu Gothic"/>
+                <a:ea typeface="Yu Gothic"/>
+                <a:cs typeface="Yu Gothic"/>
+              </a:rPr>
+              <a:t>まとめ</a:t>
+            </a:r>
+          </a:p>
+        </p:txBody>
+      </p:sp>
+      <p:sp>
+        <p:nvSpPr>
+          <p:cNvPr id="5" name="TextBox 4"/>
+          <p:cNvSpPr txBox="1"/>
+          <p:nvPr/>
+        </p:nvSpPr>
+        <p:spPr>
+          <a:xfrm>
+            <a:off x="548640" y="1691640"/>
+            <a:ext cx="5394960" cy="2743200"/>
+          </a:xfrm>
+          <a:prstGeom prst="rect">
+            <a:avLst/>
+          </a:prstGeom>
+          <a:noFill/>
+        </p:spPr>
+        <p:txBody>
+          <a:bodyPr wrap="square" anchor="t" lIns="45720" rIns="45720" tIns="27432" bIns="27432">
+            <a:spAutoFit/>
+          </a:bodyPr>
+          <a:lstStyle/>
+          <a:p>
+            <a:pPr algn="l" marL="274320" indent="-256032">
+              <a:spcAft>
+                <a:spcPts val="600"/>
+              </a:spcAft>
+              <a:buChar char="•"/>
+            </a:pPr>
+            <a:r>
+              <a:rPr sz="1600" b="0" i="0">
+                <a:solidFill>
+                  <a:srgbClr val="1A1A1A"/>
+                </a:solidFill>
+                <a:latin typeface="Yu Gothic"/>
+                <a:ea typeface="Yu Gothic"/>
+                <a:cs typeface="Yu Gothic"/>
+              </a:rPr>
+              <a:t>RECAP と STEAM は評価者が違う（advantage 条件付き学習）。RL Token は、オンライン RL で行動を洗練する</a:t>
+            </a:r>
+          </a:p>
+          <a:p>
+            <a:pPr algn="l" marL="274320" indent="-256032">
+              <a:spcAft>
+                <a:spcPts val="600"/>
+              </a:spcAft>
+              <a:buChar char="•"/>
+            </a:pPr>
+            <a:r>
+              <a:rPr sz="1600" b="0" i="0">
+                <a:solidFill>
+                  <a:srgbClr val="1A1A1A"/>
+                </a:solidFill>
+                <a:latin typeface="Yu Gothic"/>
+                <a:ea typeface="Yu Gothic"/>
+                <a:cs typeface="Yu Gothic"/>
+              </a:rPr>
+              <a:t>smolVLA では </a:t>
+            </a:r>
+            <a:r>
+              <a:rPr sz="1600" b="1" i="0">
+                <a:solidFill>
+                  <a:srgbClr val="1A1A1A"/>
+                </a:solidFill>
+                <a:latin typeface="Yu Gothic"/>
+                <a:ea typeface="Yu Gothic"/>
+                <a:cs typeface="Yu Gothic"/>
+              </a:rPr>
+              <a:t>RL Token が最良</a:t>
+            </a:r>
+            <a:r>
+              <a:rPr sz="1600" b="0" i="0">
+                <a:solidFill>
+                  <a:srgbClr val="1A1A1A"/>
+                </a:solidFill>
+                <a:latin typeface="Yu Gothic"/>
+                <a:ea typeface="Yu Gothic"/>
+                <a:cs typeface="Yu Gothic"/>
+              </a:rPr>
+              <a:t>（0.40 → 0.68）</a:t>
+            </a:r>
+          </a:p>
+          <a:p>
+            <a:pPr algn="l" marL="274320" indent="-256032">
+              <a:spcAft>
+                <a:spcPts val="600"/>
+              </a:spcAft>
+              <a:buChar char="•"/>
+            </a:pPr>
+            <a:r>
+              <a:rPr sz="1600" b="0" i="0">
+                <a:solidFill>
+                  <a:srgbClr val="1A1A1A"/>
+                </a:solidFill>
+                <a:latin typeface="Yu Gothic"/>
+                <a:ea typeface="Yu Gothic"/>
+                <a:cs typeface="Yu Gothic"/>
+              </a:rPr>
+              <a:t>RECAP・STEAM は、Step4 の途中段階の最良値で 0.50〜0.52。ベースとの差は、有意とは言えない</a:t>
+            </a:r>
+          </a:p>
+          <a:p>
+            <a:pPr algn="l" marL="274320" indent="-256032">
+              <a:spcAft>
+                <a:spcPts val="600"/>
+              </a:spcAft>
+              <a:buChar char="•"/>
+            </a:pPr>
+            <a:r>
+              <a:rPr sz="1600" b="0" i="0">
+                <a:solidFill>
+                  <a:srgbClr val="1A1A1A"/>
+                </a:solidFill>
+                <a:latin typeface="Yu Gothic"/>
+                <a:ea typeface="Yu Gothic"/>
+                <a:cs typeface="Yu Gothic"/>
+              </a:rPr>
+              <a:t>成功で打ち切る収集設計が、価値・critic の信号に重要</a:t>
+            </a:r>
+          </a:p>
+        </p:txBody>
+      </p:sp>
+      <p:sp>
+        <p:nvSpPr>
+          <p:cNvPr id="6" name="future head"/>
+          <p:cNvSpPr/>
+          <p:nvPr/>
+        </p:nvSpPr>
+        <p:spPr>
+          <a:xfrm>
+            <a:off x="6217920" y="1005840"/>
+            <a:ext cx="5394960" cy="548640"/>
+          </a:xfrm>
+          <a:prstGeom prst="roundRect">
+            <a:avLst>
+              <a:gd name="adj" fmla="val 12000"/>
+            </a:avLst>
+          </a:prstGeom>
+          <a:solidFill>
+            <a:srgbClr val="2E8B57"/>
+          </a:solidFill>
+          <a:ln>
+            <a:noFill/>
+          </a:ln>
+        </p:spPr>
+        <p:style>
+          <a:lnRef idx="1">
+            <a:schemeClr val="accent1"/>
+          </a:lnRef>
+          <a:fillRef idx="3">
+            <a:schemeClr val="accent1"/>
+          </a:fillRef>
+          <a:effectRef idx="2">
+            <a:schemeClr val="accent1"/>
+          </a:effectRef>
+          <a:fontRef idx="minor">
+            <a:schemeClr val="lt1"/>
+          </a:fontRef>
+        </p:style>
+        <p:txBody>
+          <a:bodyPr rtlCol="0" anchor="ctr" wrap="square" lIns="73152" rIns="73152" tIns="36576" bIns="36576"/>
+          <a:lstStyle/>
+          <a:p>
+            <a:pPr algn="ctr"/>
+            <a:r>
+              <a:rPr sz="2000" b="1" i="0">
+                <a:solidFill>
+                  <a:srgbClr val="FFFFFF"/>
+                </a:solidFill>
+                <a:latin typeface="Yu Gothic"/>
+                <a:ea typeface="Yu Gothic"/>
+                <a:cs typeface="Yu Gothic"/>
+              </a:rPr>
+              <a:t>今後</a:t>
+            </a:r>
+          </a:p>
+        </p:txBody>
+      </p:sp>
+      <p:sp>
+        <p:nvSpPr>
+          <p:cNvPr id="7" name="TextBox 6"/>
+          <p:cNvSpPr txBox="1"/>
+          <p:nvPr/>
+        </p:nvSpPr>
+        <p:spPr>
+          <a:xfrm>
+            <a:off x="6217920" y="1691640"/>
+            <a:ext cx="5394960" cy="2743200"/>
+          </a:xfrm>
+          <a:prstGeom prst="rect">
+            <a:avLst/>
+          </a:prstGeom>
+          <a:noFill/>
+        </p:spPr>
+        <p:txBody>
+          <a:bodyPr wrap="square" anchor="t" lIns="45720" rIns="45720" tIns="27432" bIns="27432">
+            <a:spAutoFit/>
+          </a:bodyPr>
+          <a:lstStyle/>
+          <a:p>
+            <a:pPr algn="l" marL="274320" indent="-256032">
+              <a:spcAft>
+                <a:spcPts val="600"/>
+              </a:spcAft>
+              <a:buChar char="•"/>
+            </a:pPr>
+            <a:r>
+              <a:rPr sz="1600" b="0" i="0">
+                <a:solidFill>
+                  <a:srgbClr val="1A1A1A"/>
+                </a:solidFill>
+                <a:latin typeface="Yu Gothic"/>
+                <a:ea typeface="Yu Gothic"/>
+                <a:cs typeface="Yu Gothic"/>
+              </a:rPr>
+              <a:t>RECAP・STEAM の Step4 を、本学習（30,000 step）まで進める</a:t>
+            </a:r>
+          </a:p>
+          <a:p>
+            <a:pPr algn="l" marL="274320" indent="-256032">
+              <a:spcAft>
+                <a:spcPts val="600"/>
+              </a:spcAft>
+              <a:buChar char="•"/>
+            </a:pPr>
+            <a:r>
+              <a:rPr sz="1600" b="0" i="0">
+                <a:solidFill>
+                  <a:srgbClr val="1A1A1A"/>
+                </a:solidFill>
+                <a:latin typeface="Yu Gothic"/>
+                <a:ea typeface="Yu Gothic"/>
+                <a:cs typeface="Yu Gothic"/>
+              </a:rPr>
+              <a:t>STEAM の critic のアンサンブルを増やし、未知データでの精度を上げる</a:t>
+            </a:r>
+          </a:p>
+          <a:p>
+            <a:pPr algn="l" marL="274320" indent="-256032">
+              <a:spcAft>
+                <a:spcPts val="600"/>
+              </a:spcAft>
+              <a:buChar char="•"/>
+            </a:pPr>
+            <a:r>
+              <a:rPr sz="1600" b="0" i="0">
+                <a:solidFill>
+                  <a:srgbClr val="1A1A1A"/>
+                </a:solidFill>
+                <a:latin typeface="Yu Gothic"/>
+                <a:ea typeface="Yu Gothic"/>
+                <a:cs typeface="Yu Gothic"/>
+              </a:rPr>
+              <a:t>評価を 100 エピソード以上にして、標準誤差を縮める</a:t>
+            </a:r>
+          </a:p>
+          <a:p>
+            <a:pPr algn="l" marL="274320" indent="-256032">
+              <a:spcAft>
+                <a:spcPts val="600"/>
+              </a:spcAft>
+              <a:buChar char="•"/>
+            </a:pPr>
+            <a:r>
+              <a:rPr sz="1600" b="0" i="0">
+                <a:solidFill>
+                  <a:srgbClr val="1A1A1A"/>
+                </a:solidFill>
+                <a:latin typeface="Yu Gothic"/>
+                <a:ea typeface="Yu Gothic"/>
+                <a:cs typeface="Yu Gothic"/>
+              </a:rPr>
+              <a:t>RL Token を、LIBERO-10 の他のタスクに広げる</a:t>
+            </a:r>
+          </a:p>
+        </p:txBody>
+      </p:sp>
+      <p:sp>
+        <p:nvSpPr>
+          <p:cNvPr id="8" name="result ベース"/>
+          <p:cNvSpPr/>
+          <p:nvPr/>
+        </p:nvSpPr>
+        <p:spPr>
+          <a:xfrm>
+            <a:off x="548640" y="4434840"/>
+            <a:ext cx="2606040" cy="1097280"/>
+          </a:xfrm>
+          <a:prstGeom prst="roundRect">
+            <a:avLst>
+              <a:gd name="adj" fmla="val 12000"/>
+            </a:avLst>
+          </a:prstGeom>
+          <a:solidFill>
+            <a:srgbClr val="BFBFBF"/>
+          </a:solidFill>
+          <a:ln>
+            <a:noFill/>
+          </a:ln>
+        </p:spPr>
+        <p:style>
+          <a:lnRef idx="1">
+            <a:schemeClr val="accent1"/>
+          </a:lnRef>
+          <a:fillRef idx="3">
+            <a:schemeClr val="accent1"/>
+          </a:fillRef>
+          <a:effectRef idx="2">
+            <a:schemeClr val="accent1"/>
+          </a:effectRef>
+          <a:fontRef idx="minor">
+            <a:schemeClr val="lt1"/>
+          </a:fontRef>
+        </p:style>
+        <p:txBody>
+          <a:bodyPr rtlCol="0" anchor="ctr" wrap="square" lIns="73152" rIns="73152" tIns="36576" bIns="36576"/>
+          <a:lstStyle/>
+          <a:p>
+            <a:pPr algn="ctr"/>
+            <a:r>
+              <a:rPr sz="3200" b="1" i="0">
+                <a:solidFill>
+                  <a:srgbClr val="1A1A1A"/>
+                </a:solidFill>
+                <a:latin typeface="Yu Gothic"/>
+                <a:ea typeface="Yu Gothic"/>
+                <a:cs typeface="Yu Gothic"/>
+              </a:rPr>
+              <a:t>0.40</a:t>
+            </a:r>
+          </a:p>
+          <a:p>
+            <a:pPr algn="ctr"/>
+            <a:r>
+              <a:rPr sz="1500" b="0" i="0">
+                <a:solidFill>
+                  <a:srgbClr val="1A1A1A"/>
+                </a:solidFill>
+                <a:latin typeface="Yu Gothic"/>
+                <a:ea typeface="Yu Gothic"/>
+                <a:cs typeface="Yu Gothic"/>
+              </a:rPr>
+              <a:t>ベース</a:t>
+            </a:r>
+          </a:p>
+        </p:txBody>
+      </p:sp>
+      <p:sp>
+        <p:nvSpPr>
+          <p:cNvPr id="9" name="result RECAP"/>
+          <p:cNvSpPr/>
+          <p:nvPr/>
+        </p:nvSpPr>
+        <p:spPr>
+          <a:xfrm>
+            <a:off x="3337560" y="4434840"/>
+            <a:ext cx="2606040" cy="1097280"/>
+          </a:xfrm>
+          <a:prstGeom prst="roundRect">
+            <a:avLst>
+              <a:gd name="adj" fmla="val 12000"/>
+            </a:avLst>
+          </a:prstGeom>
+          <a:solidFill>
+            <a:srgbClr val="6B8BB3"/>
+          </a:solidFill>
+          <a:ln>
+            <a:noFill/>
+          </a:ln>
+        </p:spPr>
+        <p:style>
+          <a:lnRef idx="1">
+            <a:schemeClr val="accent1"/>
+          </a:lnRef>
+          <a:fillRef idx="3">
+            <a:schemeClr val="accent1"/>
+          </a:fillRef>
+          <a:effectRef idx="2">
+            <a:schemeClr val="accent1"/>
+          </a:effectRef>
+          <a:fontRef idx="minor">
+            <a:schemeClr val="lt1"/>
+          </a:fontRef>
+        </p:style>
+        <p:txBody>
+          <a:bodyPr rtlCol="0" anchor="ctr" wrap="square" lIns="73152" rIns="73152" tIns="36576" bIns="36576"/>
+          <a:lstStyle/>
+          <a:p>
+            <a:pPr algn="ctr"/>
+            <a:r>
+              <a:rPr sz="3200" b="1" i="0">
+                <a:solidFill>
+                  <a:srgbClr val="FFFFFF"/>
+                </a:solidFill>
+                <a:latin typeface="Yu Gothic"/>
+                <a:ea typeface="Yu Gothic"/>
+                <a:cs typeface="Yu Gothic"/>
+              </a:rPr>
+              <a:t>0.50</a:t>
+            </a:r>
+          </a:p>
+          <a:p>
+            <a:pPr algn="ctr"/>
+            <a:r>
+              <a:rPr sz="1500" b="0" i="0">
+                <a:solidFill>
+                  <a:srgbClr val="FFFFFF"/>
+                </a:solidFill>
+                <a:latin typeface="Yu Gothic"/>
+                <a:ea typeface="Yu Gothic"/>
+                <a:cs typeface="Yu Gothic"/>
+              </a:rPr>
+              <a:t>RECAP</a:t>
+            </a:r>
+          </a:p>
+        </p:txBody>
+      </p:sp>
+      <p:sp>
+        <p:nvSpPr>
+          <p:cNvPr id="10" name="result STEAM"/>
+          <p:cNvSpPr/>
+          <p:nvPr/>
+        </p:nvSpPr>
+        <p:spPr>
+          <a:xfrm>
+            <a:off x="6126479" y="4434840"/>
+            <a:ext cx="2606040" cy="1097280"/>
+          </a:xfrm>
+          <a:prstGeom prst="roundRect">
+            <a:avLst>
+              <a:gd name="adj" fmla="val 12000"/>
+            </a:avLst>
+          </a:prstGeom>
+          <a:solidFill>
+            <a:srgbClr val="6B8BB3"/>
+          </a:solidFill>
+          <a:ln>
+            <a:noFill/>
+          </a:ln>
+        </p:spPr>
+        <p:style>
+          <a:lnRef idx="1">
+            <a:schemeClr val="accent1"/>
+          </a:lnRef>
+          <a:fillRef idx="3">
+            <a:schemeClr val="accent1"/>
+          </a:fillRef>
+          <a:effectRef idx="2">
+            <a:schemeClr val="accent1"/>
+          </a:effectRef>
+          <a:fontRef idx="minor">
+            <a:schemeClr val="lt1"/>
+          </a:fontRef>
+        </p:style>
+        <p:txBody>
+          <a:bodyPr rtlCol="0" anchor="ctr" wrap="square" lIns="73152" rIns="73152" tIns="36576" bIns="36576"/>
+          <a:lstStyle/>
+          <a:p>
+            <a:pPr algn="ctr"/>
+            <a:r>
+              <a:rPr sz="3200" b="1" i="0">
+                <a:solidFill>
+                  <a:srgbClr val="FFFFFF"/>
+                </a:solidFill>
+                <a:latin typeface="Yu Gothic"/>
+                <a:ea typeface="Yu Gothic"/>
+                <a:cs typeface="Yu Gothic"/>
+              </a:rPr>
+              <a:t>0.52</a:t>
+            </a:r>
+          </a:p>
+          <a:p>
+            <a:pPr algn="ctr"/>
+            <a:r>
+              <a:rPr sz="1500" b="0" i="0">
+                <a:solidFill>
+                  <a:srgbClr val="FFFFFF"/>
+                </a:solidFill>
+                <a:latin typeface="Yu Gothic"/>
+                <a:ea typeface="Yu Gothic"/>
+                <a:cs typeface="Yu Gothic"/>
+              </a:rPr>
+              <a:t>STEAM</a:t>
+            </a:r>
+          </a:p>
+        </p:txBody>
+      </p:sp>
+      <p:sp>
+        <p:nvSpPr>
+          <p:cNvPr id="11" name="result RL Token"/>
+          <p:cNvSpPr/>
+          <p:nvPr/>
+        </p:nvSpPr>
+        <p:spPr>
+          <a:xfrm>
+            <a:off x="8915399" y="4434840"/>
+            <a:ext cx="2606040" cy="1097280"/>
+          </a:xfrm>
+          <a:prstGeom prst="roundRect">
+            <a:avLst>
+              <a:gd name="adj" fmla="val 12000"/>
+            </a:avLst>
+          </a:prstGeom>
+          <a:solidFill>
+            <a:srgbClr val="2E8B57"/>
+          </a:solidFill>
+          <a:ln>
+            <a:noFill/>
+          </a:ln>
+        </p:spPr>
+        <p:style>
+          <a:lnRef idx="1">
+            <a:schemeClr val="accent1"/>
+          </a:lnRef>
+          <a:fillRef idx="3">
+            <a:schemeClr val="accent1"/>
+          </a:fillRef>
+          <a:effectRef idx="2">
+            <a:schemeClr val="accent1"/>
+          </a:effectRef>
+          <a:fontRef idx="minor">
+            <a:schemeClr val="lt1"/>
+          </a:fontRef>
+        </p:style>
+        <p:txBody>
+          <a:bodyPr rtlCol="0" anchor="ctr" wrap="square" lIns="73152" rIns="73152" tIns="36576" bIns="36576"/>
+          <a:lstStyle/>
+          <a:p>
+            <a:pPr algn="ctr"/>
+            <a:r>
+              <a:rPr sz="3200" b="1" i="0">
+                <a:solidFill>
+                  <a:srgbClr val="FFFFFF"/>
+                </a:solidFill>
+                <a:latin typeface="Yu Gothic"/>
+                <a:ea typeface="Yu Gothic"/>
+                <a:cs typeface="Yu Gothic"/>
+              </a:rPr>
+              <a:t>0.68</a:t>
+            </a:r>
+          </a:p>
+          <a:p>
+            <a:pPr algn="ctr"/>
+            <a:r>
+              <a:rPr sz="1500" b="0" i="0">
+                <a:solidFill>
+                  <a:srgbClr val="FFFFFF"/>
+                </a:solidFill>
+                <a:latin typeface="Yu Gothic"/>
+                <a:ea typeface="Yu Gothic"/>
+                <a:cs typeface="Yu Gothic"/>
+              </a:rPr>
+              <a:t>RL Token</a:t>
+            </a:r>
+          </a:p>
+        </p:txBody>
+      </p:sp>
+      <p:sp>
+        <p:nvSpPr>
+          <p:cNvPr id="12" name="key point"/>
+          <p:cNvSpPr/>
+          <p:nvPr/>
+        </p:nvSpPr>
+        <p:spPr>
+          <a:xfrm>
+            <a:off x="548640" y="5715000"/>
+            <a:ext cx="11064240" cy="640080"/>
+          </a:xfrm>
+          <a:prstGeom prst="roundRect">
+            <a:avLst>
+              <a:gd name="adj" fmla="val 18000"/>
+            </a:avLst>
+          </a:prstGeom>
+          <a:solidFill>
+            <a:srgbClr val="E8F1FB"/>
+          </a:solidFill>
+          <a:ln w="15875">
+            <a:solidFill>
+              <a:srgbClr val="0B66C3"/>
+            </a:solidFill>
+          </a:ln>
+        </p:spPr>
+        <p:style>
+          <a:lnRef idx="1">
+            <a:schemeClr val="accent1"/>
+          </a:lnRef>
+          <a:fillRef idx="3">
+            <a:schemeClr val="accent1"/>
+          </a:fillRef>
+          <a:effectRef idx="2">
+            <a:schemeClr val="accent1"/>
+          </a:effectRef>
+          <a:fontRef idx="minor">
+            <a:schemeClr val="lt1"/>
+          </a:fontRef>
+        </p:style>
+        <p:txBody>
+          <a:bodyPr rtlCol="0" anchor="ctr" wrap="square" lIns="228600" rIns="228600"/>
+          <a:lstStyle/>
+          <a:p>
+            <a:pPr algn="l"/>
+            <a:r>
+              <a:rPr sz="1600" b="1" i="0">
+                <a:solidFill>
+                  <a:srgbClr val="0B66C3"/>
+                </a:solidFill>
+                <a:latin typeface="Yu Gothic"/>
+                <a:ea typeface="Yu Gothic"/>
+                <a:cs typeface="Yu Gothic"/>
+              </a:rPr>
+              <a:t>→ 最良は RL Token（0.68）。RECAP・STEAM は、学習を進めて、同じ条件で再評価する</a:t>
+            </a:r>
+          </a:p>
+        </p:txBody>
+      </p:sp>
+    </p:spTree>
+  </p:cSld>
+  <p:clrMapOvr>
+    <a:masterClrMapping/>
+  </p:clrMapOvr>
+</p:sld>
+</file>
+
 <file path=ppt/slides/slide4.xml><?xml version="1.0" encoding="utf-8"?>
 <p:sld xmlns:a="http://schemas.openxmlformats.org/drawingml/2006/main" xmlns:p="http://schemas.openxmlformats.org/presentationml/2006/main" xmlns:r="http://schemas.openxmlformats.org/officeDocument/2006/relationships">
   <p:cSld>
@@ -29262,7 +30504,7 @@
                 <a:ea typeface="Yu Gothic"/>
                 <a:cs typeface="Yu Gothic"/>
               </a:rPr>
-              <a:t>: RECAP と STEAM は同じ型（評価者だけが違う）。RL Token は別の型</a:t>
+              <a:t>: RECAP と STEAM は評価者だけが違う。RL Token は、行動を洗練する</a:t>
             </a:r>
           </a:p>
         </p:txBody>
@@ -29378,7 +30620,7 @@
                 <a:ea typeface="Yu Gothic"/>
                 <a:cs typeface="Yu Gothic"/>
               </a:rPr>
-              <a:t>同じ型: 方策の学習目標</a:t>
+              <a:t>方策の学習目標</a:t>
             </a:r>
           </a:p>
           <a:p>
@@ -29508,7 +30750,7 @@
                 <a:ea typeface="Yu Gothic"/>
                 <a:cs typeface="Yu Gothic"/>
               </a:rPr>
-              <a:t>同じ型: 方策の学習目標</a:t>
+              <a:t>方策の学習目標</a:t>
             </a:r>
           </a:p>
           <a:p>
@@ -29638,7 +30880,7 @@
                 <a:ea typeface="Yu Gothic"/>
                 <a:cs typeface="Yu Gothic"/>
               </a:rPr>
-              <a:t>別の型: 行動の洗練</a:t>
+              <a:t>行動の洗練</a:t>
             </a:r>
           </a:p>
           <a:p>
@@ -29710,7 +30952,7 @@
                 <a:ea typeface="Yu Gothic"/>
                 <a:cs typeface="Yu Gothic"/>
               </a:rPr>
-              <a:t>→ RECAP と STEAM は同じ型（評価者だけが違う）。RL Token は、オンラインで行動を洗練する別の型</a:t>
+              <a:t>→ RECAP と STEAM は評価者だけが違う。RL Token は、オンラインで行動を洗練する</a:t>
             </a:r>
           </a:p>
         </p:txBody>
@@ -30964,7 +32206,7 @@
                 <a:ea typeface="Yu Gothic"/>
                 <a:cs typeface="Yu Gothic"/>
               </a:rPr>
-              <a:t>価値と advantage のイメージ</a:t>
+              <a:t>実験設定</a:t>
             </a:r>
           </a:p>
         </p:txBody>
@@ -31010,34 +32252,16 @@
           </a:p>
         </p:txBody>
       </p:sp>
-      <p:graphicFrame>
-        <p:nvGraphicFramePr>
-          <p:cNvPr id="4" name="Chart 3"/>
-          <p:cNvGraphicFramePr>
-            <a:graphicFrameLocks noGrp="1"/>
-          </p:cNvGraphicFramePr>
-          <p:nvPr/>
-        </p:nvGraphicFramePr>
-        <p:xfrm>
-          <a:off x="548640" y="1005840"/>
-          <a:ext cx="6583680" cy="3840480"/>
-        </p:xfrm>
-        <a:graphic>
-          <a:graphicData uri="http://schemas.openxmlformats.org/drawingml/2006/chart">
-            <c:chart xmlns:c="http://schemas.openxmlformats.org/drawingml/2006/chart" r:id="rId3"/>
-          </a:graphicData>
-        </a:graphic>
-      </p:graphicFrame>
-      <p:sp>
-        <p:nvSpPr>
-          <p:cNvPr id="5" name="TextBox 4"/>
+      <p:sp>
+        <p:nvSpPr>
+          <p:cNvPr id="4" name="TextBox 3"/>
           <p:cNvSpPr txBox="1"/>
           <p:nvPr/>
         </p:nvSpPr>
         <p:spPr>
           <a:xfrm>
-            <a:off x="548640" y="4846320"/>
-            <a:ext cx="6583680" cy="457200"/>
+            <a:off x="548640" y="1005840"/>
+            <a:ext cx="7040880" cy="4572000"/>
           </a:xfrm>
           <a:prstGeom prst="rect">
             <a:avLst/>
@@ -31050,35 +32274,268 @@
           </a:bodyPr>
           <a:lstStyle/>
           <a:p>
-            <a:pPr algn="l">
+            <a:pPr algn="l" marL="274320" indent="-256032">
               <a:spcAft>
                 <a:spcPts val="600"/>
               </a:spcAft>
+              <a:buChar char="•"/>
             </a:pPr>
             <a:r>
-              <a:rPr sz="1200" b="0" i="0">
-                <a:solidFill>
-                  <a:srgbClr val="595959"/>
-                </a:solidFill>
-                <a:latin typeface="Yu Gothic"/>
-                <a:ea typeface="Yu Gothic"/>
-                <a:cs typeface="Yu Gothic"/>
-              </a:rPr>
-              <a:t>横軸: ステップ（時間）。途中の 4→5 で物を落とし、価値が下がっている</a:t>
-            </a:r>
-          </a:p>
-        </p:txBody>
-      </p:sp>
-      <p:sp>
-        <p:nvSpPr>
-          <p:cNvPr id="6" name="value"/>
+              <a:rPr sz="1700" b="1" i="0">
+                <a:solidFill>
+                  <a:srgbClr val="1A1A1A"/>
+                </a:solidFill>
+                <a:latin typeface="Yu Gothic"/>
+                <a:ea typeface="Yu Gothic"/>
+                <a:cs typeface="Yu Gothic"/>
+              </a:rPr>
+              <a:t>タスク</a:t>
+            </a:r>
+            <a:r>
+              <a:rPr sz="1700" b="0" i="0">
+                <a:solidFill>
+                  <a:srgbClr val="1A1A1A"/>
+                </a:solidFill>
+                <a:latin typeface="Yu Gothic"/>
+                <a:ea typeface="Yu Gothic"/>
+                <a:cs typeface="Yu Gothic"/>
+              </a:rPr>
+              <a:t>: LIBERO-10 の Task 0「put both the alphabet soup and the tomato sauce in the basket」（2 つの物体をカゴに入れる）</a:t>
+            </a:r>
+          </a:p>
+          <a:p>
+            <a:pPr algn="l" marL="274320" indent="-256032">
+              <a:spcAft>
+                <a:spcPts val="600"/>
+              </a:spcAft>
+              <a:buChar char="•"/>
+            </a:pPr>
+            <a:r>
+              <a:rPr sz="1700" b="1" i="0">
+                <a:solidFill>
+                  <a:srgbClr val="1A1A1A"/>
+                </a:solidFill>
+                <a:latin typeface="Yu Gothic"/>
+                <a:ea typeface="Yu Gothic"/>
+                <a:cs typeface="Yu Gothic"/>
+              </a:rPr>
+              <a:t>モデル</a:t>
+            </a:r>
+            <a:r>
+              <a:rPr sz="1700" b="0" i="0">
+                <a:solidFill>
+                  <a:srgbClr val="1A1A1A"/>
+                </a:solidFill>
+                <a:latin typeface="Yu Gothic"/>
+                <a:ea typeface="Yu Gothic"/>
+                <a:cs typeface="Yu Gothic"/>
+              </a:rPr>
+              <a:t>: smolVLA（lerobot/smolvla_libero）。50 ステップの行動チャンクのうち 10 ステップを実行</a:t>
+            </a:r>
+          </a:p>
+          <a:p>
+            <a:pPr algn="l" marL="274320" indent="-256032">
+              <a:spcAft>
+                <a:spcPts val="600"/>
+              </a:spcAft>
+              <a:buChar char="•"/>
+            </a:pPr>
+            <a:r>
+              <a:rPr sz="1700" b="1" i="0">
+                <a:solidFill>
+                  <a:srgbClr val="1A1A1A"/>
+                </a:solidFill>
+                <a:latin typeface="Yu Gothic"/>
+                <a:ea typeface="Yu Gothic"/>
+                <a:cs typeface="Yu Gothic"/>
+              </a:rPr>
+              <a:t>評価</a:t>
+            </a:r>
+            <a:r>
+              <a:rPr sz="1700" b="0" i="0">
+                <a:solidFill>
+                  <a:srgbClr val="1A1A1A"/>
+                </a:solidFill>
+                <a:latin typeface="Yu Gothic"/>
+                <a:ea typeface="Yu Gothic"/>
+                <a:cs typeface="Yu Gothic"/>
+              </a:rPr>
+              <a:t>: 固定の初期状態 50 個を 1 回ずつ、最大 520 ステップ。指標は success_once（1 度でも成功）</a:t>
+            </a:r>
+          </a:p>
+          <a:p>
+            <a:pPr algn="l" marL="274320" indent="-256032">
+              <a:spcAft>
+                <a:spcPts val="600"/>
+              </a:spcAft>
+              <a:buChar char="•"/>
+            </a:pPr>
+            <a:r>
+              <a:rPr sz="1700" b="1" i="0">
+                <a:solidFill>
+                  <a:srgbClr val="1A1A1A"/>
+                </a:solidFill>
+                <a:latin typeface="Yu Gothic"/>
+                <a:ea typeface="Yu Gothic"/>
+                <a:cs typeface="Yu Gothic"/>
+              </a:rPr>
+              <a:t>ロールアウトの収集</a:t>
+            </a:r>
+            <a:r>
+              <a:rPr sz="1700" b="0" i="0">
+                <a:solidFill>
+                  <a:srgbClr val="1A1A1A"/>
+                </a:solidFill>
+                <a:latin typeface="Yu Gothic"/>
+                <a:ea typeface="Yu Gothic"/>
+                <a:cs typeface="Yu Gothic"/>
+              </a:rPr>
+              <a:t>: 自律ロールアウト 4,122 本（成功 41.0%）。成功した時点で打ち切る設定で再収集</a:t>
+            </a:r>
+          </a:p>
+          <a:p>
+            <a:pPr algn="l" marL="585216" indent="-256032">
+              <a:spcAft>
+                <a:spcPts val="600"/>
+              </a:spcAft>
+              <a:buChar char="–"/>
+            </a:pPr>
+            <a:r>
+              <a:rPr sz="1500" b="0" i="0">
+                <a:solidFill>
+                  <a:srgbClr val="1A1A1A"/>
+                </a:solidFill>
+                <a:latin typeface="Yu Gothic"/>
+                <a:ea typeface="Yu Gothic"/>
+                <a:cs typeface="Yu Gothic"/>
+              </a:rPr>
+              <a:t>旧データは、成功後も 520 ステップ続けたため、return が「時間」と「成否」だけで決まっていた</a:t>
+            </a:r>
+          </a:p>
+          <a:p>
+            <a:pPr algn="l" marL="274320" indent="-256032">
+              <a:spcAft>
+                <a:spcPts val="600"/>
+              </a:spcAft>
+              <a:buChar char="•"/>
+            </a:pPr>
+            <a:r>
+              <a:rPr sz="1700" b="1" i="0">
+                <a:solidFill>
+                  <a:srgbClr val="1A1A1A"/>
+                </a:solidFill>
+                <a:latin typeface="Yu Gothic"/>
+                <a:ea typeface="Yu Gothic"/>
+                <a:cs typeface="Yu Gothic"/>
+              </a:rPr>
+              <a:t>人のデモ</a:t>
+            </a:r>
+            <a:r>
+              <a:rPr sz="1700" b="0" i="0">
+                <a:solidFill>
+                  <a:srgbClr val="1A1A1A"/>
+                </a:solidFill>
+                <a:latin typeface="Yu Gothic"/>
+                <a:ea typeface="Yu Gothic"/>
+                <a:cs typeface="Yu Gothic"/>
+              </a:rPr>
+              <a:t>: Task 0 の 3 本（836 フレーム）</a:t>
+            </a:r>
+          </a:p>
+          <a:p>
+            <a:pPr algn="l" marL="274320" indent="-256032">
+              <a:spcAft>
+                <a:spcPts val="600"/>
+              </a:spcAft>
+              <a:buChar char="•"/>
+            </a:pPr>
+            <a:r>
+              <a:rPr sz="1700" b="1" i="0">
+                <a:solidFill>
+                  <a:srgbClr val="1A1A1A"/>
+                </a:solidFill>
+                <a:latin typeface="Yu Gothic"/>
+                <a:ea typeface="Yu Gothic"/>
+                <a:cs typeface="Yu Gothic"/>
+              </a:rPr>
+              <a:t>実装</a:t>
+            </a:r>
+            <a:r>
+              <a:rPr sz="1700" b="0" i="0">
+                <a:solidFill>
+                  <a:srgbClr val="1A1A1A"/>
+                </a:solidFill>
+                <a:latin typeface="Yu Gothic"/>
+                <a:ea typeface="Yu Gothic"/>
+                <a:cs typeface="Yu Gothic"/>
+              </a:rPr>
+              <a:t>: RLinf（RECAP / STEAM のパイプライン、RL Token の actor-critic）</a:t>
+            </a:r>
+          </a:p>
+          <a:p>
+            <a:pPr algn="l" marL="274320" indent="-256032">
+              <a:spcAft>
+                <a:spcPts val="600"/>
+              </a:spcAft>
+              <a:buChar char="•"/>
+            </a:pPr>
+            <a:r>
+              <a:rPr sz="1700" b="1" i="0">
+                <a:solidFill>
+                  <a:srgbClr val="1A1A1A"/>
+                </a:solidFill>
+                <a:latin typeface="Yu Gothic"/>
+                <a:ea typeface="Yu Gothic"/>
+                <a:cs typeface="Yu Gothic"/>
+              </a:rPr>
+              <a:t>GPU</a:t>
+            </a:r>
+            <a:r>
+              <a:rPr sz="1700" b="0" i="0">
+                <a:solidFill>
+                  <a:srgbClr val="1A1A1A"/>
+                </a:solidFill>
+                <a:latin typeface="Yu Gothic"/>
+                <a:ea typeface="Yu Gothic"/>
+                <a:cs typeface="Yu Gothic"/>
+              </a:rPr>
+              <a:t>: 主に </a:t>
+            </a:r>
+            <a:r>
+              <a:rPr sz="1700" b="1" i="0">
+                <a:solidFill>
+                  <a:srgbClr val="1A1A1A"/>
+                </a:solidFill>
+                <a:latin typeface="Yu Gothic"/>
+                <a:ea typeface="Yu Gothic"/>
+                <a:cs typeface="Yu Gothic"/>
+              </a:rPr>
+              <a:t>RTX A5000（24GB）</a:t>
+            </a:r>
+            <a:r>
+              <a:rPr sz="1700" b="0" i="0">
+                <a:solidFill>
+                  <a:srgbClr val="1A1A1A"/>
+                </a:solidFill>
+                <a:latin typeface="Yu Gothic"/>
+                <a:ea typeface="Yu Gothic"/>
+                <a:cs typeface="Yu Gothic"/>
+              </a:rPr>
+              <a:t>。RECAP の価値モデルと Step4 は RTX 6000 Ada（48GB）</a:t>
+            </a:r>
+          </a:p>
+        </p:txBody>
+      </p:sp>
+      <p:sp>
+        <p:nvSpPr>
+          <p:cNvPr id="5" name="stat 50"/>
           <p:cNvSpPr/>
           <p:nvPr/>
         </p:nvSpPr>
         <p:spPr>
           <a:xfrm>
-            <a:off x="7498079" y="1051560"/>
-            <a:ext cx="4114800" cy="1234440"/>
+            <a:off x="7955279" y="1051560"/>
+            <a:ext cx="3657600" cy="1325880"/>
           </a:xfrm>
           <a:prstGeom prst="roundRect">
             <a:avLst>
@@ -31088,10 +32545,8 @@
           <a:solidFill>
             <a:srgbClr val="F3F7FC"/>
           </a:solidFill>
-          <a:ln w="12700">
-            <a:solidFill>
-              <a:srgbClr val="BFBFBF"/>
-            </a:solidFill>
+          <a:ln>
+            <a:noFill/>
           </a:ln>
         </p:spPr>
         <p:style>
@@ -31112,45 +32567,45 @@
           <a:bodyPr rtlCol="0" anchor="ctr" wrap="square" lIns="73152" rIns="73152" tIns="36576" bIns="36576"/>
           <a:lstStyle/>
           <a:p>
-            <a:pPr algn="l"/>
-            <a:r>
-              <a:rPr sz="1400" b="1" i="0">
-                <a:solidFill>
-                  <a:srgbClr val="1A1A1A"/>
-                </a:solidFill>
-                <a:latin typeface="Yu Gothic"/>
-                <a:ea typeface="Yu Gothic"/>
-                <a:cs typeface="Yu Gothic"/>
-              </a:rPr>
-              <a:t>価値 V</a:t>
-            </a:r>
-          </a:p>
-          <a:p>
-            <a:pPr algn="l"/>
-            <a:r>
-              <a:rPr sz="1400" b="0" i="0">
-                <a:solidFill>
-                  <a:srgbClr val="1A1A1A"/>
-                </a:solidFill>
-                <a:latin typeface="Yu Gothic"/>
-                <a:ea typeface="Yu Gothic"/>
-                <a:cs typeface="Yu Gothic"/>
-              </a:rPr>
-              <a:t>「成功まであとどれくらいか」を数値で予想したもの。0 に近いほど成功に近い</a:t>
-            </a:r>
-          </a:p>
-        </p:txBody>
-      </p:sp>
-      <p:sp>
-        <p:nvSpPr>
-          <p:cNvPr id="7" name="advantage"/>
+            <a:pPr algn="ctr"/>
+            <a:r>
+              <a:rPr sz="4000" b="1" i="0">
+                <a:solidFill>
+                  <a:srgbClr val="0B66C3"/>
+                </a:solidFill>
+                <a:latin typeface="Yu Gothic"/>
+                <a:ea typeface="Yu Gothic"/>
+                <a:cs typeface="Yu Gothic"/>
+              </a:rPr>
+              <a:t>50</a:t>
+            </a:r>
+          </a:p>
+          <a:p>
+            <a:pPr algn="ctr"/>
+            <a:r>
+              <a:rPr sz="1500" b="0" i="0">
+                <a:solidFill>
+                  <a:srgbClr val="1A1A1A"/>
+                </a:solidFill>
+                <a:latin typeface="Yu Gothic"/>
+                <a:ea typeface="Yu Gothic"/>
+                <a:cs typeface="Yu Gothic"/>
+              </a:rPr>
+              <a:t>初期状態（固定）</a:t>
+            </a:r>
+          </a:p>
+        </p:txBody>
+      </p:sp>
+      <p:sp>
+        <p:nvSpPr>
+          <p:cNvPr id="6" name="stat 0.40"/>
           <p:cNvSpPr/>
           <p:nvPr/>
         </p:nvSpPr>
         <p:spPr>
           <a:xfrm>
-            <a:off x="7498079" y="2423160"/>
-            <a:ext cx="4114800" cy="1234440"/>
+            <a:off x="7955279" y="2560320"/>
+            <a:ext cx="3657600" cy="1325880"/>
           </a:xfrm>
           <a:prstGeom prst="roundRect">
             <a:avLst>
@@ -31160,10 +32615,8 @@
           <a:solidFill>
             <a:srgbClr val="F3F7FC"/>
           </a:solidFill>
-          <a:ln w="12700">
-            <a:solidFill>
-              <a:srgbClr val="BFBFBF"/>
-            </a:solidFill>
+          <a:ln>
+            <a:noFill/>
           </a:ln>
         </p:spPr>
         <p:style>
@@ -31184,45 +32637,45 @@
           <a:bodyPr rtlCol="0" anchor="ctr" wrap="square" lIns="73152" rIns="73152" tIns="36576" bIns="36576"/>
           <a:lstStyle/>
           <a:p>
-            <a:pPr algn="l"/>
-            <a:r>
-              <a:rPr sz="1400" b="1" i="0">
-                <a:solidFill>
-                  <a:srgbClr val="1A1A1A"/>
-                </a:solidFill>
-                <a:latin typeface="Yu Gothic"/>
-                <a:ea typeface="Yu Gothic"/>
-                <a:cs typeface="Yu Gothic"/>
-              </a:rPr>
-              <a:t>advantage A</a:t>
-            </a:r>
-          </a:p>
-          <a:p>
-            <a:pPr algn="l"/>
-            <a:r>
-              <a:rPr sz="1400" b="0" i="0">
-                <a:solidFill>
-                  <a:srgbClr val="1A1A1A"/>
-                </a:solidFill>
-                <a:latin typeface="Yu Gothic"/>
-                <a:ea typeface="Yu Gothic"/>
-                <a:cs typeface="Yu Gothic"/>
-              </a:rPr>
-              <a:t>行動の前後で V がどう変わったか。上がれば A &gt; 0（良い行動）、下がれば A &lt; 0（悪い行動）</a:t>
-            </a:r>
-          </a:p>
-        </p:txBody>
-      </p:sp>
-      <p:sp>
-        <p:nvSpPr>
-          <p:cNvPr id="8" name="use"/>
+            <a:pPr algn="ctr"/>
+            <a:r>
+              <a:rPr sz="4000" b="1" i="0">
+                <a:solidFill>
+                  <a:srgbClr val="0B66C3"/>
+                </a:solidFill>
+                <a:latin typeface="Yu Gothic"/>
+                <a:ea typeface="Yu Gothic"/>
+                <a:cs typeface="Yu Gothic"/>
+              </a:rPr>
+              <a:t>0.40</a:t>
+            </a:r>
+          </a:p>
+          <a:p>
+            <a:pPr algn="ctr"/>
+            <a:r>
+              <a:rPr sz="1500" b="0" i="0">
+                <a:solidFill>
+                  <a:srgbClr val="1A1A1A"/>
+                </a:solidFill>
+                <a:latin typeface="Yu Gothic"/>
+                <a:ea typeface="Yu Gothic"/>
+                <a:cs typeface="Yu Gothic"/>
+              </a:rPr>
+              <a:t>ベースの success_once（20/50）</a:t>
+            </a:r>
+          </a:p>
+        </p:txBody>
+      </p:sp>
+      <p:sp>
+        <p:nvSpPr>
+          <p:cNvPr id="7" name="stat 4,122"/>
           <p:cNvSpPr/>
           <p:nvPr/>
         </p:nvSpPr>
         <p:spPr>
           <a:xfrm>
-            <a:off x="7498079" y="3794760"/>
-            <a:ext cx="4114800" cy="1234440"/>
+            <a:off x="7955279" y="4069079"/>
+            <a:ext cx="3657600" cy="1325880"/>
           </a:xfrm>
           <a:prstGeom prst="roundRect">
             <a:avLst>
@@ -31232,10 +32685,8 @@
           <a:solidFill>
             <a:srgbClr val="F3F7FC"/>
           </a:solidFill>
-          <a:ln w="12700">
-            <a:solidFill>
-              <a:srgbClr val="BFBFBF"/>
-            </a:solidFill>
+          <a:ln>
+            <a:noFill/>
           </a:ln>
         </p:spPr>
         <p:style>
@@ -31256,38 +32707,38 @@
           <a:bodyPr rtlCol="0" anchor="ctr" wrap="square" lIns="73152" rIns="73152" tIns="36576" bIns="36576"/>
           <a:lstStyle/>
           <a:p>
-            <a:pPr algn="l"/>
-            <a:r>
-              <a:rPr sz="1400" b="1" i="0">
-                <a:solidFill>
-                  <a:srgbClr val="1A1A1A"/>
-                </a:solidFill>
-                <a:latin typeface="Yu Gothic"/>
-                <a:ea typeface="Yu Gothic"/>
-                <a:cs typeface="Yu Gothic"/>
-              </a:rPr>
-              <a:t>使い道</a:t>
-            </a:r>
-          </a:p>
-          <a:p>
-            <a:pPr algn="l"/>
-            <a:r>
-              <a:rPr sz="1400" b="0" i="0">
-                <a:solidFill>
-                  <a:srgbClr val="1A1A1A"/>
-                </a:solidFill>
-                <a:latin typeface="Yu Gothic"/>
-                <a:ea typeface="Yu Gothic"/>
-                <a:cs typeface="Yu Gothic"/>
-              </a:rPr>
-              <a:t>A &gt; 0 の行動を「良い」とみなして、方策に学習させる（RECAP・STEAM）</a:t>
-            </a:r>
-          </a:p>
-        </p:txBody>
-      </p:sp>
-      <p:sp>
-        <p:nvSpPr>
-          <p:cNvPr id="9" name="key point"/>
+            <a:pPr algn="ctr"/>
+            <a:r>
+              <a:rPr sz="4000" b="1" i="0">
+                <a:solidFill>
+                  <a:srgbClr val="0B66C3"/>
+                </a:solidFill>
+                <a:latin typeface="Yu Gothic"/>
+                <a:ea typeface="Yu Gothic"/>
+                <a:cs typeface="Yu Gothic"/>
+              </a:rPr>
+              <a:t>4,122</a:t>
+            </a:r>
+          </a:p>
+          <a:p>
+            <a:pPr algn="ctr"/>
+            <a:r>
+              <a:rPr sz="1500" b="0" i="0">
+                <a:solidFill>
+                  <a:srgbClr val="1A1A1A"/>
+                </a:solidFill>
+                <a:latin typeface="Yu Gothic"/>
+                <a:ea typeface="Yu Gothic"/>
+                <a:cs typeface="Yu Gothic"/>
+              </a:rPr>
+              <a:t>ロールアウト（成功 41.0%）</a:t>
+            </a:r>
+          </a:p>
+        </p:txBody>
+      </p:sp>
+      <p:sp>
+        <p:nvSpPr>
+          <p:cNvPr id="8" name="key point"/>
           <p:cNvSpPr/>
           <p:nvPr/>
         </p:nvSpPr>
@@ -31338,7 +32789,7 @@
                 <a:ea typeface="Yu Gothic"/>
                 <a:cs typeface="Yu Gothic"/>
               </a:rPr>
-              <a:t>→ advantage = 行動の前後で、成功への近さがどれだけ変わったか</a:t>
+              <a:t>→ 評価は 50 エピソード。2 つの評価の差の誤差は約 ±0.1 なので、0.1 程度の差は有意とは言えない</a:t>
             </a:r>
           </a:p>
         </p:txBody>
@@ -31410,7 +32861,7 @@
                 <a:ea typeface="Yu Gothic"/>
                 <a:cs typeface="Yu Gothic"/>
               </a:rPr>
-              <a:t>実験設定</a:t>
+              <a:t>RECAP: 提案（論文: π*0.6）</a:t>
             </a:r>
           </a:p>
         </p:txBody>
@@ -31465,7 +32916,7 @@
         <p:spPr>
           <a:xfrm>
             <a:off x="548640" y="1005840"/>
-            <a:ext cx="7040880" cy="4572000"/>
+            <a:ext cx="6035040" cy="4572000"/>
           </a:xfrm>
           <a:prstGeom prst="rect">
             <a:avLst/>
@@ -31485,26 +32936,26 @@
               <a:buChar char="•"/>
             </a:pPr>
             <a:r>
-              <a:rPr sz="1700" b="1" i="0">
-                <a:solidFill>
-                  <a:srgbClr val="1A1A1A"/>
-                </a:solidFill>
-                <a:latin typeface="Yu Gothic"/>
-                <a:ea typeface="Yu Gothic"/>
-                <a:cs typeface="Yu Gothic"/>
-              </a:rPr>
-              <a:t>タスク</a:t>
-            </a:r>
-            <a:r>
-              <a:rPr sz="1700" b="0" i="0">
-                <a:solidFill>
-                  <a:srgbClr val="1A1A1A"/>
-                </a:solidFill>
-                <a:latin typeface="Yu Gothic"/>
-                <a:ea typeface="Yu Gothic"/>
-                <a:cs typeface="Yu Gothic"/>
-              </a:rPr>
-              <a:t>: LIBERO-10 の Task 0「put both the alphabet soup and the tomato sauce in the basket」（2 つの物体をカゴに入れる）</a:t>
+              <a:rPr sz="1500" b="1" i="0">
+                <a:solidFill>
+                  <a:srgbClr val="1A1A1A"/>
+                </a:solidFill>
+                <a:latin typeface="Yu Gothic"/>
+                <a:ea typeface="Yu Gothic"/>
+                <a:cs typeface="Yu Gothic"/>
+              </a:rPr>
+              <a:t>考え方</a:t>
+            </a:r>
+            <a:r>
+              <a:rPr sz="1500" b="0" i="0">
+                <a:solidFill>
+                  <a:srgbClr val="1A1A1A"/>
+                </a:solidFill>
+                <a:latin typeface="Yu Gothic"/>
+                <a:ea typeface="Yu Gothic"/>
+                <a:cs typeface="Yu Gothic"/>
+              </a:rPr>
+              <a:t>: うまくいった行動に「良い」の札を付けて学習し、実行時は「良い」の札を付けて動かす</a:t>
             </a:r>
           </a:p>
           <a:p>
@@ -31515,26 +32966,138 @@
               <a:buChar char="•"/>
             </a:pPr>
             <a:r>
-              <a:rPr sz="1700" b="1" i="0">
-                <a:solidFill>
-                  <a:srgbClr val="1A1A1A"/>
-                </a:solidFill>
-                <a:latin typeface="Yu Gothic"/>
-                <a:ea typeface="Yu Gothic"/>
-                <a:cs typeface="Yu Gothic"/>
-              </a:rPr>
-              <a:t>モデル</a:t>
-            </a:r>
-            <a:r>
-              <a:rPr sz="1700" b="0" i="0">
-                <a:solidFill>
-                  <a:srgbClr val="1A1A1A"/>
-                </a:solidFill>
-                <a:latin typeface="Yu Gothic"/>
-                <a:ea typeface="Yu Gothic"/>
-                <a:cs typeface="Yu Gothic"/>
-              </a:rPr>
-              <a:t>: smolVLA（lerobot/smolvla_libero）。50 ステップの行動チャンクのうち 10 ステップを実行</a:t>
+              <a:rPr sz="1500" b="0" i="0">
+                <a:solidFill>
+                  <a:srgbClr val="1A1A1A"/>
+                </a:solidFill>
+                <a:latin typeface="Yu Gothic"/>
+                <a:ea typeface="Yu Gothic"/>
+                <a:cs typeface="Yu Gothic"/>
+              </a:rPr>
+              <a:t>次の 3 ステップを繰り返す</a:t>
+            </a:r>
+          </a:p>
+          <a:p>
+            <a:pPr algn="l" marL="585216" indent="-256032">
+              <a:spcAft>
+                <a:spcPts val="600"/>
+              </a:spcAft>
+              <a:buChar char="–"/>
+            </a:pPr>
+            <a:r>
+              <a:rPr sz="1300" b="0" i="0">
+                <a:solidFill>
+                  <a:srgbClr val="1A1A1A"/>
+                </a:solidFill>
+                <a:latin typeface="Yu Gothic"/>
+                <a:ea typeface="Yu Gothic"/>
+                <a:cs typeface="Yu Gothic"/>
+              </a:rPr>
+              <a:t>① </a:t>
+            </a:r>
+            <a:r>
+              <a:rPr sz="1300" b="1" i="0">
+                <a:solidFill>
+                  <a:srgbClr val="1A1A1A"/>
+                </a:solidFill>
+                <a:latin typeface="Yu Gothic"/>
+                <a:ea typeface="Yu Gothic"/>
+                <a:cs typeface="Yu Gothic"/>
+              </a:rPr>
+              <a:t>集める</a:t>
+            </a:r>
+            <a:r>
+              <a:rPr sz="1300" b="0" i="0">
+                <a:solidFill>
+                  <a:srgbClr val="1A1A1A"/>
+                </a:solidFill>
+                <a:latin typeface="Yu Gothic"/>
+                <a:ea typeface="Yu Gothic"/>
+                <a:cs typeface="Yu Gothic"/>
+              </a:rPr>
+              <a:t>: ロボットを動かし、結果（成功/失敗）を記録する</a:t>
+            </a:r>
+          </a:p>
+          <a:p>
+            <a:pPr algn="l" marL="585216" indent="-256032">
+              <a:spcAft>
+                <a:spcPts val="600"/>
+              </a:spcAft>
+              <a:buChar char="–"/>
+            </a:pPr>
+            <a:r>
+              <a:rPr sz="1300" b="0" i="0">
+                <a:solidFill>
+                  <a:srgbClr val="1A1A1A"/>
+                </a:solidFill>
+                <a:latin typeface="Yu Gothic"/>
+                <a:ea typeface="Yu Gothic"/>
+                <a:cs typeface="Yu Gothic"/>
+              </a:rPr>
+              <a:t>② </a:t>
+            </a:r>
+            <a:r>
+              <a:rPr sz="1300" b="1" i="0">
+                <a:solidFill>
+                  <a:srgbClr val="1A1A1A"/>
+                </a:solidFill>
+                <a:latin typeface="Yu Gothic"/>
+                <a:ea typeface="Yu Gothic"/>
+                <a:cs typeface="Yu Gothic"/>
+              </a:rPr>
+              <a:t>価値関数を学習する</a:t>
+            </a:r>
+            <a:r>
+              <a:rPr sz="1300" b="0" i="0">
+                <a:solidFill>
+                  <a:srgbClr val="1A1A1A"/>
+                </a:solidFill>
+                <a:latin typeface="Yu Gothic"/>
+                <a:ea typeface="Yu Gothic"/>
+                <a:cs typeface="Yu Gothic"/>
+              </a:rPr>
+              <a:t>: 「あとどれくらいで成功か」を予想するモデル</a:t>
+            </a:r>
+          </a:p>
+          <a:p>
+            <a:pPr algn="l" marL="585216" indent="-256032">
+              <a:spcAft>
+                <a:spcPts val="600"/>
+              </a:spcAft>
+              <a:buChar char="–"/>
+            </a:pPr>
+            <a:r>
+              <a:rPr sz="1300" b="0" i="0">
+                <a:solidFill>
+                  <a:srgbClr val="1A1A1A"/>
+                </a:solidFill>
+                <a:latin typeface="Yu Gothic"/>
+                <a:ea typeface="Yu Gothic"/>
+                <a:cs typeface="Yu Gothic"/>
+              </a:rPr>
+              <a:t>③ </a:t>
+            </a:r>
+            <a:r>
+              <a:rPr sz="1300" b="1" i="0">
+                <a:solidFill>
+                  <a:srgbClr val="1A1A1A"/>
+                </a:solidFill>
+                <a:latin typeface="Yu Gothic"/>
+                <a:ea typeface="Yu Gothic"/>
+                <a:cs typeface="Yu Gothic"/>
+              </a:rPr>
+              <a:t>方策を学習する</a:t>
+            </a:r>
+            <a:r>
+              <a:rPr sz="1300" b="0" i="0">
+                <a:solidFill>
+                  <a:srgbClr val="1A1A1A"/>
+                </a:solidFill>
+                <a:latin typeface="Yu Gothic"/>
+                <a:ea typeface="Yu Gothic"/>
+                <a:cs typeface="Yu Gothic"/>
+              </a:rPr>
+              <a:t>: 良い行動に「良い」の札を付けて、VLA を学習する</a:t>
             </a:r>
           </a:p>
           <a:p>
@@ -31545,26 +33108,53 @@
               <a:buChar char="•"/>
             </a:pPr>
             <a:r>
-              <a:rPr sz="1700" b="1" i="0">
-                <a:solidFill>
-                  <a:srgbClr val="1A1A1A"/>
-                </a:solidFill>
-                <a:latin typeface="Yu Gothic"/>
-                <a:ea typeface="Yu Gothic"/>
-                <a:cs typeface="Yu Gothic"/>
-              </a:rPr>
-              <a:t>評価</a:t>
-            </a:r>
-            <a:r>
-              <a:rPr sz="1700" b="0" i="0">
-                <a:solidFill>
-                  <a:srgbClr val="1A1A1A"/>
-                </a:solidFill>
-                <a:latin typeface="Yu Gothic"/>
-                <a:ea typeface="Yu Gothic"/>
-                <a:cs typeface="Yu Gothic"/>
-              </a:rPr>
-              <a:t>: 固定の初期状態 50 個を 1 回ずつ、最大 520 ステップ。指標は success_once（1 度でも成功）</a:t>
+              <a:rPr sz="1500" b="1" i="0">
+                <a:solidFill>
+                  <a:srgbClr val="1A1A1A"/>
+                </a:solidFill>
+                <a:latin typeface="Yu Gothic"/>
+                <a:ea typeface="Yu Gothic"/>
+                <a:cs typeface="Yu Gothic"/>
+              </a:rPr>
+              <a:t>利点</a:t>
+            </a:r>
+          </a:p>
+          <a:p>
+            <a:pPr algn="l" marL="585216" indent="-256032">
+              <a:spcAft>
+                <a:spcPts val="600"/>
+              </a:spcAft>
+              <a:buChar char="–"/>
+            </a:pPr>
+            <a:r>
+              <a:rPr sz="1300" b="0" i="0">
+                <a:solidFill>
+                  <a:srgbClr val="1A1A1A"/>
+                </a:solidFill>
+                <a:latin typeface="Yu Gothic"/>
+                <a:ea typeface="Yu Gothic"/>
+                <a:cs typeface="Yu Gothic"/>
+              </a:rPr>
+              <a:t>方策勾配が不要で、flow matching の VLA にもスケールする</a:t>
+            </a:r>
+          </a:p>
+          <a:p>
+            <a:pPr algn="l" marL="585216" indent="-256032">
+              <a:spcAft>
+                <a:spcPts val="600"/>
+              </a:spcAft>
+              <a:buChar char="–"/>
+            </a:pPr>
+            <a:r>
+              <a:rPr sz="1300" b="0" i="0">
+                <a:solidFill>
+                  <a:srgbClr val="1A1A1A"/>
+                </a:solidFill>
+                <a:latin typeface="Yu Gothic"/>
+                <a:ea typeface="Yu Gothic"/>
+                <a:cs typeface="Yu Gothic"/>
+              </a:rPr>
+              <a:t>デモ・自律ロールアウト・人の介入を、同じ枠組みで使える</a:t>
             </a:r>
           </a:p>
           <a:p>
@@ -31575,35 +33165,16 @@
               <a:buChar char="•"/>
             </a:pPr>
             <a:r>
-              <a:rPr sz="1700" b="1" i="0">
-                <a:solidFill>
-                  <a:srgbClr val="1A1A1A"/>
-                </a:solidFill>
-                <a:latin typeface="Yu Gothic"/>
-                <a:ea typeface="Yu Gothic"/>
-                <a:cs typeface="Yu Gothic"/>
-              </a:rPr>
-              <a:t>ロールアウトの収集</a:t>
-            </a:r>
-            <a:r>
-              <a:rPr sz="1700" b="0" i="0">
-                <a:solidFill>
-                  <a:srgbClr val="1A1A1A"/>
-                </a:solidFill>
-                <a:latin typeface="Yu Gothic"/>
-                <a:ea typeface="Yu Gothic"/>
-                <a:cs typeface="Yu Gothic"/>
-              </a:rPr>
-              <a:t>: 自律ロールアウト 4,122 本（成功 41.0%）。成功した時点で打ち切る設定で再収集</a:t>
-            </a:r>
-          </a:p>
-          <a:p>
-            <a:pPr algn="l" marL="585216" indent="-256032">
-              <a:spcAft>
-                <a:spcPts val="600"/>
-              </a:spcAft>
-              <a:buChar char="–"/>
-            </a:pPr>
+              <a:rPr sz="1500" b="1" i="0">
+                <a:solidFill>
+                  <a:srgbClr val="1A1A1A"/>
+                </a:solidFill>
+                <a:latin typeface="Yu Gothic"/>
+                <a:ea typeface="Yu Gothic"/>
+                <a:cs typeface="Yu Gothic"/>
+              </a:rPr>
+              <a:t>論文の結果</a:t>
+            </a:r>
             <a:r>
               <a:rPr sz="1500" b="0" i="0">
                 <a:solidFill>
@@ -31613,133 +33184,21 @@
                 <a:ea typeface="Yu Gothic"/>
                 <a:cs typeface="Yu Gothic"/>
               </a:rPr>
-              <a:t>旧データは、成功後も 520 ステップ続けたため、return が「時間」と「成否」だけで決まっていた</a:t>
-            </a:r>
-          </a:p>
-          <a:p>
-            <a:pPr algn="l" marL="274320" indent="-256032">
-              <a:spcAft>
-                <a:spcPts val="600"/>
-              </a:spcAft>
-              <a:buChar char="•"/>
-            </a:pPr>
-            <a:r>
-              <a:rPr sz="1700" b="1" i="0">
-                <a:solidFill>
-                  <a:srgbClr val="1A1A1A"/>
-                </a:solidFill>
-                <a:latin typeface="Yu Gothic"/>
-                <a:ea typeface="Yu Gothic"/>
-                <a:cs typeface="Yu Gothic"/>
-              </a:rPr>
-              <a:t>人のデモ</a:t>
-            </a:r>
-            <a:r>
-              <a:rPr sz="1700" b="0" i="0">
-                <a:solidFill>
-                  <a:srgbClr val="1A1A1A"/>
-                </a:solidFill>
-                <a:latin typeface="Yu Gothic"/>
-                <a:ea typeface="Yu Gothic"/>
-                <a:cs typeface="Yu Gothic"/>
-              </a:rPr>
-              <a:t>: Task 0 の 3 本（836 フレーム）</a:t>
-            </a:r>
-          </a:p>
-          <a:p>
-            <a:pPr algn="l" marL="274320" indent="-256032">
-              <a:spcAft>
-                <a:spcPts val="600"/>
-              </a:spcAft>
-              <a:buChar char="•"/>
-            </a:pPr>
-            <a:r>
-              <a:rPr sz="1700" b="1" i="0">
-                <a:solidFill>
-                  <a:srgbClr val="1A1A1A"/>
-                </a:solidFill>
-                <a:latin typeface="Yu Gothic"/>
-                <a:ea typeface="Yu Gothic"/>
-                <a:cs typeface="Yu Gothic"/>
-              </a:rPr>
-              <a:t>実装</a:t>
-            </a:r>
-            <a:r>
-              <a:rPr sz="1700" b="0" i="0">
-                <a:solidFill>
-                  <a:srgbClr val="1A1A1A"/>
-                </a:solidFill>
-                <a:latin typeface="Yu Gothic"/>
-                <a:ea typeface="Yu Gothic"/>
-                <a:cs typeface="Yu Gothic"/>
-              </a:rPr>
-              <a:t>: RLinf（RECAP / STEAM のパイプライン、RL Token の actor-critic）</a:t>
-            </a:r>
-          </a:p>
-          <a:p>
-            <a:pPr algn="l" marL="274320" indent="-256032">
-              <a:spcAft>
-                <a:spcPts val="600"/>
-              </a:spcAft>
-              <a:buChar char="•"/>
-            </a:pPr>
-            <a:r>
-              <a:rPr sz="1700" b="1" i="0">
-                <a:solidFill>
-                  <a:srgbClr val="1A1A1A"/>
-                </a:solidFill>
-                <a:latin typeface="Yu Gothic"/>
-                <a:ea typeface="Yu Gothic"/>
-                <a:cs typeface="Yu Gothic"/>
-              </a:rPr>
-              <a:t>GPU</a:t>
-            </a:r>
-            <a:r>
-              <a:rPr sz="1700" b="0" i="0">
-                <a:solidFill>
-                  <a:srgbClr val="1A1A1A"/>
-                </a:solidFill>
-                <a:latin typeface="Yu Gothic"/>
-                <a:ea typeface="Yu Gothic"/>
-                <a:cs typeface="Yu Gothic"/>
-              </a:rPr>
-              <a:t>: 主に </a:t>
-            </a:r>
-            <a:r>
-              <a:rPr sz="1700" b="1" i="0">
-                <a:solidFill>
-                  <a:srgbClr val="1A1A1A"/>
-                </a:solidFill>
-                <a:latin typeface="Yu Gothic"/>
-                <a:ea typeface="Yu Gothic"/>
-                <a:cs typeface="Yu Gothic"/>
-              </a:rPr>
-              <a:t>RTX A5000（24GB）</a:t>
-            </a:r>
-            <a:r>
-              <a:rPr sz="1700" b="0" i="0">
-                <a:solidFill>
-                  <a:srgbClr val="1A1A1A"/>
-                </a:solidFill>
-                <a:latin typeface="Yu Gothic"/>
-                <a:ea typeface="Yu Gothic"/>
-                <a:cs typeface="Yu Gothic"/>
-              </a:rPr>
-              <a:t>。RECAP の価値モデルと Step4 は RTX 6000 Ada（48GB）</a:t>
-            </a:r>
-          </a:p>
-        </p:txBody>
-      </p:sp>
-      <p:sp>
-        <p:nvSpPr>
-          <p:cNvPr id="5" name="stat 50"/>
+              <a:t>: 洗濯物たたみ・エスプレッソ作り・箱の組み立てで、成功率とスループットが改善。難しいタスクでは、失敗率が 1/2 以下</a:t>
+            </a:r>
+          </a:p>
+        </p:txBody>
+      </p:sp>
+      <p:sp>
+        <p:nvSpPr>
+          <p:cNvPr id="5" name="① 集める"/>
           <p:cNvSpPr/>
           <p:nvPr/>
         </p:nvSpPr>
         <p:spPr>
           <a:xfrm>
-            <a:off x="7955279" y="1051560"/>
-            <a:ext cx="3657600" cy="1325880"/>
+            <a:off x="7040880" y="1097280"/>
+            <a:ext cx="3291840" cy="914400"/>
           </a:xfrm>
           <a:prstGeom prst="roundRect">
             <a:avLst>
@@ -31747,10 +33206,12 @@
             </a:avLst>
           </a:prstGeom>
           <a:solidFill>
-            <a:srgbClr val="F3F7FC"/>
+            <a:srgbClr val="E8F1FB"/>
           </a:solidFill>
-          <a:ln>
-            <a:noFill/>
+          <a:ln w="12700">
+            <a:solidFill>
+              <a:srgbClr val="0B66C3"/>
+            </a:solidFill>
           </a:ln>
         </p:spPr>
         <p:style>
@@ -31773,43 +33234,43 @@
           <a:p>
             <a:pPr algn="ctr"/>
             <a:r>
-              <a:rPr sz="4000" b="1" i="0">
-                <a:solidFill>
-                  <a:srgbClr val="0B66C3"/>
-                </a:solidFill>
-                <a:latin typeface="Yu Gothic"/>
-                <a:ea typeface="Yu Gothic"/>
-                <a:cs typeface="Yu Gothic"/>
-              </a:rPr>
-              <a:t>50</a:t>
+              <a:rPr sz="1500" b="1" i="0">
+                <a:solidFill>
+                  <a:srgbClr val="1A1A1A"/>
+                </a:solidFill>
+                <a:latin typeface="Yu Gothic"/>
+                <a:ea typeface="Yu Gothic"/>
+                <a:cs typeface="Yu Gothic"/>
+              </a:rPr>
+              <a:t>① 集める</a:t>
             </a:r>
           </a:p>
           <a:p>
             <a:pPr algn="ctr"/>
             <a:r>
-              <a:rPr sz="1500" b="0" i="0">
-                <a:solidFill>
-                  <a:srgbClr val="1A1A1A"/>
-                </a:solidFill>
-                <a:latin typeface="Yu Gothic"/>
-                <a:ea typeface="Yu Gothic"/>
-                <a:cs typeface="Yu Gothic"/>
-              </a:rPr>
-              <a:t>初期状態（固定）</a:t>
-            </a:r>
-          </a:p>
-        </p:txBody>
-      </p:sp>
-      <p:sp>
-        <p:nvSpPr>
-          <p:cNvPr id="6" name="stat 0.40"/>
+              <a:rPr sz="1500" b="1" i="0">
+                <a:solidFill>
+                  <a:srgbClr val="1A1A1A"/>
+                </a:solidFill>
+                <a:latin typeface="Yu Gothic"/>
+                <a:ea typeface="Yu Gothic"/>
+                <a:cs typeface="Yu Gothic"/>
+              </a:rPr>
+              <a:t>（ロールアウト）</a:t>
+            </a:r>
+          </a:p>
+        </p:txBody>
+      </p:sp>
+      <p:sp>
+        <p:nvSpPr>
+          <p:cNvPr id="6" name="② 価値関数 V を学習"/>
           <p:cNvSpPr/>
           <p:nvPr/>
         </p:nvSpPr>
         <p:spPr>
           <a:xfrm>
-            <a:off x="7955279" y="2560320"/>
-            <a:ext cx="3657600" cy="1325880"/>
+            <a:off x="7040880" y="2514600"/>
+            <a:ext cx="3291840" cy="914400"/>
           </a:xfrm>
           <a:prstGeom prst="roundRect">
             <a:avLst>
@@ -31817,10 +33278,12 @@
             </a:avLst>
           </a:prstGeom>
           <a:solidFill>
-            <a:srgbClr val="F3F7FC"/>
+            <a:srgbClr val="E8F1FB"/>
           </a:solidFill>
-          <a:ln>
-            <a:noFill/>
+          <a:ln w="12700">
+            <a:solidFill>
+              <a:srgbClr val="0B66C3"/>
+            </a:solidFill>
           </a:ln>
         </p:spPr>
         <p:style>
@@ -31843,43 +33306,43 @@
           <a:p>
             <a:pPr algn="ctr"/>
             <a:r>
-              <a:rPr sz="4000" b="1" i="0">
-                <a:solidFill>
-                  <a:srgbClr val="0B66C3"/>
-                </a:solidFill>
-                <a:latin typeface="Yu Gothic"/>
-                <a:ea typeface="Yu Gothic"/>
-                <a:cs typeface="Yu Gothic"/>
-              </a:rPr>
-              <a:t>0.40</a:t>
+              <a:rPr sz="1500" b="1" i="0">
+                <a:solidFill>
+                  <a:srgbClr val="1A1A1A"/>
+                </a:solidFill>
+                <a:latin typeface="Yu Gothic"/>
+                <a:ea typeface="Yu Gothic"/>
+                <a:cs typeface="Yu Gothic"/>
+              </a:rPr>
+              <a:t>② 価値関数 V を学習</a:t>
             </a:r>
           </a:p>
           <a:p>
             <a:pPr algn="ctr"/>
             <a:r>
-              <a:rPr sz="1500" b="0" i="0">
-                <a:solidFill>
-                  <a:srgbClr val="1A1A1A"/>
-                </a:solidFill>
-                <a:latin typeface="Yu Gothic"/>
-                <a:ea typeface="Yu Gothic"/>
-                <a:cs typeface="Yu Gothic"/>
-              </a:rPr>
-              <a:t>ベースの success_once（20/50）</a:t>
-            </a:r>
-          </a:p>
-        </p:txBody>
-      </p:sp>
-      <p:sp>
-        <p:nvSpPr>
-          <p:cNvPr id="7" name="stat 4,122"/>
+              <a:rPr sz="1500" b="1" i="0">
+                <a:solidFill>
+                  <a:srgbClr val="1A1A1A"/>
+                </a:solidFill>
+                <a:latin typeface="Yu Gothic"/>
+                <a:ea typeface="Yu Gothic"/>
+                <a:cs typeface="Yu Gothic"/>
+              </a:rPr>
+              <a:t>（成功への近さを予想）</a:t>
+            </a:r>
+          </a:p>
+        </p:txBody>
+      </p:sp>
+      <p:sp>
+        <p:nvSpPr>
+          <p:cNvPr id="7" name="③ 「良い」札付きで"/>
           <p:cNvSpPr/>
           <p:nvPr/>
         </p:nvSpPr>
         <p:spPr>
           <a:xfrm>
-            <a:off x="7955279" y="4069079"/>
-            <a:ext cx="3657600" cy="1325880"/>
+            <a:off x="7040880" y="3931920"/>
+            <a:ext cx="3291840" cy="914400"/>
           </a:xfrm>
           <a:prstGeom prst="roundRect">
             <a:avLst>
@@ -31887,10 +33350,12 @@
             </a:avLst>
           </a:prstGeom>
           <a:solidFill>
-            <a:srgbClr val="F3F7FC"/>
+            <a:srgbClr val="E8F1FB"/>
           </a:solidFill>
-          <a:ln>
-            <a:noFill/>
+          <a:ln w="12700">
+            <a:solidFill>
+              <a:srgbClr val="0B66C3"/>
+            </a:solidFill>
           </a:ln>
         </p:spPr>
         <p:style>
@@ -31913,36 +33378,258 @@
           <a:p>
             <a:pPr algn="ctr"/>
             <a:r>
-              <a:rPr sz="4000" b="1" i="0">
-                <a:solidFill>
-                  <a:srgbClr val="0B66C3"/>
-                </a:solidFill>
-                <a:latin typeface="Yu Gothic"/>
-                <a:ea typeface="Yu Gothic"/>
-                <a:cs typeface="Yu Gothic"/>
-              </a:rPr>
-              <a:t>4,122</a:t>
+              <a:rPr sz="1500" b="1" i="0">
+                <a:solidFill>
+                  <a:srgbClr val="1A1A1A"/>
+                </a:solidFill>
+                <a:latin typeface="Yu Gothic"/>
+                <a:ea typeface="Yu Gothic"/>
+                <a:cs typeface="Yu Gothic"/>
+              </a:rPr>
+              <a:t>③ 「良い」札付きで</a:t>
             </a:r>
           </a:p>
           <a:p>
             <a:pPr algn="ctr"/>
             <a:r>
-              <a:rPr sz="1500" b="0" i="0">
-                <a:solidFill>
-                  <a:srgbClr val="1A1A1A"/>
-                </a:solidFill>
-                <a:latin typeface="Yu Gothic"/>
-                <a:ea typeface="Yu Gothic"/>
-                <a:cs typeface="Yu Gothic"/>
-              </a:rPr>
-              <a:t>ロールアウト（成功 41.0%）</a:t>
-            </a:r>
-          </a:p>
-        </p:txBody>
-      </p:sp>
-      <p:sp>
-        <p:nvSpPr>
-          <p:cNvPr id="8" name="key point"/>
+              <a:rPr sz="1500" b="1" i="0">
+                <a:solidFill>
+                  <a:srgbClr val="1A1A1A"/>
+                </a:solidFill>
+                <a:latin typeface="Yu Gothic"/>
+                <a:ea typeface="Yu Gothic"/>
+                <a:cs typeface="Yu Gothic"/>
+              </a:rPr>
+              <a:t>方策を学習</a:t>
+            </a:r>
+          </a:p>
+        </p:txBody>
+      </p:sp>
+      <p:cxnSp>
+        <p:nvCxnSpPr>
+          <p:cNvPr id="8" name="Connector 7"/>
+          <p:cNvCxnSpPr/>
+          <p:nvPr/>
+        </p:nvCxnSpPr>
+        <p:spPr>
+          <a:xfrm>
+            <a:off x="8686800" y="2011680"/>
+            <a:ext cx="0" cy="502920"/>
+          </a:xfrm>
+          <a:prstGeom prst="line">
+            <a:avLst/>
+          </a:prstGeom>
+          <a:ln w="25400">
+            <a:solidFill>
+              <a:srgbClr val="0B66C3"/>
+            </a:solidFill>
+            <a:tailEnd type="triangle" w="med" len="med"/>
+          </a:ln>
+        </p:spPr>
+        <p:style>
+          <a:lnRef idx="2">
+            <a:schemeClr val="accent1"/>
+          </a:lnRef>
+          <a:fillRef idx="0">
+            <a:schemeClr val="accent1"/>
+          </a:fillRef>
+          <a:effectRef idx="1">
+            <a:schemeClr val="accent1"/>
+          </a:effectRef>
+          <a:fontRef idx="minor">
+            <a:schemeClr val="tx1"/>
+          </a:fontRef>
+        </p:style>
+      </p:cxnSp>
+      <p:cxnSp>
+        <p:nvCxnSpPr>
+          <p:cNvPr id="9" name="Connector 8"/>
+          <p:cNvCxnSpPr/>
+          <p:nvPr/>
+        </p:nvCxnSpPr>
+        <p:spPr>
+          <a:xfrm>
+            <a:off x="8686800" y="3429000"/>
+            <a:ext cx="0" cy="502920"/>
+          </a:xfrm>
+          <a:prstGeom prst="line">
+            <a:avLst/>
+          </a:prstGeom>
+          <a:ln w="25400">
+            <a:solidFill>
+              <a:srgbClr val="0B66C3"/>
+            </a:solidFill>
+            <a:tailEnd type="triangle" w="med" len="med"/>
+          </a:ln>
+        </p:spPr>
+        <p:style>
+          <a:lnRef idx="2">
+            <a:schemeClr val="accent1"/>
+          </a:lnRef>
+          <a:fillRef idx="0">
+            <a:schemeClr val="accent1"/>
+          </a:fillRef>
+          <a:effectRef idx="1">
+            <a:schemeClr val="accent1"/>
+          </a:effectRef>
+          <a:fontRef idx="minor">
+            <a:schemeClr val="tx1"/>
+          </a:fontRef>
+        </p:style>
+      </p:cxnSp>
+      <p:cxnSp>
+        <p:nvCxnSpPr>
+          <p:cNvPr id="10" name="Connector 9"/>
+          <p:cNvCxnSpPr/>
+          <p:nvPr/>
+        </p:nvCxnSpPr>
+        <p:spPr>
+          <a:xfrm>
+            <a:off x="10332720" y="4389120"/>
+            <a:ext cx="914400" cy="0"/>
+          </a:xfrm>
+          <a:prstGeom prst="line">
+            <a:avLst/>
+          </a:prstGeom>
+          <a:ln w="25400">
+            <a:solidFill>
+              <a:srgbClr val="0B66C3"/>
+            </a:solidFill>
+            <a:tailEnd type="triangle" w="med" len="med"/>
+          </a:ln>
+        </p:spPr>
+        <p:style>
+          <a:lnRef idx="2">
+            <a:schemeClr val="accent1"/>
+          </a:lnRef>
+          <a:fillRef idx="0">
+            <a:schemeClr val="accent1"/>
+          </a:fillRef>
+          <a:effectRef idx="1">
+            <a:schemeClr val="accent1"/>
+          </a:effectRef>
+          <a:fontRef idx="minor">
+            <a:schemeClr val="tx1"/>
+          </a:fontRef>
+        </p:style>
+      </p:cxnSp>
+      <p:cxnSp>
+        <p:nvCxnSpPr>
+          <p:cNvPr id="11" name="Connector 10"/>
+          <p:cNvCxnSpPr/>
+          <p:nvPr/>
+        </p:nvCxnSpPr>
+        <p:spPr>
+          <a:xfrm flipV="1">
+            <a:off x="11247120" y="1554480"/>
+            <a:ext cx="0" cy="2834640"/>
+          </a:xfrm>
+          <a:prstGeom prst="line">
+            <a:avLst/>
+          </a:prstGeom>
+          <a:ln w="25400">
+            <a:solidFill>
+              <a:srgbClr val="0B66C3"/>
+            </a:solidFill>
+            <a:tailEnd type="triangle" w="med" len="med"/>
+          </a:ln>
+        </p:spPr>
+        <p:style>
+          <a:lnRef idx="2">
+            <a:schemeClr val="accent1"/>
+          </a:lnRef>
+          <a:fillRef idx="0">
+            <a:schemeClr val="accent1"/>
+          </a:fillRef>
+          <a:effectRef idx="1">
+            <a:schemeClr val="accent1"/>
+          </a:effectRef>
+          <a:fontRef idx="minor">
+            <a:schemeClr val="tx1"/>
+          </a:fontRef>
+        </p:style>
+      </p:cxnSp>
+      <p:cxnSp>
+        <p:nvCxnSpPr>
+          <p:cNvPr id="12" name="Connector 11"/>
+          <p:cNvCxnSpPr/>
+          <p:nvPr/>
+        </p:nvCxnSpPr>
+        <p:spPr>
+          <a:xfrm flipH="1">
+            <a:off x="10332720" y="1554480"/>
+            <a:ext cx="914400" cy="0"/>
+          </a:xfrm>
+          <a:prstGeom prst="line">
+            <a:avLst/>
+          </a:prstGeom>
+          <a:ln w="25400">
+            <a:solidFill>
+              <a:srgbClr val="0B66C3"/>
+            </a:solidFill>
+            <a:tailEnd type="triangle" w="med" len="med"/>
+          </a:ln>
+        </p:spPr>
+        <p:style>
+          <a:lnRef idx="2">
+            <a:schemeClr val="accent1"/>
+          </a:lnRef>
+          <a:fillRef idx="0">
+            <a:schemeClr val="accent1"/>
+          </a:fillRef>
+          <a:effectRef idx="1">
+            <a:schemeClr val="accent1"/>
+          </a:effectRef>
+          <a:fontRef idx="minor">
+            <a:schemeClr val="tx1"/>
+          </a:fontRef>
+        </p:style>
+      </p:cxnSp>
+      <p:sp>
+        <p:nvSpPr>
+          <p:cNvPr id="13" name="TextBox 12"/>
+          <p:cNvSpPr txBox="1"/>
+          <p:nvPr/>
+        </p:nvSpPr>
+        <p:spPr>
+          <a:xfrm>
+            <a:off x="10424160" y="4892040"/>
+            <a:ext cx="1463040" cy="548640"/>
+          </a:xfrm>
+          <a:prstGeom prst="rect">
+            <a:avLst/>
+          </a:prstGeom>
+          <a:noFill/>
+        </p:spPr>
+        <p:txBody>
+          <a:bodyPr wrap="square" anchor="t" lIns="45720" rIns="45720" tIns="27432" bIns="27432">
+            <a:spAutoFit/>
+          </a:bodyPr>
+          <a:lstStyle/>
+          <a:p>
+            <a:pPr algn="ctr">
+              <a:spcAft>
+                <a:spcPts val="600"/>
+              </a:spcAft>
+            </a:pPr>
+            <a:r>
+              <a:rPr sz="1200" b="0" i="0">
+                <a:solidFill>
+                  <a:srgbClr val="595959"/>
+                </a:solidFill>
+                <a:latin typeface="Yu Gothic"/>
+                <a:ea typeface="Yu Gothic"/>
+                <a:cs typeface="Yu Gothic"/>
+              </a:rPr>
+              <a:t>新しい方策で
+再収集</a:t>
+            </a:r>
+          </a:p>
+        </p:txBody>
+      </p:sp>
+      <p:sp>
+        <p:nvSpPr>
+          <p:cNvPr id="14" name="key point"/>
           <p:cNvSpPr/>
           <p:nvPr/>
         </p:nvSpPr>
@@ -31993,7 +33680,7 @@
                 <a:ea typeface="Yu Gothic"/>
                 <a:cs typeface="Yu Gothic"/>
               </a:rPr>
-              <a:t>→ 評価は 50 エピソード。2 つの評価の差の誤差は約 ±0.1 なので、0.1 程度の差は有意とは言えない</a:t>
+              <a:t>→ 「良い行動」を選んで学習するための札を、価値関数から作る。それが RECAP の核心</a:t>
             </a:r>
           </a:p>
         </p:txBody>
@@ -32065,7 +33752,7 @@
                 <a:ea typeface="Yu Gothic"/>
                 <a:cs typeface="Yu Gothic"/>
               </a:rPr>
-              <a:t>RECAP: 提案（論文: π*0.6）</a:t>
+              <a:t>RECAP: アーキテクチャ（論文の図）</a:t>
             </a:r>
           </a:p>
         </p:txBody>
@@ -32111,16 +33798,40 @@
           </a:p>
         </p:txBody>
       </p:sp>
-      <p:sp>
-        <p:nvSpPr>
-          <p:cNvPr id="4" name="TextBox 3"/>
+      <p:pic>
+        <p:nvPicPr>
+          <p:cNvPr id="4" name="fig_recap.png" descr="fig_recap.png"/>
+          <p:cNvPicPr>
+            <a:picLocks noChangeAspect="1"/>
+          </p:cNvPicPr>
+          <p:nvPr/>
+        </p:nvPicPr>
+        <p:blipFill>
+          <a:blip r:embed="rId3"/>
+          <a:stretch>
+            <a:fillRect/>
+          </a:stretch>
+        </p:blipFill>
+        <p:spPr>
+          <a:xfrm>
+            <a:off x="786449" y="960120"/>
+            <a:ext cx="5559421" cy="4434840"/>
+          </a:xfrm>
+          <a:prstGeom prst="rect">
+            <a:avLst/>
+          </a:prstGeom>
+        </p:spPr>
+      </p:pic>
+      <p:sp>
+        <p:nvSpPr>
+          <p:cNvPr id="5" name="TextBox 4"/>
           <p:cNvSpPr txBox="1"/>
           <p:nvPr/>
         </p:nvSpPr>
         <p:spPr>
           <a:xfrm>
-            <a:off x="548640" y="1005840"/>
-            <a:ext cx="6035040" cy="4572000"/>
+            <a:off x="548640" y="5422392"/>
+            <a:ext cx="6035040" cy="274320"/>
           </a:xfrm>
           <a:prstGeom prst="rect">
             <a:avLst/>
@@ -32133,276 +33844,35 @@
           </a:bodyPr>
           <a:lstStyle/>
           <a:p>
-            <a:pPr algn="l" marL="274320" indent="-256032">
+            <a:pPr algn="ctr">
               <a:spcAft>
                 <a:spcPts val="600"/>
               </a:spcAft>
-              <a:buChar char="•"/>
             </a:pPr>
             <a:r>
-              <a:rPr sz="1500" b="1" i="0">
-                <a:solidFill>
-                  <a:srgbClr val="1A1A1A"/>
-                </a:solidFill>
-                <a:latin typeface="Yu Gothic"/>
-                <a:ea typeface="Yu Gothic"/>
-                <a:cs typeface="Yu Gothic"/>
-              </a:rPr>
-              <a:t>考え方</a:t>
-            </a:r>
-            <a:r>
-              <a:rPr sz="1500" b="0" i="0">
-                <a:solidFill>
-                  <a:srgbClr val="1A1A1A"/>
-                </a:solidFill>
-                <a:latin typeface="Yu Gothic"/>
-                <a:ea typeface="Yu Gothic"/>
-                <a:cs typeface="Yu Gothic"/>
-              </a:rPr>
-              <a:t>: うまくいった行動に「良い」の札を付けて学習し、実行時は「良い」の札を付けて動かす</a:t>
-            </a:r>
-          </a:p>
-          <a:p>
-            <a:pPr algn="l" marL="274320" indent="-256032">
-              <a:spcAft>
-                <a:spcPts val="600"/>
-              </a:spcAft>
-              <a:buChar char="•"/>
-            </a:pPr>
-            <a:r>
-              <a:rPr sz="1500" b="0" i="0">
-                <a:solidFill>
-                  <a:srgbClr val="1A1A1A"/>
-                </a:solidFill>
-                <a:latin typeface="Yu Gothic"/>
-                <a:ea typeface="Yu Gothic"/>
-                <a:cs typeface="Yu Gothic"/>
-              </a:rPr>
-              <a:t>次の 3 ステップを繰り返す</a:t>
-            </a:r>
-          </a:p>
-          <a:p>
-            <a:pPr algn="l" marL="585216" indent="-256032">
-              <a:spcAft>
-                <a:spcPts val="600"/>
-              </a:spcAft>
-              <a:buChar char="–"/>
-            </a:pPr>
-            <a:r>
-              <a:rPr sz="1300" b="0" i="0">
-                <a:solidFill>
-                  <a:srgbClr val="1A1A1A"/>
-                </a:solidFill>
-                <a:latin typeface="Yu Gothic"/>
-                <a:ea typeface="Yu Gothic"/>
-                <a:cs typeface="Yu Gothic"/>
-              </a:rPr>
-              <a:t>① </a:t>
-            </a:r>
-            <a:r>
-              <a:rPr sz="1300" b="1" i="0">
-                <a:solidFill>
-                  <a:srgbClr val="1A1A1A"/>
-                </a:solidFill>
-                <a:latin typeface="Yu Gothic"/>
-                <a:ea typeface="Yu Gothic"/>
-                <a:cs typeface="Yu Gothic"/>
-              </a:rPr>
-              <a:t>集める</a:t>
-            </a:r>
-            <a:r>
-              <a:rPr sz="1300" b="0" i="0">
-                <a:solidFill>
-                  <a:srgbClr val="1A1A1A"/>
-                </a:solidFill>
-                <a:latin typeface="Yu Gothic"/>
-                <a:ea typeface="Yu Gothic"/>
-                <a:cs typeface="Yu Gothic"/>
-              </a:rPr>
-              <a:t>: ロボットを動かし、結果（成功/失敗）を記録する</a:t>
-            </a:r>
-          </a:p>
-          <a:p>
-            <a:pPr algn="l" marL="585216" indent="-256032">
-              <a:spcAft>
-                <a:spcPts val="600"/>
-              </a:spcAft>
-              <a:buChar char="–"/>
-            </a:pPr>
-            <a:r>
-              <a:rPr sz="1300" b="0" i="0">
-                <a:solidFill>
-                  <a:srgbClr val="1A1A1A"/>
-                </a:solidFill>
-                <a:latin typeface="Yu Gothic"/>
-                <a:ea typeface="Yu Gothic"/>
-                <a:cs typeface="Yu Gothic"/>
-              </a:rPr>
-              <a:t>② </a:t>
-            </a:r>
-            <a:r>
-              <a:rPr sz="1300" b="1" i="0">
-                <a:solidFill>
-                  <a:srgbClr val="1A1A1A"/>
-                </a:solidFill>
-                <a:latin typeface="Yu Gothic"/>
-                <a:ea typeface="Yu Gothic"/>
-                <a:cs typeface="Yu Gothic"/>
-              </a:rPr>
-              <a:t>価値関数を学習する</a:t>
-            </a:r>
-            <a:r>
-              <a:rPr sz="1300" b="0" i="0">
-                <a:solidFill>
-                  <a:srgbClr val="1A1A1A"/>
-                </a:solidFill>
-                <a:latin typeface="Yu Gothic"/>
-                <a:ea typeface="Yu Gothic"/>
-                <a:cs typeface="Yu Gothic"/>
-              </a:rPr>
-              <a:t>: 「あとどれくらいで成功か」を予想するモデル</a:t>
-            </a:r>
-          </a:p>
-          <a:p>
-            <a:pPr algn="l" marL="585216" indent="-256032">
-              <a:spcAft>
-                <a:spcPts val="600"/>
-              </a:spcAft>
-              <a:buChar char="–"/>
-            </a:pPr>
-            <a:r>
-              <a:rPr sz="1300" b="0" i="0">
-                <a:solidFill>
-                  <a:srgbClr val="1A1A1A"/>
-                </a:solidFill>
-                <a:latin typeface="Yu Gothic"/>
-                <a:ea typeface="Yu Gothic"/>
-                <a:cs typeface="Yu Gothic"/>
-              </a:rPr>
-              <a:t>③ </a:t>
-            </a:r>
-            <a:r>
-              <a:rPr sz="1300" b="1" i="0">
-                <a:solidFill>
-                  <a:srgbClr val="1A1A1A"/>
-                </a:solidFill>
-                <a:latin typeface="Yu Gothic"/>
-                <a:ea typeface="Yu Gothic"/>
-                <a:cs typeface="Yu Gothic"/>
-              </a:rPr>
-              <a:t>方策を学習する</a:t>
-            </a:r>
-            <a:r>
-              <a:rPr sz="1300" b="0" i="0">
-                <a:solidFill>
-                  <a:srgbClr val="1A1A1A"/>
-                </a:solidFill>
-                <a:latin typeface="Yu Gothic"/>
-                <a:ea typeface="Yu Gothic"/>
-                <a:cs typeface="Yu Gothic"/>
-              </a:rPr>
-              <a:t>: 良い行動に「良い」の札を付けて、VLA を学習する</a:t>
-            </a:r>
-          </a:p>
-          <a:p>
-            <a:pPr algn="l" marL="274320" indent="-256032">
-              <a:spcAft>
-                <a:spcPts val="600"/>
-              </a:spcAft>
-              <a:buChar char="•"/>
-            </a:pPr>
-            <a:r>
-              <a:rPr sz="1500" b="1" i="0">
-                <a:solidFill>
-                  <a:srgbClr val="1A1A1A"/>
-                </a:solidFill>
-                <a:latin typeface="Yu Gothic"/>
-                <a:ea typeface="Yu Gothic"/>
-                <a:cs typeface="Yu Gothic"/>
-              </a:rPr>
-              <a:t>利点</a:t>
-            </a:r>
-          </a:p>
-          <a:p>
-            <a:pPr algn="l" marL="585216" indent="-256032">
-              <a:spcAft>
-                <a:spcPts val="600"/>
-              </a:spcAft>
-              <a:buChar char="–"/>
-            </a:pPr>
-            <a:r>
-              <a:rPr sz="1300" b="0" i="0">
-                <a:solidFill>
-                  <a:srgbClr val="1A1A1A"/>
-                </a:solidFill>
-                <a:latin typeface="Yu Gothic"/>
-                <a:ea typeface="Yu Gothic"/>
-                <a:cs typeface="Yu Gothic"/>
-              </a:rPr>
-              <a:t>方策勾配が不要で、flow matching の VLA にもスケールする</a:t>
-            </a:r>
-          </a:p>
-          <a:p>
-            <a:pPr algn="l" marL="585216" indent="-256032">
-              <a:spcAft>
-                <a:spcPts val="600"/>
-              </a:spcAft>
-              <a:buChar char="–"/>
-            </a:pPr>
-            <a:r>
-              <a:rPr sz="1300" b="0" i="0">
-                <a:solidFill>
-                  <a:srgbClr val="1A1A1A"/>
-                </a:solidFill>
-                <a:latin typeface="Yu Gothic"/>
-                <a:ea typeface="Yu Gothic"/>
-                <a:cs typeface="Yu Gothic"/>
-              </a:rPr>
-              <a:t>デモ・自律ロールアウト・人の介入を、同じ枠組みで使える</a:t>
-            </a:r>
-          </a:p>
-          <a:p>
-            <a:pPr algn="l" marL="274320" indent="-256032">
-              <a:spcAft>
-                <a:spcPts val="600"/>
-              </a:spcAft>
-              <a:buChar char="•"/>
-            </a:pPr>
-            <a:r>
-              <a:rPr sz="1500" b="1" i="0">
-                <a:solidFill>
-                  <a:srgbClr val="1A1A1A"/>
-                </a:solidFill>
-                <a:latin typeface="Yu Gothic"/>
-                <a:ea typeface="Yu Gothic"/>
-                <a:cs typeface="Yu Gothic"/>
-              </a:rPr>
-              <a:t>論文の結果</a:t>
-            </a:r>
-            <a:r>
-              <a:rPr sz="1500" b="0" i="0">
-                <a:solidFill>
-                  <a:srgbClr val="1A1A1A"/>
-                </a:solidFill>
-                <a:latin typeface="Yu Gothic"/>
-                <a:ea typeface="Yu Gothic"/>
-                <a:cs typeface="Yu Gothic"/>
-              </a:rPr>
-              <a:t>: 洗濯物たたみ・エスプレッソ作り・箱の組み立てで、成功率とスループットが改善。難しいタスクでは、失敗率が 1/2 以下</a:t>
-            </a:r>
-          </a:p>
-        </p:txBody>
-      </p:sp>
-      <p:sp>
-        <p:nvSpPr>
-          <p:cNvPr id="5" name="① 集める"/>
+              <a:rPr sz="1100" b="0" i="0">
+                <a:solidFill>
+                  <a:srgbClr val="595959"/>
+                </a:solidFill>
+                <a:latin typeface="Yu Gothic"/>
+                <a:ea typeface="Yu Gothic"/>
+                <a:cs typeface="Yu Gothic"/>
+              </a:rPr>
+              <a:t>図: π*0.6 論文（Physical Intelligence）図 3 より</a:t>
+            </a:r>
+          </a:p>
+        </p:txBody>
+      </p:sp>
+      <p:sp>
+        <p:nvSpPr>
+          <p:cNvPr id="6" name="no 1"/>
           <p:cNvSpPr/>
           <p:nvPr/>
         </p:nvSpPr>
         <p:spPr>
           <a:xfrm>
-            <a:off x="7040880" y="1097280"/>
-            <a:ext cx="3291840" cy="914400"/>
+            <a:off x="6766560" y="1005840"/>
+            <a:ext cx="457200" cy="1005840"/>
           </a:xfrm>
           <a:prstGeom prst="roundRect">
             <a:avLst>
@@ -32410,12 +33880,10 @@
             </a:avLst>
           </a:prstGeom>
           <a:solidFill>
-            <a:srgbClr val="E8F1FB"/>
+            <a:srgbClr val="0B66C3"/>
           </a:solidFill>
-          <a:ln w="12700">
-            <a:solidFill>
-              <a:srgbClr val="0B66C3"/>
-            </a:solidFill>
+          <a:ln>
+            <a:noFill/>
           </a:ln>
         </p:spPr>
         <p:style>
@@ -32438,43 +33906,29 @@
           <a:p>
             <a:pPr algn="ctr"/>
             <a:r>
-              <a:rPr sz="1500" b="1" i="0">
-                <a:solidFill>
-                  <a:srgbClr val="1A1A1A"/>
-                </a:solidFill>
-                <a:latin typeface="Yu Gothic"/>
-                <a:ea typeface="Yu Gothic"/>
-                <a:cs typeface="Yu Gothic"/>
-              </a:rPr>
-              <a:t>① 集める</a:t>
-            </a:r>
-          </a:p>
-          <a:p>
-            <a:pPr algn="ctr"/>
-            <a:r>
-              <a:rPr sz="1500" b="1" i="0">
-                <a:solidFill>
-                  <a:srgbClr val="1A1A1A"/>
-                </a:solidFill>
-                <a:latin typeface="Yu Gothic"/>
-                <a:ea typeface="Yu Gothic"/>
-                <a:cs typeface="Yu Gothic"/>
-              </a:rPr>
-              <a:t>（ロールアウト）</a:t>
-            </a:r>
-          </a:p>
-        </p:txBody>
-      </p:sp>
-      <p:sp>
-        <p:nvSpPr>
-          <p:cNvPr id="6" name="② 価値関数 V を学習"/>
+              <a:rPr sz="1600" b="1" i="0">
+                <a:solidFill>
+                  <a:srgbClr val="FFFFFF"/>
+                </a:solidFill>
+                <a:latin typeface="Yu Gothic"/>
+                <a:ea typeface="Yu Gothic"/>
+                <a:cs typeface="Yu Gothic"/>
+              </a:rPr>
+              <a:t>1</a:t>
+            </a:r>
+          </a:p>
+        </p:txBody>
+      </p:sp>
+      <p:sp>
+        <p:nvSpPr>
+          <p:cNvPr id="7" name="note 1"/>
           <p:cNvSpPr/>
           <p:nvPr/>
         </p:nvSpPr>
         <p:spPr>
           <a:xfrm>
-            <a:off x="7040880" y="2514600"/>
-            <a:ext cx="3291840" cy="914400"/>
+            <a:off x="7269480" y="1005840"/>
+            <a:ext cx="4343400" cy="1005840"/>
           </a:xfrm>
           <a:prstGeom prst="roundRect">
             <a:avLst>
@@ -32482,11 +33936,11 @@
             </a:avLst>
           </a:prstGeom>
           <a:solidFill>
-            <a:srgbClr val="E8F1FB"/>
+            <a:srgbClr val="F3F7FC"/>
           </a:solidFill>
           <a:ln w="12700">
             <a:solidFill>
-              <a:srgbClr val="0B66C3"/>
+              <a:srgbClr val="BFBFBF"/>
             </a:solidFill>
           </a:ln>
         </p:spPr>
@@ -32508,45 +33962,45 @@
           <a:bodyPr rtlCol="0" anchor="ctr" wrap="square" lIns="73152" rIns="73152" tIns="36576" bIns="36576"/>
           <a:lstStyle/>
           <a:p>
-            <a:pPr algn="ctr"/>
-            <a:r>
-              <a:rPr sz="1500" b="1" i="0">
-                <a:solidFill>
-                  <a:srgbClr val="1A1A1A"/>
-                </a:solidFill>
-                <a:latin typeface="Yu Gothic"/>
-                <a:ea typeface="Yu Gothic"/>
-                <a:cs typeface="Yu Gothic"/>
-              </a:rPr>
-              <a:t>② 価値関数 V を学習</a:t>
-            </a:r>
-          </a:p>
-          <a:p>
-            <a:pPr algn="ctr"/>
-            <a:r>
-              <a:rPr sz="1500" b="1" i="0">
-                <a:solidFill>
-                  <a:srgbClr val="1A1A1A"/>
-                </a:solidFill>
-                <a:latin typeface="Yu Gothic"/>
-                <a:ea typeface="Yu Gothic"/>
-                <a:cs typeface="Yu Gothic"/>
-              </a:rPr>
-              <a:t>（成功への近さを予想）</a:t>
-            </a:r>
-          </a:p>
-        </p:txBody>
-      </p:sp>
-      <p:sp>
-        <p:nvSpPr>
-          <p:cNvPr id="7" name="③ 「良い」札付きで"/>
+            <a:pPr algn="l"/>
+            <a:r>
+              <a:rPr sz="1300" b="1" i="0">
+                <a:solidFill>
+                  <a:srgbClr val="1A1A1A"/>
+                </a:solidFill>
+                <a:latin typeface="Yu Gothic"/>
+                <a:ea typeface="Yu Gothic"/>
+                <a:cs typeface="Yu Gothic"/>
+              </a:rPr>
+              <a:t>価値関数（図の下）</a:t>
+            </a:r>
+          </a:p>
+          <a:p>
+            <a:pPr algn="l"/>
+            <a:r>
+              <a:rPr sz="1200" b="0" i="0">
+                <a:solidFill>
+                  <a:srgbClr val="1A1A1A"/>
+                </a:solidFill>
+                <a:latin typeface="Yu Gothic"/>
+                <a:ea typeface="Yu Gothic"/>
+                <a:cs typeface="Yu Gothic"/>
+              </a:rPr>
+              <a:t>画像と指示文から、価値 V を出す（SigLIP + Gemma 270M に、value head を付けたもの）</a:t>
+            </a:r>
+          </a:p>
+        </p:txBody>
+      </p:sp>
+      <p:sp>
+        <p:nvSpPr>
+          <p:cNvPr id="8" name="no 2"/>
           <p:cNvSpPr/>
           <p:nvPr/>
         </p:nvSpPr>
         <p:spPr>
           <a:xfrm>
-            <a:off x="7040880" y="3931920"/>
-            <a:ext cx="3291840" cy="914400"/>
+            <a:off x="6766560" y="2084832"/>
+            <a:ext cx="457200" cy="1005840"/>
           </a:xfrm>
           <a:prstGeom prst="roundRect">
             <a:avLst>
@@ -32554,12 +34008,10 @@
             </a:avLst>
           </a:prstGeom>
           <a:solidFill>
-            <a:srgbClr val="E8F1FB"/>
+            <a:srgbClr val="0B66C3"/>
           </a:solidFill>
-          <a:ln w="12700">
-            <a:solidFill>
-              <a:srgbClr val="0B66C3"/>
-            </a:solidFill>
+          <a:ln>
+            <a:noFill/>
           </a:ln>
         </p:spPr>
         <p:style>
@@ -32582,251 +34034,343 @@
           <a:p>
             <a:pPr algn="ctr"/>
             <a:r>
-              <a:rPr sz="1500" b="1" i="0">
-                <a:solidFill>
-                  <a:srgbClr val="1A1A1A"/>
-                </a:solidFill>
-                <a:latin typeface="Yu Gothic"/>
-                <a:ea typeface="Yu Gothic"/>
-                <a:cs typeface="Yu Gothic"/>
-              </a:rPr>
-              <a:t>③ 「良い」札付きで</a:t>
-            </a:r>
-          </a:p>
-          <a:p>
-            <a:pPr algn="ctr"/>
-            <a:r>
-              <a:rPr sz="1500" b="1" i="0">
-                <a:solidFill>
-                  <a:srgbClr val="1A1A1A"/>
-                </a:solidFill>
-                <a:latin typeface="Yu Gothic"/>
-                <a:ea typeface="Yu Gothic"/>
-                <a:cs typeface="Yu Gothic"/>
-              </a:rPr>
-              <a:t>方策を学習</a:t>
-            </a:r>
-          </a:p>
-        </p:txBody>
-      </p:sp>
-      <p:cxnSp>
-        <p:nvCxnSpPr>
-          <p:cNvPr id="8" name="Connector 7"/>
-          <p:cNvCxnSpPr/>
-          <p:nvPr/>
-        </p:nvCxnSpPr>
-        <p:spPr>
-          <a:xfrm>
-            <a:off x="8686800" y="2011680"/>
-            <a:ext cx="0" cy="502920"/>
-          </a:xfrm>
-          <a:prstGeom prst="line">
-            <a:avLst/>
-          </a:prstGeom>
-          <a:ln w="25400">
+              <a:rPr sz="1600" b="1" i="0">
+                <a:solidFill>
+                  <a:srgbClr val="FFFFFF"/>
+                </a:solidFill>
+                <a:latin typeface="Yu Gothic"/>
+                <a:ea typeface="Yu Gothic"/>
+                <a:cs typeface="Yu Gothic"/>
+              </a:rPr>
+              <a:t>2</a:t>
+            </a:r>
+          </a:p>
+        </p:txBody>
+      </p:sp>
+      <p:sp>
+        <p:nvSpPr>
+          <p:cNvPr id="9" name="note 2"/>
+          <p:cNvSpPr/>
+          <p:nvPr/>
+        </p:nvSpPr>
+        <p:spPr>
+          <a:xfrm>
+            <a:off x="7269480" y="2084832"/>
+            <a:ext cx="4343400" cy="1005840"/>
+          </a:xfrm>
+          <a:prstGeom prst="roundRect">
+            <a:avLst>
+              <a:gd name="adj" fmla="val 12000"/>
+            </a:avLst>
+          </a:prstGeom>
+          <a:solidFill>
+            <a:srgbClr val="F3F7FC"/>
+          </a:solidFill>
+          <a:ln w="12700">
             <a:solidFill>
-              <a:srgbClr val="0B66C3"/>
+              <a:srgbClr val="BFBFBF"/>
             </a:solidFill>
-            <a:tailEnd type="triangle" w="med" len="med"/>
           </a:ln>
         </p:spPr>
         <p:style>
-          <a:lnRef idx="2">
+          <a:lnRef idx="1">
             <a:schemeClr val="accent1"/>
           </a:lnRef>
-          <a:fillRef idx="0">
+          <a:fillRef idx="3">
             <a:schemeClr val="accent1"/>
           </a:fillRef>
-          <a:effectRef idx="1">
+          <a:effectRef idx="2">
             <a:schemeClr val="accent1"/>
           </a:effectRef>
           <a:fontRef idx="minor">
-            <a:schemeClr val="tx1"/>
+            <a:schemeClr val="lt1"/>
           </a:fontRef>
         </p:style>
-      </p:cxnSp>
-      <p:cxnSp>
-        <p:nvCxnSpPr>
-          <p:cNvPr id="9" name="Connector 8"/>
-          <p:cNvCxnSpPr/>
-          <p:nvPr/>
-        </p:nvCxnSpPr>
-        <p:spPr>
-          <a:xfrm>
-            <a:off x="8686800" y="3429000"/>
-            <a:ext cx="0" cy="502920"/>
-          </a:xfrm>
-          <a:prstGeom prst="line">
-            <a:avLst/>
-          </a:prstGeom>
-          <a:ln w="25400">
-            <a:solidFill>
-              <a:srgbClr val="0B66C3"/>
-            </a:solidFill>
-            <a:tailEnd type="triangle" w="med" len="med"/>
+        <p:txBody>
+          <a:bodyPr rtlCol="0" anchor="ctr" wrap="square" lIns="73152" rIns="73152" tIns="36576" bIns="36576"/>
+          <a:lstStyle/>
+          <a:p>
+            <a:pPr algn="l"/>
+            <a:r>
+              <a:rPr sz="1300" b="1" i="0">
+                <a:solidFill>
+                  <a:srgbClr val="1A1A1A"/>
+                </a:solidFill>
+                <a:latin typeface="Yu Gothic"/>
+                <a:ea typeface="Yu Gothic"/>
+                <a:cs typeface="Yu Gothic"/>
+              </a:rPr>
+              <a:t>advantage</a:t>
+            </a:r>
+          </a:p>
+          <a:p>
+            <a:pPr algn="l"/>
+            <a:r>
+              <a:rPr sz="1200" b="0" i="0">
+                <a:solidFill>
+                  <a:srgbClr val="1A1A1A"/>
+                </a:solidFill>
+                <a:latin typeface="Yu Gothic"/>
+                <a:ea typeface="Yu Gothic"/>
+                <a:cs typeface="Yu Gothic"/>
+              </a:rPr>
+              <a:t>A = r + V(o_t+N) − V(o_t)。行動の前後で、成功に近づいたか</a:t>
+            </a:r>
+          </a:p>
+        </p:txBody>
+      </p:sp>
+      <p:sp>
+        <p:nvSpPr>
+          <p:cNvPr id="10" name="no 3"/>
+          <p:cNvSpPr/>
+          <p:nvPr/>
+        </p:nvSpPr>
+        <p:spPr>
+          <a:xfrm>
+            <a:off x="6766560" y="3163824"/>
+            <a:ext cx="457200" cy="1005840"/>
+          </a:xfrm>
+          <a:prstGeom prst="roundRect">
+            <a:avLst>
+              <a:gd name="adj" fmla="val 12000"/>
+            </a:avLst>
+          </a:prstGeom>
+          <a:solidFill>
+            <a:srgbClr val="0B66C3"/>
+          </a:solidFill>
+          <a:ln>
+            <a:noFill/>
           </a:ln>
         </p:spPr>
         <p:style>
-          <a:lnRef idx="2">
+          <a:lnRef idx="1">
             <a:schemeClr val="accent1"/>
           </a:lnRef>
-          <a:fillRef idx="0">
+          <a:fillRef idx="3">
             <a:schemeClr val="accent1"/>
           </a:fillRef>
-          <a:effectRef idx="1">
+          <a:effectRef idx="2">
             <a:schemeClr val="accent1"/>
           </a:effectRef>
           <a:fontRef idx="minor">
-            <a:schemeClr val="tx1"/>
+            <a:schemeClr val="lt1"/>
           </a:fontRef>
         </p:style>
-      </p:cxnSp>
-      <p:cxnSp>
-        <p:nvCxnSpPr>
-          <p:cNvPr id="10" name="Connector 9"/>
-          <p:cNvCxnSpPr/>
-          <p:nvPr/>
-        </p:nvCxnSpPr>
-        <p:spPr>
-          <a:xfrm>
-            <a:off x="10332720" y="4389120"/>
-            <a:ext cx="914400" cy="0"/>
-          </a:xfrm>
-          <a:prstGeom prst="line">
-            <a:avLst/>
-          </a:prstGeom>
-          <a:ln w="25400">
+        <p:txBody>
+          <a:bodyPr rtlCol="0" anchor="ctr" wrap="square" lIns="73152" rIns="73152" tIns="36576" bIns="36576"/>
+          <a:lstStyle/>
+          <a:p>
+            <a:pPr algn="ctr"/>
+            <a:r>
+              <a:rPr sz="1600" b="1" i="0">
+                <a:solidFill>
+                  <a:srgbClr val="FFFFFF"/>
+                </a:solidFill>
+                <a:latin typeface="Yu Gothic"/>
+                <a:ea typeface="Yu Gothic"/>
+                <a:cs typeface="Yu Gothic"/>
+              </a:rPr>
+              <a:t>3</a:t>
+            </a:r>
+          </a:p>
+        </p:txBody>
+      </p:sp>
+      <p:sp>
+        <p:nvSpPr>
+          <p:cNvPr id="11" name="note 3"/>
+          <p:cNvSpPr/>
+          <p:nvPr/>
+        </p:nvSpPr>
+        <p:spPr>
+          <a:xfrm>
+            <a:off x="7269480" y="3163824"/>
+            <a:ext cx="4343400" cy="1005840"/>
+          </a:xfrm>
+          <a:prstGeom prst="roundRect">
+            <a:avLst>
+              <a:gd name="adj" fmla="val 12000"/>
+            </a:avLst>
+          </a:prstGeom>
+          <a:solidFill>
+            <a:srgbClr val="F3F7FC"/>
+          </a:solidFill>
+          <a:ln w="12700">
             <a:solidFill>
-              <a:srgbClr val="0B66C3"/>
+              <a:srgbClr val="BFBFBF"/>
             </a:solidFill>
-            <a:tailEnd type="triangle" w="med" len="med"/>
           </a:ln>
         </p:spPr>
         <p:style>
-          <a:lnRef idx="2">
+          <a:lnRef idx="1">
             <a:schemeClr val="accent1"/>
           </a:lnRef>
-          <a:fillRef idx="0">
+          <a:fillRef idx="3">
             <a:schemeClr val="accent1"/>
           </a:fillRef>
-          <a:effectRef idx="1">
+          <a:effectRef idx="2">
             <a:schemeClr val="accent1"/>
           </a:effectRef>
           <a:fontRef idx="minor">
-            <a:schemeClr val="tx1"/>
+            <a:schemeClr val="lt1"/>
           </a:fontRef>
         </p:style>
-      </p:cxnSp>
-      <p:cxnSp>
-        <p:nvCxnSpPr>
-          <p:cNvPr id="11" name="Connector 10"/>
-          <p:cNvCxnSpPr/>
-          <p:nvPr/>
-        </p:nvCxnSpPr>
-        <p:spPr>
-          <a:xfrm flipV="1">
-            <a:off x="11247120" y="1554480"/>
-            <a:ext cx="0" cy="2834640"/>
-          </a:xfrm>
-          <a:prstGeom prst="line">
-            <a:avLst/>
-          </a:prstGeom>
-          <a:ln w="25400">
-            <a:solidFill>
-              <a:srgbClr val="0B66C3"/>
-            </a:solidFill>
-            <a:tailEnd type="triangle" w="med" len="med"/>
+        <p:txBody>
+          <a:bodyPr rtlCol="0" anchor="ctr" wrap="square" lIns="73152" rIns="73152" tIns="36576" bIns="36576"/>
+          <a:lstStyle/>
+          <a:p>
+            <a:pPr algn="l"/>
+            <a:r>
+              <a:rPr sz="1300" b="1" i="0">
+                <a:solidFill>
+                  <a:srgbClr val="1A1A1A"/>
+                </a:solidFill>
+                <a:latin typeface="Yu Gothic"/>
+                <a:ea typeface="Yu Gothic"/>
+                <a:cs typeface="Yu Gothic"/>
+              </a:rPr>
+              <a:t>2 値化</a:t>
+            </a:r>
+          </a:p>
+          <a:p>
+            <a:pPr algn="l"/>
+            <a:r>
+              <a:rPr sz="1200" b="0" i="0">
+                <a:solidFill>
+                  <a:srgbClr val="1A1A1A"/>
+                </a:solidFill>
+                <a:latin typeface="Yu Gothic"/>
+                <a:ea typeface="Yu Gothic"/>
+                <a:cs typeface="Yu Gothic"/>
+              </a:rPr>
+              <a:t>A &gt; ε なら「良い」。この札（metadata）を、VLA の入力に加える</a:t>
+            </a:r>
+          </a:p>
+        </p:txBody>
+      </p:sp>
+      <p:sp>
+        <p:nvSpPr>
+          <p:cNvPr id="12" name="no 4"/>
+          <p:cNvSpPr/>
+          <p:nvPr/>
+        </p:nvSpPr>
+        <p:spPr>
+          <a:xfrm>
+            <a:off x="6766560" y="4242816"/>
+            <a:ext cx="457200" cy="1005840"/>
+          </a:xfrm>
+          <a:prstGeom prst="roundRect">
+            <a:avLst>
+              <a:gd name="adj" fmla="val 12000"/>
+            </a:avLst>
+          </a:prstGeom>
+          <a:solidFill>
+            <a:srgbClr val="0B66C3"/>
+          </a:solidFill>
+          <a:ln>
+            <a:noFill/>
           </a:ln>
         </p:spPr>
         <p:style>
-          <a:lnRef idx="2">
+          <a:lnRef idx="1">
             <a:schemeClr val="accent1"/>
           </a:lnRef>
-          <a:fillRef idx="0">
+          <a:fillRef idx="3">
             <a:schemeClr val="accent1"/>
           </a:fillRef>
-          <a:effectRef idx="1">
+          <a:effectRef idx="2">
             <a:schemeClr val="accent1"/>
           </a:effectRef>
           <a:fontRef idx="minor">
-            <a:schemeClr val="tx1"/>
+            <a:schemeClr val="lt1"/>
           </a:fontRef>
         </p:style>
-      </p:cxnSp>
-      <p:cxnSp>
-        <p:nvCxnSpPr>
-          <p:cNvPr id="12" name="Connector 11"/>
-          <p:cNvCxnSpPr/>
-          <p:nvPr/>
-        </p:nvCxnSpPr>
-        <p:spPr>
-          <a:xfrm flipH="1">
-            <a:off x="10332720" y="1554480"/>
-            <a:ext cx="914400" cy="0"/>
-          </a:xfrm>
-          <a:prstGeom prst="line">
-            <a:avLst/>
-          </a:prstGeom>
-          <a:ln w="25400">
+        <p:txBody>
+          <a:bodyPr rtlCol="0" anchor="ctr" wrap="square" lIns="73152" rIns="73152" tIns="36576" bIns="36576"/>
+          <a:lstStyle/>
+          <a:p>
+            <a:pPr algn="ctr"/>
+            <a:r>
+              <a:rPr sz="1600" b="1" i="0">
+                <a:solidFill>
+                  <a:srgbClr val="FFFFFF"/>
+                </a:solidFill>
+                <a:latin typeface="Yu Gothic"/>
+                <a:ea typeface="Yu Gothic"/>
+                <a:cs typeface="Yu Gothic"/>
+              </a:rPr>
+              <a:t>4</a:t>
+            </a:r>
+          </a:p>
+        </p:txBody>
+      </p:sp>
+      <p:sp>
+        <p:nvSpPr>
+          <p:cNvPr id="13" name="note 4"/>
+          <p:cNvSpPr/>
+          <p:nvPr/>
+        </p:nvSpPr>
+        <p:spPr>
+          <a:xfrm>
+            <a:off x="7269480" y="4242816"/>
+            <a:ext cx="4343400" cy="1005840"/>
+          </a:xfrm>
+          <a:prstGeom prst="roundRect">
+            <a:avLst>
+              <a:gd name="adj" fmla="val 12000"/>
+            </a:avLst>
+          </a:prstGeom>
+          <a:solidFill>
+            <a:srgbClr val="F3F7FC"/>
+          </a:solidFill>
+          <a:ln w="12700">
             <a:solidFill>
-              <a:srgbClr val="0B66C3"/>
+              <a:srgbClr val="BFBFBF"/>
             </a:solidFill>
-            <a:tailEnd type="triangle" w="med" len="med"/>
           </a:ln>
         </p:spPr>
         <p:style>
-          <a:lnRef idx="2">
+          <a:lnRef idx="1">
             <a:schemeClr val="accent1"/>
           </a:lnRef>
-          <a:fillRef idx="0">
+          <a:fillRef idx="3">
             <a:schemeClr val="accent1"/>
           </a:fillRef>
-          <a:effectRef idx="1">
+          <a:effectRef idx="2">
             <a:schemeClr val="accent1"/>
           </a:effectRef>
           <a:fontRef idx="minor">
-            <a:schemeClr val="tx1"/>
+            <a:schemeClr val="lt1"/>
           </a:fontRef>
         </p:style>
-      </p:cxnSp>
-      <p:sp>
-        <p:nvSpPr>
-          <p:cNvPr id="13" name="TextBox 12"/>
-          <p:cNvSpPr txBox="1"/>
-          <p:nvPr/>
-        </p:nvSpPr>
-        <p:spPr>
-          <a:xfrm>
-            <a:off x="10424160" y="4892040"/>
-            <a:ext cx="1463040" cy="548640"/>
-          </a:xfrm>
-          <a:prstGeom prst="rect">
-            <a:avLst/>
-          </a:prstGeom>
-          <a:noFill/>
-        </p:spPr>
-        <p:txBody>
-          <a:bodyPr wrap="square" anchor="t" lIns="45720" rIns="45720" tIns="27432" bIns="27432">
-            <a:spAutoFit/>
-          </a:bodyPr>
-          <a:lstStyle/>
-          <a:p>
-            <a:pPr algn="ctr">
-              <a:spcAft>
-                <a:spcPts val="600"/>
-              </a:spcAft>
-            </a:pPr>
+        <p:txBody>
+          <a:bodyPr rtlCol="0" anchor="ctr" wrap="square" lIns="73152" rIns="73152" tIns="36576" bIns="36576"/>
+          <a:lstStyle/>
+          <a:p>
+            <a:pPr algn="l"/>
+            <a:r>
+              <a:rPr sz="1300" b="1" i="0">
+                <a:solidFill>
+                  <a:srgbClr val="1A1A1A"/>
+                </a:solidFill>
+                <a:latin typeface="Yu Gothic"/>
+                <a:ea typeface="Yu Gothic"/>
+                <a:cs typeface="Yu Gothic"/>
+              </a:rPr>
+              <a:t>VLA（図の上）</a:t>
+            </a:r>
+          </a:p>
+          <a:p>
+            <a:pPr algn="l"/>
             <a:r>
               <a:rPr sz="1200" b="0" i="0">
                 <a:solidFill>
-                  <a:srgbClr val="595959"/>
-                </a:solidFill>
-                <a:latin typeface="Yu Gothic"/>
-                <a:ea typeface="Yu Gothic"/>
-                <a:cs typeface="Yu Gothic"/>
-              </a:rPr>
-              <a:t>新しい方策で
-再収集</a:t>
+                  <a:srgbClr val="1A1A1A"/>
+                </a:solidFill>
+                <a:latin typeface="Yu Gothic"/>
+                <a:ea typeface="Yu Gothic"/>
+                <a:cs typeface="Yu Gothic"/>
+              </a:rPr>
+              <a:t>画像・指示文・札から、行動を出す。離散化した行動と、action expert（860M）が出す連続の行動</a:t>
             </a:r>
           </a:p>
         </p:txBody>
@@ -32884,7 +34428,7 @@
                 <a:ea typeface="Yu Gothic"/>
                 <a:cs typeface="Yu Gothic"/>
               </a:rPr>
-              <a:t>→ 「良い行動」を選んで学習するための札を、価値関数から作る。それが RECAP の核心</a:t>
+              <a:t>→ 価値関数が作った「良い/悪い」の札を、VLA の入力に加えて学習する</a:t>
             </a:r>
           </a:p>
         </p:txBody>

--- a/docs/RECAP_STEAM_RLToken.pptx
+++ b/docs/RECAP_STEAM_RLToken.pptx
@@ -380,328 +380,6 @@
           <a:p>
             <a:r>
               <a:rPr sz="1300" b="1"/>
-              <a:t>critic の学習中の精度（学習データ上）</a:t>
-            </a:r>
-          </a:p>
-        </c:rich>
-      </c:tx>
-      <c:layout/>
-      <c:overlay val="0"/>
-    </c:title>
-    <c:autoTitleDeleted val="0"/>
-    <c:plotArea>
-      <c:lineChart>
-        <c:grouping val="standard"/>
-        <c:varyColors val="0"/>
-        <c:ser>
-          <c:idx val="0"/>
-          <c:order val="0"/>
-          <c:tx>
-            <c:strRef>
-              <c:f>Sheet1!$B$1</c:f>
-              <c:strCache>
-                <c:ptCount val="1"/>
-                <c:pt idx="0">
-                  <c:v>accuracy</c:v>
-                </c:pt>
-              </c:strCache>
-            </c:strRef>
-          </c:tx>
-          <c:spPr>
-            <a:ln w="31750">
-              <a:solidFill>
-                <a:srgbClr val="6B8BB3"/>
-              </a:solidFill>
-            </a:ln>
-          </c:spPr>
-          <c:marker>
-            <c:spPr>
-              <a:solidFill>
-                <a:srgbClr val="6B8BB3"/>
-              </a:solidFill>
-            </c:spPr>
-          </c:marker>
-          <c:cat>
-            <c:strRef>
-              <c:f>Sheet1!$A$2:$A$10</c:f>
-              <c:strCache>
-                <c:ptCount val="9"/>
-                <c:pt idx="0">
-                  <c:v>500-600</c:v>
-                </c:pt>
-                <c:pt idx="1">
-                  <c:v>600-700</c:v>
-                </c:pt>
-                <c:pt idx="2">
-                  <c:v>700-800</c:v>
-                </c:pt>
-                <c:pt idx="3">
-                  <c:v>800-1000</c:v>
-                </c:pt>
-                <c:pt idx="4">
-                  <c:v>1000-1200</c:v>
-                </c:pt>
-                <c:pt idx="5">
-                  <c:v>1200-1400</c:v>
-                </c:pt>
-                <c:pt idx="6">
-                  <c:v>1400-1600</c:v>
-                </c:pt>
-                <c:pt idx="7">
-                  <c:v>1600-1800</c:v>
-                </c:pt>
-                <c:pt idx="8">
-                  <c:v>1800-2000</c:v>
-                </c:pt>
-              </c:strCache>
-            </c:strRef>
-          </c:cat>
-          <c:val>
-            <c:numRef>
-              <c:f>Sheet1!$B$2:$B$10</c:f>
-              <c:numCache>
-                <c:formatCode>General</c:formatCode>
-                <c:ptCount val="9"/>
-                <c:pt idx="0">
-                  <c:v>0.277</c:v>
-                </c:pt>
-                <c:pt idx="1">
-                  <c:v>0.295</c:v>
-                </c:pt>
-                <c:pt idx="2">
-                  <c:v>0.295</c:v>
-                </c:pt>
-                <c:pt idx="3">
-                  <c:v>0.297</c:v>
-                </c:pt>
-                <c:pt idx="4">
-                  <c:v>0.316</c:v>
-                </c:pt>
-                <c:pt idx="5">
-                  <c:v>0.333</c:v>
-                </c:pt>
-                <c:pt idx="6">
-                  <c:v>0.348</c:v>
-                </c:pt>
-                <c:pt idx="7">
-                  <c:v>0.345</c:v>
-                </c:pt>
-                <c:pt idx="8">
-                  <c:v>0.353</c:v>
-                </c:pt>
-              </c:numCache>
-            </c:numRef>
-          </c:val>
-          <c:smooth val="0"/>
-        </c:ser>
-        <c:ser>
-          <c:idx val="1"/>
-          <c:order val="1"/>
-          <c:tx>
-            <c:strRef>
-              <c:f>Sheet1!$C$1</c:f>
-              <c:strCache>
-                <c:ptCount val="1"/>
-                <c:pt idx="0">
-                  <c:v>accuracy（隣接ビンを含む）</c:v>
-                </c:pt>
-              </c:strCache>
-            </c:strRef>
-          </c:tx>
-          <c:spPr>
-            <a:ln w="31750">
-              <a:solidFill>
-                <a:srgbClr val="0B66C3"/>
-              </a:solidFill>
-            </a:ln>
-          </c:spPr>
-          <c:marker>
-            <c:spPr>
-              <a:solidFill>
-                <a:srgbClr val="0B66C3"/>
-              </a:solidFill>
-            </c:spPr>
-          </c:marker>
-          <c:cat>
-            <c:strRef>
-              <c:f>Sheet1!$A$2:$A$10</c:f>
-              <c:strCache>
-                <c:ptCount val="9"/>
-                <c:pt idx="0">
-                  <c:v>500-600</c:v>
-                </c:pt>
-                <c:pt idx="1">
-                  <c:v>600-700</c:v>
-                </c:pt>
-                <c:pt idx="2">
-                  <c:v>700-800</c:v>
-                </c:pt>
-                <c:pt idx="3">
-                  <c:v>800-1000</c:v>
-                </c:pt>
-                <c:pt idx="4">
-                  <c:v>1000-1200</c:v>
-                </c:pt>
-                <c:pt idx="5">
-                  <c:v>1200-1400</c:v>
-                </c:pt>
-                <c:pt idx="6">
-                  <c:v>1400-1600</c:v>
-                </c:pt>
-                <c:pt idx="7">
-                  <c:v>1600-1800</c:v>
-                </c:pt>
-                <c:pt idx="8">
-                  <c:v>1800-2000</c:v>
-                </c:pt>
-              </c:strCache>
-            </c:strRef>
-          </c:cat>
-          <c:val>
-            <c:numRef>
-              <c:f>Sheet1!$C$2:$C$10</c:f>
-              <c:numCache>
-                <c:formatCode>General</c:formatCode>
-                <c:ptCount val="9"/>
-                <c:pt idx="0">
-                  <c:v>0.375</c:v>
-                </c:pt>
-                <c:pt idx="1">
-                  <c:v>0.405</c:v>
-                </c:pt>
-                <c:pt idx="2">
-                  <c:v>0.416</c:v>
-                </c:pt>
-                <c:pt idx="3">
-                  <c:v>0.432</c:v>
-                </c:pt>
-                <c:pt idx="4">
-                  <c:v>0.471</c:v>
-                </c:pt>
-                <c:pt idx="5">
-                  <c:v>0.504</c:v>
-                </c:pt>
-                <c:pt idx="6">
-                  <c:v>0.531</c:v>
-                </c:pt>
-                <c:pt idx="7">
-                  <c:v>0.539</c:v>
-                </c:pt>
-                <c:pt idx="8">
-                  <c:v>0.569</c:v>
-                </c:pt>
-              </c:numCache>
-            </c:numRef>
-          </c:val>
-          <c:smooth val="0"/>
-        </c:ser>
-        <c:marker val="1"/>
-        <c:smooth val="0"/>
-        <c:axId val="2118791784"/>
-        <c:axId val="2140495176"/>
-      </c:lineChart>
-      <c:catAx>
-        <c:axId val="2118791784"/>
-        <c:scaling>
-          <c:orientation val="minMax"/>
-        </c:scaling>
-        <c:delete val="0"/>
-        <c:axPos val="b"/>
-        <c:majorTickMark val="out"/>
-        <c:minorTickMark val="none"/>
-        <c:tickLblPos val="nextTo"/>
-        <c:txPr>
-          <a:bodyPr/>
-          <a:lstStyle/>
-          <a:p>
-            <a:pPr>
-              <a:defRPr sz="1100"/>
-            </a:pPr>
-          </a:p>
-        </c:txPr>
-        <c:crossAx val="2140495176"/>
-        <c:crosses val="autoZero"/>
-        <c:auto val="1"/>
-        <c:lblAlgn val="ctr"/>
-        <c:lblOffset val="100"/>
-        <c:noMultiLvlLbl val="0"/>
-      </c:catAx>
-      <c:valAx>
-        <c:axId val="2140495176"/>
-        <c:scaling>
-          <c:max val="0.65"/>
-          <c:min val="0.2"/>
-        </c:scaling>
-        <c:delete val="0"/>
-        <c:axPos val="l"/>
-        <c:majorGridlines>
-          <c:spPr>
-            <a:ln>
-              <a:solidFill>
-                <a:srgbClr val="D9D9D9"/>
-              </a:solidFill>
-            </a:ln>
-          </c:spPr>
-        </c:majorGridlines>
-        <c:majorTickMark val="out"/>
-        <c:minorTickMark val="none"/>
-        <c:tickLblPos val="nextTo"/>
-        <c:txPr>
-          <a:bodyPr/>
-          <a:lstStyle/>
-          <a:p>
-            <a:pPr>
-              <a:defRPr sz="1200"/>
-            </a:pPr>
-          </a:p>
-        </c:txPr>
-        <c:crossAx val="2118791784"/>
-        <c:crosses val="autoZero"/>
-        <c:majorUnit val="0.1"/>
-      </c:valAx>
-    </c:plotArea>
-    <c:legend>
-      <c:legendPos val="b"/>
-      <c:layout/>
-      <c:overlay val="0"/>
-    </c:legend>
-    <c:plotVisOnly val="1"/>
-    <c:dispBlanksAs val="gap"/>
-    <c:showDLblsOverMax val="0"/>
-  </c:chart>
-  <c:txPr>
-    <a:bodyPr/>
-    <a:lstStyle/>
-    <a:p>
-      <a:pPr>
-        <a:defRPr sz="1200">
-          <a:solidFill>
-            <a:srgbClr val="1A1A1A"/>
-          </a:solidFill>
-          <a:latin typeface="Yu Gothic"/>
-        </a:defRPr>
-      </a:pPr>
-      <a:endParaRPr lang="en-US"/>
-    </a:p>
-  </c:txPr>
-  <c:externalData r:id="rId1">
-    <c:autoUpdate val="0"/>
-  </c:externalData>
-</c:chartSpace>
-</file>
-
-<file path=ppt/charts/chart3.xml><?xml version="1.0" encoding="utf-8"?>
-<c:chartSpace xmlns:c="http://schemas.openxmlformats.org/drawingml/2006/chart" xmlns:a="http://schemas.openxmlformats.org/drawingml/2006/main" xmlns:r="http://schemas.openxmlformats.org/officeDocument/2006/relationships">
-  <c:date1904 val="0"/>
-  <c:chart>
-    <c:title>
-      <c:tx>
-        <c:rich>
-          <a:bodyPr/>
-          <a:lstStyle/>
-          <a:p>
-            <a:r>
-              <a:rPr sz="1300" b="1"/>
               <a:t>RL Token（smolVLA）の success_once</a:t>
             </a:r>
           </a:p>
@@ -913,7 +591,7 @@
 </c:chartSpace>
 </file>
 
-<file path=ppt/charts/chart4.xml><?xml version="1.0" encoding="utf-8"?>
+<file path=ppt/charts/chart3.xml><?xml version="1.0" encoding="utf-8"?>
 <c:chartSpace xmlns:c="http://schemas.openxmlformats.org/drawingml/2006/chart" xmlns:a="http://schemas.openxmlformats.org/drawingml/2006/main" xmlns:r="http://schemas.openxmlformats.org/officeDocument/2006/relationships">
   <c:date1904 val="0"/>
   <c:chart>
@@ -2386,7 +2064,7 @@
           <a:lstStyle/>
           <a:p>
             <a:r>
-              <a:t>グラフは学習中の指標（学習データ上）。検証データの値は左の箇条書き。</a:t>
+              <a:t>Step1〜4 と評価（Step9）。RECAP の実装スライドと同じ形式。Step 名は私たちのパイプラインの番号。</a:t>
             </a:r>
           </a:p>
         </p:txBody>
@@ -18889,14 +18567,508 @@
       </p:sp>
       <p:sp>
         <p:nvSpPr>
-          <p:cNvPr id="4" name="TextBox 3"/>
+          <p:cNvPr id="4" name="step 0"/>
+          <p:cNvSpPr/>
+          <p:nvPr/>
+        </p:nvSpPr>
+        <p:spPr>
+          <a:xfrm>
+            <a:off x="548640" y="1005840"/>
+            <a:ext cx="2011680" cy="868680"/>
+          </a:xfrm>
+          <a:prstGeom prst="roundRect">
+            <a:avLst>
+              <a:gd name="adj" fmla="val 12000"/>
+            </a:avLst>
+          </a:prstGeom>
+          <a:solidFill>
+            <a:srgbClr val="0B66C3"/>
+          </a:solidFill>
+          <a:ln>
+            <a:noFill/>
+          </a:ln>
+        </p:spPr>
+        <p:style>
+          <a:lnRef idx="1">
+            <a:schemeClr val="accent1"/>
+          </a:lnRef>
+          <a:fillRef idx="3">
+            <a:schemeClr val="accent1"/>
+          </a:fillRef>
+          <a:effectRef idx="2">
+            <a:schemeClr val="accent1"/>
+          </a:effectRef>
+          <a:fontRef idx="minor">
+            <a:schemeClr val="lt1"/>
+          </a:fontRef>
+        </p:style>
+        <p:txBody>
+          <a:bodyPr rtlCol="0" anchor="ctr" wrap="square" lIns="73152" rIns="73152" tIns="36576" bIns="36576"/>
+          <a:lstStyle/>
+          <a:p>
+            <a:pPr algn="ctr"/>
+            <a:r>
+              <a:rPr sz="1400" b="1" i="0">
+                <a:solidFill>
+                  <a:srgbClr val="FFFFFF"/>
+                </a:solidFill>
+                <a:latin typeface="Yu Gothic"/>
+                <a:ea typeface="Yu Gothic"/>
+                <a:cs typeface="Yu Gothic"/>
+              </a:rPr>
+              <a:t>Step1</a:t>
+            </a:r>
+          </a:p>
+          <a:p>
+            <a:pPr algn="ctr"/>
+            <a:r>
+              <a:rPr sz="1400" b="1" i="0">
+                <a:solidFill>
+                  <a:srgbClr val="FFFFFF"/>
+                </a:solidFill>
+                <a:latin typeface="Yu Gothic"/>
+                <a:ea typeface="Yu Gothic"/>
+                <a:cs typeface="Yu Gothic"/>
+              </a:rPr>
+              <a:t>フレームペアの作成</a:t>
+            </a:r>
+          </a:p>
+        </p:txBody>
+      </p:sp>
+      <p:cxnSp>
+        <p:nvCxnSpPr>
+          <p:cNvPr id="5" name="Connector 4"/>
+          <p:cNvCxnSpPr/>
+          <p:nvPr/>
+        </p:nvCxnSpPr>
+        <p:spPr>
+          <a:xfrm>
+            <a:off x="2560320" y="1435608"/>
+            <a:ext cx="274320" cy="0"/>
+          </a:xfrm>
+          <a:prstGeom prst="line">
+            <a:avLst/>
+          </a:prstGeom>
+          <a:ln w="25400">
+            <a:solidFill>
+              <a:srgbClr val="595959"/>
+            </a:solidFill>
+            <a:tailEnd type="triangle" w="med" len="med"/>
+          </a:ln>
+        </p:spPr>
+        <p:style>
+          <a:lnRef idx="2">
+            <a:schemeClr val="accent1"/>
+          </a:lnRef>
+          <a:fillRef idx="0">
+            <a:schemeClr val="accent1"/>
+          </a:fillRef>
+          <a:effectRef idx="1">
+            <a:schemeClr val="accent1"/>
+          </a:effectRef>
+          <a:fontRef idx="minor">
+            <a:schemeClr val="tx1"/>
+          </a:fontRef>
+        </p:style>
+      </p:cxnSp>
+      <p:sp>
+        <p:nvSpPr>
+          <p:cNvPr id="6" name="step 1"/>
+          <p:cNvSpPr/>
+          <p:nvPr/>
+        </p:nvSpPr>
+        <p:spPr>
+          <a:xfrm>
+            <a:off x="2834640" y="1005840"/>
+            <a:ext cx="2011680" cy="868680"/>
+          </a:xfrm>
+          <a:prstGeom prst="roundRect">
+            <a:avLst>
+              <a:gd name="adj" fmla="val 12000"/>
+            </a:avLst>
+          </a:prstGeom>
+          <a:solidFill>
+            <a:srgbClr val="0B66C3"/>
+          </a:solidFill>
+          <a:ln>
+            <a:noFill/>
+          </a:ln>
+        </p:spPr>
+        <p:style>
+          <a:lnRef idx="1">
+            <a:schemeClr val="accent1"/>
+          </a:lnRef>
+          <a:fillRef idx="3">
+            <a:schemeClr val="accent1"/>
+          </a:fillRef>
+          <a:effectRef idx="2">
+            <a:schemeClr val="accent1"/>
+          </a:effectRef>
+          <a:fontRef idx="minor">
+            <a:schemeClr val="lt1"/>
+          </a:fontRef>
+        </p:style>
+        <p:txBody>
+          <a:bodyPr rtlCol="0" anchor="ctr" wrap="square" lIns="73152" rIns="73152" tIns="36576" bIns="36576"/>
+          <a:lstStyle/>
+          <a:p>
+            <a:pPr algn="ctr"/>
+            <a:r>
+              <a:rPr sz="1400" b="1" i="0">
+                <a:solidFill>
+                  <a:srgbClr val="FFFFFF"/>
+                </a:solidFill>
+                <a:latin typeface="Yu Gothic"/>
+                <a:ea typeface="Yu Gothic"/>
+                <a:cs typeface="Yu Gothic"/>
+              </a:rPr>
+              <a:t>Step2</a:t>
+            </a:r>
+          </a:p>
+          <a:p>
+            <a:pPr algn="ctr"/>
+            <a:r>
+              <a:rPr sz="1400" b="1" i="0">
+                <a:solidFill>
+                  <a:srgbClr val="FFFFFF"/>
+                </a:solidFill>
+                <a:latin typeface="Yu Gothic"/>
+                <a:ea typeface="Yu Gothic"/>
+                <a:cs typeface="Yu Gothic"/>
+              </a:rPr>
+              <a:t>critic の学習</a:t>
+            </a:r>
+          </a:p>
+        </p:txBody>
+      </p:sp>
+      <p:cxnSp>
+        <p:nvCxnSpPr>
+          <p:cNvPr id="7" name="Connector 6"/>
+          <p:cNvCxnSpPr/>
+          <p:nvPr/>
+        </p:nvCxnSpPr>
+        <p:spPr>
+          <a:xfrm>
+            <a:off x="4846320" y="1435608"/>
+            <a:ext cx="274320" cy="0"/>
+          </a:xfrm>
+          <a:prstGeom prst="line">
+            <a:avLst/>
+          </a:prstGeom>
+          <a:ln w="25400">
+            <a:solidFill>
+              <a:srgbClr val="595959"/>
+            </a:solidFill>
+            <a:tailEnd type="triangle" w="med" len="med"/>
+          </a:ln>
+        </p:spPr>
+        <p:style>
+          <a:lnRef idx="2">
+            <a:schemeClr val="accent1"/>
+          </a:lnRef>
+          <a:fillRef idx="0">
+            <a:schemeClr val="accent1"/>
+          </a:fillRef>
+          <a:effectRef idx="1">
+            <a:schemeClr val="accent1"/>
+          </a:effectRef>
+          <a:fontRef idx="minor">
+            <a:schemeClr val="tx1"/>
+          </a:fontRef>
+        </p:style>
+      </p:cxnSp>
+      <p:sp>
+        <p:nvSpPr>
+          <p:cNvPr id="8" name="step 2"/>
+          <p:cNvSpPr/>
+          <p:nvPr/>
+        </p:nvSpPr>
+        <p:spPr>
+          <a:xfrm>
+            <a:off x="5120640" y="1005840"/>
+            <a:ext cx="2011680" cy="868680"/>
+          </a:xfrm>
+          <a:prstGeom prst="roundRect">
+            <a:avLst>
+              <a:gd name="adj" fmla="val 12000"/>
+            </a:avLst>
+          </a:prstGeom>
+          <a:solidFill>
+            <a:srgbClr val="0B66C3"/>
+          </a:solidFill>
+          <a:ln>
+            <a:noFill/>
+          </a:ln>
+        </p:spPr>
+        <p:style>
+          <a:lnRef idx="1">
+            <a:schemeClr val="accent1"/>
+          </a:lnRef>
+          <a:fillRef idx="3">
+            <a:schemeClr val="accent1"/>
+          </a:fillRef>
+          <a:effectRef idx="2">
+            <a:schemeClr val="accent1"/>
+          </a:effectRef>
+          <a:fontRef idx="minor">
+            <a:schemeClr val="lt1"/>
+          </a:fontRef>
+        </p:style>
+        <p:txBody>
+          <a:bodyPr rtlCol="0" anchor="ctr" wrap="square" lIns="73152" rIns="73152" tIns="36576" bIns="36576"/>
+          <a:lstStyle/>
+          <a:p>
+            <a:pPr algn="ctr"/>
+            <a:r>
+              <a:rPr sz="1400" b="1" i="0">
+                <a:solidFill>
+                  <a:srgbClr val="FFFFFF"/>
+                </a:solidFill>
+                <a:latin typeface="Yu Gothic"/>
+                <a:ea typeface="Yu Gothic"/>
+                <a:cs typeface="Yu Gothic"/>
+              </a:rPr>
+              <a:t>Step3</a:t>
+            </a:r>
+          </a:p>
+          <a:p>
+            <a:pPr algn="ctr"/>
+            <a:r>
+              <a:rPr sz="1400" b="1" i="0">
+                <a:solidFill>
+                  <a:srgbClr val="FFFFFF"/>
+                </a:solidFill>
+                <a:latin typeface="Yu Gothic"/>
+                <a:ea typeface="Yu Gothic"/>
+                <a:cs typeface="Yu Gothic"/>
+              </a:rPr>
+              <a:t>advantage の計算</a:t>
+            </a:r>
+          </a:p>
+        </p:txBody>
+      </p:sp>
+      <p:cxnSp>
+        <p:nvCxnSpPr>
+          <p:cNvPr id="9" name="Connector 8"/>
+          <p:cNvCxnSpPr/>
+          <p:nvPr/>
+        </p:nvCxnSpPr>
+        <p:spPr>
+          <a:xfrm>
+            <a:off x="7132320" y="1435608"/>
+            <a:ext cx="274320" cy="0"/>
+          </a:xfrm>
+          <a:prstGeom prst="line">
+            <a:avLst/>
+          </a:prstGeom>
+          <a:ln w="25400">
+            <a:solidFill>
+              <a:srgbClr val="595959"/>
+            </a:solidFill>
+            <a:tailEnd type="triangle" w="med" len="med"/>
+          </a:ln>
+        </p:spPr>
+        <p:style>
+          <a:lnRef idx="2">
+            <a:schemeClr val="accent1"/>
+          </a:lnRef>
+          <a:fillRef idx="0">
+            <a:schemeClr val="accent1"/>
+          </a:fillRef>
+          <a:effectRef idx="1">
+            <a:schemeClr val="accent1"/>
+          </a:effectRef>
+          <a:fontRef idx="minor">
+            <a:schemeClr val="tx1"/>
+          </a:fontRef>
+        </p:style>
+      </p:cxnSp>
+      <p:sp>
+        <p:nvSpPr>
+          <p:cNvPr id="10" name="step 3"/>
+          <p:cNvSpPr/>
+          <p:nvPr/>
+        </p:nvSpPr>
+        <p:spPr>
+          <a:xfrm>
+            <a:off x="7406640" y="1005840"/>
+            <a:ext cx="2011680" cy="868680"/>
+          </a:xfrm>
+          <a:prstGeom prst="roundRect">
+            <a:avLst>
+              <a:gd name="adj" fmla="val 12000"/>
+            </a:avLst>
+          </a:prstGeom>
+          <a:solidFill>
+            <a:srgbClr val="0B66C3"/>
+          </a:solidFill>
+          <a:ln>
+            <a:noFill/>
+          </a:ln>
+        </p:spPr>
+        <p:style>
+          <a:lnRef idx="1">
+            <a:schemeClr val="accent1"/>
+          </a:lnRef>
+          <a:fillRef idx="3">
+            <a:schemeClr val="accent1"/>
+          </a:fillRef>
+          <a:effectRef idx="2">
+            <a:schemeClr val="accent1"/>
+          </a:effectRef>
+          <a:fontRef idx="minor">
+            <a:schemeClr val="lt1"/>
+          </a:fontRef>
+        </p:style>
+        <p:txBody>
+          <a:bodyPr rtlCol="0" anchor="ctr" wrap="square" lIns="73152" rIns="73152" tIns="36576" bIns="36576"/>
+          <a:lstStyle/>
+          <a:p>
+            <a:pPr algn="ctr"/>
+            <a:r>
+              <a:rPr sz="1400" b="1" i="0">
+                <a:solidFill>
+                  <a:srgbClr val="FFFFFF"/>
+                </a:solidFill>
+                <a:latin typeface="Yu Gothic"/>
+                <a:ea typeface="Yu Gothic"/>
+                <a:cs typeface="Yu Gothic"/>
+              </a:rPr>
+              <a:t>Step4</a:t>
+            </a:r>
+          </a:p>
+          <a:p>
+            <a:pPr algn="ctr"/>
+            <a:r>
+              <a:rPr sz="1400" b="1" i="0">
+                <a:solidFill>
+                  <a:srgbClr val="FFFFFF"/>
+                </a:solidFill>
+                <a:latin typeface="Yu Gothic"/>
+                <a:ea typeface="Yu Gothic"/>
+                <a:cs typeface="Yu Gothic"/>
+              </a:rPr>
+              <a:t>方策の学習（SFT）</a:t>
+            </a:r>
+          </a:p>
+        </p:txBody>
+      </p:sp>
+      <p:cxnSp>
+        <p:nvCxnSpPr>
+          <p:cNvPr id="11" name="Connector 10"/>
+          <p:cNvCxnSpPr/>
+          <p:nvPr/>
+        </p:nvCxnSpPr>
+        <p:spPr>
+          <a:xfrm>
+            <a:off x="9418320" y="1435608"/>
+            <a:ext cx="274320" cy="0"/>
+          </a:xfrm>
+          <a:prstGeom prst="line">
+            <a:avLst/>
+          </a:prstGeom>
+          <a:ln w="25400">
+            <a:solidFill>
+              <a:srgbClr val="595959"/>
+            </a:solidFill>
+            <a:tailEnd type="triangle" w="med" len="med"/>
+          </a:ln>
+        </p:spPr>
+        <p:style>
+          <a:lnRef idx="2">
+            <a:schemeClr val="accent1"/>
+          </a:lnRef>
+          <a:fillRef idx="0">
+            <a:schemeClr val="accent1"/>
+          </a:fillRef>
+          <a:effectRef idx="1">
+            <a:schemeClr val="accent1"/>
+          </a:effectRef>
+          <a:fontRef idx="minor">
+            <a:schemeClr val="tx1"/>
+          </a:fontRef>
+        </p:style>
+      </p:cxnSp>
+      <p:sp>
+        <p:nvSpPr>
+          <p:cNvPr id="12" name="step 4"/>
+          <p:cNvSpPr/>
+          <p:nvPr/>
+        </p:nvSpPr>
+        <p:spPr>
+          <a:xfrm>
+            <a:off x="9692640" y="1005840"/>
+            <a:ext cx="2011680" cy="868680"/>
+          </a:xfrm>
+          <a:prstGeom prst="roundRect">
+            <a:avLst>
+              <a:gd name="adj" fmla="val 12000"/>
+            </a:avLst>
+          </a:prstGeom>
+          <a:solidFill>
+            <a:srgbClr val="2E8B57"/>
+          </a:solidFill>
+          <a:ln>
+            <a:noFill/>
+          </a:ln>
+        </p:spPr>
+        <p:style>
+          <a:lnRef idx="1">
+            <a:schemeClr val="accent1"/>
+          </a:lnRef>
+          <a:fillRef idx="3">
+            <a:schemeClr val="accent1"/>
+          </a:fillRef>
+          <a:effectRef idx="2">
+            <a:schemeClr val="accent1"/>
+          </a:effectRef>
+          <a:fontRef idx="minor">
+            <a:schemeClr val="lt1"/>
+          </a:fontRef>
+        </p:style>
+        <p:txBody>
+          <a:bodyPr rtlCol="0" anchor="ctr" wrap="square" lIns="73152" rIns="73152" tIns="36576" bIns="36576"/>
+          <a:lstStyle/>
+          <a:p>
+            <a:pPr algn="ctr"/>
+            <a:r>
+              <a:rPr sz="1400" b="1" i="0">
+                <a:solidFill>
+                  <a:srgbClr val="FFFFFF"/>
+                </a:solidFill>
+                <a:latin typeface="Yu Gothic"/>
+                <a:ea typeface="Yu Gothic"/>
+                <a:cs typeface="Yu Gothic"/>
+              </a:rPr>
+              <a:t>Step9</a:t>
+            </a:r>
+          </a:p>
+          <a:p>
+            <a:pPr algn="ctr"/>
+            <a:r>
+              <a:rPr sz="1400" b="1" i="0">
+                <a:solidFill>
+                  <a:srgbClr val="FFFFFF"/>
+                </a:solidFill>
+                <a:latin typeface="Yu Gothic"/>
+                <a:ea typeface="Yu Gothic"/>
+                <a:cs typeface="Yu Gothic"/>
+              </a:rPr>
+              <a:t>シミュレータで評価</a:t>
+            </a:r>
+          </a:p>
+        </p:txBody>
+      </p:sp>
+      <p:sp>
+        <p:nvSpPr>
+          <p:cNvPr id="13" name="TextBox 12"/>
           <p:cNvSpPr txBox="1"/>
           <p:nvPr/>
         </p:nvSpPr>
         <p:spPr>
           <a:xfrm>
-            <a:off x="548640" y="1005840"/>
-            <a:ext cx="5486400" cy="4572000"/>
+            <a:off x="548640" y="2103120"/>
+            <a:ext cx="11064240" cy="3566160"/>
           </a:xfrm>
           <a:prstGeom prst="rect">
             <a:avLst/>
@@ -18911,307 +19083,265 @@
           <a:p>
             <a:pPr algn="l" marL="274320" indent="-256032">
               <a:spcAft>
-                <a:spcPts val="400"/>
+                <a:spcPts val="600"/>
               </a:spcAft>
               <a:buChar char="•"/>
             </a:pPr>
             <a:r>
-              <a:rPr sz="1500" b="1" i="0">
-                <a:solidFill>
-                  <a:srgbClr val="1A1A1A"/>
-                </a:solidFill>
-                <a:latin typeface="Yu Gothic"/>
-                <a:ea typeface="Yu Gothic"/>
-                <a:cs typeface="Yu Gothic"/>
-              </a:rPr>
-              <a:t>critic</a:t>
-            </a:r>
-            <a:r>
-              <a:rPr sz="1500" b="0" i="0">
-                <a:solidFill>
-                  <a:srgbClr val="1A1A1A"/>
-                </a:solidFill>
-                <a:latin typeface="Yu Gothic"/>
-                <a:ea typeface="Yu Gothic"/>
-                <a:cs typeface="Yu Gothic"/>
-              </a:rPr>
-              <a:t>: SigLIP so400m + Gemma3-270M。k = 32 ステップ先との時間オフセットを、32 ビンの分布で予測</a:t>
+              <a:rPr sz="1600" b="1" i="0">
+                <a:solidFill>
+                  <a:srgbClr val="1A1A1A"/>
+                </a:solidFill>
+                <a:latin typeface="Yu Gothic"/>
+                <a:ea typeface="Yu Gothic"/>
+                <a:cs typeface="Yu Gothic"/>
+              </a:rPr>
+              <a:t>Step1</a:t>
+            </a:r>
+            <a:r>
+              <a:rPr sz="1600" b="0" i="0">
+                <a:solidFill>
+                  <a:srgbClr val="1A1A1A"/>
+                </a:solidFill>
+                <a:latin typeface="Yu Gothic"/>
+                <a:ea typeface="Yu Gothic"/>
+                <a:cs typeface="Yu Gothic"/>
+              </a:rPr>
+              <a:t>: 人のデモ 3 本（重み 4）と、成功ロールアウトから、k = 32 ステップ先とのフレームペアを作る。逆再生のペアは、負の時間差。時間差は軌跡長で正規化し、32 ビンに分ける</a:t>
             </a:r>
           </a:p>
           <a:p>
             <a:pPr algn="l" marL="274320" indent="-256032">
               <a:spcAft>
-                <a:spcPts val="400"/>
+                <a:spcPts val="600"/>
               </a:spcAft>
               <a:buChar char="•"/>
             </a:pPr>
             <a:r>
-              <a:rPr sz="1500" b="1" i="0">
-                <a:solidFill>
-                  <a:srgbClr val="1A1A1A"/>
-                </a:solidFill>
-                <a:latin typeface="Yu Gothic"/>
-                <a:ea typeface="Yu Gothic"/>
-                <a:cs typeface="Yu Gothic"/>
-              </a:rPr>
-              <a:t>学習</a:t>
-            </a:r>
-            <a:r>
-              <a:rPr sz="1500" b="0" i="0">
-                <a:solidFill>
-                  <a:srgbClr val="1A1A1A"/>
-                </a:solidFill>
-                <a:latin typeface="Yu Gothic"/>
-                <a:ea typeface="Yu Gothic"/>
-                <a:cs typeface="Yu Gothic"/>
-              </a:rPr>
-              <a:t>: 人のデモ 3 本（重み 4）と、成功ロールアウト。2,000 step</a:t>
+              <a:rPr sz="1600" b="1" i="0">
+                <a:solidFill>
+                  <a:srgbClr val="1A1A1A"/>
+                </a:solidFill>
+                <a:latin typeface="Yu Gothic"/>
+                <a:ea typeface="Yu Gothic"/>
+                <a:cs typeface="Yu Gothic"/>
+              </a:rPr>
+              <a:t>Step2</a:t>
+            </a:r>
+            <a:r>
+              <a:rPr sz="1600" b="0" i="0">
+                <a:solidFill>
+                  <a:srgbClr val="1A1A1A"/>
+                </a:solidFill>
+                <a:latin typeface="Yu Gothic"/>
+                <a:ea typeface="Yu Gothic"/>
+                <a:cs typeface="Yu Gothic"/>
+              </a:rPr>
+              <a:t>: critic（SigLIP so400m + Gemma3-270M）が、時間差の 32 ビンの分布を予測（</a:t>
+            </a:r>
+            <a:r>
+              <a:rPr sz="1600" b="1" i="0">
+                <a:solidFill>
+                  <a:srgbClr val="1A1A1A"/>
+                </a:solidFill>
+                <a:latin typeface="Yu Gothic"/>
+                <a:ea typeface="Yu Gothic"/>
+                <a:cs typeface="Yu Gothic"/>
+              </a:rPr>
+              <a:t>2,000 step、バッチ 64、8.3 時間</a:t>
+            </a:r>
+            <a:r>
+              <a:rPr sz="1600" b="0" i="0">
+                <a:solidFill>
+                  <a:srgbClr val="1A1A1A"/>
+                </a:solidFill>
+                <a:latin typeface="Yu Gothic"/>
+                <a:ea typeface="Yu Gothic"/>
+                <a:cs typeface="Yu Gothic"/>
+              </a:rPr>
+              <a:t>、RTX A5000 24GB）</a:t>
+            </a:r>
+          </a:p>
+          <a:p>
+            <a:pPr algn="l" marL="585216" indent="-256032">
+              <a:spcAft>
+                <a:spcPts val="600"/>
+              </a:spcAft>
+              <a:buChar char="–"/>
+            </a:pPr>
+            <a:r>
+              <a:rPr sz="1400" b="0" i="0">
+                <a:solidFill>
+                  <a:srgbClr val="1A1A1A"/>
+                </a:solidFill>
+                <a:latin typeface="Yu Gothic"/>
+                <a:ea typeface="Yu Gothic"/>
+                <a:cs typeface="Yu Gothic"/>
+              </a:rPr>
+              <a:t>学習データ上の accuracy は 0.277 → 0.353。未知のロールアウト（step 600）では 0.106 と低い</a:t>
             </a:r>
           </a:p>
           <a:p>
             <a:pPr algn="l" marL="274320" indent="-256032">
               <a:spcAft>
-                <a:spcPts val="400"/>
+                <a:spcPts val="600"/>
               </a:spcAft>
               <a:buChar char="•"/>
             </a:pPr>
             <a:r>
-              <a:rPr sz="1500" b="1" i="0">
-                <a:solidFill>
-                  <a:srgbClr val="1A1A1A"/>
-                </a:solidFill>
-                <a:latin typeface="Yu Gothic"/>
-                <a:ea typeface="Yu Gothic"/>
-                <a:cs typeface="Yu Gothic"/>
-              </a:rPr>
-              <a:t>advantage</a:t>
-            </a:r>
-            <a:r>
-              <a:rPr sz="1500" b="0" i="0">
-                <a:solidFill>
-                  <a:srgbClr val="1A1A1A"/>
-                </a:solidFill>
-                <a:latin typeface="Yu Gothic"/>
-                <a:ea typeface="Yu Gothic"/>
-                <a:cs typeface="Yu Gothic"/>
-              </a:rPr>
-              <a:t>: ロールアウトは上位 30%、デモは上位 80% を positive（アンサンブルのメンバー数は 1）</a:t>
+              <a:rPr sz="1600" b="1" i="0">
+                <a:solidFill>
+                  <a:srgbClr val="1A1A1A"/>
+                </a:solidFill>
+                <a:latin typeface="Yu Gothic"/>
+                <a:ea typeface="Yu Gothic"/>
+                <a:cs typeface="Yu Gothic"/>
+              </a:rPr>
+              <a:t>Step3</a:t>
+            </a:r>
+            <a:r>
+              <a:rPr sz="1600" b="0" i="0">
+                <a:solidFill>
+                  <a:srgbClr val="1A1A1A"/>
+                </a:solidFill>
+                <a:latin typeface="Yu Gothic"/>
+                <a:ea typeface="Yu Gothic"/>
+                <a:cs typeface="Yu Gothic"/>
+              </a:rPr>
+              <a:t>: ペアの予想から advantage を作る（アンサンブルのメンバーは 1 個）。ロールアウトの上位 30%、デモの上位 80% を positive（</a:t>
+            </a:r>
+            <a:r>
+              <a:rPr sz="1600" b="1" i="0">
+                <a:solidFill>
+                  <a:srgbClr val="1A1A1A"/>
+                </a:solidFill>
+                <a:latin typeface="Yu Gothic"/>
+                <a:ea typeface="Yu Gothic"/>
+                <a:cs typeface="Yu Gothic"/>
+              </a:rPr>
+              <a:t>1 データセット約 2.4 時間</a:t>
+            </a:r>
+            <a:r>
+              <a:rPr sz="1600" b="0" i="0">
+                <a:solidFill>
+                  <a:srgbClr val="1A1A1A"/>
+                </a:solidFill>
+                <a:latin typeface="Yu Gothic"/>
+                <a:ea typeface="Yu Gothic"/>
+                <a:cs typeface="Yu Gothic"/>
+              </a:rPr>
+              <a:t>、RTX A5000）</a:t>
             </a:r>
           </a:p>
           <a:p>
             <a:pPr algn="l" marL="274320" indent="-256032">
               <a:spcAft>
-                <a:spcPts val="400"/>
+                <a:spcPts val="600"/>
               </a:spcAft>
               <a:buChar char="•"/>
             </a:pPr>
             <a:r>
-              <a:rPr sz="1500" b="1" i="0">
-                <a:solidFill>
-                  <a:srgbClr val="1A1A1A"/>
-                </a:solidFill>
-                <a:latin typeface="Yu Gothic"/>
-                <a:ea typeface="Yu Gothic"/>
-                <a:cs typeface="Yu Gothic"/>
-              </a:rPr>
-              <a:t>学習データ上の精度</a:t>
-            </a:r>
-            <a:r>
-              <a:rPr sz="1500" b="0" i="0">
-                <a:solidFill>
-                  <a:srgbClr val="1A1A1A"/>
-                </a:solidFill>
-                <a:latin typeface="Yu Gothic"/>
-                <a:ea typeface="Yu Gothic"/>
-                <a:cs typeface="Yu Gothic"/>
-              </a:rPr>
-              <a:t>（step 500 → 2,000）</a:t>
-            </a:r>
-          </a:p>
-          <a:p>
-            <a:pPr algn="l" marL="585216" indent="-256032">
-              <a:spcAft>
-                <a:spcPts val="400"/>
-              </a:spcAft>
-              <a:buChar char="–"/>
-            </a:pPr>
-            <a:r>
-              <a:rPr sz="1300" b="0" i="0">
-                <a:solidFill>
-                  <a:srgbClr val="1A1A1A"/>
-                </a:solidFill>
-                <a:latin typeface="Yu Gothic"/>
-                <a:ea typeface="Yu Gothic"/>
-                <a:cs typeface="Yu Gothic"/>
-              </a:rPr>
-              <a:t>accuracy 0.277 → 0.353</a:t>
-            </a:r>
-          </a:p>
-          <a:p>
-            <a:pPr algn="l" marL="585216" indent="-256032">
-              <a:spcAft>
-                <a:spcPts val="400"/>
-              </a:spcAft>
-              <a:buChar char="–"/>
-            </a:pPr>
-            <a:r>
-              <a:rPr sz="1300" b="0" i="0">
-                <a:solidFill>
-                  <a:srgbClr val="1A1A1A"/>
-                </a:solidFill>
-                <a:latin typeface="Yu Gothic"/>
-                <a:ea typeface="Yu Gothic"/>
-                <a:cs typeface="Yu Gothic"/>
-              </a:rPr>
-              <a:t>隣接ビンを含む accuracy 0.375 → 0.569</a:t>
+              <a:rPr sz="1600" b="1" i="0">
+                <a:solidFill>
+                  <a:srgbClr val="1A1A1A"/>
+                </a:solidFill>
+                <a:latin typeface="Yu Gothic"/>
+                <a:ea typeface="Yu Gothic"/>
+                <a:cs typeface="Yu Gothic"/>
+              </a:rPr>
+              <a:t>Step4</a:t>
+            </a:r>
+            <a:r>
+              <a:rPr sz="1600" b="0" i="0">
+                <a:solidFill>
+                  <a:srgbClr val="1A1A1A"/>
+                </a:solidFill>
+                <a:latin typeface="Yu Gothic"/>
+                <a:ea typeface="Yu Gothic"/>
+                <a:cs typeface="Yu Gothic"/>
+              </a:rPr>
+              <a:t>: 札付き SFT で 1,000 step、続けて positive のフレームだけで 450 step（プロンプトなし）（</a:t>
+            </a:r>
+            <a:r>
+              <a:rPr sz="1600" b="1" i="0">
+                <a:solidFill>
+                  <a:srgbClr val="1A1A1A"/>
+                </a:solidFill>
+                <a:latin typeface="Yu Gothic"/>
+                <a:ea typeface="Yu Gothic"/>
+                <a:cs typeface="Yu Gothic"/>
+              </a:rPr>
+              <a:t>合計 1,450 step、16.5 時間</a:t>
+            </a:r>
+            <a:r>
+              <a:rPr sz="1600" b="0" i="0">
+                <a:solidFill>
+                  <a:srgbClr val="1A1A1A"/>
+                </a:solidFill>
+                <a:latin typeface="Yu Gothic"/>
+                <a:ea typeface="Yu Gothic"/>
+                <a:cs typeface="Yu Gothic"/>
+              </a:rPr>
+              <a:t>、RTX A5000）</a:t>
             </a:r>
           </a:p>
           <a:p>
             <a:pPr algn="l" marL="274320" indent="-256032">
               <a:spcAft>
-                <a:spcPts val="400"/>
+                <a:spcPts val="600"/>
               </a:spcAft>
               <a:buChar char="•"/>
             </a:pPr>
             <a:r>
-              <a:rPr sz="1500" b="1" i="0">
-                <a:solidFill>
-                  <a:srgbClr val="1A1A1A"/>
-                </a:solidFill>
-                <a:latin typeface="Yu Gothic"/>
-                <a:ea typeface="Yu Gothic"/>
-                <a:cs typeface="Yu Gothic"/>
-              </a:rPr>
-              <a:t>未知のロールアウト</a:t>
-            </a:r>
-            <a:r>
-              <a:rPr sz="1500" b="0" i="0">
-                <a:solidFill>
-                  <a:srgbClr val="1A1A1A"/>
-                </a:solidFill>
-                <a:latin typeface="Yu Gothic"/>
-                <a:ea typeface="Yu Gothic"/>
-                <a:cs typeface="Yu Gothic"/>
-              </a:rPr>
-              <a:t>（eval 64 本、step 600）: accuracy 0.106、隣接 0.189。失敗エピソードを含むため、学習時より低い</a:t>
-            </a:r>
-          </a:p>
-          <a:p>
-            <a:pPr algn="l" marL="274320" indent="-256032">
-              <a:spcAft>
-                <a:spcPts val="400"/>
-              </a:spcAft>
-              <a:buChar char="•"/>
-            </a:pPr>
-            <a:r>
-              <a:rPr sz="1500" b="1" i="0">
-                <a:solidFill>
-                  <a:srgbClr val="1A1A1A"/>
-                </a:solidFill>
-                <a:latin typeface="Yu Gothic"/>
-                <a:ea typeface="Yu Gothic"/>
-                <a:cs typeface="Yu Gothic"/>
-              </a:rPr>
-              <a:t>Step4 の結果</a:t>
-            </a:r>
-            <a:r>
-              <a:rPr sz="1500" b="0" i="0">
-                <a:solidFill>
-                  <a:srgbClr val="1A1A1A"/>
-                </a:solidFill>
-                <a:latin typeface="Yu Gothic"/>
-                <a:ea typeface="Yu Gothic"/>
-                <a:cs typeface="Yu Gothic"/>
-              </a:rPr>
-              <a:t>: 0.52（正例のみで学習、step 1,450、プロンプトなし）。プロンプトありは 0.42、両側タグは 0.36</a:t>
-            </a:r>
-          </a:p>
-          <a:p>
-            <a:pPr algn="l" marL="274320" indent="-256032">
-              <a:spcAft>
-                <a:spcPts val="400"/>
-              </a:spcAft>
-              <a:buChar char="•"/>
-            </a:pPr>
-            <a:r>
-              <a:rPr sz="1500" b="1" i="0">
-                <a:solidFill>
-                  <a:srgbClr val="1A1A1A"/>
-                </a:solidFill>
-                <a:latin typeface="Yu Gothic"/>
-                <a:ea typeface="Yu Gothic"/>
-                <a:cs typeface="Yu Gothic"/>
-              </a:rPr>
-              <a:t>学習コスト</a:t>
-            </a:r>
-            <a:r>
-              <a:rPr sz="1500" b="0" i="0">
-                <a:solidFill>
-                  <a:srgbClr val="1A1A1A"/>
-                </a:solidFill>
-                <a:latin typeface="Yu Gothic"/>
-                <a:ea typeface="Yu Gothic"/>
-                <a:cs typeface="Yu Gothic"/>
-              </a:rPr>
-              <a:t>（RTX A5000 24GB）: critic </a:t>
-            </a:r>
-            <a:r>
-              <a:rPr sz="1500" b="1" i="0">
-                <a:solidFill>
-                  <a:srgbClr val="1A1A1A"/>
-                </a:solidFill>
-                <a:latin typeface="Yu Gothic"/>
-                <a:ea typeface="Yu Gothic"/>
-                <a:cs typeface="Yu Gothic"/>
-              </a:rPr>
-              <a:t>2,000 step（バッチ 64）、8.3 時間</a:t>
-            </a:r>
-            <a:r>
-              <a:rPr sz="1500" b="0" i="0">
-                <a:solidFill>
-                  <a:srgbClr val="1A1A1A"/>
-                </a:solidFill>
-                <a:latin typeface="Yu Gothic"/>
-                <a:ea typeface="Yu Gothic"/>
-                <a:cs typeface="Yu Gothic"/>
-              </a:rPr>
-              <a:t>。Step4 は </a:t>
-            </a:r>
-            <a:r>
-              <a:rPr sz="1500" b="1" i="0">
-                <a:solidFill>
-                  <a:srgbClr val="1A1A1A"/>
-                </a:solidFill>
-                <a:latin typeface="Yu Gothic"/>
-                <a:ea typeface="Yu Gothic"/>
-                <a:cs typeface="Yu Gothic"/>
-              </a:rPr>
-              <a:t>1,450 step、16.5 時間</a:t>
-            </a:r>
-          </a:p>
-        </p:txBody>
-      </p:sp>
-      <p:graphicFrame>
-        <p:nvGraphicFramePr>
-          <p:cNvPr id="5" name="Chart 4"/>
-          <p:cNvGraphicFramePr>
-            <a:graphicFrameLocks noGrp="1"/>
-          </p:cNvGraphicFramePr>
-          <p:nvPr/>
-        </p:nvGraphicFramePr>
-        <p:xfrm>
-          <a:off x="6217920" y="1005840"/>
-          <a:ext cx="5486400" cy="4480560"/>
-        </p:xfrm>
-        <a:graphic>
-          <a:graphicData uri="http://schemas.openxmlformats.org/drawingml/2006/chart">
-            <c:chart xmlns:c="http://schemas.openxmlformats.org/drawingml/2006/chart" r:id="rId3"/>
-          </a:graphicData>
-        </a:graphic>
-      </p:graphicFrame>
-      <p:sp>
-        <p:nvSpPr>
-          <p:cNvPr id="6" name="key point"/>
+              <a:rPr sz="1600" b="1" i="0">
+                <a:solidFill>
+                  <a:srgbClr val="1A1A1A"/>
+                </a:solidFill>
+                <a:latin typeface="Yu Gothic"/>
+                <a:ea typeface="Yu Gothic"/>
+                <a:cs typeface="Yu Gothic"/>
+              </a:rPr>
+              <a:t>Step9</a:t>
+            </a:r>
+            <a:r>
+              <a:rPr sz="1600" b="0" i="0">
+                <a:solidFill>
+                  <a:srgbClr val="1A1A1A"/>
+                </a:solidFill>
+                <a:latin typeface="Yu Gothic"/>
+                <a:ea typeface="Yu Gothic"/>
+                <a:cs typeface="Yu Gothic"/>
+              </a:rPr>
+              <a:t>: success_once は </a:t>
+            </a:r>
+            <a:r>
+              <a:rPr sz="1600" b="1" i="0">
+                <a:solidFill>
+                  <a:srgbClr val="1A1A1A"/>
+                </a:solidFill>
+                <a:latin typeface="Yu Gothic"/>
+                <a:ea typeface="Yu Gothic"/>
+                <a:cs typeface="Yu Gothic"/>
+              </a:rPr>
+              <a:t>0.52</a:t>
+            </a:r>
+            <a:r>
+              <a:rPr sz="1600" b="0" i="0">
+                <a:solidFill>
+                  <a:srgbClr val="1A1A1A"/>
+                </a:solidFill>
+                <a:latin typeface="Yu Gothic"/>
+                <a:ea typeface="Yu Gothic"/>
+                <a:cs typeface="Yu Gothic"/>
+              </a:rPr>
+              <a:t>（最良。ベース 0.40）。札付き SFT（プロンプトあり）は 0.42、両側タグは 0.36</a:t>
+            </a:r>
+          </a:p>
+        </p:txBody>
+      </p:sp>
+      <p:sp>
+        <p:nvSpPr>
+          <p:cNvPr id="14" name="key point"/>
           <p:cNvSpPr/>
           <p:nvPr/>
         </p:nvSpPr>

--- a/docs/RECAP_STEAM_RLToken.pptx
+++ b/docs/RECAP_STEAM_RLToken.pptx
@@ -31734,8 +31734,8 @@
         </p:nvSpPr>
         <p:spPr>
           <a:xfrm>
-            <a:off x="6309360" y="1051560"/>
-            <a:ext cx="1554480" cy="777240"/>
+            <a:off x="6309360" y="1005840"/>
+            <a:ext cx="1737360" cy="676656"/>
           </a:xfrm>
           <a:prstGeom prst="roundRect">
             <a:avLst>
@@ -31769,7 +31769,7 @@
           <a:p>
             <a:pPr algn="ctr"/>
             <a:r>
-              <a:rPr sz="1500" b="1" i="0">
+              <a:rPr sz="1400" b="1" i="0">
                 <a:solidFill>
                   <a:srgbClr val="FFFFFF"/>
                 </a:solidFill>
@@ -31790,8 +31790,8 @@
         </p:nvSpPr>
         <p:spPr>
           <a:xfrm>
-            <a:off x="7955279" y="1033271"/>
-            <a:ext cx="3749039" cy="822960"/>
+            <a:off x="8138160" y="987552"/>
+            <a:ext cx="3566160" cy="713232"/>
           </a:xfrm>
           <a:prstGeom prst="rect">
             <a:avLst/>
@@ -31831,8 +31831,8 @@
         </p:nvSpPr>
         <p:spPr>
           <a:xfrm>
-            <a:off x="6309360" y="1956815"/>
-            <a:ext cx="1554480" cy="777240"/>
+            <a:off x="6309360" y="1773936"/>
+            <a:ext cx="1737360" cy="676656"/>
           </a:xfrm>
           <a:prstGeom prst="roundRect">
             <a:avLst>
@@ -31866,7 +31866,7 @@
           <a:p>
             <a:pPr algn="ctr"/>
             <a:r>
-              <a:rPr sz="1500" b="1" i="0">
+              <a:rPr sz="1400" b="1" i="0">
                 <a:solidFill>
                   <a:srgbClr val="FFFFFF"/>
                 </a:solidFill>
@@ -31887,8 +31887,8 @@
         </p:nvSpPr>
         <p:spPr>
           <a:xfrm>
-            <a:off x="7955279" y="1938527"/>
-            <a:ext cx="3749039" cy="822960"/>
+            <a:off x="8138160" y="1755648"/>
+            <a:ext cx="3566160" cy="713232"/>
           </a:xfrm>
           <a:prstGeom prst="rect">
             <a:avLst/>
@@ -31928,8 +31928,8 @@
         </p:nvSpPr>
         <p:spPr>
           <a:xfrm>
-            <a:off x="6309360" y="2862072"/>
-            <a:ext cx="1554480" cy="777240"/>
+            <a:off x="6309360" y="2542032"/>
+            <a:ext cx="1737360" cy="676656"/>
           </a:xfrm>
           <a:prstGeom prst="roundRect">
             <a:avLst>
@@ -31963,7 +31963,7 @@
           <a:p>
             <a:pPr algn="ctr"/>
             <a:r>
-              <a:rPr sz="1500" b="1" i="0">
+              <a:rPr sz="1400" b="1" i="0">
                 <a:solidFill>
                   <a:srgbClr val="FFFFFF"/>
                 </a:solidFill>
@@ -31984,8 +31984,8 @@
         </p:nvSpPr>
         <p:spPr>
           <a:xfrm>
-            <a:off x="7955279" y="2843784"/>
-            <a:ext cx="3749039" cy="822960"/>
+            <a:off x="8138160" y="2523744"/>
+            <a:ext cx="3566160" cy="713232"/>
           </a:xfrm>
           <a:prstGeom prst="rect">
             <a:avLst/>
@@ -32025,8 +32025,8 @@
         </p:nvSpPr>
         <p:spPr>
           <a:xfrm>
-            <a:off x="6309360" y="3767327"/>
-            <a:ext cx="1554480" cy="777240"/>
+            <a:off x="6309360" y="3310128"/>
+            <a:ext cx="1737360" cy="676656"/>
           </a:xfrm>
           <a:prstGeom prst="roundRect">
             <a:avLst>
@@ -32060,7 +32060,7 @@
           <a:p>
             <a:pPr algn="ctr"/>
             <a:r>
-              <a:rPr sz="1500" b="1" i="0">
+              <a:rPr sz="1400" b="1" i="0">
                 <a:solidFill>
                   <a:srgbClr val="FFFFFF"/>
                 </a:solidFill>
@@ -32081,8 +32081,8 @@
         </p:nvSpPr>
         <p:spPr>
           <a:xfrm>
-            <a:off x="7955279" y="3749039"/>
-            <a:ext cx="3749039" cy="822960"/>
+            <a:off x="8138160" y="3291840"/>
+            <a:ext cx="3566160" cy="713232"/>
           </a:xfrm>
           <a:prstGeom prst="rect">
             <a:avLst/>
@@ -32122,8 +32122,8 @@
         </p:nvSpPr>
         <p:spPr>
           <a:xfrm>
-            <a:off x="6309360" y="4672583"/>
-            <a:ext cx="1554480" cy="777240"/>
+            <a:off x="6309360" y="4078224"/>
+            <a:ext cx="1737360" cy="676656"/>
           </a:xfrm>
           <a:prstGeom prst="roundRect">
             <a:avLst>
@@ -32157,7 +32157,7 @@
           <a:p>
             <a:pPr algn="ctr"/>
             <a:r>
-              <a:rPr sz="1500" b="1" i="0">
+              <a:rPr sz="1400" b="1" i="0">
                 <a:solidFill>
                   <a:srgbClr val="FFFFFF"/>
                 </a:solidFill>
@@ -32178,8 +32178,8 @@
         </p:nvSpPr>
         <p:spPr>
           <a:xfrm>
-            <a:off x="7955279" y="4654296"/>
-            <a:ext cx="3749039" cy="822960"/>
+            <a:off x="8138160" y="4059936"/>
+            <a:ext cx="3566160" cy="713232"/>
           </a:xfrm>
           <a:prstGeom prst="rect">
             <a:avLst/>
@@ -32213,7 +32213,104 @@
       </p:sp>
       <p:sp>
         <p:nvSpPr>
-          <p:cNvPr id="23" name="key point"/>
+          <p:cNvPr id="23" name="term 評価者（critic）"/>
+          <p:cNvSpPr/>
+          <p:nvPr/>
+        </p:nvSpPr>
+        <p:spPr>
+          <a:xfrm>
+            <a:off x="6309360" y="4846320"/>
+            <a:ext cx="1737360" cy="676656"/>
+          </a:xfrm>
+          <a:prstGeom prst="roundRect">
+            <a:avLst>
+              <a:gd name="adj" fmla="val 12000"/>
+            </a:avLst>
+          </a:prstGeom>
+          <a:solidFill>
+            <a:srgbClr val="0B66C3"/>
+          </a:solidFill>
+          <a:ln>
+            <a:noFill/>
+          </a:ln>
+        </p:spPr>
+        <p:style>
+          <a:lnRef idx="1">
+            <a:schemeClr val="accent1"/>
+          </a:lnRef>
+          <a:fillRef idx="3">
+            <a:schemeClr val="accent1"/>
+          </a:fillRef>
+          <a:effectRef idx="2">
+            <a:schemeClr val="accent1"/>
+          </a:effectRef>
+          <a:fontRef idx="minor">
+            <a:schemeClr val="lt1"/>
+          </a:fontRef>
+        </p:style>
+        <p:txBody>
+          <a:bodyPr rtlCol="0" anchor="ctr" wrap="square" lIns="73152" rIns="73152" tIns="36576" bIns="36576"/>
+          <a:lstStyle/>
+          <a:p>
+            <a:pPr algn="ctr"/>
+            <a:r>
+              <a:rPr sz="1400" b="1" i="0">
+                <a:solidFill>
+                  <a:srgbClr val="FFFFFF"/>
+                </a:solidFill>
+                <a:latin typeface="Yu Gothic"/>
+                <a:ea typeface="Yu Gothic"/>
+                <a:cs typeface="Yu Gothic"/>
+              </a:rPr>
+              <a:t>評価者（critic）</a:t>
+            </a:r>
+          </a:p>
+        </p:txBody>
+      </p:sp>
+      <p:sp>
+        <p:nvSpPr>
+          <p:cNvPr id="24" name="def 評価者（critic）"/>
+          <p:cNvSpPr txBox="1"/>
+          <p:nvPr/>
+        </p:nvSpPr>
+        <p:spPr>
+          <a:xfrm>
+            <a:off x="8138160" y="4828032"/>
+            <a:ext cx="3566160" cy="713232"/>
+          </a:xfrm>
+          <a:prstGeom prst="rect">
+            <a:avLst/>
+          </a:prstGeom>
+          <a:noFill/>
+        </p:spPr>
+        <p:txBody>
+          <a:bodyPr wrap="square" anchor="ctr" lIns="45720" rIns="45720" tIns="27432" bIns="27432">
+            <a:spAutoFit/>
+          </a:bodyPr>
+          <a:lstStyle/>
+          <a:p>
+            <a:pPr algn="l">
+              <a:spcAft>
+                <a:spcPts val="600"/>
+              </a:spcAft>
+            </a:pPr>
+            <a:r>
+              <a:rPr sz="1300" b="0" i="0">
+                <a:solidFill>
+                  <a:srgbClr val="1A1A1A"/>
+                </a:solidFill>
+                <a:latin typeface="Yu Gothic"/>
+                <a:ea typeface="Yu Gothic"/>
+                <a:cs typeface="Yu Gothic"/>
+              </a:rPr>
+              <a:t>状態や行動の良さを、数値で答えるモデル。RECAP は価値関数 V、STEAM は時間差を当てる critic</a:t>
+            </a:r>
+          </a:p>
+        </p:txBody>
+      </p:sp>
+      <p:sp>
+        <p:nvSpPr>
+          <p:cNvPr id="25" name="key point"/>
           <p:cNvSpPr/>
           <p:nvPr/>
         </p:nvSpPr>
@@ -32264,7 +32361,7 @@
                 <a:ea typeface="Yu Gothic"/>
                 <a:cs typeface="Yu Gothic"/>
               </a:rPr>
-              <a:t>→ RL は「やってみて、結果の良し悪しから、良い行動を増やす」学習。RECAP・STEAM は advantage を使う</a:t>
+              <a:t>→ RL は、結果から良い行動を増やす学習。RECAP・STEAM は、評価者（critic）で advantage を作る</a:t>
             </a:r>
           </a:p>
         </p:txBody>

--- a/docs/RECAP_STEAM_RLToken.pptx
+++ b/docs/RECAP_STEAM_RLToken.pptx
@@ -369,229 +369,6 @@
 </file>
 
 <file path=ppt/charts/chart2.xml><?xml version="1.0" encoding="utf-8"?>
-<c:chartSpace xmlns:c="http://schemas.openxmlformats.org/drawingml/2006/chart" xmlns:a="http://schemas.openxmlformats.org/drawingml/2006/main" xmlns:r="http://schemas.openxmlformats.org/officeDocument/2006/relationships">
-  <c:date1904 val="0"/>
-  <c:chart>
-    <c:title>
-      <c:tx>
-        <c:rich>
-          <a:bodyPr/>
-          <a:lstStyle/>
-          <a:p>
-            <a:r>
-              <a:rPr sz="1300" b="1"/>
-              <a:t>RL Token（smolVLA）の success_once</a:t>
-            </a:r>
-          </a:p>
-        </c:rich>
-      </c:tx>
-      <c:layout/>
-      <c:overlay val="0"/>
-    </c:title>
-    <c:autoTitleDeleted val="0"/>
-    <c:plotArea>
-      <c:barChart>
-        <c:barDir val="col"/>
-        <c:grouping val="clustered"/>
-        <c:ser>
-          <c:idx val="0"/>
-          <c:order val="0"/>
-          <c:tx>
-            <c:strRef>
-              <c:f>Sheet1!$B$1</c:f>
-              <c:strCache>
-                <c:ptCount val="1"/>
-                <c:pt idx="0">
-                  <c:v>success_once</c:v>
-                </c:pt>
-              </c:strCache>
-            </c:strRef>
-          </c:tx>
-          <c:dPt>
-            <c:idx val="0"/>
-            <c:spPr>
-              <a:solidFill>
-                <a:srgbClr val="BFBFBF"/>
-              </a:solidFill>
-            </c:spPr>
-          </c:dPt>
-          <c:dPt>
-            <c:idx val="1"/>
-            <c:spPr>
-              <a:solidFill>
-                <a:srgbClr val="6B8BB3"/>
-              </a:solidFill>
-            </c:spPr>
-          </c:dPt>
-          <c:dPt>
-            <c:idx val="2"/>
-            <c:spPr>
-              <a:solidFill>
-                <a:srgbClr val="0B66C3"/>
-              </a:solidFill>
-            </c:spPr>
-          </c:dPt>
-          <c:dPt>
-            <c:idx val="3"/>
-            <c:spPr>
-              <a:solidFill>
-                <a:srgbClr val="2E8B57"/>
-              </a:solidFill>
-            </c:spPr>
-          </c:dPt>
-          <c:cat>
-            <c:strRef>
-              <c:f>Sheet1!$A$2:$A$5</c:f>
-              <c:strCache>
-                <c:ptCount val="4"/>
-                <c:pt idx="0">
-                  <c:v>VLA のみ</c:v>
-                </c:pt>
-                <c:pt idx="1">
-                  <c:v>1 つ目を
-RL</c:v>
-                </c:pt>
-                <c:pt idx="2">
-                  <c:v>2 局面
-ゲート</c:v>
-                </c:pt>
-                <c:pt idx="3">
-                  <c:v>+ 2 つ目専用
-+ 空振り罰</c:v>
-                </c:pt>
-              </c:strCache>
-            </c:strRef>
-          </c:cat>
-          <c:val>
-            <c:numRef>
-              <c:f>Sheet1!$B$2:$B$5</c:f>
-              <c:numCache>
-                <c:formatCode>General</c:formatCode>
-                <c:ptCount val="4"/>
-                <c:pt idx="0">
-                  <c:v>0.46</c:v>
-                </c:pt>
-                <c:pt idx="1">
-                  <c:v>0.62</c:v>
-                </c:pt>
-                <c:pt idx="2">
-                  <c:v>0.66</c:v>
-                </c:pt>
-                <c:pt idx="3">
-                  <c:v>0.68</c:v>
-                </c:pt>
-              </c:numCache>
-            </c:numRef>
-          </c:val>
-        </c:ser>
-        <c:dLbls>
-          <c:numFmt formatCode="0.00" sourceLinked="0"/>
-          <c:txPr>
-            <a:bodyPr/>
-            <a:lstStyle/>
-            <a:p>
-              <a:pPr>
-                <a:defRPr sz="1400" b="1"/>
-              </a:pPr>
-            </a:p>
-          </c:txPr>
-          <c:dLblPos val="outEnd"/>
-          <c:showLegendKey val="0"/>
-          <c:showVal val="1"/>
-          <c:showCatName val="0"/>
-          <c:showSerName val="0"/>
-          <c:showPercent val="0"/>
-          <c:showBubbleSize val="0"/>
-          <c:showLeaderLines val="1"/>
-        </c:dLbls>
-        <c:gapWidth val="60"/>
-        <c:axId val="-2068027336"/>
-        <c:axId val="-2113994440"/>
-      </c:barChart>
-      <c:catAx>
-        <c:axId val="-2068027336"/>
-        <c:scaling>
-          <c:orientation val="minMax"/>
-        </c:scaling>
-        <c:delete val="0"/>
-        <c:axPos val="b"/>
-        <c:majorTickMark val="out"/>
-        <c:minorTickMark val="none"/>
-        <c:tickLblPos val="nextTo"/>
-        <c:txPr>
-          <a:bodyPr/>
-          <a:lstStyle/>
-          <a:p>
-            <a:pPr>
-              <a:defRPr sz="1200"/>
-            </a:pPr>
-          </a:p>
-        </c:txPr>
-        <c:crossAx val="-2113994440"/>
-        <c:crosses val="autoZero"/>
-        <c:auto val="1"/>
-        <c:lblAlgn val="ctr"/>
-        <c:lblOffset val="100"/>
-        <c:noMultiLvlLbl val="0"/>
-      </c:catAx>
-      <c:valAx>
-        <c:axId val="-2113994440"/>
-        <c:scaling>
-          <c:max val="0.8"/>
-          <c:min val="0.0"/>
-        </c:scaling>
-        <c:delete val="0"/>
-        <c:axPos val="l"/>
-        <c:majorGridlines>
-          <c:spPr>
-            <a:ln>
-              <a:solidFill>
-                <a:srgbClr val="D9D9D9"/>
-              </a:solidFill>
-            </a:ln>
-          </c:spPr>
-        </c:majorGridlines>
-        <c:majorTickMark val="out"/>
-        <c:minorTickMark val="none"/>
-        <c:tickLblPos val="nextTo"/>
-        <c:txPr>
-          <a:bodyPr/>
-          <a:lstStyle/>
-          <a:p>
-            <a:pPr>
-              <a:defRPr sz="1200"/>
-            </a:pPr>
-          </a:p>
-        </c:txPr>
-        <c:crossAx val="-2068027336"/>
-        <c:crosses val="autoZero"/>
-        <c:majorUnit val="0.2"/>
-      </c:valAx>
-    </c:plotArea>
-    <c:dispBlanksAs val="gap"/>
-  </c:chart>
-  <c:txPr>
-    <a:bodyPr/>
-    <a:lstStyle/>
-    <a:p>
-      <a:pPr>
-        <a:defRPr sz="1200">
-          <a:solidFill>
-            <a:srgbClr val="1A1A1A"/>
-          </a:solidFill>
-          <a:latin typeface="Yu Gothic"/>
-        </a:defRPr>
-      </a:pPr>
-      <a:endParaRPr lang="en-US"/>
-    </a:p>
-  </c:txPr>
-  <c:externalData r:id="rId1">
-    <c:autoUpdate val="0"/>
-  </c:externalData>
-</c:chartSpace>
-</file>
-
-<file path=ppt/charts/chart3.xml><?xml version="1.0" encoding="utf-8"?>
 <c:chartSpace xmlns:c="http://schemas.openxmlformats.org/drawingml/2006/chart" xmlns:a="http://schemas.openxmlformats.org/drawingml/2006/main" xmlns:r="http://schemas.openxmlformats.org/officeDocument/2006/relationships">
   <c:date1904 val="0"/>
   <c:chart>
@@ -2484,7 +2261,7 @@
           <a:lstStyle/>
           <a:p>
             <a:r>
-              <a:t>グラフの 0.46 は、この RL プロトコルでの VLA のみの評価（50 エピソード）。</a:t>
+              <a:t>Step1〜4 と評価（Step9）。RECAP・STEAM の実装スライドと同じ形式。Step 名は私たちのパイプラインの番号。</a:t>
             </a:r>
           </a:p>
         </p:txBody>
@@ -2904,7 +2681,7 @@
           <a:lstStyle/>
           <a:p>
             <a:r>
-              <a:t>RECAP と STEAM は評価者（advantage の作り方）だけが違う。RL Token は、オンラインで行動を洗練する、という整理が主題。</a:t>
+              <a:t>強化学習を知らない人向けの前提。『やってみて、結果から、良い行動を増やす』が一言。</a:t>
             </a:r>
           </a:p>
         </p:txBody>
@@ -2974,7 +2751,7 @@
           <a:lstStyle/>
           <a:p>
             <a:r>
-              <a:t>強化学習を知らない人向けの前提。『やってみて、結果から、良い行動を増やす』が一言。</a:t>
+              <a:t>RECAP と STEAM は評価者（advantage の作り方）だけが違う。RL Token は、オンラインで行動を洗練する、という整理が主題。</a:t>
             </a:r>
           </a:p>
         </p:txBody>
@@ -25091,14 +24868,508 @@
       </p:sp>
       <p:sp>
         <p:nvSpPr>
-          <p:cNvPr id="4" name="TextBox 3"/>
+          <p:cNvPr id="4" name="step 0"/>
+          <p:cNvSpPr/>
+          <p:nvPr/>
+        </p:nvSpPr>
+        <p:spPr>
+          <a:xfrm>
+            <a:off x="548640" y="1005840"/>
+            <a:ext cx="2011680" cy="868680"/>
+          </a:xfrm>
+          <a:prstGeom prst="roundRect">
+            <a:avLst>
+              <a:gd name="adj" fmla="val 12000"/>
+            </a:avLst>
+          </a:prstGeom>
+          <a:solidFill>
+            <a:srgbClr val="0B66C3"/>
+          </a:solidFill>
+          <a:ln>
+            <a:noFill/>
+          </a:ln>
+        </p:spPr>
+        <p:style>
+          <a:lnRef idx="1">
+            <a:schemeClr val="accent1"/>
+          </a:lnRef>
+          <a:fillRef idx="3">
+            <a:schemeClr val="accent1"/>
+          </a:fillRef>
+          <a:effectRef idx="2">
+            <a:schemeClr val="accent1"/>
+          </a:effectRef>
+          <a:fontRef idx="minor">
+            <a:schemeClr val="lt1"/>
+          </a:fontRef>
+        </p:style>
+        <p:txBody>
+          <a:bodyPr rtlCol="0" anchor="ctr" wrap="square" lIns="73152" rIns="73152" tIns="36576" bIns="36576"/>
+          <a:lstStyle/>
+          <a:p>
+            <a:pPr algn="ctr"/>
+            <a:r>
+              <a:rPr sz="1400" b="1" i="0">
+                <a:solidFill>
+                  <a:srgbClr val="FFFFFF"/>
+                </a:solidFill>
+                <a:latin typeface="Yu Gothic"/>
+                <a:ea typeface="Yu Gothic"/>
+                <a:cs typeface="Yu Gothic"/>
+              </a:rPr>
+              <a:t>Step1</a:t>
+            </a:r>
+          </a:p>
+          <a:p>
+            <a:pPr algn="ctr"/>
+            <a:r>
+              <a:rPr sz="1400" b="1" i="0">
+                <a:solidFill>
+                  <a:srgbClr val="FFFFFF"/>
+                </a:solidFill>
+                <a:latin typeface="Yu Gothic"/>
+                <a:ea typeface="Yu Gothic"/>
+                <a:cs typeface="Yu Gothic"/>
+              </a:rPr>
+              <a:t>特徴量の抽出</a:t>
+            </a:r>
+          </a:p>
+        </p:txBody>
+      </p:sp>
+      <p:cxnSp>
+        <p:nvCxnSpPr>
+          <p:cNvPr id="5" name="Connector 4"/>
+          <p:cNvCxnSpPr/>
+          <p:nvPr/>
+        </p:nvCxnSpPr>
+        <p:spPr>
+          <a:xfrm>
+            <a:off x="2560320" y="1435608"/>
+            <a:ext cx="274320" cy="0"/>
+          </a:xfrm>
+          <a:prstGeom prst="line">
+            <a:avLst/>
+          </a:prstGeom>
+          <a:ln w="25400">
+            <a:solidFill>
+              <a:srgbClr val="595959"/>
+            </a:solidFill>
+            <a:tailEnd type="triangle" w="med" len="med"/>
+          </a:ln>
+        </p:spPr>
+        <p:style>
+          <a:lnRef idx="2">
+            <a:schemeClr val="accent1"/>
+          </a:lnRef>
+          <a:fillRef idx="0">
+            <a:schemeClr val="accent1"/>
+          </a:fillRef>
+          <a:effectRef idx="1">
+            <a:schemeClr val="accent1"/>
+          </a:effectRef>
+          <a:fontRef idx="minor">
+            <a:schemeClr val="tx1"/>
+          </a:fontRef>
+        </p:style>
+      </p:cxnSp>
+      <p:sp>
+        <p:nvSpPr>
+          <p:cNvPr id="6" name="step 1"/>
+          <p:cNvSpPr/>
+          <p:nvPr/>
+        </p:nvSpPr>
+        <p:spPr>
+          <a:xfrm>
+            <a:off x="2834640" y="1005840"/>
+            <a:ext cx="2011680" cy="868680"/>
+          </a:xfrm>
+          <a:prstGeom prst="roundRect">
+            <a:avLst>
+              <a:gd name="adj" fmla="val 12000"/>
+            </a:avLst>
+          </a:prstGeom>
+          <a:solidFill>
+            <a:srgbClr val="0B66C3"/>
+          </a:solidFill>
+          <a:ln>
+            <a:noFill/>
+          </a:ln>
+        </p:spPr>
+        <p:style>
+          <a:lnRef idx="1">
+            <a:schemeClr val="accent1"/>
+          </a:lnRef>
+          <a:fillRef idx="3">
+            <a:schemeClr val="accent1"/>
+          </a:fillRef>
+          <a:effectRef idx="2">
+            <a:schemeClr val="accent1"/>
+          </a:effectRef>
+          <a:fontRef idx="minor">
+            <a:schemeClr val="lt1"/>
+          </a:fontRef>
+        </p:style>
+        <p:txBody>
+          <a:bodyPr rtlCol="0" anchor="ctr" wrap="square" lIns="73152" rIns="73152" tIns="36576" bIns="36576"/>
+          <a:lstStyle/>
+          <a:p>
+            <a:pPr algn="ctr"/>
+            <a:r>
+              <a:rPr sz="1400" b="1" i="0">
+                <a:solidFill>
+                  <a:srgbClr val="FFFFFF"/>
+                </a:solidFill>
+                <a:latin typeface="Yu Gothic"/>
+                <a:ea typeface="Yu Gothic"/>
+                <a:cs typeface="Yu Gothic"/>
+              </a:rPr>
+              <a:t>Step2</a:t>
+            </a:r>
+          </a:p>
+          <a:p>
+            <a:pPr algn="ctr"/>
+            <a:r>
+              <a:rPr sz="1400" b="1" i="0">
+                <a:solidFill>
+                  <a:srgbClr val="FFFFFF"/>
+                </a:solidFill>
+                <a:latin typeface="Yu Gothic"/>
+                <a:ea typeface="Yu Gothic"/>
+                <a:cs typeface="Yu Gothic"/>
+              </a:rPr>
+              <a:t>RL token の学習</a:t>
+            </a:r>
+          </a:p>
+        </p:txBody>
+      </p:sp>
+      <p:cxnSp>
+        <p:nvCxnSpPr>
+          <p:cNvPr id="7" name="Connector 6"/>
+          <p:cNvCxnSpPr/>
+          <p:nvPr/>
+        </p:nvCxnSpPr>
+        <p:spPr>
+          <a:xfrm>
+            <a:off x="4846320" y="1435608"/>
+            <a:ext cx="274320" cy="0"/>
+          </a:xfrm>
+          <a:prstGeom prst="line">
+            <a:avLst/>
+          </a:prstGeom>
+          <a:ln w="25400">
+            <a:solidFill>
+              <a:srgbClr val="595959"/>
+            </a:solidFill>
+            <a:tailEnd type="triangle" w="med" len="med"/>
+          </a:ln>
+        </p:spPr>
+        <p:style>
+          <a:lnRef idx="2">
+            <a:schemeClr val="accent1"/>
+          </a:lnRef>
+          <a:fillRef idx="0">
+            <a:schemeClr val="accent1"/>
+          </a:fillRef>
+          <a:effectRef idx="1">
+            <a:schemeClr val="accent1"/>
+          </a:effectRef>
+          <a:fontRef idx="minor">
+            <a:schemeClr val="tx1"/>
+          </a:fontRef>
+        </p:style>
+      </p:cxnSp>
+      <p:sp>
+        <p:nvSpPr>
+          <p:cNvPr id="8" name="step 2"/>
+          <p:cNvSpPr/>
+          <p:nvPr/>
+        </p:nvSpPr>
+        <p:spPr>
+          <a:xfrm>
+            <a:off x="5120640" y="1005840"/>
+            <a:ext cx="2011680" cy="868680"/>
+          </a:xfrm>
+          <a:prstGeom prst="roundRect">
+            <a:avLst>
+              <a:gd name="adj" fmla="val 12000"/>
+            </a:avLst>
+          </a:prstGeom>
+          <a:solidFill>
+            <a:srgbClr val="0B66C3"/>
+          </a:solidFill>
+          <a:ln>
+            <a:noFill/>
+          </a:ln>
+        </p:spPr>
+        <p:style>
+          <a:lnRef idx="1">
+            <a:schemeClr val="accent1"/>
+          </a:lnRef>
+          <a:fillRef idx="3">
+            <a:schemeClr val="accent1"/>
+          </a:fillRef>
+          <a:effectRef idx="2">
+            <a:schemeClr val="accent1"/>
+          </a:effectRef>
+          <a:fontRef idx="minor">
+            <a:schemeClr val="lt1"/>
+          </a:fontRef>
+        </p:style>
+        <p:txBody>
+          <a:bodyPr rtlCol="0" anchor="ctr" wrap="square" lIns="73152" rIns="73152" tIns="36576" bIns="36576"/>
+          <a:lstStyle/>
+          <a:p>
+            <a:pPr algn="ctr"/>
+            <a:r>
+              <a:rPr sz="1400" b="1" i="0">
+                <a:solidFill>
+                  <a:srgbClr val="FFFFFF"/>
+                </a:solidFill>
+                <a:latin typeface="Yu Gothic"/>
+                <a:ea typeface="Yu Gothic"/>
+                <a:cs typeface="Yu Gothic"/>
+              </a:rPr>
+              <a:t>Step3</a:t>
+            </a:r>
+          </a:p>
+          <a:p>
+            <a:pPr algn="ctr"/>
+            <a:r>
+              <a:rPr sz="1400" b="1" i="0">
+                <a:solidFill>
+                  <a:srgbClr val="FFFFFF"/>
+                </a:solidFill>
+                <a:latin typeface="Yu Gothic"/>
+                <a:ea typeface="Yu Gothic"/>
+                <a:cs typeface="Yu Gothic"/>
+              </a:rPr>
+              <a:t>actor-critic の学習</a:t>
+            </a:r>
+          </a:p>
+        </p:txBody>
+      </p:sp>
+      <p:cxnSp>
+        <p:nvCxnSpPr>
+          <p:cNvPr id="9" name="Connector 8"/>
+          <p:cNvCxnSpPr/>
+          <p:nvPr/>
+        </p:nvCxnSpPr>
+        <p:spPr>
+          <a:xfrm>
+            <a:off x="7132320" y="1435608"/>
+            <a:ext cx="274320" cy="0"/>
+          </a:xfrm>
+          <a:prstGeom prst="line">
+            <a:avLst/>
+          </a:prstGeom>
+          <a:ln w="25400">
+            <a:solidFill>
+              <a:srgbClr val="595959"/>
+            </a:solidFill>
+            <a:tailEnd type="triangle" w="med" len="med"/>
+          </a:ln>
+        </p:spPr>
+        <p:style>
+          <a:lnRef idx="2">
+            <a:schemeClr val="accent1"/>
+          </a:lnRef>
+          <a:fillRef idx="0">
+            <a:schemeClr val="accent1"/>
+          </a:fillRef>
+          <a:effectRef idx="1">
+            <a:schemeClr val="accent1"/>
+          </a:effectRef>
+          <a:fontRef idx="minor">
+            <a:schemeClr val="tx1"/>
+          </a:fontRef>
+        </p:style>
+      </p:cxnSp>
+      <p:sp>
+        <p:nvSpPr>
+          <p:cNvPr id="10" name="step 3"/>
+          <p:cNvSpPr/>
+          <p:nvPr/>
+        </p:nvSpPr>
+        <p:spPr>
+          <a:xfrm>
+            <a:off x="7406640" y="1005840"/>
+            <a:ext cx="2011680" cy="868680"/>
+          </a:xfrm>
+          <a:prstGeom prst="roundRect">
+            <a:avLst>
+              <a:gd name="adj" fmla="val 12000"/>
+            </a:avLst>
+          </a:prstGeom>
+          <a:solidFill>
+            <a:srgbClr val="0B66C3"/>
+          </a:solidFill>
+          <a:ln>
+            <a:noFill/>
+          </a:ln>
+        </p:spPr>
+        <p:style>
+          <a:lnRef idx="1">
+            <a:schemeClr val="accent1"/>
+          </a:lnRef>
+          <a:fillRef idx="3">
+            <a:schemeClr val="accent1"/>
+          </a:fillRef>
+          <a:effectRef idx="2">
+            <a:schemeClr val="accent1"/>
+          </a:effectRef>
+          <a:fontRef idx="minor">
+            <a:schemeClr val="lt1"/>
+          </a:fontRef>
+        </p:style>
+        <p:txBody>
+          <a:bodyPr rtlCol="0" anchor="ctr" wrap="square" lIns="73152" rIns="73152" tIns="36576" bIns="36576"/>
+          <a:lstStyle/>
+          <a:p>
+            <a:pPr algn="ctr"/>
+            <a:r>
+              <a:rPr sz="1400" b="1" i="0">
+                <a:solidFill>
+                  <a:srgbClr val="FFFFFF"/>
+                </a:solidFill>
+                <a:latin typeface="Yu Gothic"/>
+                <a:ea typeface="Yu Gothic"/>
+                <a:cs typeface="Yu Gothic"/>
+              </a:rPr>
+              <a:t>Step4</a:t>
+            </a:r>
+          </a:p>
+          <a:p>
+            <a:pPr algn="ctr"/>
+            <a:r>
+              <a:rPr sz="1400" b="1" i="0">
+                <a:solidFill>
+                  <a:srgbClr val="FFFFFF"/>
+                </a:solidFill>
+                <a:latin typeface="Yu Gothic"/>
+                <a:ea typeface="Yu Gothic"/>
+                <a:cs typeface="Yu Gothic"/>
+              </a:rPr>
+              <a:t>2 つ目専用の actor</a:t>
+            </a:r>
+          </a:p>
+        </p:txBody>
+      </p:sp>
+      <p:cxnSp>
+        <p:nvCxnSpPr>
+          <p:cNvPr id="11" name="Connector 10"/>
+          <p:cNvCxnSpPr/>
+          <p:nvPr/>
+        </p:nvCxnSpPr>
+        <p:spPr>
+          <a:xfrm>
+            <a:off x="9418320" y="1435608"/>
+            <a:ext cx="274320" cy="0"/>
+          </a:xfrm>
+          <a:prstGeom prst="line">
+            <a:avLst/>
+          </a:prstGeom>
+          <a:ln w="25400">
+            <a:solidFill>
+              <a:srgbClr val="595959"/>
+            </a:solidFill>
+            <a:tailEnd type="triangle" w="med" len="med"/>
+          </a:ln>
+        </p:spPr>
+        <p:style>
+          <a:lnRef idx="2">
+            <a:schemeClr val="accent1"/>
+          </a:lnRef>
+          <a:fillRef idx="0">
+            <a:schemeClr val="accent1"/>
+          </a:fillRef>
+          <a:effectRef idx="1">
+            <a:schemeClr val="accent1"/>
+          </a:effectRef>
+          <a:fontRef idx="minor">
+            <a:schemeClr val="tx1"/>
+          </a:fontRef>
+        </p:style>
+      </p:cxnSp>
+      <p:sp>
+        <p:nvSpPr>
+          <p:cNvPr id="12" name="step 4"/>
+          <p:cNvSpPr/>
+          <p:nvPr/>
+        </p:nvSpPr>
+        <p:spPr>
+          <a:xfrm>
+            <a:off x="9692640" y="1005840"/>
+            <a:ext cx="2011680" cy="868680"/>
+          </a:xfrm>
+          <a:prstGeom prst="roundRect">
+            <a:avLst>
+              <a:gd name="adj" fmla="val 12000"/>
+            </a:avLst>
+          </a:prstGeom>
+          <a:solidFill>
+            <a:srgbClr val="2E8B57"/>
+          </a:solidFill>
+          <a:ln>
+            <a:noFill/>
+          </a:ln>
+        </p:spPr>
+        <p:style>
+          <a:lnRef idx="1">
+            <a:schemeClr val="accent1"/>
+          </a:lnRef>
+          <a:fillRef idx="3">
+            <a:schemeClr val="accent1"/>
+          </a:fillRef>
+          <a:effectRef idx="2">
+            <a:schemeClr val="accent1"/>
+          </a:effectRef>
+          <a:fontRef idx="minor">
+            <a:schemeClr val="lt1"/>
+          </a:fontRef>
+        </p:style>
+        <p:txBody>
+          <a:bodyPr rtlCol="0" anchor="ctr" wrap="square" lIns="73152" rIns="73152" tIns="36576" bIns="36576"/>
+          <a:lstStyle/>
+          <a:p>
+            <a:pPr algn="ctr"/>
+            <a:r>
+              <a:rPr sz="1400" b="1" i="0">
+                <a:solidFill>
+                  <a:srgbClr val="FFFFFF"/>
+                </a:solidFill>
+                <a:latin typeface="Yu Gothic"/>
+                <a:ea typeface="Yu Gothic"/>
+                <a:cs typeface="Yu Gothic"/>
+              </a:rPr>
+              <a:t>Step9</a:t>
+            </a:r>
+          </a:p>
+          <a:p>
+            <a:pPr algn="ctr"/>
+            <a:r>
+              <a:rPr sz="1400" b="1" i="0">
+                <a:solidFill>
+                  <a:srgbClr val="FFFFFF"/>
+                </a:solidFill>
+                <a:latin typeface="Yu Gothic"/>
+                <a:ea typeface="Yu Gothic"/>
+                <a:cs typeface="Yu Gothic"/>
+              </a:rPr>
+              <a:t>シミュレータで評価</a:t>
+            </a:r>
+          </a:p>
+        </p:txBody>
+      </p:sp>
+      <p:sp>
+        <p:nvSpPr>
+          <p:cNvPr id="13" name="TextBox 12"/>
           <p:cNvSpPr txBox="1"/>
           <p:nvPr/>
         </p:nvSpPr>
         <p:spPr>
           <a:xfrm>
-            <a:off x="548640" y="1005840"/>
-            <a:ext cx="5669280" cy="4572000"/>
+            <a:off x="548640" y="2103120"/>
+            <a:ext cx="11064240" cy="3566160"/>
           </a:xfrm>
           <a:prstGeom prst="rect">
             <a:avLst/>
@@ -25126,7 +25397,7 @@
                 <a:ea typeface="Yu Gothic"/>
                 <a:cs typeface="Yu Gothic"/>
               </a:rPr>
-              <a:t>RL token</a:t>
+              <a:t>Step1</a:t>
             </a:r>
             <a:r>
               <a:rPr sz="1600" b="0" i="0">
@@ -25137,7 +25408,29 @@
                 <a:ea typeface="Yu Gothic"/>
                 <a:cs typeface="Yu Gothic"/>
               </a:rPr>
-              <a:t>: 凍結した smolVLA の prefix の隠れ状態（241 × 960）から、RL token を作る</a:t>
+              <a:t>: 凍結した smolVLA に、デモとロールアウトの動画フレームを通し、画像トークン（128 × 960）を保存（把持の前後を中心に抽出。</a:t>
+            </a:r>
+            <a:r>
+              <a:rPr sz="1600" b="1" i="0">
+                <a:solidFill>
+                  <a:srgbClr val="1A1A1A"/>
+                </a:solidFill>
+                <a:latin typeface="Yu Gothic"/>
+                <a:ea typeface="Yu Gothic"/>
+                <a:cs typeface="Yu Gothic"/>
+              </a:rPr>
+              <a:t>1 データセット約 17 分</a:t>
+            </a:r>
+            <a:r>
+              <a:rPr sz="1600" b="0" i="0">
+                <a:solidFill>
+                  <a:srgbClr val="1A1A1A"/>
+                </a:solidFill>
+                <a:latin typeface="Yu Gothic"/>
+                <a:ea typeface="Yu Gothic"/>
+                <a:cs typeface="Yu Gothic"/>
+              </a:rPr>
+              <a:t>、RTX A5000）</a:t>
             </a:r>
           </a:p>
           <a:p>
@@ -25156,7 +25449,7 @@
                 <a:ea typeface="Yu Gothic"/>
                 <a:cs typeface="Yu Gothic"/>
               </a:rPr>
-              <a:t>RL の対象</a:t>
+              <a:t>Step2</a:t>
             </a:r>
             <a:r>
               <a:rPr sz="1600" b="0" i="0">
@@ -25167,7 +25460,29 @@
                 <a:ea typeface="Yu Gothic"/>
                 <a:cs typeface="Yu Gothic"/>
               </a:rPr>
-              <a:t>: タスクの局面ごとの actor-critic（1 つ目の把持 → 2 つ目の把持の「2 局面ゲート」）。それ以外は VLA が実行</a:t>
+              <a:t>: 小さな encoder-decoder が、保存した特徴から RL token を作る（再構成損失で学習。</a:t>
+            </a:r>
+            <a:r>
+              <a:rPr sz="1600" b="1" i="0">
+                <a:solidFill>
+                  <a:srgbClr val="1A1A1A"/>
+                </a:solidFill>
+                <a:latin typeface="Yu Gothic"/>
+                <a:ea typeface="Yu Gothic"/>
+                <a:cs typeface="Yu Gothic"/>
+              </a:rPr>
+              <a:t>6,000 step、約 25 分</a:t>
+            </a:r>
+            <a:r>
+              <a:rPr sz="1600" b="0" i="0">
+                <a:solidFill>
+                  <a:srgbClr val="1A1A1A"/>
+                </a:solidFill>
+                <a:latin typeface="Yu Gothic"/>
+                <a:ea typeface="Yu Gothic"/>
+                <a:cs typeface="Yu Gothic"/>
+              </a:rPr>
+              <a:t>）。再構成の val MSE は 0.073（平均を出す基準は 0.269）</a:t>
             </a:r>
           </a:p>
           <a:p>
@@ -25186,7 +25501,7 @@
                 <a:ea typeface="Yu Gothic"/>
                 <a:cs typeface="Yu Gothic"/>
               </a:rPr>
-              <a:t>オンライン学習</a:t>
+              <a:t>Step3</a:t>
             </a:r>
             <a:r>
               <a:rPr sz="1600" b="0" i="0">
@@ -25197,7 +25512,7 @@
                 <a:ea typeface="Yu Gothic"/>
                 <a:cs typeface="Yu Gothic"/>
               </a:rPr>
-              <a:t>: 3 環境で、更新/データ比 5、探索ノイズ σ = 0.05。1・2 つ目の把持の actor は </a:t>
+              <a:t>: 1・2 つ目の把持の actor-critic を、オンライン RL で学習（3 環境、更新/データ比 5、探索ノイズ σ = 0.05。</a:t>
             </a:r>
             <a:r>
               <a:rPr sz="1600" b="1" i="0">
@@ -25208,7 +25523,7 @@
                 <a:ea typeface="Yu Gothic"/>
                 <a:cs typeface="Yu Gothic"/>
               </a:rPr>
-              <a:t>750 エポック（約 8 時間）</a:t>
+              <a:t>750 エポック、約 8.2 時間</a:t>
             </a:r>
             <a:r>
               <a:rPr sz="1600" b="0" i="0">
@@ -25219,40 +25534,7 @@
                 <a:ea typeface="Yu Gothic"/>
                 <a:cs typeface="Yu Gothic"/>
               </a:rPr>
-              <a:t>、2 つ目専用は </a:t>
-            </a:r>
-            <a:r>
-              <a:rPr sz="1600" b="1" i="0">
-                <a:solidFill>
-                  <a:srgbClr val="1A1A1A"/>
-                </a:solidFill>
-                <a:latin typeface="Yu Gothic"/>
-                <a:ea typeface="Yu Gothic"/>
-                <a:cs typeface="Yu Gothic"/>
-              </a:rPr>
-              <a:t>400 エポック（5.4 時間）</a:t>
-            </a:r>
-            <a:r>
-              <a:rPr sz="1600" b="0" i="0">
-                <a:solidFill>
-                  <a:srgbClr val="1A1A1A"/>
-                </a:solidFill>
-                <a:latin typeface="Yu Gothic"/>
-                <a:ea typeface="Yu Gothic"/>
-                <a:cs typeface="Yu Gothic"/>
-              </a:rPr>
-              <a:t>。GPU は </a:t>
-            </a:r>
-            <a:r>
-              <a:rPr sz="1600" b="1" i="0">
-                <a:solidFill>
-                  <a:srgbClr val="1A1A1A"/>
-                </a:solidFill>
-                <a:latin typeface="Yu Gothic"/>
-                <a:ea typeface="Yu Gothic"/>
-                <a:cs typeface="Yu Gothic"/>
-              </a:rPr>
-              <a:t>RTX A5000（24GB）</a:t>
+              <a:t>、RTX A5000 24GB）。それ以外は VLA が実行</a:t>
             </a:r>
           </a:p>
           <a:p>
@@ -25271,7 +25553,7 @@
                 <a:ea typeface="Yu Gothic"/>
                 <a:cs typeface="Yu Gothic"/>
               </a:rPr>
-              <a:t>失敗の分析</a:t>
+              <a:t>Step4</a:t>
             </a:r>
             <a:r>
               <a:rPr sz="1600" b="0" i="0">
@@ -25282,26 +25564,29 @@
                 <a:ea typeface="Yu Gothic"/>
                 <a:cs typeface="Yu Gothic"/>
               </a:rPr>
-              <a:t>: 1 つ目の把持は確立。残る失敗は、2 つ目の把持が最大</a:t>
-            </a:r>
-          </a:p>
-          <a:p>
-            <a:pPr algn="l" marL="585216" indent="-256032">
-              <a:spcAft>
-                <a:spcPts val="600"/>
-              </a:spcAft>
-              <a:buChar char="–"/>
-            </a:pPr>
-            <a:r>
-              <a:rPr sz="1400" b="0" i="0">
-                <a:solidFill>
-                  <a:srgbClr val="1A1A1A"/>
-                </a:solidFill>
-                <a:latin typeface="Yu Gothic"/>
-                <a:ea typeface="Yu Gothic"/>
-                <a:cs typeface="Yu Gothic"/>
-              </a:rPr>
-              <a:t>→ 2 つ目専用の actor と、空振り（何も挟まずに閉じる）への罰 −0.2</a:t>
+              <a:t>: 残る失敗は 2 つ目の把持が最大 → 2 つ目専用の actor を、空振り（何も挟まずに閉じる）への罰 −0.2 つきで学習（1 つ目は Step3 の actor を固定。</a:t>
+            </a:r>
+            <a:r>
+              <a:rPr sz="1600" b="1" i="0">
+                <a:solidFill>
+                  <a:srgbClr val="1A1A1A"/>
+                </a:solidFill>
+                <a:latin typeface="Yu Gothic"/>
+                <a:ea typeface="Yu Gothic"/>
+                <a:cs typeface="Yu Gothic"/>
+              </a:rPr>
+              <a:t>400 エポック、5.4 時間</a:t>
+            </a:r>
+            <a:r>
+              <a:rPr sz="1600" b="0" i="0">
+                <a:solidFill>
+                  <a:srgbClr val="1A1A1A"/>
+                </a:solidFill>
+                <a:latin typeface="Yu Gothic"/>
+                <a:ea typeface="Yu Gothic"/>
+                <a:cs typeface="Yu Gothic"/>
+              </a:rPr>
+              <a:t>、RTX A5000）</a:t>
             </a:r>
           </a:p>
           <a:p>
@@ -25320,7 +25605,7 @@
                 <a:ea typeface="Yu Gothic"/>
                 <a:cs typeface="Yu Gothic"/>
               </a:rPr>
-              <a:t>RL token</a:t>
+              <a:t>Step9</a:t>
             </a:r>
             <a:r>
               <a:rPr sz="1600" b="0" i="0">
@@ -25331,7 +25616,7 @@
                 <a:ea typeface="Yu Gothic"/>
                 <a:cs typeface="Yu Gothic"/>
               </a:rPr>
-              <a:t>: 6,000 step、約 25 分。</a:t>
+              <a:t>: success_once は </a:t>
             </a:r>
             <a:r>
               <a:rPr sz="1600" b="1" i="0">
@@ -25342,7 +25627,7 @@
                 <a:ea typeface="Yu Gothic"/>
                 <a:cs typeface="Yu Gothic"/>
               </a:rPr>
-              <a:t>actor の重み</a:t>
+              <a:t>0.68</a:t>
             </a:r>
             <a:r>
               <a:rPr sz="1600" b="0" i="0">
@@ -25353,32 +25638,14 @@
                 <a:ea typeface="Yu Gothic"/>
                 <a:cs typeface="Yu Gothic"/>
               </a:rPr>
-              <a:t>は、約 5 MB と軽量</a:t>
-            </a:r>
-          </a:p>
-        </p:txBody>
-      </p:sp>
-      <p:graphicFrame>
-        <p:nvGraphicFramePr>
-          <p:cNvPr id="5" name="Chart 4"/>
-          <p:cNvGraphicFramePr>
-            <a:graphicFrameLocks noGrp="1"/>
-          </p:cNvGraphicFramePr>
-          <p:nvPr/>
-        </p:nvGraphicFramePr>
-        <p:xfrm>
-          <a:off x="6400800" y="1005840"/>
-          <a:ext cx="5303520" cy="4480560"/>
-        </p:xfrm>
-        <a:graphic>
-          <a:graphicData uri="http://schemas.openxmlformats.org/drawingml/2006/chart">
-            <c:chart xmlns:c="http://schemas.openxmlformats.org/drawingml/2006/chart" r:id="rId3"/>
-          </a:graphicData>
-        </a:graphic>
-      </p:graphicFrame>
-      <p:sp>
-        <p:nvSpPr>
-          <p:cNvPr id="6" name="key point"/>
+              <a:t>（最良。VLA のみ 0.46、1 つ目だけ RL 0.62、2 局面 0.66）。2 つ目を VLA に任せると 0.60。actor の重みは約 5 MB</a:t>
+            </a:r>
+          </a:p>
+        </p:txBody>
+      </p:sp>
+      <p:sp>
+        <p:nvSpPr>
+          <p:cNvPr id="14" name="key point"/>
           <p:cNvSpPr/>
           <p:nvPr/>
         </p:nvSpPr>
@@ -30445,7 +30712,7 @@
                 <a:ea typeface="Yu Gothic"/>
                 <a:cs typeface="Yu Gothic"/>
               </a:rPr>
-              <a:t>背景: なぜ VLA に強化学習か</a:t>
+              <a:t>強化学習の基本用語</a:t>
             </a:r>
           </a:p>
         </p:txBody>
@@ -30493,162 +30760,14 @@
       </p:sp>
       <p:sp>
         <p:nvSpPr>
-          <p:cNvPr id="4" name="TextBox 3"/>
-          <p:cNvSpPr txBox="1"/>
-          <p:nvPr/>
-        </p:nvSpPr>
-        <p:spPr>
-          <a:xfrm>
-            <a:off x="548640" y="1005840"/>
-            <a:ext cx="5120640" cy="4480560"/>
-          </a:xfrm>
-          <a:prstGeom prst="rect">
-            <a:avLst/>
-          </a:prstGeom>
-          <a:noFill/>
-        </p:spPr>
-        <p:txBody>
-          <a:bodyPr wrap="square" anchor="t" lIns="45720" rIns="45720" tIns="27432" bIns="27432">
-            <a:spAutoFit/>
-          </a:bodyPr>
-          <a:lstStyle/>
-          <a:p>
-            <a:pPr algn="l" marL="274320" indent="-256032">
-              <a:spcAft>
-                <a:spcPts val="600"/>
-              </a:spcAft>
-              <a:buChar char="•"/>
-            </a:pPr>
-            <a:r>
-              <a:rPr sz="1700" b="1" i="0">
-                <a:solidFill>
-                  <a:srgbClr val="1A1A1A"/>
-                </a:solidFill>
-                <a:latin typeface="Yu Gothic"/>
-                <a:ea typeface="Yu Gothic"/>
-                <a:cs typeface="Yu Gothic"/>
-              </a:rPr>
-              <a:t>VLA は、模倣学習（SFT）で多様な技能を学べる</a:t>
-            </a:r>
-          </a:p>
-          <a:p>
-            <a:pPr algn="l" marL="585216" indent="-256032">
-              <a:spcAft>
-                <a:spcPts val="600"/>
-              </a:spcAft>
-              <a:buChar char="–"/>
-            </a:pPr>
-            <a:r>
-              <a:rPr sz="1500" b="0" i="0">
-                <a:solidFill>
-                  <a:srgbClr val="1A1A1A"/>
-                </a:solidFill>
-                <a:latin typeface="Yu Gothic"/>
-                <a:ea typeface="Yu Gothic"/>
-                <a:cs typeface="Yu Gothic"/>
-              </a:rPr>
-              <a:t>ただし、実タスクが要求する精度・速度・失敗からの回復には届かない</a:t>
-            </a:r>
-          </a:p>
-          <a:p>
-            <a:pPr algn="l" marL="274320" indent="-256032">
-              <a:spcAft>
-                <a:spcPts val="600"/>
-              </a:spcAft>
-              <a:buChar char="•"/>
-            </a:pPr>
-            <a:r>
-              <a:rPr sz="1700" b="1" i="0">
-                <a:solidFill>
-                  <a:srgbClr val="1A1A1A"/>
-                </a:solidFill>
-                <a:latin typeface="Yu Gothic"/>
-                <a:ea typeface="Yu Gothic"/>
-                <a:cs typeface="Yu Gothic"/>
-              </a:rPr>
-              <a:t>強化学習（RL）で、自分の経験から改善したい</a:t>
-            </a:r>
-          </a:p>
-          <a:p>
-            <a:pPr algn="l" marL="585216" indent="-256032">
-              <a:spcAft>
-                <a:spcPts val="600"/>
-              </a:spcAft>
-              <a:buChar char="–"/>
-            </a:pPr>
-            <a:r>
-              <a:rPr sz="1500" b="0" i="0">
-                <a:solidFill>
-                  <a:srgbClr val="1A1A1A"/>
-                </a:solidFill>
-                <a:latin typeface="Yu Gothic"/>
-                <a:ea typeface="Yu Gothic"/>
-                <a:cs typeface="Yu Gothic"/>
-              </a:rPr>
-              <a:t>10 億パラメータ級のモデル全体を、オンラインで更新するのは、計算コストもサンプル効率も悪い</a:t>
-            </a:r>
-          </a:p>
-          <a:p>
-            <a:pPr algn="l" marL="585216" indent="-256032">
-              <a:spcAft>
-                <a:spcPts val="600"/>
-              </a:spcAft>
-              <a:buChar char="–"/>
-            </a:pPr>
-            <a:r>
-              <a:rPr sz="1500" b="0" i="0">
-                <a:solidFill>
-                  <a:srgbClr val="1A1A1A"/>
-                </a:solidFill>
-                <a:latin typeface="Yu Gothic"/>
-                <a:ea typeface="Yu Gothic"/>
-                <a:cs typeface="Yu Gothic"/>
-              </a:rPr>
-              <a:t>flow matching の行動生成は、対数尤度が扱いにくく、方策勾配法（PPO など）を適用しにくい</a:t>
-            </a:r>
-          </a:p>
-          <a:p>
-            <a:pPr algn="l" marL="274320" indent="-256032">
-              <a:spcAft>
-                <a:spcPts val="600"/>
-              </a:spcAft>
-              <a:buChar char="•"/>
-            </a:pPr>
-            <a:r>
-              <a:rPr sz="1700" b="1" i="0">
-                <a:solidFill>
-                  <a:srgbClr val="1A1A1A"/>
-                </a:solidFill>
-                <a:latin typeface="Yu Gothic"/>
-                <a:ea typeface="Yu Gothic"/>
-                <a:cs typeface="Yu Gothic"/>
-              </a:rPr>
-              <a:t>3 手法の位置づけ</a:t>
-            </a:r>
-            <a:r>
-              <a:rPr sz="1700" b="0" i="0">
-                <a:solidFill>
-                  <a:srgbClr val="1A1A1A"/>
-                </a:solidFill>
-                <a:latin typeface="Yu Gothic"/>
-                <a:ea typeface="Yu Gothic"/>
-                <a:cs typeface="Yu Gothic"/>
-              </a:rPr>
-              <a:t>: RECAP と STEAM は評価者だけが違う。RL Token は、行動を洗練する</a:t>
-            </a:r>
-          </a:p>
-        </p:txBody>
-      </p:sp>
-      <p:sp>
-        <p:nvSpPr>
-          <p:cNvPr id="5" name="card RECAP"/>
+          <p:cNvPr id="4" name="agent"/>
           <p:cNvSpPr/>
           <p:nvPr/>
         </p:nvSpPr>
         <p:spPr>
           <a:xfrm>
-            <a:off x="5943600" y="1005840"/>
-            <a:ext cx="1828800" cy="1371600"/>
+            <a:off x="548640" y="1097280"/>
+            <a:ext cx="2194560" cy="1097280"/>
           </a:xfrm>
           <a:prstGeom prst="roundRect">
             <a:avLst>
@@ -30656,7 +30775,7 @@
             </a:avLst>
           </a:prstGeom>
           <a:solidFill>
-            <a:srgbClr val="F3F7FC"/>
+            <a:srgbClr val="E8F1FB"/>
           </a:solidFill>
           <a:ln w="12700">
             <a:solidFill>
@@ -30684,29 +30803,57 @@
           <a:p>
             <a:pPr algn="ctr"/>
             <a:r>
-              <a:rPr sz="2000" b="1" i="0">
-                <a:solidFill>
-                  <a:srgbClr val="0B66C3"/>
-                </a:solidFill>
-                <a:latin typeface="Yu Gothic"/>
-                <a:ea typeface="Yu Gothic"/>
-                <a:cs typeface="Yu Gothic"/>
-              </a:rPr>
-              <a:t>RECAP</a:t>
-            </a:r>
-          </a:p>
-        </p:txBody>
-      </p:sp>
-      <p:sp>
-        <p:nvSpPr>
-          <p:cNvPr id="6" name="desc RECAP"/>
+              <a:rPr sz="1500" b="1" i="0">
+                <a:solidFill>
+                  <a:srgbClr val="1A1A1A"/>
+                </a:solidFill>
+                <a:latin typeface="Yu Gothic"/>
+                <a:ea typeface="Yu Gothic"/>
+                <a:cs typeface="Yu Gothic"/>
+              </a:rPr>
+              <a:t>エージェント</a:t>
+            </a:r>
+          </a:p>
+          <a:p>
+            <a:pPr algn="ctr"/>
+            <a:r>
+              <a:rPr sz="1300" b="0" i="0">
+                <a:solidFill>
+                  <a:srgbClr val="1A1A1A"/>
+                </a:solidFill>
+                <a:latin typeface="Yu Gothic"/>
+                <a:ea typeface="Yu Gothic"/>
+                <a:cs typeface="Yu Gothic"/>
+              </a:rPr>
+              <a:t>方策 π（= VLA）が</a:t>
+            </a:r>
+          </a:p>
+          <a:p>
+            <a:pPr algn="ctr"/>
+            <a:r>
+              <a:rPr sz="1300" b="0" i="0">
+                <a:solidFill>
+                  <a:srgbClr val="1A1A1A"/>
+                </a:solidFill>
+                <a:latin typeface="Yu Gothic"/>
+                <a:ea typeface="Yu Gothic"/>
+                <a:cs typeface="Yu Gothic"/>
+              </a:rPr>
+              <a:t>行動を決める</a:t>
+            </a:r>
+          </a:p>
+        </p:txBody>
+      </p:sp>
+      <p:sp>
+        <p:nvSpPr>
+          <p:cNvPr id="5" name="env"/>
           <p:cNvSpPr/>
           <p:nvPr/>
         </p:nvSpPr>
         <p:spPr>
           <a:xfrm>
-            <a:off x="7863840" y="1005840"/>
-            <a:ext cx="3749039" cy="1371600"/>
+            <a:off x="3931920" y="1097280"/>
+            <a:ext cx="2011680" cy="1097280"/>
           </a:xfrm>
           <a:prstGeom prst="roundRect">
             <a:avLst>
@@ -30740,81 +30887,100 @@
           <a:bodyPr rtlCol="0" anchor="ctr" wrap="square" lIns="73152" rIns="73152" tIns="36576" bIns="36576"/>
           <a:lstStyle/>
           <a:p>
-            <a:pPr algn="l"/>
-            <a:r>
-              <a:rPr sz="1400" b="1" i="0">
-                <a:solidFill>
-                  <a:srgbClr val="1A1A1A"/>
-                </a:solidFill>
-                <a:latin typeface="Yu Gothic"/>
-                <a:ea typeface="Yu Gothic"/>
-                <a:cs typeface="Yu Gothic"/>
-              </a:rPr>
-              <a:t>方策の学習目標</a:t>
-            </a:r>
-          </a:p>
-          <a:p>
-            <a:pPr algn="l"/>
-            <a:r>
-              <a:rPr sz="1400" b="0" i="0">
-                <a:solidFill>
-                  <a:srgbClr val="1A1A1A"/>
-                </a:solidFill>
-                <a:latin typeface="Yu Gothic"/>
-                <a:ea typeface="Yu Gothic"/>
-                <a:cs typeface="Yu Gothic"/>
-              </a:rPr>
-              <a:t>評価者は価値関数。成功への近さ V から advantage を作り、「良い」の札を付けて方策を学習する</a:t>
-            </a:r>
-          </a:p>
-        </p:txBody>
-      </p:sp>
-      <p:sp>
-        <p:nvSpPr>
-          <p:cNvPr id="7" name="card STEAM"/>
-          <p:cNvSpPr/>
-          <p:nvPr/>
-        </p:nvSpPr>
-        <p:spPr>
-          <a:xfrm>
-            <a:off x="5943600" y="2560320"/>
-            <a:ext cx="1828800" cy="1371600"/>
-          </a:xfrm>
-          <a:prstGeom prst="roundRect">
-            <a:avLst>
-              <a:gd name="adj" fmla="val 12000"/>
-            </a:avLst>
-          </a:prstGeom>
-          <a:solidFill>
-            <a:srgbClr val="F3F7FC"/>
-          </a:solidFill>
-          <a:ln w="12700">
+            <a:pPr algn="ctr"/>
+            <a:r>
+              <a:rPr sz="1500" b="1" i="0">
+                <a:solidFill>
+                  <a:srgbClr val="1A1A1A"/>
+                </a:solidFill>
+                <a:latin typeface="Yu Gothic"/>
+                <a:ea typeface="Yu Gothic"/>
+                <a:cs typeface="Yu Gothic"/>
+              </a:rPr>
+              <a:t>環境</a:t>
+            </a:r>
+          </a:p>
+          <a:p>
+            <a:pPr algn="ctr"/>
+            <a:r>
+              <a:rPr sz="1300" b="0" i="0">
+                <a:solidFill>
+                  <a:srgbClr val="1A1A1A"/>
+                </a:solidFill>
+                <a:latin typeface="Yu Gothic"/>
+                <a:ea typeface="Yu Gothic"/>
+                <a:cs typeface="Yu Gothic"/>
+              </a:rPr>
+              <a:t>シミュレータ / 実世界</a:t>
+            </a:r>
+          </a:p>
+        </p:txBody>
+      </p:sp>
+      <p:cxnSp>
+        <p:nvCxnSpPr>
+          <p:cNvPr id="6" name="Connector 5"/>
+          <p:cNvCxnSpPr/>
+          <p:nvPr/>
+        </p:nvCxnSpPr>
+        <p:spPr>
+          <a:xfrm>
+            <a:off x="2743200" y="1371600"/>
+            <a:ext cx="1188720" cy="0"/>
+          </a:xfrm>
+          <a:prstGeom prst="line">
+            <a:avLst/>
+          </a:prstGeom>
+          <a:ln w="25400">
             <a:solidFill>
               <a:srgbClr val="0B66C3"/>
             </a:solidFill>
+            <a:tailEnd type="triangle" w="med" len="med"/>
           </a:ln>
         </p:spPr>
         <p:style>
-          <a:lnRef idx="1">
+          <a:lnRef idx="2">
             <a:schemeClr val="accent1"/>
           </a:lnRef>
-          <a:fillRef idx="3">
+          <a:fillRef idx="0">
             <a:schemeClr val="accent1"/>
           </a:fillRef>
-          <a:effectRef idx="2">
+          <a:effectRef idx="1">
             <a:schemeClr val="accent1"/>
           </a:effectRef>
           <a:fontRef idx="minor">
-            <a:schemeClr val="lt1"/>
+            <a:schemeClr val="tx1"/>
           </a:fontRef>
         </p:style>
-        <p:txBody>
-          <a:bodyPr rtlCol="0" anchor="ctr" wrap="square" lIns="73152" rIns="73152" tIns="36576" bIns="36576"/>
-          <a:lstStyle/>
-          <a:p>
-            <a:pPr algn="ctr"/>
-            <a:r>
-              <a:rPr sz="2000" b="1" i="0">
+      </p:cxnSp>
+      <p:sp>
+        <p:nvSpPr>
+          <p:cNvPr id="7" name="TextBox 6"/>
+          <p:cNvSpPr txBox="1"/>
+          <p:nvPr/>
+        </p:nvSpPr>
+        <p:spPr>
+          <a:xfrm>
+            <a:off x="2743200" y="1005840"/>
+            <a:ext cx="1188720" cy="320040"/>
+          </a:xfrm>
+          <a:prstGeom prst="rect">
+            <a:avLst/>
+          </a:prstGeom>
+          <a:noFill/>
+        </p:spPr>
+        <p:txBody>
+          <a:bodyPr wrap="square" anchor="t" lIns="45720" rIns="45720" tIns="27432" bIns="27432">
+            <a:spAutoFit/>
+          </a:bodyPr>
+          <a:lstStyle/>
+          <a:p>
+            <a:pPr algn="ctr">
+              <a:spcAft>
+                <a:spcPts val="600"/>
+              </a:spcAft>
+            </a:pPr>
+            <a:r>
+              <a:rPr sz="1300" b="1" i="0">
                 <a:solidFill>
                   <a:srgbClr val="0B66C3"/>
                 </a:solidFill>
@@ -30822,21 +30988,140 @@
                 <a:ea typeface="Yu Gothic"/>
                 <a:cs typeface="Yu Gothic"/>
               </a:rPr>
-              <a:t>STEAM</a:t>
-            </a:r>
-          </a:p>
-        </p:txBody>
-      </p:sp>
-      <p:sp>
-        <p:nvSpPr>
-          <p:cNvPr id="8" name="desc STEAM"/>
+              <a:t>行動 a</a:t>
+            </a:r>
+          </a:p>
+        </p:txBody>
+      </p:sp>
+      <p:cxnSp>
+        <p:nvCxnSpPr>
+          <p:cNvPr id="8" name="Connector 7"/>
+          <p:cNvCxnSpPr/>
+          <p:nvPr/>
+        </p:nvCxnSpPr>
+        <p:spPr>
+          <a:xfrm flipH="1">
+            <a:off x="2743200" y="1920240"/>
+            <a:ext cx="1188720" cy="0"/>
+          </a:xfrm>
+          <a:prstGeom prst="line">
+            <a:avLst/>
+          </a:prstGeom>
+          <a:ln w="25400">
+            <a:solidFill>
+              <a:srgbClr val="0B66C3"/>
+            </a:solidFill>
+            <a:tailEnd type="triangle" w="med" len="med"/>
+          </a:ln>
+        </p:spPr>
+        <p:style>
+          <a:lnRef idx="2">
+            <a:schemeClr val="accent1"/>
+          </a:lnRef>
+          <a:fillRef idx="0">
+            <a:schemeClr val="accent1"/>
+          </a:fillRef>
+          <a:effectRef idx="1">
+            <a:schemeClr val="accent1"/>
+          </a:effectRef>
+          <a:fontRef idx="minor">
+            <a:schemeClr val="tx1"/>
+          </a:fontRef>
+        </p:style>
+      </p:cxnSp>
+      <p:sp>
+        <p:nvSpPr>
+          <p:cNvPr id="9" name="TextBox 8"/>
+          <p:cNvSpPr txBox="1"/>
+          <p:nvPr/>
+        </p:nvSpPr>
+        <p:spPr>
+          <a:xfrm>
+            <a:off x="2743200" y="1965960"/>
+            <a:ext cx="1188720" cy="640080"/>
+          </a:xfrm>
+          <a:prstGeom prst="rect">
+            <a:avLst/>
+          </a:prstGeom>
+          <a:noFill/>
+        </p:spPr>
+        <p:txBody>
+          <a:bodyPr wrap="square" anchor="t" lIns="45720" rIns="45720" tIns="27432" bIns="27432">
+            <a:spAutoFit/>
+          </a:bodyPr>
+          <a:lstStyle/>
+          <a:p>
+            <a:pPr algn="ctr">
+              <a:spcAft>
+                <a:spcPts val="600"/>
+              </a:spcAft>
+            </a:pPr>
+            <a:r>
+              <a:rPr sz="1300" b="1" i="0">
+                <a:solidFill>
+                  <a:srgbClr val="0B66C3"/>
+                </a:solidFill>
+                <a:latin typeface="Yu Gothic"/>
+                <a:ea typeface="Yu Gothic"/>
+                <a:cs typeface="Yu Gothic"/>
+              </a:rPr>
+              <a:t>観測 o
+報酬 r</a:t>
+            </a:r>
+          </a:p>
+        </p:txBody>
+      </p:sp>
+      <p:sp>
+        <p:nvSpPr>
+          <p:cNvPr id="10" name="TextBox 9"/>
+          <p:cNvSpPr txBox="1"/>
+          <p:nvPr/>
+        </p:nvSpPr>
+        <p:spPr>
+          <a:xfrm>
+            <a:off x="548640" y="2743200"/>
+            <a:ext cx="5394960" cy="685800"/>
+          </a:xfrm>
+          <a:prstGeom prst="rect">
+            <a:avLst/>
+          </a:prstGeom>
+          <a:noFill/>
+        </p:spPr>
+        <p:txBody>
+          <a:bodyPr wrap="square" anchor="t" lIns="45720" rIns="45720" tIns="27432" bIns="27432">
+            <a:spAutoFit/>
+          </a:bodyPr>
+          <a:lstStyle/>
+          <a:p>
+            <a:pPr algn="l">
+              <a:spcAft>
+                <a:spcPts val="600"/>
+              </a:spcAft>
+            </a:pPr>
+            <a:r>
+              <a:rPr sz="1300" b="0" i="0">
+                <a:solidFill>
+                  <a:srgbClr val="595959"/>
+                </a:solidFill>
+                <a:latin typeface="Yu Gothic"/>
+                <a:ea typeface="Yu Gothic"/>
+                <a:cs typeface="Yu Gothic"/>
+              </a:rPr>
+              <a:t>観測 o = カメラ画像と関節の状態。これを何百ステップも繰り返す = 1 エピソード</a:t>
+            </a:r>
+          </a:p>
+        </p:txBody>
+      </p:sp>
+      <p:sp>
+        <p:nvSpPr>
+          <p:cNvPr id="11" name="sft"/>
           <p:cNvSpPr/>
           <p:nvPr/>
         </p:nvSpPr>
         <p:spPr>
           <a:xfrm>
-            <a:off x="7863840" y="2560320"/>
-            <a:ext cx="3749039" cy="1371600"/>
+            <a:off x="548640" y="3566160"/>
+            <a:ext cx="2606040" cy="1417320"/>
           </a:xfrm>
           <a:prstGeom prst="roundRect">
             <a:avLst>
@@ -30870,45 +31155,59 @@
           <a:bodyPr rtlCol="0" anchor="ctr" wrap="square" lIns="73152" rIns="73152" tIns="36576" bIns="36576"/>
           <a:lstStyle/>
           <a:p>
-            <a:pPr algn="l"/>
-            <a:r>
-              <a:rPr sz="1400" b="1" i="0">
-                <a:solidFill>
-                  <a:srgbClr val="1A1A1A"/>
-                </a:solidFill>
-                <a:latin typeface="Yu Gothic"/>
-                <a:ea typeface="Yu Gothic"/>
-                <a:cs typeface="Yu Gothic"/>
-              </a:rPr>
-              <a:t>方策の学習目標</a:t>
-            </a:r>
-          </a:p>
-          <a:p>
-            <a:pPr algn="l"/>
-            <a:r>
-              <a:rPr sz="1400" b="0" i="0">
-                <a:solidFill>
-                  <a:srgbClr val="1A1A1A"/>
-                </a:solidFill>
-                <a:latin typeface="Yu Gothic"/>
-                <a:ea typeface="Yu Gothic"/>
-                <a:cs typeface="Yu Gothic"/>
-              </a:rPr>
-              <a:t>評価者は、時間オフセットを当てる critic のアンサンブル。advantage を作り、同じ札付きの学習で方策を学習する</a:t>
-            </a:r>
-          </a:p>
-        </p:txBody>
-      </p:sp>
-      <p:sp>
-        <p:nvSpPr>
-          <p:cNvPr id="9" name="card RL Token"/>
+            <a:pPr algn="ctr"/>
+            <a:r>
+              <a:rPr sz="1500" b="1" i="0">
+                <a:solidFill>
+                  <a:srgbClr val="1A1A1A"/>
+                </a:solidFill>
+                <a:latin typeface="Yu Gothic"/>
+                <a:ea typeface="Yu Gothic"/>
+                <a:cs typeface="Yu Gothic"/>
+              </a:rPr>
+              <a:t>模倣学習（SFT）</a:t>
+            </a:r>
+          </a:p>
+          <a:p>
+            <a:pPr algn="ctr"/>
+            <a:r>
+              <a:rPr sz="1300" b="0" i="0">
+                <a:solidFill>
+                  <a:srgbClr val="1A1A1A"/>
+                </a:solidFill>
+                <a:latin typeface="Yu Gothic"/>
+                <a:ea typeface="Yu Gothic"/>
+                <a:cs typeface="Yu Gothic"/>
+              </a:rPr>
+              <a:t>お手本の行動を</a:t>
+            </a:r>
+          </a:p>
+          <a:p>
+            <a:pPr algn="ctr"/>
+            <a:r>
+              <a:rPr sz="1300" b="0" i="0">
+                <a:solidFill>
+                  <a:srgbClr val="1A1A1A"/>
+                </a:solidFill>
+                <a:latin typeface="Yu Gothic"/>
+                <a:ea typeface="Yu Gothic"/>
+                <a:cs typeface="Yu Gothic"/>
+              </a:rPr>
+              <a:t>そのまま真似る</a:t>
+            </a:r>
+          </a:p>
+        </p:txBody>
+      </p:sp>
+      <p:sp>
+        <p:nvSpPr>
+          <p:cNvPr id="12" name="rl"/>
           <p:cNvSpPr/>
           <p:nvPr/>
         </p:nvSpPr>
         <p:spPr>
           <a:xfrm>
-            <a:off x="5943600" y="4114800"/>
-            <a:ext cx="1828800" cy="1371600"/>
+            <a:off x="3337560" y="3566160"/>
+            <a:ext cx="2606040" cy="1417320"/>
           </a:xfrm>
           <a:prstGeom prst="roundRect">
             <a:avLst>
@@ -30916,7 +31215,7 @@
             </a:avLst>
           </a:prstGeom>
           <a:solidFill>
-            <a:srgbClr val="F3F7FC"/>
+            <a:srgbClr val="E8F1FB"/>
           </a:solidFill>
           <a:ln w="12700">
             <a:solidFill>
@@ -30944,29 +31243,57 @@
           <a:p>
             <a:pPr algn="ctr"/>
             <a:r>
-              <a:rPr sz="2000" b="1" i="0">
-                <a:solidFill>
-                  <a:srgbClr val="0B66C3"/>
-                </a:solidFill>
-                <a:latin typeface="Yu Gothic"/>
-                <a:ea typeface="Yu Gothic"/>
-                <a:cs typeface="Yu Gothic"/>
-              </a:rPr>
-              <a:t>RL Token</a:t>
-            </a:r>
-          </a:p>
-        </p:txBody>
-      </p:sp>
-      <p:sp>
-        <p:nvSpPr>
-          <p:cNvPr id="10" name="desc RL Token"/>
+              <a:rPr sz="1500" b="1" i="0">
+                <a:solidFill>
+                  <a:srgbClr val="1A1A1A"/>
+                </a:solidFill>
+                <a:latin typeface="Yu Gothic"/>
+                <a:ea typeface="Yu Gothic"/>
+                <a:cs typeface="Yu Gothic"/>
+              </a:rPr>
+              <a:t>強化学習（RL）</a:t>
+            </a:r>
+          </a:p>
+          <a:p>
+            <a:pPr algn="ctr"/>
+            <a:r>
+              <a:rPr sz="1300" b="0" i="0">
+                <a:solidFill>
+                  <a:srgbClr val="1A1A1A"/>
+                </a:solidFill>
+                <a:latin typeface="Yu Gothic"/>
+                <a:ea typeface="Yu Gothic"/>
+                <a:cs typeface="Yu Gothic"/>
+              </a:rPr>
+              <a:t>結果（報酬）を見て、</a:t>
+            </a:r>
+          </a:p>
+          <a:p>
+            <a:pPr algn="ctr"/>
+            <a:r>
+              <a:rPr sz="1300" b="0" i="0">
+                <a:solidFill>
+                  <a:srgbClr val="1A1A1A"/>
+                </a:solidFill>
+                <a:latin typeface="Yu Gothic"/>
+                <a:ea typeface="Yu Gothic"/>
+                <a:cs typeface="Yu Gothic"/>
+              </a:rPr>
+              <a:t>良い行動を増やす</a:t>
+            </a:r>
+          </a:p>
+        </p:txBody>
+      </p:sp>
+      <p:sp>
+        <p:nvSpPr>
+          <p:cNvPr id="13" name="term 方策 π"/>
           <p:cNvSpPr/>
           <p:nvPr/>
         </p:nvSpPr>
         <p:spPr>
           <a:xfrm>
-            <a:off x="7863840" y="4114800"/>
-            <a:ext cx="3749039" cy="1371600"/>
+            <a:off x="6309360" y="1005840"/>
+            <a:ext cx="1737360" cy="676656"/>
           </a:xfrm>
           <a:prstGeom prst="roundRect">
             <a:avLst>
@@ -30974,12 +31301,10 @@
             </a:avLst>
           </a:prstGeom>
           <a:solidFill>
-            <a:srgbClr val="FFFFFF"/>
+            <a:srgbClr val="0B66C3"/>
           </a:solidFill>
-          <a:ln w="12700">
-            <a:solidFill>
-              <a:srgbClr val="BFBFBF"/>
-            </a:solidFill>
+          <a:ln>
+            <a:noFill/>
           </a:ln>
         </p:spPr>
         <p:style>
@@ -31000,38 +31325,550 @@
           <a:bodyPr rtlCol="0" anchor="ctr" wrap="square" lIns="73152" rIns="73152" tIns="36576" bIns="36576"/>
           <a:lstStyle/>
           <a:p>
-            <a:pPr algn="l"/>
+            <a:pPr algn="ctr"/>
             <a:r>
               <a:rPr sz="1400" b="1" i="0">
                 <a:solidFill>
-                  <a:srgbClr val="1A1A1A"/>
-                </a:solidFill>
-                <a:latin typeface="Yu Gothic"/>
-                <a:ea typeface="Yu Gothic"/>
-                <a:cs typeface="Yu Gothic"/>
-              </a:rPr>
-              <a:t>行動の洗練</a:t>
-            </a:r>
-          </a:p>
-          <a:p>
-            <a:pPr algn="l"/>
-            <a:r>
-              <a:rPr sz="1400" b="0" i="0">
-                <a:solidFill>
-                  <a:srgbClr val="1A1A1A"/>
-                </a:solidFill>
-                <a:latin typeface="Yu Gothic"/>
-                <a:ea typeface="Yu Gothic"/>
-                <a:cs typeface="Yu Gothic"/>
-              </a:rPr>
-              <a:t>VLA は凍結。読み出しトークンの上の小さな actor-critic が、オンライン RL で VLA の行動を改善する</a:t>
-            </a:r>
-          </a:p>
-        </p:txBody>
-      </p:sp>
-      <p:sp>
-        <p:nvSpPr>
-          <p:cNvPr id="11" name="key point"/>
+                  <a:srgbClr val="FFFFFF"/>
+                </a:solidFill>
+                <a:latin typeface="Yu Gothic"/>
+                <a:ea typeface="Yu Gothic"/>
+                <a:cs typeface="Yu Gothic"/>
+              </a:rPr>
+              <a:t>方策 π</a:t>
+            </a:r>
+          </a:p>
+        </p:txBody>
+      </p:sp>
+      <p:sp>
+        <p:nvSpPr>
+          <p:cNvPr id="14" name="def 方策 π"/>
+          <p:cNvSpPr txBox="1"/>
+          <p:nvPr/>
+        </p:nvSpPr>
+        <p:spPr>
+          <a:xfrm>
+            <a:off x="8138160" y="987552"/>
+            <a:ext cx="3566160" cy="713232"/>
+          </a:xfrm>
+          <a:prstGeom prst="rect">
+            <a:avLst/>
+          </a:prstGeom>
+          <a:noFill/>
+        </p:spPr>
+        <p:txBody>
+          <a:bodyPr wrap="square" anchor="ctr" lIns="45720" rIns="45720" tIns="27432" bIns="27432">
+            <a:spAutoFit/>
+          </a:bodyPr>
+          <a:lstStyle/>
+          <a:p>
+            <a:pPr algn="l">
+              <a:spcAft>
+                <a:spcPts val="600"/>
+              </a:spcAft>
+            </a:pPr>
+            <a:r>
+              <a:rPr sz="1300" b="0" i="0">
+                <a:solidFill>
+                  <a:srgbClr val="1A1A1A"/>
+                </a:solidFill>
+                <a:latin typeface="Yu Gothic"/>
+                <a:ea typeface="Yu Gothic"/>
+                <a:cs typeface="Yu Gothic"/>
+              </a:rPr>
+              <a:t>観測から行動を決める関数。ここでは VLA（画像と指示文から、ロボットの動きを出力するモデル）</a:t>
+            </a:r>
+          </a:p>
+        </p:txBody>
+      </p:sp>
+      <p:sp>
+        <p:nvSpPr>
+          <p:cNvPr id="15" name="term 報酬 r"/>
+          <p:cNvSpPr/>
+          <p:nvPr/>
+        </p:nvSpPr>
+        <p:spPr>
+          <a:xfrm>
+            <a:off x="6309360" y="1773936"/>
+            <a:ext cx="1737360" cy="676656"/>
+          </a:xfrm>
+          <a:prstGeom prst="roundRect">
+            <a:avLst>
+              <a:gd name="adj" fmla="val 12000"/>
+            </a:avLst>
+          </a:prstGeom>
+          <a:solidFill>
+            <a:srgbClr val="0B66C3"/>
+          </a:solidFill>
+          <a:ln>
+            <a:noFill/>
+          </a:ln>
+        </p:spPr>
+        <p:style>
+          <a:lnRef idx="1">
+            <a:schemeClr val="accent1"/>
+          </a:lnRef>
+          <a:fillRef idx="3">
+            <a:schemeClr val="accent1"/>
+          </a:fillRef>
+          <a:effectRef idx="2">
+            <a:schemeClr val="accent1"/>
+          </a:effectRef>
+          <a:fontRef idx="minor">
+            <a:schemeClr val="lt1"/>
+          </a:fontRef>
+        </p:style>
+        <p:txBody>
+          <a:bodyPr rtlCol="0" anchor="ctr" wrap="square" lIns="73152" rIns="73152" tIns="36576" bIns="36576"/>
+          <a:lstStyle/>
+          <a:p>
+            <a:pPr algn="ctr"/>
+            <a:r>
+              <a:rPr sz="1400" b="1" i="0">
+                <a:solidFill>
+                  <a:srgbClr val="FFFFFF"/>
+                </a:solidFill>
+                <a:latin typeface="Yu Gothic"/>
+                <a:ea typeface="Yu Gothic"/>
+                <a:cs typeface="Yu Gothic"/>
+              </a:rPr>
+              <a:t>報酬 r</a:t>
+            </a:r>
+          </a:p>
+        </p:txBody>
+      </p:sp>
+      <p:sp>
+        <p:nvSpPr>
+          <p:cNvPr id="16" name="def 報酬 r"/>
+          <p:cNvSpPr txBox="1"/>
+          <p:nvPr/>
+        </p:nvSpPr>
+        <p:spPr>
+          <a:xfrm>
+            <a:off x="8138160" y="1755648"/>
+            <a:ext cx="3566160" cy="713232"/>
+          </a:xfrm>
+          <a:prstGeom prst="rect">
+            <a:avLst/>
+          </a:prstGeom>
+          <a:noFill/>
+        </p:spPr>
+        <p:txBody>
+          <a:bodyPr wrap="square" anchor="ctr" lIns="45720" rIns="45720" tIns="27432" bIns="27432">
+            <a:spAutoFit/>
+          </a:bodyPr>
+          <a:lstStyle/>
+          <a:p>
+            <a:pPr algn="l">
+              <a:spcAft>
+                <a:spcPts val="600"/>
+              </a:spcAft>
+            </a:pPr>
+            <a:r>
+              <a:rPr sz="1300" b="0" i="0">
+                <a:solidFill>
+                  <a:srgbClr val="1A1A1A"/>
+                </a:solidFill>
+                <a:latin typeface="Yu Gothic"/>
+                <a:ea typeface="Yu Gothic"/>
+                <a:cs typeface="Yu Gothic"/>
+              </a:rPr>
+              <a:t>行動の結果の良さを表す数値（例: 成功で +1、毎ステップ −1）</a:t>
+            </a:r>
+          </a:p>
+        </p:txBody>
+      </p:sp>
+      <p:sp>
+        <p:nvSpPr>
+          <p:cNvPr id="17" name="term return"/>
+          <p:cNvSpPr/>
+          <p:nvPr/>
+        </p:nvSpPr>
+        <p:spPr>
+          <a:xfrm>
+            <a:off x="6309360" y="2542032"/>
+            <a:ext cx="1737360" cy="676656"/>
+          </a:xfrm>
+          <a:prstGeom prst="roundRect">
+            <a:avLst>
+              <a:gd name="adj" fmla="val 12000"/>
+            </a:avLst>
+          </a:prstGeom>
+          <a:solidFill>
+            <a:srgbClr val="0B66C3"/>
+          </a:solidFill>
+          <a:ln>
+            <a:noFill/>
+          </a:ln>
+        </p:spPr>
+        <p:style>
+          <a:lnRef idx="1">
+            <a:schemeClr val="accent1"/>
+          </a:lnRef>
+          <a:fillRef idx="3">
+            <a:schemeClr val="accent1"/>
+          </a:fillRef>
+          <a:effectRef idx="2">
+            <a:schemeClr val="accent1"/>
+          </a:effectRef>
+          <a:fontRef idx="minor">
+            <a:schemeClr val="lt1"/>
+          </a:fontRef>
+        </p:style>
+        <p:txBody>
+          <a:bodyPr rtlCol="0" anchor="ctr" wrap="square" lIns="73152" rIns="73152" tIns="36576" bIns="36576"/>
+          <a:lstStyle/>
+          <a:p>
+            <a:pPr algn="ctr"/>
+            <a:r>
+              <a:rPr sz="1400" b="1" i="0">
+                <a:solidFill>
+                  <a:srgbClr val="FFFFFF"/>
+                </a:solidFill>
+                <a:latin typeface="Yu Gothic"/>
+                <a:ea typeface="Yu Gothic"/>
+                <a:cs typeface="Yu Gothic"/>
+              </a:rPr>
+              <a:t>return</a:t>
+            </a:r>
+          </a:p>
+        </p:txBody>
+      </p:sp>
+      <p:sp>
+        <p:nvSpPr>
+          <p:cNvPr id="18" name="def return"/>
+          <p:cNvSpPr txBox="1"/>
+          <p:nvPr/>
+        </p:nvSpPr>
+        <p:spPr>
+          <a:xfrm>
+            <a:off x="8138160" y="2523744"/>
+            <a:ext cx="3566160" cy="713232"/>
+          </a:xfrm>
+          <a:prstGeom prst="rect">
+            <a:avLst/>
+          </a:prstGeom>
+          <a:noFill/>
+        </p:spPr>
+        <p:txBody>
+          <a:bodyPr wrap="square" anchor="ctr" lIns="45720" rIns="45720" tIns="27432" bIns="27432">
+            <a:spAutoFit/>
+          </a:bodyPr>
+          <a:lstStyle/>
+          <a:p>
+            <a:pPr algn="l">
+              <a:spcAft>
+                <a:spcPts val="600"/>
+              </a:spcAft>
+            </a:pPr>
+            <a:r>
+              <a:rPr sz="1300" b="0" i="0">
+                <a:solidFill>
+                  <a:srgbClr val="1A1A1A"/>
+                </a:solidFill>
+                <a:latin typeface="Yu Gothic"/>
+                <a:ea typeface="Yu Gothic"/>
+                <a:cs typeface="Yu Gothic"/>
+              </a:rPr>
+              <a:t>これから先に得られる報酬の合計</a:t>
+            </a:r>
+          </a:p>
+        </p:txBody>
+      </p:sp>
+      <p:sp>
+        <p:nvSpPr>
+          <p:cNvPr id="19" name="term 価値 V"/>
+          <p:cNvSpPr/>
+          <p:nvPr/>
+        </p:nvSpPr>
+        <p:spPr>
+          <a:xfrm>
+            <a:off x="6309360" y="3310128"/>
+            <a:ext cx="1737360" cy="676656"/>
+          </a:xfrm>
+          <a:prstGeom prst="roundRect">
+            <a:avLst>
+              <a:gd name="adj" fmla="val 12000"/>
+            </a:avLst>
+          </a:prstGeom>
+          <a:solidFill>
+            <a:srgbClr val="0B66C3"/>
+          </a:solidFill>
+          <a:ln>
+            <a:noFill/>
+          </a:ln>
+        </p:spPr>
+        <p:style>
+          <a:lnRef idx="1">
+            <a:schemeClr val="accent1"/>
+          </a:lnRef>
+          <a:fillRef idx="3">
+            <a:schemeClr val="accent1"/>
+          </a:fillRef>
+          <a:effectRef idx="2">
+            <a:schemeClr val="accent1"/>
+          </a:effectRef>
+          <a:fontRef idx="minor">
+            <a:schemeClr val="lt1"/>
+          </a:fontRef>
+        </p:style>
+        <p:txBody>
+          <a:bodyPr rtlCol="0" anchor="ctr" wrap="square" lIns="73152" rIns="73152" tIns="36576" bIns="36576"/>
+          <a:lstStyle/>
+          <a:p>
+            <a:pPr algn="ctr"/>
+            <a:r>
+              <a:rPr sz="1400" b="1" i="0">
+                <a:solidFill>
+                  <a:srgbClr val="FFFFFF"/>
+                </a:solidFill>
+                <a:latin typeface="Yu Gothic"/>
+                <a:ea typeface="Yu Gothic"/>
+                <a:cs typeface="Yu Gothic"/>
+              </a:rPr>
+              <a:t>価値 V</a:t>
+            </a:r>
+          </a:p>
+        </p:txBody>
+      </p:sp>
+      <p:sp>
+        <p:nvSpPr>
+          <p:cNvPr id="20" name="def 価値 V"/>
+          <p:cNvSpPr txBox="1"/>
+          <p:nvPr/>
+        </p:nvSpPr>
+        <p:spPr>
+          <a:xfrm>
+            <a:off x="8138160" y="3291840"/>
+            <a:ext cx="3566160" cy="713232"/>
+          </a:xfrm>
+          <a:prstGeom prst="rect">
+            <a:avLst/>
+          </a:prstGeom>
+          <a:noFill/>
+        </p:spPr>
+        <p:txBody>
+          <a:bodyPr wrap="square" anchor="ctr" lIns="45720" rIns="45720" tIns="27432" bIns="27432">
+            <a:spAutoFit/>
+          </a:bodyPr>
+          <a:lstStyle/>
+          <a:p>
+            <a:pPr algn="l">
+              <a:spcAft>
+                <a:spcPts val="600"/>
+              </a:spcAft>
+            </a:pPr>
+            <a:r>
+              <a:rPr sz="1300" b="0" i="0">
+                <a:solidFill>
+                  <a:srgbClr val="1A1A1A"/>
+                </a:solidFill>
+                <a:latin typeface="Yu Gothic"/>
+                <a:ea typeface="Yu Gothic"/>
+                <a:cs typeface="Yu Gothic"/>
+              </a:rPr>
+              <a:t>いまの状態から、将来得られる return の予想</a:t>
+            </a:r>
+          </a:p>
+        </p:txBody>
+      </p:sp>
+      <p:sp>
+        <p:nvSpPr>
+          <p:cNvPr id="21" name="term advantage A"/>
+          <p:cNvSpPr/>
+          <p:nvPr/>
+        </p:nvSpPr>
+        <p:spPr>
+          <a:xfrm>
+            <a:off x="6309360" y="4078224"/>
+            <a:ext cx="1737360" cy="676656"/>
+          </a:xfrm>
+          <a:prstGeom prst="roundRect">
+            <a:avLst>
+              <a:gd name="adj" fmla="val 12000"/>
+            </a:avLst>
+          </a:prstGeom>
+          <a:solidFill>
+            <a:srgbClr val="0B66C3"/>
+          </a:solidFill>
+          <a:ln>
+            <a:noFill/>
+          </a:ln>
+        </p:spPr>
+        <p:style>
+          <a:lnRef idx="1">
+            <a:schemeClr val="accent1"/>
+          </a:lnRef>
+          <a:fillRef idx="3">
+            <a:schemeClr val="accent1"/>
+          </a:fillRef>
+          <a:effectRef idx="2">
+            <a:schemeClr val="accent1"/>
+          </a:effectRef>
+          <a:fontRef idx="minor">
+            <a:schemeClr val="lt1"/>
+          </a:fontRef>
+        </p:style>
+        <p:txBody>
+          <a:bodyPr rtlCol="0" anchor="ctr" wrap="square" lIns="73152" rIns="73152" tIns="36576" bIns="36576"/>
+          <a:lstStyle/>
+          <a:p>
+            <a:pPr algn="ctr"/>
+            <a:r>
+              <a:rPr sz="1400" b="1" i="0">
+                <a:solidFill>
+                  <a:srgbClr val="FFFFFF"/>
+                </a:solidFill>
+                <a:latin typeface="Yu Gothic"/>
+                <a:ea typeface="Yu Gothic"/>
+                <a:cs typeface="Yu Gothic"/>
+              </a:rPr>
+              <a:t>advantage A</a:t>
+            </a:r>
+          </a:p>
+        </p:txBody>
+      </p:sp>
+      <p:sp>
+        <p:nvSpPr>
+          <p:cNvPr id="22" name="def advantage A"/>
+          <p:cNvSpPr txBox="1"/>
+          <p:nvPr/>
+        </p:nvSpPr>
+        <p:spPr>
+          <a:xfrm>
+            <a:off x="8138160" y="4059936"/>
+            <a:ext cx="3566160" cy="713232"/>
+          </a:xfrm>
+          <a:prstGeom prst="rect">
+            <a:avLst/>
+          </a:prstGeom>
+          <a:noFill/>
+        </p:spPr>
+        <p:txBody>
+          <a:bodyPr wrap="square" anchor="ctr" lIns="45720" rIns="45720" tIns="27432" bIns="27432">
+            <a:spAutoFit/>
+          </a:bodyPr>
+          <a:lstStyle/>
+          <a:p>
+            <a:pPr algn="l">
+              <a:spcAft>
+                <a:spcPts val="600"/>
+              </a:spcAft>
+            </a:pPr>
+            <a:r>
+              <a:rPr sz="1300" b="0" i="0">
+                <a:solidFill>
+                  <a:srgbClr val="1A1A1A"/>
+                </a:solidFill>
+                <a:latin typeface="Yu Gothic"/>
+                <a:ea typeface="Yu Gothic"/>
+                <a:cs typeface="Yu Gothic"/>
+              </a:rPr>
+              <a:t>その行動で、予想よりどれだけ良くなったか（実際 − 予想）</a:t>
+            </a:r>
+          </a:p>
+        </p:txBody>
+      </p:sp>
+      <p:sp>
+        <p:nvSpPr>
+          <p:cNvPr id="23" name="term 評価者（critic）"/>
+          <p:cNvSpPr/>
+          <p:nvPr/>
+        </p:nvSpPr>
+        <p:spPr>
+          <a:xfrm>
+            <a:off x="6309360" y="4846320"/>
+            <a:ext cx="1737360" cy="676656"/>
+          </a:xfrm>
+          <a:prstGeom prst="roundRect">
+            <a:avLst>
+              <a:gd name="adj" fmla="val 12000"/>
+            </a:avLst>
+          </a:prstGeom>
+          <a:solidFill>
+            <a:srgbClr val="0B66C3"/>
+          </a:solidFill>
+          <a:ln>
+            <a:noFill/>
+          </a:ln>
+        </p:spPr>
+        <p:style>
+          <a:lnRef idx="1">
+            <a:schemeClr val="accent1"/>
+          </a:lnRef>
+          <a:fillRef idx="3">
+            <a:schemeClr val="accent1"/>
+          </a:fillRef>
+          <a:effectRef idx="2">
+            <a:schemeClr val="accent1"/>
+          </a:effectRef>
+          <a:fontRef idx="minor">
+            <a:schemeClr val="lt1"/>
+          </a:fontRef>
+        </p:style>
+        <p:txBody>
+          <a:bodyPr rtlCol="0" anchor="ctr" wrap="square" lIns="73152" rIns="73152" tIns="36576" bIns="36576"/>
+          <a:lstStyle/>
+          <a:p>
+            <a:pPr algn="ctr"/>
+            <a:r>
+              <a:rPr sz="1400" b="1" i="0">
+                <a:solidFill>
+                  <a:srgbClr val="FFFFFF"/>
+                </a:solidFill>
+                <a:latin typeface="Yu Gothic"/>
+                <a:ea typeface="Yu Gothic"/>
+                <a:cs typeface="Yu Gothic"/>
+              </a:rPr>
+              <a:t>評価者（critic）</a:t>
+            </a:r>
+          </a:p>
+        </p:txBody>
+      </p:sp>
+      <p:sp>
+        <p:nvSpPr>
+          <p:cNvPr id="24" name="def 評価者（critic）"/>
+          <p:cNvSpPr txBox="1"/>
+          <p:nvPr/>
+        </p:nvSpPr>
+        <p:spPr>
+          <a:xfrm>
+            <a:off x="8138160" y="4828032"/>
+            <a:ext cx="3566160" cy="713232"/>
+          </a:xfrm>
+          <a:prstGeom prst="rect">
+            <a:avLst/>
+          </a:prstGeom>
+          <a:noFill/>
+        </p:spPr>
+        <p:txBody>
+          <a:bodyPr wrap="square" anchor="ctr" lIns="45720" rIns="45720" tIns="27432" bIns="27432">
+            <a:spAutoFit/>
+          </a:bodyPr>
+          <a:lstStyle/>
+          <a:p>
+            <a:pPr algn="l">
+              <a:spcAft>
+                <a:spcPts val="600"/>
+              </a:spcAft>
+            </a:pPr>
+            <a:r>
+              <a:rPr sz="1300" b="0" i="0">
+                <a:solidFill>
+                  <a:srgbClr val="1A1A1A"/>
+                </a:solidFill>
+                <a:latin typeface="Yu Gothic"/>
+                <a:ea typeface="Yu Gothic"/>
+                <a:cs typeface="Yu Gothic"/>
+              </a:rPr>
+              <a:t>状態や行動の良さを、数値で答えるモデル。RECAP は価値関数 V、STEAM は時間差を当てる critic</a:t>
+            </a:r>
+          </a:p>
+        </p:txBody>
+      </p:sp>
+      <p:sp>
+        <p:nvSpPr>
+          <p:cNvPr id="25" name="key point"/>
           <p:cNvSpPr/>
           <p:nvPr/>
         </p:nvSpPr>
@@ -31082,7 +31919,7 @@
                 <a:ea typeface="Yu Gothic"/>
                 <a:cs typeface="Yu Gothic"/>
               </a:rPr>
-              <a:t>→ RECAP と STEAM は評価者だけが違う。RL Token は、オンラインで行動を洗練する</a:t>
+              <a:t>→ RL は、結果から良い行動を増やす学習。RECAP・STEAM は、評価者（critic）で advantage を作る</a:t>
             </a:r>
           </a:p>
         </p:txBody>
@@ -31154,7 +31991,7 @@
                 <a:ea typeface="Yu Gothic"/>
                 <a:cs typeface="Yu Gothic"/>
               </a:rPr>
-              <a:t>強化学習の基本用語</a:t>
+              <a:t>背景: なぜ VLA に強化学習か</a:t>
             </a:r>
           </a:p>
         </p:txBody>
@@ -31202,14 +32039,162 @@
       </p:sp>
       <p:sp>
         <p:nvSpPr>
-          <p:cNvPr id="4" name="agent"/>
+          <p:cNvPr id="4" name="TextBox 3"/>
+          <p:cNvSpPr txBox="1"/>
+          <p:nvPr/>
+        </p:nvSpPr>
+        <p:spPr>
+          <a:xfrm>
+            <a:off x="548640" y="1005840"/>
+            <a:ext cx="5120640" cy="4480560"/>
+          </a:xfrm>
+          <a:prstGeom prst="rect">
+            <a:avLst/>
+          </a:prstGeom>
+          <a:noFill/>
+        </p:spPr>
+        <p:txBody>
+          <a:bodyPr wrap="square" anchor="t" lIns="45720" rIns="45720" tIns="27432" bIns="27432">
+            <a:spAutoFit/>
+          </a:bodyPr>
+          <a:lstStyle/>
+          <a:p>
+            <a:pPr algn="l" marL="274320" indent="-256032">
+              <a:spcAft>
+                <a:spcPts val="600"/>
+              </a:spcAft>
+              <a:buChar char="•"/>
+            </a:pPr>
+            <a:r>
+              <a:rPr sz="1700" b="1" i="0">
+                <a:solidFill>
+                  <a:srgbClr val="1A1A1A"/>
+                </a:solidFill>
+                <a:latin typeface="Yu Gothic"/>
+                <a:ea typeface="Yu Gothic"/>
+                <a:cs typeface="Yu Gothic"/>
+              </a:rPr>
+              <a:t>VLA は、模倣学習（SFT）で多様な技能を学べる</a:t>
+            </a:r>
+          </a:p>
+          <a:p>
+            <a:pPr algn="l" marL="585216" indent="-256032">
+              <a:spcAft>
+                <a:spcPts val="600"/>
+              </a:spcAft>
+              <a:buChar char="–"/>
+            </a:pPr>
+            <a:r>
+              <a:rPr sz="1500" b="0" i="0">
+                <a:solidFill>
+                  <a:srgbClr val="1A1A1A"/>
+                </a:solidFill>
+                <a:latin typeface="Yu Gothic"/>
+                <a:ea typeface="Yu Gothic"/>
+                <a:cs typeface="Yu Gothic"/>
+              </a:rPr>
+              <a:t>ただし、実タスクが要求する精度・速度・失敗からの回復には届かない</a:t>
+            </a:r>
+          </a:p>
+          <a:p>
+            <a:pPr algn="l" marL="274320" indent="-256032">
+              <a:spcAft>
+                <a:spcPts val="600"/>
+              </a:spcAft>
+              <a:buChar char="•"/>
+            </a:pPr>
+            <a:r>
+              <a:rPr sz="1700" b="1" i="0">
+                <a:solidFill>
+                  <a:srgbClr val="1A1A1A"/>
+                </a:solidFill>
+                <a:latin typeface="Yu Gothic"/>
+                <a:ea typeface="Yu Gothic"/>
+                <a:cs typeface="Yu Gothic"/>
+              </a:rPr>
+              <a:t>強化学習（RL）で、自分の経験から改善したい</a:t>
+            </a:r>
+          </a:p>
+          <a:p>
+            <a:pPr algn="l" marL="585216" indent="-256032">
+              <a:spcAft>
+                <a:spcPts val="600"/>
+              </a:spcAft>
+              <a:buChar char="–"/>
+            </a:pPr>
+            <a:r>
+              <a:rPr sz="1500" b="0" i="0">
+                <a:solidFill>
+                  <a:srgbClr val="1A1A1A"/>
+                </a:solidFill>
+                <a:latin typeface="Yu Gothic"/>
+                <a:ea typeface="Yu Gothic"/>
+                <a:cs typeface="Yu Gothic"/>
+              </a:rPr>
+              <a:t>10 億パラメータ級のモデル全体を、オンラインで更新するのは、計算コストもサンプル効率も悪い</a:t>
+            </a:r>
+          </a:p>
+          <a:p>
+            <a:pPr algn="l" marL="585216" indent="-256032">
+              <a:spcAft>
+                <a:spcPts val="600"/>
+              </a:spcAft>
+              <a:buChar char="–"/>
+            </a:pPr>
+            <a:r>
+              <a:rPr sz="1500" b="0" i="0">
+                <a:solidFill>
+                  <a:srgbClr val="1A1A1A"/>
+                </a:solidFill>
+                <a:latin typeface="Yu Gothic"/>
+                <a:ea typeface="Yu Gothic"/>
+                <a:cs typeface="Yu Gothic"/>
+              </a:rPr>
+              <a:t>flow matching の行動生成は、対数尤度が扱いにくく、方策勾配法（PPO など）を適用しにくい</a:t>
+            </a:r>
+          </a:p>
+          <a:p>
+            <a:pPr algn="l" marL="274320" indent="-256032">
+              <a:spcAft>
+                <a:spcPts val="600"/>
+              </a:spcAft>
+              <a:buChar char="•"/>
+            </a:pPr>
+            <a:r>
+              <a:rPr sz="1700" b="1" i="0">
+                <a:solidFill>
+                  <a:srgbClr val="1A1A1A"/>
+                </a:solidFill>
+                <a:latin typeface="Yu Gothic"/>
+                <a:ea typeface="Yu Gothic"/>
+                <a:cs typeface="Yu Gothic"/>
+              </a:rPr>
+              <a:t>3 手法の位置づけ</a:t>
+            </a:r>
+            <a:r>
+              <a:rPr sz="1700" b="0" i="0">
+                <a:solidFill>
+                  <a:srgbClr val="1A1A1A"/>
+                </a:solidFill>
+                <a:latin typeface="Yu Gothic"/>
+                <a:ea typeface="Yu Gothic"/>
+                <a:cs typeface="Yu Gothic"/>
+              </a:rPr>
+              <a:t>: RECAP と STEAM は評価者だけが違う。RL Token は、行動を洗練する</a:t>
+            </a:r>
+          </a:p>
+        </p:txBody>
+      </p:sp>
+      <p:sp>
+        <p:nvSpPr>
+          <p:cNvPr id="5" name="card RECAP"/>
           <p:cNvSpPr/>
           <p:nvPr/>
         </p:nvSpPr>
         <p:spPr>
           <a:xfrm>
-            <a:off x="548640" y="1097280"/>
-            <a:ext cx="2194560" cy="1097280"/>
+            <a:off x="5943600" y="1005840"/>
+            <a:ext cx="1828800" cy="1371600"/>
           </a:xfrm>
           <a:prstGeom prst="roundRect">
             <a:avLst>
@@ -31217,7 +32202,7 @@
             </a:avLst>
           </a:prstGeom>
           <a:solidFill>
-            <a:srgbClr val="E8F1FB"/>
+            <a:srgbClr val="F3F7FC"/>
           </a:solidFill>
           <a:ln w="12700">
             <a:solidFill>
@@ -31245,57 +32230,29 @@
           <a:p>
             <a:pPr algn="ctr"/>
             <a:r>
-              <a:rPr sz="1500" b="1" i="0">
-                <a:solidFill>
-                  <a:srgbClr val="1A1A1A"/>
-                </a:solidFill>
-                <a:latin typeface="Yu Gothic"/>
-                <a:ea typeface="Yu Gothic"/>
-                <a:cs typeface="Yu Gothic"/>
-              </a:rPr>
-              <a:t>エージェント</a:t>
-            </a:r>
-          </a:p>
-          <a:p>
-            <a:pPr algn="ctr"/>
-            <a:r>
-              <a:rPr sz="1300" b="0" i="0">
-                <a:solidFill>
-                  <a:srgbClr val="1A1A1A"/>
-                </a:solidFill>
-                <a:latin typeface="Yu Gothic"/>
-                <a:ea typeface="Yu Gothic"/>
-                <a:cs typeface="Yu Gothic"/>
-              </a:rPr>
-              <a:t>方策 π（= VLA）が</a:t>
-            </a:r>
-          </a:p>
-          <a:p>
-            <a:pPr algn="ctr"/>
-            <a:r>
-              <a:rPr sz="1300" b="0" i="0">
-                <a:solidFill>
-                  <a:srgbClr val="1A1A1A"/>
-                </a:solidFill>
-                <a:latin typeface="Yu Gothic"/>
-                <a:ea typeface="Yu Gothic"/>
-                <a:cs typeface="Yu Gothic"/>
-              </a:rPr>
-              <a:t>行動を決める</a:t>
-            </a:r>
-          </a:p>
-        </p:txBody>
-      </p:sp>
-      <p:sp>
-        <p:nvSpPr>
-          <p:cNvPr id="5" name="env"/>
+              <a:rPr sz="2000" b="1" i="0">
+                <a:solidFill>
+                  <a:srgbClr val="0B66C3"/>
+                </a:solidFill>
+                <a:latin typeface="Yu Gothic"/>
+                <a:ea typeface="Yu Gothic"/>
+                <a:cs typeface="Yu Gothic"/>
+              </a:rPr>
+              <a:t>RECAP</a:t>
+            </a:r>
+          </a:p>
+        </p:txBody>
+      </p:sp>
+      <p:sp>
+        <p:nvSpPr>
+          <p:cNvPr id="6" name="desc RECAP"/>
           <p:cNvSpPr/>
           <p:nvPr/>
         </p:nvSpPr>
         <p:spPr>
           <a:xfrm>
-            <a:off x="3931920" y="1097280"/>
-            <a:ext cx="2011680" cy="1097280"/>
+            <a:off x="7863840" y="1005840"/>
+            <a:ext cx="3749039" cy="1371600"/>
           </a:xfrm>
           <a:prstGeom prst="roundRect">
             <a:avLst>
@@ -31329,100 +32286,81 @@
           <a:bodyPr rtlCol="0" anchor="ctr" wrap="square" lIns="73152" rIns="73152" tIns="36576" bIns="36576"/>
           <a:lstStyle/>
           <a:p>
-            <a:pPr algn="ctr"/>
-            <a:r>
-              <a:rPr sz="1500" b="1" i="0">
-                <a:solidFill>
-                  <a:srgbClr val="1A1A1A"/>
-                </a:solidFill>
-                <a:latin typeface="Yu Gothic"/>
-                <a:ea typeface="Yu Gothic"/>
-                <a:cs typeface="Yu Gothic"/>
-              </a:rPr>
-              <a:t>環境</a:t>
-            </a:r>
-          </a:p>
-          <a:p>
-            <a:pPr algn="ctr"/>
-            <a:r>
-              <a:rPr sz="1300" b="0" i="0">
-                <a:solidFill>
-                  <a:srgbClr val="1A1A1A"/>
-                </a:solidFill>
-                <a:latin typeface="Yu Gothic"/>
-                <a:ea typeface="Yu Gothic"/>
-                <a:cs typeface="Yu Gothic"/>
-              </a:rPr>
-              <a:t>シミュレータ / 実世界</a:t>
-            </a:r>
-          </a:p>
-        </p:txBody>
-      </p:sp>
-      <p:cxnSp>
-        <p:nvCxnSpPr>
-          <p:cNvPr id="6" name="Connector 5"/>
-          <p:cNvCxnSpPr/>
-          <p:nvPr/>
-        </p:nvCxnSpPr>
-        <p:spPr>
-          <a:xfrm>
-            <a:off x="2743200" y="1371600"/>
-            <a:ext cx="1188720" cy="0"/>
-          </a:xfrm>
-          <a:prstGeom prst="line">
-            <a:avLst/>
-          </a:prstGeom>
-          <a:ln w="25400">
+            <a:pPr algn="l"/>
+            <a:r>
+              <a:rPr sz="1400" b="1" i="0">
+                <a:solidFill>
+                  <a:srgbClr val="1A1A1A"/>
+                </a:solidFill>
+                <a:latin typeface="Yu Gothic"/>
+                <a:ea typeface="Yu Gothic"/>
+                <a:cs typeface="Yu Gothic"/>
+              </a:rPr>
+              <a:t>方策の学習目標</a:t>
+            </a:r>
+          </a:p>
+          <a:p>
+            <a:pPr algn="l"/>
+            <a:r>
+              <a:rPr sz="1400" b="0" i="0">
+                <a:solidFill>
+                  <a:srgbClr val="1A1A1A"/>
+                </a:solidFill>
+                <a:latin typeface="Yu Gothic"/>
+                <a:ea typeface="Yu Gothic"/>
+                <a:cs typeface="Yu Gothic"/>
+              </a:rPr>
+              <a:t>評価者は価値関数。成功への近さ V から advantage を作り、「良い」の札を付けて方策を学習する</a:t>
+            </a:r>
+          </a:p>
+        </p:txBody>
+      </p:sp>
+      <p:sp>
+        <p:nvSpPr>
+          <p:cNvPr id="7" name="card STEAM"/>
+          <p:cNvSpPr/>
+          <p:nvPr/>
+        </p:nvSpPr>
+        <p:spPr>
+          <a:xfrm>
+            <a:off x="5943600" y="2560320"/>
+            <a:ext cx="1828800" cy="1371600"/>
+          </a:xfrm>
+          <a:prstGeom prst="roundRect">
+            <a:avLst>
+              <a:gd name="adj" fmla="val 12000"/>
+            </a:avLst>
+          </a:prstGeom>
+          <a:solidFill>
+            <a:srgbClr val="F3F7FC"/>
+          </a:solidFill>
+          <a:ln w="12700">
             <a:solidFill>
               <a:srgbClr val="0B66C3"/>
             </a:solidFill>
-            <a:tailEnd type="triangle" w="med" len="med"/>
           </a:ln>
         </p:spPr>
         <p:style>
-          <a:lnRef idx="2">
+          <a:lnRef idx="1">
             <a:schemeClr val="accent1"/>
           </a:lnRef>
-          <a:fillRef idx="0">
+          <a:fillRef idx="3">
             <a:schemeClr val="accent1"/>
           </a:fillRef>
-          <a:effectRef idx="1">
+          <a:effectRef idx="2">
             <a:schemeClr val="accent1"/>
           </a:effectRef>
           <a:fontRef idx="minor">
-            <a:schemeClr val="tx1"/>
+            <a:schemeClr val="lt1"/>
           </a:fontRef>
         </p:style>
-      </p:cxnSp>
-      <p:sp>
-        <p:nvSpPr>
-          <p:cNvPr id="7" name="TextBox 6"/>
-          <p:cNvSpPr txBox="1"/>
-          <p:nvPr/>
-        </p:nvSpPr>
-        <p:spPr>
-          <a:xfrm>
-            <a:off x="2743200" y="1005840"/>
-            <a:ext cx="1188720" cy="320040"/>
-          </a:xfrm>
-          <a:prstGeom prst="rect">
-            <a:avLst/>
-          </a:prstGeom>
-          <a:noFill/>
-        </p:spPr>
-        <p:txBody>
-          <a:bodyPr wrap="square" anchor="t" lIns="45720" rIns="45720" tIns="27432" bIns="27432">
-            <a:spAutoFit/>
-          </a:bodyPr>
-          <a:lstStyle/>
-          <a:p>
-            <a:pPr algn="ctr">
-              <a:spcAft>
-                <a:spcPts val="600"/>
-              </a:spcAft>
-            </a:pPr>
-            <a:r>
-              <a:rPr sz="1300" b="1" i="0">
+        <p:txBody>
+          <a:bodyPr rtlCol="0" anchor="ctr" wrap="square" lIns="73152" rIns="73152" tIns="36576" bIns="36576"/>
+          <a:lstStyle/>
+          <a:p>
+            <a:pPr algn="ctr"/>
+            <a:r>
+              <a:rPr sz="2000" b="1" i="0">
                 <a:solidFill>
                   <a:srgbClr val="0B66C3"/>
                 </a:solidFill>
@@ -31430,140 +32368,21 @@
                 <a:ea typeface="Yu Gothic"/>
                 <a:cs typeface="Yu Gothic"/>
               </a:rPr>
-              <a:t>行動 a</a:t>
-            </a:r>
-          </a:p>
-        </p:txBody>
-      </p:sp>
-      <p:cxnSp>
-        <p:nvCxnSpPr>
-          <p:cNvPr id="8" name="Connector 7"/>
-          <p:cNvCxnSpPr/>
-          <p:nvPr/>
-        </p:nvCxnSpPr>
-        <p:spPr>
-          <a:xfrm flipH="1">
-            <a:off x="2743200" y="1920240"/>
-            <a:ext cx="1188720" cy="0"/>
-          </a:xfrm>
-          <a:prstGeom prst="line">
-            <a:avLst/>
-          </a:prstGeom>
-          <a:ln w="25400">
-            <a:solidFill>
-              <a:srgbClr val="0B66C3"/>
-            </a:solidFill>
-            <a:tailEnd type="triangle" w="med" len="med"/>
-          </a:ln>
-        </p:spPr>
-        <p:style>
-          <a:lnRef idx="2">
-            <a:schemeClr val="accent1"/>
-          </a:lnRef>
-          <a:fillRef idx="0">
-            <a:schemeClr val="accent1"/>
-          </a:fillRef>
-          <a:effectRef idx="1">
-            <a:schemeClr val="accent1"/>
-          </a:effectRef>
-          <a:fontRef idx="minor">
-            <a:schemeClr val="tx1"/>
-          </a:fontRef>
-        </p:style>
-      </p:cxnSp>
-      <p:sp>
-        <p:nvSpPr>
-          <p:cNvPr id="9" name="TextBox 8"/>
-          <p:cNvSpPr txBox="1"/>
-          <p:nvPr/>
-        </p:nvSpPr>
-        <p:spPr>
-          <a:xfrm>
-            <a:off x="2743200" y="1965960"/>
-            <a:ext cx="1188720" cy="640080"/>
-          </a:xfrm>
-          <a:prstGeom prst="rect">
-            <a:avLst/>
-          </a:prstGeom>
-          <a:noFill/>
-        </p:spPr>
-        <p:txBody>
-          <a:bodyPr wrap="square" anchor="t" lIns="45720" rIns="45720" tIns="27432" bIns="27432">
-            <a:spAutoFit/>
-          </a:bodyPr>
-          <a:lstStyle/>
-          <a:p>
-            <a:pPr algn="ctr">
-              <a:spcAft>
-                <a:spcPts val="600"/>
-              </a:spcAft>
-            </a:pPr>
-            <a:r>
-              <a:rPr sz="1300" b="1" i="0">
-                <a:solidFill>
-                  <a:srgbClr val="0B66C3"/>
-                </a:solidFill>
-                <a:latin typeface="Yu Gothic"/>
-                <a:ea typeface="Yu Gothic"/>
-                <a:cs typeface="Yu Gothic"/>
-              </a:rPr>
-              <a:t>観測 o
-報酬 r</a:t>
-            </a:r>
-          </a:p>
-        </p:txBody>
-      </p:sp>
-      <p:sp>
-        <p:nvSpPr>
-          <p:cNvPr id="10" name="TextBox 9"/>
-          <p:cNvSpPr txBox="1"/>
-          <p:nvPr/>
-        </p:nvSpPr>
-        <p:spPr>
-          <a:xfrm>
-            <a:off x="548640" y="2743200"/>
-            <a:ext cx="5394960" cy="685800"/>
-          </a:xfrm>
-          <a:prstGeom prst="rect">
-            <a:avLst/>
-          </a:prstGeom>
-          <a:noFill/>
-        </p:spPr>
-        <p:txBody>
-          <a:bodyPr wrap="square" anchor="t" lIns="45720" rIns="45720" tIns="27432" bIns="27432">
-            <a:spAutoFit/>
-          </a:bodyPr>
-          <a:lstStyle/>
-          <a:p>
-            <a:pPr algn="l">
-              <a:spcAft>
-                <a:spcPts val="600"/>
-              </a:spcAft>
-            </a:pPr>
-            <a:r>
-              <a:rPr sz="1300" b="0" i="0">
-                <a:solidFill>
-                  <a:srgbClr val="595959"/>
-                </a:solidFill>
-                <a:latin typeface="Yu Gothic"/>
-                <a:ea typeface="Yu Gothic"/>
-                <a:cs typeface="Yu Gothic"/>
-              </a:rPr>
-              <a:t>観測 o = カメラ画像と関節の状態。これを何百ステップも繰り返す = 1 エピソード</a:t>
-            </a:r>
-          </a:p>
-        </p:txBody>
-      </p:sp>
-      <p:sp>
-        <p:nvSpPr>
-          <p:cNvPr id="11" name="sft"/>
+              <a:t>STEAM</a:t>
+            </a:r>
+          </a:p>
+        </p:txBody>
+      </p:sp>
+      <p:sp>
+        <p:nvSpPr>
+          <p:cNvPr id="8" name="desc STEAM"/>
           <p:cNvSpPr/>
           <p:nvPr/>
         </p:nvSpPr>
         <p:spPr>
           <a:xfrm>
-            <a:off x="548640" y="3566160"/>
-            <a:ext cx="2606040" cy="1417320"/>
+            <a:off x="7863840" y="2560320"/>
+            <a:ext cx="3749039" cy="1371600"/>
           </a:xfrm>
           <a:prstGeom prst="roundRect">
             <a:avLst>
@@ -31597,59 +32416,45 @@
           <a:bodyPr rtlCol="0" anchor="ctr" wrap="square" lIns="73152" rIns="73152" tIns="36576" bIns="36576"/>
           <a:lstStyle/>
           <a:p>
-            <a:pPr algn="ctr"/>
-            <a:r>
-              <a:rPr sz="1500" b="1" i="0">
-                <a:solidFill>
-                  <a:srgbClr val="1A1A1A"/>
-                </a:solidFill>
-                <a:latin typeface="Yu Gothic"/>
-                <a:ea typeface="Yu Gothic"/>
-                <a:cs typeface="Yu Gothic"/>
-              </a:rPr>
-              <a:t>模倣学習（SFT）</a:t>
-            </a:r>
-          </a:p>
-          <a:p>
-            <a:pPr algn="ctr"/>
-            <a:r>
-              <a:rPr sz="1300" b="0" i="0">
-                <a:solidFill>
-                  <a:srgbClr val="1A1A1A"/>
-                </a:solidFill>
-                <a:latin typeface="Yu Gothic"/>
-                <a:ea typeface="Yu Gothic"/>
-                <a:cs typeface="Yu Gothic"/>
-              </a:rPr>
-              <a:t>お手本の行動を</a:t>
-            </a:r>
-          </a:p>
-          <a:p>
-            <a:pPr algn="ctr"/>
-            <a:r>
-              <a:rPr sz="1300" b="0" i="0">
-                <a:solidFill>
-                  <a:srgbClr val="1A1A1A"/>
-                </a:solidFill>
-                <a:latin typeface="Yu Gothic"/>
-                <a:ea typeface="Yu Gothic"/>
-                <a:cs typeface="Yu Gothic"/>
-              </a:rPr>
-              <a:t>そのまま真似る</a:t>
-            </a:r>
-          </a:p>
-        </p:txBody>
-      </p:sp>
-      <p:sp>
-        <p:nvSpPr>
-          <p:cNvPr id="12" name="rl"/>
+            <a:pPr algn="l"/>
+            <a:r>
+              <a:rPr sz="1400" b="1" i="0">
+                <a:solidFill>
+                  <a:srgbClr val="1A1A1A"/>
+                </a:solidFill>
+                <a:latin typeface="Yu Gothic"/>
+                <a:ea typeface="Yu Gothic"/>
+                <a:cs typeface="Yu Gothic"/>
+              </a:rPr>
+              <a:t>方策の学習目標</a:t>
+            </a:r>
+          </a:p>
+          <a:p>
+            <a:pPr algn="l"/>
+            <a:r>
+              <a:rPr sz="1400" b="0" i="0">
+                <a:solidFill>
+                  <a:srgbClr val="1A1A1A"/>
+                </a:solidFill>
+                <a:latin typeface="Yu Gothic"/>
+                <a:ea typeface="Yu Gothic"/>
+                <a:cs typeface="Yu Gothic"/>
+              </a:rPr>
+              <a:t>評価者は、時間オフセットを当てる critic のアンサンブル。advantage を作り、同じ札付きの学習で方策を学習する</a:t>
+            </a:r>
+          </a:p>
+        </p:txBody>
+      </p:sp>
+      <p:sp>
+        <p:nvSpPr>
+          <p:cNvPr id="9" name="card RL Token"/>
           <p:cNvSpPr/>
           <p:nvPr/>
         </p:nvSpPr>
         <p:spPr>
           <a:xfrm>
-            <a:off x="3337560" y="3566160"/>
-            <a:ext cx="2606040" cy="1417320"/>
+            <a:off x="5943600" y="4114800"/>
+            <a:ext cx="1828800" cy="1371600"/>
           </a:xfrm>
           <a:prstGeom prst="roundRect">
             <a:avLst>
@@ -31657,7 +32462,7 @@
             </a:avLst>
           </a:prstGeom>
           <a:solidFill>
-            <a:srgbClr val="E8F1FB"/>
+            <a:srgbClr val="F3F7FC"/>
           </a:solidFill>
           <a:ln w="12700">
             <a:solidFill>
@@ -31685,57 +32490,29 @@
           <a:p>
             <a:pPr algn="ctr"/>
             <a:r>
-              <a:rPr sz="1500" b="1" i="0">
-                <a:solidFill>
-                  <a:srgbClr val="1A1A1A"/>
-                </a:solidFill>
-                <a:latin typeface="Yu Gothic"/>
-                <a:ea typeface="Yu Gothic"/>
-                <a:cs typeface="Yu Gothic"/>
-              </a:rPr>
-              <a:t>強化学習（RL）</a:t>
-            </a:r>
-          </a:p>
-          <a:p>
-            <a:pPr algn="ctr"/>
-            <a:r>
-              <a:rPr sz="1300" b="0" i="0">
-                <a:solidFill>
-                  <a:srgbClr val="1A1A1A"/>
-                </a:solidFill>
-                <a:latin typeface="Yu Gothic"/>
-                <a:ea typeface="Yu Gothic"/>
-                <a:cs typeface="Yu Gothic"/>
-              </a:rPr>
-              <a:t>結果（報酬）を見て、</a:t>
-            </a:r>
-          </a:p>
-          <a:p>
-            <a:pPr algn="ctr"/>
-            <a:r>
-              <a:rPr sz="1300" b="0" i="0">
-                <a:solidFill>
-                  <a:srgbClr val="1A1A1A"/>
-                </a:solidFill>
-                <a:latin typeface="Yu Gothic"/>
-                <a:ea typeface="Yu Gothic"/>
-                <a:cs typeface="Yu Gothic"/>
-              </a:rPr>
-              <a:t>良い行動を増やす</a:t>
-            </a:r>
-          </a:p>
-        </p:txBody>
-      </p:sp>
-      <p:sp>
-        <p:nvSpPr>
-          <p:cNvPr id="13" name="term 方策 π"/>
+              <a:rPr sz="2000" b="1" i="0">
+                <a:solidFill>
+                  <a:srgbClr val="0B66C3"/>
+                </a:solidFill>
+                <a:latin typeface="Yu Gothic"/>
+                <a:ea typeface="Yu Gothic"/>
+                <a:cs typeface="Yu Gothic"/>
+              </a:rPr>
+              <a:t>RL Token</a:t>
+            </a:r>
+          </a:p>
+        </p:txBody>
+      </p:sp>
+      <p:sp>
+        <p:nvSpPr>
+          <p:cNvPr id="10" name="desc RL Token"/>
           <p:cNvSpPr/>
           <p:nvPr/>
         </p:nvSpPr>
         <p:spPr>
           <a:xfrm>
-            <a:off x="6309360" y="1005840"/>
-            <a:ext cx="1737360" cy="676656"/>
+            <a:off x="7863840" y="4114800"/>
+            <a:ext cx="3749039" cy="1371600"/>
           </a:xfrm>
           <a:prstGeom prst="roundRect">
             <a:avLst>
@@ -31743,10 +32520,12 @@
             </a:avLst>
           </a:prstGeom>
           <a:solidFill>
-            <a:srgbClr val="0B66C3"/>
+            <a:srgbClr val="FFFFFF"/>
           </a:solidFill>
-          <a:ln>
-            <a:noFill/>
+          <a:ln w="12700">
+            <a:solidFill>
+              <a:srgbClr val="BFBFBF"/>
+            </a:solidFill>
           </a:ln>
         </p:spPr>
         <p:style>
@@ -31767,550 +32546,38 @@
           <a:bodyPr rtlCol="0" anchor="ctr" wrap="square" lIns="73152" rIns="73152" tIns="36576" bIns="36576"/>
           <a:lstStyle/>
           <a:p>
-            <a:pPr algn="ctr"/>
+            <a:pPr algn="l"/>
             <a:r>
               <a:rPr sz="1400" b="1" i="0">
                 <a:solidFill>
-                  <a:srgbClr val="FFFFFF"/>
-                </a:solidFill>
-                <a:latin typeface="Yu Gothic"/>
-                <a:ea typeface="Yu Gothic"/>
-                <a:cs typeface="Yu Gothic"/>
-              </a:rPr>
-              <a:t>方策 π</a:t>
-            </a:r>
-          </a:p>
-        </p:txBody>
-      </p:sp>
-      <p:sp>
-        <p:nvSpPr>
-          <p:cNvPr id="14" name="def 方策 π"/>
-          <p:cNvSpPr txBox="1"/>
-          <p:nvPr/>
-        </p:nvSpPr>
-        <p:spPr>
-          <a:xfrm>
-            <a:off x="8138160" y="987552"/>
-            <a:ext cx="3566160" cy="713232"/>
-          </a:xfrm>
-          <a:prstGeom prst="rect">
-            <a:avLst/>
-          </a:prstGeom>
-          <a:noFill/>
-        </p:spPr>
-        <p:txBody>
-          <a:bodyPr wrap="square" anchor="ctr" lIns="45720" rIns="45720" tIns="27432" bIns="27432">
-            <a:spAutoFit/>
-          </a:bodyPr>
-          <a:lstStyle/>
-          <a:p>
-            <a:pPr algn="l">
-              <a:spcAft>
-                <a:spcPts val="600"/>
-              </a:spcAft>
-            </a:pPr>
-            <a:r>
-              <a:rPr sz="1300" b="0" i="0">
-                <a:solidFill>
-                  <a:srgbClr val="1A1A1A"/>
-                </a:solidFill>
-                <a:latin typeface="Yu Gothic"/>
-                <a:ea typeface="Yu Gothic"/>
-                <a:cs typeface="Yu Gothic"/>
-              </a:rPr>
-              <a:t>観測から行動を決める関数。ここでは VLA（画像と指示文から、ロボットの動きを出力するモデル）</a:t>
-            </a:r>
-          </a:p>
-        </p:txBody>
-      </p:sp>
-      <p:sp>
-        <p:nvSpPr>
-          <p:cNvPr id="15" name="term 報酬 r"/>
-          <p:cNvSpPr/>
-          <p:nvPr/>
-        </p:nvSpPr>
-        <p:spPr>
-          <a:xfrm>
-            <a:off x="6309360" y="1773936"/>
-            <a:ext cx="1737360" cy="676656"/>
-          </a:xfrm>
-          <a:prstGeom prst="roundRect">
-            <a:avLst>
-              <a:gd name="adj" fmla="val 12000"/>
-            </a:avLst>
-          </a:prstGeom>
-          <a:solidFill>
-            <a:srgbClr val="0B66C3"/>
-          </a:solidFill>
-          <a:ln>
-            <a:noFill/>
-          </a:ln>
-        </p:spPr>
-        <p:style>
-          <a:lnRef idx="1">
-            <a:schemeClr val="accent1"/>
-          </a:lnRef>
-          <a:fillRef idx="3">
-            <a:schemeClr val="accent1"/>
-          </a:fillRef>
-          <a:effectRef idx="2">
-            <a:schemeClr val="accent1"/>
-          </a:effectRef>
-          <a:fontRef idx="minor">
-            <a:schemeClr val="lt1"/>
-          </a:fontRef>
-        </p:style>
-        <p:txBody>
-          <a:bodyPr rtlCol="0" anchor="ctr" wrap="square" lIns="73152" rIns="73152" tIns="36576" bIns="36576"/>
-          <a:lstStyle/>
-          <a:p>
-            <a:pPr algn="ctr"/>
-            <a:r>
-              <a:rPr sz="1400" b="1" i="0">
-                <a:solidFill>
-                  <a:srgbClr val="FFFFFF"/>
-                </a:solidFill>
-                <a:latin typeface="Yu Gothic"/>
-                <a:ea typeface="Yu Gothic"/>
-                <a:cs typeface="Yu Gothic"/>
-              </a:rPr>
-              <a:t>報酬 r</a:t>
-            </a:r>
-          </a:p>
-        </p:txBody>
-      </p:sp>
-      <p:sp>
-        <p:nvSpPr>
-          <p:cNvPr id="16" name="def 報酬 r"/>
-          <p:cNvSpPr txBox="1"/>
-          <p:nvPr/>
-        </p:nvSpPr>
-        <p:spPr>
-          <a:xfrm>
-            <a:off x="8138160" y="1755648"/>
-            <a:ext cx="3566160" cy="713232"/>
-          </a:xfrm>
-          <a:prstGeom prst="rect">
-            <a:avLst/>
-          </a:prstGeom>
-          <a:noFill/>
-        </p:spPr>
-        <p:txBody>
-          <a:bodyPr wrap="square" anchor="ctr" lIns="45720" rIns="45720" tIns="27432" bIns="27432">
-            <a:spAutoFit/>
-          </a:bodyPr>
-          <a:lstStyle/>
-          <a:p>
-            <a:pPr algn="l">
-              <a:spcAft>
-                <a:spcPts val="600"/>
-              </a:spcAft>
-            </a:pPr>
-            <a:r>
-              <a:rPr sz="1300" b="0" i="0">
-                <a:solidFill>
-                  <a:srgbClr val="1A1A1A"/>
-                </a:solidFill>
-                <a:latin typeface="Yu Gothic"/>
-                <a:ea typeface="Yu Gothic"/>
-                <a:cs typeface="Yu Gothic"/>
-              </a:rPr>
-              <a:t>行動の結果の良さを表す数値（例: 成功で +1、毎ステップ −1）</a:t>
-            </a:r>
-          </a:p>
-        </p:txBody>
-      </p:sp>
-      <p:sp>
-        <p:nvSpPr>
-          <p:cNvPr id="17" name="term return"/>
-          <p:cNvSpPr/>
-          <p:nvPr/>
-        </p:nvSpPr>
-        <p:spPr>
-          <a:xfrm>
-            <a:off x="6309360" y="2542032"/>
-            <a:ext cx="1737360" cy="676656"/>
-          </a:xfrm>
-          <a:prstGeom prst="roundRect">
-            <a:avLst>
-              <a:gd name="adj" fmla="val 12000"/>
-            </a:avLst>
-          </a:prstGeom>
-          <a:solidFill>
-            <a:srgbClr val="0B66C3"/>
-          </a:solidFill>
-          <a:ln>
-            <a:noFill/>
-          </a:ln>
-        </p:spPr>
-        <p:style>
-          <a:lnRef idx="1">
-            <a:schemeClr val="accent1"/>
-          </a:lnRef>
-          <a:fillRef idx="3">
-            <a:schemeClr val="accent1"/>
-          </a:fillRef>
-          <a:effectRef idx="2">
-            <a:schemeClr val="accent1"/>
-          </a:effectRef>
-          <a:fontRef idx="minor">
-            <a:schemeClr val="lt1"/>
-          </a:fontRef>
-        </p:style>
-        <p:txBody>
-          <a:bodyPr rtlCol="0" anchor="ctr" wrap="square" lIns="73152" rIns="73152" tIns="36576" bIns="36576"/>
-          <a:lstStyle/>
-          <a:p>
-            <a:pPr algn="ctr"/>
-            <a:r>
-              <a:rPr sz="1400" b="1" i="0">
-                <a:solidFill>
-                  <a:srgbClr val="FFFFFF"/>
-                </a:solidFill>
-                <a:latin typeface="Yu Gothic"/>
-                <a:ea typeface="Yu Gothic"/>
-                <a:cs typeface="Yu Gothic"/>
-              </a:rPr>
-              <a:t>return</a:t>
-            </a:r>
-          </a:p>
-        </p:txBody>
-      </p:sp>
-      <p:sp>
-        <p:nvSpPr>
-          <p:cNvPr id="18" name="def return"/>
-          <p:cNvSpPr txBox="1"/>
-          <p:nvPr/>
-        </p:nvSpPr>
-        <p:spPr>
-          <a:xfrm>
-            <a:off x="8138160" y="2523744"/>
-            <a:ext cx="3566160" cy="713232"/>
-          </a:xfrm>
-          <a:prstGeom prst="rect">
-            <a:avLst/>
-          </a:prstGeom>
-          <a:noFill/>
-        </p:spPr>
-        <p:txBody>
-          <a:bodyPr wrap="square" anchor="ctr" lIns="45720" rIns="45720" tIns="27432" bIns="27432">
-            <a:spAutoFit/>
-          </a:bodyPr>
-          <a:lstStyle/>
-          <a:p>
-            <a:pPr algn="l">
-              <a:spcAft>
-                <a:spcPts val="600"/>
-              </a:spcAft>
-            </a:pPr>
-            <a:r>
-              <a:rPr sz="1300" b="0" i="0">
-                <a:solidFill>
-                  <a:srgbClr val="1A1A1A"/>
-                </a:solidFill>
-                <a:latin typeface="Yu Gothic"/>
-                <a:ea typeface="Yu Gothic"/>
-                <a:cs typeface="Yu Gothic"/>
-              </a:rPr>
-              <a:t>これから先に得られる報酬の合計</a:t>
-            </a:r>
-          </a:p>
-        </p:txBody>
-      </p:sp>
-      <p:sp>
-        <p:nvSpPr>
-          <p:cNvPr id="19" name="term 価値 V"/>
-          <p:cNvSpPr/>
-          <p:nvPr/>
-        </p:nvSpPr>
-        <p:spPr>
-          <a:xfrm>
-            <a:off x="6309360" y="3310128"/>
-            <a:ext cx="1737360" cy="676656"/>
-          </a:xfrm>
-          <a:prstGeom prst="roundRect">
-            <a:avLst>
-              <a:gd name="adj" fmla="val 12000"/>
-            </a:avLst>
-          </a:prstGeom>
-          <a:solidFill>
-            <a:srgbClr val="0B66C3"/>
-          </a:solidFill>
-          <a:ln>
-            <a:noFill/>
-          </a:ln>
-        </p:spPr>
-        <p:style>
-          <a:lnRef idx="1">
-            <a:schemeClr val="accent1"/>
-          </a:lnRef>
-          <a:fillRef idx="3">
-            <a:schemeClr val="accent1"/>
-          </a:fillRef>
-          <a:effectRef idx="2">
-            <a:schemeClr val="accent1"/>
-          </a:effectRef>
-          <a:fontRef idx="minor">
-            <a:schemeClr val="lt1"/>
-          </a:fontRef>
-        </p:style>
-        <p:txBody>
-          <a:bodyPr rtlCol="0" anchor="ctr" wrap="square" lIns="73152" rIns="73152" tIns="36576" bIns="36576"/>
-          <a:lstStyle/>
-          <a:p>
-            <a:pPr algn="ctr"/>
-            <a:r>
-              <a:rPr sz="1400" b="1" i="0">
-                <a:solidFill>
-                  <a:srgbClr val="FFFFFF"/>
-                </a:solidFill>
-                <a:latin typeface="Yu Gothic"/>
-                <a:ea typeface="Yu Gothic"/>
-                <a:cs typeface="Yu Gothic"/>
-              </a:rPr>
-              <a:t>価値 V</a:t>
-            </a:r>
-          </a:p>
-        </p:txBody>
-      </p:sp>
-      <p:sp>
-        <p:nvSpPr>
-          <p:cNvPr id="20" name="def 価値 V"/>
-          <p:cNvSpPr txBox="1"/>
-          <p:nvPr/>
-        </p:nvSpPr>
-        <p:spPr>
-          <a:xfrm>
-            <a:off x="8138160" y="3291840"/>
-            <a:ext cx="3566160" cy="713232"/>
-          </a:xfrm>
-          <a:prstGeom prst="rect">
-            <a:avLst/>
-          </a:prstGeom>
-          <a:noFill/>
-        </p:spPr>
-        <p:txBody>
-          <a:bodyPr wrap="square" anchor="ctr" lIns="45720" rIns="45720" tIns="27432" bIns="27432">
-            <a:spAutoFit/>
-          </a:bodyPr>
-          <a:lstStyle/>
-          <a:p>
-            <a:pPr algn="l">
-              <a:spcAft>
-                <a:spcPts val="600"/>
-              </a:spcAft>
-            </a:pPr>
-            <a:r>
-              <a:rPr sz="1300" b="0" i="0">
-                <a:solidFill>
-                  <a:srgbClr val="1A1A1A"/>
-                </a:solidFill>
-                <a:latin typeface="Yu Gothic"/>
-                <a:ea typeface="Yu Gothic"/>
-                <a:cs typeface="Yu Gothic"/>
-              </a:rPr>
-              <a:t>いまの状態から、将来得られる return の予想</a:t>
-            </a:r>
-          </a:p>
-        </p:txBody>
-      </p:sp>
-      <p:sp>
-        <p:nvSpPr>
-          <p:cNvPr id="21" name="term advantage A"/>
-          <p:cNvSpPr/>
-          <p:nvPr/>
-        </p:nvSpPr>
-        <p:spPr>
-          <a:xfrm>
-            <a:off x="6309360" y="4078224"/>
-            <a:ext cx="1737360" cy="676656"/>
-          </a:xfrm>
-          <a:prstGeom prst="roundRect">
-            <a:avLst>
-              <a:gd name="adj" fmla="val 12000"/>
-            </a:avLst>
-          </a:prstGeom>
-          <a:solidFill>
-            <a:srgbClr val="0B66C3"/>
-          </a:solidFill>
-          <a:ln>
-            <a:noFill/>
-          </a:ln>
-        </p:spPr>
-        <p:style>
-          <a:lnRef idx="1">
-            <a:schemeClr val="accent1"/>
-          </a:lnRef>
-          <a:fillRef idx="3">
-            <a:schemeClr val="accent1"/>
-          </a:fillRef>
-          <a:effectRef idx="2">
-            <a:schemeClr val="accent1"/>
-          </a:effectRef>
-          <a:fontRef idx="minor">
-            <a:schemeClr val="lt1"/>
-          </a:fontRef>
-        </p:style>
-        <p:txBody>
-          <a:bodyPr rtlCol="0" anchor="ctr" wrap="square" lIns="73152" rIns="73152" tIns="36576" bIns="36576"/>
-          <a:lstStyle/>
-          <a:p>
-            <a:pPr algn="ctr"/>
-            <a:r>
-              <a:rPr sz="1400" b="1" i="0">
-                <a:solidFill>
-                  <a:srgbClr val="FFFFFF"/>
-                </a:solidFill>
-                <a:latin typeface="Yu Gothic"/>
-                <a:ea typeface="Yu Gothic"/>
-                <a:cs typeface="Yu Gothic"/>
-              </a:rPr>
-              <a:t>advantage A</a:t>
-            </a:r>
-          </a:p>
-        </p:txBody>
-      </p:sp>
-      <p:sp>
-        <p:nvSpPr>
-          <p:cNvPr id="22" name="def advantage A"/>
-          <p:cNvSpPr txBox="1"/>
-          <p:nvPr/>
-        </p:nvSpPr>
-        <p:spPr>
-          <a:xfrm>
-            <a:off x="8138160" y="4059936"/>
-            <a:ext cx="3566160" cy="713232"/>
-          </a:xfrm>
-          <a:prstGeom prst="rect">
-            <a:avLst/>
-          </a:prstGeom>
-          <a:noFill/>
-        </p:spPr>
-        <p:txBody>
-          <a:bodyPr wrap="square" anchor="ctr" lIns="45720" rIns="45720" tIns="27432" bIns="27432">
-            <a:spAutoFit/>
-          </a:bodyPr>
-          <a:lstStyle/>
-          <a:p>
-            <a:pPr algn="l">
-              <a:spcAft>
-                <a:spcPts val="600"/>
-              </a:spcAft>
-            </a:pPr>
-            <a:r>
-              <a:rPr sz="1300" b="0" i="0">
-                <a:solidFill>
-                  <a:srgbClr val="1A1A1A"/>
-                </a:solidFill>
-                <a:latin typeface="Yu Gothic"/>
-                <a:ea typeface="Yu Gothic"/>
-                <a:cs typeface="Yu Gothic"/>
-              </a:rPr>
-              <a:t>その行動で、予想よりどれだけ良くなったか（実際 − 予想）</a:t>
-            </a:r>
-          </a:p>
-        </p:txBody>
-      </p:sp>
-      <p:sp>
-        <p:nvSpPr>
-          <p:cNvPr id="23" name="term 評価者（critic）"/>
-          <p:cNvSpPr/>
-          <p:nvPr/>
-        </p:nvSpPr>
-        <p:spPr>
-          <a:xfrm>
-            <a:off x="6309360" y="4846320"/>
-            <a:ext cx="1737360" cy="676656"/>
-          </a:xfrm>
-          <a:prstGeom prst="roundRect">
-            <a:avLst>
-              <a:gd name="adj" fmla="val 12000"/>
-            </a:avLst>
-          </a:prstGeom>
-          <a:solidFill>
-            <a:srgbClr val="0B66C3"/>
-          </a:solidFill>
-          <a:ln>
-            <a:noFill/>
-          </a:ln>
-        </p:spPr>
-        <p:style>
-          <a:lnRef idx="1">
-            <a:schemeClr val="accent1"/>
-          </a:lnRef>
-          <a:fillRef idx="3">
-            <a:schemeClr val="accent1"/>
-          </a:fillRef>
-          <a:effectRef idx="2">
-            <a:schemeClr val="accent1"/>
-          </a:effectRef>
-          <a:fontRef idx="minor">
-            <a:schemeClr val="lt1"/>
-          </a:fontRef>
-        </p:style>
-        <p:txBody>
-          <a:bodyPr rtlCol="0" anchor="ctr" wrap="square" lIns="73152" rIns="73152" tIns="36576" bIns="36576"/>
-          <a:lstStyle/>
-          <a:p>
-            <a:pPr algn="ctr"/>
-            <a:r>
-              <a:rPr sz="1400" b="1" i="0">
-                <a:solidFill>
-                  <a:srgbClr val="FFFFFF"/>
-                </a:solidFill>
-                <a:latin typeface="Yu Gothic"/>
-                <a:ea typeface="Yu Gothic"/>
-                <a:cs typeface="Yu Gothic"/>
-              </a:rPr>
-              <a:t>評価者（critic）</a:t>
-            </a:r>
-          </a:p>
-        </p:txBody>
-      </p:sp>
-      <p:sp>
-        <p:nvSpPr>
-          <p:cNvPr id="24" name="def 評価者（critic）"/>
-          <p:cNvSpPr txBox="1"/>
-          <p:nvPr/>
-        </p:nvSpPr>
-        <p:spPr>
-          <a:xfrm>
-            <a:off x="8138160" y="4828032"/>
-            <a:ext cx="3566160" cy="713232"/>
-          </a:xfrm>
-          <a:prstGeom prst="rect">
-            <a:avLst/>
-          </a:prstGeom>
-          <a:noFill/>
-        </p:spPr>
-        <p:txBody>
-          <a:bodyPr wrap="square" anchor="ctr" lIns="45720" rIns="45720" tIns="27432" bIns="27432">
-            <a:spAutoFit/>
-          </a:bodyPr>
-          <a:lstStyle/>
-          <a:p>
-            <a:pPr algn="l">
-              <a:spcAft>
-                <a:spcPts val="600"/>
-              </a:spcAft>
-            </a:pPr>
-            <a:r>
-              <a:rPr sz="1300" b="0" i="0">
-                <a:solidFill>
-                  <a:srgbClr val="1A1A1A"/>
-                </a:solidFill>
-                <a:latin typeface="Yu Gothic"/>
-                <a:ea typeface="Yu Gothic"/>
-                <a:cs typeface="Yu Gothic"/>
-              </a:rPr>
-              <a:t>状態や行動の良さを、数値で答えるモデル。RECAP は価値関数 V、STEAM は時間差を当てる critic</a:t>
-            </a:r>
-          </a:p>
-        </p:txBody>
-      </p:sp>
-      <p:sp>
-        <p:nvSpPr>
-          <p:cNvPr id="25" name="key point"/>
+                  <a:srgbClr val="1A1A1A"/>
+                </a:solidFill>
+                <a:latin typeface="Yu Gothic"/>
+                <a:ea typeface="Yu Gothic"/>
+                <a:cs typeface="Yu Gothic"/>
+              </a:rPr>
+              <a:t>行動の洗練</a:t>
+            </a:r>
+          </a:p>
+          <a:p>
+            <a:pPr algn="l"/>
+            <a:r>
+              <a:rPr sz="1400" b="0" i="0">
+                <a:solidFill>
+                  <a:srgbClr val="1A1A1A"/>
+                </a:solidFill>
+                <a:latin typeface="Yu Gothic"/>
+                <a:ea typeface="Yu Gothic"/>
+                <a:cs typeface="Yu Gothic"/>
+              </a:rPr>
+              <a:t>VLA は凍結。読み出しトークンの上の小さな actor-critic が、オンライン RL で VLA の行動を改善する</a:t>
+            </a:r>
+          </a:p>
+        </p:txBody>
+      </p:sp>
+      <p:sp>
+        <p:nvSpPr>
+          <p:cNvPr id="11" name="key point"/>
           <p:cNvSpPr/>
           <p:nvPr/>
         </p:nvSpPr>
@@ -32361,7 +32628,7 @@
                 <a:ea typeface="Yu Gothic"/>
                 <a:cs typeface="Yu Gothic"/>
               </a:rPr>
-              <a:t>→ RL は、結果から良い行動を増やす学習。RECAP・STEAM は、評価者（critic）で advantage を作る</a:t>
+              <a:t>→ RECAP と STEAM は評価者だけが違う。RL Token は、オンラインで行動を洗練する</a:t>
             </a:r>
           </a:p>
         </p:txBody>

--- a/docs/RECAP_STEAM_RLToken.pptx
+++ b/docs/RECAP_STEAM_RLToken.pptx
@@ -35,6 +35,7 @@
     <p:sldId id="283" r:id="rId35"/>
     <p:sldId id="284" r:id="rId36"/>
     <p:sldId id="285" r:id="rId37"/>
+    <p:sldId id="286" r:id="rId38"/>
   </p:sldIdLst>
   <p:sldSz cx="12191695" cy="6858000" type="screen4x3"/>
   <p:notesSz cx="6858000" cy="9144000"/>
@@ -2401,7 +2402,7 @@
           <a:lstStyle/>
           <a:p>
             <a:r>
-              <a:t>実測値（TensorBoard と実行ログ）。GPU は、ログに名前が残っているものだけを記載。</a:t>
+              <a:t>同じ初期状態 14 での比較。ベースと RL Token の動画は wandb: https://wandb.ai/junhand/libero_RL/runs/w3vkksd0（run 名 demo-init14-base-fail-vs-rlt-success）。RECAP と STEAM は準備中。</a:t>
             </a:r>
           </a:p>
         </p:txBody>
@@ -2471,7 +2472,7 @@
           <a:lstStyle/>
           <a:p>
             <a:r>
-              <a:t>表は定性的な比較。smolVLA での経験に基づく。</a:t>
+              <a:t>実測値（TensorBoard と実行ログ）。GPU は、ログに名前が残っているものだけを記載。</a:t>
             </a:r>
           </a:p>
         </p:txBody>
@@ -2567,6 +2568,76 @@
 </file>
 
 <file path=ppt/notesSlides/notesSlide30.xml><?xml version="1.0" encoding="utf-8"?>
+<p:notes xmlns:a="http://schemas.openxmlformats.org/drawingml/2006/main" xmlns:p="http://schemas.openxmlformats.org/presentationml/2006/main" xmlns:r="http://schemas.openxmlformats.org/officeDocument/2006/relationships">
+  <p:cSld>
+    <p:spTree>
+      <p:nvGrpSpPr>
+        <p:cNvPr id="1" name=""/>
+        <p:cNvGrpSpPr/>
+        <p:nvPr/>
+      </p:nvGrpSpPr>
+      <p:grpSpPr>
+        <a:xfrm>
+          <a:off x="0" y="0"/>
+          <a:ext cx="0" cy="0"/>
+          <a:chOff x="0" y="0"/>
+          <a:chExt cx="0" cy="0"/>
+        </a:xfrm>
+      </p:grpSpPr>
+      <p:sp>
+        <p:nvSpPr>
+          <p:cNvPr id="2" name="Slide Image Placeholder 1"/>
+          <p:cNvSpPr>
+            <a:spLocks noGrp="1"/>
+          </p:cNvSpPr>
+          <p:nvPr>
+            <p:ph type="sldImg" idx="2"/>
+          </p:nvPr>
+        </p:nvSpPr>
+        <p:spPr/>
+      </p:sp>
+      <p:sp>
+        <p:nvSpPr>
+          <p:cNvPr id="3" name="Notes Placeholder 2"/>
+          <p:cNvSpPr>
+            <a:spLocks noGrp="1"/>
+          </p:cNvSpPr>
+          <p:nvPr>
+            <p:ph type="body" idx="3" sz="quarter"/>
+          </p:nvPr>
+        </p:nvSpPr>
+        <p:spPr/>
+        <p:txBody>
+          <a:bodyPr/>
+          <a:lstStyle/>
+          <a:p>
+            <a:r>
+              <a:t>表は定性的な比較。smolVLA での経験に基づく。</a:t>
+            </a:r>
+          </a:p>
+        </p:txBody>
+      </p:sp>
+      <p:sp>
+        <p:nvSpPr>
+          <p:cNvPr id="4" name="Slide Number Placeholder 3"/>
+          <p:cNvSpPr>
+            <a:spLocks noGrp="1"/>
+          </p:cNvSpPr>
+          <p:nvPr>
+            <p:ph type="sldNum" idx="5" sz="quarter"/>
+          </p:nvPr>
+        </p:nvSpPr>
+        <p:spPr/>
+      </p:sp>
+    </p:spTree>
+  </p:cSld>
+  <p:clrMapOvr>
+    <a:masterClrMapping/>
+  </p:clrMapOvr>
+</p:notes>
+</file>
+
+<file path=ppt/notesSlides/notesSlide31.xml><?xml version="1.0" encoding="utf-8"?>
 <p:notes xmlns:a="http://schemas.openxmlformats.org/drawingml/2006/main" xmlns:p="http://schemas.openxmlformats.org/presentationml/2006/main" xmlns:r="http://schemas.openxmlformats.org/officeDocument/2006/relationships">
   <p:cSld>
     <p:spTree>
@@ -26746,7 +26817,7 @@
                 <a:ea typeface="Yu Gothic"/>
                 <a:cs typeface="Yu Gothic"/>
               </a:rPr>
-              <a:t>学習コストの比較（学習ステップ数・時間・GPU）</a:t>
+              <a:t>動画で見る手法の効果（初期状態 14）</a:t>
             </a:r>
           </a:p>
         </p:txBody>
@@ -26788,6 +26859,1130 @@
                 <a:cs typeface="Yu Gothic"/>
               </a:rPr>
               <a:t>28</a:t>
+            </a:r>
+          </a:p>
+        </p:txBody>
+      </p:sp>
+      <p:sp>
+        <p:nvSpPr>
+          <p:cNvPr id="4" name="label ベース（smolVLA）"/>
+          <p:cNvSpPr/>
+          <p:nvPr/>
+        </p:nvSpPr>
+        <p:spPr>
+          <a:xfrm>
+            <a:off x="548640" y="960120"/>
+            <a:ext cx="2697480" cy="457200"/>
+          </a:xfrm>
+          <a:prstGeom prst="roundRect">
+            <a:avLst>
+              <a:gd name="adj" fmla="val 12000"/>
+            </a:avLst>
+          </a:prstGeom>
+          <a:solidFill>
+            <a:srgbClr val="0B66C3"/>
+          </a:solidFill>
+          <a:ln>
+            <a:noFill/>
+          </a:ln>
+        </p:spPr>
+        <p:style>
+          <a:lnRef idx="1">
+            <a:schemeClr val="accent1"/>
+          </a:lnRef>
+          <a:fillRef idx="3">
+            <a:schemeClr val="accent1"/>
+          </a:fillRef>
+          <a:effectRef idx="2">
+            <a:schemeClr val="accent1"/>
+          </a:effectRef>
+          <a:fontRef idx="minor">
+            <a:schemeClr val="lt1"/>
+          </a:fontRef>
+        </p:style>
+        <p:txBody>
+          <a:bodyPr rtlCol="0" anchor="ctr" wrap="square" lIns="73152" rIns="73152" tIns="36576" bIns="36576"/>
+          <a:lstStyle/>
+          <a:p>
+            <a:pPr algn="ctr"/>
+            <a:r>
+              <a:rPr sz="1500" b="1" i="0">
+                <a:solidFill>
+                  <a:srgbClr val="FFFFFF"/>
+                </a:solidFill>
+                <a:latin typeface="Yu Gothic"/>
+                <a:ea typeface="Yu Gothic"/>
+                <a:cs typeface="Yu Gothic"/>
+              </a:rPr>
+              <a:t>ベース（smolVLA）</a:t>
+            </a:r>
+          </a:p>
+        </p:txBody>
+      </p:sp>
+      <p:pic>
+        <p:nvPicPr>
+          <p:cNvPr id="5" name="video ベース（smolVLA）">
+            <a:hlinkClick r:id="" action="ppaction://media"/>
+          </p:cNvPr>
+          <p:cNvPicPr>
+            <a:picLocks noChangeAspect="1"/>
+          </p:cNvPicPr>
+          <p:nvPr>
+            <a:videoFile r:link="rId4"/>
+            <p:extLst>
+              <p:ext uri="{DAA4B4D4-6D71-4841-9C94-3DE7FCFB9230}">
+                <p14:media xmlns:p14="http://schemas.microsoft.com/office/powerpoint/2010/main" r:embed="rId3"/>
+              </p:ext>
+            </p:extLst>
+          </p:nvPr>
+        </p:nvPicPr>
+        <p:blipFill>
+          <a:blip r:embed="rId5"/>
+          <a:stretch>
+            <a:fillRect/>
+          </a:stretch>
+        </p:blipFill>
+        <p:spPr>
+          <a:xfrm>
+            <a:off x="548640" y="1508760"/>
+            <a:ext cx="2697480" cy="2697480"/>
+          </a:xfrm>
+          <a:prstGeom prst="rect">
+            <a:avLst/>
+          </a:prstGeom>
+        </p:spPr>
+      </p:pic>
+      <p:sp>
+        <p:nvSpPr>
+          <p:cNvPr id="6" name="result ベース（smolVLA）"/>
+          <p:cNvSpPr/>
+          <p:nvPr/>
+        </p:nvSpPr>
+        <p:spPr>
+          <a:xfrm>
+            <a:off x="548640" y="4297680"/>
+            <a:ext cx="2697480" cy="914400"/>
+          </a:xfrm>
+          <a:prstGeom prst="roundRect">
+            <a:avLst>
+              <a:gd name="adj" fmla="val 12000"/>
+            </a:avLst>
+          </a:prstGeom>
+          <a:solidFill>
+            <a:srgbClr val="D96B2B"/>
+          </a:solidFill>
+          <a:ln>
+            <a:noFill/>
+          </a:ln>
+        </p:spPr>
+        <p:style>
+          <a:lnRef idx="1">
+            <a:schemeClr val="accent1"/>
+          </a:lnRef>
+          <a:fillRef idx="3">
+            <a:schemeClr val="accent1"/>
+          </a:fillRef>
+          <a:effectRef idx="2">
+            <a:schemeClr val="accent1"/>
+          </a:effectRef>
+          <a:fontRef idx="minor">
+            <a:schemeClr val="lt1"/>
+          </a:fontRef>
+        </p:style>
+        <p:txBody>
+          <a:bodyPr rtlCol="0" anchor="ctr" wrap="square" lIns="73152" rIns="73152" tIns="36576" bIns="36576"/>
+          <a:lstStyle/>
+          <a:p>
+            <a:pPr algn="ctr"/>
+            <a:r>
+              <a:rPr sz="1800" b="1" i="0">
+                <a:solidFill>
+                  <a:srgbClr val="FFFFFF"/>
+                </a:solidFill>
+                <a:latin typeface="Yu Gothic"/>
+                <a:ea typeface="Yu Gothic"/>
+                <a:cs typeface="Yu Gothic"/>
+              </a:rPr>
+              <a:t>失敗</a:t>
+            </a:r>
+          </a:p>
+          <a:p>
+            <a:pPr algn="ctr"/>
+            <a:r>
+              <a:rPr sz="1200" b="0" i="0">
+                <a:solidFill>
+                  <a:srgbClr val="FFFFFF"/>
+                </a:solidFill>
+                <a:latin typeface="Yu Gothic"/>
+                <a:ea typeface="Yu Gothic"/>
+                <a:cs typeface="Yu Gothic"/>
+              </a:rPr>
+              <a:t>1 つ目は運ぶが、2 つ目をカゴに入れられない</a:t>
+            </a:r>
+          </a:p>
+        </p:txBody>
+      </p:sp>
+      <p:sp>
+        <p:nvSpPr>
+          <p:cNvPr id="7" name="TextBox 6"/>
+          <p:cNvSpPr txBox="1"/>
+          <p:nvPr/>
+        </p:nvSpPr>
+        <p:spPr>
+          <a:xfrm>
+            <a:off x="548640" y="5257800"/>
+            <a:ext cx="2697480" cy="320040"/>
+          </a:xfrm>
+          <a:prstGeom prst="rect">
+            <a:avLst/>
+          </a:prstGeom>
+          <a:noFill/>
+        </p:spPr>
+        <p:txBody>
+          <a:bodyPr wrap="square" anchor="t" lIns="45720" rIns="45720" tIns="27432" bIns="27432">
+            <a:spAutoFit/>
+          </a:bodyPr>
+          <a:lstStyle/>
+          <a:p>
+            <a:pPr algn="ctr">
+              <a:spcAft>
+                <a:spcPts val="600"/>
+              </a:spcAft>
+            </a:pPr>
+            <a:r>
+              <a:rPr sz="1300" b="1" i="0">
+                <a:solidFill>
+                  <a:srgbClr val="0B66C3"/>
+                </a:solidFill>
+                <a:latin typeface="Yu Gothic"/>
+                <a:ea typeface="Yu Gothic"/>
+                <a:cs typeface="Yu Gothic"/>
+              </a:rPr>
+              <a:t>success_once 0.40</a:t>
+            </a:r>
+          </a:p>
+        </p:txBody>
+      </p:sp>
+      <p:sp>
+        <p:nvSpPr>
+          <p:cNvPr id="8" name="label RECAP"/>
+          <p:cNvSpPr/>
+          <p:nvPr/>
+        </p:nvSpPr>
+        <p:spPr>
+          <a:xfrm>
+            <a:off x="3337560" y="960120"/>
+            <a:ext cx="2697480" cy="457200"/>
+          </a:xfrm>
+          <a:prstGeom prst="roundRect">
+            <a:avLst>
+              <a:gd name="adj" fmla="val 12000"/>
+            </a:avLst>
+          </a:prstGeom>
+          <a:solidFill>
+            <a:srgbClr val="0B66C3"/>
+          </a:solidFill>
+          <a:ln>
+            <a:noFill/>
+          </a:ln>
+        </p:spPr>
+        <p:style>
+          <a:lnRef idx="1">
+            <a:schemeClr val="accent1"/>
+          </a:lnRef>
+          <a:fillRef idx="3">
+            <a:schemeClr val="accent1"/>
+          </a:fillRef>
+          <a:effectRef idx="2">
+            <a:schemeClr val="accent1"/>
+          </a:effectRef>
+          <a:fontRef idx="minor">
+            <a:schemeClr val="lt1"/>
+          </a:fontRef>
+        </p:style>
+        <p:txBody>
+          <a:bodyPr rtlCol="0" anchor="ctr" wrap="square" lIns="73152" rIns="73152" tIns="36576" bIns="36576"/>
+          <a:lstStyle/>
+          <a:p>
+            <a:pPr algn="ctr"/>
+            <a:r>
+              <a:rPr sz="1500" b="1" i="0">
+                <a:solidFill>
+                  <a:srgbClr val="FFFFFF"/>
+                </a:solidFill>
+                <a:latin typeface="Yu Gothic"/>
+                <a:ea typeface="Yu Gothic"/>
+                <a:cs typeface="Yu Gothic"/>
+              </a:rPr>
+              <a:t>RECAP</a:t>
+            </a:r>
+          </a:p>
+        </p:txBody>
+      </p:sp>
+      <p:sp>
+        <p:nvSpPr>
+          <p:cNvPr id="9" name="placeholder RECAP"/>
+          <p:cNvSpPr/>
+          <p:nvPr/>
+        </p:nvSpPr>
+        <p:spPr>
+          <a:xfrm>
+            <a:off x="3337560" y="1508760"/>
+            <a:ext cx="2697480" cy="2697480"/>
+          </a:xfrm>
+          <a:prstGeom prst="roundRect">
+            <a:avLst>
+              <a:gd name="adj" fmla="val 12000"/>
+            </a:avLst>
+          </a:prstGeom>
+          <a:solidFill>
+            <a:srgbClr val="E4E4E4"/>
+          </a:solidFill>
+          <a:ln w="12700">
+            <a:solidFill>
+              <a:srgbClr val="BFBFBF"/>
+            </a:solidFill>
+          </a:ln>
+        </p:spPr>
+        <p:style>
+          <a:lnRef idx="1">
+            <a:schemeClr val="accent1"/>
+          </a:lnRef>
+          <a:fillRef idx="3">
+            <a:schemeClr val="accent1"/>
+          </a:fillRef>
+          <a:effectRef idx="2">
+            <a:schemeClr val="accent1"/>
+          </a:effectRef>
+          <a:fontRef idx="minor">
+            <a:schemeClr val="lt1"/>
+          </a:fontRef>
+        </p:style>
+        <p:txBody>
+          <a:bodyPr rtlCol="0" anchor="ctr" wrap="square" lIns="73152" rIns="73152" tIns="36576" bIns="36576"/>
+          <a:lstStyle/>
+          <a:p>
+            <a:pPr algn="ctr"/>
+            <a:r>
+              <a:rPr sz="1800" b="1" i="0">
+                <a:solidFill>
+                  <a:srgbClr val="595959"/>
+                </a:solidFill>
+                <a:latin typeface="Yu Gothic"/>
+                <a:ea typeface="Yu Gothic"/>
+                <a:cs typeface="Yu Gothic"/>
+              </a:rPr>
+              <a:t>動画</a:t>
+            </a:r>
+          </a:p>
+          <a:p>
+            <a:pPr algn="ctr"/>
+            <a:r>
+              <a:rPr sz="2200" b="1" i="0">
+                <a:solidFill>
+                  <a:srgbClr val="595959"/>
+                </a:solidFill>
+                <a:latin typeface="Yu Gothic"/>
+                <a:ea typeface="Yu Gothic"/>
+                <a:cs typeface="Yu Gothic"/>
+              </a:rPr>
+              <a:t>準備中</a:t>
+            </a:r>
+          </a:p>
+        </p:txBody>
+      </p:sp>
+      <p:sp>
+        <p:nvSpPr>
+          <p:cNvPr id="10" name="result RECAP"/>
+          <p:cNvSpPr/>
+          <p:nvPr/>
+        </p:nvSpPr>
+        <p:spPr>
+          <a:xfrm>
+            <a:off x="3337560" y="4297680"/>
+            <a:ext cx="2697480" cy="914400"/>
+          </a:xfrm>
+          <a:prstGeom prst="roundRect">
+            <a:avLst>
+              <a:gd name="adj" fmla="val 12000"/>
+            </a:avLst>
+          </a:prstGeom>
+          <a:solidFill>
+            <a:srgbClr val="595959"/>
+          </a:solidFill>
+          <a:ln>
+            <a:noFill/>
+          </a:ln>
+        </p:spPr>
+        <p:style>
+          <a:lnRef idx="1">
+            <a:schemeClr val="accent1"/>
+          </a:lnRef>
+          <a:fillRef idx="3">
+            <a:schemeClr val="accent1"/>
+          </a:fillRef>
+          <a:effectRef idx="2">
+            <a:schemeClr val="accent1"/>
+          </a:effectRef>
+          <a:fontRef idx="minor">
+            <a:schemeClr val="lt1"/>
+          </a:fontRef>
+        </p:style>
+        <p:txBody>
+          <a:bodyPr rtlCol="0" anchor="ctr" wrap="square" lIns="73152" rIns="73152" tIns="36576" bIns="36576"/>
+          <a:lstStyle/>
+          <a:p>
+            <a:pPr algn="ctr"/>
+            <a:r>
+              <a:rPr sz="1800" b="1" i="0">
+                <a:solidFill>
+                  <a:srgbClr val="FFFFFF"/>
+                </a:solidFill>
+                <a:latin typeface="Yu Gothic"/>
+                <a:ea typeface="Yu Gothic"/>
+                <a:cs typeface="Yu Gothic"/>
+              </a:rPr>
+              <a:t>準備中</a:t>
+            </a:r>
+          </a:p>
+          <a:p>
+            <a:pPr algn="ctr"/>
+            <a:r>
+              <a:rPr sz="1200" b="0" i="0">
+                <a:solidFill>
+                  <a:srgbClr val="FFFFFF"/>
+                </a:solidFill>
+                <a:latin typeface="Yu Gothic"/>
+                <a:ea typeface="Yu Gothic"/>
+                <a:cs typeface="Yu Gothic"/>
+              </a:rPr>
+              <a:t>動画は準備中です</a:t>
+            </a:r>
+          </a:p>
+        </p:txBody>
+      </p:sp>
+      <p:sp>
+        <p:nvSpPr>
+          <p:cNvPr id="11" name="TextBox 10"/>
+          <p:cNvSpPr txBox="1"/>
+          <p:nvPr/>
+        </p:nvSpPr>
+        <p:spPr>
+          <a:xfrm>
+            <a:off x="3337560" y="5257800"/>
+            <a:ext cx="2697480" cy="320040"/>
+          </a:xfrm>
+          <a:prstGeom prst="rect">
+            <a:avLst/>
+          </a:prstGeom>
+          <a:noFill/>
+        </p:spPr>
+        <p:txBody>
+          <a:bodyPr wrap="square" anchor="t" lIns="45720" rIns="45720" tIns="27432" bIns="27432">
+            <a:spAutoFit/>
+          </a:bodyPr>
+          <a:lstStyle/>
+          <a:p>
+            <a:pPr algn="ctr">
+              <a:spcAft>
+                <a:spcPts val="600"/>
+              </a:spcAft>
+            </a:pPr>
+            <a:r>
+              <a:rPr sz="1300" b="1" i="0">
+                <a:solidFill>
+                  <a:srgbClr val="0B66C3"/>
+                </a:solidFill>
+                <a:latin typeface="Yu Gothic"/>
+                <a:ea typeface="Yu Gothic"/>
+                <a:cs typeface="Yu Gothic"/>
+              </a:rPr>
+              <a:t>success_once 0.50</a:t>
+            </a:r>
+          </a:p>
+        </p:txBody>
+      </p:sp>
+      <p:sp>
+        <p:nvSpPr>
+          <p:cNvPr id="12" name="label STEAM"/>
+          <p:cNvSpPr/>
+          <p:nvPr/>
+        </p:nvSpPr>
+        <p:spPr>
+          <a:xfrm>
+            <a:off x="6126479" y="960120"/>
+            <a:ext cx="2697480" cy="457200"/>
+          </a:xfrm>
+          <a:prstGeom prst="roundRect">
+            <a:avLst>
+              <a:gd name="adj" fmla="val 12000"/>
+            </a:avLst>
+          </a:prstGeom>
+          <a:solidFill>
+            <a:srgbClr val="0B66C3"/>
+          </a:solidFill>
+          <a:ln>
+            <a:noFill/>
+          </a:ln>
+        </p:spPr>
+        <p:style>
+          <a:lnRef idx="1">
+            <a:schemeClr val="accent1"/>
+          </a:lnRef>
+          <a:fillRef idx="3">
+            <a:schemeClr val="accent1"/>
+          </a:fillRef>
+          <a:effectRef idx="2">
+            <a:schemeClr val="accent1"/>
+          </a:effectRef>
+          <a:fontRef idx="minor">
+            <a:schemeClr val="lt1"/>
+          </a:fontRef>
+        </p:style>
+        <p:txBody>
+          <a:bodyPr rtlCol="0" anchor="ctr" wrap="square" lIns="73152" rIns="73152" tIns="36576" bIns="36576"/>
+          <a:lstStyle/>
+          <a:p>
+            <a:pPr algn="ctr"/>
+            <a:r>
+              <a:rPr sz="1500" b="1" i="0">
+                <a:solidFill>
+                  <a:srgbClr val="FFFFFF"/>
+                </a:solidFill>
+                <a:latin typeface="Yu Gothic"/>
+                <a:ea typeface="Yu Gothic"/>
+                <a:cs typeface="Yu Gothic"/>
+              </a:rPr>
+              <a:t>STEAM</a:t>
+            </a:r>
+          </a:p>
+        </p:txBody>
+      </p:sp>
+      <p:sp>
+        <p:nvSpPr>
+          <p:cNvPr id="13" name="placeholder STEAM"/>
+          <p:cNvSpPr/>
+          <p:nvPr/>
+        </p:nvSpPr>
+        <p:spPr>
+          <a:xfrm>
+            <a:off x="6126479" y="1508760"/>
+            <a:ext cx="2697480" cy="2697480"/>
+          </a:xfrm>
+          <a:prstGeom prst="roundRect">
+            <a:avLst>
+              <a:gd name="adj" fmla="val 12000"/>
+            </a:avLst>
+          </a:prstGeom>
+          <a:solidFill>
+            <a:srgbClr val="E4E4E4"/>
+          </a:solidFill>
+          <a:ln w="12700">
+            <a:solidFill>
+              <a:srgbClr val="BFBFBF"/>
+            </a:solidFill>
+          </a:ln>
+        </p:spPr>
+        <p:style>
+          <a:lnRef idx="1">
+            <a:schemeClr val="accent1"/>
+          </a:lnRef>
+          <a:fillRef idx="3">
+            <a:schemeClr val="accent1"/>
+          </a:fillRef>
+          <a:effectRef idx="2">
+            <a:schemeClr val="accent1"/>
+          </a:effectRef>
+          <a:fontRef idx="minor">
+            <a:schemeClr val="lt1"/>
+          </a:fontRef>
+        </p:style>
+        <p:txBody>
+          <a:bodyPr rtlCol="0" anchor="ctr" wrap="square" lIns="73152" rIns="73152" tIns="36576" bIns="36576"/>
+          <a:lstStyle/>
+          <a:p>
+            <a:pPr algn="ctr"/>
+            <a:r>
+              <a:rPr sz="1800" b="1" i="0">
+                <a:solidFill>
+                  <a:srgbClr val="595959"/>
+                </a:solidFill>
+                <a:latin typeface="Yu Gothic"/>
+                <a:ea typeface="Yu Gothic"/>
+                <a:cs typeface="Yu Gothic"/>
+              </a:rPr>
+              <a:t>動画</a:t>
+            </a:r>
+          </a:p>
+          <a:p>
+            <a:pPr algn="ctr"/>
+            <a:r>
+              <a:rPr sz="2200" b="1" i="0">
+                <a:solidFill>
+                  <a:srgbClr val="595959"/>
+                </a:solidFill>
+                <a:latin typeface="Yu Gothic"/>
+                <a:ea typeface="Yu Gothic"/>
+                <a:cs typeface="Yu Gothic"/>
+              </a:rPr>
+              <a:t>準備中</a:t>
+            </a:r>
+          </a:p>
+        </p:txBody>
+      </p:sp>
+      <p:sp>
+        <p:nvSpPr>
+          <p:cNvPr id="14" name="result STEAM"/>
+          <p:cNvSpPr/>
+          <p:nvPr/>
+        </p:nvSpPr>
+        <p:spPr>
+          <a:xfrm>
+            <a:off x="6126479" y="4297680"/>
+            <a:ext cx="2697480" cy="914400"/>
+          </a:xfrm>
+          <a:prstGeom prst="roundRect">
+            <a:avLst>
+              <a:gd name="adj" fmla="val 12000"/>
+            </a:avLst>
+          </a:prstGeom>
+          <a:solidFill>
+            <a:srgbClr val="595959"/>
+          </a:solidFill>
+          <a:ln>
+            <a:noFill/>
+          </a:ln>
+        </p:spPr>
+        <p:style>
+          <a:lnRef idx="1">
+            <a:schemeClr val="accent1"/>
+          </a:lnRef>
+          <a:fillRef idx="3">
+            <a:schemeClr val="accent1"/>
+          </a:fillRef>
+          <a:effectRef idx="2">
+            <a:schemeClr val="accent1"/>
+          </a:effectRef>
+          <a:fontRef idx="minor">
+            <a:schemeClr val="lt1"/>
+          </a:fontRef>
+        </p:style>
+        <p:txBody>
+          <a:bodyPr rtlCol="0" anchor="ctr" wrap="square" lIns="73152" rIns="73152" tIns="36576" bIns="36576"/>
+          <a:lstStyle/>
+          <a:p>
+            <a:pPr algn="ctr"/>
+            <a:r>
+              <a:rPr sz="1800" b="1" i="0">
+                <a:solidFill>
+                  <a:srgbClr val="FFFFFF"/>
+                </a:solidFill>
+                <a:latin typeface="Yu Gothic"/>
+                <a:ea typeface="Yu Gothic"/>
+                <a:cs typeface="Yu Gothic"/>
+              </a:rPr>
+              <a:t>準備中</a:t>
+            </a:r>
+          </a:p>
+          <a:p>
+            <a:pPr algn="ctr"/>
+            <a:r>
+              <a:rPr sz="1200" b="0" i="0">
+                <a:solidFill>
+                  <a:srgbClr val="FFFFFF"/>
+                </a:solidFill>
+                <a:latin typeface="Yu Gothic"/>
+                <a:ea typeface="Yu Gothic"/>
+                <a:cs typeface="Yu Gothic"/>
+              </a:rPr>
+              <a:t>動画は準備中です</a:t>
+            </a:r>
+          </a:p>
+        </p:txBody>
+      </p:sp>
+      <p:sp>
+        <p:nvSpPr>
+          <p:cNvPr id="15" name="TextBox 14"/>
+          <p:cNvSpPr txBox="1"/>
+          <p:nvPr/>
+        </p:nvSpPr>
+        <p:spPr>
+          <a:xfrm>
+            <a:off x="6126479" y="5257800"/>
+            <a:ext cx="2697480" cy="320040"/>
+          </a:xfrm>
+          <a:prstGeom prst="rect">
+            <a:avLst/>
+          </a:prstGeom>
+          <a:noFill/>
+        </p:spPr>
+        <p:txBody>
+          <a:bodyPr wrap="square" anchor="t" lIns="45720" rIns="45720" tIns="27432" bIns="27432">
+            <a:spAutoFit/>
+          </a:bodyPr>
+          <a:lstStyle/>
+          <a:p>
+            <a:pPr algn="ctr">
+              <a:spcAft>
+                <a:spcPts val="600"/>
+              </a:spcAft>
+            </a:pPr>
+            <a:r>
+              <a:rPr sz="1300" b="1" i="0">
+                <a:solidFill>
+                  <a:srgbClr val="0B66C3"/>
+                </a:solidFill>
+                <a:latin typeface="Yu Gothic"/>
+                <a:ea typeface="Yu Gothic"/>
+                <a:cs typeface="Yu Gothic"/>
+              </a:rPr>
+              <a:t>success_once 0.52</a:t>
+            </a:r>
+          </a:p>
+        </p:txBody>
+      </p:sp>
+      <p:sp>
+        <p:nvSpPr>
+          <p:cNvPr id="16" name="label RL Token（最良）"/>
+          <p:cNvSpPr/>
+          <p:nvPr/>
+        </p:nvSpPr>
+        <p:spPr>
+          <a:xfrm>
+            <a:off x="8915399" y="960120"/>
+            <a:ext cx="2697480" cy="457200"/>
+          </a:xfrm>
+          <a:prstGeom prst="roundRect">
+            <a:avLst>
+              <a:gd name="adj" fmla="val 12000"/>
+            </a:avLst>
+          </a:prstGeom>
+          <a:solidFill>
+            <a:srgbClr val="0B66C3"/>
+          </a:solidFill>
+          <a:ln>
+            <a:noFill/>
+          </a:ln>
+        </p:spPr>
+        <p:style>
+          <a:lnRef idx="1">
+            <a:schemeClr val="accent1"/>
+          </a:lnRef>
+          <a:fillRef idx="3">
+            <a:schemeClr val="accent1"/>
+          </a:fillRef>
+          <a:effectRef idx="2">
+            <a:schemeClr val="accent1"/>
+          </a:effectRef>
+          <a:fontRef idx="minor">
+            <a:schemeClr val="lt1"/>
+          </a:fontRef>
+        </p:style>
+        <p:txBody>
+          <a:bodyPr rtlCol="0" anchor="ctr" wrap="square" lIns="73152" rIns="73152" tIns="36576" bIns="36576"/>
+          <a:lstStyle/>
+          <a:p>
+            <a:pPr algn="ctr"/>
+            <a:r>
+              <a:rPr sz="1500" b="1" i="0">
+                <a:solidFill>
+                  <a:srgbClr val="FFFFFF"/>
+                </a:solidFill>
+                <a:latin typeface="Yu Gothic"/>
+                <a:ea typeface="Yu Gothic"/>
+                <a:cs typeface="Yu Gothic"/>
+              </a:rPr>
+              <a:t>RL Token（最良）</a:t>
+            </a:r>
+          </a:p>
+        </p:txBody>
+      </p:sp>
+      <p:pic>
+        <p:nvPicPr>
+          <p:cNvPr id="17" name="video RL Token（最良）">
+            <a:hlinkClick r:id="" action="ppaction://media"/>
+          </p:cNvPr>
+          <p:cNvPicPr>
+            <a:picLocks noChangeAspect="1"/>
+          </p:cNvPicPr>
+          <p:nvPr>
+            <a:videoFile r:link="rId7"/>
+            <p:extLst>
+              <p:ext uri="{DAA4B4D4-6D71-4841-9C94-3DE7FCFB9230}">
+                <p14:media xmlns:p14="http://schemas.microsoft.com/office/powerpoint/2010/main" r:embed="rId6"/>
+              </p:ext>
+            </p:extLst>
+          </p:nvPr>
+        </p:nvPicPr>
+        <p:blipFill>
+          <a:blip r:embed="rId8"/>
+          <a:stretch>
+            <a:fillRect/>
+          </a:stretch>
+        </p:blipFill>
+        <p:spPr>
+          <a:xfrm>
+            <a:off x="8915399" y="1508760"/>
+            <a:ext cx="2697480" cy="2697480"/>
+          </a:xfrm>
+          <a:prstGeom prst="rect">
+            <a:avLst/>
+          </a:prstGeom>
+        </p:spPr>
+      </p:pic>
+      <p:sp>
+        <p:nvSpPr>
+          <p:cNvPr id="18" name="result RL Token（最良）"/>
+          <p:cNvSpPr/>
+          <p:nvPr/>
+        </p:nvSpPr>
+        <p:spPr>
+          <a:xfrm>
+            <a:off x="8915399" y="4297680"/>
+            <a:ext cx="2697480" cy="914400"/>
+          </a:xfrm>
+          <a:prstGeom prst="roundRect">
+            <a:avLst>
+              <a:gd name="adj" fmla="val 12000"/>
+            </a:avLst>
+          </a:prstGeom>
+          <a:solidFill>
+            <a:srgbClr val="2E8B57"/>
+          </a:solidFill>
+          <a:ln>
+            <a:noFill/>
+          </a:ln>
+        </p:spPr>
+        <p:style>
+          <a:lnRef idx="1">
+            <a:schemeClr val="accent1"/>
+          </a:lnRef>
+          <a:fillRef idx="3">
+            <a:schemeClr val="accent1"/>
+          </a:fillRef>
+          <a:effectRef idx="2">
+            <a:schemeClr val="accent1"/>
+          </a:effectRef>
+          <a:fontRef idx="minor">
+            <a:schemeClr val="lt1"/>
+          </a:fontRef>
+        </p:style>
+        <p:txBody>
+          <a:bodyPr rtlCol="0" anchor="ctr" wrap="square" lIns="73152" rIns="73152" tIns="36576" bIns="36576"/>
+          <a:lstStyle/>
+          <a:p>
+            <a:pPr algn="ctr"/>
+            <a:r>
+              <a:rPr sz="1800" b="1" i="0">
+                <a:solidFill>
+                  <a:srgbClr val="FFFFFF"/>
+                </a:solidFill>
+                <a:latin typeface="Yu Gothic"/>
+                <a:ea typeface="Yu Gothic"/>
+                <a:cs typeface="Yu Gothic"/>
+              </a:rPr>
+              <a:t>成功</a:t>
+            </a:r>
+          </a:p>
+          <a:p>
+            <a:pPr algn="ctr"/>
+            <a:r>
+              <a:rPr sz="1200" b="0" i="0">
+                <a:solidFill>
+                  <a:srgbClr val="FFFFFF"/>
+                </a:solidFill>
+                <a:latin typeface="Yu Gothic"/>
+                <a:ea typeface="Yu Gothic"/>
+                <a:cs typeface="Yu Gothic"/>
+              </a:rPr>
+              <a:t>2 つともカゴに入る</a:t>
+            </a:r>
+          </a:p>
+        </p:txBody>
+      </p:sp>
+      <p:sp>
+        <p:nvSpPr>
+          <p:cNvPr id="19" name="TextBox 18"/>
+          <p:cNvSpPr txBox="1"/>
+          <p:nvPr/>
+        </p:nvSpPr>
+        <p:spPr>
+          <a:xfrm>
+            <a:off x="8915399" y="5257800"/>
+            <a:ext cx="2697480" cy="320040"/>
+          </a:xfrm>
+          <a:prstGeom prst="rect">
+            <a:avLst/>
+          </a:prstGeom>
+          <a:noFill/>
+        </p:spPr>
+        <p:txBody>
+          <a:bodyPr wrap="square" anchor="t" lIns="45720" rIns="45720" tIns="27432" bIns="27432">
+            <a:spAutoFit/>
+          </a:bodyPr>
+          <a:lstStyle/>
+          <a:p>
+            <a:pPr algn="ctr">
+              <a:spcAft>
+                <a:spcPts val="600"/>
+              </a:spcAft>
+            </a:pPr>
+            <a:r>
+              <a:rPr sz="1300" b="1" i="0">
+                <a:solidFill>
+                  <a:srgbClr val="0B66C3"/>
+                </a:solidFill>
+                <a:latin typeface="Yu Gothic"/>
+                <a:ea typeface="Yu Gothic"/>
+                <a:cs typeface="Yu Gothic"/>
+              </a:rPr>
+              <a:t>success_once 0.68</a:t>
+            </a:r>
+          </a:p>
+        </p:txBody>
+      </p:sp>
+      <p:sp>
+        <p:nvSpPr>
+          <p:cNvPr id="20" name="TextBox 19"/>
+          <p:cNvSpPr txBox="1"/>
+          <p:nvPr/>
+        </p:nvSpPr>
+        <p:spPr>
+          <a:xfrm>
+            <a:off x="548640" y="5532120"/>
+            <a:ext cx="11064240" cy="274320"/>
+          </a:xfrm>
+          <a:prstGeom prst="rect">
+            <a:avLst/>
+          </a:prstGeom>
+          <a:noFill/>
+        </p:spPr>
+        <p:txBody>
+          <a:bodyPr wrap="square" anchor="t" lIns="45720" rIns="45720" tIns="27432" bIns="27432">
+            <a:spAutoFit/>
+          </a:bodyPr>
+          <a:lstStyle/>
+          <a:p>
+            <a:pPr algn="l">
+              <a:spcAft>
+                <a:spcPts val="600"/>
+              </a:spcAft>
+            </a:pPr>
+            <a:r>
+              <a:rPr sz="1100" b="0" i="0">
+                <a:solidFill>
+                  <a:srgbClr val="595959"/>
+                </a:solidFill>
+                <a:latin typeface="Yu Gothic"/>
+                <a:ea typeface="Yu Gothic"/>
+                <a:cs typeface="Yu Gothic"/>
+              </a:rPr>
+              <a:t>2 環境のうち左側を切り出し、512 × 512 に拡大。クリックで再生（約 52 秒、520 ステップ）。success_once は 50 エピソードの値</a:t>
+            </a:r>
+          </a:p>
+        </p:txBody>
+      </p:sp>
+      <p:sp>
+        <p:nvSpPr>
+          <p:cNvPr id="21" name="key point"/>
+          <p:cNvSpPr/>
+          <p:nvPr/>
+        </p:nvSpPr>
+        <p:spPr>
+          <a:xfrm>
+            <a:off x="548640" y="5852160"/>
+            <a:ext cx="11064240" cy="502920"/>
+          </a:xfrm>
+          <a:prstGeom prst="roundRect">
+            <a:avLst>
+              <a:gd name="adj" fmla="val 18000"/>
+            </a:avLst>
+          </a:prstGeom>
+          <a:solidFill>
+            <a:srgbClr val="E8F1FB"/>
+          </a:solidFill>
+          <a:ln w="15875">
+            <a:solidFill>
+              <a:srgbClr val="0B66C3"/>
+            </a:solidFill>
+          </a:ln>
+        </p:spPr>
+        <p:style>
+          <a:lnRef idx="1">
+            <a:schemeClr val="accent1"/>
+          </a:lnRef>
+          <a:fillRef idx="3">
+            <a:schemeClr val="accent1"/>
+          </a:fillRef>
+          <a:effectRef idx="2">
+            <a:schemeClr val="accent1"/>
+          </a:effectRef>
+          <a:fontRef idx="minor">
+            <a:schemeClr val="lt1"/>
+          </a:fontRef>
+        </p:style>
+        <p:txBody>
+          <a:bodyPr rtlCol="0" anchor="ctr" wrap="square" lIns="228600" rIns="228600"/>
+          <a:lstStyle/>
+          <a:p>
+            <a:pPr algn="l"/>
+            <a:r>
+              <a:rPr sz="1600" b="1" i="0">
+                <a:solidFill>
+                  <a:srgbClr val="0B66C3"/>
+                </a:solidFill>
+                <a:latin typeface="Yu Gothic"/>
+                <a:ea typeface="Yu Gothic"/>
+                <a:cs typeface="Yu Gothic"/>
+              </a:rPr>
+              <a:t>→ 同じ初期状態で、ベースは 2 つ目をカゴに入れられず失敗し、RL Token は成功した（1 例）</a:t>
+            </a:r>
+          </a:p>
+        </p:txBody>
+      </p:sp>
+    </p:spTree>
+  </p:cSld>
+  <p:clrMapOvr>
+    <a:masterClrMapping/>
+  </p:clrMapOvr>
+  <p:timing>
+    <p:tnLst>
+      <p:par>
+        <p:cTn id="1" dur="indefinite" restart="never" nodeType="tmRoot">
+          <p:childTnLst>
+            <p:video>
+              <p:cMediaNode vol="80000">
+                <p:cTn id="2" fill="hold" display="0">
+                  <p:stCondLst>
+                    <p:cond delay="indefinite"/>
+                  </p:stCondLst>
+                </p:cTn>
+                <p:tgtEl>
+                  <p:spTgt spid="5"/>
+                </p:tgtEl>
+              </p:cMediaNode>
+            </p:video>
+            <p:video>
+              <p:cMediaNode vol="80000">
+                <p:cTn id="3" fill="hold" display="0">
+                  <p:stCondLst>
+                    <p:cond delay="indefinite"/>
+                  </p:stCondLst>
+                </p:cTn>
+                <p:tgtEl>
+                  <p:spTgt spid="17"/>
+                </p:tgtEl>
+              </p:cMediaNode>
+            </p:video>
+          </p:childTnLst>
+        </p:cTn>
+      </p:par>
+    </p:tnLst>
+  </p:timing>
+</p:sld>
+</file>
+
+<file path=ppt/slides/slide29.xml><?xml version="1.0" encoding="utf-8"?>
+<p:sld xmlns:a="http://schemas.openxmlformats.org/drawingml/2006/main" xmlns:p="http://schemas.openxmlformats.org/presentationml/2006/main" xmlns:r="http://schemas.openxmlformats.org/officeDocument/2006/relationships">
+  <p:cSld>
+    <p:spTree>
+      <p:nvGrpSpPr>
+        <p:cNvPr id="1" name=""/>
+        <p:cNvGrpSpPr/>
+        <p:nvPr/>
+      </p:nvGrpSpPr>
+      <p:grpSpPr/>
+      <p:sp>
+        <p:nvSpPr>
+          <p:cNvPr id="2" name="title band"/>
+          <p:cNvSpPr/>
+          <p:nvPr/>
+        </p:nvSpPr>
+        <p:spPr>
+          <a:xfrm>
+            <a:off x="0" y="0"/>
+            <a:ext cx="12191695" cy="777240"/>
+          </a:xfrm>
+          <a:prstGeom prst="rect">
+            <a:avLst/>
+          </a:prstGeom>
+          <a:solidFill>
+            <a:srgbClr val="0B66C3"/>
+          </a:solidFill>
+          <a:ln>
+            <a:noFill/>
+          </a:ln>
+        </p:spPr>
+        <p:style>
+          <a:lnRef idx="1">
+            <a:schemeClr val="accent1"/>
+          </a:lnRef>
+          <a:fillRef idx="3">
+            <a:schemeClr val="accent1"/>
+          </a:fillRef>
+          <a:effectRef idx="2">
+            <a:schemeClr val="accent1"/>
+          </a:effectRef>
+          <a:fontRef idx="minor">
+            <a:schemeClr val="lt1"/>
+          </a:fontRef>
+        </p:style>
+        <p:txBody>
+          <a:bodyPr rtlCol="0" anchor="ctr"/>
+          <a:lstStyle/>
+          <a:p>
+            <a:pPr algn="ctr"/>
+            <a:r>
+              <a:rPr sz="2800" b="1" i="0">
+                <a:solidFill>
+                  <a:srgbClr val="FFFFFF"/>
+                </a:solidFill>
+                <a:latin typeface="Yu Gothic"/>
+                <a:ea typeface="Yu Gothic"/>
+                <a:cs typeface="Yu Gothic"/>
+              </a:rPr>
+              <a:t>学習コストの比較（学習ステップ数・時間・GPU）</a:t>
+            </a:r>
+          </a:p>
+        </p:txBody>
+      </p:sp>
+      <p:sp>
+        <p:nvSpPr>
+          <p:cNvPr id="3" name="page number"/>
+          <p:cNvSpPr txBox="1"/>
+          <p:nvPr/>
+        </p:nvSpPr>
+        <p:spPr>
+          <a:xfrm>
+            <a:off x="11155680" y="6446520"/>
+            <a:ext cx="822960" cy="320040"/>
+          </a:xfrm>
+          <a:prstGeom prst="rect">
+            <a:avLst/>
+          </a:prstGeom>
+          <a:noFill/>
+        </p:spPr>
+        <p:txBody>
+          <a:bodyPr wrap="square" anchor="t" lIns="45720" rIns="45720" tIns="27432" bIns="27432">
+            <a:spAutoFit/>
+          </a:bodyPr>
+          <a:lstStyle/>
+          <a:p>
+            <a:pPr algn="r">
+              <a:spcAft>
+                <a:spcPts val="600"/>
+              </a:spcAft>
+            </a:pPr>
+            <a:r>
+              <a:rPr sz="1200" b="0" i="0">
+                <a:solidFill>
+                  <a:srgbClr val="595959"/>
+                </a:solidFill>
+                <a:latin typeface="Yu Gothic"/>
+                <a:ea typeface="Yu Gothic"/>
+                <a:cs typeface="Yu Gothic"/>
+              </a:rPr>
+              <a:t>29</a:t>
             </a:r>
           </a:p>
         </p:txBody>
@@ -28399,682 +29594,6 @@
 </p:sld>
 </file>
 
-<file path=ppt/slides/slide29.xml><?xml version="1.0" encoding="utf-8"?>
-<p:sld xmlns:a="http://schemas.openxmlformats.org/drawingml/2006/main" xmlns:p="http://schemas.openxmlformats.org/presentationml/2006/main" xmlns:r="http://schemas.openxmlformats.org/officeDocument/2006/relationships">
-  <p:cSld>
-    <p:spTree>
-      <p:nvGrpSpPr>
-        <p:cNvPr id="1" name=""/>
-        <p:cNvGrpSpPr/>
-        <p:nvPr/>
-      </p:nvGrpSpPr>
-      <p:grpSpPr/>
-      <p:sp>
-        <p:nvSpPr>
-          <p:cNvPr id="2" name="title band"/>
-          <p:cNvSpPr/>
-          <p:nvPr/>
-        </p:nvSpPr>
-        <p:spPr>
-          <a:xfrm>
-            <a:off x="0" y="0"/>
-            <a:ext cx="12191695" cy="777240"/>
-          </a:xfrm>
-          <a:prstGeom prst="rect">
-            <a:avLst/>
-          </a:prstGeom>
-          <a:solidFill>
-            <a:srgbClr val="0B66C3"/>
-          </a:solidFill>
-          <a:ln>
-            <a:noFill/>
-          </a:ln>
-        </p:spPr>
-        <p:style>
-          <a:lnRef idx="1">
-            <a:schemeClr val="accent1"/>
-          </a:lnRef>
-          <a:fillRef idx="3">
-            <a:schemeClr val="accent1"/>
-          </a:fillRef>
-          <a:effectRef idx="2">
-            <a:schemeClr val="accent1"/>
-          </a:effectRef>
-          <a:fontRef idx="minor">
-            <a:schemeClr val="lt1"/>
-          </a:fontRef>
-        </p:style>
-        <p:txBody>
-          <a:bodyPr rtlCol="0" anchor="ctr"/>
-          <a:lstStyle/>
-          <a:p>
-            <a:pPr algn="ctr"/>
-            <a:r>
-              <a:rPr sz="2800" b="1" i="0">
-                <a:solidFill>
-                  <a:srgbClr val="FFFFFF"/>
-                </a:solidFill>
-                <a:latin typeface="Yu Gothic"/>
-                <a:ea typeface="Yu Gothic"/>
-                <a:cs typeface="Yu Gothic"/>
-              </a:rPr>
-              <a:t>考察: 3 手法の比較</a:t>
-            </a:r>
-          </a:p>
-        </p:txBody>
-      </p:sp>
-      <p:sp>
-        <p:nvSpPr>
-          <p:cNvPr id="3" name="page number"/>
-          <p:cNvSpPr txBox="1"/>
-          <p:nvPr/>
-        </p:nvSpPr>
-        <p:spPr>
-          <a:xfrm>
-            <a:off x="11155680" y="6446520"/>
-            <a:ext cx="822960" cy="320040"/>
-          </a:xfrm>
-          <a:prstGeom prst="rect">
-            <a:avLst/>
-          </a:prstGeom>
-          <a:noFill/>
-        </p:spPr>
-        <p:txBody>
-          <a:bodyPr wrap="square" anchor="t" lIns="45720" rIns="45720" tIns="27432" bIns="27432">
-            <a:spAutoFit/>
-          </a:bodyPr>
-          <a:lstStyle/>
-          <a:p>
-            <a:pPr algn="r">
-              <a:spcAft>
-                <a:spcPts val="600"/>
-              </a:spcAft>
-            </a:pPr>
-            <a:r>
-              <a:rPr sz="1200" b="0" i="0">
-                <a:solidFill>
-                  <a:srgbClr val="595959"/>
-                </a:solidFill>
-                <a:latin typeface="Yu Gothic"/>
-                <a:ea typeface="Yu Gothic"/>
-                <a:cs typeface="Yu Gothic"/>
-              </a:rPr>
-              <a:t>29</a:t>
-            </a:r>
-          </a:p>
-        </p:txBody>
-      </p:sp>
-      <p:graphicFrame>
-        <p:nvGraphicFramePr>
-          <p:cNvPr id="4" name="Table 3"/>
-          <p:cNvGraphicFramePr>
-            <a:graphicFrameLocks noGrp="1"/>
-          </p:cNvGraphicFramePr>
-          <p:nvPr/>
-        </p:nvGraphicFramePr>
-        <p:xfrm>
-          <a:off x="548640" y="1005840"/>
-          <a:ext cx="11064240" cy="4069080"/>
-        </p:xfrm>
-        <a:graphic>
-          <a:graphicData uri="http://schemas.openxmlformats.org/drawingml/2006/table">
-            <a:tbl>
-              <a:tblPr firstRow="0" bandRow="0">
-                <a:tableStyleId>{5C22544A-7EE6-4342-B048-85BDC9FD1C3A}</a:tableStyleId>
-              </a:tblPr>
-              <a:tblGrid>
-                <a:gridCol w="1097280"/>
-                <a:gridCol w="2377440"/>
-                <a:gridCol w="2468880"/>
-                <a:gridCol w="2560320"/>
-                <a:gridCol w="2560320"/>
-              </a:tblGrid>
-              <a:tr h="502920">
-                <a:tc>
-                  <a:txBody>
-                    <a:bodyPr wrap="square"/>
-                    <a:lstStyle/>
-                    <a:p/>
-                  </a:txBody>
-                  <a:tcPr anchor="ctr" marL="73152" marR="73152" marT="27432" marB="27432">
-                    <a:solidFill>
-                      <a:srgbClr val="0B66C3"/>
-                    </a:solidFill>
-                  </a:tcPr>
-                </a:tc>
-                <a:tc>
-                  <a:txBody>
-                    <a:bodyPr wrap="square"/>
-                    <a:lstStyle/>
-                    <a:p>
-                      <a:r>
-                        <a:rPr sz="1400" b="1" i="0">
-                          <a:solidFill>
-                            <a:srgbClr val="FFFFFF"/>
-                          </a:solidFill>
-                          <a:latin typeface="Yu Gothic"/>
-                          <a:ea typeface="Yu Gothic"/>
-                          <a:cs typeface="Yu Gothic"/>
-                        </a:rPr>
-                        <a:t>RL が作用する場所</a:t>
-                      </a:r>
-                    </a:p>
-                  </a:txBody>
-                  <a:tcPr anchor="ctr" marL="73152" marR="73152" marT="27432" marB="27432">
-                    <a:solidFill>
-                      <a:srgbClr val="0B66C3"/>
-                    </a:solidFill>
-                  </a:tcPr>
-                </a:tc>
-                <a:tc>
-                  <a:txBody>
-                    <a:bodyPr wrap="square"/>
-                    <a:lstStyle/>
-                    <a:p>
-                      <a:r>
-                        <a:rPr sz="1400" b="1" i="0">
-                          <a:solidFill>
-                            <a:srgbClr val="FFFFFF"/>
-                          </a:solidFill>
-                          <a:latin typeface="Yu Gothic"/>
-                          <a:ea typeface="Yu Gothic"/>
-                          <a:cs typeface="Yu Gothic"/>
-                        </a:rPr>
-                        <a:t>評価者 / 必要なもの</a:t>
-                      </a:r>
-                    </a:p>
-                  </a:txBody>
-                  <a:tcPr anchor="ctr" marL="73152" marR="73152" marT="27432" marB="27432">
-                    <a:solidFill>
-                      <a:srgbClr val="0B66C3"/>
-                    </a:solidFill>
-                  </a:tcPr>
-                </a:tc>
-                <a:tc>
-                  <a:txBody>
-                    <a:bodyPr wrap="square"/>
-                    <a:lstStyle/>
-                    <a:p>
-                      <a:r>
-                        <a:rPr sz="1400" b="1" i="0">
-                          <a:solidFill>
-                            <a:srgbClr val="FFFFFF"/>
-                          </a:solidFill>
-                          <a:latin typeface="Yu Gothic"/>
-                          <a:ea typeface="Yu Gothic"/>
-                          <a:cs typeface="Yu Gothic"/>
-                        </a:rPr>
-                        <a:t>長所</a:t>
-                      </a:r>
-                    </a:p>
-                  </a:txBody>
-                  <a:tcPr anchor="ctr" marL="73152" marR="73152" marT="27432" marB="27432">
-                    <a:solidFill>
-                      <a:srgbClr val="0B66C3"/>
-                    </a:solidFill>
-                  </a:tcPr>
-                </a:tc>
-                <a:tc>
-                  <a:txBody>
-                    <a:bodyPr wrap="square"/>
-                    <a:lstStyle/>
-                    <a:p>
-                      <a:r>
-                        <a:rPr sz="1400" b="1" i="0">
-                          <a:solidFill>
-                            <a:srgbClr val="FFFFFF"/>
-                          </a:solidFill>
-                          <a:latin typeface="Yu Gothic"/>
-                          <a:ea typeface="Yu Gothic"/>
-                          <a:cs typeface="Yu Gothic"/>
-                        </a:rPr>
-                        <a:t>今回の経験での課題</a:t>
-                      </a:r>
-                    </a:p>
-                  </a:txBody>
-                  <a:tcPr anchor="ctr" marL="73152" marR="73152" marT="27432" marB="27432">
-                    <a:solidFill>
-                      <a:srgbClr val="0B66C3"/>
-                    </a:solidFill>
-                  </a:tcPr>
-                </a:tc>
-              </a:tr>
-              <a:tr h="1188720">
-                <a:tc>
-                  <a:txBody>
-                    <a:bodyPr wrap="square"/>
-                    <a:lstStyle/>
-                    <a:p>
-                      <a:r>
-                        <a:rPr sz="1400" b="0" i="0">
-                          <a:solidFill>
-                            <a:srgbClr val="1A1A1A"/>
-                          </a:solidFill>
-                          <a:latin typeface="Yu Gothic"/>
-                          <a:ea typeface="Yu Gothic"/>
-                          <a:cs typeface="Yu Gothic"/>
-                        </a:rPr>
-                        <a:t>RECAP</a:t>
-                      </a:r>
-                    </a:p>
-                  </a:txBody>
-                  <a:tcPr anchor="ctr" marL="73152" marR="73152" marT="27432" marB="27432">
-                    <a:solidFill>
-                      <a:srgbClr val="FFFFFF"/>
-                    </a:solidFill>
-                  </a:tcPr>
-                </a:tc>
-                <a:tc>
-                  <a:txBody>
-                    <a:bodyPr wrap="square"/>
-                    <a:lstStyle/>
-                    <a:p>
-                      <a:r>
-                        <a:rPr sz="1400" b="0" i="0">
-                          <a:solidFill>
-                            <a:srgbClr val="1A1A1A"/>
-                          </a:solidFill>
-                          <a:latin typeface="Yu Gothic"/>
-                          <a:ea typeface="Yu Gothic"/>
-                          <a:cs typeface="Yu Gothic"/>
-                        </a:rPr>
-                        <a:t>方策の学習目標（advantage 条件付き SFT）</a:t>
-                      </a:r>
-                    </a:p>
-                  </a:txBody>
-                  <a:tcPr anchor="ctr" marL="73152" marR="73152" marT="27432" marB="27432">
-                    <a:solidFill>
-                      <a:srgbClr val="FFFFFF"/>
-                    </a:solidFill>
-                  </a:tcPr>
-                </a:tc>
-                <a:tc>
-                  <a:txBody>
-                    <a:bodyPr wrap="square"/>
-                    <a:lstStyle/>
-                    <a:p>
-                      <a:r>
-                        <a:rPr sz="1400" b="0" i="0">
-                          <a:solidFill>
-                            <a:srgbClr val="1A1A1A"/>
-                          </a:solidFill>
-                          <a:latin typeface="Yu Gothic"/>
-                          <a:ea typeface="Yu Gothic"/>
-                          <a:cs typeface="Yu Gothic"/>
-                        </a:rPr>
-                        <a:t>評価者: 価値関数（return を予測）。ロールアウト</a:t>
-                      </a:r>
-                    </a:p>
-                  </a:txBody>
-                  <a:tcPr anchor="ctr" marL="73152" marR="73152" marT="27432" marB="27432">
-                    <a:solidFill>
-                      <a:srgbClr val="FFFFFF"/>
-                    </a:solidFill>
-                  </a:tcPr>
-                </a:tc>
-                <a:tc>
-                  <a:txBody>
-                    <a:bodyPr wrap="square"/>
-                    <a:lstStyle/>
-                    <a:p>
-                      <a:r>
-                        <a:rPr sz="1400" b="0" i="0">
-                          <a:solidFill>
-                            <a:srgbClr val="1A1A1A"/>
-                          </a:solidFill>
-                          <a:latin typeface="Yu Gothic"/>
-                          <a:ea typeface="Yu Gothic"/>
-                          <a:cs typeface="Yu Gothic"/>
-                        </a:rPr>
-                        <a:t>勾配不要。flow matching VLA に使える。異種データを使える</a:t>
-                      </a:r>
-                    </a:p>
-                  </a:txBody>
-                  <a:tcPr anchor="ctr" marL="73152" marR="73152" marT="27432" marB="27432">
-                    <a:solidFill>
-                      <a:srgbClr val="FFFFFF"/>
-                    </a:solidFill>
-                  </a:tcPr>
-                </a:tc>
-                <a:tc>
-                  <a:txBody>
-                    <a:bodyPr wrap="square"/>
-                    <a:lstStyle/>
-                    <a:p>
-                      <a:r>
-                        <a:rPr sz="1400" b="0" i="0">
-                          <a:solidFill>
-                            <a:srgbClr val="1A1A1A"/>
-                          </a:solidFill>
-                          <a:latin typeface="Yu Gothic"/>
-                          <a:ea typeface="Yu Gothic"/>
-                          <a:cs typeface="Yu Gothic"/>
-                        </a:rPr>
-                        <a:t>価値の信号がデータの作り方に依存。SFT が重い（30,000 step）</a:t>
-                      </a:r>
-                    </a:p>
-                  </a:txBody>
-                  <a:tcPr anchor="ctr" marL="73152" marR="73152" marT="27432" marB="27432">
-                    <a:solidFill>
-                      <a:srgbClr val="FFFFFF"/>
-                    </a:solidFill>
-                  </a:tcPr>
-                </a:tc>
-              </a:tr>
-              <a:tr h="1188720">
-                <a:tc>
-                  <a:txBody>
-                    <a:bodyPr wrap="square"/>
-                    <a:lstStyle/>
-                    <a:p>
-                      <a:r>
-                        <a:rPr sz="1400" b="0" i="0">
-                          <a:solidFill>
-                            <a:srgbClr val="1A1A1A"/>
-                          </a:solidFill>
-                          <a:latin typeface="Yu Gothic"/>
-                          <a:ea typeface="Yu Gothic"/>
-                          <a:cs typeface="Yu Gothic"/>
-                        </a:rPr>
-                        <a:t>STEAM</a:t>
-                      </a:r>
-                    </a:p>
-                  </a:txBody>
-                  <a:tcPr anchor="ctr" marL="73152" marR="73152" marT="27432" marB="27432">
-                    <a:solidFill>
-                      <a:srgbClr val="F3F7FC"/>
-                    </a:solidFill>
-                  </a:tcPr>
-                </a:tc>
-                <a:tc>
-                  <a:txBody>
-                    <a:bodyPr wrap="square"/>
-                    <a:lstStyle/>
-                    <a:p>
-                      <a:r>
-                        <a:rPr sz="1400" b="0" i="0">
-                          <a:solidFill>
-                            <a:srgbClr val="1A1A1A"/>
-                          </a:solidFill>
-                          <a:latin typeface="Yu Gothic"/>
-                          <a:ea typeface="Yu Gothic"/>
-                          <a:cs typeface="Yu Gothic"/>
-                        </a:rPr>
-                        <a:t>方策の学習目標（RECAP と同じ条件付き SFT）</a:t>
-                      </a:r>
-                    </a:p>
-                  </a:txBody>
-                  <a:tcPr anchor="ctr" marL="73152" marR="73152" marT="27432" marB="27432">
-                    <a:solidFill>
-                      <a:srgbClr val="F3F7FC"/>
-                    </a:solidFill>
-                  </a:tcPr>
-                </a:tc>
-                <a:tc>
-                  <a:txBody>
-                    <a:bodyPr wrap="square"/>
-                    <a:lstStyle/>
-                    <a:p>
-                      <a:r>
-                        <a:rPr sz="1400" b="0" i="0">
-                          <a:solidFill>
-                            <a:srgbClr val="1A1A1A"/>
-                          </a:solidFill>
-                          <a:latin typeface="Yu Gothic"/>
-                          <a:ea typeface="Yu Gothic"/>
-                          <a:cs typeface="Yu Gothic"/>
-                        </a:rPr>
-                        <a:t>評価者: 時間オフセットの critic のアンサンブル。デモ（自己教師あり）</a:t>
-                      </a:r>
-                    </a:p>
-                  </a:txBody>
-                  <a:tcPr anchor="ctr" marL="73152" marR="73152" marT="27432" marB="27432">
-                    <a:solidFill>
-                      <a:srgbClr val="F3F7FC"/>
-                    </a:solidFill>
-                  </a:tcPr>
-                </a:tc>
-                <a:tc>
-                  <a:txBody>
-                    <a:bodyPr wrap="square"/>
-                    <a:lstStyle/>
-                    <a:p>
-                      <a:r>
-                        <a:rPr sz="1400" b="0" i="0">
-                          <a:solidFill>
-                            <a:srgbClr val="1A1A1A"/>
-                          </a:solidFill>
-                          <a:latin typeface="Yu Gothic"/>
-                          <a:ea typeface="Yu Gothic"/>
-                          <a:cs typeface="Yu Gothic"/>
-                        </a:rPr>
-                        <a:t>報酬ラベル不要。保守的なアンサンブルで過大評価を抑える</a:t>
-                      </a:r>
-                    </a:p>
-                  </a:txBody>
-                  <a:tcPr anchor="ctr" marL="73152" marR="73152" marT="27432" marB="27432">
-                    <a:solidFill>
-                      <a:srgbClr val="F3F7FC"/>
-                    </a:solidFill>
-                  </a:tcPr>
-                </a:tc>
-                <a:tc>
-                  <a:txBody>
-                    <a:bodyPr wrap="square"/>
-                    <a:lstStyle/>
-                    <a:p>
-                      <a:r>
-                        <a:rPr sz="1400" b="0" i="0">
-                          <a:solidFill>
-                            <a:srgbClr val="1A1A1A"/>
-                          </a:solidFill>
-                          <a:latin typeface="Yu Gothic"/>
-                          <a:ea typeface="Yu Gothic"/>
-                          <a:cs typeface="Yu Gothic"/>
-                        </a:rPr>
-                        <a:t>未知データでの critic の精度が低い。advantage の計算に約 2.5 時間/15.5 万フレーム</a:t>
-                      </a:r>
-                    </a:p>
-                  </a:txBody>
-                  <a:tcPr anchor="ctr" marL="73152" marR="73152" marT="27432" marB="27432">
-                    <a:solidFill>
-                      <a:srgbClr val="F3F7FC"/>
-                    </a:solidFill>
-                  </a:tcPr>
-                </a:tc>
-              </a:tr>
-              <a:tr h="1188720">
-                <a:tc>
-                  <a:txBody>
-                    <a:bodyPr wrap="square"/>
-                    <a:lstStyle/>
-                    <a:p>
-                      <a:r>
-                        <a:rPr sz="1400" b="0" i="0">
-                          <a:solidFill>
-                            <a:srgbClr val="1A1A1A"/>
-                          </a:solidFill>
-                          <a:latin typeface="Yu Gothic"/>
-                          <a:ea typeface="Yu Gothic"/>
-                          <a:cs typeface="Yu Gothic"/>
-                        </a:rPr>
-                        <a:t>RL Token</a:t>
-                      </a:r>
-                    </a:p>
-                  </a:txBody>
-                  <a:tcPr anchor="ctr" marL="73152" marR="73152" marT="27432" marB="27432">
-                    <a:solidFill>
-                      <a:srgbClr val="FFFFFF"/>
-                    </a:solidFill>
-                  </a:tcPr>
-                </a:tc>
-                <a:tc>
-                  <a:txBody>
-                    <a:bodyPr wrap="square"/>
-                    <a:lstStyle/>
-                    <a:p>
-                      <a:r>
-                        <a:rPr sz="1400" b="0" i="0">
-                          <a:solidFill>
-                            <a:srgbClr val="1A1A1A"/>
-                          </a:solidFill>
-                          <a:latin typeface="Yu Gothic"/>
-                          <a:ea typeface="Yu Gothic"/>
-                          <a:cs typeface="Yu Gothic"/>
-                        </a:rPr>
-                        <a:t>行動の洗練（凍結 VLA の出力）</a:t>
-                      </a:r>
-                    </a:p>
-                  </a:txBody>
-                  <a:tcPr anchor="ctr" marL="73152" marR="73152" marT="27432" marB="27432">
-                    <a:solidFill>
-                      <a:srgbClr val="FFFFFF"/>
-                    </a:solidFill>
-                  </a:tcPr>
-                </a:tc>
-                <a:tc>
-                  <a:txBody>
-                    <a:bodyPr wrap="square"/>
-                    <a:lstStyle/>
-                    <a:p>
-                      <a:r>
-                        <a:rPr sz="1400" b="0" i="0">
-                          <a:solidFill>
-                            <a:srgbClr val="1A1A1A"/>
-                          </a:solidFill>
-                          <a:latin typeface="Yu Gothic"/>
-                          <a:ea typeface="Yu Gothic"/>
-                          <a:cs typeface="Yu Gothic"/>
-                        </a:rPr>
-                        <a:t>オンラインの環境と報酬。小さな actor-critic</a:t>
-                      </a:r>
-                    </a:p>
-                  </a:txBody>
-                  <a:tcPr anchor="ctr" marL="73152" marR="73152" marT="27432" marB="27432">
-                    <a:solidFill>
-                      <a:srgbClr val="FFFFFF"/>
-                    </a:solidFill>
-                  </a:tcPr>
-                </a:tc>
-                <a:tc>
-                  <a:txBody>
-                    <a:bodyPr wrap="square"/>
-                    <a:lstStyle/>
-                    <a:p>
-                      <a:r>
-                        <a:rPr sz="1400" b="0" i="0">
-                          <a:solidFill>
-                            <a:srgbClr val="1A1A1A"/>
-                          </a:solidFill>
-                          <a:latin typeface="Yu Gothic"/>
-                          <a:ea typeface="Yu Gothic"/>
-                          <a:cs typeface="Yu Gothic"/>
-                        </a:rPr>
-                        <a:t>軽量（約 5 MB）で、約 5 時間で学習。success_once 0.46 → 0.68</a:t>
-                      </a:r>
-                    </a:p>
-                  </a:txBody>
-                  <a:tcPr anchor="ctr" marL="73152" marR="73152" marT="27432" marB="27432">
-                    <a:solidFill>
-                      <a:srgbClr val="FFFFFF"/>
-                    </a:solidFill>
-                  </a:tcPr>
-                </a:tc>
-                <a:tc>
-                  <a:txBody>
-                    <a:bodyPr wrap="square"/>
-                    <a:lstStyle/>
-                    <a:p>
-                      <a:r>
-                        <a:rPr sz="1400" b="0" i="0">
-                          <a:solidFill>
-                            <a:srgbClr val="1A1A1A"/>
-                          </a:solidFill>
-                          <a:latin typeface="Yu Gothic"/>
-                          <a:ea typeface="Yu Gothic"/>
-                          <a:cs typeface="Yu Gothic"/>
-                        </a:rPr>
-                        <a:t>局面の設計（ゲート）が必要。シミュレータ（実機）が必要</a:t>
-                      </a:r>
-                    </a:p>
-                  </a:txBody>
-                  <a:tcPr anchor="ctr" marL="73152" marR="73152" marT="27432" marB="27432">
-                    <a:solidFill>
-                      <a:srgbClr val="FFFFFF"/>
-                    </a:solidFill>
-                  </a:tcPr>
-                </a:tc>
-              </a:tr>
-            </a:tbl>
-          </a:graphicData>
-        </a:graphic>
-      </p:graphicFrame>
-      <p:sp>
-        <p:nvSpPr>
-          <p:cNvPr id="5" name="key point"/>
-          <p:cNvSpPr/>
-          <p:nvPr/>
-        </p:nvSpPr>
-        <p:spPr>
-          <a:xfrm>
-            <a:off x="548640" y="5715000"/>
-            <a:ext cx="11064240" cy="640080"/>
-          </a:xfrm>
-          <a:prstGeom prst="roundRect">
-            <a:avLst>
-              <a:gd name="adj" fmla="val 18000"/>
-            </a:avLst>
-          </a:prstGeom>
-          <a:solidFill>
-            <a:srgbClr val="E8F1FB"/>
-          </a:solidFill>
-          <a:ln w="15875">
-            <a:solidFill>
-              <a:srgbClr val="0B66C3"/>
-            </a:solidFill>
-          </a:ln>
-        </p:spPr>
-        <p:style>
-          <a:lnRef idx="1">
-            <a:schemeClr val="accent1"/>
-          </a:lnRef>
-          <a:fillRef idx="3">
-            <a:schemeClr val="accent1"/>
-          </a:fillRef>
-          <a:effectRef idx="2">
-            <a:schemeClr val="accent1"/>
-          </a:effectRef>
-          <a:fontRef idx="minor">
-            <a:schemeClr val="lt1"/>
-          </a:fontRef>
-        </p:style>
-        <p:txBody>
-          <a:bodyPr rtlCol="0" anchor="ctr" wrap="square" lIns="228600" rIns="228600"/>
-          <a:lstStyle/>
-          <a:p>
-            <a:pPr algn="l"/>
-            <a:r>
-              <a:rPr sz="1600" b="1" i="0">
-                <a:solidFill>
-                  <a:srgbClr val="0B66C3"/>
-                </a:solidFill>
-                <a:latin typeface="Yu Gothic"/>
-                <a:ea typeface="Yu Gothic"/>
-                <a:cs typeface="Yu Gothic"/>
-              </a:rPr>
-              <a:t>→ RECAP と STEAM は評価者だけが違い、RL Token は行動を直す。目的は補完的</a:t>
-            </a:r>
-          </a:p>
-        </p:txBody>
-      </p:sp>
-    </p:spTree>
-  </p:cSld>
-  <p:clrMapOvr>
-    <a:masterClrMapping/>
-  </p:clrMapOvr>
-</p:sld>
-</file>
-
 <file path=ppt/slides/slide3.xml><?xml version="1.0" encoding="utf-8"?>
 <p:sld xmlns:a="http://schemas.openxmlformats.org/drawingml/2006/main" xmlns:p="http://schemas.openxmlformats.org/presentationml/2006/main" xmlns:r="http://schemas.openxmlformats.org/officeDocument/2006/relationships">
   <p:cSld>
@@ -29929,7 +30448,7 @@
                 <a:ea typeface="Yu Gothic"/>
                 <a:cs typeface="Yu Gothic"/>
               </a:rPr>
-              <a:t>まとめと今後</a:t>
+              <a:t>考察: 3 手法の比較</a:t>
             </a:r>
           </a:p>
         </p:txBody>
@@ -29971,6 +30490,682 @@
                 <a:cs typeface="Yu Gothic"/>
               </a:rPr>
               <a:t>30</a:t>
+            </a:r>
+          </a:p>
+        </p:txBody>
+      </p:sp>
+      <p:graphicFrame>
+        <p:nvGraphicFramePr>
+          <p:cNvPr id="4" name="Table 3"/>
+          <p:cNvGraphicFramePr>
+            <a:graphicFrameLocks noGrp="1"/>
+          </p:cNvGraphicFramePr>
+          <p:nvPr/>
+        </p:nvGraphicFramePr>
+        <p:xfrm>
+          <a:off x="548640" y="1005840"/>
+          <a:ext cx="11064240" cy="4069080"/>
+        </p:xfrm>
+        <a:graphic>
+          <a:graphicData uri="http://schemas.openxmlformats.org/drawingml/2006/table">
+            <a:tbl>
+              <a:tblPr firstRow="0" bandRow="0">
+                <a:tableStyleId>{5C22544A-7EE6-4342-B048-85BDC9FD1C3A}</a:tableStyleId>
+              </a:tblPr>
+              <a:tblGrid>
+                <a:gridCol w="1097280"/>
+                <a:gridCol w="2377440"/>
+                <a:gridCol w="2468880"/>
+                <a:gridCol w="2560320"/>
+                <a:gridCol w="2560320"/>
+              </a:tblGrid>
+              <a:tr h="502920">
+                <a:tc>
+                  <a:txBody>
+                    <a:bodyPr wrap="square"/>
+                    <a:lstStyle/>
+                    <a:p/>
+                  </a:txBody>
+                  <a:tcPr anchor="ctr" marL="73152" marR="73152" marT="27432" marB="27432">
+                    <a:solidFill>
+                      <a:srgbClr val="0B66C3"/>
+                    </a:solidFill>
+                  </a:tcPr>
+                </a:tc>
+                <a:tc>
+                  <a:txBody>
+                    <a:bodyPr wrap="square"/>
+                    <a:lstStyle/>
+                    <a:p>
+                      <a:r>
+                        <a:rPr sz="1400" b="1" i="0">
+                          <a:solidFill>
+                            <a:srgbClr val="FFFFFF"/>
+                          </a:solidFill>
+                          <a:latin typeface="Yu Gothic"/>
+                          <a:ea typeface="Yu Gothic"/>
+                          <a:cs typeface="Yu Gothic"/>
+                        </a:rPr>
+                        <a:t>RL が作用する場所</a:t>
+                      </a:r>
+                    </a:p>
+                  </a:txBody>
+                  <a:tcPr anchor="ctr" marL="73152" marR="73152" marT="27432" marB="27432">
+                    <a:solidFill>
+                      <a:srgbClr val="0B66C3"/>
+                    </a:solidFill>
+                  </a:tcPr>
+                </a:tc>
+                <a:tc>
+                  <a:txBody>
+                    <a:bodyPr wrap="square"/>
+                    <a:lstStyle/>
+                    <a:p>
+                      <a:r>
+                        <a:rPr sz="1400" b="1" i="0">
+                          <a:solidFill>
+                            <a:srgbClr val="FFFFFF"/>
+                          </a:solidFill>
+                          <a:latin typeface="Yu Gothic"/>
+                          <a:ea typeface="Yu Gothic"/>
+                          <a:cs typeface="Yu Gothic"/>
+                        </a:rPr>
+                        <a:t>評価者 / 必要なもの</a:t>
+                      </a:r>
+                    </a:p>
+                  </a:txBody>
+                  <a:tcPr anchor="ctr" marL="73152" marR="73152" marT="27432" marB="27432">
+                    <a:solidFill>
+                      <a:srgbClr val="0B66C3"/>
+                    </a:solidFill>
+                  </a:tcPr>
+                </a:tc>
+                <a:tc>
+                  <a:txBody>
+                    <a:bodyPr wrap="square"/>
+                    <a:lstStyle/>
+                    <a:p>
+                      <a:r>
+                        <a:rPr sz="1400" b="1" i="0">
+                          <a:solidFill>
+                            <a:srgbClr val="FFFFFF"/>
+                          </a:solidFill>
+                          <a:latin typeface="Yu Gothic"/>
+                          <a:ea typeface="Yu Gothic"/>
+                          <a:cs typeface="Yu Gothic"/>
+                        </a:rPr>
+                        <a:t>長所</a:t>
+                      </a:r>
+                    </a:p>
+                  </a:txBody>
+                  <a:tcPr anchor="ctr" marL="73152" marR="73152" marT="27432" marB="27432">
+                    <a:solidFill>
+                      <a:srgbClr val="0B66C3"/>
+                    </a:solidFill>
+                  </a:tcPr>
+                </a:tc>
+                <a:tc>
+                  <a:txBody>
+                    <a:bodyPr wrap="square"/>
+                    <a:lstStyle/>
+                    <a:p>
+                      <a:r>
+                        <a:rPr sz="1400" b="1" i="0">
+                          <a:solidFill>
+                            <a:srgbClr val="FFFFFF"/>
+                          </a:solidFill>
+                          <a:latin typeface="Yu Gothic"/>
+                          <a:ea typeface="Yu Gothic"/>
+                          <a:cs typeface="Yu Gothic"/>
+                        </a:rPr>
+                        <a:t>今回の経験での課題</a:t>
+                      </a:r>
+                    </a:p>
+                  </a:txBody>
+                  <a:tcPr anchor="ctr" marL="73152" marR="73152" marT="27432" marB="27432">
+                    <a:solidFill>
+                      <a:srgbClr val="0B66C3"/>
+                    </a:solidFill>
+                  </a:tcPr>
+                </a:tc>
+              </a:tr>
+              <a:tr h="1188720">
+                <a:tc>
+                  <a:txBody>
+                    <a:bodyPr wrap="square"/>
+                    <a:lstStyle/>
+                    <a:p>
+                      <a:r>
+                        <a:rPr sz="1400" b="0" i="0">
+                          <a:solidFill>
+                            <a:srgbClr val="1A1A1A"/>
+                          </a:solidFill>
+                          <a:latin typeface="Yu Gothic"/>
+                          <a:ea typeface="Yu Gothic"/>
+                          <a:cs typeface="Yu Gothic"/>
+                        </a:rPr>
+                        <a:t>RECAP</a:t>
+                      </a:r>
+                    </a:p>
+                  </a:txBody>
+                  <a:tcPr anchor="ctr" marL="73152" marR="73152" marT="27432" marB="27432">
+                    <a:solidFill>
+                      <a:srgbClr val="FFFFFF"/>
+                    </a:solidFill>
+                  </a:tcPr>
+                </a:tc>
+                <a:tc>
+                  <a:txBody>
+                    <a:bodyPr wrap="square"/>
+                    <a:lstStyle/>
+                    <a:p>
+                      <a:r>
+                        <a:rPr sz="1400" b="0" i="0">
+                          <a:solidFill>
+                            <a:srgbClr val="1A1A1A"/>
+                          </a:solidFill>
+                          <a:latin typeface="Yu Gothic"/>
+                          <a:ea typeface="Yu Gothic"/>
+                          <a:cs typeface="Yu Gothic"/>
+                        </a:rPr>
+                        <a:t>方策の学習目標（advantage 条件付き SFT）</a:t>
+                      </a:r>
+                    </a:p>
+                  </a:txBody>
+                  <a:tcPr anchor="ctr" marL="73152" marR="73152" marT="27432" marB="27432">
+                    <a:solidFill>
+                      <a:srgbClr val="FFFFFF"/>
+                    </a:solidFill>
+                  </a:tcPr>
+                </a:tc>
+                <a:tc>
+                  <a:txBody>
+                    <a:bodyPr wrap="square"/>
+                    <a:lstStyle/>
+                    <a:p>
+                      <a:r>
+                        <a:rPr sz="1400" b="0" i="0">
+                          <a:solidFill>
+                            <a:srgbClr val="1A1A1A"/>
+                          </a:solidFill>
+                          <a:latin typeface="Yu Gothic"/>
+                          <a:ea typeface="Yu Gothic"/>
+                          <a:cs typeface="Yu Gothic"/>
+                        </a:rPr>
+                        <a:t>評価者: 価値関数（return を予測）。ロールアウト</a:t>
+                      </a:r>
+                    </a:p>
+                  </a:txBody>
+                  <a:tcPr anchor="ctr" marL="73152" marR="73152" marT="27432" marB="27432">
+                    <a:solidFill>
+                      <a:srgbClr val="FFFFFF"/>
+                    </a:solidFill>
+                  </a:tcPr>
+                </a:tc>
+                <a:tc>
+                  <a:txBody>
+                    <a:bodyPr wrap="square"/>
+                    <a:lstStyle/>
+                    <a:p>
+                      <a:r>
+                        <a:rPr sz="1400" b="0" i="0">
+                          <a:solidFill>
+                            <a:srgbClr val="1A1A1A"/>
+                          </a:solidFill>
+                          <a:latin typeface="Yu Gothic"/>
+                          <a:ea typeface="Yu Gothic"/>
+                          <a:cs typeface="Yu Gothic"/>
+                        </a:rPr>
+                        <a:t>勾配不要。flow matching VLA に使える。異種データを使える</a:t>
+                      </a:r>
+                    </a:p>
+                  </a:txBody>
+                  <a:tcPr anchor="ctr" marL="73152" marR="73152" marT="27432" marB="27432">
+                    <a:solidFill>
+                      <a:srgbClr val="FFFFFF"/>
+                    </a:solidFill>
+                  </a:tcPr>
+                </a:tc>
+                <a:tc>
+                  <a:txBody>
+                    <a:bodyPr wrap="square"/>
+                    <a:lstStyle/>
+                    <a:p>
+                      <a:r>
+                        <a:rPr sz="1400" b="0" i="0">
+                          <a:solidFill>
+                            <a:srgbClr val="1A1A1A"/>
+                          </a:solidFill>
+                          <a:latin typeface="Yu Gothic"/>
+                          <a:ea typeface="Yu Gothic"/>
+                          <a:cs typeface="Yu Gothic"/>
+                        </a:rPr>
+                        <a:t>価値の信号がデータの作り方に依存。SFT が重い（30,000 step）</a:t>
+                      </a:r>
+                    </a:p>
+                  </a:txBody>
+                  <a:tcPr anchor="ctr" marL="73152" marR="73152" marT="27432" marB="27432">
+                    <a:solidFill>
+                      <a:srgbClr val="FFFFFF"/>
+                    </a:solidFill>
+                  </a:tcPr>
+                </a:tc>
+              </a:tr>
+              <a:tr h="1188720">
+                <a:tc>
+                  <a:txBody>
+                    <a:bodyPr wrap="square"/>
+                    <a:lstStyle/>
+                    <a:p>
+                      <a:r>
+                        <a:rPr sz="1400" b="0" i="0">
+                          <a:solidFill>
+                            <a:srgbClr val="1A1A1A"/>
+                          </a:solidFill>
+                          <a:latin typeface="Yu Gothic"/>
+                          <a:ea typeface="Yu Gothic"/>
+                          <a:cs typeface="Yu Gothic"/>
+                        </a:rPr>
+                        <a:t>STEAM</a:t>
+                      </a:r>
+                    </a:p>
+                  </a:txBody>
+                  <a:tcPr anchor="ctr" marL="73152" marR="73152" marT="27432" marB="27432">
+                    <a:solidFill>
+                      <a:srgbClr val="F3F7FC"/>
+                    </a:solidFill>
+                  </a:tcPr>
+                </a:tc>
+                <a:tc>
+                  <a:txBody>
+                    <a:bodyPr wrap="square"/>
+                    <a:lstStyle/>
+                    <a:p>
+                      <a:r>
+                        <a:rPr sz="1400" b="0" i="0">
+                          <a:solidFill>
+                            <a:srgbClr val="1A1A1A"/>
+                          </a:solidFill>
+                          <a:latin typeface="Yu Gothic"/>
+                          <a:ea typeface="Yu Gothic"/>
+                          <a:cs typeface="Yu Gothic"/>
+                        </a:rPr>
+                        <a:t>方策の学習目標（RECAP と同じ条件付き SFT）</a:t>
+                      </a:r>
+                    </a:p>
+                  </a:txBody>
+                  <a:tcPr anchor="ctr" marL="73152" marR="73152" marT="27432" marB="27432">
+                    <a:solidFill>
+                      <a:srgbClr val="F3F7FC"/>
+                    </a:solidFill>
+                  </a:tcPr>
+                </a:tc>
+                <a:tc>
+                  <a:txBody>
+                    <a:bodyPr wrap="square"/>
+                    <a:lstStyle/>
+                    <a:p>
+                      <a:r>
+                        <a:rPr sz="1400" b="0" i="0">
+                          <a:solidFill>
+                            <a:srgbClr val="1A1A1A"/>
+                          </a:solidFill>
+                          <a:latin typeface="Yu Gothic"/>
+                          <a:ea typeface="Yu Gothic"/>
+                          <a:cs typeface="Yu Gothic"/>
+                        </a:rPr>
+                        <a:t>評価者: 時間オフセットの critic のアンサンブル。デモ（自己教師あり）</a:t>
+                      </a:r>
+                    </a:p>
+                  </a:txBody>
+                  <a:tcPr anchor="ctr" marL="73152" marR="73152" marT="27432" marB="27432">
+                    <a:solidFill>
+                      <a:srgbClr val="F3F7FC"/>
+                    </a:solidFill>
+                  </a:tcPr>
+                </a:tc>
+                <a:tc>
+                  <a:txBody>
+                    <a:bodyPr wrap="square"/>
+                    <a:lstStyle/>
+                    <a:p>
+                      <a:r>
+                        <a:rPr sz="1400" b="0" i="0">
+                          <a:solidFill>
+                            <a:srgbClr val="1A1A1A"/>
+                          </a:solidFill>
+                          <a:latin typeface="Yu Gothic"/>
+                          <a:ea typeface="Yu Gothic"/>
+                          <a:cs typeface="Yu Gothic"/>
+                        </a:rPr>
+                        <a:t>報酬ラベル不要。保守的なアンサンブルで過大評価を抑える</a:t>
+                      </a:r>
+                    </a:p>
+                  </a:txBody>
+                  <a:tcPr anchor="ctr" marL="73152" marR="73152" marT="27432" marB="27432">
+                    <a:solidFill>
+                      <a:srgbClr val="F3F7FC"/>
+                    </a:solidFill>
+                  </a:tcPr>
+                </a:tc>
+                <a:tc>
+                  <a:txBody>
+                    <a:bodyPr wrap="square"/>
+                    <a:lstStyle/>
+                    <a:p>
+                      <a:r>
+                        <a:rPr sz="1400" b="0" i="0">
+                          <a:solidFill>
+                            <a:srgbClr val="1A1A1A"/>
+                          </a:solidFill>
+                          <a:latin typeface="Yu Gothic"/>
+                          <a:ea typeface="Yu Gothic"/>
+                          <a:cs typeface="Yu Gothic"/>
+                        </a:rPr>
+                        <a:t>未知データでの critic の精度が低い。advantage の計算に約 2.5 時間/15.5 万フレーム</a:t>
+                      </a:r>
+                    </a:p>
+                  </a:txBody>
+                  <a:tcPr anchor="ctr" marL="73152" marR="73152" marT="27432" marB="27432">
+                    <a:solidFill>
+                      <a:srgbClr val="F3F7FC"/>
+                    </a:solidFill>
+                  </a:tcPr>
+                </a:tc>
+              </a:tr>
+              <a:tr h="1188720">
+                <a:tc>
+                  <a:txBody>
+                    <a:bodyPr wrap="square"/>
+                    <a:lstStyle/>
+                    <a:p>
+                      <a:r>
+                        <a:rPr sz="1400" b="0" i="0">
+                          <a:solidFill>
+                            <a:srgbClr val="1A1A1A"/>
+                          </a:solidFill>
+                          <a:latin typeface="Yu Gothic"/>
+                          <a:ea typeface="Yu Gothic"/>
+                          <a:cs typeface="Yu Gothic"/>
+                        </a:rPr>
+                        <a:t>RL Token</a:t>
+                      </a:r>
+                    </a:p>
+                  </a:txBody>
+                  <a:tcPr anchor="ctr" marL="73152" marR="73152" marT="27432" marB="27432">
+                    <a:solidFill>
+                      <a:srgbClr val="FFFFFF"/>
+                    </a:solidFill>
+                  </a:tcPr>
+                </a:tc>
+                <a:tc>
+                  <a:txBody>
+                    <a:bodyPr wrap="square"/>
+                    <a:lstStyle/>
+                    <a:p>
+                      <a:r>
+                        <a:rPr sz="1400" b="0" i="0">
+                          <a:solidFill>
+                            <a:srgbClr val="1A1A1A"/>
+                          </a:solidFill>
+                          <a:latin typeface="Yu Gothic"/>
+                          <a:ea typeface="Yu Gothic"/>
+                          <a:cs typeface="Yu Gothic"/>
+                        </a:rPr>
+                        <a:t>行動の洗練（凍結 VLA の出力）</a:t>
+                      </a:r>
+                    </a:p>
+                  </a:txBody>
+                  <a:tcPr anchor="ctr" marL="73152" marR="73152" marT="27432" marB="27432">
+                    <a:solidFill>
+                      <a:srgbClr val="FFFFFF"/>
+                    </a:solidFill>
+                  </a:tcPr>
+                </a:tc>
+                <a:tc>
+                  <a:txBody>
+                    <a:bodyPr wrap="square"/>
+                    <a:lstStyle/>
+                    <a:p>
+                      <a:r>
+                        <a:rPr sz="1400" b="0" i="0">
+                          <a:solidFill>
+                            <a:srgbClr val="1A1A1A"/>
+                          </a:solidFill>
+                          <a:latin typeface="Yu Gothic"/>
+                          <a:ea typeface="Yu Gothic"/>
+                          <a:cs typeface="Yu Gothic"/>
+                        </a:rPr>
+                        <a:t>オンラインの環境と報酬。小さな actor-critic</a:t>
+                      </a:r>
+                    </a:p>
+                  </a:txBody>
+                  <a:tcPr anchor="ctr" marL="73152" marR="73152" marT="27432" marB="27432">
+                    <a:solidFill>
+                      <a:srgbClr val="FFFFFF"/>
+                    </a:solidFill>
+                  </a:tcPr>
+                </a:tc>
+                <a:tc>
+                  <a:txBody>
+                    <a:bodyPr wrap="square"/>
+                    <a:lstStyle/>
+                    <a:p>
+                      <a:r>
+                        <a:rPr sz="1400" b="0" i="0">
+                          <a:solidFill>
+                            <a:srgbClr val="1A1A1A"/>
+                          </a:solidFill>
+                          <a:latin typeface="Yu Gothic"/>
+                          <a:ea typeface="Yu Gothic"/>
+                          <a:cs typeface="Yu Gothic"/>
+                        </a:rPr>
+                        <a:t>軽量（約 5 MB）で、約 5 時間で学習。success_once 0.46 → 0.68</a:t>
+                      </a:r>
+                    </a:p>
+                  </a:txBody>
+                  <a:tcPr anchor="ctr" marL="73152" marR="73152" marT="27432" marB="27432">
+                    <a:solidFill>
+                      <a:srgbClr val="FFFFFF"/>
+                    </a:solidFill>
+                  </a:tcPr>
+                </a:tc>
+                <a:tc>
+                  <a:txBody>
+                    <a:bodyPr wrap="square"/>
+                    <a:lstStyle/>
+                    <a:p>
+                      <a:r>
+                        <a:rPr sz="1400" b="0" i="0">
+                          <a:solidFill>
+                            <a:srgbClr val="1A1A1A"/>
+                          </a:solidFill>
+                          <a:latin typeface="Yu Gothic"/>
+                          <a:ea typeface="Yu Gothic"/>
+                          <a:cs typeface="Yu Gothic"/>
+                        </a:rPr>
+                        <a:t>局面の設計（ゲート）が必要。シミュレータ（実機）が必要</a:t>
+                      </a:r>
+                    </a:p>
+                  </a:txBody>
+                  <a:tcPr anchor="ctr" marL="73152" marR="73152" marT="27432" marB="27432">
+                    <a:solidFill>
+                      <a:srgbClr val="FFFFFF"/>
+                    </a:solidFill>
+                  </a:tcPr>
+                </a:tc>
+              </a:tr>
+            </a:tbl>
+          </a:graphicData>
+        </a:graphic>
+      </p:graphicFrame>
+      <p:sp>
+        <p:nvSpPr>
+          <p:cNvPr id="5" name="key point"/>
+          <p:cNvSpPr/>
+          <p:nvPr/>
+        </p:nvSpPr>
+        <p:spPr>
+          <a:xfrm>
+            <a:off x="548640" y="5715000"/>
+            <a:ext cx="11064240" cy="640080"/>
+          </a:xfrm>
+          <a:prstGeom prst="roundRect">
+            <a:avLst>
+              <a:gd name="adj" fmla="val 18000"/>
+            </a:avLst>
+          </a:prstGeom>
+          <a:solidFill>
+            <a:srgbClr val="E8F1FB"/>
+          </a:solidFill>
+          <a:ln w="15875">
+            <a:solidFill>
+              <a:srgbClr val="0B66C3"/>
+            </a:solidFill>
+          </a:ln>
+        </p:spPr>
+        <p:style>
+          <a:lnRef idx="1">
+            <a:schemeClr val="accent1"/>
+          </a:lnRef>
+          <a:fillRef idx="3">
+            <a:schemeClr val="accent1"/>
+          </a:fillRef>
+          <a:effectRef idx="2">
+            <a:schemeClr val="accent1"/>
+          </a:effectRef>
+          <a:fontRef idx="minor">
+            <a:schemeClr val="lt1"/>
+          </a:fontRef>
+        </p:style>
+        <p:txBody>
+          <a:bodyPr rtlCol="0" anchor="ctr" wrap="square" lIns="228600" rIns="228600"/>
+          <a:lstStyle/>
+          <a:p>
+            <a:pPr algn="l"/>
+            <a:r>
+              <a:rPr sz="1600" b="1" i="0">
+                <a:solidFill>
+                  <a:srgbClr val="0B66C3"/>
+                </a:solidFill>
+                <a:latin typeface="Yu Gothic"/>
+                <a:ea typeface="Yu Gothic"/>
+                <a:cs typeface="Yu Gothic"/>
+              </a:rPr>
+              <a:t>→ RECAP と STEAM は評価者だけが違い、RL Token は行動を直す。目的は補完的</a:t>
+            </a:r>
+          </a:p>
+        </p:txBody>
+      </p:sp>
+    </p:spTree>
+  </p:cSld>
+  <p:clrMapOvr>
+    <a:masterClrMapping/>
+  </p:clrMapOvr>
+</p:sld>
+</file>
+
+<file path=ppt/slides/slide31.xml><?xml version="1.0" encoding="utf-8"?>
+<p:sld xmlns:a="http://schemas.openxmlformats.org/drawingml/2006/main" xmlns:p="http://schemas.openxmlformats.org/presentationml/2006/main" xmlns:r="http://schemas.openxmlformats.org/officeDocument/2006/relationships">
+  <p:cSld>
+    <p:spTree>
+      <p:nvGrpSpPr>
+        <p:cNvPr id="1" name=""/>
+        <p:cNvGrpSpPr/>
+        <p:nvPr/>
+      </p:nvGrpSpPr>
+      <p:grpSpPr/>
+      <p:sp>
+        <p:nvSpPr>
+          <p:cNvPr id="2" name="title band"/>
+          <p:cNvSpPr/>
+          <p:nvPr/>
+        </p:nvSpPr>
+        <p:spPr>
+          <a:xfrm>
+            <a:off x="0" y="0"/>
+            <a:ext cx="12191695" cy="777240"/>
+          </a:xfrm>
+          <a:prstGeom prst="rect">
+            <a:avLst/>
+          </a:prstGeom>
+          <a:solidFill>
+            <a:srgbClr val="0B66C3"/>
+          </a:solidFill>
+          <a:ln>
+            <a:noFill/>
+          </a:ln>
+        </p:spPr>
+        <p:style>
+          <a:lnRef idx="1">
+            <a:schemeClr val="accent1"/>
+          </a:lnRef>
+          <a:fillRef idx="3">
+            <a:schemeClr val="accent1"/>
+          </a:fillRef>
+          <a:effectRef idx="2">
+            <a:schemeClr val="accent1"/>
+          </a:effectRef>
+          <a:fontRef idx="minor">
+            <a:schemeClr val="lt1"/>
+          </a:fontRef>
+        </p:style>
+        <p:txBody>
+          <a:bodyPr rtlCol="0" anchor="ctr"/>
+          <a:lstStyle/>
+          <a:p>
+            <a:pPr algn="ctr"/>
+            <a:r>
+              <a:rPr sz="2800" b="1" i="0">
+                <a:solidFill>
+                  <a:srgbClr val="FFFFFF"/>
+                </a:solidFill>
+                <a:latin typeface="Yu Gothic"/>
+                <a:ea typeface="Yu Gothic"/>
+                <a:cs typeface="Yu Gothic"/>
+              </a:rPr>
+              <a:t>まとめと今後</a:t>
+            </a:r>
+          </a:p>
+        </p:txBody>
+      </p:sp>
+      <p:sp>
+        <p:nvSpPr>
+          <p:cNvPr id="3" name="page number"/>
+          <p:cNvSpPr txBox="1"/>
+          <p:nvPr/>
+        </p:nvSpPr>
+        <p:spPr>
+          <a:xfrm>
+            <a:off x="11155680" y="6446520"/>
+            <a:ext cx="822960" cy="320040"/>
+          </a:xfrm>
+          <a:prstGeom prst="rect">
+            <a:avLst/>
+          </a:prstGeom>
+          <a:noFill/>
+        </p:spPr>
+        <p:txBody>
+          <a:bodyPr wrap="square" anchor="t" lIns="45720" rIns="45720" tIns="27432" bIns="27432">
+            <a:spAutoFit/>
+          </a:bodyPr>
+          <a:lstStyle/>
+          <a:p>
+            <a:pPr algn="r">
+              <a:spcAft>
+                <a:spcPts val="600"/>
+              </a:spcAft>
+            </a:pPr>
+            <a:r>
+              <a:rPr sz="1200" b="0" i="0">
+                <a:solidFill>
+                  <a:srgbClr val="595959"/>
+                </a:solidFill>
+                <a:latin typeface="Yu Gothic"/>
+                <a:ea typeface="Yu Gothic"/>
+                <a:cs typeface="Yu Gothic"/>
+              </a:rPr>
+              <a:t>31</a:t>
             </a:r>
           </a:p>
         </p:txBody>

--- a/docs/RECAP_STEAM_RLToken.pptx
+++ b/docs/RECAP_STEAM_RLToken.pptx
@@ -26865,14 +26865,86 @@
       </p:sp>
       <p:sp>
         <p:nvSpPr>
-          <p:cNvPr id="4" name="label ベース（smolVLA）"/>
+          <p:cNvPr id="4" name="instruction"/>
           <p:cNvSpPr/>
           <p:nvPr/>
         </p:nvSpPr>
         <p:spPr>
           <a:xfrm>
-            <a:off x="548640" y="960120"/>
-            <a:ext cx="2697480" cy="457200"/>
+            <a:off x="548640" y="914400"/>
+            <a:ext cx="11064240" cy="566928"/>
+          </a:xfrm>
+          <a:prstGeom prst="roundRect">
+            <a:avLst>
+              <a:gd name="adj" fmla="val 12000"/>
+            </a:avLst>
+          </a:prstGeom>
+          <a:solidFill>
+            <a:srgbClr val="E8F1FB"/>
+          </a:solidFill>
+          <a:ln w="12700">
+            <a:solidFill>
+              <a:srgbClr val="0B66C3"/>
+            </a:solidFill>
+          </a:ln>
+        </p:spPr>
+        <p:style>
+          <a:lnRef idx="1">
+            <a:schemeClr val="accent1"/>
+          </a:lnRef>
+          <a:fillRef idx="3">
+            <a:schemeClr val="accent1"/>
+          </a:fillRef>
+          <a:effectRef idx="2">
+            <a:schemeClr val="accent1"/>
+          </a:effectRef>
+          <a:fontRef idx="minor">
+            <a:schemeClr val="lt1"/>
+          </a:fontRef>
+        </p:style>
+        <p:txBody>
+          <a:bodyPr rtlCol="0" anchor="ctr" wrap="square" lIns="73152" rIns="73152" tIns="36576" bIns="36576"/>
+          <a:lstStyle/>
+          <a:p>
+            <a:pPr algn="ctr"/>
+            <a:r>
+              <a:rPr sz="1500" b="1" i="0">
+                <a:solidFill>
+                  <a:srgbClr val="0B66C3"/>
+                </a:solidFill>
+                <a:latin typeface="Yu Gothic"/>
+                <a:ea typeface="Yu Gothic"/>
+                <a:cs typeface="Yu Gothic"/>
+              </a:rPr>
+              <a:t>指示文（全手法で共通）:  "put both the alphabet soup and the tomato sauce in the basket"</a:t>
+            </a:r>
+          </a:p>
+          <a:p>
+            <a:pPr algn="ctr"/>
+            <a:r>
+              <a:rPr sz="1200" b="0" i="0">
+                <a:solidFill>
+                  <a:srgbClr val="595959"/>
+                </a:solidFill>
+                <a:latin typeface="Yu Gothic"/>
+                <a:ea typeface="Yu Gothic"/>
+                <a:cs typeface="Yu Gothic"/>
+              </a:rPr>
+              <a:t>（アルファベットスープの缶とトマトソースの、両方をカゴに入れる。Task 0）</a:t>
+            </a:r>
+          </a:p>
+        </p:txBody>
+      </p:sp>
+      <p:sp>
+        <p:nvSpPr>
+          <p:cNvPr id="5" name="label ベース（smolVLA）"/>
+          <p:cNvSpPr/>
+          <p:nvPr/>
+        </p:nvSpPr>
+        <p:spPr>
+          <a:xfrm>
+            <a:off x="548640" y="1554480"/>
+            <a:ext cx="2423160" cy="411480"/>
           </a:xfrm>
           <a:prstGeom prst="roundRect">
             <a:avLst>
@@ -26921,7 +26993,7 @@
       </p:sp>
       <p:pic>
         <p:nvPicPr>
-          <p:cNvPr id="5" name="video ベース（smolVLA）">
+          <p:cNvPr id="6" name="video ベース（smolVLA）">
             <a:hlinkClick r:id="" action="ppaction://media"/>
           </p:cNvPr>
           <p:cNvPicPr>
@@ -26944,8 +27016,8 @@
         </p:blipFill>
         <p:spPr>
           <a:xfrm>
-            <a:off x="548640" y="1508760"/>
-            <a:ext cx="2697480" cy="2697480"/>
+            <a:off x="548640" y="2011680"/>
+            <a:ext cx="2423160" cy="2423160"/>
           </a:xfrm>
           <a:prstGeom prst="rect">
             <a:avLst/>
@@ -26954,14 +27026,14 @@
       </p:pic>
       <p:sp>
         <p:nvSpPr>
-          <p:cNvPr id="6" name="result ベース（smolVLA）"/>
+          <p:cNvPr id="7" name="result ベース（smolVLA）"/>
           <p:cNvSpPr/>
           <p:nvPr/>
         </p:nvSpPr>
         <p:spPr>
           <a:xfrm>
-            <a:off x="548640" y="4297680"/>
-            <a:ext cx="2697480" cy="914400"/>
+            <a:off x="548640" y="4507992"/>
+            <a:ext cx="2423160" cy="731520"/>
           </a:xfrm>
           <a:prstGeom prst="roundRect">
             <a:avLst>
@@ -26995,7 +27067,7 @@
           <a:p>
             <a:pPr algn="ctr"/>
             <a:r>
-              <a:rPr sz="1800" b="1" i="0">
+              <a:rPr sz="1700" b="1" i="0">
                 <a:solidFill>
                   <a:srgbClr val="FFFFFF"/>
                 </a:solidFill>
@@ -27009,7 +27081,7 @@
           <a:p>
             <a:pPr algn="ctr"/>
             <a:r>
-              <a:rPr sz="1200" b="0" i="0">
+              <a:rPr sz="1100" b="0" i="0">
                 <a:solidFill>
                   <a:srgbClr val="FFFFFF"/>
                 </a:solidFill>
@@ -27024,14 +27096,14 @@
       </p:sp>
       <p:sp>
         <p:nvSpPr>
-          <p:cNvPr id="7" name="TextBox 6"/>
+          <p:cNvPr id="8" name="TextBox 7"/>
           <p:cNvSpPr txBox="1"/>
           <p:nvPr/>
         </p:nvSpPr>
         <p:spPr>
           <a:xfrm>
-            <a:off x="548640" y="5257800"/>
-            <a:ext cx="2697480" cy="320040"/>
+            <a:off x="548640" y="5266944"/>
+            <a:ext cx="2423160" cy="274320"/>
           </a:xfrm>
           <a:prstGeom prst="rect">
             <a:avLst/>
@@ -27065,14 +27137,14 @@
       </p:sp>
       <p:sp>
         <p:nvSpPr>
-          <p:cNvPr id="8" name="label RECAP"/>
+          <p:cNvPr id="9" name="label RECAP"/>
           <p:cNvSpPr/>
           <p:nvPr/>
         </p:nvSpPr>
         <p:spPr>
           <a:xfrm>
-            <a:off x="3337560" y="960120"/>
-            <a:ext cx="2697480" cy="457200"/>
+            <a:off x="3429000" y="1554480"/>
+            <a:ext cx="2423160" cy="411480"/>
           </a:xfrm>
           <a:prstGeom prst="roundRect">
             <a:avLst>
@@ -27121,14 +27193,14 @@
       </p:sp>
       <p:sp>
         <p:nvSpPr>
-          <p:cNvPr id="9" name="placeholder RECAP"/>
+          <p:cNvPr id="10" name="placeholder RECAP"/>
           <p:cNvSpPr/>
           <p:nvPr/>
         </p:nvSpPr>
         <p:spPr>
           <a:xfrm>
-            <a:off x="3337560" y="1508760"/>
-            <a:ext cx="2697480" cy="2697480"/>
+            <a:off x="3429000" y="2011680"/>
+            <a:ext cx="2423160" cy="2423160"/>
           </a:xfrm>
           <a:prstGeom prst="roundRect">
             <a:avLst>
@@ -27193,14 +27265,14 @@
       </p:sp>
       <p:sp>
         <p:nvSpPr>
-          <p:cNvPr id="10" name="result RECAP"/>
+          <p:cNvPr id="11" name="result RECAP"/>
           <p:cNvSpPr/>
           <p:nvPr/>
         </p:nvSpPr>
         <p:spPr>
           <a:xfrm>
-            <a:off x="3337560" y="4297680"/>
-            <a:ext cx="2697480" cy="914400"/>
+            <a:off x="3429000" y="4507992"/>
+            <a:ext cx="2423160" cy="731520"/>
           </a:xfrm>
           <a:prstGeom prst="roundRect">
             <a:avLst>
@@ -27234,7 +27306,7 @@
           <a:p>
             <a:pPr algn="ctr"/>
             <a:r>
-              <a:rPr sz="1800" b="1" i="0">
+              <a:rPr sz="1700" b="1" i="0">
                 <a:solidFill>
                   <a:srgbClr val="FFFFFF"/>
                 </a:solidFill>
@@ -27248,7 +27320,7 @@
           <a:p>
             <a:pPr algn="ctr"/>
             <a:r>
-              <a:rPr sz="1200" b="0" i="0">
+              <a:rPr sz="1100" b="0" i="0">
                 <a:solidFill>
                   <a:srgbClr val="FFFFFF"/>
                 </a:solidFill>
@@ -27263,14 +27335,14 @@
       </p:sp>
       <p:sp>
         <p:nvSpPr>
-          <p:cNvPr id="11" name="TextBox 10"/>
+          <p:cNvPr id="12" name="TextBox 11"/>
           <p:cNvSpPr txBox="1"/>
           <p:nvPr/>
         </p:nvSpPr>
         <p:spPr>
           <a:xfrm>
-            <a:off x="3337560" y="5257800"/>
-            <a:ext cx="2697480" cy="320040"/>
+            <a:off x="3429000" y="5266944"/>
+            <a:ext cx="2423160" cy="274320"/>
           </a:xfrm>
           <a:prstGeom prst="rect">
             <a:avLst/>
@@ -27304,14 +27376,14 @@
       </p:sp>
       <p:sp>
         <p:nvSpPr>
-          <p:cNvPr id="12" name="label STEAM"/>
+          <p:cNvPr id="13" name="label STEAM"/>
           <p:cNvSpPr/>
           <p:nvPr/>
         </p:nvSpPr>
         <p:spPr>
           <a:xfrm>
-            <a:off x="6126479" y="960120"/>
-            <a:ext cx="2697480" cy="457200"/>
+            <a:off x="6309359" y="1554480"/>
+            <a:ext cx="2423160" cy="411480"/>
           </a:xfrm>
           <a:prstGeom prst="roundRect">
             <a:avLst>
@@ -27360,14 +27432,14 @@
       </p:sp>
       <p:sp>
         <p:nvSpPr>
-          <p:cNvPr id="13" name="placeholder STEAM"/>
+          <p:cNvPr id="14" name="placeholder STEAM"/>
           <p:cNvSpPr/>
           <p:nvPr/>
         </p:nvSpPr>
         <p:spPr>
           <a:xfrm>
-            <a:off x="6126479" y="1508760"/>
-            <a:ext cx="2697480" cy="2697480"/>
+            <a:off x="6309359" y="2011680"/>
+            <a:ext cx="2423160" cy="2423160"/>
           </a:xfrm>
           <a:prstGeom prst="roundRect">
             <a:avLst>
@@ -27432,14 +27504,14 @@
       </p:sp>
       <p:sp>
         <p:nvSpPr>
-          <p:cNvPr id="14" name="result STEAM"/>
+          <p:cNvPr id="15" name="result STEAM"/>
           <p:cNvSpPr/>
           <p:nvPr/>
         </p:nvSpPr>
         <p:spPr>
           <a:xfrm>
-            <a:off x="6126479" y="4297680"/>
-            <a:ext cx="2697480" cy="914400"/>
+            <a:off x="6309359" y="4507992"/>
+            <a:ext cx="2423160" cy="731520"/>
           </a:xfrm>
           <a:prstGeom prst="roundRect">
             <a:avLst>
@@ -27473,7 +27545,7 @@
           <a:p>
             <a:pPr algn="ctr"/>
             <a:r>
-              <a:rPr sz="1800" b="1" i="0">
+              <a:rPr sz="1700" b="1" i="0">
                 <a:solidFill>
                   <a:srgbClr val="FFFFFF"/>
                 </a:solidFill>
@@ -27487,7 +27559,7 @@
           <a:p>
             <a:pPr algn="ctr"/>
             <a:r>
-              <a:rPr sz="1200" b="0" i="0">
+              <a:rPr sz="1100" b="0" i="0">
                 <a:solidFill>
                   <a:srgbClr val="FFFFFF"/>
                 </a:solidFill>
@@ -27502,14 +27574,14 @@
       </p:sp>
       <p:sp>
         <p:nvSpPr>
-          <p:cNvPr id="15" name="TextBox 14"/>
+          <p:cNvPr id="16" name="TextBox 15"/>
           <p:cNvSpPr txBox="1"/>
           <p:nvPr/>
         </p:nvSpPr>
         <p:spPr>
           <a:xfrm>
-            <a:off x="6126479" y="5257800"/>
-            <a:ext cx="2697480" cy="320040"/>
+            <a:off x="6309359" y="5266944"/>
+            <a:ext cx="2423160" cy="274320"/>
           </a:xfrm>
           <a:prstGeom prst="rect">
             <a:avLst/>
@@ -27543,14 +27615,14 @@
       </p:sp>
       <p:sp>
         <p:nvSpPr>
-          <p:cNvPr id="16" name="label RL Token（最良）"/>
+          <p:cNvPr id="17" name="label RL Token（最良）"/>
           <p:cNvSpPr/>
           <p:nvPr/>
         </p:nvSpPr>
         <p:spPr>
           <a:xfrm>
-            <a:off x="8915399" y="960120"/>
-            <a:ext cx="2697480" cy="457200"/>
+            <a:off x="9189719" y="1554480"/>
+            <a:ext cx="2423160" cy="411480"/>
           </a:xfrm>
           <a:prstGeom prst="roundRect">
             <a:avLst>
@@ -27599,7 +27671,7 @@
       </p:sp>
       <p:pic>
         <p:nvPicPr>
-          <p:cNvPr id="17" name="video RL Token（最良）">
+          <p:cNvPr id="18" name="video RL Token（最良）">
             <a:hlinkClick r:id="" action="ppaction://media"/>
           </p:cNvPr>
           <p:cNvPicPr>
@@ -27622,8 +27694,8 @@
         </p:blipFill>
         <p:spPr>
           <a:xfrm>
-            <a:off x="8915399" y="1508760"/>
-            <a:ext cx="2697480" cy="2697480"/>
+            <a:off x="9189719" y="2011680"/>
+            <a:ext cx="2423160" cy="2423160"/>
           </a:xfrm>
           <a:prstGeom prst="rect">
             <a:avLst/>
@@ -27632,14 +27704,14 @@
       </p:pic>
       <p:sp>
         <p:nvSpPr>
-          <p:cNvPr id="18" name="result RL Token（最良）"/>
+          <p:cNvPr id="19" name="result RL Token（最良）"/>
           <p:cNvSpPr/>
           <p:nvPr/>
         </p:nvSpPr>
         <p:spPr>
           <a:xfrm>
-            <a:off x="8915399" y="4297680"/>
-            <a:ext cx="2697480" cy="914400"/>
+            <a:off x="9189719" y="4507992"/>
+            <a:ext cx="2423160" cy="731520"/>
           </a:xfrm>
           <a:prstGeom prst="roundRect">
             <a:avLst>
@@ -27673,7 +27745,7 @@
           <a:p>
             <a:pPr algn="ctr"/>
             <a:r>
-              <a:rPr sz="1800" b="1" i="0">
+              <a:rPr sz="1700" b="1" i="0">
                 <a:solidFill>
                   <a:srgbClr val="FFFFFF"/>
                 </a:solidFill>
@@ -27687,7 +27759,7 @@
           <a:p>
             <a:pPr algn="ctr"/>
             <a:r>
-              <a:rPr sz="1200" b="0" i="0">
+              <a:rPr sz="1100" b="0" i="0">
                 <a:solidFill>
                   <a:srgbClr val="FFFFFF"/>
                 </a:solidFill>
@@ -27702,14 +27774,14 @@
       </p:sp>
       <p:sp>
         <p:nvSpPr>
-          <p:cNvPr id="19" name="TextBox 18"/>
+          <p:cNvPr id="20" name="TextBox 19"/>
           <p:cNvSpPr txBox="1"/>
           <p:nvPr/>
         </p:nvSpPr>
         <p:spPr>
           <a:xfrm>
-            <a:off x="8915399" y="5257800"/>
-            <a:ext cx="2697480" cy="320040"/>
+            <a:off x="9189719" y="5266944"/>
+            <a:ext cx="2423160" cy="274320"/>
           </a:xfrm>
           <a:prstGeom prst="rect">
             <a:avLst/>
@@ -27743,7 +27815,7 @@
       </p:sp>
       <p:sp>
         <p:nvSpPr>
-          <p:cNvPr id="20" name="TextBox 19"/>
+          <p:cNvPr id="21" name="TextBox 20"/>
           <p:cNvSpPr txBox="1"/>
           <p:nvPr/>
         </p:nvSpPr>
@@ -27784,7 +27856,7 @@
       </p:sp>
       <p:sp>
         <p:nvSpPr>
-          <p:cNvPr id="21" name="key point"/>
+          <p:cNvPr id="22" name="key point"/>
           <p:cNvSpPr/>
           <p:nvPr/>
         </p:nvSpPr>
@@ -27858,7 +27930,7 @@
                   </p:stCondLst>
                 </p:cTn>
                 <p:tgtEl>
-                  <p:spTgt spid="5"/>
+                  <p:spTgt spid="6"/>
                 </p:tgtEl>
               </p:cMediaNode>
             </p:video>
@@ -27870,7 +27942,7 @@
                   </p:stCondLst>
                 </p:cTn>
                 <p:tgtEl>
-                  <p:spTgt spid="17"/>
+                  <p:spTgt spid="18"/>
                 </p:tgtEl>
               </p:cMediaNode>
             </p:video>

--- a/docs/RECAP_STEAM_RLToken.pptx
+++ b/docs/RECAP_STEAM_RLToken.pptx
@@ -2402,7 +2402,7 @@
           <a:lstStyle/>
           <a:p>
             <a:r>
-              <a:t>同じ初期状態 14 での比較。ベースと RL Token の動画は wandb: https://wandb.ai/junhand/libero_RL/runs/w3vkksd0（run 名 demo-init14-base-fail-vs-rlt-success）。RECAP と STEAM は準備中。</a:t>
+              <a:t>同じ初期状態 14 での比較。ベースと RL Token の動画は wandb: https://wandb.ai/junhand/libero_RL/runs/w3vkksd0（run 名 demo-init14-base-fail-vs-rlt-success）。RECAP と STEAM は準備中。RECAP と STEAM の評価では、指示文の後に改行して Advantage: positive の札を付ける。</a:t>
             </a:r>
           </a:p>
         </p:txBody>
@@ -26872,7 +26872,7 @@
         <p:spPr>
           <a:xfrm>
             <a:off x="548640" y="914400"/>
-            <a:ext cx="11064240" cy="566928"/>
+            <a:ext cx="11064240" cy="786384"/>
           </a:xfrm>
           <a:prstGeom prst="roundRect">
             <a:avLst>
@@ -26933,6 +26933,20 @@
               <a:t>（アルファベットスープの缶とトマトソースの、両方をカゴに入れる。Task 0）</a:t>
             </a:r>
           </a:p>
+          <a:p>
+            <a:pPr algn="ctr"/>
+            <a:r>
+              <a:rPr sz="1300" b="1" i="0">
+                <a:solidFill>
+                  <a:srgbClr val="D96B2B"/>
+                </a:solidFill>
+                <a:latin typeface="Yu Gothic"/>
+                <a:ea typeface="Yu Gothic"/>
+                <a:cs typeface="Yu Gothic"/>
+              </a:rPr>
+              <a:t>RECAP・STEAM の評価では、指示文の後に改行して、札 "Advantage: positive" を付ける</a:t>
+            </a:r>
+          </a:p>
         </p:txBody>
       </p:sp>
       <p:sp>
@@ -26943,8 +26957,8 @@
         </p:nvSpPr>
         <p:spPr>
           <a:xfrm>
-            <a:off x="548640" y="1554480"/>
-            <a:ext cx="2423160" cy="411480"/>
+            <a:off x="548640" y="1783080"/>
+            <a:ext cx="2286000" cy="384048"/>
           </a:xfrm>
           <a:prstGeom prst="roundRect">
             <a:avLst>
@@ -26978,7 +26992,7 @@
           <a:p>
             <a:pPr algn="ctr"/>
             <a:r>
-              <a:rPr sz="1500" b="1" i="0">
+              <a:rPr sz="1400" b="1" i="0">
                 <a:solidFill>
                   <a:srgbClr val="FFFFFF"/>
                 </a:solidFill>
@@ -27016,8 +27030,8 @@
         </p:blipFill>
         <p:spPr>
           <a:xfrm>
-            <a:off x="548640" y="2011680"/>
-            <a:ext cx="2423160" cy="2423160"/>
+            <a:off x="548640" y="2212848"/>
+            <a:ext cx="2286000" cy="2286000"/>
           </a:xfrm>
           <a:prstGeom prst="rect">
             <a:avLst/>
@@ -27032,8 +27046,8 @@
         </p:nvSpPr>
         <p:spPr>
           <a:xfrm>
-            <a:off x="548640" y="4507992"/>
-            <a:ext cx="2423160" cy="731520"/>
+            <a:off x="548640" y="4553712"/>
+            <a:ext cx="2286000" cy="658368"/>
           </a:xfrm>
           <a:prstGeom prst="roundRect">
             <a:avLst>
@@ -27067,7 +27081,7 @@
           <a:p>
             <a:pPr algn="ctr"/>
             <a:r>
-              <a:rPr sz="1700" b="1" i="0">
+              <a:rPr sz="1600" b="1" i="0">
                 <a:solidFill>
                   <a:srgbClr val="FFFFFF"/>
                 </a:solidFill>
@@ -27102,8 +27116,8 @@
         </p:nvSpPr>
         <p:spPr>
           <a:xfrm>
-            <a:off x="548640" y="5266944"/>
-            <a:ext cx="2423160" cy="274320"/>
+            <a:off x="365759" y="5230368"/>
+            <a:ext cx="2651760" cy="274320"/>
           </a:xfrm>
           <a:prstGeom prst="rect">
             <a:avLst/>
@@ -27122,7 +27136,7 @@
               </a:spcAft>
             </a:pPr>
             <a:r>
-              <a:rPr sz="1300" b="1" i="0">
+              <a:rPr sz="1200" b="1" i="0">
                 <a:solidFill>
                   <a:srgbClr val="0B66C3"/>
                 </a:solidFill>
@@ -27137,14 +27151,14 @@
       </p:sp>
       <p:sp>
         <p:nvSpPr>
-          <p:cNvPr id="9" name="label RECAP"/>
+          <p:cNvPr id="9" name="label RECAP（札: positive）"/>
           <p:cNvSpPr/>
           <p:nvPr/>
         </p:nvSpPr>
         <p:spPr>
           <a:xfrm>
-            <a:off x="3429000" y="1554480"/>
-            <a:ext cx="2423160" cy="411480"/>
+            <a:off x="3474720" y="1783080"/>
+            <a:ext cx="2286000" cy="384048"/>
           </a:xfrm>
           <a:prstGeom prst="roundRect">
             <a:avLst>
@@ -27178,7 +27192,7 @@
           <a:p>
             <a:pPr algn="ctr"/>
             <a:r>
-              <a:rPr sz="1500" b="1" i="0">
+              <a:rPr sz="1400" b="1" i="0">
                 <a:solidFill>
                   <a:srgbClr val="FFFFFF"/>
                 </a:solidFill>
@@ -27186,21 +27200,21 @@
                 <a:ea typeface="Yu Gothic"/>
                 <a:cs typeface="Yu Gothic"/>
               </a:rPr>
-              <a:t>RECAP</a:t>
-            </a:r>
-          </a:p>
-        </p:txBody>
-      </p:sp>
-      <p:sp>
-        <p:nvSpPr>
-          <p:cNvPr id="10" name="placeholder RECAP"/>
+              <a:t>RECAP（札: positive）</a:t>
+            </a:r>
+          </a:p>
+        </p:txBody>
+      </p:sp>
+      <p:sp>
+        <p:nvSpPr>
+          <p:cNvPr id="10" name="placeholder RECAP（札: positive）"/>
           <p:cNvSpPr/>
           <p:nvPr/>
         </p:nvSpPr>
         <p:spPr>
           <a:xfrm>
-            <a:off x="3429000" y="2011680"/>
-            <a:ext cx="2423160" cy="2423160"/>
+            <a:off x="3474720" y="2212848"/>
+            <a:ext cx="2286000" cy="2286000"/>
           </a:xfrm>
           <a:prstGeom prst="roundRect">
             <a:avLst>
@@ -27265,14 +27279,14 @@
       </p:sp>
       <p:sp>
         <p:nvSpPr>
-          <p:cNvPr id="11" name="result RECAP"/>
+          <p:cNvPr id="11" name="result RECAP（札: positive）"/>
           <p:cNvSpPr/>
           <p:nvPr/>
         </p:nvSpPr>
         <p:spPr>
           <a:xfrm>
-            <a:off x="3429000" y="4507992"/>
-            <a:ext cx="2423160" cy="731520"/>
+            <a:off x="3474720" y="4553712"/>
+            <a:ext cx="2286000" cy="658368"/>
           </a:xfrm>
           <a:prstGeom prst="roundRect">
             <a:avLst>
@@ -27306,7 +27320,7 @@
           <a:p>
             <a:pPr algn="ctr"/>
             <a:r>
-              <a:rPr sz="1700" b="1" i="0">
+              <a:rPr sz="1600" b="1" i="0">
                 <a:solidFill>
                   <a:srgbClr val="FFFFFF"/>
                 </a:solidFill>
@@ -27328,7 +27342,7 @@
                 <a:ea typeface="Yu Gothic"/>
                 <a:cs typeface="Yu Gothic"/>
               </a:rPr>
-              <a:t>動画は準備中です</a:t>
+              <a:t>指示文 + 札 "Advantage: positive"</a:t>
             </a:r>
           </a:p>
         </p:txBody>
@@ -27341,8 +27355,8 @@
         </p:nvSpPr>
         <p:spPr>
           <a:xfrm>
-            <a:off x="3429000" y="5266944"/>
-            <a:ext cx="2423160" cy="274320"/>
+            <a:off x="3291840" y="5230368"/>
+            <a:ext cx="2651760" cy="274320"/>
           </a:xfrm>
           <a:prstGeom prst="rect">
             <a:avLst/>
@@ -27361,7 +27375,7 @@
               </a:spcAft>
             </a:pPr>
             <a:r>
-              <a:rPr sz="1300" b="1" i="0">
+              <a:rPr sz="1200" b="1" i="0">
                 <a:solidFill>
                   <a:srgbClr val="0B66C3"/>
                 </a:solidFill>
@@ -27369,21 +27383,21 @@
                 <a:ea typeface="Yu Gothic"/>
                 <a:cs typeface="Yu Gothic"/>
               </a:rPr>
-              <a:t>success_once 0.50</a:t>
-            </a:r>
-          </a:p>
-        </p:txBody>
-      </p:sp>
-      <p:sp>
-        <p:nvSpPr>
-          <p:cNvPr id="13" name="label STEAM"/>
+              <a:t>札あり 0.48 ／ 札なし 0.50</a:t>
+            </a:r>
+          </a:p>
+        </p:txBody>
+      </p:sp>
+      <p:sp>
+        <p:nvSpPr>
+          <p:cNvPr id="13" name="label STEAM（札: positive）"/>
           <p:cNvSpPr/>
           <p:nvPr/>
         </p:nvSpPr>
         <p:spPr>
           <a:xfrm>
-            <a:off x="6309359" y="1554480"/>
-            <a:ext cx="2423160" cy="411480"/>
+            <a:off x="6400800" y="1783080"/>
+            <a:ext cx="2286000" cy="384048"/>
           </a:xfrm>
           <a:prstGeom prst="roundRect">
             <a:avLst>
@@ -27417,7 +27431,7 @@
           <a:p>
             <a:pPr algn="ctr"/>
             <a:r>
-              <a:rPr sz="1500" b="1" i="0">
+              <a:rPr sz="1400" b="1" i="0">
                 <a:solidFill>
                   <a:srgbClr val="FFFFFF"/>
                 </a:solidFill>
@@ -27425,21 +27439,21 @@
                 <a:ea typeface="Yu Gothic"/>
                 <a:cs typeface="Yu Gothic"/>
               </a:rPr>
-              <a:t>STEAM</a:t>
-            </a:r>
-          </a:p>
-        </p:txBody>
-      </p:sp>
-      <p:sp>
-        <p:nvSpPr>
-          <p:cNvPr id="14" name="placeholder STEAM"/>
+              <a:t>STEAM（札: positive）</a:t>
+            </a:r>
+          </a:p>
+        </p:txBody>
+      </p:sp>
+      <p:sp>
+        <p:nvSpPr>
+          <p:cNvPr id="14" name="placeholder STEAM（札: positive）"/>
           <p:cNvSpPr/>
           <p:nvPr/>
         </p:nvSpPr>
         <p:spPr>
           <a:xfrm>
-            <a:off x="6309359" y="2011680"/>
-            <a:ext cx="2423160" cy="2423160"/>
+            <a:off x="6400800" y="2212848"/>
+            <a:ext cx="2286000" cy="2286000"/>
           </a:xfrm>
           <a:prstGeom prst="roundRect">
             <a:avLst>
@@ -27504,14 +27518,14 @@
       </p:sp>
       <p:sp>
         <p:nvSpPr>
-          <p:cNvPr id="15" name="result STEAM"/>
+          <p:cNvPr id="15" name="result STEAM（札: positive）"/>
           <p:cNvSpPr/>
           <p:nvPr/>
         </p:nvSpPr>
         <p:spPr>
           <a:xfrm>
-            <a:off x="6309359" y="4507992"/>
-            <a:ext cx="2423160" cy="731520"/>
+            <a:off x="6400800" y="4553712"/>
+            <a:ext cx="2286000" cy="658368"/>
           </a:xfrm>
           <a:prstGeom prst="roundRect">
             <a:avLst>
@@ -27545,7 +27559,7 @@
           <a:p>
             <a:pPr algn="ctr"/>
             <a:r>
-              <a:rPr sz="1700" b="1" i="0">
+              <a:rPr sz="1600" b="1" i="0">
                 <a:solidFill>
                   <a:srgbClr val="FFFFFF"/>
                 </a:solidFill>
@@ -27567,7 +27581,7 @@
                 <a:ea typeface="Yu Gothic"/>
                 <a:cs typeface="Yu Gothic"/>
               </a:rPr>
-              <a:t>動画は準備中です</a:t>
+              <a:t>指示文 + 札 "Advantage: positive"</a:t>
             </a:r>
           </a:p>
         </p:txBody>
@@ -27580,8 +27594,8 @@
         </p:nvSpPr>
         <p:spPr>
           <a:xfrm>
-            <a:off x="6309359" y="5266944"/>
-            <a:ext cx="2423160" cy="274320"/>
+            <a:off x="6217920" y="5230368"/>
+            <a:ext cx="2651760" cy="274320"/>
           </a:xfrm>
           <a:prstGeom prst="rect">
             <a:avLst/>
@@ -27600,7 +27614,7 @@
               </a:spcAft>
             </a:pPr>
             <a:r>
-              <a:rPr sz="1300" b="1" i="0">
+              <a:rPr sz="1200" b="1" i="0">
                 <a:solidFill>
                   <a:srgbClr val="0B66C3"/>
                 </a:solidFill>
@@ -27608,7 +27622,7 @@
                 <a:ea typeface="Yu Gothic"/>
                 <a:cs typeface="Yu Gothic"/>
               </a:rPr>
-              <a:t>success_once 0.52</a:t>
+              <a:t>札あり 0.42 ／ 札なし 0.52</a:t>
             </a:r>
           </a:p>
         </p:txBody>
@@ -27621,8 +27635,8 @@
         </p:nvSpPr>
         <p:spPr>
           <a:xfrm>
-            <a:off x="9189719" y="1554480"/>
-            <a:ext cx="2423160" cy="411480"/>
+            <a:off x="9326880" y="1783080"/>
+            <a:ext cx="2286000" cy="384048"/>
           </a:xfrm>
           <a:prstGeom prst="roundRect">
             <a:avLst>
@@ -27656,7 +27670,7 @@
           <a:p>
             <a:pPr algn="ctr"/>
             <a:r>
-              <a:rPr sz="1500" b="1" i="0">
+              <a:rPr sz="1400" b="1" i="0">
                 <a:solidFill>
                   <a:srgbClr val="FFFFFF"/>
                 </a:solidFill>
@@ -27694,8 +27708,8 @@
         </p:blipFill>
         <p:spPr>
           <a:xfrm>
-            <a:off x="9189719" y="2011680"/>
-            <a:ext cx="2423160" cy="2423160"/>
+            <a:off x="9326880" y="2212848"/>
+            <a:ext cx="2286000" cy="2286000"/>
           </a:xfrm>
           <a:prstGeom prst="rect">
             <a:avLst/>
@@ -27710,8 +27724,8 @@
         </p:nvSpPr>
         <p:spPr>
           <a:xfrm>
-            <a:off x="9189719" y="4507992"/>
-            <a:ext cx="2423160" cy="731520"/>
+            <a:off x="9326880" y="4553712"/>
+            <a:ext cx="2286000" cy="658368"/>
           </a:xfrm>
           <a:prstGeom prst="roundRect">
             <a:avLst>
@@ -27745,7 +27759,7 @@
           <a:p>
             <a:pPr algn="ctr"/>
             <a:r>
-              <a:rPr sz="1700" b="1" i="0">
+              <a:rPr sz="1600" b="1" i="0">
                 <a:solidFill>
                   <a:srgbClr val="FFFFFF"/>
                 </a:solidFill>
@@ -27780,8 +27794,8 @@
         </p:nvSpPr>
         <p:spPr>
           <a:xfrm>
-            <a:off x="9189719" y="5266944"/>
-            <a:ext cx="2423160" cy="274320"/>
+            <a:off x="9144000" y="5230368"/>
+            <a:ext cx="2651760" cy="274320"/>
           </a:xfrm>
           <a:prstGeom prst="rect">
             <a:avLst/>
@@ -27800,7 +27814,7 @@
               </a:spcAft>
             </a:pPr>
             <a:r>
-              <a:rPr sz="1300" b="1" i="0">
+              <a:rPr sz="1200" b="1" i="0">
                 <a:solidFill>
                   <a:srgbClr val="0B66C3"/>
                 </a:solidFill>
@@ -27821,7 +27835,7 @@
         </p:nvSpPr>
         <p:spPr>
           <a:xfrm>
-            <a:off x="548640" y="5532120"/>
+            <a:off x="548640" y="5513832"/>
             <a:ext cx="11064240" cy="274320"/>
           </a:xfrm>
           <a:prstGeom prst="rect">
@@ -27849,7 +27863,7 @@
                 <a:ea typeface="Yu Gothic"/>
                 <a:cs typeface="Yu Gothic"/>
               </a:rPr>
-              <a:t>2 環境のうち左側を切り出し、512 × 512 に拡大。クリックで再生（約 52 秒、520 ステップ）。success_once は 50 エピソードの値</a:t>
+              <a:t>2 環境の左側を 512 × 512 に拡大。クリックで再生（約 52 秒）。success_once は 50 エピソードの値。札なしは最良値</a:t>
             </a:r>
           </a:p>
         </p:txBody>

--- a/docs/RECAP_STEAM_RLToken.pptx
+++ b/docs/RECAP_STEAM_RLToken.pptx
@@ -1352,7 +1352,7 @@
           <a:lstStyle/>
           <a:p>
             <a:r>
-              <a:t>Step1〜4 と評価（Step9）。名称は私たちのパイプラインの番号。</a:t>
+              <a:t>Step1〜4 と評価（Step5）。名称は私たちのパイプラインの番号。</a:t>
             </a:r>
           </a:p>
         </p:txBody>
@@ -1842,7 +1842,7 @@
           <a:lstStyle/>
           <a:p>
             <a:r>
-              <a:t>Step1〜4 と評価（Step9）。RECAP の実装スライドと同じ形式。Step 名は私たちのパイプラインの番号。</a:t>
+              <a:t>Step1〜4 と評価（Step5）。RECAP の実装スライドと同じ形式。Step 名は私たちのパイプラインの番号。</a:t>
             </a:r>
           </a:p>
         </p:txBody>
@@ -2262,7 +2262,7 @@
           <a:lstStyle/>
           <a:p>
             <a:r>
-              <a:t>Step1〜4 と評価（Step9）。RECAP・STEAM の実装スライドと同じ形式。Step 名は私たちのパイプラインの番号。</a:t>
+              <a:t>Step1〜4 と評価（Step5）。RECAP・STEAM の実装スライドと同じ形式。Step 名は私たちのパイプラインの番号。</a:t>
             </a:r>
           </a:p>
         </p:txBody>
@@ -12292,7 +12292,7 @@
                 <a:ea typeface="Yu Gothic"/>
                 <a:cs typeface="Yu Gothic"/>
               </a:rPr>
-              <a:t>Step9</a:t>
+              <a:t>Step5</a:t>
             </a:r>
           </a:p>
           <a:p>
@@ -12534,7 +12534,7 @@
                 <a:ea typeface="Yu Gothic"/>
                 <a:cs typeface="Yu Gothic"/>
               </a:rPr>
-              <a:t>: プロンプトに "Advantage: positive" を付けて SFT（ドロップアウト 0.1）。評価も positive プロンプトで行う（</a:t>
+              <a:t>: プロンプトに "Advantage: positive" を付けて SFT（ドロップアウト 0.1）。評価では、札あり・札なしの両方を試した（</a:t>
             </a:r>
             <a:r>
               <a:rPr sz="1700" b="1" i="0">
@@ -12575,7 +12575,7 @@
                 <a:ea typeface="Yu Gothic"/>
                 <a:cs typeface="Yu Gothic"/>
               </a:rPr>
-              <a:t>状況</a:t>
+              <a:t>Step5</a:t>
             </a:r>
             <a:r>
               <a:rPr sz="1700" b="0" i="0">
@@ -12586,7 +12586,29 @@
                 <a:ea typeface="Yu Gothic"/>
                 <a:cs typeface="Yu Gothic"/>
               </a:rPr>
-              <a:t>: Step4 は途中段階（2,000 step 前後。計画は 30,000 step）。step 2,000 の評価は 0.44〜0.50（環境数・乱数・プロンプトで変動）</a:t>
+              <a:t>: success_once は </a:t>
+            </a:r>
+            <a:r>
+              <a:rPr sz="1700" b="1" i="0">
+                <a:solidFill>
+                  <a:srgbClr val="1A1A1A"/>
+                </a:solidFill>
+                <a:latin typeface="Yu Gothic"/>
+                <a:ea typeface="Yu Gothic"/>
+                <a:cs typeface="Yu Gothic"/>
+              </a:rPr>
+              <a:t>0.50</a:t>
+            </a:r>
+            <a:r>
+              <a:rPr sz="1700" b="0" i="0">
+                <a:solidFill>
+                  <a:srgbClr val="1A1A1A"/>
+                </a:solidFill>
+                <a:latin typeface="Yu Gothic"/>
+                <a:ea typeface="Yu Gothic"/>
+                <a:cs typeface="Yu Gothic"/>
+              </a:rPr>
+              <a:t>（最良、プロンプトなし。ベース 0.40）。プロンプトありは 0.48。Step4 は途中段階（2,000 step 前後、計画は 30,000 step）で、評価は 0.44〜0.50 の範囲で変動</a:t>
             </a:r>
           </a:p>
         </p:txBody>
@@ -18888,7 +18910,7 @@
                 <a:ea typeface="Yu Gothic"/>
                 <a:cs typeface="Yu Gothic"/>
               </a:rPr>
-              <a:t>Step9</a:t>
+              <a:t>Step5</a:t>
             </a:r>
           </a:p>
           <a:p>
@@ -19149,7 +19171,7 @@
                 <a:ea typeface="Yu Gothic"/>
                 <a:cs typeface="Yu Gothic"/>
               </a:rPr>
-              <a:t>Step9</a:t>
+              <a:t>Step5</a:t>
             </a:r>
             <a:r>
               <a:rPr sz="1600" b="0" i="0">
@@ -25412,7 +25434,7 @@
                 <a:ea typeface="Yu Gothic"/>
                 <a:cs typeface="Yu Gothic"/>
               </a:rPr>
-              <a:t>Step9</a:t>
+              <a:t>Step5</a:t>
             </a:r>
           </a:p>
           <a:p>
@@ -25676,7 +25698,7 @@
                 <a:ea typeface="Yu Gothic"/>
                 <a:cs typeface="Yu Gothic"/>
               </a:rPr>
-              <a:t>Step9</a:t>
+              <a:t>Step5</a:t>
             </a:r>
             <a:r>
               <a:rPr sz="1600" b="0" i="0">

--- a/docs/RECAP_STEAM_RLToken.pptx
+++ b/docs/RECAP_STEAM_RLToken.pptx
@@ -1352,7 +1352,7 @@
           <a:lstStyle/>
           <a:p>
             <a:r>
-              <a:t>Step1〜4 と評価（Step5）。名称は私たちのパイプラインの番号。</a:t>
+              <a:t>Step1〜4 と評価（Step5）。名称は私たちのパイプラインの番号。【発表者向け】0.50 は、advantage プロンプトなしで評価した最良値。プロンプトあり（Advantage: positive）では 0.48。Step4 は途中段階（2,000 step）。</a:t>
             </a:r>
           </a:p>
         </p:txBody>
@@ -1842,7 +1842,7 @@
           <a:lstStyle/>
           <a:p>
             <a:r>
-              <a:t>Step1〜4 と評価（Step5）。RECAP の実装スライドと同じ形式。Step 名は私たちのパイプラインの番号。</a:t>
+              <a:t>Step1〜4 と評価（Step5）。RECAP の実装スライドと同じ形式。Step 名は私たちのパイプラインの番号。【発表者向け】0.52 は、最初の 1,000 step は札付き SFT、続く 450 step は positive のフレームだけで学習したモデルを、advantage プロンプトなしで評価した値。札付き SFT（プロンプトあり）の評価は 0.42、両側タグ（negative にも札を付ける）は 0.36。</a:t>
             </a:r>
           </a:p>
         </p:txBody>
@@ -2332,7 +2332,7 @@
           <a:lstStyle/>
           <a:p>
             <a:r>
-              <a:t>π₀.₅ は RLinf のチュートリアルの値。smolVLA は私たちの実験（各 50 エピソード）。</a:t>
+              <a:t>π₀.₅ は RLinf のチュートリアルの値。smolVLA は私たちの実験（各 50 エピソード）。【発表者向け】RECAP 0.50 と STEAM 0.52 は、advantage プロンプトなしで評価した最良値。プロンプトあり（Advantage: positive）では RECAP 0.48、STEAM 0.42。</a:t>
             </a:r>
           </a:p>
         </p:txBody>
@@ -2402,7 +2402,7 @@
           <a:lstStyle/>
           <a:p>
             <a:r>
-              <a:t>同じ初期状態 14 での比較。ベースと RL Token の動画は wandb: https://wandb.ai/junhand/libero_RL/runs/w3vkksd0（run 名 demo-init14-base-fail-vs-rlt-success）。RECAP と STEAM は準備中。RECAP と STEAM の評価では、指示文の後に改行して Advantage: positive の札を付ける。</a:t>
+              <a:t>同じ初期状態 14 での比較。ベースと RL Token の動画は wandb: https://wandb.ai/junhand/libero_RL/runs/w3vkksd0（run 名 demo-init14-base-fail-vs-rlt-success）。RECAP と STEAM は準備中。RECAP と STEAM の評価では、指示文の後に改行して Advantage: positive の札を付ける。【発表者向け】RECAP の 0.50 と STEAM の 0.52 は、advantage プロンプトなしで評価した最良値（プロンプトありは RECAP 0.48、STEAM 0.42）。</a:t>
             </a:r>
           </a:p>
         </p:txBody>
@@ -12534,7 +12534,7 @@
                 <a:ea typeface="Yu Gothic"/>
                 <a:cs typeface="Yu Gothic"/>
               </a:rPr>
-              <a:t>: プロンプトに "Advantage: positive" を付けて SFT（ドロップアウト 0.1）。評価では、札あり・札なしの両方を試した（</a:t>
+              <a:t>: プロンプトに "Advantage: positive" を付けて SFT（ドロップアウト 0.1）。評価も positive プロンプトで行う（</a:t>
             </a:r>
             <a:r>
               <a:rPr sz="1700" b="1" i="0">
@@ -12608,7 +12608,7 @@
                 <a:ea typeface="Yu Gothic"/>
                 <a:cs typeface="Yu Gothic"/>
               </a:rPr>
-              <a:t>（最良、プロンプトなし。ベース 0.40）。プロンプトありは 0.48。Step4 は途中段階（2,000 step 前後、計画は 30,000 step）で、評価は 0.44〜0.50 の範囲で変動</a:t>
+              <a:t>（最良。ベース 0.40）。Step4 は途中段階（2,000 step 前後、計画は 30,000 step）で、評価は 0.44〜0.50 の範囲で変動</a:t>
             </a:r>
           </a:p>
         </p:txBody>
@@ -19130,7 +19130,7 @@
                 <a:ea typeface="Yu Gothic"/>
                 <a:cs typeface="Yu Gothic"/>
               </a:rPr>
-              <a:t>: 札付き SFT で 1,000 step、続けて positive のフレームだけで 450 step（プロンプトなし）（</a:t>
+              <a:t>: 札付き SFT で 1,000 step、続けて positive のフレームだけで 450 step（</a:t>
             </a:r>
             <a:r>
               <a:rPr sz="1600" b="1" i="0">
@@ -19204,7 +19204,7 @@
                 <a:ea typeface="Yu Gothic"/>
                 <a:cs typeface="Yu Gothic"/>
               </a:rPr>
-              <a:t>（最良。ベース 0.40）。札付き SFT（プロンプトあり）は 0.42、両側タグは 0.36</a:t>
+              <a:t>（最良。ベース 0.40）</a:t>
             </a:r>
           </a:p>
         </p:txBody>
@@ -26690,7 +26690,7 @@
                 <a:ea typeface="Yu Gothic"/>
                 <a:cs typeface="Yu Gothic"/>
               </a:rPr>
-              <a:t>smolVLA: 各 50 エピソード（標準誤差 ±0.07）。RECAP・STEAM は、Step4 の途中の checkpoint の最良値。どちらも advantage プロンプトなしの評価（STEAM は、正例のみで学習した step 1,450）。プロンプトありは、RECAP 0.48、STEAM 0.42</a:t>
+              <a:t>smolVLA: 各 50 エピソード（標準誤差 ±0.07）。RECAP・STEAM は、Step4 の途中の checkpoint の最良値。評価条件の詳細は、口頭で補足</a:t>
             </a:r>
           </a:p>
           <a:p>
@@ -27405,7 +27405,7 @@
                 <a:ea typeface="Yu Gothic"/>
                 <a:cs typeface="Yu Gothic"/>
               </a:rPr>
-              <a:t>札あり 0.48 ／ 札なし 0.50</a:t>
+              <a:t>success_once 0.50</a:t>
             </a:r>
           </a:p>
         </p:txBody>
@@ -27644,7 +27644,7 @@
                 <a:ea typeface="Yu Gothic"/>
                 <a:cs typeface="Yu Gothic"/>
               </a:rPr>
-              <a:t>札あり 0.42 ／ 札なし 0.52</a:t>
+              <a:t>success_once 0.52</a:t>
             </a:r>
           </a:p>
         </p:txBody>
@@ -27885,7 +27885,7 @@
                 <a:ea typeface="Yu Gothic"/>
                 <a:cs typeface="Yu Gothic"/>
               </a:rPr>
-              <a:t>2 環境の左側を 512 × 512 に拡大。クリックで再生（約 52 秒）。success_once は 50 エピソードの値。札なしは最良値</a:t>
+              <a:t>2 環境の左側を 512 × 512 に拡大。クリックで再生（約 52 秒）。success_once は 50 エピソードの値</a:t>
             </a:r>
           </a:p>
         </p:txBody>

--- a/docs/RECAP_STEAM_RLToken.pptx
+++ b/docs/RECAP_STEAM_RLToken.pptx
@@ -494,7 +494,7 @@
                   <c:v>52.0</c:v>
                 </c:pt>
                 <c:pt idx="5">
-                  <c:v>68.0</c:v>
+                  <c:v>74.0</c:v>
                 </c:pt>
               </c:numCache>
             </c:numRef>
@@ -2402,7 +2402,7 @@
           <a:lstStyle/>
           <a:p>
             <a:r>
-              <a:t>同じ初期状態 14 での比較。ベースと RL Token の動画は wandb: https://wandb.ai/junhand/libero_RL/runs/w3vkksd0（run 名 demo-init14-base-fail-vs-rlt-success）。RECAP と STEAM は準備中。RECAP と STEAM の評価では、指示文の後に改行して Advantage: positive の札を付ける。【発表者向け】RECAP の 0.50 と STEAM の 0.52 は、advantage プロンプトなしで評価した最良値（プロンプトありは RECAP 0.48、STEAM 0.42）。</a:t>
+              <a:t>同じ初期状態 14 での比較。ベースと RL Token の動画は wandb: https://wandb.ai/junhand/libero_RL/runs/w3vkksd0（run 名 demo-init14-base-fail-vs-rlt-success）。RL Token の動画は H（1 つ目は G の actor、2 つ目は専用 actor）。RECAP と STEAM は準備中。RECAP と STEAM の評価では、指示文の後に改行して Advantage: positive の札を付ける。【発表者向け】RECAP の 0.50 と STEAM の 0.52 は、advantage プロンプトなしで評価した最良値（プロンプトありは RECAP 0.48、STEAM 0.42）。</a:t>
             </a:r>
           </a:p>
         </p:txBody>
@@ -2472,7 +2472,7 @@
           <a:lstStyle/>
           <a:p>
             <a:r>
-              <a:t>実測値（TensorBoard と実行ログ）。GPU は、ログに名前が残っているものだけを記載。</a:t>
+              <a:t>実測値（TensorBoard と実行ログ）。GPU は、RECAP が RTX 6000 Ada、それ以外が RTX A5000。</a:t>
             </a:r>
           </a:p>
         </p:txBody>
@@ -12504,7 +12504,7 @@
                 <a:ea typeface="Yu Gothic"/>
                 <a:cs typeface="Yu Gothic"/>
               </a:rPr>
-              <a:t>）</a:t>
+              <a:t>、RTX 6000 Ada 48GB）</a:t>
             </a:r>
           </a:p>
           <a:p>
@@ -18209,7 +18209,7 @@
                 <a:ea typeface="Yu Gothic"/>
                 <a:cs typeface="Yu Gothic"/>
               </a:rPr>
-              <a:t>RL Token が 0.68</a:t>
+              <a:t>RL Token が 0.74</a:t>
             </a:r>
             <a:r>
               <a:rPr sz="1500" b="0" i="0">
@@ -25564,7 +25564,7 @@
                 <a:ea typeface="Yu Gothic"/>
                 <a:cs typeface="Yu Gothic"/>
               </a:rPr>
-              <a:t>6,000 step、約 25 分</a:t>
+              <a:t>6,000 step、バッチ 64、約 25 分</a:t>
             </a:r>
             <a:r>
               <a:rPr sz="1600" b="0" i="0">
@@ -25575,7 +25575,7 @@
                 <a:ea typeface="Yu Gothic"/>
                 <a:cs typeface="Yu Gothic"/>
               </a:rPr>
-              <a:t>）。再構成の val MSE は 0.073（平均を出す基準は 0.269）</a:t>
+              <a:t>、RTX A5000）。再構成の val MSE は 0.073（平均を出す基準は 0.269）</a:t>
             </a:r>
           </a:p>
           <a:p>
@@ -25616,7 +25616,7 @@
                 <a:ea typeface="Yu Gothic"/>
                 <a:cs typeface="Yu Gothic"/>
               </a:rPr>
-              <a:t>750 エポック、約 8.2 時間</a:t>
+              <a:t>750 エポック、バッチ 512、約 8.2 時間</a:t>
             </a:r>
             <a:r>
               <a:rPr sz="1600" b="0" i="0">
@@ -25657,7 +25657,7 @@
                 <a:ea typeface="Yu Gothic"/>
                 <a:cs typeface="Yu Gothic"/>
               </a:rPr>
-              <a:t>: 残る失敗は 2 つ目の把持が最大 → 2 つ目専用の actor を、空振り（何も挟まずに閉じる）への罰 −0.2 つきで学習（1 つ目は Step3 の actor を固定。</a:t>
+              <a:t>: 残る失敗は 2 つ目の把持が最大 → 2 つ目専用の actor を、初期値なしで学習（1 つ目は Step3 の actor を固定。</a:t>
             </a:r>
             <a:r>
               <a:rPr sz="1600" b="1" i="0">
@@ -25668,7 +25668,7 @@
                 <a:ea typeface="Yu Gothic"/>
                 <a:cs typeface="Yu Gothic"/>
               </a:rPr>
-              <a:t>400 エポック、5.4 時間</a:t>
+              <a:t>400 エポック、バッチ 512、約 5.5 時間</a:t>
             </a:r>
             <a:r>
               <a:rPr sz="1600" b="0" i="0">
@@ -25679,7 +25679,7 @@
                 <a:ea typeface="Yu Gothic"/>
                 <a:cs typeface="Yu Gothic"/>
               </a:rPr>
-              <a:t>、RTX A5000）</a:t>
+              <a:t>、RTX A5000）。空振りへの罰 −0.2 を加えると 0.68 で、効果は確認できなかった</a:t>
             </a:r>
           </a:p>
           <a:p>
@@ -25720,7 +25720,7 @@
                 <a:ea typeface="Yu Gothic"/>
                 <a:cs typeface="Yu Gothic"/>
               </a:rPr>
-              <a:t>0.68</a:t>
+              <a:t>0.74</a:t>
             </a:r>
             <a:r>
               <a:rPr sz="1600" b="0" i="0">
@@ -25731,7 +25731,7 @@
                 <a:ea typeface="Yu Gothic"/>
                 <a:cs typeface="Yu Gothic"/>
               </a:rPr>
-              <a:t>（最良。VLA のみ 0.46、1 つ目だけ RL 0.62、2 局面 0.66）。2 つ目を VLA に任せると 0.60。actor の重みは約 5 MB</a:t>
+              <a:t>（最良。3 つの評価シードの平均は 0.71）。VLA のみ 0.46、1 つ目だけ RL 0.62、2 つ目を VLA に任せる 0.68。actor の重みは約 5 MB</a:t>
             </a:r>
           </a:p>
         </p:txBody>
@@ -25789,7 +25789,7 @@
                 <a:ea typeface="Yu Gothic"/>
                 <a:cs typeface="Yu Gothic"/>
               </a:rPr>
-              <a:t>→ 凍結した VLA の上の小さな actor-critic だけで、success_once が 0.46 → 0.68 に向上した</a:t>
+              <a:t>→ 凍結した VLA の上の小さな actor-critic だけで、success_once が 0.46 → 0.74 に向上した</a:t>
             </a:r>
           </a:p>
         </p:txBody>
@@ -26595,7 +26595,7 @@
                           <a:ea typeface="Yu Gothic"/>
                           <a:cs typeface="Yu Gothic"/>
                         </a:rPr>
-                        <a:t>68.0%</a:t>
+                        <a:t>74.0%</a:t>
                       </a:r>
                     </a:p>
                   </a:txBody>
@@ -26620,7 +26620,7 @@
                           <a:ea typeface="Yu Gothic"/>
                           <a:cs typeface="Yu Gothic"/>
                         </a:rPr>
-                        <a:t>+28.0 pt</a:t>
+                        <a:t>+34.0 pt</a:t>
                       </a:r>
                     </a:p>
                   </a:txBody>
@@ -26767,7 +26767,7 @@
                 <a:ea typeface="Yu Gothic"/>
                 <a:cs typeface="Yu Gothic"/>
               </a:rPr>
-              <a:t>→ smolVLA では RL Token が最良（40% → 68%）。RECAP・STEAM は途中段階で、差は有意とは言えない</a:t>
+              <a:t>→ smolVLA では RL Token が最良（40% → 74%）。RECAP・STEAM は途中段階で、差は有意とは言えない</a:t>
             </a:r>
           </a:p>
         </p:txBody>
@@ -27844,7 +27844,7 @@
                 <a:ea typeface="Yu Gothic"/>
                 <a:cs typeface="Yu Gothic"/>
               </a:rPr>
-              <a:t>success_once 0.68</a:t>
+              <a:t>success_once 0.74</a:t>
             </a:r>
           </a:p>
         </p:txBody>
@@ -28115,11 +28115,11 @@
               </a:tblPr>
               <a:tblGrid>
                 <a:gridCol w="914400"/>
-                <a:gridCol w="2148840"/>
-                <a:gridCol w="2606040"/>
+                <a:gridCol w="2103120"/>
+                <a:gridCol w="2377440"/>
                 <a:gridCol w="731520"/>
-                <a:gridCol w="2468880"/>
-                <a:gridCol w="2194560"/>
+                <a:gridCol w="2926080"/>
+                <a:gridCol w="2011680"/>
               </a:tblGrid>
               <a:tr h="384048">
                 <a:tc>
@@ -28551,7 +28551,7 @@
                           <a:ea typeface="Yu Gothic"/>
                           <a:cs typeface="Yu Gothic"/>
                         </a:rPr>
-                        <a:t>記録なし</a:t>
+                        <a:t>RTX 6000 Ada（48GB）</a:t>
                       </a:r>
                     </a:p>
                   </a:txBody>
@@ -29238,7 +29238,7 @@
                           <a:ea typeface="Yu Gothic"/>
                           <a:cs typeface="Yu Gothic"/>
                         </a:rPr>
-                        <a:t>—</a:t>
+                        <a:t>64</a:t>
                       </a:r>
                     </a:p>
                   </a:txBody>
@@ -29286,7 +29286,7 @@
                           <a:ea typeface="Yu Gothic"/>
                           <a:cs typeface="Yu Gothic"/>
                         </a:rPr>
-                        <a:t>記録なし</a:t>
+                        <a:t>RTX A5000（24GB）</a:t>
                       </a:r>
                     </a:p>
                   </a:txBody>
@@ -29385,7 +29385,7 @@
                           <a:ea typeface="Yu Gothic"/>
                           <a:cs typeface="Yu Gothic"/>
                         </a:rPr>
-                        <a:t>—</a:t>
+                        <a:t>512</a:t>
                       </a:r>
                     </a:p>
                   </a:txBody>
@@ -29507,7 +29507,7 @@
                           <a:ea typeface="Yu Gothic"/>
                           <a:cs typeface="Yu Gothic"/>
                         </a:rPr>
-                        <a:t>400 エポック（更新 約 7.2 万回）</a:t>
+                        <a:t>400 エポック</a:t>
                       </a:r>
                     </a:p>
                   </a:txBody>
@@ -29532,7 +29532,7 @@
                           <a:ea typeface="Yu Gothic"/>
                           <a:cs typeface="Yu Gothic"/>
                         </a:rPr>
-                        <a:t>—</a:t>
+                        <a:t>512</a:t>
                       </a:r>
                     </a:p>
                   </a:txBody>
@@ -29556,7 +29556,7 @@
                           <a:ea typeface="Yu Gothic"/>
                           <a:cs typeface="Yu Gothic"/>
                         </a:rPr>
-                        <a:t>5.4 時間（約 49 秒/エポック）</a:t>
+                        <a:t>約 5.5 時間（約 49 秒/エポック）</a:t>
                       </a:r>
                     </a:p>
                   </a:txBody>
@@ -29631,7 +29631,7 @@
                 <a:ea typeface="Yu Gothic"/>
                 <a:cs typeface="Yu Gothic"/>
               </a:rPr>
-              <a:t>バッチは global batch。RL Token の 1 エポック = 3 環境のロールアウトと更新。RECAP の advantage は、merged（175.8 万フレーム）のうち 62.3 万サンプル分。「記録なし」は、ログに GPU 名がない</a:t>
+              <a:t>バッチは global batch（RL Token の Stage 2 は micro 128）。RL Token の 1 エポック = 3 環境のロールアウトと更新。RECAP の advantage は、merged（175.8 万フレーム）のうち 62.3 万サンプル分</a:t>
             </a:r>
           </a:p>
         </p:txBody>
@@ -31068,7 +31068,7 @@
                           <a:ea typeface="Yu Gothic"/>
                           <a:cs typeface="Yu Gothic"/>
                         </a:rPr>
-                        <a:t>軽量（約 5 MB）で、約 5 時間で学習。success_once 0.46 → 0.68</a:t>
+                        <a:t>軽量（約 5 MB）で、約 5 時間で学習。success_once 0.46 → 0.74</a:t>
                       </a:r>
                     </a:p>
                   </a:txBody>
@@ -31412,7 +31412,7 @@
                 <a:ea typeface="Yu Gothic"/>
                 <a:cs typeface="Yu Gothic"/>
               </a:rPr>
-              <a:t>（0.40 → 0.68）</a:t>
+              <a:t>（0.40 → 0.74）</a:t>
             </a:r>
           </a:p>
           <a:p>
@@ -31871,7 +31871,7 @@
                 <a:ea typeface="Yu Gothic"/>
                 <a:cs typeface="Yu Gothic"/>
               </a:rPr>
-              <a:t>0.68</a:t>
+              <a:t>0.74</a:t>
             </a:r>
           </a:p>
           <a:p>
@@ -31943,7 +31943,7 @@
                 <a:ea typeface="Yu Gothic"/>
                 <a:cs typeface="Yu Gothic"/>
               </a:rPr>
-              <a:t>→ 最良は RL Token（0.68）。RECAP・STEAM は、学習を進めて、同じ条件で再評価する</a:t>
+              <a:t>→ 最良は RL Token（0.74）。RECAP・STEAM は、学習を進めて、同じ条件で再評価する</a:t>
             </a:r>
           </a:p>
         </p:txBody>
@@ -34296,7 +34296,7 @@
                 <a:ea typeface="Yu Gothic"/>
                 <a:cs typeface="Yu Gothic"/>
               </a:rPr>
-              <a:t>: 主に </a:t>
+              <a:t>: RECAP は </a:t>
             </a:r>
             <a:r>
               <a:rPr sz="1700" b="1" i="0">
@@ -34307,18 +34307,29 @@
                 <a:ea typeface="Yu Gothic"/>
                 <a:cs typeface="Yu Gothic"/>
               </a:rPr>
+              <a:t>RTX 6000 Ada（48GB）</a:t>
+            </a:r>
+            <a:r>
+              <a:rPr sz="1700" b="0" i="0">
+                <a:solidFill>
+                  <a:srgbClr val="1A1A1A"/>
+                </a:solidFill>
+                <a:latin typeface="Yu Gothic"/>
+                <a:ea typeface="Yu Gothic"/>
+                <a:cs typeface="Yu Gothic"/>
+              </a:rPr>
+              <a:t>、それ以外は </a:t>
+            </a:r>
+            <a:r>
+              <a:rPr sz="1700" b="1" i="0">
+                <a:solidFill>
+                  <a:srgbClr val="1A1A1A"/>
+                </a:solidFill>
+                <a:latin typeface="Yu Gothic"/>
+                <a:ea typeface="Yu Gothic"/>
+                <a:cs typeface="Yu Gothic"/>
+              </a:rPr>
               <a:t>RTX A5000（24GB）</a:t>
-            </a:r>
-            <a:r>
-              <a:rPr sz="1700" b="0" i="0">
-                <a:solidFill>
-                  <a:srgbClr val="1A1A1A"/>
-                </a:solidFill>
-                <a:latin typeface="Yu Gothic"/>
-                <a:ea typeface="Yu Gothic"/>
-                <a:cs typeface="Yu Gothic"/>
-              </a:rPr>
-              <a:t>。RECAP の価値モデルと Step4 は RTX 6000 Ada（48GB）</a:t>
             </a:r>
           </a:p>
         </p:txBody>
